--- a/4_Presentation/Group 3.pptx
+++ b/4_Presentation/Group 3.pptx
@@ -10,10 +10,15 @@
     <p:sldId id="258" r:id="rId4"/>
     <p:sldId id="259" r:id="rId5"/>
     <p:sldId id="261" r:id="rId6"/>
-    <p:sldId id="260" r:id="rId7"/>
-    <p:sldId id="262" r:id="rId8"/>
-    <p:sldId id="263" r:id="rId9"/>
-    <p:sldId id="264" r:id="rId10"/>
+    <p:sldId id="267" r:id="rId7"/>
+    <p:sldId id="268" r:id="rId8"/>
+    <p:sldId id="269" r:id="rId9"/>
+    <p:sldId id="260" r:id="rId10"/>
+    <p:sldId id="266" r:id="rId11"/>
+    <p:sldId id="263" r:id="rId12"/>
+    <p:sldId id="264" r:id="rId13"/>
+    <p:sldId id="265" r:id="rId14"/>
+    <p:sldId id="262" r:id="rId15"/>
   </p:sldIdLst>
   <p:sldSz cx="12192000" cy="6858000"/>
   <p:notesSz cx="6858000" cy="9144000"/>
@@ -112,6 +117,11 @@
       </a:defRPr>
     </a:lvl9pPr>
   </p:defaultTextStyle>
+  <p:extLst>
+    <p:ext uri="{EFAFB233-063F-42B5-8137-9DF3F51BA10A}">
+      <p15:sldGuideLst xmlns:p15="http://schemas.microsoft.com/office/powerpoint/2012/main"/>
+    </p:ext>
+  </p:extLst>
 </p:presentation>
 </file>
 
@@ -264,7 +274,7 @@
           <a:p>
             <a:fld id="{CE90F81A-5165-4AE3-BE25-017052B850AB}" type="datetimeFigureOut">
               <a:rPr lang="de-DE" smtClean="0"/>
-              <a:t>28.06.2025</a:t>
+              <a:t>29.06.2025</a:t>
             </a:fld>
             <a:endParaRPr lang="de-DE"/>
           </a:p>
@@ -318,7 +328,7 @@
           <a:p>
             <a:fld id="{FEE63D0E-FFEF-43D1-BE35-64C33AF422FD}" type="slidenum">
               <a:rPr lang="de-DE" smtClean="0"/>
-              <a:t>‹#›</a:t>
+              <a:t>‹Nr.›</a:t>
             </a:fld>
             <a:endParaRPr lang="de-DE"/>
           </a:p>
@@ -464,7 +474,7 @@
           <a:p>
             <a:fld id="{CE90F81A-5165-4AE3-BE25-017052B850AB}" type="datetimeFigureOut">
               <a:rPr lang="de-DE" smtClean="0"/>
-              <a:t>28.06.2025</a:t>
+              <a:t>29.06.2025</a:t>
             </a:fld>
             <a:endParaRPr lang="de-DE"/>
           </a:p>
@@ -518,7 +528,7 @@
           <a:p>
             <a:fld id="{FEE63D0E-FFEF-43D1-BE35-64C33AF422FD}" type="slidenum">
               <a:rPr lang="de-DE" smtClean="0"/>
-              <a:t>‹#›</a:t>
+              <a:t>‹Nr.›</a:t>
             </a:fld>
             <a:endParaRPr lang="de-DE"/>
           </a:p>
@@ -674,7 +684,7 @@
           <a:p>
             <a:fld id="{CE90F81A-5165-4AE3-BE25-017052B850AB}" type="datetimeFigureOut">
               <a:rPr lang="de-DE" smtClean="0"/>
-              <a:t>28.06.2025</a:t>
+              <a:t>29.06.2025</a:t>
             </a:fld>
             <a:endParaRPr lang="de-DE"/>
           </a:p>
@@ -728,7 +738,7 @@
           <a:p>
             <a:fld id="{FEE63D0E-FFEF-43D1-BE35-64C33AF422FD}" type="slidenum">
               <a:rPr lang="de-DE" smtClean="0"/>
-              <a:t>‹#›</a:t>
+              <a:t>‹Nr.›</a:t>
             </a:fld>
             <a:endParaRPr lang="de-DE"/>
           </a:p>
@@ -874,7 +884,7 @@
           <a:p>
             <a:fld id="{CE90F81A-5165-4AE3-BE25-017052B850AB}" type="datetimeFigureOut">
               <a:rPr lang="de-DE" smtClean="0"/>
-              <a:t>28.06.2025</a:t>
+              <a:t>29.06.2025</a:t>
             </a:fld>
             <a:endParaRPr lang="de-DE"/>
           </a:p>
@@ -928,7 +938,7 @@
           <a:p>
             <a:fld id="{FEE63D0E-FFEF-43D1-BE35-64C33AF422FD}" type="slidenum">
               <a:rPr lang="de-DE" smtClean="0"/>
-              <a:t>‹#›</a:t>
+              <a:t>‹Nr.›</a:t>
             </a:fld>
             <a:endParaRPr lang="de-DE"/>
           </a:p>
@@ -1150,7 +1160,7 @@
           <a:p>
             <a:fld id="{CE90F81A-5165-4AE3-BE25-017052B850AB}" type="datetimeFigureOut">
               <a:rPr lang="de-DE" smtClean="0"/>
-              <a:t>28.06.2025</a:t>
+              <a:t>29.06.2025</a:t>
             </a:fld>
             <a:endParaRPr lang="de-DE"/>
           </a:p>
@@ -1204,7 +1214,7 @@
           <a:p>
             <a:fld id="{FEE63D0E-FFEF-43D1-BE35-64C33AF422FD}" type="slidenum">
               <a:rPr lang="de-DE" smtClean="0"/>
-              <a:t>‹#›</a:t>
+              <a:t>‹Nr.›</a:t>
             </a:fld>
             <a:endParaRPr lang="de-DE"/>
           </a:p>
@@ -1418,7 +1428,7 @@
           <a:p>
             <a:fld id="{CE90F81A-5165-4AE3-BE25-017052B850AB}" type="datetimeFigureOut">
               <a:rPr lang="de-DE" smtClean="0"/>
-              <a:t>28.06.2025</a:t>
+              <a:t>29.06.2025</a:t>
             </a:fld>
             <a:endParaRPr lang="de-DE"/>
           </a:p>
@@ -1472,7 +1482,7 @@
           <a:p>
             <a:fld id="{FEE63D0E-FFEF-43D1-BE35-64C33AF422FD}" type="slidenum">
               <a:rPr lang="de-DE" smtClean="0"/>
-              <a:t>‹#›</a:t>
+              <a:t>‹Nr.›</a:t>
             </a:fld>
             <a:endParaRPr lang="de-DE"/>
           </a:p>
@@ -1833,7 +1843,7 @@
           <a:p>
             <a:fld id="{CE90F81A-5165-4AE3-BE25-017052B850AB}" type="datetimeFigureOut">
               <a:rPr lang="de-DE" smtClean="0"/>
-              <a:t>28.06.2025</a:t>
+              <a:t>29.06.2025</a:t>
             </a:fld>
             <a:endParaRPr lang="de-DE"/>
           </a:p>
@@ -1887,7 +1897,7 @@
           <a:p>
             <a:fld id="{FEE63D0E-FFEF-43D1-BE35-64C33AF422FD}" type="slidenum">
               <a:rPr lang="de-DE" smtClean="0"/>
-              <a:t>‹#›</a:t>
+              <a:t>‹Nr.›</a:t>
             </a:fld>
             <a:endParaRPr lang="de-DE"/>
           </a:p>
@@ -1975,7 +1985,7 @@
           <a:p>
             <a:fld id="{CE90F81A-5165-4AE3-BE25-017052B850AB}" type="datetimeFigureOut">
               <a:rPr lang="de-DE" smtClean="0"/>
-              <a:t>28.06.2025</a:t>
+              <a:t>29.06.2025</a:t>
             </a:fld>
             <a:endParaRPr lang="de-DE"/>
           </a:p>
@@ -2029,7 +2039,7 @@
           <a:p>
             <a:fld id="{FEE63D0E-FFEF-43D1-BE35-64C33AF422FD}" type="slidenum">
               <a:rPr lang="de-DE" smtClean="0"/>
-              <a:t>‹#›</a:t>
+              <a:t>‹Nr.›</a:t>
             </a:fld>
             <a:endParaRPr lang="de-DE"/>
           </a:p>
@@ -2088,7 +2098,7 @@
           <a:p>
             <a:fld id="{CE90F81A-5165-4AE3-BE25-017052B850AB}" type="datetimeFigureOut">
               <a:rPr lang="de-DE" smtClean="0"/>
-              <a:t>28.06.2025</a:t>
+              <a:t>29.06.2025</a:t>
             </a:fld>
             <a:endParaRPr lang="de-DE"/>
           </a:p>
@@ -2142,7 +2152,7 @@
           <a:p>
             <a:fld id="{FEE63D0E-FFEF-43D1-BE35-64C33AF422FD}" type="slidenum">
               <a:rPr lang="de-DE" smtClean="0"/>
-              <a:t>‹#›</a:t>
+              <a:t>‹Nr.›</a:t>
             </a:fld>
             <a:endParaRPr lang="de-DE"/>
           </a:p>
@@ -2401,7 +2411,7 @@
           <a:p>
             <a:fld id="{CE90F81A-5165-4AE3-BE25-017052B850AB}" type="datetimeFigureOut">
               <a:rPr lang="de-DE" smtClean="0"/>
-              <a:t>28.06.2025</a:t>
+              <a:t>29.06.2025</a:t>
             </a:fld>
             <a:endParaRPr lang="de-DE"/>
           </a:p>
@@ -2455,7 +2465,7 @@
           <a:p>
             <a:fld id="{FEE63D0E-FFEF-43D1-BE35-64C33AF422FD}" type="slidenum">
               <a:rPr lang="de-DE" smtClean="0"/>
-              <a:t>‹#›</a:t>
+              <a:t>‹Nr.›</a:t>
             </a:fld>
             <a:endParaRPr lang="de-DE"/>
           </a:p>
@@ -2690,7 +2700,7 @@
           <a:p>
             <a:fld id="{CE90F81A-5165-4AE3-BE25-017052B850AB}" type="datetimeFigureOut">
               <a:rPr lang="de-DE" smtClean="0"/>
-              <a:t>28.06.2025</a:t>
+              <a:t>29.06.2025</a:t>
             </a:fld>
             <a:endParaRPr lang="de-DE"/>
           </a:p>
@@ -2744,7 +2754,7 @@
           <a:p>
             <a:fld id="{FEE63D0E-FFEF-43D1-BE35-64C33AF422FD}" type="slidenum">
               <a:rPr lang="de-DE" smtClean="0"/>
-              <a:t>‹#›</a:t>
+              <a:t>‹Nr.›</a:t>
             </a:fld>
             <a:endParaRPr lang="de-DE"/>
           </a:p>
@@ -2933,7 +2943,7 @@
           <a:p>
             <a:fld id="{CE90F81A-5165-4AE3-BE25-017052B850AB}" type="datetimeFigureOut">
               <a:rPr lang="de-DE" smtClean="0"/>
-              <a:t>28.06.2025</a:t>
+              <a:t>29.06.2025</a:t>
             </a:fld>
             <a:endParaRPr lang="de-DE"/>
           </a:p>
@@ -3023,7 +3033,7 @@
           <a:p>
             <a:fld id="{FEE63D0E-FFEF-43D1-BE35-64C33AF422FD}" type="slidenum">
               <a:rPr lang="de-DE" smtClean="0"/>
-              <a:t>‹#›</a:t>
+              <a:t>‹Nr.›</a:t>
             </a:fld>
             <a:endParaRPr lang="de-DE"/>
           </a:p>
@@ -3410,6 +3420,882 @@
   <p:clrMapOvr>
     <a:masterClrMapping/>
   </p:clrMapOvr>
+  <mc:AlternateContent xmlns:mc="http://schemas.openxmlformats.org/markup-compatibility/2006">
+    <mc:Choice xmlns:p14="http://schemas.microsoft.com/office/powerpoint/2010/main" Requires="p14">
+      <p:transition spd="med" p14:dur="700">
+        <p:fade/>
+      </p:transition>
+    </mc:Choice>
+    <mc:Fallback>
+      <p:transition spd="med">
+        <p:fade/>
+      </p:transition>
+    </mc:Fallback>
+  </mc:AlternateContent>
+</p:sld>
+</file>
+
+<file path=ppt/slides/slide10.xml><?xml version="1.0" encoding="utf-8"?>
+<p:sld xmlns:a="http://schemas.openxmlformats.org/drawingml/2006/main" xmlns:r="http://schemas.openxmlformats.org/officeDocument/2006/relationships" xmlns:p="http://schemas.openxmlformats.org/presentationml/2006/main">
+  <p:cSld>
+    <p:bg>
+      <p:bgPr>
+        <a:solidFill>
+          <a:schemeClr val="bg1">
+            <a:alpha val="0"/>
+          </a:schemeClr>
+        </a:solidFill>
+        <a:effectLst/>
+      </p:bgPr>
+    </p:bg>
+    <p:spTree>
+      <p:nvGrpSpPr>
+        <p:cNvPr id="1" name="">
+          <a:extLst>
+            <a:ext uri="{FF2B5EF4-FFF2-40B4-BE49-F238E27FC236}">
+              <a16:creationId xmlns:a16="http://schemas.microsoft.com/office/drawing/2014/main" id="{3DBD1E63-5B3F-2587-2ECC-07EE6B2AF7EB}"/>
+            </a:ext>
+          </a:extLst>
+        </p:cNvPr>
+        <p:cNvGrpSpPr/>
+        <p:nvPr/>
+      </p:nvGrpSpPr>
+      <p:grpSpPr>
+        <a:xfrm>
+          <a:off x="0" y="0"/>
+          <a:ext cx="0" cy="0"/>
+          <a:chOff x="0" y="0"/>
+          <a:chExt cx="0" cy="0"/>
+        </a:xfrm>
+      </p:grpSpPr>
+      <p:pic>
+        <p:nvPicPr>
+          <p:cNvPr id="7" name="Grafik 6">
+            <a:extLst>
+              <a:ext uri="{FF2B5EF4-FFF2-40B4-BE49-F238E27FC236}">
+                <a16:creationId xmlns:a16="http://schemas.microsoft.com/office/drawing/2014/main" id="{44F6CDAE-08BF-E64C-E50F-6340BA704422}"/>
+              </a:ext>
+            </a:extLst>
+          </p:cNvPr>
+          <p:cNvPicPr>
+            <a:picLocks noChangeAspect="1"/>
+          </p:cNvPicPr>
+          <p:nvPr/>
+        </p:nvPicPr>
+        <p:blipFill>
+          <a:blip r:embed="rId2">
+            <a:extLst>
+              <a:ext uri="{28A0092B-C50C-407E-A947-70E740481C1C}">
+                <a14:useLocalDpi xmlns:a14="http://schemas.microsoft.com/office/drawing/2010/main" val="0"/>
+              </a:ext>
+            </a:extLst>
+          </a:blip>
+          <a:srcRect/>
+          <a:stretch/>
+        </p:blipFill>
+        <p:spPr>
+          <a:xfrm>
+            <a:off x="493948" y="37154"/>
+            <a:ext cx="11210371" cy="6787529"/>
+          </a:xfrm>
+          <a:prstGeom prst="rect">
+            <a:avLst/>
+          </a:prstGeom>
+        </p:spPr>
+      </p:pic>
+      <p:sp>
+        <p:nvSpPr>
+          <p:cNvPr id="4" name="TextBox 4">
+            <a:extLst>
+              <a:ext uri="{FF2B5EF4-FFF2-40B4-BE49-F238E27FC236}">
+                <a16:creationId xmlns:a16="http://schemas.microsoft.com/office/drawing/2014/main" id="{C5634A94-AF14-F23F-C63C-4A4C613B1048}"/>
+              </a:ext>
+            </a:extLst>
+          </p:cNvPr>
+          <p:cNvSpPr txBox="1"/>
+          <p:nvPr/>
+        </p:nvSpPr>
+        <p:spPr>
+          <a:xfrm>
+            <a:off x="3524719" y="6581001"/>
+            <a:ext cx="5142562" cy="276999"/>
+          </a:xfrm>
+          <a:prstGeom prst="rect">
+            <a:avLst/>
+          </a:prstGeom>
+          <a:solidFill>
+            <a:schemeClr val="bg1"/>
+          </a:solidFill>
+          <a:ln w="12700">
+            <a:solidFill>
+              <a:srgbClr val="7030A0"/>
+            </a:solidFill>
+          </a:ln>
+        </p:spPr>
+        <p:txBody>
+          <a:bodyPr wrap="none" rtlCol="0">
+            <a:spAutoFit/>
+          </a:bodyPr>
+          <a:lstStyle/>
+          <a:p>
+            <a:r>
+              <a:rPr lang="en-GB" sz="1200" dirty="0">
+                <a:solidFill>
+                  <a:schemeClr val="bg1">
+                    <a:lumMod val="75000"/>
+                  </a:schemeClr>
+                </a:solidFill>
+              </a:rPr>
+              <a:t>Dataset Characteristics </a:t>
+            </a:r>
+            <a:r>
+              <a:rPr lang="en-GB" sz="1200" dirty="0">
+                <a:solidFill>
+                  <a:schemeClr val="bg1">
+                    <a:lumMod val="75000"/>
+                  </a:schemeClr>
+                </a:solidFill>
+                <a:latin typeface="Calibri" panose="020F0502020204030204" pitchFamily="34" charset="0"/>
+                <a:ea typeface="Calibri" panose="020F0502020204030204" pitchFamily="34" charset="0"/>
+                <a:cs typeface="Calibri" panose="020F0502020204030204" pitchFamily="34" charset="0"/>
+              </a:rPr>
+              <a:t>– Baseline Model – </a:t>
+            </a:r>
+            <a:r>
+              <a:rPr lang="en-GB" sz="1200" dirty="0">
+                <a:latin typeface="Calibri" panose="020F0502020204030204" pitchFamily="34" charset="0"/>
+                <a:ea typeface="Calibri" panose="020F0502020204030204" pitchFamily="34" charset="0"/>
+                <a:cs typeface="Calibri" panose="020F0502020204030204" pitchFamily="34" charset="0"/>
+              </a:rPr>
+              <a:t>Neural Net </a:t>
+            </a:r>
+            <a:r>
+              <a:rPr lang="en-GB" sz="1200" dirty="0">
+                <a:solidFill>
+                  <a:schemeClr val="bg1">
+                    <a:lumMod val="75000"/>
+                  </a:schemeClr>
+                </a:solidFill>
+                <a:latin typeface="Calibri" panose="020F0502020204030204" pitchFamily="34" charset="0"/>
+                <a:ea typeface="Calibri" panose="020F0502020204030204" pitchFamily="34" charset="0"/>
+                <a:cs typeface="Calibri" panose="020F0502020204030204" pitchFamily="34" charset="0"/>
+              </a:rPr>
+              <a:t>– Results – Challenges </a:t>
+            </a:r>
+            <a:endParaRPr lang="de-DE" sz="1200" dirty="0">
+              <a:solidFill>
+                <a:schemeClr val="bg1">
+                  <a:lumMod val="75000"/>
+                </a:schemeClr>
+              </a:solidFill>
+            </a:endParaRPr>
+          </a:p>
+        </p:txBody>
+      </p:sp>
+    </p:spTree>
+    <p:extLst>
+      <p:ext uri="{BB962C8B-B14F-4D97-AF65-F5344CB8AC3E}">
+        <p14:creationId xmlns:p14="http://schemas.microsoft.com/office/powerpoint/2010/main" val="2699491584"/>
+      </p:ext>
+    </p:extLst>
+  </p:cSld>
+  <p:clrMapOvr>
+    <a:masterClrMapping/>
+  </p:clrMapOvr>
+  <mc:AlternateContent xmlns:mc="http://schemas.openxmlformats.org/markup-compatibility/2006">
+    <mc:Choice xmlns:p14="http://schemas.microsoft.com/office/powerpoint/2010/main" Requires="p14">
+      <p:transition spd="med" p14:dur="700">
+        <p:fade/>
+      </p:transition>
+    </mc:Choice>
+    <mc:Fallback>
+      <p:transition spd="med">
+        <p:fade/>
+      </p:transition>
+    </mc:Fallback>
+  </mc:AlternateContent>
+</p:sld>
+</file>
+
+<file path=ppt/slides/slide11.xml><?xml version="1.0" encoding="utf-8"?>
+<p:sld xmlns:a="http://schemas.openxmlformats.org/drawingml/2006/main" xmlns:r="http://schemas.openxmlformats.org/officeDocument/2006/relationships" xmlns:p="http://schemas.openxmlformats.org/presentationml/2006/main">
+  <p:cSld>
+    <p:spTree>
+      <p:nvGrpSpPr>
+        <p:cNvPr id="1" name="">
+          <a:extLst>
+            <a:ext uri="{FF2B5EF4-FFF2-40B4-BE49-F238E27FC236}">
+              <a16:creationId xmlns:a16="http://schemas.microsoft.com/office/drawing/2014/main" id="{080F9B6C-ADC8-1490-E36A-62E075121EA4}"/>
+            </a:ext>
+          </a:extLst>
+        </p:cNvPr>
+        <p:cNvGrpSpPr/>
+        <p:nvPr/>
+      </p:nvGrpSpPr>
+      <p:grpSpPr>
+        <a:xfrm>
+          <a:off x="0" y="0"/>
+          <a:ext cx="0" cy="0"/>
+          <a:chOff x="0" y="0"/>
+          <a:chExt cx="0" cy="0"/>
+        </a:xfrm>
+      </p:grpSpPr>
+      <p:pic>
+        <p:nvPicPr>
+          <p:cNvPr id="4" name="Grafik 3" descr="Ein Bild, das Text, Screenshot, Diagramm, Reihe enthält.&#10;&#10;KI-generierte Inhalte können fehlerhaft sein.">
+            <a:extLst>
+              <a:ext uri="{FF2B5EF4-FFF2-40B4-BE49-F238E27FC236}">
+                <a16:creationId xmlns:a16="http://schemas.microsoft.com/office/drawing/2014/main" id="{42986ED7-7F81-65BF-4E62-4C08801FBF9C}"/>
+              </a:ext>
+            </a:extLst>
+          </p:cNvPr>
+          <p:cNvPicPr>
+            <a:picLocks noChangeAspect="1"/>
+          </p:cNvPicPr>
+          <p:nvPr/>
+        </p:nvPicPr>
+        <p:blipFill>
+          <a:blip r:embed="rId2">
+            <a:extLst>
+              <a:ext uri="{28A0092B-C50C-407E-A947-70E740481C1C}">
+                <a14:useLocalDpi xmlns:a14="http://schemas.microsoft.com/office/drawing/2010/main" val="0"/>
+              </a:ext>
+            </a:extLst>
+          </a:blip>
+          <a:stretch>
+            <a:fillRect/>
+          </a:stretch>
+        </p:blipFill>
+        <p:spPr>
+          <a:xfrm>
+            <a:off x="456605" y="470780"/>
+            <a:ext cx="11278789" cy="5639395"/>
+          </a:xfrm>
+          <a:prstGeom prst="rect">
+            <a:avLst/>
+          </a:prstGeom>
+        </p:spPr>
+      </p:pic>
+      <p:sp>
+        <p:nvSpPr>
+          <p:cNvPr id="7" name="TextBox 4">
+            <a:extLst>
+              <a:ext uri="{FF2B5EF4-FFF2-40B4-BE49-F238E27FC236}">
+                <a16:creationId xmlns:a16="http://schemas.microsoft.com/office/drawing/2014/main" id="{53BAA4C1-94F1-F42B-C394-4865B7E235D6}"/>
+              </a:ext>
+            </a:extLst>
+          </p:cNvPr>
+          <p:cNvSpPr txBox="1"/>
+          <p:nvPr/>
+        </p:nvSpPr>
+        <p:spPr>
+          <a:xfrm>
+            <a:off x="3524719" y="6581001"/>
+            <a:ext cx="5142562" cy="276999"/>
+          </a:xfrm>
+          <a:prstGeom prst="rect">
+            <a:avLst/>
+          </a:prstGeom>
+          <a:noFill/>
+        </p:spPr>
+        <p:txBody>
+          <a:bodyPr wrap="none" rtlCol="0">
+            <a:spAutoFit/>
+          </a:bodyPr>
+          <a:lstStyle/>
+          <a:p>
+            <a:r>
+              <a:rPr lang="en-GB" sz="1200" dirty="0">
+                <a:solidFill>
+                  <a:schemeClr val="bg1">
+                    <a:lumMod val="75000"/>
+                  </a:schemeClr>
+                </a:solidFill>
+              </a:rPr>
+              <a:t>Dataset Characteristics </a:t>
+            </a:r>
+            <a:r>
+              <a:rPr lang="en-GB" sz="1200" dirty="0">
+                <a:solidFill>
+                  <a:schemeClr val="bg1">
+                    <a:lumMod val="75000"/>
+                  </a:schemeClr>
+                </a:solidFill>
+                <a:latin typeface="Calibri" panose="020F0502020204030204" pitchFamily="34" charset="0"/>
+                <a:ea typeface="Calibri" panose="020F0502020204030204" pitchFamily="34" charset="0"/>
+                <a:cs typeface="Calibri" panose="020F0502020204030204" pitchFamily="34" charset="0"/>
+              </a:rPr>
+              <a:t>– Baseline Model – </a:t>
+            </a:r>
+            <a:r>
+              <a:rPr lang="en-GB" sz="1200" dirty="0">
+                <a:latin typeface="Calibri" panose="020F0502020204030204" pitchFamily="34" charset="0"/>
+                <a:ea typeface="Calibri" panose="020F0502020204030204" pitchFamily="34" charset="0"/>
+                <a:cs typeface="Calibri" panose="020F0502020204030204" pitchFamily="34" charset="0"/>
+              </a:rPr>
+              <a:t>Neural Net </a:t>
+            </a:r>
+            <a:r>
+              <a:rPr lang="en-GB" sz="1200" dirty="0">
+                <a:solidFill>
+                  <a:schemeClr val="bg1">
+                    <a:lumMod val="75000"/>
+                  </a:schemeClr>
+                </a:solidFill>
+                <a:latin typeface="Calibri" panose="020F0502020204030204" pitchFamily="34" charset="0"/>
+                <a:ea typeface="Calibri" panose="020F0502020204030204" pitchFamily="34" charset="0"/>
+                <a:cs typeface="Calibri" panose="020F0502020204030204" pitchFamily="34" charset="0"/>
+              </a:rPr>
+              <a:t>– Results – Challenges </a:t>
+            </a:r>
+            <a:endParaRPr lang="de-DE" sz="1200" dirty="0">
+              <a:solidFill>
+                <a:schemeClr val="bg1">
+                  <a:lumMod val="75000"/>
+                </a:schemeClr>
+              </a:solidFill>
+            </a:endParaRPr>
+          </a:p>
+        </p:txBody>
+      </p:sp>
+    </p:spTree>
+    <p:extLst>
+      <p:ext uri="{BB962C8B-B14F-4D97-AF65-F5344CB8AC3E}">
+        <p14:creationId xmlns:p14="http://schemas.microsoft.com/office/powerpoint/2010/main" val="1448705476"/>
+      </p:ext>
+    </p:extLst>
+  </p:cSld>
+  <p:clrMapOvr>
+    <a:masterClrMapping/>
+  </p:clrMapOvr>
+  <mc:AlternateContent xmlns:mc="http://schemas.openxmlformats.org/markup-compatibility/2006">
+    <mc:Choice xmlns:p14="http://schemas.microsoft.com/office/powerpoint/2010/main" Requires="p14">
+      <p:transition spd="med" p14:dur="700">
+        <p:fade/>
+      </p:transition>
+    </mc:Choice>
+    <mc:Fallback>
+      <p:transition spd="med">
+        <p:fade/>
+      </p:transition>
+    </mc:Fallback>
+  </mc:AlternateContent>
+</p:sld>
+</file>
+
+<file path=ppt/slides/slide12.xml><?xml version="1.0" encoding="utf-8"?>
+<p:sld xmlns:a="http://schemas.openxmlformats.org/drawingml/2006/main" xmlns:r="http://schemas.openxmlformats.org/officeDocument/2006/relationships" xmlns:p="http://schemas.openxmlformats.org/presentationml/2006/main">
+  <p:cSld>
+    <p:spTree>
+      <p:nvGrpSpPr>
+        <p:cNvPr id="1" name="">
+          <a:extLst>
+            <a:ext uri="{FF2B5EF4-FFF2-40B4-BE49-F238E27FC236}">
+              <a16:creationId xmlns:a16="http://schemas.microsoft.com/office/drawing/2014/main" id="{05D4050B-A8AD-D44C-BDB5-DAEF0748352F}"/>
+            </a:ext>
+          </a:extLst>
+        </p:cNvPr>
+        <p:cNvGrpSpPr/>
+        <p:nvPr/>
+      </p:nvGrpSpPr>
+      <p:grpSpPr>
+        <a:xfrm>
+          <a:off x="0" y="0"/>
+          <a:ext cx="0" cy="0"/>
+          <a:chOff x="0" y="0"/>
+          <a:chExt cx="0" cy="0"/>
+        </a:xfrm>
+      </p:grpSpPr>
+      <p:sp>
+        <p:nvSpPr>
+          <p:cNvPr id="5" name="TextBox 4">
+            <a:extLst>
+              <a:ext uri="{FF2B5EF4-FFF2-40B4-BE49-F238E27FC236}">
+                <a16:creationId xmlns:a16="http://schemas.microsoft.com/office/drawing/2014/main" id="{99A00947-4782-3164-3F43-60FB01F5A96C}"/>
+              </a:ext>
+            </a:extLst>
+          </p:cNvPr>
+          <p:cNvSpPr txBox="1"/>
+          <p:nvPr/>
+        </p:nvSpPr>
+        <p:spPr>
+          <a:xfrm>
+            <a:off x="3524719" y="6581001"/>
+            <a:ext cx="5142562" cy="276999"/>
+          </a:xfrm>
+          <a:prstGeom prst="rect">
+            <a:avLst/>
+          </a:prstGeom>
+          <a:noFill/>
+        </p:spPr>
+        <p:txBody>
+          <a:bodyPr wrap="none" rtlCol="0">
+            <a:spAutoFit/>
+          </a:bodyPr>
+          <a:lstStyle/>
+          <a:p>
+            <a:r>
+              <a:rPr lang="en-GB" sz="1200" dirty="0">
+                <a:solidFill>
+                  <a:schemeClr val="bg1">
+                    <a:lumMod val="75000"/>
+                  </a:schemeClr>
+                </a:solidFill>
+              </a:rPr>
+              <a:t>Dataset Characteristics </a:t>
+            </a:r>
+            <a:r>
+              <a:rPr lang="en-GB" sz="1200" dirty="0">
+                <a:solidFill>
+                  <a:schemeClr val="bg1">
+                    <a:lumMod val="75000"/>
+                  </a:schemeClr>
+                </a:solidFill>
+                <a:latin typeface="Calibri" panose="020F0502020204030204" pitchFamily="34" charset="0"/>
+                <a:ea typeface="Calibri" panose="020F0502020204030204" pitchFamily="34" charset="0"/>
+                <a:cs typeface="Calibri" panose="020F0502020204030204" pitchFamily="34" charset="0"/>
+              </a:rPr>
+              <a:t>– Baseline Model – Neural Net – </a:t>
+            </a:r>
+            <a:r>
+              <a:rPr lang="en-GB" sz="1200" dirty="0">
+                <a:latin typeface="Calibri" panose="020F0502020204030204" pitchFamily="34" charset="0"/>
+                <a:ea typeface="Calibri" panose="020F0502020204030204" pitchFamily="34" charset="0"/>
+                <a:cs typeface="Calibri" panose="020F0502020204030204" pitchFamily="34" charset="0"/>
+              </a:rPr>
+              <a:t>Results</a:t>
+            </a:r>
+            <a:r>
+              <a:rPr lang="en-GB" sz="1200" dirty="0">
+                <a:solidFill>
+                  <a:schemeClr val="bg1">
+                    <a:lumMod val="75000"/>
+                  </a:schemeClr>
+                </a:solidFill>
+                <a:latin typeface="Calibri" panose="020F0502020204030204" pitchFamily="34" charset="0"/>
+                <a:ea typeface="Calibri" panose="020F0502020204030204" pitchFamily="34" charset="0"/>
+                <a:cs typeface="Calibri" panose="020F0502020204030204" pitchFamily="34" charset="0"/>
+              </a:rPr>
+              <a:t> – Challenges </a:t>
+            </a:r>
+            <a:endParaRPr lang="de-DE" sz="1200" dirty="0">
+              <a:solidFill>
+                <a:schemeClr val="bg1">
+                  <a:lumMod val="75000"/>
+                </a:schemeClr>
+              </a:solidFill>
+            </a:endParaRPr>
+          </a:p>
+        </p:txBody>
+      </p:sp>
+      <p:pic>
+        <p:nvPicPr>
+          <p:cNvPr id="7" name="Grafik 6" descr="Ein Bild, das Text, Screenshot, Diagramm, Reihe enthält.&#10;&#10;KI-generierte Inhalte können fehlerhaft sein.">
+            <a:extLst>
+              <a:ext uri="{FF2B5EF4-FFF2-40B4-BE49-F238E27FC236}">
+                <a16:creationId xmlns:a16="http://schemas.microsoft.com/office/drawing/2014/main" id="{EA9C2870-49A5-522B-CF9B-96A71E25A2EE}"/>
+              </a:ext>
+            </a:extLst>
+          </p:cNvPr>
+          <p:cNvPicPr>
+            <a:picLocks noChangeAspect="1"/>
+          </p:cNvPicPr>
+          <p:nvPr/>
+        </p:nvPicPr>
+        <p:blipFill>
+          <a:blip r:embed="rId2">
+            <a:extLst>
+              <a:ext uri="{28A0092B-C50C-407E-A947-70E740481C1C}">
+                <a14:useLocalDpi xmlns:a14="http://schemas.microsoft.com/office/drawing/2010/main" val="0"/>
+              </a:ext>
+            </a:extLst>
+          </a:blip>
+          <a:srcRect b="3839"/>
+          <a:stretch>
+            <a:fillRect/>
+          </a:stretch>
+        </p:blipFill>
+        <p:spPr>
+          <a:xfrm>
+            <a:off x="389487" y="-3886"/>
+            <a:ext cx="11413025" cy="6584887"/>
+          </a:xfrm>
+          <a:prstGeom prst="rect">
+            <a:avLst/>
+          </a:prstGeom>
+        </p:spPr>
+      </p:pic>
+    </p:spTree>
+    <p:extLst>
+      <p:ext uri="{BB962C8B-B14F-4D97-AF65-F5344CB8AC3E}">
+        <p14:creationId xmlns:p14="http://schemas.microsoft.com/office/powerpoint/2010/main" val="2630275565"/>
+      </p:ext>
+    </p:extLst>
+  </p:cSld>
+  <p:clrMapOvr>
+    <a:masterClrMapping/>
+  </p:clrMapOvr>
+  <mc:AlternateContent xmlns:mc="http://schemas.openxmlformats.org/markup-compatibility/2006">
+    <mc:Choice xmlns:p14="http://schemas.microsoft.com/office/powerpoint/2010/main" Requires="p14">
+      <p:transition spd="med" p14:dur="700">
+        <p:fade/>
+      </p:transition>
+    </mc:Choice>
+    <mc:Fallback>
+      <p:transition spd="med">
+        <p:fade/>
+      </p:transition>
+    </mc:Fallback>
+  </mc:AlternateContent>
+</p:sld>
+</file>
+
+<file path=ppt/slides/slide13.xml><?xml version="1.0" encoding="utf-8"?>
+<p:sld xmlns:a="http://schemas.openxmlformats.org/drawingml/2006/main" xmlns:r="http://schemas.openxmlformats.org/officeDocument/2006/relationships" xmlns:p="http://schemas.openxmlformats.org/presentationml/2006/main">
+  <p:cSld>
+    <p:spTree>
+      <p:nvGrpSpPr>
+        <p:cNvPr id="1" name="">
+          <a:extLst>
+            <a:ext uri="{FF2B5EF4-FFF2-40B4-BE49-F238E27FC236}">
+              <a16:creationId xmlns:a16="http://schemas.microsoft.com/office/drawing/2014/main" id="{03B2FF10-0B82-01EB-A019-DEB90DCFCC46}"/>
+            </a:ext>
+          </a:extLst>
+        </p:cNvPr>
+        <p:cNvGrpSpPr/>
+        <p:nvPr/>
+      </p:nvGrpSpPr>
+      <p:grpSpPr>
+        <a:xfrm>
+          <a:off x="0" y="0"/>
+          <a:ext cx="0" cy="0"/>
+          <a:chOff x="0" y="0"/>
+          <a:chExt cx="0" cy="0"/>
+        </a:xfrm>
+      </p:grpSpPr>
+      <p:sp>
+        <p:nvSpPr>
+          <p:cNvPr id="5" name="TextBox 4">
+            <a:extLst>
+              <a:ext uri="{FF2B5EF4-FFF2-40B4-BE49-F238E27FC236}">
+                <a16:creationId xmlns:a16="http://schemas.microsoft.com/office/drawing/2014/main" id="{CEA4ED14-29E3-5C36-80A2-23319535962A}"/>
+              </a:ext>
+            </a:extLst>
+          </p:cNvPr>
+          <p:cNvSpPr txBox="1"/>
+          <p:nvPr/>
+        </p:nvSpPr>
+        <p:spPr>
+          <a:xfrm>
+            <a:off x="3524719" y="6581001"/>
+            <a:ext cx="5142562" cy="276999"/>
+          </a:xfrm>
+          <a:prstGeom prst="rect">
+            <a:avLst/>
+          </a:prstGeom>
+          <a:noFill/>
+        </p:spPr>
+        <p:txBody>
+          <a:bodyPr wrap="none" rtlCol="0">
+            <a:spAutoFit/>
+          </a:bodyPr>
+          <a:lstStyle/>
+          <a:p>
+            <a:r>
+              <a:rPr lang="en-GB" sz="1200" dirty="0">
+                <a:solidFill>
+                  <a:schemeClr val="bg1">
+                    <a:lumMod val="75000"/>
+                  </a:schemeClr>
+                </a:solidFill>
+              </a:rPr>
+              <a:t>Dataset Characteristics </a:t>
+            </a:r>
+            <a:r>
+              <a:rPr lang="en-GB" sz="1200" dirty="0">
+                <a:solidFill>
+                  <a:schemeClr val="bg1">
+                    <a:lumMod val="75000"/>
+                  </a:schemeClr>
+                </a:solidFill>
+                <a:latin typeface="Calibri" panose="020F0502020204030204" pitchFamily="34" charset="0"/>
+                <a:ea typeface="Calibri" panose="020F0502020204030204" pitchFamily="34" charset="0"/>
+                <a:cs typeface="Calibri" panose="020F0502020204030204" pitchFamily="34" charset="0"/>
+              </a:rPr>
+              <a:t>– Baseline Model – Neural Net – </a:t>
+            </a:r>
+            <a:r>
+              <a:rPr lang="en-GB" sz="1200" dirty="0">
+                <a:latin typeface="Calibri" panose="020F0502020204030204" pitchFamily="34" charset="0"/>
+                <a:ea typeface="Calibri" panose="020F0502020204030204" pitchFamily="34" charset="0"/>
+                <a:cs typeface="Calibri" panose="020F0502020204030204" pitchFamily="34" charset="0"/>
+              </a:rPr>
+              <a:t>Results</a:t>
+            </a:r>
+            <a:r>
+              <a:rPr lang="en-GB" sz="1200" dirty="0">
+                <a:solidFill>
+                  <a:schemeClr val="bg1">
+                    <a:lumMod val="75000"/>
+                  </a:schemeClr>
+                </a:solidFill>
+                <a:latin typeface="Calibri" panose="020F0502020204030204" pitchFamily="34" charset="0"/>
+                <a:ea typeface="Calibri" panose="020F0502020204030204" pitchFamily="34" charset="0"/>
+                <a:cs typeface="Calibri" panose="020F0502020204030204" pitchFamily="34" charset="0"/>
+              </a:rPr>
+              <a:t> – Challenges </a:t>
+            </a:r>
+            <a:endParaRPr lang="de-DE" sz="1200" dirty="0">
+              <a:solidFill>
+                <a:schemeClr val="bg1">
+                  <a:lumMod val="75000"/>
+                </a:schemeClr>
+              </a:solidFill>
+            </a:endParaRPr>
+          </a:p>
+        </p:txBody>
+      </p:sp>
+      <p:pic>
+        <p:nvPicPr>
+          <p:cNvPr id="3" name="Grafik 2" descr="Ein Bild, das Text, Screenshot, Diagramm, Reihe enthält.&#10;&#10;KI-generierte Inhalte können fehlerhaft sein.">
+            <a:extLst>
+              <a:ext uri="{FF2B5EF4-FFF2-40B4-BE49-F238E27FC236}">
+                <a16:creationId xmlns:a16="http://schemas.microsoft.com/office/drawing/2014/main" id="{760DB1F9-1757-7989-082A-781614D707C6}"/>
+              </a:ext>
+            </a:extLst>
+          </p:cNvPr>
+          <p:cNvPicPr>
+            <a:picLocks noChangeAspect="1"/>
+          </p:cNvPicPr>
+          <p:nvPr/>
+        </p:nvPicPr>
+        <p:blipFill>
+          <a:blip r:embed="rId2">
+            <a:extLst>
+              <a:ext uri="{28A0092B-C50C-407E-A947-70E740481C1C}">
+                <a14:useLocalDpi xmlns:a14="http://schemas.microsoft.com/office/drawing/2010/main" val="0"/>
+              </a:ext>
+            </a:extLst>
+          </a:blip>
+          <a:srcRect b="3456"/>
+          <a:stretch>
+            <a:fillRect/>
+          </a:stretch>
+        </p:blipFill>
+        <p:spPr>
+          <a:xfrm>
+            <a:off x="250257" y="0"/>
+            <a:ext cx="11691486" cy="6581001"/>
+          </a:xfrm>
+          <a:prstGeom prst="rect">
+            <a:avLst/>
+          </a:prstGeom>
+        </p:spPr>
+      </p:pic>
+    </p:spTree>
+    <p:extLst>
+      <p:ext uri="{BB962C8B-B14F-4D97-AF65-F5344CB8AC3E}">
+        <p14:creationId xmlns:p14="http://schemas.microsoft.com/office/powerpoint/2010/main" val="845119171"/>
+      </p:ext>
+    </p:extLst>
+  </p:cSld>
+  <p:clrMapOvr>
+    <a:masterClrMapping/>
+  </p:clrMapOvr>
+  <mc:AlternateContent xmlns:mc="http://schemas.openxmlformats.org/markup-compatibility/2006">
+    <mc:Choice xmlns:p14="http://schemas.microsoft.com/office/powerpoint/2010/main" Requires="p14">
+      <p:transition spd="med" p14:dur="700">
+        <p:fade/>
+      </p:transition>
+    </mc:Choice>
+    <mc:Fallback>
+      <p:transition spd="med">
+        <p:fade/>
+      </p:transition>
+    </mc:Fallback>
+  </mc:AlternateContent>
+</p:sld>
+</file>
+
+<file path=ppt/slides/slide14.xml><?xml version="1.0" encoding="utf-8"?>
+<p:sld xmlns:a="http://schemas.openxmlformats.org/drawingml/2006/main" xmlns:r="http://schemas.openxmlformats.org/officeDocument/2006/relationships" xmlns:p="http://schemas.openxmlformats.org/presentationml/2006/main" show="0">
+  <p:cSld>
+    <p:bg>
+      <p:bgPr>
+        <a:solidFill>
+          <a:schemeClr val="bg1">
+            <a:alpha val="0"/>
+          </a:schemeClr>
+        </a:solidFill>
+        <a:effectLst/>
+      </p:bgPr>
+    </p:bg>
+    <p:spTree>
+      <p:nvGrpSpPr>
+        <p:cNvPr id="1" name="">
+          <a:extLst>
+            <a:ext uri="{FF2B5EF4-FFF2-40B4-BE49-F238E27FC236}">
+              <a16:creationId xmlns:a16="http://schemas.microsoft.com/office/drawing/2014/main" id="{9DF07184-045D-5BD1-0E31-4047B75F7005}"/>
+            </a:ext>
+          </a:extLst>
+        </p:cNvPr>
+        <p:cNvGrpSpPr/>
+        <p:nvPr/>
+      </p:nvGrpSpPr>
+      <p:grpSpPr>
+        <a:xfrm>
+          <a:off x="0" y="0"/>
+          <a:ext cx="0" cy="0"/>
+          <a:chOff x="0" y="0"/>
+          <a:chExt cx="0" cy="0"/>
+        </a:xfrm>
+      </p:grpSpPr>
+      <p:pic>
+        <p:nvPicPr>
+          <p:cNvPr id="7" name="Grafik 6">
+            <a:extLst>
+              <a:ext uri="{FF2B5EF4-FFF2-40B4-BE49-F238E27FC236}">
+                <a16:creationId xmlns:a16="http://schemas.microsoft.com/office/drawing/2014/main" id="{F0A034E7-CA71-E98C-AD52-B30D33186752}"/>
+              </a:ext>
+            </a:extLst>
+          </p:cNvPr>
+          <p:cNvPicPr>
+            <a:picLocks noChangeAspect="1"/>
+          </p:cNvPicPr>
+          <p:nvPr/>
+        </p:nvPicPr>
+        <p:blipFill>
+          <a:blip r:embed="rId2">
+            <a:extLst>
+              <a:ext uri="{28A0092B-C50C-407E-A947-70E740481C1C}">
+                <a14:useLocalDpi xmlns:a14="http://schemas.microsoft.com/office/drawing/2010/main" val="0"/>
+              </a:ext>
+            </a:extLst>
+          </a:blip>
+          <a:srcRect/>
+          <a:stretch/>
+        </p:blipFill>
+        <p:spPr>
+          <a:xfrm>
+            <a:off x="493948" y="0"/>
+            <a:ext cx="11210371" cy="6861838"/>
+          </a:xfrm>
+          <a:prstGeom prst="rect">
+            <a:avLst/>
+          </a:prstGeom>
+        </p:spPr>
+      </p:pic>
+      <p:sp>
+        <p:nvSpPr>
+          <p:cNvPr id="4" name="TextBox 4">
+            <a:extLst>
+              <a:ext uri="{FF2B5EF4-FFF2-40B4-BE49-F238E27FC236}">
+                <a16:creationId xmlns:a16="http://schemas.microsoft.com/office/drawing/2014/main" id="{27971549-C282-0F3B-E751-188C3029DF94}"/>
+              </a:ext>
+            </a:extLst>
+          </p:cNvPr>
+          <p:cNvSpPr txBox="1"/>
+          <p:nvPr/>
+        </p:nvSpPr>
+        <p:spPr>
+          <a:xfrm>
+            <a:off x="3524719" y="6581001"/>
+            <a:ext cx="5142562" cy="276999"/>
+          </a:xfrm>
+          <a:prstGeom prst="rect">
+            <a:avLst/>
+          </a:prstGeom>
+          <a:solidFill>
+            <a:schemeClr val="bg1"/>
+          </a:solidFill>
+          <a:ln w="12700">
+            <a:solidFill>
+              <a:srgbClr val="7030A0"/>
+            </a:solidFill>
+          </a:ln>
+        </p:spPr>
+        <p:txBody>
+          <a:bodyPr wrap="none" rtlCol="0">
+            <a:spAutoFit/>
+          </a:bodyPr>
+          <a:lstStyle/>
+          <a:p>
+            <a:r>
+              <a:rPr lang="en-GB" sz="1200" dirty="0">
+                <a:solidFill>
+                  <a:schemeClr val="bg1">
+                    <a:lumMod val="75000"/>
+                  </a:schemeClr>
+                </a:solidFill>
+              </a:rPr>
+              <a:t>Dataset Characteristics </a:t>
+            </a:r>
+            <a:r>
+              <a:rPr lang="en-GB" sz="1200" dirty="0">
+                <a:solidFill>
+                  <a:schemeClr val="bg1">
+                    <a:lumMod val="75000"/>
+                  </a:schemeClr>
+                </a:solidFill>
+                <a:latin typeface="Calibri" panose="020F0502020204030204" pitchFamily="34" charset="0"/>
+                <a:ea typeface="Calibri" panose="020F0502020204030204" pitchFamily="34" charset="0"/>
+                <a:cs typeface="Calibri" panose="020F0502020204030204" pitchFamily="34" charset="0"/>
+              </a:rPr>
+              <a:t>– Baseline Model – </a:t>
+            </a:r>
+            <a:r>
+              <a:rPr lang="en-GB" sz="1200" dirty="0">
+                <a:latin typeface="Calibri" panose="020F0502020204030204" pitchFamily="34" charset="0"/>
+                <a:ea typeface="Calibri" panose="020F0502020204030204" pitchFamily="34" charset="0"/>
+                <a:cs typeface="Calibri" panose="020F0502020204030204" pitchFamily="34" charset="0"/>
+              </a:rPr>
+              <a:t>Neural Net </a:t>
+            </a:r>
+            <a:r>
+              <a:rPr lang="en-GB" sz="1200" dirty="0">
+                <a:solidFill>
+                  <a:schemeClr val="bg1">
+                    <a:lumMod val="75000"/>
+                  </a:schemeClr>
+                </a:solidFill>
+                <a:latin typeface="Calibri" panose="020F0502020204030204" pitchFamily="34" charset="0"/>
+                <a:ea typeface="Calibri" panose="020F0502020204030204" pitchFamily="34" charset="0"/>
+                <a:cs typeface="Calibri" panose="020F0502020204030204" pitchFamily="34" charset="0"/>
+              </a:rPr>
+              <a:t>– Results – Challenges </a:t>
+            </a:r>
+            <a:endParaRPr lang="de-DE" sz="1200" dirty="0">
+              <a:solidFill>
+                <a:schemeClr val="bg1">
+                  <a:lumMod val="75000"/>
+                </a:schemeClr>
+              </a:solidFill>
+            </a:endParaRPr>
+          </a:p>
+        </p:txBody>
+      </p:sp>
+    </p:spTree>
+    <p:extLst>
+      <p:ext uri="{BB962C8B-B14F-4D97-AF65-F5344CB8AC3E}">
+        <p14:creationId xmlns:p14="http://schemas.microsoft.com/office/powerpoint/2010/main" val="1731321607"/>
+      </p:ext>
+    </p:extLst>
+  </p:cSld>
+  <p:clrMapOvr>
+    <a:masterClrMapping/>
+  </p:clrMapOvr>
+  <mc:AlternateContent xmlns:mc="http://schemas.openxmlformats.org/markup-compatibility/2006">
+    <mc:Choice xmlns:p14="http://schemas.microsoft.com/office/powerpoint/2010/main" Requires="p14">
+      <p:transition spd="med" p14:dur="700">
+        <p:fade/>
+      </p:transition>
+    </mc:Choice>
+    <mc:Fallback>
+      <p:transition spd="med">
+        <p:fade/>
+      </p:transition>
+    </mc:Fallback>
+  </mc:AlternateContent>
 </p:sld>
 </file>
 
@@ -3486,10 +4372,10 @@
       </p:sp>
       <p:sp>
         <p:nvSpPr>
-          <p:cNvPr id="5" name="TextBox 4">
-            <a:extLst>
-              <a:ext uri="{FF2B5EF4-FFF2-40B4-BE49-F238E27FC236}">
-                <a16:creationId xmlns:a16="http://schemas.microsoft.com/office/drawing/2014/main" id="{B2474956-0C2B-4D23-E369-9FFF043B6503}"/>
+          <p:cNvPr id="2" name="TextBox 4">
+            <a:extLst>
+              <a:ext uri="{FF2B5EF4-FFF2-40B4-BE49-F238E27FC236}">
+                <a16:creationId xmlns:a16="http://schemas.microsoft.com/office/drawing/2014/main" id="{7284C433-A643-362B-43A1-BEE4815EE244}"/>
               </a:ext>
             </a:extLst>
           </p:cNvPr>
@@ -3498,8 +4384,8 @@
         </p:nvSpPr>
         <p:spPr>
           <a:xfrm>
-            <a:off x="1956390" y="6488668"/>
-            <a:ext cx="7658250" cy="369332"/>
+            <a:off x="3524719" y="6581001"/>
+            <a:ext cx="5142562" cy="276999"/>
           </a:xfrm>
           <a:prstGeom prst="rect">
             <a:avLst/>
@@ -3513,19 +4399,17 @@
           <a:lstStyle/>
           <a:p>
             <a:r>
-              <a:rPr lang="en-GB" dirty="0"/>
-              <a:t>Dataset </a:t>
-            </a:r>
-            <a:r>
-              <a:rPr lang="en-GB" dirty="0" err="1"/>
-              <a:t>Characterisitcs</a:t>
-            </a:r>
-            <a:r>
-              <a:rPr lang="en-GB" dirty="0"/>
-              <a:t> </a:t>
-            </a:r>
-            <a:r>
-              <a:rPr lang="en-GB" dirty="0">
+              <a:rPr lang="en-GB" sz="1200" dirty="0">
+                <a:solidFill>
+                  <a:schemeClr val="bg1">
+                    <a:lumMod val="75000"/>
+                  </a:schemeClr>
+                </a:solidFill>
+              </a:rPr>
+              <a:t>Dataset Characteristics </a:t>
+            </a:r>
+            <a:r>
+              <a:rPr lang="en-GB" sz="1200" dirty="0">
                 <a:solidFill>
                   <a:schemeClr val="bg1">
                     <a:lumMod val="75000"/>
@@ -3535,9 +4419,30 @@
                 <a:ea typeface="Calibri" panose="020F0502020204030204" pitchFamily="34" charset="0"/>
                 <a:cs typeface="Calibri" panose="020F0502020204030204" pitchFamily="34" charset="0"/>
               </a:rPr>
-              <a:t>– Baseline Model  - Neural Net – Results - Challenges</a:t>
-            </a:r>
-            <a:endParaRPr lang="de-DE" dirty="0">
+              <a:t>– </a:t>
+            </a:r>
+            <a:r>
+              <a:rPr lang="en-GB" sz="1200" dirty="0">
+                <a:latin typeface="Calibri" panose="020F0502020204030204" pitchFamily="34" charset="0"/>
+                <a:ea typeface="Calibri" panose="020F0502020204030204" pitchFamily="34" charset="0"/>
+                <a:cs typeface="Calibri" panose="020F0502020204030204" pitchFamily="34" charset="0"/>
+              </a:rPr>
+              <a:t>Baseline Model </a:t>
+            </a:r>
+            <a:r>
+              <a:rPr lang="en-GB" sz="1200" dirty="0">
+                <a:solidFill>
+                  <a:schemeClr val="bg1">
+                    <a:lumMod val="75000"/>
+                  </a:schemeClr>
+                </a:solidFill>
+                <a:latin typeface="Calibri" panose="020F0502020204030204" pitchFamily="34" charset="0"/>
+                <a:ea typeface="Calibri" panose="020F0502020204030204" pitchFamily="34" charset="0"/>
+                <a:cs typeface="Calibri" panose="020F0502020204030204" pitchFamily="34" charset="0"/>
+              </a:rPr>
+              <a:t>– Neural Net – Results – Challenges </a:t>
+            </a:r>
+            <a:endParaRPr lang="de-DE" sz="1200" dirty="0">
               <a:solidFill>
                 <a:schemeClr val="bg1">
                   <a:lumMod val="75000"/>
@@ -3557,6 +4462,18 @@
   <p:clrMapOvr>
     <a:masterClrMapping/>
   </p:clrMapOvr>
+  <mc:AlternateContent xmlns:mc="http://schemas.openxmlformats.org/markup-compatibility/2006">
+    <mc:Choice xmlns:p14="http://schemas.microsoft.com/office/powerpoint/2010/main" Requires="p14">
+      <p:transition spd="med" p14:dur="700">
+        <p:fade/>
+      </p:transition>
+    </mc:Choice>
+    <mc:Fallback>
+      <p:transition spd="med">
+        <p:fade/>
+      </p:transition>
+    </mc:Fallback>
+  </mc:AlternateContent>
 </p:sld>
 </file>
 
@@ -3639,10 +4556,10 @@
       </p:sp>
       <p:sp>
         <p:nvSpPr>
-          <p:cNvPr id="5" name="TextBox 4">
-            <a:extLst>
-              <a:ext uri="{FF2B5EF4-FFF2-40B4-BE49-F238E27FC236}">
-                <a16:creationId xmlns:a16="http://schemas.microsoft.com/office/drawing/2014/main" id="{4968A402-3C51-5977-433A-C6146720D926}"/>
+          <p:cNvPr id="2" name="TextBox 4">
+            <a:extLst>
+              <a:ext uri="{FF2B5EF4-FFF2-40B4-BE49-F238E27FC236}">
+                <a16:creationId xmlns:a16="http://schemas.microsoft.com/office/drawing/2014/main" id="{D32F0C9B-5AD0-7CD7-5317-05DE6D327F90}"/>
               </a:ext>
             </a:extLst>
           </p:cNvPr>
@@ -3651,8 +4568,8 @@
         </p:nvSpPr>
         <p:spPr>
           <a:xfrm>
-            <a:off x="1956390" y="6488668"/>
-            <a:ext cx="7658250" cy="369332"/>
+            <a:off x="3524719" y="6581001"/>
+            <a:ext cx="5142562" cy="276999"/>
           </a:xfrm>
           <a:prstGeom prst="rect">
             <a:avLst/>
@@ -3666,19 +4583,17 @@
           <a:lstStyle/>
           <a:p>
             <a:r>
-              <a:rPr lang="en-GB" dirty="0"/>
-              <a:t>Dataset </a:t>
-            </a:r>
-            <a:r>
-              <a:rPr lang="en-GB" dirty="0" err="1"/>
-              <a:t>Characterisitcs</a:t>
-            </a:r>
-            <a:r>
-              <a:rPr lang="en-GB" dirty="0"/>
-              <a:t> </a:t>
-            </a:r>
-            <a:r>
-              <a:rPr lang="en-GB" dirty="0">
+              <a:rPr lang="en-GB" sz="1200" dirty="0">
+                <a:solidFill>
+                  <a:schemeClr val="bg1">
+                    <a:lumMod val="75000"/>
+                  </a:schemeClr>
+                </a:solidFill>
+              </a:rPr>
+              <a:t>Dataset Characteristics </a:t>
+            </a:r>
+            <a:r>
+              <a:rPr lang="en-GB" sz="1200" dirty="0">
                 <a:solidFill>
                   <a:schemeClr val="bg1">
                     <a:lumMod val="75000"/>
@@ -3688,9 +4603,30 @@
                 <a:ea typeface="Calibri" panose="020F0502020204030204" pitchFamily="34" charset="0"/>
                 <a:cs typeface="Calibri" panose="020F0502020204030204" pitchFamily="34" charset="0"/>
               </a:rPr>
-              <a:t>– Baseline Model  - Neural Net – Results - Challenges</a:t>
-            </a:r>
-            <a:endParaRPr lang="de-DE" dirty="0">
+              <a:t>– </a:t>
+            </a:r>
+            <a:r>
+              <a:rPr lang="en-GB" sz="1200" dirty="0">
+                <a:latin typeface="Calibri" panose="020F0502020204030204" pitchFamily="34" charset="0"/>
+                <a:ea typeface="Calibri" panose="020F0502020204030204" pitchFamily="34" charset="0"/>
+                <a:cs typeface="Calibri" panose="020F0502020204030204" pitchFamily="34" charset="0"/>
+              </a:rPr>
+              <a:t>Baseline Model </a:t>
+            </a:r>
+            <a:r>
+              <a:rPr lang="en-GB" sz="1200" dirty="0">
+                <a:solidFill>
+                  <a:schemeClr val="bg1">
+                    <a:lumMod val="75000"/>
+                  </a:schemeClr>
+                </a:solidFill>
+                <a:latin typeface="Calibri" panose="020F0502020204030204" pitchFamily="34" charset="0"/>
+                <a:ea typeface="Calibri" panose="020F0502020204030204" pitchFamily="34" charset="0"/>
+                <a:cs typeface="Calibri" panose="020F0502020204030204" pitchFamily="34" charset="0"/>
+              </a:rPr>
+              <a:t>– Neural Net – Results – Challenges </a:t>
+            </a:r>
+            <a:endParaRPr lang="de-DE" sz="1200" dirty="0">
               <a:solidFill>
                 <a:schemeClr val="bg1">
                   <a:lumMod val="75000"/>
@@ -3710,6 +4646,18 @@
   <p:clrMapOvr>
     <a:masterClrMapping/>
   </p:clrMapOvr>
+  <mc:AlternateContent xmlns:mc="http://schemas.openxmlformats.org/markup-compatibility/2006">
+    <mc:Choice xmlns:p14="http://schemas.microsoft.com/office/powerpoint/2010/main" Requires="p14">
+      <p:transition spd="med" p14:dur="700">
+        <p:fade/>
+      </p:transition>
+    </mc:Choice>
+    <mc:Fallback>
+      <p:transition spd="med">
+        <p:fade/>
+      </p:transition>
+    </mc:Fallback>
+  </mc:AlternateContent>
 </p:sld>
 </file>
 
@@ -3792,10 +4740,10 @@
       </p:sp>
       <p:sp>
         <p:nvSpPr>
-          <p:cNvPr id="5" name="TextBox 4">
-            <a:extLst>
-              <a:ext uri="{FF2B5EF4-FFF2-40B4-BE49-F238E27FC236}">
-                <a16:creationId xmlns:a16="http://schemas.microsoft.com/office/drawing/2014/main" id="{44DFD86E-3298-C365-6D01-4A2C6EB98EBF}"/>
+          <p:cNvPr id="2" name="TextBox 4">
+            <a:extLst>
+              <a:ext uri="{FF2B5EF4-FFF2-40B4-BE49-F238E27FC236}">
+                <a16:creationId xmlns:a16="http://schemas.microsoft.com/office/drawing/2014/main" id="{251B45FD-C30C-AA69-D916-A3EDB4DCA828}"/>
               </a:ext>
             </a:extLst>
           </p:cNvPr>
@@ -3804,8 +4752,8 @@
         </p:nvSpPr>
         <p:spPr>
           <a:xfrm>
-            <a:off x="1956390" y="6488668"/>
-            <a:ext cx="7658250" cy="369332"/>
+            <a:off x="3524719" y="6581001"/>
+            <a:ext cx="5142562" cy="276999"/>
           </a:xfrm>
           <a:prstGeom prst="rect">
             <a:avLst/>
@@ -3819,19 +4767,17 @@
           <a:lstStyle/>
           <a:p>
             <a:r>
-              <a:rPr lang="en-GB" dirty="0"/>
-              <a:t>Dataset </a:t>
-            </a:r>
-            <a:r>
-              <a:rPr lang="en-GB" dirty="0" err="1"/>
-              <a:t>Characterisitcs</a:t>
-            </a:r>
-            <a:r>
-              <a:rPr lang="en-GB" dirty="0"/>
-              <a:t> </a:t>
-            </a:r>
-            <a:r>
-              <a:rPr lang="en-GB" dirty="0">
+              <a:rPr lang="en-GB" sz="1200" dirty="0">
+                <a:solidFill>
+                  <a:schemeClr val="bg1">
+                    <a:lumMod val="75000"/>
+                  </a:schemeClr>
+                </a:solidFill>
+              </a:rPr>
+              <a:t>Dataset Characteristics </a:t>
+            </a:r>
+            <a:r>
+              <a:rPr lang="en-GB" sz="1200" dirty="0">
                 <a:solidFill>
                   <a:schemeClr val="bg1">
                     <a:lumMod val="75000"/>
@@ -3841,9 +4787,30 @@
                 <a:ea typeface="Calibri" panose="020F0502020204030204" pitchFamily="34" charset="0"/>
                 <a:cs typeface="Calibri" panose="020F0502020204030204" pitchFamily="34" charset="0"/>
               </a:rPr>
-              <a:t>– Baseline Model  - Neural Net – Results - Challenges</a:t>
-            </a:r>
-            <a:endParaRPr lang="de-DE" dirty="0">
+              <a:t>– </a:t>
+            </a:r>
+            <a:r>
+              <a:rPr lang="en-GB" sz="1200" dirty="0">
+                <a:latin typeface="Calibri" panose="020F0502020204030204" pitchFamily="34" charset="0"/>
+                <a:ea typeface="Calibri" panose="020F0502020204030204" pitchFamily="34" charset="0"/>
+                <a:cs typeface="Calibri" panose="020F0502020204030204" pitchFamily="34" charset="0"/>
+              </a:rPr>
+              <a:t>Baseline Model </a:t>
+            </a:r>
+            <a:r>
+              <a:rPr lang="en-GB" sz="1200" dirty="0">
+                <a:solidFill>
+                  <a:schemeClr val="bg1">
+                    <a:lumMod val="75000"/>
+                  </a:schemeClr>
+                </a:solidFill>
+                <a:latin typeface="Calibri" panose="020F0502020204030204" pitchFamily="34" charset="0"/>
+                <a:ea typeface="Calibri" panose="020F0502020204030204" pitchFamily="34" charset="0"/>
+                <a:cs typeface="Calibri" panose="020F0502020204030204" pitchFamily="34" charset="0"/>
+              </a:rPr>
+              <a:t>– Neural Net – Results – Challenges </a:t>
+            </a:r>
+            <a:endParaRPr lang="de-DE" sz="1200" dirty="0">
               <a:solidFill>
                 <a:schemeClr val="bg1">
                   <a:lumMod val="75000"/>
@@ -3863,6 +4830,18 @@
   <p:clrMapOvr>
     <a:masterClrMapping/>
   </p:clrMapOvr>
+  <mc:AlternateContent xmlns:mc="http://schemas.openxmlformats.org/markup-compatibility/2006">
+    <mc:Choice xmlns:p14="http://schemas.microsoft.com/office/powerpoint/2010/main" Requires="p14">
+      <p:transition spd="med" p14:dur="700">
+        <p:fade/>
+      </p:transition>
+    </mc:Choice>
+    <mc:Fallback>
+      <p:transition spd="med">
+        <p:fade/>
+      </p:transition>
+    </mc:Fallback>
+  </mc:AlternateContent>
 </p:sld>
 </file>
 
@@ -3891,10 +4870,10 @@
       </p:grpSpPr>
       <p:sp>
         <p:nvSpPr>
-          <p:cNvPr id="5" name="TextBox 4">
-            <a:extLst>
-              <a:ext uri="{FF2B5EF4-FFF2-40B4-BE49-F238E27FC236}">
-                <a16:creationId xmlns:a16="http://schemas.microsoft.com/office/drawing/2014/main" id="{7F681F1B-6249-99D2-4493-8A0C80F632F1}"/>
+          <p:cNvPr id="2" name="TextBox 4">
+            <a:extLst>
+              <a:ext uri="{FF2B5EF4-FFF2-40B4-BE49-F238E27FC236}">
+                <a16:creationId xmlns:a16="http://schemas.microsoft.com/office/drawing/2014/main" id="{C52FA7C5-2C8C-0FB1-20E6-5020C270A7A9}"/>
               </a:ext>
             </a:extLst>
           </p:cNvPr>
@@ -3903,8 +4882,8 @@
         </p:nvSpPr>
         <p:spPr>
           <a:xfrm>
-            <a:off x="1956390" y="6488668"/>
-            <a:ext cx="7658250" cy="369332"/>
+            <a:off x="3524719" y="6581001"/>
+            <a:ext cx="5142562" cy="276999"/>
           </a:xfrm>
           <a:prstGeom prst="rect">
             <a:avLst/>
@@ -3918,19 +4897,11 @@
           <a:lstStyle/>
           <a:p>
             <a:r>
-              <a:rPr lang="en-GB" dirty="0"/>
-              <a:t>Dataset </a:t>
-            </a:r>
-            <a:r>
-              <a:rPr lang="en-GB" dirty="0" err="1"/>
-              <a:t>Characterisitcs</a:t>
-            </a:r>
-            <a:r>
-              <a:rPr lang="en-GB" dirty="0"/>
-              <a:t> </a:t>
-            </a:r>
-            <a:r>
-              <a:rPr lang="en-GB" dirty="0">
+              <a:rPr lang="en-GB" sz="1200" dirty="0"/>
+              <a:t>Dataset Characteristics </a:t>
+            </a:r>
+            <a:r>
+              <a:rPr lang="en-GB" sz="1200" dirty="0">
                 <a:solidFill>
                   <a:schemeClr val="bg1">
                     <a:lumMod val="75000"/>
@@ -3940,9 +4911,9 @@
                 <a:ea typeface="Calibri" panose="020F0502020204030204" pitchFamily="34" charset="0"/>
                 <a:cs typeface="Calibri" panose="020F0502020204030204" pitchFamily="34" charset="0"/>
               </a:rPr>
-              <a:t>– Baseline Model  - Neural Net – Results - Challenges</a:t>
-            </a:r>
-            <a:endParaRPr lang="de-DE" dirty="0">
+              <a:t>– Baseline Model – Neural Net – Results – Challenges </a:t>
+            </a:r>
+            <a:endParaRPr lang="de-DE" sz="1200" dirty="0">
               <a:solidFill>
                 <a:schemeClr val="bg1">
                   <a:lumMod val="75000"/>
@@ -3954,10 +4925,10 @@
       </p:sp>
       <p:pic>
         <p:nvPicPr>
-          <p:cNvPr id="8" name="Picture 7">
-            <a:extLst>
-              <a:ext uri="{FF2B5EF4-FFF2-40B4-BE49-F238E27FC236}">
-                <a16:creationId xmlns:a16="http://schemas.microsoft.com/office/drawing/2014/main" id="{F7BCD4D6-994C-310B-85F9-BFD9F986307A}"/>
+          <p:cNvPr id="15" name="Grafik 14" descr="Ein Bild, das Text, Screenshot, parallel, Reihe enthält.&#10;&#10;KI-generierte Inhalte können fehlerhaft sein.">
+            <a:extLst>
+              <a:ext uri="{FF2B5EF4-FFF2-40B4-BE49-F238E27FC236}">
+                <a16:creationId xmlns:a16="http://schemas.microsoft.com/office/drawing/2014/main" id="{34505F1F-E139-8D93-4BB1-701B4A3A66E8}"/>
               </a:ext>
             </a:extLst>
           </p:cNvPr>
@@ -3974,51 +4945,14 @@
               </a:ext>
             </a:extLst>
           </a:blip>
-          <a:srcRect/>
-          <a:stretch/>
+          <a:stretch>
+            <a:fillRect/>
+          </a:stretch>
         </p:blipFill>
         <p:spPr>
           <a:xfrm>
-            <a:off x="1884556" y="-680207"/>
-            <a:ext cx="9439507" cy="7317583"/>
-          </a:xfrm>
-          <a:prstGeom prst="rect">
-            <a:avLst/>
-          </a:prstGeom>
-          <a:ln w="19050">
-            <a:noFill/>
-          </a:ln>
-        </p:spPr>
-      </p:pic>
-      <p:pic>
-        <p:nvPicPr>
-          <p:cNvPr id="10" name="Picture 9">
-            <a:extLst>
-              <a:ext uri="{FF2B5EF4-FFF2-40B4-BE49-F238E27FC236}">
-                <a16:creationId xmlns:a16="http://schemas.microsoft.com/office/drawing/2014/main" id="{4B70DF3E-0458-94D9-7D2D-DC7701FDB57D}"/>
-              </a:ext>
-            </a:extLst>
-          </p:cNvPr>
-          <p:cNvPicPr>
-            <a:picLocks noChangeAspect="1"/>
-          </p:cNvPicPr>
-          <p:nvPr/>
-        </p:nvPicPr>
-        <p:blipFill>
-          <a:blip r:embed="rId3">
-            <a:extLst>
-              <a:ext uri="{28A0092B-C50C-407E-A947-70E740481C1C}">
-                <a14:useLocalDpi xmlns:a14="http://schemas.microsoft.com/office/drawing/2010/main" val="0"/>
-              </a:ext>
-            </a:extLst>
-          </a:blip>
-          <a:srcRect/>
-          <a:stretch/>
-        </p:blipFill>
-        <p:spPr>
-          <a:xfrm>
-            <a:off x="370358" y="140530"/>
-            <a:ext cx="9757541" cy="6271404"/>
+            <a:off x="946653" y="0"/>
+            <a:ext cx="10298694" cy="6619216"/>
           </a:xfrm>
           <a:prstGeom prst="rect">
             <a:avLst/>
@@ -4035,6 +4969,639 @@
   <p:clrMapOvr>
     <a:masterClrMapping/>
   </p:clrMapOvr>
+  <mc:AlternateContent xmlns:mc="http://schemas.openxmlformats.org/markup-compatibility/2006">
+    <mc:Choice xmlns:p14="http://schemas.microsoft.com/office/powerpoint/2010/main" Requires="p14">
+      <p:transition spd="med" p14:dur="700">
+        <p:fade/>
+      </p:transition>
+    </mc:Choice>
+    <mc:Fallback>
+      <p:transition spd="med">
+        <p:fade/>
+      </p:transition>
+    </mc:Fallback>
+  </mc:AlternateContent>
+</p:sld>
+</file>
+
+<file path=ppt/slides/slide6.xml><?xml version="1.0" encoding="utf-8"?>
+<p:sld xmlns:a="http://schemas.openxmlformats.org/drawingml/2006/main" xmlns:r="http://schemas.openxmlformats.org/officeDocument/2006/relationships" xmlns:p="http://schemas.openxmlformats.org/presentationml/2006/main">
+  <p:cSld>
+    <p:spTree>
+      <p:nvGrpSpPr>
+        <p:cNvPr id="1" name="">
+          <a:extLst>
+            <a:ext uri="{FF2B5EF4-FFF2-40B4-BE49-F238E27FC236}">
+              <a16:creationId xmlns:a16="http://schemas.microsoft.com/office/drawing/2014/main" id="{19BA4A2B-A563-8D25-F91D-B6DE7CF03D39}"/>
+            </a:ext>
+          </a:extLst>
+        </p:cNvPr>
+        <p:cNvGrpSpPr/>
+        <p:nvPr/>
+      </p:nvGrpSpPr>
+      <p:grpSpPr>
+        <a:xfrm>
+          <a:off x="0" y="0"/>
+          <a:ext cx="0" cy="0"/>
+          <a:chOff x="0" y="0"/>
+          <a:chExt cx="0" cy="0"/>
+        </a:xfrm>
+      </p:grpSpPr>
+      <p:sp>
+        <p:nvSpPr>
+          <p:cNvPr id="2" name="TextBox 4">
+            <a:extLst>
+              <a:ext uri="{FF2B5EF4-FFF2-40B4-BE49-F238E27FC236}">
+                <a16:creationId xmlns:a16="http://schemas.microsoft.com/office/drawing/2014/main" id="{0C0CFE69-0BC5-10DD-F40C-9F5B47C9DB68}"/>
+              </a:ext>
+            </a:extLst>
+          </p:cNvPr>
+          <p:cNvSpPr txBox="1"/>
+          <p:nvPr/>
+        </p:nvSpPr>
+        <p:spPr>
+          <a:xfrm>
+            <a:off x="3524719" y="6581001"/>
+            <a:ext cx="5142562" cy="276999"/>
+          </a:xfrm>
+          <a:prstGeom prst="rect">
+            <a:avLst/>
+          </a:prstGeom>
+          <a:noFill/>
+        </p:spPr>
+        <p:txBody>
+          <a:bodyPr wrap="none" rtlCol="0">
+            <a:spAutoFit/>
+          </a:bodyPr>
+          <a:lstStyle/>
+          <a:p>
+            <a:r>
+              <a:rPr lang="en-GB" sz="1200" dirty="0"/>
+              <a:t>Dataset Characteristics </a:t>
+            </a:r>
+            <a:r>
+              <a:rPr lang="en-GB" sz="1200" dirty="0">
+                <a:solidFill>
+                  <a:schemeClr val="bg1">
+                    <a:lumMod val="75000"/>
+                  </a:schemeClr>
+                </a:solidFill>
+                <a:latin typeface="Calibri" panose="020F0502020204030204" pitchFamily="34" charset="0"/>
+                <a:ea typeface="Calibri" panose="020F0502020204030204" pitchFamily="34" charset="0"/>
+                <a:cs typeface="Calibri" panose="020F0502020204030204" pitchFamily="34" charset="0"/>
+              </a:rPr>
+              <a:t>– Baseline Model – Neural Net – Results – Challenges </a:t>
+            </a:r>
+            <a:endParaRPr lang="de-DE" sz="1200" dirty="0">
+              <a:solidFill>
+                <a:schemeClr val="bg1">
+                  <a:lumMod val="75000"/>
+                </a:schemeClr>
+              </a:solidFill>
+            </a:endParaRPr>
+          </a:p>
+        </p:txBody>
+      </p:sp>
+      <p:pic>
+        <p:nvPicPr>
+          <p:cNvPr id="15" name="Grafik 14">
+            <a:extLst>
+              <a:ext uri="{FF2B5EF4-FFF2-40B4-BE49-F238E27FC236}">
+                <a16:creationId xmlns:a16="http://schemas.microsoft.com/office/drawing/2014/main" id="{74329CC1-3E24-3DC9-0709-E6D9815CDA4A}"/>
+              </a:ext>
+            </a:extLst>
+          </p:cNvPr>
+          <p:cNvPicPr>
+            <a:picLocks noChangeAspect="1"/>
+          </p:cNvPicPr>
+          <p:nvPr/>
+        </p:nvPicPr>
+        <p:blipFill>
+          <a:blip r:embed="rId2">
+            <a:extLst>
+              <a:ext uri="{28A0092B-C50C-407E-A947-70E740481C1C}">
+                <a14:useLocalDpi xmlns:a14="http://schemas.microsoft.com/office/drawing/2010/main" val="0"/>
+              </a:ext>
+            </a:extLst>
+          </a:blip>
+          <a:srcRect/>
+          <a:stretch/>
+        </p:blipFill>
+        <p:spPr>
+          <a:xfrm>
+            <a:off x="946653" y="66555"/>
+            <a:ext cx="10298694" cy="6486105"/>
+          </a:xfrm>
+          <a:prstGeom prst="rect">
+            <a:avLst/>
+          </a:prstGeom>
+        </p:spPr>
+      </p:pic>
+    </p:spTree>
+    <p:extLst>
+      <p:ext uri="{BB962C8B-B14F-4D97-AF65-F5344CB8AC3E}">
+        <p14:creationId xmlns:p14="http://schemas.microsoft.com/office/powerpoint/2010/main" val="480653654"/>
+      </p:ext>
+    </p:extLst>
+  </p:cSld>
+  <p:clrMapOvr>
+    <a:masterClrMapping/>
+  </p:clrMapOvr>
+  <mc:AlternateContent xmlns:mc="http://schemas.openxmlformats.org/markup-compatibility/2006">
+    <mc:Choice xmlns:p14="http://schemas.microsoft.com/office/powerpoint/2010/main" Requires="p14">
+      <p:transition spd="med" p14:dur="700">
+        <p:fade/>
+      </p:transition>
+    </mc:Choice>
+    <mc:Fallback>
+      <p:transition spd="med">
+        <p:fade/>
+      </p:transition>
+    </mc:Fallback>
+  </mc:AlternateContent>
+</p:sld>
+</file>
+
+<file path=ppt/slides/slide7.xml><?xml version="1.0" encoding="utf-8"?>
+<p:sld xmlns:a="http://schemas.openxmlformats.org/drawingml/2006/main" xmlns:r="http://schemas.openxmlformats.org/officeDocument/2006/relationships" xmlns:p="http://schemas.openxmlformats.org/presentationml/2006/main">
+  <p:cSld>
+    <p:spTree>
+      <p:nvGrpSpPr>
+        <p:cNvPr id="1" name="">
+          <a:extLst>
+            <a:ext uri="{FF2B5EF4-FFF2-40B4-BE49-F238E27FC236}">
+              <a16:creationId xmlns:a16="http://schemas.microsoft.com/office/drawing/2014/main" id="{5A2B9FEE-4B08-6D63-A4FF-795B22CCFECF}"/>
+            </a:ext>
+          </a:extLst>
+        </p:cNvPr>
+        <p:cNvGrpSpPr/>
+        <p:nvPr/>
+      </p:nvGrpSpPr>
+      <p:grpSpPr>
+        <a:xfrm>
+          <a:off x="0" y="0"/>
+          <a:ext cx="0" cy="0"/>
+          <a:chOff x="0" y="0"/>
+          <a:chExt cx="0" cy="0"/>
+        </a:xfrm>
+      </p:grpSpPr>
+      <p:sp>
+        <p:nvSpPr>
+          <p:cNvPr id="2" name="TextBox 4">
+            <a:extLst>
+              <a:ext uri="{FF2B5EF4-FFF2-40B4-BE49-F238E27FC236}">
+                <a16:creationId xmlns:a16="http://schemas.microsoft.com/office/drawing/2014/main" id="{861558DA-2C5D-8E45-448B-CFFE926B267E}"/>
+              </a:ext>
+            </a:extLst>
+          </p:cNvPr>
+          <p:cNvSpPr txBox="1"/>
+          <p:nvPr/>
+        </p:nvSpPr>
+        <p:spPr>
+          <a:xfrm>
+            <a:off x="3524719" y="6581001"/>
+            <a:ext cx="5142562" cy="276999"/>
+          </a:xfrm>
+          <a:prstGeom prst="rect">
+            <a:avLst/>
+          </a:prstGeom>
+          <a:noFill/>
+        </p:spPr>
+        <p:txBody>
+          <a:bodyPr wrap="none" rtlCol="0">
+            <a:spAutoFit/>
+          </a:bodyPr>
+          <a:lstStyle/>
+          <a:p>
+            <a:r>
+              <a:rPr lang="en-GB" sz="1200" dirty="0"/>
+              <a:t>Dataset Characteristics </a:t>
+            </a:r>
+            <a:r>
+              <a:rPr lang="en-GB" sz="1200" dirty="0">
+                <a:solidFill>
+                  <a:schemeClr val="bg1">
+                    <a:lumMod val="75000"/>
+                  </a:schemeClr>
+                </a:solidFill>
+                <a:latin typeface="Calibri" panose="020F0502020204030204" pitchFamily="34" charset="0"/>
+                <a:ea typeface="Calibri" panose="020F0502020204030204" pitchFamily="34" charset="0"/>
+                <a:cs typeface="Calibri" panose="020F0502020204030204" pitchFamily="34" charset="0"/>
+              </a:rPr>
+              <a:t>– Baseline Model – Neural Net – Results – Challenges </a:t>
+            </a:r>
+            <a:endParaRPr lang="de-DE" sz="1200" dirty="0">
+              <a:solidFill>
+                <a:schemeClr val="bg1">
+                  <a:lumMod val="75000"/>
+                </a:schemeClr>
+              </a:solidFill>
+            </a:endParaRPr>
+          </a:p>
+        </p:txBody>
+      </p:sp>
+      <p:pic>
+        <p:nvPicPr>
+          <p:cNvPr id="15" name="Grafik 14">
+            <a:extLst>
+              <a:ext uri="{FF2B5EF4-FFF2-40B4-BE49-F238E27FC236}">
+                <a16:creationId xmlns:a16="http://schemas.microsoft.com/office/drawing/2014/main" id="{363918E8-E9CF-0F0E-2A7E-23840F8B1020}"/>
+              </a:ext>
+            </a:extLst>
+          </p:cNvPr>
+          <p:cNvPicPr>
+            <a:picLocks noChangeAspect="1"/>
+          </p:cNvPicPr>
+          <p:nvPr/>
+        </p:nvPicPr>
+        <p:blipFill>
+          <a:blip r:embed="rId2">
+            <a:extLst>
+              <a:ext uri="{28A0092B-C50C-407E-A947-70E740481C1C}">
+                <a14:useLocalDpi xmlns:a14="http://schemas.microsoft.com/office/drawing/2010/main" val="0"/>
+              </a:ext>
+            </a:extLst>
+          </a:blip>
+          <a:srcRect/>
+          <a:stretch/>
+        </p:blipFill>
+        <p:spPr>
+          <a:xfrm>
+            <a:off x="1156670" y="66555"/>
+            <a:ext cx="9878660" cy="6486105"/>
+          </a:xfrm>
+          <a:prstGeom prst="rect">
+            <a:avLst/>
+          </a:prstGeom>
+        </p:spPr>
+      </p:pic>
+    </p:spTree>
+    <p:extLst>
+      <p:ext uri="{BB962C8B-B14F-4D97-AF65-F5344CB8AC3E}">
+        <p14:creationId xmlns:p14="http://schemas.microsoft.com/office/powerpoint/2010/main" val="571893914"/>
+      </p:ext>
+    </p:extLst>
+  </p:cSld>
+  <p:clrMapOvr>
+    <a:masterClrMapping/>
+  </p:clrMapOvr>
+  <mc:AlternateContent xmlns:mc="http://schemas.openxmlformats.org/markup-compatibility/2006">
+    <mc:Choice xmlns:p14="http://schemas.microsoft.com/office/powerpoint/2010/main" Requires="p14">
+      <p:transition spd="med" p14:dur="700">
+        <p:fade/>
+      </p:transition>
+    </mc:Choice>
+    <mc:Fallback>
+      <p:transition spd="med">
+        <p:fade/>
+      </p:transition>
+    </mc:Fallback>
+  </mc:AlternateContent>
+</p:sld>
+</file>
+
+<file path=ppt/slides/slide8.xml><?xml version="1.0" encoding="utf-8"?>
+<p:sld xmlns:a="http://schemas.openxmlformats.org/drawingml/2006/main" xmlns:r="http://schemas.openxmlformats.org/officeDocument/2006/relationships" xmlns:p="http://schemas.openxmlformats.org/presentationml/2006/main">
+  <p:cSld>
+    <p:spTree>
+      <p:nvGrpSpPr>
+        <p:cNvPr id="1" name="">
+          <a:extLst>
+            <a:ext uri="{FF2B5EF4-FFF2-40B4-BE49-F238E27FC236}">
+              <a16:creationId xmlns:a16="http://schemas.microsoft.com/office/drawing/2014/main" id="{DB45A4B5-0372-3F67-AC94-F9B608C8F329}"/>
+            </a:ext>
+          </a:extLst>
+        </p:cNvPr>
+        <p:cNvGrpSpPr/>
+        <p:nvPr/>
+      </p:nvGrpSpPr>
+      <p:grpSpPr>
+        <a:xfrm>
+          <a:off x="0" y="0"/>
+          <a:ext cx="0" cy="0"/>
+          <a:chOff x="0" y="0"/>
+          <a:chExt cx="0" cy="0"/>
+        </a:xfrm>
+      </p:grpSpPr>
+      <p:sp>
+        <p:nvSpPr>
+          <p:cNvPr id="2" name="TextBox 4">
+            <a:extLst>
+              <a:ext uri="{FF2B5EF4-FFF2-40B4-BE49-F238E27FC236}">
+                <a16:creationId xmlns:a16="http://schemas.microsoft.com/office/drawing/2014/main" id="{E7BCC090-C36A-89F7-6166-983AA319B98C}"/>
+              </a:ext>
+            </a:extLst>
+          </p:cNvPr>
+          <p:cNvSpPr txBox="1"/>
+          <p:nvPr/>
+        </p:nvSpPr>
+        <p:spPr>
+          <a:xfrm>
+            <a:off x="3524719" y="6581001"/>
+            <a:ext cx="5142562" cy="276999"/>
+          </a:xfrm>
+          <a:prstGeom prst="rect">
+            <a:avLst/>
+          </a:prstGeom>
+          <a:noFill/>
+        </p:spPr>
+        <p:txBody>
+          <a:bodyPr wrap="none" rtlCol="0">
+            <a:spAutoFit/>
+          </a:bodyPr>
+          <a:lstStyle/>
+          <a:p>
+            <a:r>
+              <a:rPr lang="en-GB" sz="1200" dirty="0"/>
+              <a:t>Dataset Characteristics </a:t>
+            </a:r>
+            <a:r>
+              <a:rPr lang="en-GB" sz="1200" dirty="0">
+                <a:solidFill>
+                  <a:schemeClr val="bg1">
+                    <a:lumMod val="75000"/>
+                  </a:schemeClr>
+                </a:solidFill>
+                <a:latin typeface="Calibri" panose="020F0502020204030204" pitchFamily="34" charset="0"/>
+                <a:ea typeface="Calibri" panose="020F0502020204030204" pitchFamily="34" charset="0"/>
+                <a:cs typeface="Calibri" panose="020F0502020204030204" pitchFamily="34" charset="0"/>
+              </a:rPr>
+              <a:t>– Baseline Model – Neural Net – Results – Challenges </a:t>
+            </a:r>
+            <a:endParaRPr lang="de-DE" sz="1200" dirty="0">
+              <a:solidFill>
+                <a:schemeClr val="bg1">
+                  <a:lumMod val="75000"/>
+                </a:schemeClr>
+              </a:solidFill>
+            </a:endParaRPr>
+          </a:p>
+        </p:txBody>
+      </p:sp>
+      <p:pic>
+        <p:nvPicPr>
+          <p:cNvPr id="15" name="Grafik 14">
+            <a:extLst>
+              <a:ext uri="{FF2B5EF4-FFF2-40B4-BE49-F238E27FC236}">
+                <a16:creationId xmlns:a16="http://schemas.microsoft.com/office/drawing/2014/main" id="{D65F4FD0-79E5-DD61-39EE-6E078DDBB00D}"/>
+              </a:ext>
+            </a:extLst>
+          </p:cNvPr>
+          <p:cNvPicPr>
+            <a:picLocks noChangeAspect="1"/>
+          </p:cNvPicPr>
+          <p:nvPr/>
+        </p:nvPicPr>
+        <p:blipFill>
+          <a:blip r:embed="rId2">
+            <a:extLst>
+              <a:ext uri="{28A0092B-C50C-407E-A947-70E740481C1C}">
+                <a14:useLocalDpi xmlns:a14="http://schemas.microsoft.com/office/drawing/2010/main" val="0"/>
+              </a:ext>
+            </a:extLst>
+          </a:blip>
+          <a:srcRect/>
+          <a:stretch/>
+        </p:blipFill>
+        <p:spPr>
+          <a:xfrm>
+            <a:off x="908911" y="0"/>
+            <a:ext cx="10374177" cy="6612217"/>
+          </a:xfrm>
+          <a:prstGeom prst="rect">
+            <a:avLst/>
+          </a:prstGeom>
+        </p:spPr>
+      </p:pic>
+    </p:spTree>
+    <p:extLst>
+      <p:ext uri="{BB962C8B-B14F-4D97-AF65-F5344CB8AC3E}">
+        <p14:creationId xmlns:p14="http://schemas.microsoft.com/office/powerpoint/2010/main" val="1854528685"/>
+      </p:ext>
+    </p:extLst>
+  </p:cSld>
+  <p:clrMapOvr>
+    <a:masterClrMapping/>
+  </p:clrMapOvr>
+  <mc:AlternateContent xmlns:mc="http://schemas.openxmlformats.org/markup-compatibility/2006">
+    <mc:Choice xmlns:p14="http://schemas.microsoft.com/office/powerpoint/2010/main" Requires="p14">
+      <p:transition spd="med" p14:dur="700">
+        <p:fade/>
+      </p:transition>
+    </mc:Choice>
+    <mc:Fallback>
+      <p:transition spd="med">
+        <p:fade/>
+      </p:transition>
+    </mc:Fallback>
+  </mc:AlternateContent>
+</p:sld>
+</file>
+
+<file path=ppt/slides/slide9.xml><?xml version="1.0" encoding="utf-8"?>
+<p:sld xmlns:a="http://schemas.openxmlformats.org/drawingml/2006/main" xmlns:r="http://schemas.openxmlformats.org/officeDocument/2006/relationships" xmlns:p="http://schemas.openxmlformats.org/presentationml/2006/main">
+  <p:cSld>
+    <p:spTree>
+      <p:nvGrpSpPr>
+        <p:cNvPr id="1" name="">
+          <a:extLst>
+            <a:ext uri="{FF2B5EF4-FFF2-40B4-BE49-F238E27FC236}">
+              <a16:creationId xmlns:a16="http://schemas.microsoft.com/office/drawing/2014/main" id="{ACAFECE9-6D9E-9E37-8E1A-D2A31B44E809}"/>
+            </a:ext>
+          </a:extLst>
+        </p:cNvPr>
+        <p:cNvGrpSpPr/>
+        <p:nvPr/>
+      </p:nvGrpSpPr>
+      <p:grpSpPr>
+        <a:xfrm>
+          <a:off x="0" y="0"/>
+          <a:ext cx="0" cy="0"/>
+          <a:chOff x="0" y="0"/>
+          <a:chExt cx="0" cy="0"/>
+        </a:xfrm>
+      </p:grpSpPr>
+      <p:pic>
+        <p:nvPicPr>
+          <p:cNvPr id="8" name="Picture 7" descr="A screenshot of a computer&#10;&#10;AI-generated content may be incorrect.">
+            <a:extLst>
+              <a:ext uri="{FF2B5EF4-FFF2-40B4-BE49-F238E27FC236}">
+                <a16:creationId xmlns:a16="http://schemas.microsoft.com/office/drawing/2014/main" id="{826FC09F-B539-64E9-5BFB-2E19E12C3B3E}"/>
+              </a:ext>
+            </a:extLst>
+          </p:cNvPr>
+          <p:cNvPicPr>
+            <a:picLocks noChangeAspect="1"/>
+          </p:cNvPicPr>
+          <p:nvPr/>
+        </p:nvPicPr>
+        <p:blipFill>
+          <a:blip r:embed="rId2">
+            <a:extLst>
+              <a:ext uri="{28A0092B-C50C-407E-A947-70E740481C1C}">
+                <a14:useLocalDpi xmlns:a14="http://schemas.microsoft.com/office/drawing/2010/main" val="0"/>
+              </a:ext>
+            </a:extLst>
+          </a:blip>
+          <a:stretch>
+            <a:fillRect/>
+          </a:stretch>
+        </p:blipFill>
+        <p:spPr>
+          <a:xfrm>
+            <a:off x="1613129" y="2057399"/>
+            <a:ext cx="8813341" cy="2748605"/>
+          </a:xfrm>
+          <a:prstGeom prst="rect">
+            <a:avLst/>
+          </a:prstGeom>
+          <a:ln w="19050">
+            <a:solidFill>
+              <a:schemeClr val="tx1"/>
+            </a:solidFill>
+          </a:ln>
+        </p:spPr>
+      </p:pic>
+      <p:pic>
+        <p:nvPicPr>
+          <p:cNvPr id="10" name="Picture 9" descr="A screenshot of a document&#10;&#10;AI-generated content may be incorrect.">
+            <a:extLst>
+              <a:ext uri="{FF2B5EF4-FFF2-40B4-BE49-F238E27FC236}">
+                <a16:creationId xmlns:a16="http://schemas.microsoft.com/office/drawing/2014/main" id="{A8BF8A03-866A-5220-CC7A-B17CC0387014}"/>
+              </a:ext>
+            </a:extLst>
+          </p:cNvPr>
+          <p:cNvPicPr>
+            <a:picLocks noChangeAspect="1"/>
+          </p:cNvPicPr>
+          <p:nvPr/>
+        </p:nvPicPr>
+        <p:blipFill>
+          <a:blip r:embed="rId3">
+            <a:extLst>
+              <a:ext uri="{28A0092B-C50C-407E-A947-70E740481C1C}">
+                <a14:useLocalDpi xmlns:a14="http://schemas.microsoft.com/office/drawing/2010/main" val="0"/>
+              </a:ext>
+            </a:extLst>
+          </a:blip>
+          <a:stretch>
+            <a:fillRect/>
+          </a:stretch>
+        </p:blipFill>
+        <p:spPr>
+          <a:xfrm>
+            <a:off x="986659" y="0"/>
+            <a:ext cx="9671823" cy="6481981"/>
+          </a:xfrm>
+          <a:prstGeom prst="rect">
+            <a:avLst/>
+          </a:prstGeom>
+        </p:spPr>
+      </p:pic>
+      <p:sp>
+        <p:nvSpPr>
+          <p:cNvPr id="3" name="TextBox 4">
+            <a:extLst>
+              <a:ext uri="{FF2B5EF4-FFF2-40B4-BE49-F238E27FC236}">
+                <a16:creationId xmlns:a16="http://schemas.microsoft.com/office/drawing/2014/main" id="{AA969668-41C2-2371-36BB-952A209FC55C}"/>
+              </a:ext>
+            </a:extLst>
+          </p:cNvPr>
+          <p:cNvSpPr txBox="1"/>
+          <p:nvPr/>
+        </p:nvSpPr>
+        <p:spPr>
+          <a:xfrm>
+            <a:off x="3524719" y="6581001"/>
+            <a:ext cx="5142562" cy="276999"/>
+          </a:xfrm>
+          <a:prstGeom prst="rect">
+            <a:avLst/>
+          </a:prstGeom>
+          <a:noFill/>
+        </p:spPr>
+        <p:txBody>
+          <a:bodyPr wrap="none" rtlCol="0">
+            <a:spAutoFit/>
+          </a:bodyPr>
+          <a:lstStyle/>
+          <a:p>
+            <a:r>
+              <a:rPr lang="en-GB" sz="1200" dirty="0">
+                <a:solidFill>
+                  <a:schemeClr val="bg1">
+                    <a:lumMod val="75000"/>
+                  </a:schemeClr>
+                </a:solidFill>
+              </a:rPr>
+              <a:t>Dataset Characteristics </a:t>
+            </a:r>
+            <a:r>
+              <a:rPr lang="en-GB" sz="1200" dirty="0">
+                <a:solidFill>
+                  <a:schemeClr val="bg1">
+                    <a:lumMod val="75000"/>
+                  </a:schemeClr>
+                </a:solidFill>
+                <a:latin typeface="Calibri" panose="020F0502020204030204" pitchFamily="34" charset="0"/>
+                <a:ea typeface="Calibri" panose="020F0502020204030204" pitchFamily="34" charset="0"/>
+                <a:cs typeface="Calibri" panose="020F0502020204030204" pitchFamily="34" charset="0"/>
+              </a:rPr>
+              <a:t>– </a:t>
+            </a:r>
+            <a:r>
+              <a:rPr lang="en-GB" sz="1200" dirty="0">
+                <a:latin typeface="Calibri" panose="020F0502020204030204" pitchFamily="34" charset="0"/>
+                <a:ea typeface="Calibri" panose="020F0502020204030204" pitchFamily="34" charset="0"/>
+                <a:cs typeface="Calibri" panose="020F0502020204030204" pitchFamily="34" charset="0"/>
+              </a:rPr>
+              <a:t>Baseline Model </a:t>
+            </a:r>
+            <a:r>
+              <a:rPr lang="en-GB" sz="1200" dirty="0">
+                <a:solidFill>
+                  <a:schemeClr val="bg1">
+                    <a:lumMod val="75000"/>
+                  </a:schemeClr>
+                </a:solidFill>
+                <a:latin typeface="Calibri" panose="020F0502020204030204" pitchFamily="34" charset="0"/>
+                <a:ea typeface="Calibri" panose="020F0502020204030204" pitchFamily="34" charset="0"/>
+                <a:cs typeface="Calibri" panose="020F0502020204030204" pitchFamily="34" charset="0"/>
+              </a:rPr>
+              <a:t>– Neural Net – Results – Challenges </a:t>
+            </a:r>
+            <a:endParaRPr lang="de-DE" sz="1200" dirty="0">
+              <a:solidFill>
+                <a:schemeClr val="bg1">
+                  <a:lumMod val="75000"/>
+                </a:schemeClr>
+              </a:solidFill>
+            </a:endParaRPr>
+          </a:p>
+        </p:txBody>
+      </p:sp>
+    </p:spTree>
+    <p:extLst>
+      <p:ext uri="{BB962C8B-B14F-4D97-AF65-F5344CB8AC3E}">
+        <p14:creationId xmlns:p14="http://schemas.microsoft.com/office/powerpoint/2010/main" val="4226222994"/>
+      </p:ext>
+    </p:extLst>
+  </p:cSld>
+  <p:clrMapOvr>
+    <a:masterClrMapping/>
+  </p:clrMapOvr>
+  <mc:AlternateContent xmlns:mc="http://schemas.openxmlformats.org/markup-compatibility/2006">
+    <mc:Choice xmlns:p14="http://schemas.microsoft.com/office/powerpoint/2010/main" Requires="p14">
+      <p:transition spd="med" p14:dur="700">
+        <p:fade/>
+      </p:transition>
+    </mc:Choice>
+    <mc:Fallback>
+      <p:transition spd="med">
+        <p:fade/>
+      </p:transition>
+    </mc:Fallback>
+  </mc:AlternateContent>
   <p:timing>
     <p:tnLst>
       <p:par>
@@ -4153,869 +5720,6 @@
       </p:par>
     </p:tnLst>
   </p:timing>
-</p:sld>
-</file>
-
-<file path=ppt/slides/slide6.xml><?xml version="1.0" encoding="utf-8"?>
-<p:sld xmlns:a="http://schemas.openxmlformats.org/drawingml/2006/main" xmlns:r="http://schemas.openxmlformats.org/officeDocument/2006/relationships" xmlns:p="http://schemas.openxmlformats.org/presentationml/2006/main">
-  <p:cSld>
-    <p:spTree>
-      <p:nvGrpSpPr>
-        <p:cNvPr id="1" name="">
-          <a:extLst>
-            <a:ext uri="{FF2B5EF4-FFF2-40B4-BE49-F238E27FC236}">
-              <a16:creationId xmlns:a16="http://schemas.microsoft.com/office/drawing/2014/main" id="{ACAFECE9-6D9E-9E37-8E1A-D2A31B44E809}"/>
-            </a:ext>
-          </a:extLst>
-        </p:cNvPr>
-        <p:cNvGrpSpPr/>
-        <p:nvPr/>
-      </p:nvGrpSpPr>
-      <p:grpSpPr>
-        <a:xfrm>
-          <a:off x="0" y="0"/>
-          <a:ext cx="0" cy="0"/>
-          <a:chOff x="0" y="0"/>
-          <a:chExt cx="0" cy="0"/>
-        </a:xfrm>
-      </p:grpSpPr>
-      <p:sp>
-        <p:nvSpPr>
-          <p:cNvPr id="5" name="TextBox 4">
-            <a:extLst>
-              <a:ext uri="{FF2B5EF4-FFF2-40B4-BE49-F238E27FC236}">
-                <a16:creationId xmlns:a16="http://schemas.microsoft.com/office/drawing/2014/main" id="{D4E43D52-11D0-9A6F-651B-664FF4584B65}"/>
-              </a:ext>
-            </a:extLst>
-          </p:cNvPr>
-          <p:cNvSpPr txBox="1"/>
-          <p:nvPr/>
-        </p:nvSpPr>
-        <p:spPr>
-          <a:xfrm>
-            <a:off x="1956390" y="6488668"/>
-            <a:ext cx="7658250" cy="369332"/>
-          </a:xfrm>
-          <a:prstGeom prst="rect">
-            <a:avLst/>
-          </a:prstGeom>
-          <a:noFill/>
-        </p:spPr>
-        <p:txBody>
-          <a:bodyPr wrap="none" rtlCol="0">
-            <a:spAutoFit/>
-          </a:bodyPr>
-          <a:lstStyle/>
-          <a:p>
-            <a:r>
-              <a:rPr lang="en-GB" dirty="0">
-                <a:solidFill>
-                  <a:schemeClr val="bg1">
-                    <a:lumMod val="75000"/>
-                  </a:schemeClr>
-                </a:solidFill>
-              </a:rPr>
-              <a:t>Dataset </a:t>
-            </a:r>
-            <a:r>
-              <a:rPr lang="en-GB" dirty="0" err="1">
-                <a:solidFill>
-                  <a:schemeClr val="bg1">
-                    <a:lumMod val="75000"/>
-                  </a:schemeClr>
-                </a:solidFill>
-              </a:rPr>
-              <a:t>Characterisitcs</a:t>
-            </a:r>
-            <a:r>
-              <a:rPr lang="en-GB" dirty="0">
-                <a:solidFill>
-                  <a:schemeClr val="bg1">
-                    <a:lumMod val="75000"/>
-                  </a:schemeClr>
-                </a:solidFill>
-              </a:rPr>
-              <a:t> </a:t>
-            </a:r>
-            <a:r>
-              <a:rPr lang="en-GB" dirty="0">
-                <a:solidFill>
-                  <a:schemeClr val="bg1">
-                    <a:lumMod val="75000"/>
-                  </a:schemeClr>
-                </a:solidFill>
-                <a:latin typeface="Calibri" panose="020F0502020204030204" pitchFamily="34" charset="0"/>
-                <a:ea typeface="Calibri" panose="020F0502020204030204" pitchFamily="34" charset="0"/>
-                <a:cs typeface="Calibri" panose="020F0502020204030204" pitchFamily="34" charset="0"/>
-              </a:rPr>
-              <a:t>– </a:t>
-            </a:r>
-            <a:r>
-              <a:rPr lang="en-GB" dirty="0">
-                <a:latin typeface="Calibri" panose="020F0502020204030204" pitchFamily="34" charset="0"/>
-                <a:ea typeface="Calibri" panose="020F0502020204030204" pitchFamily="34" charset="0"/>
-                <a:cs typeface="Calibri" panose="020F0502020204030204" pitchFamily="34" charset="0"/>
-              </a:rPr>
-              <a:t>Baseline Model  </a:t>
-            </a:r>
-            <a:r>
-              <a:rPr lang="en-GB" dirty="0">
-                <a:solidFill>
-                  <a:schemeClr val="bg1">
-                    <a:lumMod val="75000"/>
-                  </a:schemeClr>
-                </a:solidFill>
-                <a:latin typeface="Calibri" panose="020F0502020204030204" pitchFamily="34" charset="0"/>
-                <a:ea typeface="Calibri" panose="020F0502020204030204" pitchFamily="34" charset="0"/>
-                <a:cs typeface="Calibri" panose="020F0502020204030204" pitchFamily="34" charset="0"/>
-              </a:rPr>
-              <a:t>- Neural Net – Results - Challenges</a:t>
-            </a:r>
-            <a:endParaRPr lang="de-DE" dirty="0">
-              <a:solidFill>
-                <a:schemeClr val="bg1">
-                  <a:lumMod val="75000"/>
-                </a:schemeClr>
-              </a:solidFill>
-            </a:endParaRPr>
-          </a:p>
-        </p:txBody>
-      </p:sp>
-      <p:pic>
-        <p:nvPicPr>
-          <p:cNvPr id="8" name="Picture 7" descr="A screenshot of a computer&#10;&#10;AI-generated content may be incorrect.">
-            <a:extLst>
-              <a:ext uri="{FF2B5EF4-FFF2-40B4-BE49-F238E27FC236}">
-                <a16:creationId xmlns:a16="http://schemas.microsoft.com/office/drawing/2014/main" id="{826FC09F-B539-64E9-5BFB-2E19E12C3B3E}"/>
-              </a:ext>
-            </a:extLst>
-          </p:cNvPr>
-          <p:cNvPicPr>
-            <a:picLocks noChangeAspect="1"/>
-          </p:cNvPicPr>
-          <p:nvPr/>
-        </p:nvPicPr>
-        <p:blipFill>
-          <a:blip r:embed="rId2">
-            <a:extLst>
-              <a:ext uri="{28A0092B-C50C-407E-A947-70E740481C1C}">
-                <a14:useLocalDpi xmlns:a14="http://schemas.microsoft.com/office/drawing/2010/main" val="0"/>
-              </a:ext>
-            </a:extLst>
-          </a:blip>
-          <a:stretch>
-            <a:fillRect/>
-          </a:stretch>
-        </p:blipFill>
-        <p:spPr>
-          <a:xfrm>
-            <a:off x="1613129" y="2057399"/>
-            <a:ext cx="8813341" cy="2748605"/>
-          </a:xfrm>
-          <a:prstGeom prst="rect">
-            <a:avLst/>
-          </a:prstGeom>
-          <a:ln w="19050">
-            <a:solidFill>
-              <a:schemeClr val="tx1"/>
-            </a:solidFill>
-          </a:ln>
-        </p:spPr>
-      </p:pic>
-      <p:pic>
-        <p:nvPicPr>
-          <p:cNvPr id="10" name="Picture 9" descr="A screenshot of a document&#10;&#10;AI-generated content may be incorrect.">
-            <a:extLst>
-              <a:ext uri="{FF2B5EF4-FFF2-40B4-BE49-F238E27FC236}">
-                <a16:creationId xmlns:a16="http://schemas.microsoft.com/office/drawing/2014/main" id="{A8BF8A03-866A-5220-CC7A-B17CC0387014}"/>
-              </a:ext>
-            </a:extLst>
-          </p:cNvPr>
-          <p:cNvPicPr>
-            <a:picLocks noChangeAspect="1"/>
-          </p:cNvPicPr>
-          <p:nvPr/>
-        </p:nvPicPr>
-        <p:blipFill>
-          <a:blip r:embed="rId3">
-            <a:extLst>
-              <a:ext uri="{28A0092B-C50C-407E-A947-70E740481C1C}">
-                <a14:useLocalDpi xmlns:a14="http://schemas.microsoft.com/office/drawing/2010/main" val="0"/>
-              </a:ext>
-            </a:extLst>
-          </a:blip>
-          <a:stretch>
-            <a:fillRect/>
-          </a:stretch>
-        </p:blipFill>
-        <p:spPr>
-          <a:xfrm>
-            <a:off x="986659" y="0"/>
-            <a:ext cx="9671823" cy="6481981"/>
-          </a:xfrm>
-          <a:prstGeom prst="rect">
-            <a:avLst/>
-          </a:prstGeom>
-        </p:spPr>
-      </p:pic>
-    </p:spTree>
-    <p:extLst>
-      <p:ext uri="{BB962C8B-B14F-4D97-AF65-F5344CB8AC3E}">
-        <p14:creationId xmlns:p14="http://schemas.microsoft.com/office/powerpoint/2010/main" val="4226222994"/>
-      </p:ext>
-    </p:extLst>
-  </p:cSld>
-  <p:clrMapOvr>
-    <a:masterClrMapping/>
-  </p:clrMapOvr>
-  <p:timing>
-    <p:tnLst>
-      <p:par>
-        <p:cTn id="1" dur="indefinite" restart="never" nodeType="tmRoot">
-          <p:childTnLst>
-            <p:seq concurrent="1" nextAc="seek">
-              <p:cTn id="2" dur="indefinite" nodeType="mainSeq">
-                <p:childTnLst>
-                  <p:par>
-                    <p:cTn id="3" fill="hold">
-                      <p:stCondLst>
-                        <p:cond delay="indefinite"/>
-                      </p:stCondLst>
-                      <p:childTnLst>
-                        <p:par>
-                          <p:cTn id="4" fill="hold">
-                            <p:stCondLst>
-                              <p:cond delay="0"/>
-                            </p:stCondLst>
-                            <p:childTnLst>
-                              <p:par>
-                                <p:cTn id="5" presetID="10" presetClass="entr" presetSubtype="0" fill="hold" nodeType="clickEffect">
-                                  <p:stCondLst>
-                                    <p:cond delay="0"/>
-                                  </p:stCondLst>
-                                  <p:childTnLst>
-                                    <p:set>
-                                      <p:cBhvr>
-                                        <p:cTn id="6" dur="1" fill="hold">
-                                          <p:stCondLst>
-                                            <p:cond delay="0"/>
-                                          </p:stCondLst>
-                                        </p:cTn>
-                                        <p:tgtEl>
-                                          <p:spTgt spid="8"/>
-                                        </p:tgtEl>
-                                        <p:attrNameLst>
-                                          <p:attrName>style.visibility</p:attrName>
-                                        </p:attrNameLst>
-                                      </p:cBhvr>
-                                      <p:to>
-                                        <p:strVal val="visible"/>
-                                      </p:to>
-                                    </p:set>
-                                    <p:animEffect transition="in" filter="fade">
-                                      <p:cBhvr>
-                                        <p:cTn id="7" dur="500"/>
-                                        <p:tgtEl>
-                                          <p:spTgt spid="8"/>
-                                        </p:tgtEl>
-                                      </p:cBhvr>
-                                    </p:animEffect>
-                                  </p:childTnLst>
-                                </p:cTn>
-                              </p:par>
-                              <p:par>
-                                <p:cTn id="8" presetID="10" presetClass="exit" presetSubtype="0" fill="hold" nodeType="withEffect">
-                                  <p:stCondLst>
-                                    <p:cond delay="0"/>
-                                  </p:stCondLst>
-                                  <p:childTnLst>
-                                    <p:animEffect transition="out" filter="fade">
-                                      <p:cBhvr>
-                                        <p:cTn id="9" dur="500"/>
-                                        <p:tgtEl>
-                                          <p:spTgt spid="10"/>
-                                        </p:tgtEl>
-                                      </p:cBhvr>
-                                    </p:animEffect>
-                                    <p:set>
-                                      <p:cBhvr>
-                                        <p:cTn id="10" dur="1" fill="hold">
-                                          <p:stCondLst>
-                                            <p:cond delay="499"/>
-                                          </p:stCondLst>
-                                        </p:cTn>
-                                        <p:tgtEl>
-                                          <p:spTgt spid="10"/>
-                                        </p:tgtEl>
-                                        <p:attrNameLst>
-                                          <p:attrName>style.visibility</p:attrName>
-                                        </p:attrNameLst>
-                                      </p:cBhvr>
-                                      <p:to>
-                                        <p:strVal val="hidden"/>
-                                      </p:to>
-                                    </p:set>
-                                  </p:childTnLst>
-                                </p:cTn>
-                              </p:par>
-                            </p:childTnLst>
-                          </p:cTn>
-                        </p:par>
-                      </p:childTnLst>
-                    </p:cTn>
-                  </p:par>
-                </p:childTnLst>
-              </p:cTn>
-              <p:prevCondLst>
-                <p:cond evt="onPrev" delay="0">
-                  <p:tgtEl>
-                    <p:sldTgt/>
-                  </p:tgtEl>
-                </p:cond>
-              </p:prevCondLst>
-              <p:nextCondLst>
-                <p:cond evt="onNext" delay="0">
-                  <p:tgtEl>
-                    <p:sldTgt/>
-                  </p:tgtEl>
-                </p:cond>
-              </p:nextCondLst>
-            </p:seq>
-          </p:childTnLst>
-        </p:cTn>
-      </p:par>
-    </p:tnLst>
-  </p:timing>
-</p:sld>
-</file>
-
-<file path=ppt/slides/slide7.xml><?xml version="1.0" encoding="utf-8"?>
-<p:sld xmlns:a="http://schemas.openxmlformats.org/drawingml/2006/main" xmlns:r="http://schemas.openxmlformats.org/officeDocument/2006/relationships" xmlns:p="http://schemas.openxmlformats.org/presentationml/2006/main">
-  <p:cSld>
-    <p:spTree>
-      <p:nvGrpSpPr>
-        <p:cNvPr id="1" name="">
-          <a:extLst>
-            <a:ext uri="{FF2B5EF4-FFF2-40B4-BE49-F238E27FC236}">
-              <a16:creationId xmlns:a16="http://schemas.microsoft.com/office/drawing/2014/main" id="{9DF07184-045D-5BD1-0E31-4047B75F7005}"/>
-            </a:ext>
-          </a:extLst>
-        </p:cNvPr>
-        <p:cNvGrpSpPr/>
-        <p:nvPr/>
-      </p:nvGrpSpPr>
-      <p:grpSpPr>
-        <a:xfrm>
-          <a:off x="0" y="0"/>
-          <a:ext cx="0" cy="0"/>
-          <a:chOff x="0" y="0"/>
-          <a:chExt cx="0" cy="0"/>
-        </a:xfrm>
-      </p:grpSpPr>
-      <p:sp>
-        <p:nvSpPr>
-          <p:cNvPr id="5" name="TextBox 4">
-            <a:extLst>
-              <a:ext uri="{FF2B5EF4-FFF2-40B4-BE49-F238E27FC236}">
-                <a16:creationId xmlns:a16="http://schemas.microsoft.com/office/drawing/2014/main" id="{4CD4AAC1-5BC9-575A-01DD-BE2C9A44A27A}"/>
-              </a:ext>
-            </a:extLst>
-          </p:cNvPr>
-          <p:cNvSpPr txBox="1"/>
-          <p:nvPr/>
-        </p:nvSpPr>
-        <p:spPr>
-          <a:xfrm>
-            <a:off x="1956390" y="6488668"/>
-            <a:ext cx="7658250" cy="369332"/>
-          </a:xfrm>
-          <a:prstGeom prst="rect">
-            <a:avLst/>
-          </a:prstGeom>
-          <a:noFill/>
-        </p:spPr>
-        <p:txBody>
-          <a:bodyPr wrap="none" rtlCol="0">
-            <a:spAutoFit/>
-          </a:bodyPr>
-          <a:lstStyle/>
-          <a:p>
-            <a:r>
-              <a:rPr lang="en-GB" dirty="0">
-                <a:solidFill>
-                  <a:schemeClr val="bg1">
-                    <a:lumMod val="75000"/>
-                  </a:schemeClr>
-                </a:solidFill>
-              </a:rPr>
-              <a:t>Dataset </a:t>
-            </a:r>
-            <a:r>
-              <a:rPr lang="en-GB" dirty="0" err="1">
-                <a:solidFill>
-                  <a:schemeClr val="bg1">
-                    <a:lumMod val="75000"/>
-                  </a:schemeClr>
-                </a:solidFill>
-              </a:rPr>
-              <a:t>Characterisitcs</a:t>
-            </a:r>
-            <a:r>
-              <a:rPr lang="en-GB" dirty="0">
-                <a:solidFill>
-                  <a:schemeClr val="bg1">
-                    <a:lumMod val="75000"/>
-                  </a:schemeClr>
-                </a:solidFill>
-              </a:rPr>
-              <a:t> </a:t>
-            </a:r>
-            <a:r>
-              <a:rPr lang="en-GB" dirty="0">
-                <a:solidFill>
-                  <a:schemeClr val="bg1">
-                    <a:lumMod val="75000"/>
-                  </a:schemeClr>
-                </a:solidFill>
-                <a:latin typeface="Calibri" panose="020F0502020204030204" pitchFamily="34" charset="0"/>
-                <a:ea typeface="Calibri" panose="020F0502020204030204" pitchFamily="34" charset="0"/>
-                <a:cs typeface="Calibri" panose="020F0502020204030204" pitchFamily="34" charset="0"/>
-              </a:rPr>
-              <a:t>– </a:t>
-            </a:r>
-            <a:r>
-              <a:rPr lang="en-GB" dirty="0">
-                <a:latin typeface="Calibri" panose="020F0502020204030204" pitchFamily="34" charset="0"/>
-                <a:ea typeface="Calibri" panose="020F0502020204030204" pitchFamily="34" charset="0"/>
-                <a:cs typeface="Calibri" panose="020F0502020204030204" pitchFamily="34" charset="0"/>
-              </a:rPr>
-              <a:t>Baseline Model  </a:t>
-            </a:r>
-            <a:r>
-              <a:rPr lang="en-GB" dirty="0">
-                <a:solidFill>
-                  <a:schemeClr val="bg1">
-                    <a:lumMod val="75000"/>
-                  </a:schemeClr>
-                </a:solidFill>
-                <a:latin typeface="Calibri" panose="020F0502020204030204" pitchFamily="34" charset="0"/>
-                <a:ea typeface="Calibri" panose="020F0502020204030204" pitchFamily="34" charset="0"/>
-                <a:cs typeface="Calibri" panose="020F0502020204030204" pitchFamily="34" charset="0"/>
-              </a:rPr>
-              <a:t>- Neural Net – Results - Challenges</a:t>
-            </a:r>
-            <a:endParaRPr lang="de-DE" dirty="0">
-              <a:solidFill>
-                <a:schemeClr val="bg1">
-                  <a:lumMod val="75000"/>
-                </a:schemeClr>
-              </a:solidFill>
-            </a:endParaRPr>
-          </a:p>
-        </p:txBody>
-      </p:sp>
-      <p:sp>
-        <p:nvSpPr>
-          <p:cNvPr id="2" name="TextBox 1">
-            <a:extLst>
-              <a:ext uri="{FF2B5EF4-FFF2-40B4-BE49-F238E27FC236}">
-                <a16:creationId xmlns:a16="http://schemas.microsoft.com/office/drawing/2014/main" id="{6860FBA4-C762-28DA-D1C2-CB3A95298DD4}"/>
-              </a:ext>
-            </a:extLst>
-          </p:cNvPr>
-          <p:cNvSpPr txBox="1"/>
-          <p:nvPr/>
-        </p:nvSpPr>
-        <p:spPr>
-          <a:xfrm>
-            <a:off x="7192926" y="3115340"/>
-            <a:ext cx="2821991" cy="369332"/>
-          </a:xfrm>
-          <a:prstGeom prst="rect">
-            <a:avLst/>
-          </a:prstGeom>
-          <a:noFill/>
-        </p:spPr>
-        <p:txBody>
-          <a:bodyPr wrap="none" rtlCol="0">
-            <a:spAutoFit/>
-          </a:bodyPr>
-          <a:lstStyle/>
-          <a:p>
-            <a:r>
-              <a:rPr lang="en-GB" dirty="0"/>
-              <a:t>Screenshot of </a:t>
-            </a:r>
-            <a:r>
-              <a:rPr lang="en-GB" dirty="0" err="1"/>
-              <a:t>nn</a:t>
-            </a:r>
-            <a:r>
-              <a:rPr lang="en-GB" dirty="0"/>
-              <a:t> structure</a:t>
-            </a:r>
-            <a:endParaRPr lang="de-DE" dirty="0"/>
-          </a:p>
-        </p:txBody>
-      </p:sp>
-    </p:spTree>
-    <p:extLst>
-      <p:ext uri="{BB962C8B-B14F-4D97-AF65-F5344CB8AC3E}">
-        <p14:creationId xmlns:p14="http://schemas.microsoft.com/office/powerpoint/2010/main" val="1731321607"/>
-      </p:ext>
-    </p:extLst>
-  </p:cSld>
-  <p:clrMapOvr>
-    <a:masterClrMapping/>
-  </p:clrMapOvr>
-</p:sld>
-</file>
-
-<file path=ppt/slides/slide8.xml><?xml version="1.0" encoding="utf-8"?>
-<p:sld xmlns:a="http://schemas.openxmlformats.org/drawingml/2006/main" xmlns:r="http://schemas.openxmlformats.org/officeDocument/2006/relationships" xmlns:p="http://schemas.openxmlformats.org/presentationml/2006/main">
-  <p:cSld>
-    <p:spTree>
-      <p:nvGrpSpPr>
-        <p:cNvPr id="1" name="">
-          <a:extLst>
-            <a:ext uri="{FF2B5EF4-FFF2-40B4-BE49-F238E27FC236}">
-              <a16:creationId xmlns:a16="http://schemas.microsoft.com/office/drawing/2014/main" id="{080F9B6C-ADC8-1490-E36A-62E075121EA4}"/>
-            </a:ext>
-          </a:extLst>
-        </p:cNvPr>
-        <p:cNvGrpSpPr/>
-        <p:nvPr/>
-      </p:nvGrpSpPr>
-      <p:grpSpPr>
-        <a:xfrm>
-          <a:off x="0" y="0"/>
-          <a:ext cx="0" cy="0"/>
-          <a:chOff x="0" y="0"/>
-          <a:chExt cx="0" cy="0"/>
-        </a:xfrm>
-      </p:grpSpPr>
-      <p:sp>
-        <p:nvSpPr>
-          <p:cNvPr id="5" name="TextBox 4">
-            <a:extLst>
-              <a:ext uri="{FF2B5EF4-FFF2-40B4-BE49-F238E27FC236}">
-                <a16:creationId xmlns:a16="http://schemas.microsoft.com/office/drawing/2014/main" id="{E7525199-3413-D073-0B3A-F7F48810FB24}"/>
-              </a:ext>
-            </a:extLst>
-          </p:cNvPr>
-          <p:cNvSpPr txBox="1"/>
-          <p:nvPr/>
-        </p:nvSpPr>
-        <p:spPr>
-          <a:xfrm>
-            <a:off x="1956390" y="6488668"/>
-            <a:ext cx="7658250" cy="369332"/>
-          </a:xfrm>
-          <a:prstGeom prst="rect">
-            <a:avLst/>
-          </a:prstGeom>
-          <a:noFill/>
-        </p:spPr>
-        <p:txBody>
-          <a:bodyPr wrap="none" rtlCol="0">
-            <a:spAutoFit/>
-          </a:bodyPr>
-          <a:lstStyle/>
-          <a:p>
-            <a:r>
-              <a:rPr lang="en-GB" dirty="0">
-                <a:solidFill>
-                  <a:schemeClr val="bg1">
-                    <a:lumMod val="75000"/>
-                  </a:schemeClr>
-                </a:solidFill>
-              </a:rPr>
-              <a:t>Dataset </a:t>
-            </a:r>
-            <a:r>
-              <a:rPr lang="en-GB" dirty="0" err="1">
-                <a:solidFill>
-                  <a:schemeClr val="bg1">
-                    <a:lumMod val="75000"/>
-                  </a:schemeClr>
-                </a:solidFill>
-              </a:rPr>
-              <a:t>Characterisitcs</a:t>
-            </a:r>
-            <a:r>
-              <a:rPr lang="en-GB" dirty="0">
-                <a:solidFill>
-                  <a:schemeClr val="bg1">
-                    <a:lumMod val="75000"/>
-                  </a:schemeClr>
-                </a:solidFill>
-              </a:rPr>
-              <a:t> </a:t>
-            </a:r>
-            <a:r>
-              <a:rPr lang="en-GB" dirty="0">
-                <a:solidFill>
-                  <a:schemeClr val="bg1">
-                    <a:lumMod val="75000"/>
-                  </a:schemeClr>
-                </a:solidFill>
-                <a:latin typeface="Calibri" panose="020F0502020204030204" pitchFamily="34" charset="0"/>
-                <a:ea typeface="Calibri" panose="020F0502020204030204" pitchFamily="34" charset="0"/>
-                <a:cs typeface="Calibri" panose="020F0502020204030204" pitchFamily="34" charset="0"/>
-              </a:rPr>
-              <a:t>– </a:t>
-            </a:r>
-            <a:r>
-              <a:rPr lang="en-GB" dirty="0">
-                <a:latin typeface="Calibri" panose="020F0502020204030204" pitchFamily="34" charset="0"/>
-                <a:ea typeface="Calibri" panose="020F0502020204030204" pitchFamily="34" charset="0"/>
-                <a:cs typeface="Calibri" panose="020F0502020204030204" pitchFamily="34" charset="0"/>
-              </a:rPr>
-              <a:t>Baseline Model  </a:t>
-            </a:r>
-            <a:r>
-              <a:rPr lang="en-GB" dirty="0">
-                <a:solidFill>
-                  <a:schemeClr val="bg1">
-                    <a:lumMod val="75000"/>
-                  </a:schemeClr>
-                </a:solidFill>
-                <a:latin typeface="Calibri" panose="020F0502020204030204" pitchFamily="34" charset="0"/>
-                <a:ea typeface="Calibri" panose="020F0502020204030204" pitchFamily="34" charset="0"/>
-                <a:cs typeface="Calibri" panose="020F0502020204030204" pitchFamily="34" charset="0"/>
-              </a:rPr>
-              <a:t>- Neural Net – Results - Challenges</a:t>
-            </a:r>
-            <a:endParaRPr lang="de-DE" dirty="0">
-              <a:solidFill>
-                <a:schemeClr val="bg1">
-                  <a:lumMod val="75000"/>
-                </a:schemeClr>
-              </a:solidFill>
-            </a:endParaRPr>
-          </a:p>
-        </p:txBody>
-      </p:sp>
-      <p:sp>
-        <p:nvSpPr>
-          <p:cNvPr id="2" name="TextBox 1">
-            <a:extLst>
-              <a:ext uri="{FF2B5EF4-FFF2-40B4-BE49-F238E27FC236}">
-                <a16:creationId xmlns:a16="http://schemas.microsoft.com/office/drawing/2014/main" id="{59A41CDB-4822-BFA5-F338-27F1BD52A3BD}"/>
-              </a:ext>
-            </a:extLst>
-          </p:cNvPr>
-          <p:cNvSpPr txBox="1"/>
-          <p:nvPr/>
-        </p:nvSpPr>
-        <p:spPr>
-          <a:xfrm>
-            <a:off x="7192926" y="3115340"/>
-            <a:ext cx="1089337" cy="369332"/>
-          </a:xfrm>
-          <a:prstGeom prst="rect">
-            <a:avLst/>
-          </a:prstGeom>
-          <a:noFill/>
-        </p:spPr>
-        <p:txBody>
-          <a:bodyPr wrap="none" rtlCol="0">
-            <a:spAutoFit/>
-          </a:bodyPr>
-          <a:lstStyle/>
-          <a:p>
-            <a:r>
-              <a:rPr lang="en-GB" dirty="0"/>
-              <a:t>Loss plot</a:t>
-            </a:r>
-            <a:endParaRPr lang="de-DE" dirty="0"/>
-          </a:p>
-        </p:txBody>
-      </p:sp>
-    </p:spTree>
-    <p:extLst>
-      <p:ext uri="{BB962C8B-B14F-4D97-AF65-F5344CB8AC3E}">
-        <p14:creationId xmlns:p14="http://schemas.microsoft.com/office/powerpoint/2010/main" val="1448705476"/>
-      </p:ext>
-    </p:extLst>
-  </p:cSld>
-  <p:clrMapOvr>
-    <a:masterClrMapping/>
-  </p:clrMapOvr>
-</p:sld>
-</file>
-
-<file path=ppt/slides/slide9.xml><?xml version="1.0" encoding="utf-8"?>
-<p:sld xmlns:a="http://schemas.openxmlformats.org/drawingml/2006/main" xmlns:r="http://schemas.openxmlformats.org/officeDocument/2006/relationships" xmlns:p="http://schemas.openxmlformats.org/presentationml/2006/main">
-  <p:cSld>
-    <p:spTree>
-      <p:nvGrpSpPr>
-        <p:cNvPr id="1" name="">
-          <a:extLst>
-            <a:ext uri="{FF2B5EF4-FFF2-40B4-BE49-F238E27FC236}">
-              <a16:creationId xmlns:a16="http://schemas.microsoft.com/office/drawing/2014/main" id="{05D4050B-A8AD-D44C-BDB5-DAEF0748352F}"/>
-            </a:ext>
-          </a:extLst>
-        </p:cNvPr>
-        <p:cNvGrpSpPr/>
-        <p:nvPr/>
-      </p:nvGrpSpPr>
-      <p:grpSpPr>
-        <a:xfrm>
-          <a:off x="0" y="0"/>
-          <a:ext cx="0" cy="0"/>
-          <a:chOff x="0" y="0"/>
-          <a:chExt cx="0" cy="0"/>
-        </a:xfrm>
-      </p:grpSpPr>
-      <p:sp>
-        <p:nvSpPr>
-          <p:cNvPr id="5" name="TextBox 4">
-            <a:extLst>
-              <a:ext uri="{FF2B5EF4-FFF2-40B4-BE49-F238E27FC236}">
-                <a16:creationId xmlns:a16="http://schemas.microsoft.com/office/drawing/2014/main" id="{99A00947-4782-3164-3F43-60FB01F5A96C}"/>
-              </a:ext>
-            </a:extLst>
-          </p:cNvPr>
-          <p:cNvSpPr txBox="1"/>
-          <p:nvPr/>
-        </p:nvSpPr>
-        <p:spPr>
-          <a:xfrm>
-            <a:off x="1956390" y="6488668"/>
-            <a:ext cx="7658250" cy="369332"/>
-          </a:xfrm>
-          <a:prstGeom prst="rect">
-            <a:avLst/>
-          </a:prstGeom>
-          <a:noFill/>
-        </p:spPr>
-        <p:txBody>
-          <a:bodyPr wrap="none" rtlCol="0">
-            <a:spAutoFit/>
-          </a:bodyPr>
-          <a:lstStyle/>
-          <a:p>
-            <a:r>
-              <a:rPr lang="en-GB" dirty="0">
-                <a:solidFill>
-                  <a:schemeClr val="bg1">
-                    <a:lumMod val="75000"/>
-                  </a:schemeClr>
-                </a:solidFill>
-              </a:rPr>
-              <a:t>Dataset </a:t>
-            </a:r>
-            <a:r>
-              <a:rPr lang="en-GB" dirty="0" err="1">
-                <a:solidFill>
-                  <a:schemeClr val="bg1">
-                    <a:lumMod val="75000"/>
-                  </a:schemeClr>
-                </a:solidFill>
-              </a:rPr>
-              <a:t>Characterisitcs</a:t>
-            </a:r>
-            <a:r>
-              <a:rPr lang="en-GB" dirty="0">
-                <a:solidFill>
-                  <a:schemeClr val="bg1">
-                    <a:lumMod val="75000"/>
-                  </a:schemeClr>
-                </a:solidFill>
-              </a:rPr>
-              <a:t> </a:t>
-            </a:r>
-            <a:r>
-              <a:rPr lang="en-GB" dirty="0">
-                <a:solidFill>
-                  <a:schemeClr val="bg1">
-                    <a:lumMod val="75000"/>
-                  </a:schemeClr>
-                </a:solidFill>
-                <a:latin typeface="Calibri" panose="020F0502020204030204" pitchFamily="34" charset="0"/>
-                <a:ea typeface="Calibri" panose="020F0502020204030204" pitchFamily="34" charset="0"/>
-                <a:cs typeface="Calibri" panose="020F0502020204030204" pitchFamily="34" charset="0"/>
-              </a:rPr>
-              <a:t>– </a:t>
-            </a:r>
-            <a:r>
-              <a:rPr lang="en-GB" dirty="0">
-                <a:latin typeface="Calibri" panose="020F0502020204030204" pitchFamily="34" charset="0"/>
-                <a:ea typeface="Calibri" panose="020F0502020204030204" pitchFamily="34" charset="0"/>
-                <a:cs typeface="Calibri" panose="020F0502020204030204" pitchFamily="34" charset="0"/>
-              </a:rPr>
-              <a:t>Baseline Model  </a:t>
-            </a:r>
-            <a:r>
-              <a:rPr lang="en-GB" dirty="0">
-                <a:solidFill>
-                  <a:schemeClr val="bg1">
-                    <a:lumMod val="75000"/>
-                  </a:schemeClr>
-                </a:solidFill>
-                <a:latin typeface="Calibri" panose="020F0502020204030204" pitchFamily="34" charset="0"/>
-                <a:ea typeface="Calibri" panose="020F0502020204030204" pitchFamily="34" charset="0"/>
-                <a:cs typeface="Calibri" panose="020F0502020204030204" pitchFamily="34" charset="0"/>
-              </a:rPr>
-              <a:t>- Neural Net – Results - Challenges</a:t>
-            </a:r>
-            <a:endParaRPr lang="de-DE" dirty="0">
-              <a:solidFill>
-                <a:schemeClr val="bg1">
-                  <a:lumMod val="75000"/>
-                </a:schemeClr>
-              </a:solidFill>
-            </a:endParaRPr>
-          </a:p>
-        </p:txBody>
-      </p:sp>
-      <p:sp>
-        <p:nvSpPr>
-          <p:cNvPr id="2" name="TextBox 1">
-            <a:extLst>
-              <a:ext uri="{FF2B5EF4-FFF2-40B4-BE49-F238E27FC236}">
-                <a16:creationId xmlns:a16="http://schemas.microsoft.com/office/drawing/2014/main" id="{6A7C3F15-2196-DC03-ED48-2696369A2B11}"/>
-              </a:ext>
-            </a:extLst>
-          </p:cNvPr>
-          <p:cNvSpPr txBox="1"/>
-          <p:nvPr/>
-        </p:nvSpPr>
-        <p:spPr>
-          <a:xfrm>
-            <a:off x="7192926" y="3115340"/>
-            <a:ext cx="2177263" cy="369332"/>
-          </a:xfrm>
-          <a:prstGeom prst="rect">
-            <a:avLst/>
-          </a:prstGeom>
-          <a:noFill/>
-        </p:spPr>
-        <p:txBody>
-          <a:bodyPr wrap="none" rtlCol="0">
-            <a:spAutoFit/>
-          </a:bodyPr>
-          <a:lstStyle/>
-          <a:p>
-            <a:r>
-              <a:rPr lang="en-GB" dirty="0"/>
-              <a:t>Mape scores as plot</a:t>
-            </a:r>
-            <a:endParaRPr lang="de-DE" dirty="0"/>
-          </a:p>
-        </p:txBody>
-      </p:sp>
-    </p:spTree>
-    <p:extLst>
-      <p:ext uri="{BB962C8B-B14F-4D97-AF65-F5344CB8AC3E}">
-        <p14:creationId xmlns:p14="http://schemas.microsoft.com/office/powerpoint/2010/main" val="2630275565"/>
-      </p:ext>
-    </p:extLst>
-  </p:cSld>
-  <p:clrMapOvr>
-    <a:masterClrMapping/>
-  </p:clrMapOvr>
 </p:sld>
 </file>
 

--- a/4_Presentation/Group 3.pptx
+++ b/4_Presentation/Group 3.pptx
@@ -3420,13 +3420,13 @@
   <p:clrMapOvr>
     <a:masterClrMapping/>
   </p:clrMapOvr>
-  <mc:AlternateContent xmlns:mc="http://schemas.openxmlformats.org/markup-compatibility/2006">
-    <mc:Choice xmlns:p14="http://schemas.microsoft.com/office/powerpoint/2010/main" Requires="p14">
+  <mc:AlternateContent xmlns:mc="http://schemas.openxmlformats.org/markup-compatibility/2006" xmlns:p14="http://schemas.microsoft.com/office/powerpoint/2010/main">
+    <mc:Choice Requires="p14">
       <p:transition spd="med" p14:dur="700">
         <p:fade/>
       </p:transition>
     </mc:Choice>
-    <mc:Fallback>
+    <mc:Fallback xmlns="">
       <p:transition spd="med">
         <p:fade/>
       </p:transition>
@@ -3441,9 +3441,7 @@
     <p:bg>
       <p:bgPr>
         <a:solidFill>
-          <a:schemeClr val="bg1">
-            <a:alpha val="0"/>
-          </a:schemeClr>
+          <a:schemeClr val="tx1"/>
         </a:solidFill>
         <a:effectLst/>
       </p:bgPr>
@@ -3495,8 +3493,8 @@
         </p:blipFill>
         <p:spPr>
           <a:xfrm>
-            <a:off x="493948" y="37154"/>
-            <a:ext cx="11210371" cy="6787529"/>
+            <a:off x="464484" y="0"/>
+            <a:ext cx="11263031" cy="6858000"/>
           </a:xfrm>
           <a:prstGeom prst="rect">
             <a:avLst/>
@@ -3602,13 +3600,13 @@
   <p:clrMapOvr>
     <a:masterClrMapping/>
   </p:clrMapOvr>
-  <mc:AlternateContent xmlns:mc="http://schemas.openxmlformats.org/markup-compatibility/2006">
-    <mc:Choice xmlns:p14="http://schemas.microsoft.com/office/powerpoint/2010/main" Requires="p14">
+  <mc:AlternateContent xmlns:mc="http://schemas.openxmlformats.org/markup-compatibility/2006" xmlns:p14="http://schemas.microsoft.com/office/powerpoint/2010/main">
+    <mc:Choice Requires="p14">
       <p:transition spd="med" p14:dur="700">
         <p:fade/>
       </p:transition>
     </mc:Choice>
-    <mc:Fallback>
+    <mc:Fallback xmlns="">
       <p:transition spd="med">
         <p:fade/>
       </p:transition>
@@ -3768,13 +3766,13 @@
   <p:clrMapOvr>
     <a:masterClrMapping/>
   </p:clrMapOvr>
-  <mc:AlternateContent xmlns:mc="http://schemas.openxmlformats.org/markup-compatibility/2006">
-    <mc:Choice xmlns:p14="http://schemas.microsoft.com/office/powerpoint/2010/main" Requires="p14">
+  <mc:AlternateContent xmlns:mc="http://schemas.openxmlformats.org/markup-compatibility/2006" xmlns:p14="http://schemas.microsoft.com/office/powerpoint/2010/main">
+    <mc:Choice Requires="p14">
       <p:transition spd="med" p14:dur="700">
         <p:fade/>
       </p:transition>
     </mc:Choice>
-    <mc:Fallback>
+    <mc:Fallback xmlns="">
       <p:transition spd="med">
         <p:fade/>
       </p:transition>
@@ -3935,13 +3933,13 @@
   <p:clrMapOvr>
     <a:masterClrMapping/>
   </p:clrMapOvr>
-  <mc:AlternateContent xmlns:mc="http://schemas.openxmlformats.org/markup-compatibility/2006">
-    <mc:Choice xmlns:p14="http://schemas.microsoft.com/office/powerpoint/2010/main" Requires="p14">
+  <mc:AlternateContent xmlns:mc="http://schemas.openxmlformats.org/markup-compatibility/2006" xmlns:p14="http://schemas.microsoft.com/office/powerpoint/2010/main">
+    <mc:Choice Requires="p14">
       <p:transition spd="med" p14:dur="700">
         <p:fade/>
       </p:transition>
     </mc:Choice>
-    <mc:Fallback>
+    <mc:Fallback xmlns="">
       <p:transition spd="med">
         <p:fade/>
       </p:transition>
@@ -4102,13 +4100,13 @@
   <p:clrMapOvr>
     <a:masterClrMapping/>
   </p:clrMapOvr>
-  <mc:AlternateContent xmlns:mc="http://schemas.openxmlformats.org/markup-compatibility/2006">
-    <mc:Choice xmlns:p14="http://schemas.microsoft.com/office/powerpoint/2010/main" Requires="p14">
+  <mc:AlternateContent xmlns:mc="http://schemas.openxmlformats.org/markup-compatibility/2006" xmlns:p14="http://schemas.microsoft.com/office/powerpoint/2010/main">
+    <mc:Choice Requires="p14">
       <p:transition spd="med" p14:dur="700">
         <p:fade/>
       </p:transition>
     </mc:Choice>
-    <mc:Fallback>
+    <mc:Fallback xmlns="">
       <p:transition spd="med">
         <p:fade/>
       </p:transition>
@@ -4284,13 +4282,13 @@
   <p:clrMapOvr>
     <a:masterClrMapping/>
   </p:clrMapOvr>
-  <mc:AlternateContent xmlns:mc="http://schemas.openxmlformats.org/markup-compatibility/2006">
-    <mc:Choice xmlns:p14="http://schemas.microsoft.com/office/powerpoint/2010/main" Requires="p14">
+  <mc:AlternateContent xmlns:mc="http://schemas.openxmlformats.org/markup-compatibility/2006" xmlns:p14="http://schemas.microsoft.com/office/powerpoint/2010/main">
+    <mc:Choice Requires="p14">
       <p:transition spd="med" p14:dur="700">
         <p:fade/>
       </p:transition>
     </mc:Choice>
-    <mc:Fallback>
+    <mc:Fallback xmlns="">
       <p:transition spd="med">
         <p:fade/>
       </p:transition>
@@ -4462,13 +4460,13 @@
   <p:clrMapOvr>
     <a:masterClrMapping/>
   </p:clrMapOvr>
-  <mc:AlternateContent xmlns:mc="http://schemas.openxmlformats.org/markup-compatibility/2006">
-    <mc:Choice xmlns:p14="http://schemas.microsoft.com/office/powerpoint/2010/main" Requires="p14">
+  <mc:AlternateContent xmlns:mc="http://schemas.openxmlformats.org/markup-compatibility/2006" xmlns:p14="http://schemas.microsoft.com/office/powerpoint/2010/main">
+    <mc:Choice Requires="p14">
       <p:transition spd="med" p14:dur="700">
         <p:fade/>
       </p:transition>
     </mc:Choice>
-    <mc:Fallback>
+    <mc:Fallback xmlns="">
       <p:transition spd="med">
         <p:fade/>
       </p:transition>
@@ -4646,13 +4644,13 @@
   <p:clrMapOvr>
     <a:masterClrMapping/>
   </p:clrMapOvr>
-  <mc:AlternateContent xmlns:mc="http://schemas.openxmlformats.org/markup-compatibility/2006">
-    <mc:Choice xmlns:p14="http://schemas.microsoft.com/office/powerpoint/2010/main" Requires="p14">
+  <mc:AlternateContent xmlns:mc="http://schemas.openxmlformats.org/markup-compatibility/2006" xmlns:p14="http://schemas.microsoft.com/office/powerpoint/2010/main">
+    <mc:Choice Requires="p14">
       <p:transition spd="med" p14:dur="700">
         <p:fade/>
       </p:transition>
     </mc:Choice>
-    <mc:Fallback>
+    <mc:Fallback xmlns="">
       <p:transition spd="med">
         <p:fade/>
       </p:transition>
@@ -4830,13 +4828,13 @@
   <p:clrMapOvr>
     <a:masterClrMapping/>
   </p:clrMapOvr>
-  <mc:AlternateContent xmlns:mc="http://schemas.openxmlformats.org/markup-compatibility/2006">
-    <mc:Choice xmlns:p14="http://schemas.microsoft.com/office/powerpoint/2010/main" Requires="p14">
+  <mc:AlternateContent xmlns:mc="http://schemas.openxmlformats.org/markup-compatibility/2006" xmlns:p14="http://schemas.microsoft.com/office/powerpoint/2010/main">
+    <mc:Choice Requires="p14">
       <p:transition spd="med" p14:dur="700">
         <p:fade/>
       </p:transition>
     </mc:Choice>
-    <mc:Fallback>
+    <mc:Fallback xmlns="">
       <p:transition spd="med">
         <p:fade/>
       </p:transition>
@@ -4969,13 +4967,13 @@
   <p:clrMapOvr>
     <a:masterClrMapping/>
   </p:clrMapOvr>
-  <mc:AlternateContent xmlns:mc="http://schemas.openxmlformats.org/markup-compatibility/2006">
-    <mc:Choice xmlns:p14="http://schemas.microsoft.com/office/powerpoint/2010/main" Requires="p14">
+  <mc:AlternateContent xmlns:mc="http://schemas.openxmlformats.org/markup-compatibility/2006" xmlns:p14="http://schemas.microsoft.com/office/powerpoint/2010/main">
+    <mc:Choice Requires="p14">
       <p:transition spd="med" p14:dur="700">
         <p:fade/>
       </p:transition>
     </mc:Choice>
-    <mc:Fallback>
+    <mc:Fallback xmlns="">
       <p:transition spd="med">
         <p:fade/>
       </p:transition>
@@ -5107,13 +5105,13 @@
   <p:clrMapOvr>
     <a:masterClrMapping/>
   </p:clrMapOvr>
-  <mc:AlternateContent xmlns:mc="http://schemas.openxmlformats.org/markup-compatibility/2006">
-    <mc:Choice xmlns:p14="http://schemas.microsoft.com/office/powerpoint/2010/main" Requires="p14">
+  <mc:AlternateContent xmlns:mc="http://schemas.openxmlformats.org/markup-compatibility/2006" xmlns:p14="http://schemas.microsoft.com/office/powerpoint/2010/main">
+    <mc:Choice Requires="p14">
       <p:transition spd="med" p14:dur="700">
         <p:fade/>
       </p:transition>
     </mc:Choice>
-    <mc:Fallback>
+    <mc:Fallback xmlns="">
       <p:transition spd="med">
         <p:fade/>
       </p:transition>
@@ -5245,13 +5243,13 @@
   <p:clrMapOvr>
     <a:masterClrMapping/>
   </p:clrMapOvr>
-  <mc:AlternateContent xmlns:mc="http://schemas.openxmlformats.org/markup-compatibility/2006">
-    <mc:Choice xmlns:p14="http://schemas.microsoft.com/office/powerpoint/2010/main" Requires="p14">
+  <mc:AlternateContent xmlns:mc="http://schemas.openxmlformats.org/markup-compatibility/2006" xmlns:p14="http://schemas.microsoft.com/office/powerpoint/2010/main">
+    <mc:Choice Requires="p14">
       <p:transition spd="med" p14:dur="700">
         <p:fade/>
       </p:transition>
     </mc:Choice>
-    <mc:Fallback>
+    <mc:Fallback xmlns="">
       <p:transition spd="med">
         <p:fade/>
       </p:transition>
@@ -5383,13 +5381,13 @@
   <p:clrMapOvr>
     <a:masterClrMapping/>
   </p:clrMapOvr>
-  <mc:AlternateContent xmlns:mc="http://schemas.openxmlformats.org/markup-compatibility/2006">
-    <mc:Choice xmlns:p14="http://schemas.microsoft.com/office/powerpoint/2010/main" Requires="p14">
+  <mc:AlternateContent xmlns:mc="http://schemas.openxmlformats.org/markup-compatibility/2006" xmlns:p14="http://schemas.microsoft.com/office/powerpoint/2010/main">
+    <mc:Choice Requires="p14">
       <p:transition spd="med" p14:dur="700">
         <p:fade/>
       </p:transition>
     </mc:Choice>
-    <mc:Fallback>
+    <mc:Fallback xmlns="">
       <p:transition spd="med">
         <p:fade/>
       </p:transition>
@@ -5590,13 +5588,13 @@
   <p:clrMapOvr>
     <a:masterClrMapping/>
   </p:clrMapOvr>
-  <mc:AlternateContent xmlns:mc="http://schemas.openxmlformats.org/markup-compatibility/2006">
-    <mc:Choice xmlns:p14="http://schemas.microsoft.com/office/powerpoint/2010/main" Requires="p14">
+  <mc:AlternateContent xmlns:mc="http://schemas.openxmlformats.org/markup-compatibility/2006" xmlns:p14="http://schemas.microsoft.com/office/powerpoint/2010/main">
+    <mc:Choice Requires="p14">
       <p:transition spd="med" p14:dur="700">
         <p:fade/>
       </p:transition>
     </mc:Choice>
-    <mc:Fallback>
+    <mc:Fallback xmlns="">
       <p:transition spd="med">
         <p:fade/>
       </p:transition>

--- a/4_Presentation/Group 3.pptx
+++ b/4_Presentation/Group 3.pptx
@@ -5,7 +5,7 @@
     <p:sldMasterId id="2147483648" r:id="rId1"/>
   </p:sldMasterIdLst>
   <p:notesMasterIdLst>
-    <p:notesMasterId r:id="rId17"/>
+    <p:notesMasterId r:id="rId19"/>
   </p:notesMasterIdLst>
   <p:sldIdLst>
     <p:sldId id="256" r:id="rId2"/>
@@ -23,6 +23,8 @@
     <p:sldId id="264" r:id="rId14"/>
     <p:sldId id="265" r:id="rId15"/>
     <p:sldId id="262" r:id="rId16"/>
+    <p:sldId id="276" r:id="rId17"/>
+    <p:sldId id="275" r:id="rId18"/>
   </p:sldIdLst>
   <p:sldSz cx="12192000" cy="6858000"/>
   <p:notesSz cx="6858000" cy="9144000"/>
@@ -650,7 +652,7 @@
           <a:p>
             <a:fld id="{D702BB35-AE6A-4528-8F32-D1F8A7B871D9}" type="datetimeFigureOut">
               <a:rPr lang="en-GB" smtClean="0"/>
-              <a:t>30/06/2025</a:t>
+              <a:t>01/07/2025</a:t>
             </a:fld>
             <a:endParaRPr lang="en-GB"/>
           </a:p>
@@ -2078,6 +2080,182 @@
 </p:notes>
 </file>
 
+<file path=ppt/notesSlides/notesSlide8.xml><?xml version="1.0" encoding="utf-8"?>
+<p:notes xmlns:a="http://schemas.openxmlformats.org/drawingml/2006/main" xmlns:r="http://schemas.openxmlformats.org/officeDocument/2006/relationships" xmlns:p="http://schemas.openxmlformats.org/presentationml/2006/main">
+  <p:cSld>
+    <p:spTree>
+      <p:nvGrpSpPr>
+        <p:cNvPr id="1" name=""/>
+        <p:cNvGrpSpPr/>
+        <p:nvPr/>
+      </p:nvGrpSpPr>
+      <p:grpSpPr>
+        <a:xfrm>
+          <a:off x="0" y="0"/>
+          <a:ext cx="0" cy="0"/>
+          <a:chOff x="0" y="0"/>
+          <a:chExt cx="0" cy="0"/>
+        </a:xfrm>
+      </p:grpSpPr>
+      <p:sp>
+        <p:nvSpPr>
+          <p:cNvPr id="2" name="Slide Image Placeholder 1"/>
+          <p:cNvSpPr>
+            <a:spLocks noGrp="1" noRot="1" noChangeAspect="1"/>
+          </p:cNvSpPr>
+          <p:nvPr>
+            <p:ph type="sldImg"/>
+          </p:nvPr>
+        </p:nvSpPr>
+        <p:spPr/>
+      </p:sp>
+      <p:sp>
+        <p:nvSpPr>
+          <p:cNvPr id="3" name="Notes Placeholder 2"/>
+          <p:cNvSpPr>
+            <a:spLocks noGrp="1"/>
+          </p:cNvSpPr>
+          <p:nvPr>
+            <p:ph type="body" idx="1"/>
+          </p:nvPr>
+        </p:nvSpPr>
+        <p:spPr/>
+        <p:txBody>
+          <a:bodyPr/>
+          <a:lstStyle/>
+          <a:p>
+            <a:r>
+              <a:rPr lang="en-US"/>
+              <a:t>Under construction</a:t>
+            </a:r>
+            <a:endParaRPr lang="en-GB" dirty="0"/>
+          </a:p>
+        </p:txBody>
+      </p:sp>
+      <p:sp>
+        <p:nvSpPr>
+          <p:cNvPr id="4" name="Slide Number Placeholder 3"/>
+          <p:cNvSpPr>
+            <a:spLocks noGrp="1"/>
+          </p:cNvSpPr>
+          <p:nvPr>
+            <p:ph type="sldNum" sz="quarter" idx="5"/>
+          </p:nvPr>
+        </p:nvSpPr>
+        <p:spPr/>
+        <p:txBody>
+          <a:bodyPr/>
+          <a:lstStyle/>
+          <a:p>
+            <a:fld id="{809340A9-5F99-47E5-A3AD-FD228EA849F8}" type="slidenum">
+              <a:rPr lang="en-GB" smtClean="0"/>
+              <a:t>16</a:t>
+            </a:fld>
+            <a:endParaRPr lang="en-GB"/>
+          </a:p>
+        </p:txBody>
+      </p:sp>
+    </p:spTree>
+    <p:extLst>
+      <p:ext uri="{BB962C8B-B14F-4D97-AF65-F5344CB8AC3E}">
+        <p14:creationId xmlns:p14="http://schemas.microsoft.com/office/powerpoint/2010/main" val="3287434431"/>
+      </p:ext>
+    </p:extLst>
+  </p:cSld>
+  <p:clrMapOvr>
+    <a:masterClrMapping/>
+  </p:clrMapOvr>
+</p:notes>
+</file>
+
+<file path=ppt/notesSlides/notesSlide9.xml><?xml version="1.0" encoding="utf-8"?>
+<p:notes xmlns:a="http://schemas.openxmlformats.org/drawingml/2006/main" xmlns:r="http://schemas.openxmlformats.org/officeDocument/2006/relationships" xmlns:p="http://schemas.openxmlformats.org/presentationml/2006/main">
+  <p:cSld>
+    <p:spTree>
+      <p:nvGrpSpPr>
+        <p:cNvPr id="1" name=""/>
+        <p:cNvGrpSpPr/>
+        <p:nvPr/>
+      </p:nvGrpSpPr>
+      <p:grpSpPr>
+        <a:xfrm>
+          <a:off x="0" y="0"/>
+          <a:ext cx="0" cy="0"/>
+          <a:chOff x="0" y="0"/>
+          <a:chExt cx="0" cy="0"/>
+        </a:xfrm>
+      </p:grpSpPr>
+      <p:sp>
+        <p:nvSpPr>
+          <p:cNvPr id="2" name="Slide Image Placeholder 1"/>
+          <p:cNvSpPr>
+            <a:spLocks noGrp="1" noRot="1" noChangeAspect="1"/>
+          </p:cNvSpPr>
+          <p:nvPr>
+            <p:ph type="sldImg"/>
+          </p:nvPr>
+        </p:nvSpPr>
+        <p:spPr/>
+      </p:sp>
+      <p:sp>
+        <p:nvSpPr>
+          <p:cNvPr id="3" name="Notes Placeholder 2"/>
+          <p:cNvSpPr>
+            <a:spLocks noGrp="1"/>
+          </p:cNvSpPr>
+          <p:nvPr>
+            <p:ph type="body" idx="1"/>
+          </p:nvPr>
+        </p:nvSpPr>
+        <p:spPr/>
+        <p:txBody>
+          <a:bodyPr/>
+          <a:lstStyle/>
+          <a:p>
+            <a:r>
+              <a:rPr lang="en-US" dirty="0"/>
+              <a:t>Will make it prettier but I think those are the points I want to talk about , you can also add yours and we can share this part so that we both talk about our experience</a:t>
+            </a:r>
+            <a:endParaRPr lang="en-GB" dirty="0"/>
+          </a:p>
+        </p:txBody>
+      </p:sp>
+      <p:sp>
+        <p:nvSpPr>
+          <p:cNvPr id="4" name="Slide Number Placeholder 3"/>
+          <p:cNvSpPr>
+            <a:spLocks noGrp="1"/>
+          </p:cNvSpPr>
+          <p:nvPr>
+            <p:ph type="sldNum" sz="quarter" idx="5"/>
+          </p:nvPr>
+        </p:nvSpPr>
+        <p:spPr/>
+        <p:txBody>
+          <a:bodyPr/>
+          <a:lstStyle/>
+          <a:p>
+            <a:fld id="{809340A9-5F99-47E5-A3AD-FD228EA849F8}" type="slidenum">
+              <a:rPr lang="en-GB" smtClean="0"/>
+              <a:t>17</a:t>
+            </a:fld>
+            <a:endParaRPr lang="en-GB"/>
+          </a:p>
+        </p:txBody>
+      </p:sp>
+    </p:spTree>
+    <p:extLst>
+      <p:ext uri="{BB962C8B-B14F-4D97-AF65-F5344CB8AC3E}">
+        <p14:creationId xmlns:p14="http://schemas.microsoft.com/office/powerpoint/2010/main" val="2013060265"/>
+      </p:ext>
+    </p:extLst>
+  </p:cSld>
+  <p:clrMapOvr>
+    <a:masterClrMapping/>
+  </p:clrMapOvr>
+</p:notes>
+</file>
+
 <file path=ppt/slideLayouts/slideLayout1.xml><?xml version="1.0" encoding="utf-8"?>
 <p:sldLayout xmlns:a="http://schemas.openxmlformats.org/drawingml/2006/main" xmlns:r="http://schemas.openxmlformats.org/officeDocument/2006/relationships" xmlns:p="http://schemas.openxmlformats.org/presentationml/2006/main" type="title" preserve="1">
   <p:cSld name="Title Slide">
@@ -2227,7 +2405,7 @@
           <a:p>
             <a:fld id="{BC38F1CC-ABF1-4C16-BBB2-7CC8083DBD41}" type="datetime1">
               <a:rPr lang="de-DE" smtClean="0"/>
-              <a:t>30.06.2025</a:t>
+              <a:t>01.07.2025</a:t>
             </a:fld>
             <a:endParaRPr lang="de-DE"/>
           </a:p>
@@ -2427,7 +2605,7 @@
           <a:p>
             <a:fld id="{5AD46073-F360-4B03-9A78-9F6E24BF38BF}" type="datetime1">
               <a:rPr lang="de-DE" smtClean="0"/>
-              <a:t>30.06.2025</a:t>
+              <a:t>01.07.2025</a:t>
             </a:fld>
             <a:endParaRPr lang="de-DE"/>
           </a:p>
@@ -2637,7 +2815,7 @@
           <a:p>
             <a:fld id="{60947668-F355-4DBF-B716-42DB1C64DFB7}" type="datetime1">
               <a:rPr lang="de-DE" smtClean="0"/>
-              <a:t>30.06.2025</a:t>
+              <a:t>01.07.2025</a:t>
             </a:fld>
             <a:endParaRPr lang="de-DE"/>
           </a:p>
@@ -2837,7 +3015,7 @@
           <a:p>
             <a:fld id="{CA09A6BA-2653-433C-BA9E-57AD9EE3A712}" type="datetime1">
               <a:rPr lang="de-DE" smtClean="0"/>
-              <a:t>30.06.2025</a:t>
+              <a:t>01.07.2025</a:t>
             </a:fld>
             <a:endParaRPr lang="de-DE"/>
           </a:p>
@@ -3113,7 +3291,7 @@
           <a:p>
             <a:fld id="{088226A6-5467-47C4-B46A-D1C4752B6C50}" type="datetime1">
               <a:rPr lang="de-DE" smtClean="0"/>
-              <a:t>30.06.2025</a:t>
+              <a:t>01.07.2025</a:t>
             </a:fld>
             <a:endParaRPr lang="de-DE"/>
           </a:p>
@@ -3381,7 +3559,7 @@
           <a:p>
             <a:fld id="{4DAD014D-DF7A-4A17-BE70-CBDCCD05F312}" type="datetime1">
               <a:rPr lang="de-DE" smtClean="0"/>
-              <a:t>30.06.2025</a:t>
+              <a:t>01.07.2025</a:t>
             </a:fld>
             <a:endParaRPr lang="de-DE"/>
           </a:p>
@@ -3796,7 +3974,7 @@
           <a:p>
             <a:fld id="{3DB58879-59D9-4DFD-ACCE-8F9DA76AC11D}" type="datetime1">
               <a:rPr lang="de-DE" smtClean="0"/>
-              <a:t>30.06.2025</a:t>
+              <a:t>01.07.2025</a:t>
             </a:fld>
             <a:endParaRPr lang="de-DE"/>
           </a:p>
@@ -3938,7 +4116,7 @@
           <a:p>
             <a:fld id="{1D668223-0355-4A47-87D8-E56CD5791C42}" type="datetime1">
               <a:rPr lang="de-DE" smtClean="0"/>
-              <a:t>30.06.2025</a:t>
+              <a:t>01.07.2025</a:t>
             </a:fld>
             <a:endParaRPr lang="de-DE"/>
           </a:p>
@@ -4051,7 +4229,7 @@
           <a:p>
             <a:fld id="{EC3C88DA-2725-48DA-8CAB-E21C779E0A52}" type="datetime1">
               <a:rPr lang="de-DE" smtClean="0"/>
-              <a:t>30.06.2025</a:t>
+              <a:t>01.07.2025</a:t>
             </a:fld>
             <a:endParaRPr lang="de-DE"/>
           </a:p>
@@ -4364,7 +4542,7 @@
           <a:p>
             <a:fld id="{F6DFF235-647B-4139-A6C7-FD3E9D31CB9A}" type="datetime1">
               <a:rPr lang="de-DE" smtClean="0"/>
-              <a:t>30.06.2025</a:t>
+              <a:t>01.07.2025</a:t>
             </a:fld>
             <a:endParaRPr lang="de-DE"/>
           </a:p>
@@ -4653,7 +4831,7 @@
           <a:p>
             <a:fld id="{7D1839DE-6FAF-4E43-BF2D-2423A301DC2E}" type="datetime1">
               <a:rPr lang="de-DE" smtClean="0"/>
-              <a:t>30.06.2025</a:t>
+              <a:t>01.07.2025</a:t>
             </a:fld>
             <a:endParaRPr lang="de-DE"/>
           </a:p>
@@ -4896,7 +5074,7 @@
           <a:p>
             <a:fld id="{CC0A0AA2-7FF6-400D-97F4-AF38EF94CB43}" type="datetime1">
               <a:rPr lang="de-DE" smtClean="0"/>
-              <a:t>30.06.2025</a:t>
+              <a:t>01.07.2025</a:t>
             </a:fld>
             <a:endParaRPr lang="de-DE"/>
           </a:p>
@@ -7067,6 +7245,321 @@
 </p:sld>
 </file>
 
+<file path=ppt/slides/slide16.xml><?xml version="1.0" encoding="utf-8"?>
+<p:sld xmlns:a="http://schemas.openxmlformats.org/drawingml/2006/main" xmlns:r="http://schemas.openxmlformats.org/officeDocument/2006/relationships" xmlns:p="http://schemas.openxmlformats.org/presentationml/2006/main">
+  <p:cSld>
+    <p:spTree>
+      <p:nvGrpSpPr>
+        <p:cNvPr id="1" name=""/>
+        <p:cNvGrpSpPr/>
+        <p:nvPr/>
+      </p:nvGrpSpPr>
+      <p:grpSpPr>
+        <a:xfrm>
+          <a:off x="0" y="0"/>
+          <a:ext cx="0" cy="0"/>
+          <a:chOff x="0" y="0"/>
+          <a:chExt cx="0" cy="0"/>
+        </a:xfrm>
+      </p:grpSpPr>
+      <p:sp>
+        <p:nvSpPr>
+          <p:cNvPr id="2" name="Title 1">
+            <a:extLst>
+              <a:ext uri="{FF2B5EF4-FFF2-40B4-BE49-F238E27FC236}">
+                <a16:creationId xmlns:a16="http://schemas.microsoft.com/office/drawing/2014/main" id="{5FB3238F-1ACA-C1E0-44A5-4EB3923A29C9}"/>
+              </a:ext>
+            </a:extLst>
+          </p:cNvPr>
+          <p:cNvSpPr>
+            <a:spLocks noGrp="1"/>
+          </p:cNvSpPr>
+          <p:nvPr>
+            <p:ph type="title"/>
+          </p:nvPr>
+        </p:nvSpPr>
+        <p:spPr/>
+        <p:txBody>
+          <a:bodyPr/>
+          <a:lstStyle/>
+          <a:p>
+            <a:r>
+              <a:rPr lang="en-US" dirty="0"/>
+              <a:t>Slide for the 0.18081 model in Kaggle</a:t>
+            </a:r>
+            <a:endParaRPr lang="en-GB" dirty="0"/>
+          </a:p>
+        </p:txBody>
+      </p:sp>
+      <p:sp>
+        <p:nvSpPr>
+          <p:cNvPr id="3" name="Content Placeholder 2">
+            <a:extLst>
+              <a:ext uri="{FF2B5EF4-FFF2-40B4-BE49-F238E27FC236}">
+                <a16:creationId xmlns:a16="http://schemas.microsoft.com/office/drawing/2014/main" id="{0815AB4C-65C2-DA76-D1CE-89CCEC02A309}"/>
+              </a:ext>
+            </a:extLst>
+          </p:cNvPr>
+          <p:cNvSpPr>
+            <a:spLocks noGrp="1"/>
+          </p:cNvSpPr>
+          <p:nvPr>
+            <p:ph sz="half" idx="1"/>
+          </p:nvPr>
+        </p:nvSpPr>
+        <p:spPr/>
+        <p:txBody>
+          <a:bodyPr/>
+          <a:lstStyle/>
+          <a:p>
+            <a:r>
+              <a:rPr lang="en-US" dirty="0"/>
+              <a:t>Add the Features I used</a:t>
+            </a:r>
+          </a:p>
+          <a:p>
+            <a:r>
+              <a:rPr lang="en-US" dirty="0"/>
+              <a:t>Model</a:t>
+            </a:r>
+          </a:p>
+          <a:p>
+            <a:r>
+              <a:rPr lang="en-US" dirty="0" err="1"/>
+              <a:t>Hyperparams</a:t>
+            </a:r>
+            <a:endParaRPr lang="en-US" dirty="0"/>
+          </a:p>
+          <a:p>
+            <a:r>
+              <a:rPr lang="en-US" dirty="0"/>
+              <a:t>Loss plot </a:t>
+            </a:r>
+          </a:p>
+          <a:p>
+            <a:r>
+              <a:rPr lang="en-US" dirty="0"/>
+              <a:t>MAPEs per prod group</a:t>
+            </a:r>
+          </a:p>
+        </p:txBody>
+      </p:sp>
+      <p:sp>
+        <p:nvSpPr>
+          <p:cNvPr id="4" name="Content Placeholder 3">
+            <a:extLst>
+              <a:ext uri="{FF2B5EF4-FFF2-40B4-BE49-F238E27FC236}">
+                <a16:creationId xmlns:a16="http://schemas.microsoft.com/office/drawing/2014/main" id="{46446D31-CD88-7EF2-2905-04B3365173EF}"/>
+              </a:ext>
+            </a:extLst>
+          </p:cNvPr>
+          <p:cNvSpPr>
+            <a:spLocks noGrp="1"/>
+          </p:cNvSpPr>
+          <p:nvPr>
+            <p:ph sz="half" idx="2"/>
+          </p:nvPr>
+        </p:nvSpPr>
+        <p:spPr/>
+        <p:txBody>
+          <a:bodyPr/>
+          <a:lstStyle/>
+          <a:p>
+            <a:endParaRPr lang="en-GB"/>
+          </a:p>
+        </p:txBody>
+      </p:sp>
+      <p:sp>
+        <p:nvSpPr>
+          <p:cNvPr id="5" name="Slide Number Placeholder 4">
+            <a:extLst>
+              <a:ext uri="{FF2B5EF4-FFF2-40B4-BE49-F238E27FC236}">
+                <a16:creationId xmlns:a16="http://schemas.microsoft.com/office/drawing/2014/main" id="{91904265-9121-893C-C8DF-6C777767E7D7}"/>
+              </a:ext>
+            </a:extLst>
+          </p:cNvPr>
+          <p:cNvSpPr>
+            <a:spLocks noGrp="1"/>
+          </p:cNvSpPr>
+          <p:nvPr>
+            <p:ph type="sldNum" sz="quarter" idx="12"/>
+          </p:nvPr>
+        </p:nvSpPr>
+        <p:spPr/>
+        <p:txBody>
+          <a:bodyPr/>
+          <a:lstStyle/>
+          <a:p>
+            <a:fld id="{FEE63D0E-FFEF-43D1-BE35-64C33AF422FD}" type="slidenum">
+              <a:rPr lang="de-DE" smtClean="0"/>
+              <a:t>16</a:t>
+            </a:fld>
+            <a:endParaRPr lang="de-DE"/>
+          </a:p>
+        </p:txBody>
+      </p:sp>
+    </p:spTree>
+    <p:extLst>
+      <p:ext uri="{BB962C8B-B14F-4D97-AF65-F5344CB8AC3E}">
+        <p14:creationId xmlns:p14="http://schemas.microsoft.com/office/powerpoint/2010/main" val="3404754989"/>
+      </p:ext>
+    </p:extLst>
+  </p:cSld>
+  <p:clrMapOvr>
+    <a:masterClrMapping/>
+  </p:clrMapOvr>
+</p:sld>
+</file>
+
+<file path=ppt/slides/slide17.xml><?xml version="1.0" encoding="utf-8"?>
+<p:sld xmlns:a="http://schemas.openxmlformats.org/drawingml/2006/main" xmlns:r="http://schemas.openxmlformats.org/officeDocument/2006/relationships" xmlns:p="http://schemas.openxmlformats.org/presentationml/2006/main">
+  <p:cSld>
+    <p:spTree>
+      <p:nvGrpSpPr>
+        <p:cNvPr id="1" name=""/>
+        <p:cNvGrpSpPr/>
+        <p:nvPr/>
+      </p:nvGrpSpPr>
+      <p:grpSpPr>
+        <a:xfrm>
+          <a:off x="0" y="0"/>
+          <a:ext cx="0" cy="0"/>
+          <a:chOff x="0" y="0"/>
+          <a:chExt cx="0" cy="0"/>
+        </a:xfrm>
+      </p:grpSpPr>
+      <p:sp>
+        <p:nvSpPr>
+          <p:cNvPr id="2" name="Title 1">
+            <a:extLst>
+              <a:ext uri="{FF2B5EF4-FFF2-40B4-BE49-F238E27FC236}">
+                <a16:creationId xmlns:a16="http://schemas.microsoft.com/office/drawing/2014/main" id="{29CF6418-DACC-03E6-70E9-910D55646865}"/>
+              </a:ext>
+            </a:extLst>
+          </p:cNvPr>
+          <p:cNvSpPr>
+            <a:spLocks noGrp="1"/>
+          </p:cNvSpPr>
+          <p:nvPr>
+            <p:ph type="title"/>
+          </p:nvPr>
+        </p:nvSpPr>
+        <p:spPr/>
+        <p:txBody>
+          <a:bodyPr/>
+          <a:lstStyle/>
+          <a:p>
+            <a:r>
+              <a:rPr lang="en-US" dirty="0"/>
+              <a:t>Challenges</a:t>
+            </a:r>
+            <a:endParaRPr lang="en-GB" dirty="0"/>
+          </a:p>
+        </p:txBody>
+      </p:sp>
+      <p:sp>
+        <p:nvSpPr>
+          <p:cNvPr id="3" name="Content Placeholder 2">
+            <a:extLst>
+              <a:ext uri="{FF2B5EF4-FFF2-40B4-BE49-F238E27FC236}">
+                <a16:creationId xmlns:a16="http://schemas.microsoft.com/office/drawing/2014/main" id="{E136724B-10E4-4F2B-608F-1474C2F84956}"/>
+              </a:ext>
+            </a:extLst>
+          </p:cNvPr>
+          <p:cNvSpPr>
+            <a:spLocks noGrp="1"/>
+          </p:cNvSpPr>
+          <p:nvPr>
+            <p:ph sz="half" idx="1"/>
+          </p:nvPr>
+        </p:nvSpPr>
+        <p:spPr>
+          <a:xfrm>
+            <a:off x="838199" y="1825625"/>
+            <a:ext cx="10023389" cy="4351338"/>
+          </a:xfrm>
+        </p:spPr>
+        <p:txBody>
+          <a:bodyPr/>
+          <a:lstStyle/>
+          <a:p>
+            <a:r>
+              <a:rPr lang="en-US" dirty="0"/>
+              <a:t>Select features</a:t>
+            </a:r>
+            <a:r>
+              <a:rPr lang="en-GB" dirty="0"/>
+              <a:t> &amp; Overfitting</a:t>
+            </a:r>
+          </a:p>
+          <a:p>
+            <a:endParaRPr lang="en-GB" dirty="0"/>
+          </a:p>
+          <a:p>
+            <a:r>
+              <a:rPr lang="en-GB" dirty="0"/>
+              <a:t>To Predict Group 5+ 6</a:t>
+            </a:r>
+          </a:p>
+          <a:p>
+            <a:endParaRPr lang="en-GB" dirty="0"/>
+          </a:p>
+          <a:p>
+            <a:r>
+              <a:rPr lang="en-GB" dirty="0"/>
+              <a:t>Biggest Improvement &gt; (maybe to remove variables that caused overfitting)</a:t>
+            </a:r>
+          </a:p>
+          <a:p>
+            <a:endParaRPr lang="en-GB" dirty="0"/>
+          </a:p>
+          <a:p>
+            <a:endParaRPr lang="en-US" dirty="0"/>
+          </a:p>
+        </p:txBody>
+      </p:sp>
+      <p:sp>
+        <p:nvSpPr>
+          <p:cNvPr id="5" name="Slide Number Placeholder 4">
+            <a:extLst>
+              <a:ext uri="{FF2B5EF4-FFF2-40B4-BE49-F238E27FC236}">
+                <a16:creationId xmlns:a16="http://schemas.microsoft.com/office/drawing/2014/main" id="{78B1F11F-D0B4-0880-8C7A-A219022B35E2}"/>
+              </a:ext>
+            </a:extLst>
+          </p:cNvPr>
+          <p:cNvSpPr>
+            <a:spLocks noGrp="1"/>
+          </p:cNvSpPr>
+          <p:nvPr>
+            <p:ph type="sldNum" sz="quarter" idx="12"/>
+          </p:nvPr>
+        </p:nvSpPr>
+        <p:spPr/>
+        <p:txBody>
+          <a:bodyPr/>
+          <a:lstStyle/>
+          <a:p>
+            <a:fld id="{FEE63D0E-FFEF-43D1-BE35-64C33AF422FD}" type="slidenum">
+              <a:rPr lang="de-DE" smtClean="0"/>
+              <a:t>17</a:t>
+            </a:fld>
+            <a:endParaRPr lang="de-DE"/>
+          </a:p>
+        </p:txBody>
+      </p:sp>
+    </p:spTree>
+    <p:extLst>
+      <p:ext uri="{BB962C8B-B14F-4D97-AF65-F5344CB8AC3E}">
+        <p14:creationId xmlns:p14="http://schemas.microsoft.com/office/powerpoint/2010/main" val="4069435508"/>
+      </p:ext>
+    </p:extLst>
+  </p:cSld>
+  <p:clrMapOvr>
+    <a:masterClrMapping/>
+  </p:clrMapOvr>
+</p:sld>
+</file>
+
 <file path=ppt/slides/slide2.xml><?xml version="1.0" encoding="utf-8"?>
 <p:sld xmlns:a="http://schemas.openxmlformats.org/drawingml/2006/main" xmlns:r="http://schemas.openxmlformats.org/officeDocument/2006/relationships" xmlns:p="http://schemas.openxmlformats.org/presentationml/2006/main">
   <p:cSld>
@@ -13851,8 +14344,8 @@
           </a:prstGeom>
         </p:spPr>
       </p:pic>
-      <mc:AlternateContent xmlns:mc="http://schemas.openxmlformats.org/markup-compatibility/2006">
-        <mc:Choice xmlns:p14="http://schemas.microsoft.com/office/powerpoint/2010/main" Requires="p14">
+      <mc:AlternateContent xmlns:mc="http://schemas.openxmlformats.org/markup-compatibility/2006" xmlns:p14="http://schemas.microsoft.com/office/powerpoint/2010/main">
+        <mc:Choice Requires="p14">
           <p:contentPart p14:bwMode="auto" r:id="rId4">
             <p14:nvContentPartPr>
               <p14:cNvPr id="15" name="Ink 14">
@@ -13871,7 +14364,7 @@
             </p14:xfrm>
           </p:contentPart>
         </mc:Choice>
-        <mc:Fallback>
+        <mc:Fallback xmlns="">
           <p:pic>
             <p:nvPicPr>
               <p:cNvPr id="15" name="Ink 14">
@@ -13902,8 +14395,8 @@
           </p:pic>
         </mc:Fallback>
       </mc:AlternateContent>
-      <mc:AlternateContent xmlns:mc="http://schemas.openxmlformats.org/markup-compatibility/2006">
-        <mc:Choice xmlns:p14="http://schemas.microsoft.com/office/powerpoint/2010/main" Requires="p14">
+      <mc:AlternateContent xmlns:mc="http://schemas.openxmlformats.org/markup-compatibility/2006" xmlns:p14="http://schemas.microsoft.com/office/powerpoint/2010/main">
+        <mc:Choice Requires="p14">
           <p:contentPart p14:bwMode="auto" r:id="rId6">
             <p14:nvContentPartPr>
               <p14:cNvPr id="16" name="Ink 15">
@@ -13922,7 +14415,7 @@
             </p14:xfrm>
           </p:contentPart>
         </mc:Choice>
-        <mc:Fallback>
+        <mc:Fallback xmlns="">
           <p:pic>
             <p:nvPicPr>
               <p:cNvPr id="16" name="Ink 15">
@@ -13953,8 +14446,8 @@
           </p:pic>
         </mc:Fallback>
       </mc:AlternateContent>
-      <mc:AlternateContent xmlns:mc="http://schemas.openxmlformats.org/markup-compatibility/2006">
-        <mc:Choice xmlns:p14="http://schemas.microsoft.com/office/powerpoint/2010/main" Requires="p14">
+      <mc:AlternateContent xmlns:mc="http://schemas.openxmlformats.org/markup-compatibility/2006" xmlns:p14="http://schemas.microsoft.com/office/powerpoint/2010/main">
+        <mc:Choice Requires="p14">
           <p:contentPart p14:bwMode="auto" r:id="rId8">
             <p14:nvContentPartPr>
               <p14:cNvPr id="18" name="Ink 17">
@@ -13973,7 +14466,7 @@
             </p14:xfrm>
           </p:contentPart>
         </mc:Choice>
-        <mc:Fallback>
+        <mc:Fallback xmlns="">
           <p:pic>
             <p:nvPicPr>
               <p:cNvPr id="18" name="Ink 17">
@@ -14004,8 +14497,8 @@
           </p:pic>
         </mc:Fallback>
       </mc:AlternateContent>
-      <mc:AlternateContent xmlns:mc="http://schemas.openxmlformats.org/markup-compatibility/2006">
-        <mc:Choice xmlns:p14="http://schemas.microsoft.com/office/powerpoint/2010/main" Requires="p14">
+      <mc:AlternateContent xmlns:mc="http://schemas.openxmlformats.org/markup-compatibility/2006" xmlns:p14="http://schemas.microsoft.com/office/powerpoint/2010/main">
+        <mc:Choice Requires="p14">
           <p:contentPart p14:bwMode="auto" r:id="rId10">
             <p14:nvContentPartPr>
               <p14:cNvPr id="19" name="Ink 18">
@@ -14024,7 +14517,7 @@
             </p14:xfrm>
           </p:contentPart>
         </mc:Choice>
-        <mc:Fallback>
+        <mc:Fallback xmlns="">
           <p:pic>
             <p:nvPicPr>
               <p:cNvPr id="19" name="Ink 18">
@@ -14055,8 +14548,8 @@
           </p:pic>
         </mc:Fallback>
       </mc:AlternateContent>
-      <mc:AlternateContent xmlns:mc="http://schemas.openxmlformats.org/markup-compatibility/2006">
-        <mc:Choice xmlns:p14="http://schemas.microsoft.com/office/powerpoint/2010/main" Requires="p14">
+      <mc:AlternateContent xmlns:mc="http://schemas.openxmlformats.org/markup-compatibility/2006" xmlns:p14="http://schemas.microsoft.com/office/powerpoint/2010/main">
+        <mc:Choice Requires="p14">
           <p:contentPart p14:bwMode="auto" r:id="rId12">
             <p14:nvContentPartPr>
               <p14:cNvPr id="20" name="Ink 19">
@@ -14075,7 +14568,7 @@
             </p14:xfrm>
           </p:contentPart>
         </mc:Choice>
-        <mc:Fallback>
+        <mc:Fallback xmlns="">
           <p:pic>
             <p:nvPicPr>
               <p:cNvPr id="20" name="Ink 19">
@@ -14106,8 +14599,8 @@
           </p:pic>
         </mc:Fallback>
       </mc:AlternateContent>
-      <mc:AlternateContent xmlns:mc="http://schemas.openxmlformats.org/markup-compatibility/2006">
-        <mc:Choice xmlns:p14="http://schemas.microsoft.com/office/powerpoint/2010/main" Requires="p14">
+      <mc:AlternateContent xmlns:mc="http://schemas.openxmlformats.org/markup-compatibility/2006" xmlns:p14="http://schemas.microsoft.com/office/powerpoint/2010/main">
+        <mc:Choice Requires="p14">
           <p:contentPart p14:bwMode="auto" r:id="rId14">
             <p14:nvContentPartPr>
               <p14:cNvPr id="21" name="Ink 20">
@@ -14126,7 +14619,7 @@
             </p14:xfrm>
           </p:contentPart>
         </mc:Choice>
-        <mc:Fallback>
+        <mc:Fallback xmlns="">
           <p:pic>
             <p:nvPicPr>
               <p:cNvPr id="21" name="Ink 20">
@@ -14157,8 +14650,8 @@
           </p:pic>
         </mc:Fallback>
       </mc:AlternateContent>
-      <mc:AlternateContent xmlns:mc="http://schemas.openxmlformats.org/markup-compatibility/2006">
-        <mc:Choice xmlns:p14="http://schemas.microsoft.com/office/powerpoint/2010/main" Requires="p14">
+      <mc:AlternateContent xmlns:mc="http://schemas.openxmlformats.org/markup-compatibility/2006" xmlns:p14="http://schemas.microsoft.com/office/powerpoint/2010/main">
+        <mc:Choice Requires="p14">
           <p:contentPart p14:bwMode="auto" r:id="rId16">
             <p14:nvContentPartPr>
               <p14:cNvPr id="22" name="Ink 21">
@@ -14177,7 +14670,7 @@
             </p14:xfrm>
           </p:contentPart>
         </mc:Choice>
-        <mc:Fallback>
+        <mc:Fallback xmlns="">
           <p:pic>
             <p:nvPicPr>
               <p:cNvPr id="22" name="Ink 21">
@@ -14384,8 +14877,8 @@
           </a:prstGeom>
         </p:spPr>
       </p:pic>
-      <mc:AlternateContent xmlns:mc="http://schemas.openxmlformats.org/markup-compatibility/2006">
-        <mc:Choice xmlns:p14="http://schemas.microsoft.com/office/powerpoint/2010/main" Requires="p14">
+      <mc:AlternateContent xmlns:mc="http://schemas.openxmlformats.org/markup-compatibility/2006" xmlns:p14="http://schemas.microsoft.com/office/powerpoint/2010/main">
+        <mc:Choice Requires="p14">
           <p:contentPart p14:bwMode="auto" r:id="rId20">
             <p14:nvContentPartPr>
               <p14:cNvPr id="24" name="Ink 23">
@@ -14404,7 +14897,7 @@
             </p14:xfrm>
           </p:contentPart>
         </mc:Choice>
-        <mc:Fallback>
+        <mc:Fallback xmlns="">
           <p:pic>
             <p:nvPicPr>
               <p:cNvPr id="24" name="Ink 23">
@@ -14835,8 +15328,8 @@
           </a:prstGeom>
         </p:spPr>
       </p:pic>
-      <mc:AlternateContent xmlns:mc="http://schemas.openxmlformats.org/markup-compatibility/2006">
-        <mc:Choice xmlns:p14="http://schemas.microsoft.com/office/powerpoint/2010/main" Requires="p14">
+      <mc:AlternateContent xmlns:mc="http://schemas.openxmlformats.org/markup-compatibility/2006" xmlns:p14="http://schemas.microsoft.com/office/powerpoint/2010/main">
+        <mc:Choice Requires="p14">
           <p:contentPart p14:bwMode="auto" r:id="rId4">
             <p14:nvContentPartPr>
               <p14:cNvPr id="15" name="Ink 14">
@@ -14855,7 +15348,7 @@
             </p14:xfrm>
           </p:contentPart>
         </mc:Choice>
-        <mc:Fallback>
+        <mc:Fallback xmlns="">
           <p:pic>
             <p:nvPicPr>
               <p:cNvPr id="15" name="Ink 14">
@@ -14886,8 +15379,8 @@
           </p:pic>
         </mc:Fallback>
       </mc:AlternateContent>
-      <mc:AlternateContent xmlns:mc="http://schemas.openxmlformats.org/markup-compatibility/2006">
-        <mc:Choice xmlns:p14="http://schemas.microsoft.com/office/powerpoint/2010/main" Requires="p14">
+      <mc:AlternateContent xmlns:mc="http://schemas.openxmlformats.org/markup-compatibility/2006" xmlns:p14="http://schemas.microsoft.com/office/powerpoint/2010/main">
+        <mc:Choice Requires="p14">
           <p:contentPart p14:bwMode="auto" r:id="rId6">
             <p14:nvContentPartPr>
               <p14:cNvPr id="16" name="Ink 15">
@@ -14906,7 +15399,7 @@
             </p14:xfrm>
           </p:contentPart>
         </mc:Choice>
-        <mc:Fallback>
+        <mc:Fallback xmlns="">
           <p:pic>
             <p:nvPicPr>
               <p:cNvPr id="16" name="Ink 15">
@@ -14937,8 +15430,8 @@
           </p:pic>
         </mc:Fallback>
       </mc:AlternateContent>
-      <mc:AlternateContent xmlns:mc="http://schemas.openxmlformats.org/markup-compatibility/2006">
-        <mc:Choice xmlns:p14="http://schemas.microsoft.com/office/powerpoint/2010/main" Requires="p14">
+      <mc:AlternateContent xmlns:mc="http://schemas.openxmlformats.org/markup-compatibility/2006" xmlns:p14="http://schemas.microsoft.com/office/powerpoint/2010/main">
+        <mc:Choice Requires="p14">
           <p:contentPart p14:bwMode="auto" r:id="rId8">
             <p14:nvContentPartPr>
               <p14:cNvPr id="18" name="Ink 17">
@@ -14957,7 +15450,7 @@
             </p14:xfrm>
           </p:contentPart>
         </mc:Choice>
-        <mc:Fallback>
+        <mc:Fallback xmlns="">
           <p:pic>
             <p:nvPicPr>
               <p:cNvPr id="18" name="Ink 17">
@@ -14988,8 +15481,8 @@
           </p:pic>
         </mc:Fallback>
       </mc:AlternateContent>
-      <mc:AlternateContent xmlns:mc="http://schemas.openxmlformats.org/markup-compatibility/2006">
-        <mc:Choice xmlns:p14="http://schemas.microsoft.com/office/powerpoint/2010/main" Requires="p14">
+      <mc:AlternateContent xmlns:mc="http://schemas.openxmlformats.org/markup-compatibility/2006" xmlns:p14="http://schemas.microsoft.com/office/powerpoint/2010/main">
+        <mc:Choice Requires="p14">
           <p:contentPart p14:bwMode="auto" r:id="rId10">
             <p14:nvContentPartPr>
               <p14:cNvPr id="19" name="Ink 18">
@@ -15008,7 +15501,7 @@
             </p14:xfrm>
           </p:contentPart>
         </mc:Choice>
-        <mc:Fallback>
+        <mc:Fallback xmlns="">
           <p:pic>
             <p:nvPicPr>
               <p:cNvPr id="19" name="Ink 18">
@@ -15039,8 +15532,8 @@
           </p:pic>
         </mc:Fallback>
       </mc:AlternateContent>
-      <mc:AlternateContent xmlns:mc="http://schemas.openxmlformats.org/markup-compatibility/2006">
-        <mc:Choice xmlns:p14="http://schemas.microsoft.com/office/powerpoint/2010/main" Requires="p14">
+      <mc:AlternateContent xmlns:mc="http://schemas.openxmlformats.org/markup-compatibility/2006" xmlns:p14="http://schemas.microsoft.com/office/powerpoint/2010/main">
+        <mc:Choice Requires="p14">
           <p:contentPart p14:bwMode="auto" r:id="rId12">
             <p14:nvContentPartPr>
               <p14:cNvPr id="20" name="Ink 19">
@@ -15059,7 +15552,7 @@
             </p14:xfrm>
           </p:contentPart>
         </mc:Choice>
-        <mc:Fallback>
+        <mc:Fallback xmlns="">
           <p:pic>
             <p:nvPicPr>
               <p:cNvPr id="20" name="Ink 19">
@@ -15090,8 +15583,8 @@
           </p:pic>
         </mc:Fallback>
       </mc:AlternateContent>
-      <mc:AlternateContent xmlns:mc="http://schemas.openxmlformats.org/markup-compatibility/2006">
-        <mc:Choice xmlns:p14="http://schemas.microsoft.com/office/powerpoint/2010/main" Requires="p14">
+      <mc:AlternateContent xmlns:mc="http://schemas.openxmlformats.org/markup-compatibility/2006" xmlns:p14="http://schemas.microsoft.com/office/powerpoint/2010/main">
+        <mc:Choice Requires="p14">
           <p:contentPart p14:bwMode="auto" r:id="rId14">
             <p14:nvContentPartPr>
               <p14:cNvPr id="21" name="Ink 20">
@@ -15110,7 +15603,7 @@
             </p14:xfrm>
           </p:contentPart>
         </mc:Choice>
-        <mc:Fallback>
+        <mc:Fallback xmlns="">
           <p:pic>
             <p:nvPicPr>
               <p:cNvPr id="21" name="Ink 20">
@@ -15141,8 +15634,8 @@
           </p:pic>
         </mc:Fallback>
       </mc:AlternateContent>
-      <mc:AlternateContent xmlns:mc="http://schemas.openxmlformats.org/markup-compatibility/2006">
-        <mc:Choice xmlns:p14="http://schemas.microsoft.com/office/powerpoint/2010/main" Requires="p14">
+      <mc:AlternateContent xmlns:mc="http://schemas.openxmlformats.org/markup-compatibility/2006" xmlns:p14="http://schemas.microsoft.com/office/powerpoint/2010/main">
+        <mc:Choice Requires="p14">
           <p:contentPart p14:bwMode="auto" r:id="rId16">
             <p14:nvContentPartPr>
               <p14:cNvPr id="22" name="Ink 21">
@@ -15161,7 +15654,7 @@
             </p14:xfrm>
           </p:contentPart>
         </mc:Choice>
-        <mc:Fallback>
+        <mc:Fallback xmlns="">
           <p:pic>
             <p:nvPicPr>
               <p:cNvPr id="22" name="Ink 21">

--- a/4_Presentation/Group 3.pptx
+++ b/4_Presentation/Group 3.pptx
@@ -5,31 +5,33 @@
     <p:sldMasterId id="2147483660" r:id="rId1"/>
   </p:sldMasterIdLst>
   <p:notesMasterIdLst>
-    <p:notesMasterId r:id="rId24"/>
+    <p:notesMasterId r:id="rId26"/>
   </p:notesMasterIdLst>
   <p:sldIdLst>
     <p:sldId id="256" r:id="rId2"/>
     <p:sldId id="273" r:id="rId3"/>
     <p:sldId id="277" r:id="rId4"/>
     <p:sldId id="271" r:id="rId5"/>
-    <p:sldId id="278" r:id="rId6"/>
-    <p:sldId id="279" r:id="rId7"/>
-    <p:sldId id="269" r:id="rId8"/>
-    <p:sldId id="260" r:id="rId9"/>
-    <p:sldId id="283" r:id="rId10"/>
-    <p:sldId id="284" r:id="rId11"/>
-    <p:sldId id="285" r:id="rId12"/>
-    <p:sldId id="275" r:id="rId13"/>
-    <p:sldId id="282" r:id="rId14"/>
-    <p:sldId id="280" r:id="rId15"/>
-    <p:sldId id="267" r:id="rId16"/>
-    <p:sldId id="274" r:id="rId17"/>
-    <p:sldId id="268" r:id="rId18"/>
-    <p:sldId id="266" r:id="rId19"/>
-    <p:sldId id="263" r:id="rId20"/>
-    <p:sldId id="264" r:id="rId21"/>
-    <p:sldId id="265" r:id="rId22"/>
-    <p:sldId id="262" r:id="rId23"/>
+    <p:sldId id="287" r:id="rId6"/>
+    <p:sldId id="278" r:id="rId7"/>
+    <p:sldId id="279" r:id="rId8"/>
+    <p:sldId id="269" r:id="rId9"/>
+    <p:sldId id="260" r:id="rId10"/>
+    <p:sldId id="283" r:id="rId11"/>
+    <p:sldId id="284" r:id="rId12"/>
+    <p:sldId id="285" r:id="rId13"/>
+    <p:sldId id="275" r:id="rId14"/>
+    <p:sldId id="282" r:id="rId15"/>
+    <p:sldId id="280" r:id="rId16"/>
+    <p:sldId id="267" r:id="rId17"/>
+    <p:sldId id="274" r:id="rId18"/>
+    <p:sldId id="268" r:id="rId19"/>
+    <p:sldId id="266" r:id="rId20"/>
+    <p:sldId id="263" r:id="rId21"/>
+    <p:sldId id="264" r:id="rId22"/>
+    <p:sldId id="265" r:id="rId23"/>
+    <p:sldId id="262" r:id="rId24"/>
+    <p:sldId id="286" r:id="rId25"/>
   </p:sldIdLst>
   <p:sldSz cx="12192000" cy="6858000"/>
   <p:notesSz cx="6858000" cy="9144000"/>
@@ -1173,10 +1175,6 @@
           <a:bodyPr/>
           <a:lstStyle/>
           <a:p>
-            <a:r>
-              <a:rPr lang="en-US" dirty="0"/>
-              <a:t>Moved the title bit to make some space </a:t>
-            </a:r>
             <a:endParaRPr lang="en-GB" dirty="0"/>
           </a:p>
         </p:txBody>
@@ -1198,7 +1196,678 @@
           <a:p>
             <a:fld id="{809340A9-5F99-47E5-A3AD-FD228EA849F8}" type="slidenum">
               <a:rPr lang="en-GB" smtClean="0"/>
-              <a:t>15</a:t>
+              <a:t>13</a:t>
+            </a:fld>
+            <a:endParaRPr lang="en-GB"/>
+          </a:p>
+        </p:txBody>
+      </p:sp>
+    </p:spTree>
+    <p:extLst>
+      <p:ext uri="{BB962C8B-B14F-4D97-AF65-F5344CB8AC3E}">
+        <p14:creationId xmlns:p14="http://schemas.microsoft.com/office/powerpoint/2010/main" val="2013060265"/>
+      </p:ext>
+    </p:extLst>
+  </p:cSld>
+  <p:clrMapOvr>
+    <a:masterClrMapping/>
+  </p:clrMapOvr>
+</p:notes>
+</file>
+
+<file path=ppt/notesSlides/notesSlide11.xml><?xml version="1.0" encoding="utf-8"?>
+<p:notes xmlns:a="http://schemas.openxmlformats.org/drawingml/2006/main" xmlns:r="http://schemas.openxmlformats.org/officeDocument/2006/relationships" xmlns:p="http://schemas.openxmlformats.org/presentationml/2006/main">
+  <p:cSld>
+    <p:spTree>
+      <p:nvGrpSpPr>
+        <p:cNvPr id="1" name="">
+          <a:extLst>
+            <a:ext uri="{FF2B5EF4-FFF2-40B4-BE49-F238E27FC236}">
+              <a16:creationId xmlns:a16="http://schemas.microsoft.com/office/drawing/2014/main" id="{36D1A59C-214E-3CE4-25F6-24FD5D270DA5}"/>
+            </a:ext>
+          </a:extLst>
+        </p:cNvPr>
+        <p:cNvGrpSpPr/>
+        <p:nvPr/>
+      </p:nvGrpSpPr>
+      <p:grpSpPr>
+        <a:xfrm>
+          <a:off x="0" y="0"/>
+          <a:ext cx="0" cy="0"/>
+          <a:chOff x="0" y="0"/>
+          <a:chExt cx="0" cy="0"/>
+        </a:xfrm>
+      </p:grpSpPr>
+      <p:sp>
+        <p:nvSpPr>
+          <p:cNvPr id="2" name="Slide Image Placeholder 1">
+            <a:extLst>
+              <a:ext uri="{FF2B5EF4-FFF2-40B4-BE49-F238E27FC236}">
+                <a16:creationId xmlns:a16="http://schemas.microsoft.com/office/drawing/2014/main" id="{C5AA0A43-913C-D15D-CAFA-9AA2BC5F3BF5}"/>
+              </a:ext>
+            </a:extLst>
+          </p:cNvPr>
+          <p:cNvSpPr>
+            <a:spLocks noGrp="1" noRot="1" noChangeAspect="1"/>
+          </p:cNvSpPr>
+          <p:nvPr>
+            <p:ph type="sldImg"/>
+          </p:nvPr>
+        </p:nvSpPr>
+        <p:spPr/>
+      </p:sp>
+      <p:sp>
+        <p:nvSpPr>
+          <p:cNvPr id="3" name="Notes Placeholder 2">
+            <a:extLst>
+              <a:ext uri="{FF2B5EF4-FFF2-40B4-BE49-F238E27FC236}">
+                <a16:creationId xmlns:a16="http://schemas.microsoft.com/office/drawing/2014/main" id="{FDA6CD0E-87C3-83FC-092B-F5B4E223907A}"/>
+              </a:ext>
+            </a:extLst>
+          </p:cNvPr>
+          <p:cNvSpPr>
+            <a:spLocks noGrp="1"/>
+          </p:cNvSpPr>
+          <p:nvPr>
+            <p:ph type="body" idx="1"/>
+          </p:nvPr>
+        </p:nvSpPr>
+        <p:spPr/>
+        <p:txBody>
+          <a:bodyPr/>
+          <a:lstStyle/>
+          <a:p>
+            <a:r>
+              <a:rPr lang="en-US" dirty="0"/>
+              <a:t>The photos thing is just a suggestion, </a:t>
+            </a:r>
+            <a:r>
+              <a:rPr lang="en-US" dirty="0" err="1"/>
+              <a:t>i</a:t>
+            </a:r>
+            <a:r>
+              <a:rPr lang="en-US" dirty="0"/>
+              <a:t> find it good idea since people from online never saw us, but I understand if you don’t like it. (stole your linked in photo for that lol)</a:t>
+            </a:r>
+          </a:p>
+          <a:p>
+            <a:endParaRPr lang="en-US" dirty="0"/>
+          </a:p>
+          <a:p>
+            <a:endParaRPr lang="en-US" dirty="0"/>
+          </a:p>
+          <a:p>
+            <a:pPr marL="0" marR="0" lvl="0" indent="0" algn="l" defTabSz="914400" rtl="0" eaLnBrk="1" fontAlgn="auto" latinLnBrk="0" hangingPunct="1">
+              <a:lnSpc>
+                <a:spcPct val="100000"/>
+              </a:lnSpc>
+              <a:spcBef>
+                <a:spcPts val="0"/>
+              </a:spcBef>
+              <a:spcAft>
+                <a:spcPts val="0"/>
+              </a:spcAft>
+              <a:buClrTx/>
+              <a:buSzTx/>
+              <a:buFontTx/>
+              <a:buNone/>
+              <a:tabLst/>
+              <a:defRPr/>
+            </a:pPr>
+            <a:r>
+              <a:rPr lang="en-US" dirty="0"/>
+              <a:t>Also the </a:t>
+            </a:r>
+            <a:r>
+              <a:rPr lang="en-GB" sz="1200" dirty="0">
+                <a:solidFill>
+                  <a:schemeClr val="bg1">
+                    <a:lumMod val="75000"/>
+                  </a:schemeClr>
+                </a:solidFill>
+              </a:rPr>
+              <a:t>Dataset Characteristics </a:t>
+            </a:r>
+            <a:r>
+              <a:rPr lang="en-GB" sz="1200" dirty="0">
+                <a:solidFill>
+                  <a:schemeClr val="bg1">
+                    <a:lumMod val="75000"/>
+                  </a:schemeClr>
+                </a:solidFill>
+                <a:latin typeface="Calibri" panose="020F0502020204030204" pitchFamily="34" charset="0"/>
+                <a:ea typeface="Calibri" panose="020F0502020204030204" pitchFamily="34" charset="0"/>
+                <a:cs typeface="Calibri" panose="020F0502020204030204" pitchFamily="34" charset="0"/>
+              </a:rPr>
+              <a:t>– </a:t>
+            </a:r>
+            <a:r>
+              <a:rPr lang="en-GB" sz="1200" dirty="0">
+                <a:latin typeface="Calibri" panose="020F0502020204030204" pitchFamily="34" charset="0"/>
+                <a:ea typeface="Calibri" panose="020F0502020204030204" pitchFamily="34" charset="0"/>
+                <a:cs typeface="Calibri" panose="020F0502020204030204" pitchFamily="34" charset="0"/>
+              </a:rPr>
+              <a:t>Baseline Model </a:t>
+            </a:r>
+            <a:r>
+              <a:rPr lang="en-GB" sz="1200" dirty="0">
+                <a:solidFill>
+                  <a:schemeClr val="bg1">
+                    <a:lumMod val="75000"/>
+                  </a:schemeClr>
+                </a:solidFill>
+                <a:latin typeface="Calibri" panose="020F0502020204030204" pitchFamily="34" charset="0"/>
+                <a:ea typeface="Calibri" panose="020F0502020204030204" pitchFamily="34" charset="0"/>
+                <a:cs typeface="Calibri" panose="020F0502020204030204" pitchFamily="34" charset="0"/>
+              </a:rPr>
+              <a:t>– Neural Net – Results – Challenges </a:t>
+            </a:r>
+            <a:r>
+              <a:rPr lang="de-DE" sz="1200" dirty="0">
+                <a:solidFill>
+                  <a:schemeClr val="bg1">
+                    <a:lumMod val="75000"/>
+                  </a:schemeClr>
+                </a:solidFill>
+                <a:latin typeface="Calibri" panose="020F0502020204030204" pitchFamily="34" charset="0"/>
+                <a:ea typeface="Calibri" panose="020F0502020204030204" pitchFamily="34" charset="0"/>
+                <a:cs typeface="Calibri" panose="020F0502020204030204" pitchFamily="34" charset="0"/>
+              </a:rPr>
+              <a:t> </a:t>
+            </a:r>
+            <a:r>
+              <a:rPr lang="de-DE" sz="1200" dirty="0" err="1">
+                <a:solidFill>
+                  <a:schemeClr val="bg1">
+                    <a:lumMod val="75000"/>
+                  </a:schemeClr>
+                </a:solidFill>
+                <a:latin typeface="Calibri" panose="020F0502020204030204" pitchFamily="34" charset="0"/>
+                <a:ea typeface="Calibri" panose="020F0502020204030204" pitchFamily="34" charset="0"/>
+                <a:cs typeface="Calibri" panose="020F0502020204030204" pitchFamily="34" charset="0"/>
+              </a:rPr>
+              <a:t>footer</a:t>
+            </a:r>
+            <a:r>
+              <a:rPr lang="de-DE" sz="1200" dirty="0">
+                <a:solidFill>
+                  <a:schemeClr val="bg1">
+                    <a:lumMod val="75000"/>
+                  </a:schemeClr>
+                </a:solidFill>
+                <a:latin typeface="Calibri" panose="020F0502020204030204" pitchFamily="34" charset="0"/>
+                <a:ea typeface="Calibri" panose="020F0502020204030204" pitchFamily="34" charset="0"/>
+                <a:cs typeface="Calibri" panose="020F0502020204030204" pitchFamily="34" charset="0"/>
+              </a:rPr>
+              <a:t> </a:t>
+            </a:r>
+            <a:r>
+              <a:rPr lang="de-DE" sz="1200" dirty="0" err="1">
+                <a:solidFill>
+                  <a:schemeClr val="bg1">
+                    <a:lumMod val="75000"/>
+                  </a:schemeClr>
+                </a:solidFill>
+                <a:latin typeface="Calibri" panose="020F0502020204030204" pitchFamily="34" charset="0"/>
+                <a:ea typeface="Calibri" panose="020F0502020204030204" pitchFamily="34" charset="0"/>
+                <a:cs typeface="Calibri" panose="020F0502020204030204" pitchFamily="34" charset="0"/>
+              </a:rPr>
+              <a:t>is</a:t>
+            </a:r>
+            <a:r>
+              <a:rPr lang="de-DE" sz="1200" dirty="0">
+                <a:solidFill>
+                  <a:schemeClr val="bg1">
+                    <a:lumMod val="75000"/>
+                  </a:schemeClr>
+                </a:solidFill>
+                <a:latin typeface="Calibri" panose="020F0502020204030204" pitchFamily="34" charset="0"/>
+                <a:ea typeface="Calibri" panose="020F0502020204030204" pitchFamily="34" charset="0"/>
+                <a:cs typeface="Calibri" panose="020F0502020204030204" pitchFamily="34" charset="0"/>
+              </a:rPr>
+              <a:t> </a:t>
+            </a:r>
+            <a:r>
+              <a:rPr lang="de-DE" sz="1200" dirty="0" err="1">
+                <a:solidFill>
+                  <a:schemeClr val="bg1">
+                    <a:lumMod val="75000"/>
+                  </a:schemeClr>
+                </a:solidFill>
+                <a:latin typeface="Calibri" panose="020F0502020204030204" pitchFamily="34" charset="0"/>
+                <a:ea typeface="Calibri" panose="020F0502020204030204" pitchFamily="34" charset="0"/>
+                <a:cs typeface="Calibri" panose="020F0502020204030204" pitchFamily="34" charset="0"/>
+              </a:rPr>
+              <a:t>the</a:t>
+            </a:r>
+            <a:r>
+              <a:rPr lang="de-DE" sz="1200" dirty="0">
+                <a:solidFill>
+                  <a:schemeClr val="bg1">
+                    <a:lumMod val="75000"/>
+                  </a:schemeClr>
+                </a:solidFill>
+                <a:latin typeface="Calibri" panose="020F0502020204030204" pitchFamily="34" charset="0"/>
+                <a:ea typeface="Calibri" panose="020F0502020204030204" pitchFamily="34" charset="0"/>
+                <a:cs typeface="Calibri" panose="020F0502020204030204" pitchFamily="34" charset="0"/>
+              </a:rPr>
+              <a:t> last </a:t>
+            </a:r>
+            <a:r>
+              <a:rPr lang="de-DE" sz="1200" dirty="0" err="1">
+                <a:solidFill>
+                  <a:schemeClr val="bg1">
+                    <a:lumMod val="75000"/>
+                  </a:schemeClr>
+                </a:solidFill>
+                <a:latin typeface="Calibri" panose="020F0502020204030204" pitchFamily="34" charset="0"/>
+                <a:ea typeface="Calibri" panose="020F0502020204030204" pitchFamily="34" charset="0"/>
+                <a:cs typeface="Calibri" panose="020F0502020204030204" pitchFamily="34" charset="0"/>
+              </a:rPr>
+              <a:t>thing</a:t>
+            </a:r>
+            <a:r>
+              <a:rPr lang="de-DE" sz="1200" dirty="0">
+                <a:solidFill>
+                  <a:schemeClr val="bg1">
+                    <a:lumMod val="75000"/>
+                  </a:schemeClr>
+                </a:solidFill>
+                <a:latin typeface="Calibri" panose="020F0502020204030204" pitchFamily="34" charset="0"/>
+                <a:ea typeface="Calibri" panose="020F0502020204030204" pitchFamily="34" charset="0"/>
+                <a:cs typeface="Calibri" panose="020F0502020204030204" pitchFamily="34" charset="0"/>
+              </a:rPr>
+              <a:t> i will </a:t>
+            </a:r>
+            <a:r>
+              <a:rPr lang="de-DE" sz="1200" dirty="0" err="1">
+                <a:solidFill>
+                  <a:schemeClr val="bg1">
+                    <a:lumMod val="75000"/>
+                  </a:schemeClr>
+                </a:solidFill>
+                <a:latin typeface="Calibri" panose="020F0502020204030204" pitchFamily="34" charset="0"/>
+                <a:ea typeface="Calibri" panose="020F0502020204030204" pitchFamily="34" charset="0"/>
+                <a:cs typeface="Calibri" panose="020F0502020204030204" pitchFamily="34" charset="0"/>
+              </a:rPr>
+              <a:t>correct</a:t>
+            </a:r>
+            <a:r>
+              <a:rPr lang="de-DE" sz="1200" dirty="0">
+                <a:solidFill>
+                  <a:schemeClr val="bg1">
+                    <a:lumMod val="75000"/>
+                  </a:schemeClr>
+                </a:solidFill>
+                <a:latin typeface="Calibri" panose="020F0502020204030204" pitchFamily="34" charset="0"/>
+                <a:ea typeface="Calibri" panose="020F0502020204030204" pitchFamily="34" charset="0"/>
+                <a:cs typeface="Calibri" panose="020F0502020204030204" pitchFamily="34" charset="0"/>
+              </a:rPr>
+              <a:t>! In </a:t>
+            </a:r>
+            <a:r>
+              <a:rPr lang="de-DE" sz="1200" dirty="0" err="1">
+                <a:solidFill>
+                  <a:schemeClr val="bg1">
+                    <a:lumMod val="75000"/>
+                  </a:schemeClr>
+                </a:solidFill>
+                <a:latin typeface="Calibri" panose="020F0502020204030204" pitchFamily="34" charset="0"/>
+                <a:ea typeface="Calibri" panose="020F0502020204030204" pitchFamily="34" charset="0"/>
+                <a:cs typeface="Calibri" panose="020F0502020204030204" pitchFamily="34" charset="0"/>
+              </a:rPr>
+              <a:t>case</a:t>
+            </a:r>
+            <a:r>
+              <a:rPr lang="de-DE" sz="1200" dirty="0">
+                <a:solidFill>
+                  <a:schemeClr val="bg1">
+                    <a:lumMod val="75000"/>
+                  </a:schemeClr>
+                </a:solidFill>
+                <a:latin typeface="Calibri" panose="020F0502020204030204" pitchFamily="34" charset="0"/>
+                <a:ea typeface="Calibri" panose="020F0502020204030204" pitchFamily="34" charset="0"/>
+                <a:cs typeface="Calibri" panose="020F0502020204030204" pitchFamily="34" charset="0"/>
+              </a:rPr>
+              <a:t> </a:t>
+            </a:r>
+            <a:r>
+              <a:rPr lang="de-DE" sz="1200" dirty="0" err="1">
+                <a:solidFill>
+                  <a:schemeClr val="bg1">
+                    <a:lumMod val="75000"/>
+                  </a:schemeClr>
+                </a:solidFill>
+                <a:latin typeface="Calibri" panose="020F0502020204030204" pitchFamily="34" charset="0"/>
+                <a:ea typeface="Calibri" panose="020F0502020204030204" pitchFamily="34" charset="0"/>
+                <a:cs typeface="Calibri" panose="020F0502020204030204" pitchFamily="34" charset="0"/>
+              </a:rPr>
+              <a:t>you</a:t>
+            </a:r>
+            <a:r>
+              <a:rPr lang="de-DE" sz="1200" dirty="0">
+                <a:solidFill>
+                  <a:schemeClr val="bg1">
+                    <a:lumMod val="75000"/>
+                  </a:schemeClr>
+                </a:solidFill>
+                <a:latin typeface="Calibri" panose="020F0502020204030204" pitchFamily="34" charset="0"/>
+                <a:ea typeface="Calibri" panose="020F0502020204030204" pitchFamily="34" charset="0"/>
+                <a:cs typeface="Calibri" panose="020F0502020204030204" pitchFamily="34" charset="0"/>
+              </a:rPr>
+              <a:t> </a:t>
+            </a:r>
+            <a:r>
+              <a:rPr lang="de-DE" sz="1200" dirty="0" err="1">
+                <a:solidFill>
+                  <a:schemeClr val="bg1">
+                    <a:lumMod val="75000"/>
+                  </a:schemeClr>
+                </a:solidFill>
+                <a:latin typeface="Calibri" panose="020F0502020204030204" pitchFamily="34" charset="0"/>
+                <a:ea typeface="Calibri" panose="020F0502020204030204" pitchFamily="34" charset="0"/>
+                <a:cs typeface="Calibri" panose="020F0502020204030204" pitchFamily="34" charset="0"/>
+              </a:rPr>
+              <a:t>are</a:t>
+            </a:r>
+            <a:r>
+              <a:rPr lang="de-DE" sz="1200" dirty="0">
+                <a:solidFill>
+                  <a:schemeClr val="bg1">
+                    <a:lumMod val="75000"/>
+                  </a:schemeClr>
+                </a:solidFill>
+                <a:latin typeface="Calibri" panose="020F0502020204030204" pitchFamily="34" charset="0"/>
+                <a:ea typeface="Calibri" panose="020F0502020204030204" pitchFamily="34" charset="0"/>
+                <a:cs typeface="Calibri" panose="020F0502020204030204" pitchFamily="34" charset="0"/>
+              </a:rPr>
+              <a:t> </a:t>
+            </a:r>
+            <a:r>
+              <a:rPr lang="de-DE" sz="1200" dirty="0" err="1">
+                <a:solidFill>
+                  <a:schemeClr val="bg1">
+                    <a:lumMod val="75000"/>
+                  </a:schemeClr>
+                </a:solidFill>
+                <a:latin typeface="Calibri" panose="020F0502020204030204" pitchFamily="34" charset="0"/>
+                <a:ea typeface="Calibri" panose="020F0502020204030204" pitchFamily="34" charset="0"/>
+                <a:cs typeface="Calibri" panose="020F0502020204030204" pitchFamily="34" charset="0"/>
+              </a:rPr>
+              <a:t>seeing</a:t>
+            </a:r>
+            <a:r>
+              <a:rPr lang="de-DE" sz="1200" dirty="0">
+                <a:solidFill>
+                  <a:schemeClr val="bg1">
+                    <a:lumMod val="75000"/>
+                  </a:schemeClr>
+                </a:solidFill>
+                <a:latin typeface="Calibri" panose="020F0502020204030204" pitchFamily="34" charset="0"/>
+                <a:ea typeface="Calibri" panose="020F0502020204030204" pitchFamily="34" charset="0"/>
+                <a:cs typeface="Calibri" panose="020F0502020204030204" pitchFamily="34" charset="0"/>
+              </a:rPr>
+              <a:t> </a:t>
+            </a:r>
+            <a:r>
+              <a:rPr lang="de-DE" sz="1200" dirty="0" err="1">
+                <a:solidFill>
+                  <a:schemeClr val="bg1">
+                    <a:lumMod val="75000"/>
+                  </a:schemeClr>
+                </a:solidFill>
+                <a:latin typeface="Calibri" panose="020F0502020204030204" pitchFamily="34" charset="0"/>
+                <a:ea typeface="Calibri" panose="020F0502020204030204" pitchFamily="34" charset="0"/>
+                <a:cs typeface="Calibri" panose="020F0502020204030204" pitchFamily="34" charset="0"/>
+              </a:rPr>
+              <a:t>it</a:t>
+            </a:r>
+            <a:r>
+              <a:rPr lang="de-DE" sz="1200" dirty="0">
+                <a:solidFill>
+                  <a:schemeClr val="bg1">
+                    <a:lumMod val="75000"/>
+                  </a:schemeClr>
+                </a:solidFill>
+                <a:latin typeface="Calibri" panose="020F0502020204030204" pitchFamily="34" charset="0"/>
+                <a:ea typeface="Calibri" panose="020F0502020204030204" pitchFamily="34" charset="0"/>
+                <a:cs typeface="Calibri" panose="020F0502020204030204" pitchFamily="34" charset="0"/>
+              </a:rPr>
+              <a:t> </a:t>
+            </a:r>
+            <a:r>
+              <a:rPr lang="de-DE" sz="1200" dirty="0" err="1">
+                <a:solidFill>
+                  <a:schemeClr val="bg1">
+                    <a:lumMod val="75000"/>
+                  </a:schemeClr>
+                </a:solidFill>
+                <a:latin typeface="Calibri" panose="020F0502020204030204" pitchFamily="34" charset="0"/>
+                <a:ea typeface="Calibri" panose="020F0502020204030204" pitchFamily="34" charset="0"/>
+                <a:cs typeface="Calibri" panose="020F0502020204030204" pitchFamily="34" charset="0"/>
+              </a:rPr>
+              <a:t>missing</a:t>
+            </a:r>
+            <a:r>
+              <a:rPr lang="de-DE" sz="1200" dirty="0">
+                <a:solidFill>
+                  <a:schemeClr val="bg1">
+                    <a:lumMod val="75000"/>
+                  </a:schemeClr>
+                </a:solidFill>
+                <a:latin typeface="Calibri" panose="020F0502020204030204" pitchFamily="34" charset="0"/>
+                <a:ea typeface="Calibri" panose="020F0502020204030204" pitchFamily="34" charset="0"/>
+                <a:cs typeface="Calibri" panose="020F0502020204030204" pitchFamily="34" charset="0"/>
+              </a:rPr>
+              <a:t> </a:t>
+            </a:r>
+            <a:r>
+              <a:rPr lang="de-DE" sz="1200" dirty="0" err="1">
+                <a:solidFill>
+                  <a:schemeClr val="bg1">
+                    <a:lumMod val="75000"/>
+                  </a:schemeClr>
+                </a:solidFill>
+                <a:latin typeface="Calibri" panose="020F0502020204030204" pitchFamily="34" charset="0"/>
+                <a:ea typeface="Calibri" panose="020F0502020204030204" pitchFamily="34" charset="0"/>
+                <a:cs typeface="Calibri" panose="020F0502020204030204" pitchFamily="34" charset="0"/>
+              </a:rPr>
+              <a:t>or</a:t>
+            </a:r>
+            <a:r>
+              <a:rPr lang="de-DE" sz="1200" dirty="0">
+                <a:solidFill>
+                  <a:schemeClr val="bg1">
+                    <a:lumMod val="75000"/>
+                  </a:schemeClr>
+                </a:solidFill>
+                <a:latin typeface="Calibri" panose="020F0502020204030204" pitchFamily="34" charset="0"/>
+                <a:ea typeface="Calibri" panose="020F0502020204030204" pitchFamily="34" charset="0"/>
+                <a:cs typeface="Calibri" panose="020F0502020204030204" pitchFamily="34" charset="0"/>
+              </a:rPr>
+              <a:t> </a:t>
+            </a:r>
+            <a:r>
+              <a:rPr lang="de-DE" sz="1200" dirty="0" err="1">
+                <a:solidFill>
+                  <a:schemeClr val="bg1">
+                    <a:lumMod val="75000"/>
+                  </a:schemeClr>
+                </a:solidFill>
+                <a:latin typeface="Calibri" panose="020F0502020204030204" pitchFamily="34" charset="0"/>
+                <a:ea typeface="Calibri" panose="020F0502020204030204" pitchFamily="34" charset="0"/>
+                <a:cs typeface="Calibri" panose="020F0502020204030204" pitchFamily="34" charset="0"/>
+              </a:rPr>
+              <a:t>there</a:t>
+            </a:r>
+            <a:r>
+              <a:rPr lang="de-DE" sz="1200" dirty="0">
+                <a:solidFill>
+                  <a:schemeClr val="bg1">
+                    <a:lumMod val="75000"/>
+                  </a:schemeClr>
+                </a:solidFill>
+                <a:latin typeface="Calibri" panose="020F0502020204030204" pitchFamily="34" charset="0"/>
+                <a:ea typeface="Calibri" panose="020F0502020204030204" pitchFamily="34" charset="0"/>
+                <a:cs typeface="Calibri" panose="020F0502020204030204" pitchFamily="34" charset="0"/>
+              </a:rPr>
+              <a:t> </a:t>
+            </a:r>
+            <a:r>
+              <a:rPr lang="de-DE" sz="1200" dirty="0" err="1">
+                <a:solidFill>
+                  <a:schemeClr val="bg1">
+                    <a:lumMod val="75000"/>
+                  </a:schemeClr>
+                </a:solidFill>
+                <a:latin typeface="Calibri" panose="020F0502020204030204" pitchFamily="34" charset="0"/>
+                <a:ea typeface="Calibri" panose="020F0502020204030204" pitchFamily="34" charset="0"/>
+                <a:cs typeface="Calibri" panose="020F0502020204030204" pitchFamily="34" charset="0"/>
+              </a:rPr>
+              <a:t>are</a:t>
+            </a:r>
+            <a:r>
+              <a:rPr lang="de-DE" sz="1200" dirty="0">
+                <a:solidFill>
+                  <a:schemeClr val="bg1">
+                    <a:lumMod val="75000"/>
+                  </a:schemeClr>
+                </a:solidFill>
+                <a:latin typeface="Calibri" panose="020F0502020204030204" pitchFamily="34" charset="0"/>
+                <a:ea typeface="Calibri" panose="020F0502020204030204" pitchFamily="34" charset="0"/>
+                <a:cs typeface="Calibri" panose="020F0502020204030204" pitchFamily="34" charset="0"/>
+              </a:rPr>
+              <a:t> </a:t>
+            </a:r>
+            <a:r>
+              <a:rPr lang="de-DE" sz="1200" dirty="0" err="1">
+                <a:solidFill>
+                  <a:schemeClr val="bg1">
+                    <a:lumMod val="75000"/>
+                  </a:schemeClr>
+                </a:solidFill>
+                <a:latin typeface="Calibri" panose="020F0502020204030204" pitchFamily="34" charset="0"/>
+                <a:ea typeface="Calibri" panose="020F0502020204030204" pitchFamily="34" charset="0"/>
+                <a:cs typeface="Calibri" panose="020F0502020204030204" pitchFamily="34" charset="0"/>
+              </a:rPr>
+              <a:t>inconsistencies</a:t>
+            </a:r>
+            <a:endParaRPr lang="en-US" dirty="0"/>
+          </a:p>
+        </p:txBody>
+      </p:sp>
+      <p:sp>
+        <p:nvSpPr>
+          <p:cNvPr id="4" name="Slide Number Placeholder 3">
+            <a:extLst>
+              <a:ext uri="{FF2B5EF4-FFF2-40B4-BE49-F238E27FC236}">
+                <a16:creationId xmlns:a16="http://schemas.microsoft.com/office/drawing/2014/main" id="{BDD9B197-3FD5-5FAF-46EB-BB71A17F5D5F}"/>
+              </a:ext>
+            </a:extLst>
+          </p:cNvPr>
+          <p:cNvSpPr>
+            <a:spLocks noGrp="1"/>
+          </p:cNvSpPr>
+          <p:nvPr>
+            <p:ph type="sldNum" sz="quarter" idx="5"/>
+          </p:nvPr>
+        </p:nvSpPr>
+        <p:spPr/>
+        <p:txBody>
+          <a:bodyPr/>
+          <a:lstStyle/>
+          <a:p>
+            <a:fld id="{809340A9-5F99-47E5-A3AD-FD228EA849F8}" type="slidenum">
+              <a:rPr lang="en-GB" smtClean="0"/>
+              <a:t>14</a:t>
+            </a:fld>
+            <a:endParaRPr lang="en-GB"/>
+          </a:p>
+        </p:txBody>
+      </p:sp>
+    </p:spTree>
+    <p:extLst>
+      <p:ext uri="{BB962C8B-B14F-4D97-AF65-F5344CB8AC3E}">
+        <p14:creationId xmlns:p14="http://schemas.microsoft.com/office/powerpoint/2010/main" val="2897267757"/>
+      </p:ext>
+    </p:extLst>
+  </p:cSld>
+  <p:clrMapOvr>
+    <a:masterClrMapping/>
+  </p:clrMapOvr>
+</p:notes>
+</file>
+
+<file path=ppt/notesSlides/notesSlide12.xml><?xml version="1.0" encoding="utf-8"?>
+<p:notes xmlns:a="http://schemas.openxmlformats.org/drawingml/2006/main" xmlns:r="http://schemas.openxmlformats.org/officeDocument/2006/relationships" xmlns:p="http://schemas.openxmlformats.org/presentationml/2006/main">
+  <p:cSld>
+    <p:spTree>
+      <p:nvGrpSpPr>
+        <p:cNvPr id="1" name=""/>
+        <p:cNvGrpSpPr/>
+        <p:nvPr/>
+      </p:nvGrpSpPr>
+      <p:grpSpPr>
+        <a:xfrm>
+          <a:off x="0" y="0"/>
+          <a:ext cx="0" cy="0"/>
+          <a:chOff x="0" y="0"/>
+          <a:chExt cx="0" cy="0"/>
+        </a:xfrm>
+      </p:grpSpPr>
+      <p:sp>
+        <p:nvSpPr>
+          <p:cNvPr id="2" name="Slide Image Placeholder 1"/>
+          <p:cNvSpPr>
+            <a:spLocks noGrp="1" noRot="1" noChangeAspect="1"/>
+          </p:cNvSpPr>
+          <p:nvPr>
+            <p:ph type="sldImg"/>
+          </p:nvPr>
+        </p:nvSpPr>
+        <p:spPr/>
+      </p:sp>
+      <p:sp>
+        <p:nvSpPr>
+          <p:cNvPr id="3" name="Notes Placeholder 2"/>
+          <p:cNvSpPr>
+            <a:spLocks noGrp="1"/>
+          </p:cNvSpPr>
+          <p:nvPr>
+            <p:ph type="body" idx="1"/>
+          </p:nvPr>
+        </p:nvSpPr>
+        <p:spPr/>
+        <p:txBody>
+          <a:bodyPr/>
+          <a:lstStyle/>
+          <a:p>
+            <a:r>
+              <a:rPr lang="en-US" dirty="0"/>
+              <a:t>Moved the title bit to make some space </a:t>
+            </a:r>
+            <a:endParaRPr lang="en-GB" dirty="0"/>
+          </a:p>
+        </p:txBody>
+      </p:sp>
+      <p:sp>
+        <p:nvSpPr>
+          <p:cNvPr id="4" name="Slide Number Placeholder 3"/>
+          <p:cNvSpPr>
+            <a:spLocks noGrp="1"/>
+          </p:cNvSpPr>
+          <p:nvPr>
+            <p:ph type="sldNum" sz="quarter" idx="5"/>
+          </p:nvPr>
+        </p:nvSpPr>
+        <p:spPr/>
+        <p:txBody>
+          <a:bodyPr/>
+          <a:lstStyle/>
+          <a:p>
+            <a:fld id="{809340A9-5F99-47E5-A3AD-FD228EA849F8}" type="slidenum">
+              <a:rPr lang="en-GB" smtClean="0"/>
+              <a:t>16</a:t>
             </a:fld>
             <a:endParaRPr lang="en-GB"/>
           </a:p>
@@ -1217,7 +1886,7 @@
 </p:notes>
 </file>
 
-<file path=ppt/notesSlides/notesSlide11.xml><?xml version="1.0" encoding="utf-8"?>
+<file path=ppt/notesSlides/notesSlide13.xml><?xml version="1.0" encoding="utf-8"?>
 <p:notes xmlns:a="http://schemas.openxmlformats.org/drawingml/2006/main" xmlns:r="http://schemas.openxmlformats.org/officeDocument/2006/relationships" xmlns:p="http://schemas.openxmlformats.org/presentationml/2006/main">
   <p:cSld>
     <p:spTree>
@@ -1310,7 +1979,7 @@
           <a:p>
             <a:fld id="{809340A9-5F99-47E5-A3AD-FD228EA849F8}" type="slidenum">
               <a:rPr lang="en-GB" smtClean="0"/>
-              <a:t>16</a:t>
+              <a:t>17</a:t>
             </a:fld>
             <a:endParaRPr lang="en-GB"/>
           </a:p>
@@ -1329,7 +1998,7 @@
 </p:notes>
 </file>
 
-<file path=ppt/notesSlides/notesSlide12.xml><?xml version="1.0" encoding="utf-8"?>
+<file path=ppt/notesSlides/notesSlide14.xml><?xml version="1.0" encoding="utf-8"?>
 <p:notes xmlns:a="http://schemas.openxmlformats.org/drawingml/2006/main" xmlns:r="http://schemas.openxmlformats.org/officeDocument/2006/relationships" xmlns:p="http://schemas.openxmlformats.org/presentationml/2006/main">
   <p:cSld>
     <p:spTree>
@@ -1398,7 +2067,7 @@
           <a:p>
             <a:fld id="{809340A9-5F99-47E5-A3AD-FD228EA849F8}" type="slidenum">
               <a:rPr lang="en-GB" smtClean="0"/>
-              <a:t>17</a:t>
+              <a:t>18</a:t>
             </a:fld>
             <a:endParaRPr lang="en-GB"/>
           </a:p>
@@ -1408,6 +2077,114 @@
     <p:extLst>
       <p:ext uri="{BB962C8B-B14F-4D97-AF65-F5344CB8AC3E}">
         <p14:creationId xmlns:p14="http://schemas.microsoft.com/office/powerpoint/2010/main" val="3719185097"/>
+      </p:ext>
+    </p:extLst>
+  </p:cSld>
+  <p:clrMapOvr>
+    <a:masterClrMapping/>
+  </p:clrMapOvr>
+</p:notes>
+</file>
+
+<file path=ppt/notesSlides/notesSlide15.xml><?xml version="1.0" encoding="utf-8"?>
+<p:notes xmlns:a="http://schemas.openxmlformats.org/drawingml/2006/main" xmlns:r="http://schemas.openxmlformats.org/officeDocument/2006/relationships" xmlns:p="http://schemas.openxmlformats.org/presentationml/2006/main">
+  <p:cSld>
+    <p:spTree>
+      <p:nvGrpSpPr>
+        <p:cNvPr id="1" name="">
+          <a:extLst>
+            <a:ext uri="{FF2B5EF4-FFF2-40B4-BE49-F238E27FC236}">
+              <a16:creationId xmlns:a16="http://schemas.microsoft.com/office/drawing/2014/main" id="{2FCEE60D-B047-017F-1CC1-F6F8A2BCB66C}"/>
+            </a:ext>
+          </a:extLst>
+        </p:cNvPr>
+        <p:cNvGrpSpPr/>
+        <p:nvPr/>
+      </p:nvGrpSpPr>
+      <p:grpSpPr>
+        <a:xfrm>
+          <a:off x="0" y="0"/>
+          <a:ext cx="0" cy="0"/>
+          <a:chOff x="0" y="0"/>
+          <a:chExt cx="0" cy="0"/>
+        </a:xfrm>
+      </p:grpSpPr>
+      <p:sp>
+        <p:nvSpPr>
+          <p:cNvPr id="2" name="Slide Image Placeholder 1">
+            <a:extLst>
+              <a:ext uri="{FF2B5EF4-FFF2-40B4-BE49-F238E27FC236}">
+                <a16:creationId xmlns:a16="http://schemas.microsoft.com/office/drawing/2014/main" id="{D612BA61-FDF9-030A-F8DD-497EAE2C1483}"/>
+              </a:ext>
+            </a:extLst>
+          </p:cNvPr>
+          <p:cNvSpPr>
+            <a:spLocks noGrp="1" noRot="1" noChangeAspect="1"/>
+          </p:cNvSpPr>
+          <p:nvPr>
+            <p:ph type="sldImg"/>
+          </p:nvPr>
+        </p:nvSpPr>
+        <p:spPr/>
+      </p:sp>
+      <p:sp>
+        <p:nvSpPr>
+          <p:cNvPr id="3" name="Notes Placeholder 2">
+            <a:extLst>
+              <a:ext uri="{FF2B5EF4-FFF2-40B4-BE49-F238E27FC236}">
+                <a16:creationId xmlns:a16="http://schemas.microsoft.com/office/drawing/2014/main" id="{C0BC5209-BE17-2121-CBC6-5B90040C7AFB}"/>
+              </a:ext>
+            </a:extLst>
+          </p:cNvPr>
+          <p:cNvSpPr>
+            <a:spLocks noGrp="1"/>
+          </p:cNvSpPr>
+          <p:nvPr>
+            <p:ph type="body" idx="1"/>
+          </p:nvPr>
+        </p:nvSpPr>
+        <p:spPr/>
+        <p:txBody>
+          <a:bodyPr/>
+          <a:lstStyle/>
+          <a:p>
+            <a:endParaRPr lang="en-GB" dirty="0"/>
+          </a:p>
+        </p:txBody>
+      </p:sp>
+      <p:sp>
+        <p:nvSpPr>
+          <p:cNvPr id="4" name="Slide Number Placeholder 3">
+            <a:extLst>
+              <a:ext uri="{FF2B5EF4-FFF2-40B4-BE49-F238E27FC236}">
+                <a16:creationId xmlns:a16="http://schemas.microsoft.com/office/drawing/2014/main" id="{40105A4A-660C-345E-B643-28CC68E0E806}"/>
+              </a:ext>
+            </a:extLst>
+          </p:cNvPr>
+          <p:cNvSpPr>
+            <a:spLocks noGrp="1"/>
+          </p:cNvSpPr>
+          <p:nvPr>
+            <p:ph type="sldNum" sz="quarter" idx="5"/>
+          </p:nvPr>
+        </p:nvSpPr>
+        <p:spPr/>
+        <p:txBody>
+          <a:bodyPr/>
+          <a:lstStyle/>
+          <a:p>
+            <a:fld id="{809340A9-5F99-47E5-A3AD-FD228EA849F8}" type="slidenum">
+              <a:rPr lang="en-GB" smtClean="0"/>
+              <a:t>24</a:t>
+            </a:fld>
+            <a:endParaRPr lang="en-GB"/>
+          </a:p>
+        </p:txBody>
+      </p:sp>
+    </p:spTree>
+    <p:extLst>
+      <p:ext uri="{BB962C8B-B14F-4D97-AF65-F5344CB8AC3E}">
+        <p14:creationId xmlns:p14="http://schemas.microsoft.com/office/powerpoint/2010/main" val="3520578787"/>
       </p:ext>
     </p:extLst>
   </p:cSld>
@@ -1671,6 +2448,691 @@
   <p:cSld>
     <p:spTree>
       <p:nvGrpSpPr>
+        <p:cNvPr id="1" name=""/>
+        <p:cNvGrpSpPr/>
+        <p:nvPr/>
+      </p:nvGrpSpPr>
+      <p:grpSpPr>
+        <a:xfrm>
+          <a:off x="0" y="0"/>
+          <a:ext cx="0" cy="0"/>
+          <a:chOff x="0" y="0"/>
+          <a:chExt cx="0" cy="0"/>
+        </a:xfrm>
+      </p:grpSpPr>
+      <p:sp>
+        <p:nvSpPr>
+          <p:cNvPr id="2" name="Slide Image Placeholder 1"/>
+          <p:cNvSpPr>
+            <a:spLocks noGrp="1" noRot="1" noChangeAspect="1"/>
+          </p:cNvSpPr>
+          <p:nvPr>
+            <p:ph type="sldImg"/>
+          </p:nvPr>
+        </p:nvSpPr>
+        <p:spPr/>
+      </p:sp>
+      <p:sp>
+        <p:nvSpPr>
+          <p:cNvPr id="3" name="Notes Placeholder 2"/>
+          <p:cNvSpPr>
+            <a:spLocks noGrp="1"/>
+          </p:cNvSpPr>
+          <p:nvPr>
+            <p:ph type="body" idx="1"/>
+          </p:nvPr>
+        </p:nvSpPr>
+        <p:spPr/>
+        <p:txBody>
+          <a:bodyPr/>
+          <a:lstStyle/>
+          <a:p>
+            <a:r>
+              <a:rPr lang="en-US" dirty="0"/>
+              <a:t>Seasonal score 2= December 1= November 0=anything else </a:t>
+            </a:r>
+          </a:p>
+          <a:p>
+            <a:endParaRPr lang="en-US" dirty="0"/>
+          </a:p>
+          <a:p>
+            <a:endParaRPr lang="en-US" dirty="0"/>
+          </a:p>
+          <a:p>
+            <a:r>
+              <a:rPr lang="en-GB" sz="1200" b="0" kern="1200" dirty="0">
+                <a:solidFill>
+                  <a:schemeClr val="tx1"/>
+                </a:solidFill>
+                <a:effectLst/>
+                <a:latin typeface="+mn-lt"/>
+                <a:ea typeface="+mn-ea"/>
+                <a:cs typeface="+mn-cs"/>
+              </a:rPr>
+              <a:t># Create the </a:t>
+            </a:r>
+            <a:r>
+              <a:rPr lang="en-GB" sz="1200" b="0" kern="1200" dirty="0" err="1">
+                <a:solidFill>
+                  <a:schemeClr val="tx1"/>
+                </a:solidFill>
+                <a:effectLst/>
+                <a:latin typeface="+mn-lt"/>
+                <a:ea typeface="+mn-ea"/>
+                <a:cs typeface="+mn-cs"/>
+              </a:rPr>
+              <a:t>barplot</a:t>
+            </a:r>
+            <a:r>
+              <a:rPr lang="en-GB" sz="1200" b="0" kern="1200" dirty="0">
+                <a:solidFill>
+                  <a:schemeClr val="tx1"/>
+                </a:solidFill>
+                <a:effectLst/>
+                <a:latin typeface="+mn-lt"/>
+                <a:ea typeface="+mn-ea"/>
+                <a:cs typeface="+mn-cs"/>
+              </a:rPr>
+              <a:t> with confidence intervals</a:t>
+            </a:r>
+          </a:p>
+          <a:p>
+            <a:r>
+              <a:rPr lang="en-GB" sz="1200" b="0" kern="1200" dirty="0" err="1">
+                <a:solidFill>
+                  <a:schemeClr val="tx1"/>
+                </a:solidFill>
+                <a:effectLst/>
+                <a:latin typeface="+mn-lt"/>
+                <a:ea typeface="+mn-ea"/>
+                <a:cs typeface="+mn-cs"/>
+              </a:rPr>
+              <a:t>plt.figure</a:t>
+            </a:r>
+            <a:r>
+              <a:rPr lang="en-GB" sz="1200" b="0" kern="1200" dirty="0">
+                <a:solidFill>
+                  <a:schemeClr val="tx1"/>
+                </a:solidFill>
+                <a:effectLst/>
+                <a:latin typeface="+mn-lt"/>
+                <a:ea typeface="+mn-ea"/>
+                <a:cs typeface="+mn-cs"/>
+              </a:rPr>
+              <a:t>(</a:t>
+            </a:r>
+            <a:r>
+              <a:rPr lang="en-GB" sz="1200" b="0" kern="1200" dirty="0" err="1">
+                <a:solidFill>
+                  <a:schemeClr val="tx1"/>
+                </a:solidFill>
+                <a:effectLst/>
+                <a:latin typeface="+mn-lt"/>
+                <a:ea typeface="+mn-ea"/>
+                <a:cs typeface="+mn-cs"/>
+              </a:rPr>
+              <a:t>figsize</a:t>
+            </a:r>
+            <a:r>
+              <a:rPr lang="en-GB" sz="1200" b="0" kern="1200" dirty="0">
+                <a:solidFill>
+                  <a:schemeClr val="tx1"/>
+                </a:solidFill>
+                <a:effectLst/>
+                <a:latin typeface="+mn-lt"/>
+                <a:ea typeface="+mn-ea"/>
+                <a:cs typeface="+mn-cs"/>
+              </a:rPr>
+              <a:t>=(10, 6))</a:t>
+            </a:r>
+          </a:p>
+          <a:p>
+            <a:r>
+              <a:rPr lang="en-GB" sz="1200" b="0" kern="1200" dirty="0" err="1">
+                <a:solidFill>
+                  <a:schemeClr val="tx1"/>
+                </a:solidFill>
+                <a:effectLst/>
+                <a:latin typeface="+mn-lt"/>
+                <a:ea typeface="+mn-ea"/>
+                <a:cs typeface="+mn-cs"/>
+              </a:rPr>
+              <a:t>sns.barplot</a:t>
+            </a:r>
+            <a:r>
+              <a:rPr lang="en-GB" sz="1200" b="0" kern="1200" dirty="0">
+                <a:solidFill>
+                  <a:schemeClr val="tx1"/>
+                </a:solidFill>
+                <a:effectLst/>
+                <a:latin typeface="+mn-lt"/>
+                <a:ea typeface="+mn-ea"/>
+                <a:cs typeface="+mn-cs"/>
+              </a:rPr>
+              <a:t>(data=group6_data, x='seasonal_score2', y='</a:t>
+            </a:r>
+            <a:r>
+              <a:rPr lang="en-GB" sz="1200" b="0" kern="1200" dirty="0" err="1">
+                <a:solidFill>
+                  <a:schemeClr val="tx1"/>
+                </a:solidFill>
+                <a:effectLst/>
+                <a:latin typeface="+mn-lt"/>
+                <a:ea typeface="+mn-ea"/>
+                <a:cs typeface="+mn-cs"/>
+              </a:rPr>
+              <a:t>Umsatz</a:t>
+            </a:r>
+            <a:r>
+              <a:rPr lang="en-GB" sz="1200" b="0" kern="1200" dirty="0">
+                <a:solidFill>
+                  <a:schemeClr val="tx1"/>
+                </a:solidFill>
+                <a:effectLst/>
+                <a:latin typeface="+mn-lt"/>
+                <a:ea typeface="+mn-ea"/>
+                <a:cs typeface="+mn-cs"/>
+              </a:rPr>
+              <a:t>', ci=95)</a:t>
+            </a:r>
+          </a:p>
+          <a:p>
+            <a:br>
+              <a:rPr lang="en-GB" sz="1200" b="0" kern="1200" dirty="0">
+                <a:solidFill>
+                  <a:schemeClr val="tx1"/>
+                </a:solidFill>
+                <a:effectLst/>
+                <a:latin typeface="+mn-lt"/>
+                <a:ea typeface="+mn-ea"/>
+                <a:cs typeface="+mn-cs"/>
+              </a:rPr>
+            </a:br>
+            <a:r>
+              <a:rPr lang="en-GB" sz="1200" b="0" kern="1200" dirty="0">
+                <a:solidFill>
+                  <a:schemeClr val="tx1"/>
+                </a:solidFill>
+                <a:effectLst/>
+                <a:latin typeface="+mn-lt"/>
+                <a:ea typeface="+mn-ea"/>
+                <a:cs typeface="+mn-cs"/>
+              </a:rPr>
+              <a:t># Customize the plot</a:t>
+            </a:r>
+          </a:p>
+          <a:p>
+            <a:r>
+              <a:rPr lang="en-GB" sz="1200" b="0" kern="1200" dirty="0" err="1">
+                <a:solidFill>
+                  <a:schemeClr val="tx1"/>
+                </a:solidFill>
+                <a:effectLst/>
+                <a:latin typeface="+mn-lt"/>
+                <a:ea typeface="+mn-ea"/>
+                <a:cs typeface="+mn-cs"/>
+              </a:rPr>
+              <a:t>plt.title</a:t>
+            </a:r>
+            <a:r>
+              <a:rPr lang="en-GB" sz="1200" b="0" kern="1200" dirty="0">
+                <a:solidFill>
+                  <a:schemeClr val="tx1"/>
+                </a:solidFill>
+                <a:effectLst/>
+                <a:latin typeface="+mn-lt"/>
+                <a:ea typeface="+mn-ea"/>
+                <a:cs typeface="+mn-cs"/>
+              </a:rPr>
+              <a:t>('Group 6 Sales by Seasonal Score', </a:t>
+            </a:r>
+            <a:r>
+              <a:rPr lang="en-GB" sz="1200" b="0" kern="1200" dirty="0" err="1">
+                <a:solidFill>
+                  <a:schemeClr val="tx1"/>
+                </a:solidFill>
+                <a:effectLst/>
+                <a:latin typeface="+mn-lt"/>
+                <a:ea typeface="+mn-ea"/>
+                <a:cs typeface="+mn-cs"/>
+              </a:rPr>
+              <a:t>fontsize</a:t>
+            </a:r>
+            <a:r>
+              <a:rPr lang="en-GB" sz="1200" b="0" kern="1200" dirty="0">
+                <a:solidFill>
+                  <a:schemeClr val="tx1"/>
+                </a:solidFill>
+                <a:effectLst/>
+                <a:latin typeface="+mn-lt"/>
+                <a:ea typeface="+mn-ea"/>
+                <a:cs typeface="+mn-cs"/>
+              </a:rPr>
+              <a:t>=14, </a:t>
+            </a:r>
+            <a:r>
+              <a:rPr lang="en-GB" sz="1200" b="0" kern="1200" dirty="0" err="1">
+                <a:solidFill>
+                  <a:schemeClr val="tx1"/>
+                </a:solidFill>
+                <a:effectLst/>
+                <a:latin typeface="+mn-lt"/>
+                <a:ea typeface="+mn-ea"/>
+                <a:cs typeface="+mn-cs"/>
+              </a:rPr>
+              <a:t>fontweight</a:t>
+            </a:r>
+            <a:r>
+              <a:rPr lang="en-GB" sz="1200" b="0" kern="1200" dirty="0">
+                <a:solidFill>
+                  <a:schemeClr val="tx1"/>
+                </a:solidFill>
+                <a:effectLst/>
+                <a:latin typeface="+mn-lt"/>
+                <a:ea typeface="+mn-ea"/>
+                <a:cs typeface="+mn-cs"/>
+              </a:rPr>
+              <a:t>='bold')</a:t>
+            </a:r>
+          </a:p>
+          <a:p>
+            <a:r>
+              <a:rPr lang="en-GB" sz="1200" b="0" kern="1200" dirty="0" err="1">
+                <a:solidFill>
+                  <a:schemeClr val="tx1"/>
+                </a:solidFill>
+                <a:effectLst/>
+                <a:latin typeface="+mn-lt"/>
+                <a:ea typeface="+mn-ea"/>
+                <a:cs typeface="+mn-cs"/>
+              </a:rPr>
+              <a:t>plt.xlabel</a:t>
+            </a:r>
+            <a:r>
+              <a:rPr lang="en-GB" sz="1200" b="0" kern="1200" dirty="0">
+                <a:solidFill>
+                  <a:schemeClr val="tx1"/>
+                </a:solidFill>
+                <a:effectLst/>
+                <a:latin typeface="+mn-lt"/>
+                <a:ea typeface="+mn-ea"/>
+                <a:cs typeface="+mn-cs"/>
+              </a:rPr>
+              <a:t>('Seasonal Score', </a:t>
+            </a:r>
+            <a:r>
+              <a:rPr lang="en-GB" sz="1200" b="0" kern="1200" dirty="0" err="1">
+                <a:solidFill>
+                  <a:schemeClr val="tx1"/>
+                </a:solidFill>
+                <a:effectLst/>
+                <a:latin typeface="+mn-lt"/>
+                <a:ea typeface="+mn-ea"/>
+                <a:cs typeface="+mn-cs"/>
+              </a:rPr>
+              <a:t>fontsize</a:t>
+            </a:r>
+            <a:r>
+              <a:rPr lang="en-GB" sz="1200" b="0" kern="1200" dirty="0">
+                <a:solidFill>
+                  <a:schemeClr val="tx1"/>
+                </a:solidFill>
+                <a:effectLst/>
+                <a:latin typeface="+mn-lt"/>
+                <a:ea typeface="+mn-ea"/>
+                <a:cs typeface="+mn-cs"/>
+              </a:rPr>
+              <a:t>=12)</a:t>
+            </a:r>
+          </a:p>
+          <a:p>
+            <a:r>
+              <a:rPr lang="en-GB" sz="1200" b="0" kern="1200" dirty="0" err="1">
+                <a:solidFill>
+                  <a:schemeClr val="tx1"/>
+                </a:solidFill>
+                <a:effectLst/>
+                <a:latin typeface="+mn-lt"/>
+                <a:ea typeface="+mn-ea"/>
+                <a:cs typeface="+mn-cs"/>
+              </a:rPr>
+              <a:t>plt.ylabel</a:t>
+            </a:r>
+            <a:r>
+              <a:rPr lang="en-GB" sz="1200" b="0" kern="1200" dirty="0">
+                <a:solidFill>
+                  <a:schemeClr val="tx1"/>
+                </a:solidFill>
+                <a:effectLst/>
+                <a:latin typeface="+mn-lt"/>
+                <a:ea typeface="+mn-ea"/>
+                <a:cs typeface="+mn-cs"/>
+              </a:rPr>
+              <a:t>('Sales (</a:t>
+            </a:r>
+            <a:r>
+              <a:rPr lang="en-GB" sz="1200" b="0" kern="1200" dirty="0" err="1">
+                <a:solidFill>
+                  <a:schemeClr val="tx1"/>
+                </a:solidFill>
+                <a:effectLst/>
+                <a:latin typeface="+mn-lt"/>
+                <a:ea typeface="+mn-ea"/>
+                <a:cs typeface="+mn-cs"/>
+              </a:rPr>
+              <a:t>Umsatz</a:t>
+            </a:r>
+            <a:r>
+              <a:rPr lang="en-GB" sz="1200" b="0" kern="1200" dirty="0">
+                <a:solidFill>
+                  <a:schemeClr val="tx1"/>
+                </a:solidFill>
+                <a:effectLst/>
+                <a:latin typeface="+mn-lt"/>
+                <a:ea typeface="+mn-ea"/>
+                <a:cs typeface="+mn-cs"/>
+              </a:rPr>
+              <a:t>)', </a:t>
+            </a:r>
+            <a:r>
+              <a:rPr lang="en-GB" sz="1200" b="0" kern="1200" dirty="0" err="1">
+                <a:solidFill>
+                  <a:schemeClr val="tx1"/>
+                </a:solidFill>
+                <a:effectLst/>
+                <a:latin typeface="+mn-lt"/>
+                <a:ea typeface="+mn-ea"/>
+                <a:cs typeface="+mn-cs"/>
+              </a:rPr>
+              <a:t>fontsize</a:t>
+            </a:r>
+            <a:r>
+              <a:rPr lang="en-GB" sz="1200" b="0" kern="1200" dirty="0">
+                <a:solidFill>
+                  <a:schemeClr val="tx1"/>
+                </a:solidFill>
+                <a:effectLst/>
+                <a:latin typeface="+mn-lt"/>
+                <a:ea typeface="+mn-ea"/>
+                <a:cs typeface="+mn-cs"/>
+              </a:rPr>
+              <a:t>=12)</a:t>
+            </a:r>
+          </a:p>
+          <a:p>
+            <a:r>
+              <a:rPr lang="en-GB" sz="1200" b="0" kern="1200" dirty="0" err="1">
+                <a:solidFill>
+                  <a:schemeClr val="tx1"/>
+                </a:solidFill>
+                <a:effectLst/>
+                <a:latin typeface="+mn-lt"/>
+                <a:ea typeface="+mn-ea"/>
+                <a:cs typeface="+mn-cs"/>
+              </a:rPr>
+              <a:t>plt.xticks</a:t>
+            </a:r>
+            <a:r>
+              <a:rPr lang="en-GB" sz="1200" b="0" kern="1200" dirty="0">
+                <a:solidFill>
+                  <a:schemeClr val="tx1"/>
+                </a:solidFill>
+                <a:effectLst/>
+                <a:latin typeface="+mn-lt"/>
+                <a:ea typeface="+mn-ea"/>
+                <a:cs typeface="+mn-cs"/>
+              </a:rPr>
+              <a:t>(rotation=0)</a:t>
+            </a:r>
+          </a:p>
+          <a:p>
+            <a:r>
+              <a:rPr lang="en-GB" sz="1200" b="0" kern="1200" dirty="0">
+                <a:solidFill>
+                  <a:schemeClr val="tx1"/>
+                </a:solidFill>
+                <a:effectLst/>
+                <a:latin typeface="+mn-lt"/>
+                <a:ea typeface="+mn-ea"/>
+                <a:cs typeface="+mn-cs"/>
+              </a:rPr>
+              <a:t># Adjust layout to prevent label cutoff</a:t>
+            </a:r>
+          </a:p>
+          <a:p>
+            <a:r>
+              <a:rPr lang="en-GB" sz="1200" b="0" kern="1200" dirty="0" err="1">
+                <a:solidFill>
+                  <a:schemeClr val="tx1"/>
+                </a:solidFill>
+                <a:effectLst/>
+                <a:latin typeface="+mn-lt"/>
+                <a:ea typeface="+mn-ea"/>
+                <a:cs typeface="+mn-cs"/>
+              </a:rPr>
+              <a:t>plt.tight_layout</a:t>
+            </a:r>
+            <a:r>
+              <a:rPr lang="en-GB" sz="1200" b="0" kern="1200" dirty="0">
+                <a:solidFill>
+                  <a:schemeClr val="tx1"/>
+                </a:solidFill>
+                <a:effectLst/>
+                <a:latin typeface="+mn-lt"/>
+                <a:ea typeface="+mn-ea"/>
+                <a:cs typeface="+mn-cs"/>
+              </a:rPr>
+              <a:t>()</a:t>
+            </a:r>
+          </a:p>
+          <a:p>
+            <a:r>
+              <a:rPr lang="en-GB" sz="1200" b="0" kern="1200" dirty="0">
+                <a:solidFill>
+                  <a:schemeClr val="tx1"/>
+                </a:solidFill>
+                <a:effectLst/>
+                <a:latin typeface="+mn-lt"/>
+                <a:ea typeface="+mn-ea"/>
+                <a:cs typeface="+mn-cs"/>
+              </a:rPr>
+              <a:t># Show the plot</a:t>
+            </a:r>
+          </a:p>
+          <a:p>
+            <a:r>
+              <a:rPr lang="en-GB" sz="1200" b="0" kern="1200" dirty="0" err="1">
+                <a:solidFill>
+                  <a:schemeClr val="tx1"/>
+                </a:solidFill>
+                <a:effectLst/>
+                <a:latin typeface="+mn-lt"/>
+                <a:ea typeface="+mn-ea"/>
+                <a:cs typeface="+mn-cs"/>
+              </a:rPr>
+              <a:t>plt.show</a:t>
+            </a:r>
+            <a:r>
+              <a:rPr lang="en-GB" sz="1200" b="0" kern="1200" dirty="0">
+                <a:solidFill>
+                  <a:schemeClr val="tx1"/>
+                </a:solidFill>
+                <a:effectLst/>
+                <a:latin typeface="+mn-lt"/>
+                <a:ea typeface="+mn-ea"/>
+                <a:cs typeface="+mn-cs"/>
+              </a:rPr>
+              <a:t>()</a:t>
+            </a:r>
+          </a:p>
+          <a:p>
+            <a:endParaRPr lang="en-GB" dirty="0"/>
+          </a:p>
+        </p:txBody>
+      </p:sp>
+      <p:sp>
+        <p:nvSpPr>
+          <p:cNvPr id="4" name="Slide Number Placeholder 3"/>
+          <p:cNvSpPr>
+            <a:spLocks noGrp="1"/>
+          </p:cNvSpPr>
+          <p:nvPr>
+            <p:ph type="sldNum" sz="quarter" idx="5"/>
+          </p:nvPr>
+        </p:nvSpPr>
+        <p:spPr/>
+        <p:txBody>
+          <a:bodyPr/>
+          <a:lstStyle/>
+          <a:p>
+            <a:fld id="{809340A9-5F99-47E5-A3AD-FD228EA849F8}" type="slidenum">
+              <a:rPr lang="en-GB" smtClean="0"/>
+              <a:t>4</a:t>
+            </a:fld>
+            <a:endParaRPr lang="en-GB"/>
+          </a:p>
+        </p:txBody>
+      </p:sp>
+    </p:spTree>
+    <p:extLst>
+      <p:ext uri="{BB962C8B-B14F-4D97-AF65-F5344CB8AC3E}">
+        <p14:creationId xmlns:p14="http://schemas.microsoft.com/office/powerpoint/2010/main" val="2699742764"/>
+      </p:ext>
+    </p:extLst>
+  </p:cSld>
+  <p:clrMapOvr>
+    <a:masterClrMapping/>
+  </p:clrMapOvr>
+</p:notes>
+</file>
+
+<file path=ppt/notesSlides/notesSlide5.xml><?xml version="1.0" encoding="utf-8"?>
+<p:notes xmlns:a="http://schemas.openxmlformats.org/drawingml/2006/main" xmlns:r="http://schemas.openxmlformats.org/officeDocument/2006/relationships" xmlns:p="http://schemas.openxmlformats.org/presentationml/2006/main">
+  <p:cSld>
+    <p:spTree>
+      <p:nvGrpSpPr>
+        <p:cNvPr id="1" name="">
+          <a:extLst>
+            <a:ext uri="{FF2B5EF4-FFF2-40B4-BE49-F238E27FC236}">
+              <a16:creationId xmlns:a16="http://schemas.microsoft.com/office/drawing/2014/main" id="{4868B7AE-DCA0-C088-FA18-C941AC042FAC}"/>
+            </a:ext>
+          </a:extLst>
+        </p:cNvPr>
+        <p:cNvGrpSpPr/>
+        <p:nvPr/>
+      </p:nvGrpSpPr>
+      <p:grpSpPr>
+        <a:xfrm>
+          <a:off x="0" y="0"/>
+          <a:ext cx="0" cy="0"/>
+          <a:chOff x="0" y="0"/>
+          <a:chExt cx="0" cy="0"/>
+        </a:xfrm>
+      </p:grpSpPr>
+      <p:sp>
+        <p:nvSpPr>
+          <p:cNvPr id="2" name="Slide Image Placeholder 1">
+            <a:extLst>
+              <a:ext uri="{FF2B5EF4-FFF2-40B4-BE49-F238E27FC236}">
+                <a16:creationId xmlns:a16="http://schemas.microsoft.com/office/drawing/2014/main" id="{FC2A508A-C9E2-6317-0313-B7D9B3E241B8}"/>
+              </a:ext>
+            </a:extLst>
+          </p:cNvPr>
+          <p:cNvSpPr>
+            <a:spLocks noGrp="1" noRot="1" noChangeAspect="1"/>
+          </p:cNvSpPr>
+          <p:nvPr>
+            <p:ph type="sldImg"/>
+          </p:nvPr>
+        </p:nvSpPr>
+        <p:spPr/>
+      </p:sp>
+      <p:sp>
+        <p:nvSpPr>
+          <p:cNvPr id="3" name="Notes Placeholder 2">
+            <a:extLst>
+              <a:ext uri="{FF2B5EF4-FFF2-40B4-BE49-F238E27FC236}">
+                <a16:creationId xmlns:a16="http://schemas.microsoft.com/office/drawing/2014/main" id="{30B444DD-79C8-9EC0-30B1-0AE0D83ABE16}"/>
+              </a:ext>
+            </a:extLst>
+          </p:cNvPr>
+          <p:cNvSpPr>
+            <a:spLocks noGrp="1"/>
+          </p:cNvSpPr>
+          <p:nvPr>
+            <p:ph type="body" idx="1"/>
+          </p:nvPr>
+        </p:nvSpPr>
+        <p:spPr/>
+        <p:txBody>
+          <a:bodyPr/>
+          <a:lstStyle/>
+          <a:p>
+            <a:r>
+              <a:rPr lang="en-GB" sz="1200" b="0" kern="1200" dirty="0">
+                <a:solidFill>
+                  <a:schemeClr val="tx1"/>
+                </a:solidFill>
+                <a:effectLst/>
+                <a:latin typeface="+mn-lt"/>
+                <a:ea typeface="+mn-ea"/>
+                <a:cs typeface="+mn-cs"/>
+              </a:rPr>
+              <a:t>Made several so we can choose</a:t>
+            </a:r>
+          </a:p>
+          <a:p>
+            <a:endParaRPr lang="en-GB" dirty="0"/>
+          </a:p>
+        </p:txBody>
+      </p:sp>
+      <p:sp>
+        <p:nvSpPr>
+          <p:cNvPr id="4" name="Slide Number Placeholder 3">
+            <a:extLst>
+              <a:ext uri="{FF2B5EF4-FFF2-40B4-BE49-F238E27FC236}">
+                <a16:creationId xmlns:a16="http://schemas.microsoft.com/office/drawing/2014/main" id="{A8A11FBC-1B5B-E39E-006F-B274AD735BBE}"/>
+              </a:ext>
+            </a:extLst>
+          </p:cNvPr>
+          <p:cNvSpPr>
+            <a:spLocks noGrp="1"/>
+          </p:cNvSpPr>
+          <p:nvPr>
+            <p:ph type="sldNum" sz="quarter" idx="5"/>
+          </p:nvPr>
+        </p:nvSpPr>
+        <p:spPr/>
+        <p:txBody>
+          <a:bodyPr/>
+          <a:lstStyle/>
+          <a:p>
+            <a:fld id="{809340A9-5F99-47E5-A3AD-FD228EA849F8}" type="slidenum">
+              <a:rPr lang="en-GB" smtClean="0"/>
+              <a:t>5</a:t>
+            </a:fld>
+            <a:endParaRPr lang="en-GB"/>
+          </a:p>
+        </p:txBody>
+      </p:sp>
+    </p:spTree>
+    <p:extLst>
+      <p:ext uri="{BB962C8B-B14F-4D97-AF65-F5344CB8AC3E}">
+        <p14:creationId xmlns:p14="http://schemas.microsoft.com/office/powerpoint/2010/main" val="487031629"/>
+      </p:ext>
+    </p:extLst>
+  </p:cSld>
+  <p:clrMapOvr>
+    <a:masterClrMapping/>
+  </p:clrMapOvr>
+</p:notes>
+</file>
+
+<file path=ppt/notesSlides/notesSlide6.xml><?xml version="1.0" encoding="utf-8"?>
+<p:notes xmlns:a="http://schemas.openxmlformats.org/drawingml/2006/main" xmlns:r="http://schemas.openxmlformats.org/officeDocument/2006/relationships" xmlns:p="http://schemas.openxmlformats.org/presentationml/2006/main">
+  <p:cSld>
+    <p:spTree>
+      <p:nvGrpSpPr>
         <p:cNvPr id="1" name="">
           <a:extLst>
             <a:ext uri="{FF2B5EF4-FFF2-40B4-BE49-F238E27FC236}">
@@ -1778,7 +3240,7 @@
           <a:p>
             <a:fld id="{809340A9-5F99-47E5-A3AD-FD228EA849F8}" type="slidenum">
               <a:rPr lang="en-GB" smtClean="0"/>
-              <a:t>5</a:t>
+              <a:t>6</a:t>
             </a:fld>
             <a:endParaRPr lang="en-GB"/>
           </a:p>
@@ -1797,7 +3259,7 @@
 </p:notes>
 </file>
 
-<file path=ppt/notesSlides/notesSlide5.xml><?xml version="1.0" encoding="utf-8"?>
+<file path=ppt/notesSlides/notesSlide7.xml><?xml version="1.0" encoding="utf-8"?>
 <p:notes xmlns:a="http://schemas.openxmlformats.org/drawingml/2006/main" xmlns:r="http://schemas.openxmlformats.org/officeDocument/2006/relationships" xmlns:p="http://schemas.openxmlformats.org/presentationml/2006/main">
   <p:cSld>
     <p:spTree>
@@ -1900,7 +3362,7 @@
           <a:p>
             <a:fld id="{809340A9-5F99-47E5-A3AD-FD228EA849F8}" type="slidenum">
               <a:rPr lang="en-GB" smtClean="0"/>
-              <a:t>6</a:t>
+              <a:t>7</a:t>
             </a:fld>
             <a:endParaRPr lang="en-GB"/>
           </a:p>
@@ -1910,189 +3372,6 @@
     <p:extLst>
       <p:ext uri="{BB962C8B-B14F-4D97-AF65-F5344CB8AC3E}">
         <p14:creationId xmlns:p14="http://schemas.microsoft.com/office/powerpoint/2010/main" val="2739639426"/>
-      </p:ext>
-    </p:extLst>
-  </p:cSld>
-  <p:clrMapOvr>
-    <a:masterClrMapping/>
-  </p:clrMapOvr>
-</p:notes>
-</file>
-
-<file path=ppt/notesSlides/notesSlide6.xml><?xml version="1.0" encoding="utf-8"?>
-<p:notes xmlns:a="http://schemas.openxmlformats.org/drawingml/2006/main" xmlns:r="http://schemas.openxmlformats.org/officeDocument/2006/relationships" xmlns:p="http://schemas.openxmlformats.org/presentationml/2006/main">
-  <p:cSld>
-    <p:spTree>
-      <p:nvGrpSpPr>
-        <p:cNvPr id="1" name=""/>
-        <p:cNvGrpSpPr/>
-        <p:nvPr/>
-      </p:nvGrpSpPr>
-      <p:grpSpPr>
-        <a:xfrm>
-          <a:off x="0" y="0"/>
-          <a:ext cx="0" cy="0"/>
-          <a:chOff x="0" y="0"/>
-          <a:chExt cx="0" cy="0"/>
-        </a:xfrm>
-      </p:grpSpPr>
-      <p:sp>
-        <p:nvSpPr>
-          <p:cNvPr id="2" name="Slide Image Placeholder 1"/>
-          <p:cNvSpPr>
-            <a:spLocks noGrp="1" noRot="1" noChangeAspect="1"/>
-          </p:cNvSpPr>
-          <p:nvPr>
-            <p:ph type="sldImg"/>
-          </p:nvPr>
-        </p:nvSpPr>
-        <p:spPr/>
-      </p:sp>
-      <p:sp>
-        <p:nvSpPr>
-          <p:cNvPr id="3" name="Notes Placeholder 2"/>
-          <p:cNvSpPr>
-            <a:spLocks noGrp="1"/>
-          </p:cNvSpPr>
-          <p:nvPr>
-            <p:ph type="body" idx="1"/>
-          </p:nvPr>
-        </p:nvSpPr>
-        <p:spPr/>
-        <p:txBody>
-          <a:bodyPr/>
-          <a:lstStyle/>
-          <a:p>
-            <a:r>
-              <a:rPr lang="en-US" dirty="0"/>
-              <a:t>Full (initial) dataset</a:t>
-            </a:r>
-            <a:endParaRPr lang="en-GB" dirty="0"/>
-          </a:p>
-        </p:txBody>
-      </p:sp>
-      <p:sp>
-        <p:nvSpPr>
-          <p:cNvPr id="4" name="Slide Number Placeholder 3"/>
-          <p:cNvSpPr>
-            <a:spLocks noGrp="1"/>
-          </p:cNvSpPr>
-          <p:nvPr>
-            <p:ph type="sldNum" sz="quarter" idx="5"/>
-          </p:nvPr>
-        </p:nvSpPr>
-        <p:spPr/>
-        <p:txBody>
-          <a:bodyPr/>
-          <a:lstStyle/>
-          <a:p>
-            <a:fld id="{809340A9-5F99-47E5-A3AD-FD228EA849F8}" type="slidenum">
-              <a:rPr lang="en-GB" smtClean="0"/>
-              <a:t>7</a:t>
-            </a:fld>
-            <a:endParaRPr lang="en-GB"/>
-          </a:p>
-        </p:txBody>
-      </p:sp>
-    </p:spTree>
-    <p:extLst>
-      <p:ext uri="{BB962C8B-B14F-4D97-AF65-F5344CB8AC3E}">
-        <p14:creationId xmlns:p14="http://schemas.microsoft.com/office/powerpoint/2010/main" val="1897491180"/>
-      </p:ext>
-    </p:extLst>
-  </p:cSld>
-  <p:clrMapOvr>
-    <a:masterClrMapping/>
-  </p:clrMapOvr>
-</p:notes>
-</file>
-
-<file path=ppt/notesSlides/notesSlide7.xml><?xml version="1.0" encoding="utf-8"?>
-<p:notes xmlns:a="http://schemas.openxmlformats.org/drawingml/2006/main" xmlns:r="http://schemas.openxmlformats.org/officeDocument/2006/relationships" xmlns:p="http://schemas.openxmlformats.org/presentationml/2006/main">
-  <p:cSld>
-    <p:spTree>
-      <p:nvGrpSpPr>
-        <p:cNvPr id="1" name=""/>
-        <p:cNvGrpSpPr/>
-        <p:nvPr/>
-      </p:nvGrpSpPr>
-      <p:grpSpPr>
-        <a:xfrm>
-          <a:off x="0" y="0"/>
-          <a:ext cx="0" cy="0"/>
-          <a:chOff x="0" y="0"/>
-          <a:chExt cx="0" cy="0"/>
-        </a:xfrm>
-      </p:grpSpPr>
-      <p:sp>
-        <p:nvSpPr>
-          <p:cNvPr id="2" name="Slide Image Placeholder 1"/>
-          <p:cNvSpPr>
-            <a:spLocks noGrp="1" noRot="1" noChangeAspect="1"/>
-          </p:cNvSpPr>
-          <p:nvPr>
-            <p:ph type="sldImg"/>
-          </p:nvPr>
-        </p:nvSpPr>
-        <p:spPr/>
-      </p:sp>
-      <p:sp>
-        <p:nvSpPr>
-          <p:cNvPr id="3" name="Notes Placeholder 2"/>
-          <p:cNvSpPr>
-            <a:spLocks noGrp="1"/>
-          </p:cNvSpPr>
-          <p:nvPr>
-            <p:ph type="body" idx="1"/>
-          </p:nvPr>
-        </p:nvSpPr>
-        <p:spPr/>
-        <p:txBody>
-          <a:bodyPr/>
-          <a:lstStyle/>
-          <a:p>
-            <a:r>
-              <a:rPr lang="en-US" dirty="0"/>
-              <a:t>Still to be added: Model details + </a:t>
-            </a:r>
-            <a:r>
-              <a:rPr lang="en-US" dirty="0" err="1"/>
-              <a:t>Hyperparams</a:t>
-            </a:r>
-            <a:endParaRPr lang="en-US" dirty="0"/>
-          </a:p>
-          <a:p>
-            <a:endParaRPr lang="en-GB" dirty="0"/>
-          </a:p>
-        </p:txBody>
-      </p:sp>
-      <p:sp>
-        <p:nvSpPr>
-          <p:cNvPr id="4" name="Slide Number Placeholder 3"/>
-          <p:cNvSpPr>
-            <a:spLocks noGrp="1"/>
-          </p:cNvSpPr>
-          <p:nvPr>
-            <p:ph type="sldNum" sz="quarter" idx="5"/>
-          </p:nvPr>
-        </p:nvSpPr>
-        <p:spPr/>
-        <p:txBody>
-          <a:bodyPr/>
-          <a:lstStyle/>
-          <a:p>
-            <a:fld id="{809340A9-5F99-47E5-A3AD-FD228EA849F8}" type="slidenum">
-              <a:rPr lang="en-GB" smtClean="0"/>
-              <a:t>9</a:t>
-            </a:fld>
-            <a:endParaRPr lang="en-GB"/>
-          </a:p>
-        </p:txBody>
-      </p:sp>
-    </p:spTree>
-    <p:extLst>
-      <p:ext uri="{BB962C8B-B14F-4D97-AF65-F5344CB8AC3E}">
-        <p14:creationId xmlns:p14="http://schemas.microsoft.com/office/powerpoint/2010/main" val="812862749"/>
       </p:ext>
     </p:extLst>
   </p:cSld>
@@ -2148,7 +3427,7 @@
           <a:p>
             <a:r>
               <a:rPr lang="en-US" dirty="0"/>
-              <a:t>Will make it prettier but I think those are the points I want to talk about , you can also add yours and we can share this part so that we both talk about our experience</a:t>
+              <a:t>Full (initial) dataset</a:t>
             </a:r>
             <a:endParaRPr lang="en-GB" dirty="0"/>
           </a:p>
@@ -2171,7 +3450,7 @@
           <a:p>
             <a:fld id="{809340A9-5F99-47E5-A3AD-FD228EA849F8}" type="slidenum">
               <a:rPr lang="en-GB" smtClean="0"/>
-              <a:t>12</a:t>
+              <a:t>8</a:t>
             </a:fld>
             <a:endParaRPr lang="en-GB"/>
           </a:p>
@@ -2180,7 +3459,7 @@
     </p:spTree>
     <p:extLst>
       <p:ext uri="{BB962C8B-B14F-4D97-AF65-F5344CB8AC3E}">
-        <p14:creationId xmlns:p14="http://schemas.microsoft.com/office/powerpoint/2010/main" val="2013060265"/>
+        <p14:creationId xmlns:p14="http://schemas.microsoft.com/office/powerpoint/2010/main" val="1897491180"/>
       </p:ext>
     </p:extLst>
   </p:cSld>
@@ -2195,13 +3474,7 @@
   <p:cSld>
     <p:spTree>
       <p:nvGrpSpPr>
-        <p:cNvPr id="1" name="">
-          <a:extLst>
-            <a:ext uri="{FF2B5EF4-FFF2-40B4-BE49-F238E27FC236}">
-              <a16:creationId xmlns:a16="http://schemas.microsoft.com/office/drawing/2014/main" id="{36D1A59C-214E-3CE4-25F6-24FD5D270DA5}"/>
-            </a:ext>
-          </a:extLst>
-        </p:cNvPr>
+        <p:cNvPr id="1" name=""/>
         <p:cNvGrpSpPr/>
         <p:nvPr/>
       </p:nvGrpSpPr>
@@ -2215,13 +3488,7 @@
       </p:grpSpPr>
       <p:sp>
         <p:nvSpPr>
-          <p:cNvPr id="2" name="Slide Image Placeholder 1">
-            <a:extLst>
-              <a:ext uri="{FF2B5EF4-FFF2-40B4-BE49-F238E27FC236}">
-                <a16:creationId xmlns:a16="http://schemas.microsoft.com/office/drawing/2014/main" id="{C5AA0A43-913C-D15D-CAFA-9AA2BC5F3BF5}"/>
-              </a:ext>
-            </a:extLst>
-          </p:cNvPr>
+          <p:cNvPr id="2" name="Slide Image Placeholder 1"/>
           <p:cNvSpPr>
             <a:spLocks noGrp="1" noRot="1" noChangeAspect="1"/>
           </p:cNvSpPr>
@@ -2233,13 +3500,7 @@
       </p:sp>
       <p:sp>
         <p:nvSpPr>
-          <p:cNvPr id="3" name="Notes Placeholder 2">
-            <a:extLst>
-              <a:ext uri="{FF2B5EF4-FFF2-40B4-BE49-F238E27FC236}">
-                <a16:creationId xmlns:a16="http://schemas.microsoft.com/office/drawing/2014/main" id="{FDA6CD0E-87C3-83FC-092B-F5B4E223907A}"/>
-              </a:ext>
-            </a:extLst>
-          </p:cNvPr>
+          <p:cNvPr id="3" name="Notes Placeholder 2"/>
           <p:cNvSpPr>
             <a:spLocks noGrp="1"/>
           </p:cNvSpPr>
@@ -2254,492 +3515,22 @@
           <a:p>
             <a:r>
               <a:rPr lang="en-US" dirty="0"/>
-              <a:t>The photos thing is just a suggestion, </a:t>
+              <a:t>Still to be added: Model details + </a:t>
             </a:r>
             <a:r>
               <a:rPr lang="en-US" dirty="0" err="1"/>
-              <a:t>i</a:t>
-            </a:r>
-            <a:r>
-              <a:rPr lang="en-US" dirty="0"/>
-              <a:t> find it good idea since people from online never saw us, but I understand if you don’t like it. (stole your linked in photo for that lol)</a:t>
-            </a:r>
-          </a:p>
-          <a:p>
+              <a:t>Hyperparams</a:t>
+            </a:r>
             <a:endParaRPr lang="en-US" dirty="0"/>
           </a:p>
           <a:p>
-            <a:endParaRPr lang="en-US" dirty="0"/>
-          </a:p>
-          <a:p>
-            <a:pPr marL="0" marR="0" lvl="0" indent="0" algn="l" defTabSz="914400" rtl="0" eaLnBrk="1" fontAlgn="auto" latinLnBrk="0" hangingPunct="1">
-              <a:lnSpc>
-                <a:spcPct val="100000"/>
-              </a:lnSpc>
-              <a:spcBef>
-                <a:spcPts val="0"/>
-              </a:spcBef>
-              <a:spcAft>
-                <a:spcPts val="0"/>
-              </a:spcAft>
-              <a:buClrTx/>
-              <a:buSzTx/>
-              <a:buFontTx/>
-              <a:buNone/>
-              <a:tabLst/>
-              <a:defRPr/>
-            </a:pPr>
-            <a:r>
-              <a:rPr lang="en-US" dirty="0"/>
-              <a:t>Also the </a:t>
-            </a:r>
-            <a:r>
-              <a:rPr lang="en-GB" sz="1200" dirty="0">
-                <a:solidFill>
-                  <a:schemeClr val="bg1">
-                    <a:lumMod val="75000"/>
-                  </a:schemeClr>
-                </a:solidFill>
-              </a:rPr>
-              <a:t>Dataset Characteristics </a:t>
-            </a:r>
-            <a:r>
-              <a:rPr lang="en-GB" sz="1200" dirty="0">
-                <a:solidFill>
-                  <a:schemeClr val="bg1">
-                    <a:lumMod val="75000"/>
-                  </a:schemeClr>
-                </a:solidFill>
-                <a:latin typeface="Calibri" panose="020F0502020204030204" pitchFamily="34" charset="0"/>
-                <a:ea typeface="Calibri" panose="020F0502020204030204" pitchFamily="34" charset="0"/>
-                <a:cs typeface="Calibri" panose="020F0502020204030204" pitchFamily="34" charset="0"/>
-              </a:rPr>
-              <a:t>– </a:t>
-            </a:r>
-            <a:r>
-              <a:rPr lang="en-GB" sz="1200" dirty="0">
-                <a:latin typeface="Calibri" panose="020F0502020204030204" pitchFamily="34" charset="0"/>
-                <a:ea typeface="Calibri" panose="020F0502020204030204" pitchFamily="34" charset="0"/>
-                <a:cs typeface="Calibri" panose="020F0502020204030204" pitchFamily="34" charset="0"/>
-              </a:rPr>
-              <a:t>Baseline Model </a:t>
-            </a:r>
-            <a:r>
-              <a:rPr lang="en-GB" sz="1200" dirty="0">
-                <a:solidFill>
-                  <a:schemeClr val="bg1">
-                    <a:lumMod val="75000"/>
-                  </a:schemeClr>
-                </a:solidFill>
-                <a:latin typeface="Calibri" panose="020F0502020204030204" pitchFamily="34" charset="0"/>
-                <a:ea typeface="Calibri" panose="020F0502020204030204" pitchFamily="34" charset="0"/>
-                <a:cs typeface="Calibri" panose="020F0502020204030204" pitchFamily="34" charset="0"/>
-              </a:rPr>
-              <a:t>– Neural Net – Results – Challenges </a:t>
-            </a:r>
-            <a:r>
-              <a:rPr lang="de-DE" sz="1200" dirty="0">
-                <a:solidFill>
-                  <a:schemeClr val="bg1">
-                    <a:lumMod val="75000"/>
-                  </a:schemeClr>
-                </a:solidFill>
-                <a:latin typeface="Calibri" panose="020F0502020204030204" pitchFamily="34" charset="0"/>
-                <a:ea typeface="Calibri" panose="020F0502020204030204" pitchFamily="34" charset="0"/>
-                <a:cs typeface="Calibri" panose="020F0502020204030204" pitchFamily="34" charset="0"/>
-              </a:rPr>
-              <a:t> </a:t>
-            </a:r>
-            <a:r>
-              <a:rPr lang="de-DE" sz="1200" dirty="0" err="1">
-                <a:solidFill>
-                  <a:schemeClr val="bg1">
-                    <a:lumMod val="75000"/>
-                  </a:schemeClr>
-                </a:solidFill>
-                <a:latin typeface="Calibri" panose="020F0502020204030204" pitchFamily="34" charset="0"/>
-                <a:ea typeface="Calibri" panose="020F0502020204030204" pitchFamily="34" charset="0"/>
-                <a:cs typeface="Calibri" panose="020F0502020204030204" pitchFamily="34" charset="0"/>
-              </a:rPr>
-              <a:t>footer</a:t>
-            </a:r>
-            <a:r>
-              <a:rPr lang="de-DE" sz="1200" dirty="0">
-                <a:solidFill>
-                  <a:schemeClr val="bg1">
-                    <a:lumMod val="75000"/>
-                  </a:schemeClr>
-                </a:solidFill>
-                <a:latin typeface="Calibri" panose="020F0502020204030204" pitchFamily="34" charset="0"/>
-                <a:ea typeface="Calibri" panose="020F0502020204030204" pitchFamily="34" charset="0"/>
-                <a:cs typeface="Calibri" panose="020F0502020204030204" pitchFamily="34" charset="0"/>
-              </a:rPr>
-              <a:t> </a:t>
-            </a:r>
-            <a:r>
-              <a:rPr lang="de-DE" sz="1200" dirty="0" err="1">
-                <a:solidFill>
-                  <a:schemeClr val="bg1">
-                    <a:lumMod val="75000"/>
-                  </a:schemeClr>
-                </a:solidFill>
-                <a:latin typeface="Calibri" panose="020F0502020204030204" pitchFamily="34" charset="0"/>
-                <a:ea typeface="Calibri" panose="020F0502020204030204" pitchFamily="34" charset="0"/>
-                <a:cs typeface="Calibri" panose="020F0502020204030204" pitchFamily="34" charset="0"/>
-              </a:rPr>
-              <a:t>is</a:t>
-            </a:r>
-            <a:r>
-              <a:rPr lang="de-DE" sz="1200" dirty="0">
-                <a:solidFill>
-                  <a:schemeClr val="bg1">
-                    <a:lumMod val="75000"/>
-                  </a:schemeClr>
-                </a:solidFill>
-                <a:latin typeface="Calibri" panose="020F0502020204030204" pitchFamily="34" charset="0"/>
-                <a:ea typeface="Calibri" panose="020F0502020204030204" pitchFamily="34" charset="0"/>
-                <a:cs typeface="Calibri" panose="020F0502020204030204" pitchFamily="34" charset="0"/>
-              </a:rPr>
-              <a:t> </a:t>
-            </a:r>
-            <a:r>
-              <a:rPr lang="de-DE" sz="1200" dirty="0" err="1">
-                <a:solidFill>
-                  <a:schemeClr val="bg1">
-                    <a:lumMod val="75000"/>
-                  </a:schemeClr>
-                </a:solidFill>
-                <a:latin typeface="Calibri" panose="020F0502020204030204" pitchFamily="34" charset="0"/>
-                <a:ea typeface="Calibri" panose="020F0502020204030204" pitchFamily="34" charset="0"/>
-                <a:cs typeface="Calibri" panose="020F0502020204030204" pitchFamily="34" charset="0"/>
-              </a:rPr>
-              <a:t>the</a:t>
-            </a:r>
-            <a:r>
-              <a:rPr lang="de-DE" sz="1200" dirty="0">
-                <a:solidFill>
-                  <a:schemeClr val="bg1">
-                    <a:lumMod val="75000"/>
-                  </a:schemeClr>
-                </a:solidFill>
-                <a:latin typeface="Calibri" panose="020F0502020204030204" pitchFamily="34" charset="0"/>
-                <a:ea typeface="Calibri" panose="020F0502020204030204" pitchFamily="34" charset="0"/>
-                <a:cs typeface="Calibri" panose="020F0502020204030204" pitchFamily="34" charset="0"/>
-              </a:rPr>
-              <a:t> last </a:t>
-            </a:r>
-            <a:r>
-              <a:rPr lang="de-DE" sz="1200" dirty="0" err="1">
-                <a:solidFill>
-                  <a:schemeClr val="bg1">
-                    <a:lumMod val="75000"/>
-                  </a:schemeClr>
-                </a:solidFill>
-                <a:latin typeface="Calibri" panose="020F0502020204030204" pitchFamily="34" charset="0"/>
-                <a:ea typeface="Calibri" panose="020F0502020204030204" pitchFamily="34" charset="0"/>
-                <a:cs typeface="Calibri" panose="020F0502020204030204" pitchFamily="34" charset="0"/>
-              </a:rPr>
-              <a:t>thing</a:t>
-            </a:r>
-            <a:r>
-              <a:rPr lang="de-DE" sz="1200" dirty="0">
-                <a:solidFill>
-                  <a:schemeClr val="bg1">
-                    <a:lumMod val="75000"/>
-                  </a:schemeClr>
-                </a:solidFill>
-                <a:latin typeface="Calibri" panose="020F0502020204030204" pitchFamily="34" charset="0"/>
-                <a:ea typeface="Calibri" panose="020F0502020204030204" pitchFamily="34" charset="0"/>
-                <a:cs typeface="Calibri" panose="020F0502020204030204" pitchFamily="34" charset="0"/>
-              </a:rPr>
-              <a:t> i will </a:t>
-            </a:r>
-            <a:r>
-              <a:rPr lang="de-DE" sz="1200" dirty="0" err="1">
-                <a:solidFill>
-                  <a:schemeClr val="bg1">
-                    <a:lumMod val="75000"/>
-                  </a:schemeClr>
-                </a:solidFill>
-                <a:latin typeface="Calibri" panose="020F0502020204030204" pitchFamily="34" charset="0"/>
-                <a:ea typeface="Calibri" panose="020F0502020204030204" pitchFamily="34" charset="0"/>
-                <a:cs typeface="Calibri" panose="020F0502020204030204" pitchFamily="34" charset="0"/>
-              </a:rPr>
-              <a:t>correct</a:t>
-            </a:r>
-            <a:r>
-              <a:rPr lang="de-DE" sz="1200" dirty="0">
-                <a:solidFill>
-                  <a:schemeClr val="bg1">
-                    <a:lumMod val="75000"/>
-                  </a:schemeClr>
-                </a:solidFill>
-                <a:latin typeface="Calibri" panose="020F0502020204030204" pitchFamily="34" charset="0"/>
-                <a:ea typeface="Calibri" panose="020F0502020204030204" pitchFamily="34" charset="0"/>
-                <a:cs typeface="Calibri" panose="020F0502020204030204" pitchFamily="34" charset="0"/>
-              </a:rPr>
-              <a:t>! In </a:t>
-            </a:r>
-            <a:r>
-              <a:rPr lang="de-DE" sz="1200" dirty="0" err="1">
-                <a:solidFill>
-                  <a:schemeClr val="bg1">
-                    <a:lumMod val="75000"/>
-                  </a:schemeClr>
-                </a:solidFill>
-                <a:latin typeface="Calibri" panose="020F0502020204030204" pitchFamily="34" charset="0"/>
-                <a:ea typeface="Calibri" panose="020F0502020204030204" pitchFamily="34" charset="0"/>
-                <a:cs typeface="Calibri" panose="020F0502020204030204" pitchFamily="34" charset="0"/>
-              </a:rPr>
-              <a:t>case</a:t>
-            </a:r>
-            <a:r>
-              <a:rPr lang="de-DE" sz="1200" dirty="0">
-                <a:solidFill>
-                  <a:schemeClr val="bg1">
-                    <a:lumMod val="75000"/>
-                  </a:schemeClr>
-                </a:solidFill>
-                <a:latin typeface="Calibri" panose="020F0502020204030204" pitchFamily="34" charset="0"/>
-                <a:ea typeface="Calibri" panose="020F0502020204030204" pitchFamily="34" charset="0"/>
-                <a:cs typeface="Calibri" panose="020F0502020204030204" pitchFamily="34" charset="0"/>
-              </a:rPr>
-              <a:t> </a:t>
-            </a:r>
-            <a:r>
-              <a:rPr lang="de-DE" sz="1200" dirty="0" err="1">
-                <a:solidFill>
-                  <a:schemeClr val="bg1">
-                    <a:lumMod val="75000"/>
-                  </a:schemeClr>
-                </a:solidFill>
-                <a:latin typeface="Calibri" panose="020F0502020204030204" pitchFamily="34" charset="0"/>
-                <a:ea typeface="Calibri" panose="020F0502020204030204" pitchFamily="34" charset="0"/>
-                <a:cs typeface="Calibri" panose="020F0502020204030204" pitchFamily="34" charset="0"/>
-              </a:rPr>
-              <a:t>you</a:t>
-            </a:r>
-            <a:r>
-              <a:rPr lang="de-DE" sz="1200" dirty="0">
-                <a:solidFill>
-                  <a:schemeClr val="bg1">
-                    <a:lumMod val="75000"/>
-                  </a:schemeClr>
-                </a:solidFill>
-                <a:latin typeface="Calibri" panose="020F0502020204030204" pitchFamily="34" charset="0"/>
-                <a:ea typeface="Calibri" panose="020F0502020204030204" pitchFamily="34" charset="0"/>
-                <a:cs typeface="Calibri" panose="020F0502020204030204" pitchFamily="34" charset="0"/>
-              </a:rPr>
-              <a:t> </a:t>
-            </a:r>
-            <a:r>
-              <a:rPr lang="de-DE" sz="1200" dirty="0" err="1">
-                <a:solidFill>
-                  <a:schemeClr val="bg1">
-                    <a:lumMod val="75000"/>
-                  </a:schemeClr>
-                </a:solidFill>
-                <a:latin typeface="Calibri" panose="020F0502020204030204" pitchFamily="34" charset="0"/>
-                <a:ea typeface="Calibri" panose="020F0502020204030204" pitchFamily="34" charset="0"/>
-                <a:cs typeface="Calibri" panose="020F0502020204030204" pitchFamily="34" charset="0"/>
-              </a:rPr>
-              <a:t>are</a:t>
-            </a:r>
-            <a:r>
-              <a:rPr lang="de-DE" sz="1200" dirty="0">
-                <a:solidFill>
-                  <a:schemeClr val="bg1">
-                    <a:lumMod val="75000"/>
-                  </a:schemeClr>
-                </a:solidFill>
-                <a:latin typeface="Calibri" panose="020F0502020204030204" pitchFamily="34" charset="0"/>
-                <a:ea typeface="Calibri" panose="020F0502020204030204" pitchFamily="34" charset="0"/>
-                <a:cs typeface="Calibri" panose="020F0502020204030204" pitchFamily="34" charset="0"/>
-              </a:rPr>
-              <a:t> </a:t>
-            </a:r>
-            <a:r>
-              <a:rPr lang="de-DE" sz="1200" dirty="0" err="1">
-                <a:solidFill>
-                  <a:schemeClr val="bg1">
-                    <a:lumMod val="75000"/>
-                  </a:schemeClr>
-                </a:solidFill>
-                <a:latin typeface="Calibri" panose="020F0502020204030204" pitchFamily="34" charset="0"/>
-                <a:ea typeface="Calibri" panose="020F0502020204030204" pitchFamily="34" charset="0"/>
-                <a:cs typeface="Calibri" panose="020F0502020204030204" pitchFamily="34" charset="0"/>
-              </a:rPr>
-              <a:t>seeing</a:t>
-            </a:r>
-            <a:r>
-              <a:rPr lang="de-DE" sz="1200" dirty="0">
-                <a:solidFill>
-                  <a:schemeClr val="bg1">
-                    <a:lumMod val="75000"/>
-                  </a:schemeClr>
-                </a:solidFill>
-                <a:latin typeface="Calibri" panose="020F0502020204030204" pitchFamily="34" charset="0"/>
-                <a:ea typeface="Calibri" panose="020F0502020204030204" pitchFamily="34" charset="0"/>
-                <a:cs typeface="Calibri" panose="020F0502020204030204" pitchFamily="34" charset="0"/>
-              </a:rPr>
-              <a:t> </a:t>
-            </a:r>
-            <a:r>
-              <a:rPr lang="de-DE" sz="1200" dirty="0" err="1">
-                <a:solidFill>
-                  <a:schemeClr val="bg1">
-                    <a:lumMod val="75000"/>
-                  </a:schemeClr>
-                </a:solidFill>
-                <a:latin typeface="Calibri" panose="020F0502020204030204" pitchFamily="34" charset="0"/>
-                <a:ea typeface="Calibri" panose="020F0502020204030204" pitchFamily="34" charset="0"/>
-                <a:cs typeface="Calibri" panose="020F0502020204030204" pitchFamily="34" charset="0"/>
-              </a:rPr>
-              <a:t>it</a:t>
-            </a:r>
-            <a:r>
-              <a:rPr lang="de-DE" sz="1200" dirty="0">
-                <a:solidFill>
-                  <a:schemeClr val="bg1">
-                    <a:lumMod val="75000"/>
-                  </a:schemeClr>
-                </a:solidFill>
-                <a:latin typeface="Calibri" panose="020F0502020204030204" pitchFamily="34" charset="0"/>
-                <a:ea typeface="Calibri" panose="020F0502020204030204" pitchFamily="34" charset="0"/>
-                <a:cs typeface="Calibri" panose="020F0502020204030204" pitchFamily="34" charset="0"/>
-              </a:rPr>
-              <a:t> </a:t>
-            </a:r>
-            <a:r>
-              <a:rPr lang="de-DE" sz="1200" dirty="0" err="1">
-                <a:solidFill>
-                  <a:schemeClr val="bg1">
-                    <a:lumMod val="75000"/>
-                  </a:schemeClr>
-                </a:solidFill>
-                <a:latin typeface="Calibri" panose="020F0502020204030204" pitchFamily="34" charset="0"/>
-                <a:ea typeface="Calibri" panose="020F0502020204030204" pitchFamily="34" charset="0"/>
-                <a:cs typeface="Calibri" panose="020F0502020204030204" pitchFamily="34" charset="0"/>
-              </a:rPr>
-              <a:t>missing</a:t>
-            </a:r>
-            <a:r>
-              <a:rPr lang="de-DE" sz="1200" dirty="0">
-                <a:solidFill>
-                  <a:schemeClr val="bg1">
-                    <a:lumMod val="75000"/>
-                  </a:schemeClr>
-                </a:solidFill>
-                <a:latin typeface="Calibri" panose="020F0502020204030204" pitchFamily="34" charset="0"/>
-                <a:ea typeface="Calibri" panose="020F0502020204030204" pitchFamily="34" charset="0"/>
-                <a:cs typeface="Calibri" panose="020F0502020204030204" pitchFamily="34" charset="0"/>
-              </a:rPr>
-              <a:t> </a:t>
-            </a:r>
-            <a:r>
-              <a:rPr lang="de-DE" sz="1200" dirty="0" err="1">
-                <a:solidFill>
-                  <a:schemeClr val="bg1">
-                    <a:lumMod val="75000"/>
-                  </a:schemeClr>
-                </a:solidFill>
-                <a:latin typeface="Calibri" panose="020F0502020204030204" pitchFamily="34" charset="0"/>
-                <a:ea typeface="Calibri" panose="020F0502020204030204" pitchFamily="34" charset="0"/>
-                <a:cs typeface="Calibri" panose="020F0502020204030204" pitchFamily="34" charset="0"/>
-              </a:rPr>
-              <a:t>or</a:t>
-            </a:r>
-            <a:r>
-              <a:rPr lang="de-DE" sz="1200" dirty="0">
-                <a:solidFill>
-                  <a:schemeClr val="bg1">
-                    <a:lumMod val="75000"/>
-                  </a:schemeClr>
-                </a:solidFill>
-                <a:latin typeface="Calibri" panose="020F0502020204030204" pitchFamily="34" charset="0"/>
-                <a:ea typeface="Calibri" panose="020F0502020204030204" pitchFamily="34" charset="0"/>
-                <a:cs typeface="Calibri" panose="020F0502020204030204" pitchFamily="34" charset="0"/>
-              </a:rPr>
-              <a:t> </a:t>
-            </a:r>
-            <a:r>
-              <a:rPr lang="de-DE" sz="1200" dirty="0" err="1">
-                <a:solidFill>
-                  <a:schemeClr val="bg1">
-                    <a:lumMod val="75000"/>
-                  </a:schemeClr>
-                </a:solidFill>
-                <a:latin typeface="Calibri" panose="020F0502020204030204" pitchFamily="34" charset="0"/>
-                <a:ea typeface="Calibri" panose="020F0502020204030204" pitchFamily="34" charset="0"/>
-                <a:cs typeface="Calibri" panose="020F0502020204030204" pitchFamily="34" charset="0"/>
-              </a:rPr>
-              <a:t>there</a:t>
-            </a:r>
-            <a:r>
-              <a:rPr lang="de-DE" sz="1200" dirty="0">
-                <a:solidFill>
-                  <a:schemeClr val="bg1">
-                    <a:lumMod val="75000"/>
-                  </a:schemeClr>
-                </a:solidFill>
-                <a:latin typeface="Calibri" panose="020F0502020204030204" pitchFamily="34" charset="0"/>
-                <a:ea typeface="Calibri" panose="020F0502020204030204" pitchFamily="34" charset="0"/>
-                <a:cs typeface="Calibri" panose="020F0502020204030204" pitchFamily="34" charset="0"/>
-              </a:rPr>
-              <a:t> </a:t>
-            </a:r>
-            <a:r>
-              <a:rPr lang="de-DE" sz="1200" dirty="0" err="1">
-                <a:solidFill>
-                  <a:schemeClr val="bg1">
-                    <a:lumMod val="75000"/>
-                  </a:schemeClr>
-                </a:solidFill>
-                <a:latin typeface="Calibri" panose="020F0502020204030204" pitchFamily="34" charset="0"/>
-                <a:ea typeface="Calibri" panose="020F0502020204030204" pitchFamily="34" charset="0"/>
-                <a:cs typeface="Calibri" panose="020F0502020204030204" pitchFamily="34" charset="0"/>
-              </a:rPr>
-              <a:t>are</a:t>
-            </a:r>
-            <a:r>
-              <a:rPr lang="de-DE" sz="1200" dirty="0">
-                <a:solidFill>
-                  <a:schemeClr val="bg1">
-                    <a:lumMod val="75000"/>
-                  </a:schemeClr>
-                </a:solidFill>
-                <a:latin typeface="Calibri" panose="020F0502020204030204" pitchFamily="34" charset="0"/>
-                <a:ea typeface="Calibri" panose="020F0502020204030204" pitchFamily="34" charset="0"/>
-                <a:cs typeface="Calibri" panose="020F0502020204030204" pitchFamily="34" charset="0"/>
-              </a:rPr>
-              <a:t> </a:t>
-            </a:r>
-            <a:r>
-              <a:rPr lang="de-DE" sz="1200" dirty="0" err="1">
-                <a:solidFill>
-                  <a:schemeClr val="bg1">
-                    <a:lumMod val="75000"/>
-                  </a:schemeClr>
-                </a:solidFill>
-                <a:latin typeface="Calibri" panose="020F0502020204030204" pitchFamily="34" charset="0"/>
-                <a:ea typeface="Calibri" panose="020F0502020204030204" pitchFamily="34" charset="0"/>
-                <a:cs typeface="Calibri" panose="020F0502020204030204" pitchFamily="34" charset="0"/>
-              </a:rPr>
-              <a:t>inconsistencies</a:t>
-            </a:r>
-            <a:endParaRPr lang="en-US" dirty="0"/>
+            <a:endParaRPr lang="en-GB" dirty="0"/>
           </a:p>
         </p:txBody>
       </p:sp>
       <p:sp>
         <p:nvSpPr>
-          <p:cNvPr id="4" name="Slide Number Placeholder 3">
-            <a:extLst>
-              <a:ext uri="{FF2B5EF4-FFF2-40B4-BE49-F238E27FC236}">
-                <a16:creationId xmlns:a16="http://schemas.microsoft.com/office/drawing/2014/main" id="{BDD9B197-3FD5-5FAF-46EB-BB71A17F5D5F}"/>
-              </a:ext>
-            </a:extLst>
-          </p:cNvPr>
+          <p:cNvPr id="4" name="Slide Number Placeholder 3"/>
           <p:cNvSpPr>
             <a:spLocks noGrp="1"/>
           </p:cNvSpPr>
@@ -2754,7 +3545,7 @@
           <a:p>
             <a:fld id="{809340A9-5F99-47E5-A3AD-FD228EA849F8}" type="slidenum">
               <a:rPr lang="en-GB" smtClean="0"/>
-              <a:t>13</a:t>
+              <a:t>10</a:t>
             </a:fld>
             <a:endParaRPr lang="en-GB"/>
           </a:p>
@@ -2763,7 +3554,7 @@
     </p:spTree>
     <p:extLst>
       <p:ext uri="{BB962C8B-B14F-4D97-AF65-F5344CB8AC3E}">
-        <p14:creationId xmlns:p14="http://schemas.microsoft.com/office/powerpoint/2010/main" val="2897267757"/>
+        <p14:creationId xmlns:p14="http://schemas.microsoft.com/office/powerpoint/2010/main" val="812862749"/>
       </p:ext>
     </p:extLst>
   </p:cSld>
@@ -6483,7 +7274,7 @@
         <p:cNvPr id="1" name="">
           <a:extLst>
             <a:ext uri="{FF2B5EF4-FFF2-40B4-BE49-F238E27FC236}">
-              <a16:creationId xmlns:a16="http://schemas.microsoft.com/office/drawing/2014/main" id="{6CE49186-8DD2-F2F3-41CA-BE44A614FA4B}"/>
+              <a16:creationId xmlns:a16="http://schemas.microsoft.com/office/drawing/2014/main" id="{C9AFB400-4531-965B-0FD5-CF4AAA00FE76}"/>
             </a:ext>
           </a:extLst>
         </p:cNvPr>
@@ -6500,10 +7291,68 @@
       </p:grpSpPr>
       <p:sp>
         <p:nvSpPr>
-          <p:cNvPr id="7" name="TextBox 4">
+          <p:cNvPr id="3" name="Title 2">
             <a:extLst>
               <a:ext uri="{FF2B5EF4-FFF2-40B4-BE49-F238E27FC236}">
-                <a16:creationId xmlns:a16="http://schemas.microsoft.com/office/drawing/2014/main" id="{8E83B300-D25F-31F8-C89D-EEBE022E52C4}"/>
+                <a16:creationId xmlns:a16="http://schemas.microsoft.com/office/drawing/2014/main" id="{1E8B247F-76E9-DEE9-CA7F-0A59B568FA83}"/>
+              </a:ext>
+            </a:extLst>
+          </p:cNvPr>
+          <p:cNvSpPr>
+            <a:spLocks noGrp="1"/>
+          </p:cNvSpPr>
+          <p:nvPr>
+            <p:ph type="title"/>
+          </p:nvPr>
+        </p:nvSpPr>
+        <p:spPr/>
+        <p:txBody>
+          <a:bodyPr/>
+          <a:lstStyle/>
+          <a:p>
+            <a:r>
+              <a:rPr lang="en-US" dirty="0"/>
+              <a:t>Neural Network</a:t>
+            </a:r>
+            <a:endParaRPr lang="en-GB" dirty="0"/>
+          </a:p>
+        </p:txBody>
+      </p:sp>
+      <p:sp>
+        <p:nvSpPr>
+          <p:cNvPr id="2" name="Slide Number Placeholder 1">
+            <a:extLst>
+              <a:ext uri="{FF2B5EF4-FFF2-40B4-BE49-F238E27FC236}">
+                <a16:creationId xmlns:a16="http://schemas.microsoft.com/office/drawing/2014/main" id="{574E58EE-AC79-B367-77AB-BC04DD1F4E9D}"/>
+              </a:ext>
+            </a:extLst>
+          </p:cNvPr>
+          <p:cNvSpPr>
+            <a:spLocks noGrp="1"/>
+          </p:cNvSpPr>
+          <p:nvPr>
+            <p:ph type="sldNum" sz="quarter" idx="12"/>
+          </p:nvPr>
+        </p:nvSpPr>
+        <p:spPr/>
+        <p:txBody>
+          <a:bodyPr/>
+          <a:lstStyle/>
+          <a:p>
+            <a:fld id="{FEE63D0E-FFEF-43D1-BE35-64C33AF422FD}" type="slidenum">
+              <a:rPr lang="de-DE" smtClean="0"/>
+              <a:t>10</a:t>
+            </a:fld>
+            <a:endParaRPr lang="de-DE" dirty="0"/>
+          </a:p>
+        </p:txBody>
+      </p:sp>
+      <p:sp>
+        <p:nvSpPr>
+          <p:cNvPr id="25" name="TextBox 24">
+            <a:extLst>
+              <a:ext uri="{FF2B5EF4-FFF2-40B4-BE49-F238E27FC236}">
+                <a16:creationId xmlns:a16="http://schemas.microsoft.com/office/drawing/2014/main" id="{852FAF9E-1FFA-DA77-35CD-2C61E5B0CA7D}"/>
               </a:ext>
             </a:extLst>
           </p:cNvPr>
@@ -6512,8 +7361,339 @@
         </p:nvSpPr>
         <p:spPr>
           <a:xfrm>
-            <a:off x="3524719" y="6581001"/>
-            <a:ext cx="5142562" cy="276999"/>
+            <a:off x="9739510" y="4378949"/>
+            <a:ext cx="1439730" cy="369332"/>
+          </a:xfrm>
+          <a:prstGeom prst="rect">
+            <a:avLst/>
+          </a:prstGeom>
+          <a:noFill/>
+        </p:spPr>
+        <p:txBody>
+          <a:bodyPr wrap="square" rtlCol="0">
+            <a:spAutoFit/>
+          </a:bodyPr>
+          <a:lstStyle/>
+          <a:p>
+            <a:pPr algn="ctr"/>
+            <a:r>
+              <a:rPr lang="en-GB" dirty="0"/>
+              <a:t>0.18081</a:t>
+            </a:r>
+            <a:endParaRPr lang="en-GB" b="1" dirty="0"/>
+          </a:p>
+        </p:txBody>
+      </p:sp>
+      <p:pic>
+        <p:nvPicPr>
+          <p:cNvPr id="2050" name="Picture 2">
+            <a:extLst>
+              <a:ext uri="{FF2B5EF4-FFF2-40B4-BE49-F238E27FC236}">
+                <a16:creationId xmlns:a16="http://schemas.microsoft.com/office/drawing/2014/main" id="{05625916-4F74-97B2-CA33-FED8ADFE5C39}"/>
+              </a:ext>
+            </a:extLst>
+          </p:cNvPr>
+          <p:cNvPicPr>
+            <a:picLocks noChangeAspect="1" noChangeArrowheads="1"/>
+          </p:cNvPicPr>
+          <p:nvPr/>
+        </p:nvPicPr>
+        <p:blipFill>
+          <a:blip r:embed="rId3">
+            <a:extLst>
+              <a:ext uri="{28A0092B-C50C-407E-A947-70E740481C1C}">
+                <a14:useLocalDpi xmlns:a14="http://schemas.microsoft.com/office/drawing/2010/main" val="0"/>
+              </a:ext>
+            </a:extLst>
+          </a:blip>
+          <a:srcRect/>
+          <a:stretch>
+            <a:fillRect/>
+          </a:stretch>
+        </p:blipFill>
+        <p:spPr bwMode="auto">
+          <a:xfrm>
+            <a:off x="9949429" y="3985911"/>
+            <a:ext cx="1019892" cy="395607"/>
+          </a:xfrm>
+          <a:prstGeom prst="rect">
+            <a:avLst/>
+          </a:prstGeom>
+          <a:noFill/>
+          <a:extLst>
+            <a:ext uri="{909E8E84-426E-40DD-AFC4-6F175D3DCCD1}">
+              <a14:hiddenFill xmlns:a14="http://schemas.microsoft.com/office/drawing/2010/main">
+                <a:solidFill>
+                  <a:srgbClr val="FFFFFF"/>
+                </a:solidFill>
+              </a14:hiddenFill>
+            </a:ext>
+          </a:extLst>
+        </p:spPr>
+      </p:pic>
+      <p:sp>
+        <p:nvSpPr>
+          <p:cNvPr id="35" name="Rectangle 34">
+            <a:extLst>
+              <a:ext uri="{FF2B5EF4-FFF2-40B4-BE49-F238E27FC236}">
+                <a16:creationId xmlns:a16="http://schemas.microsoft.com/office/drawing/2014/main" id="{28297CAB-61F1-1C7C-66B3-09BA0BBB0A31}"/>
+              </a:ext>
+            </a:extLst>
+          </p:cNvPr>
+          <p:cNvSpPr/>
+          <p:nvPr/>
+        </p:nvSpPr>
+        <p:spPr>
+          <a:xfrm>
+            <a:off x="196375" y="2953463"/>
+            <a:ext cx="2060293" cy="1792313"/>
+          </a:xfrm>
+          <a:prstGeom prst="rect">
+            <a:avLst/>
+          </a:prstGeom>
+          <a:noFill/>
+          <a:ln>
+            <a:noFill/>
+          </a:ln>
+        </p:spPr>
+        <p:style>
+          <a:lnRef idx="0">
+            <a:scrgbClr r="0" g="0" b="0"/>
+          </a:lnRef>
+          <a:fillRef idx="0">
+            <a:scrgbClr r="0" g="0" b="0"/>
+          </a:fillRef>
+          <a:effectRef idx="0">
+            <a:scrgbClr r="0" g="0" b="0"/>
+          </a:effectRef>
+          <a:fontRef idx="minor">
+            <a:schemeClr val="dk1"/>
+          </a:fontRef>
+        </p:style>
+        <p:txBody>
+          <a:bodyPr rtlCol="0" anchor="ctr"/>
+          <a:lstStyle/>
+          <a:p>
+            <a:pPr algn="ctr">
+              <a:lnSpc>
+                <a:spcPct val="150000"/>
+              </a:lnSpc>
+            </a:pPr>
+            <a:r>
+              <a:rPr lang="en-GB" dirty="0"/>
+              <a:t>Temperature</a:t>
+            </a:r>
+          </a:p>
+          <a:p>
+            <a:pPr algn="ctr">
+              <a:lnSpc>
+                <a:spcPct val="150000"/>
+              </a:lnSpc>
+            </a:pPr>
+            <a:r>
+              <a:rPr lang="en-GB" dirty="0"/>
+              <a:t>School Holidays</a:t>
+            </a:r>
+          </a:p>
+          <a:p>
+            <a:pPr algn="ctr">
+              <a:lnSpc>
+                <a:spcPct val="150000"/>
+              </a:lnSpc>
+            </a:pPr>
+            <a:r>
+              <a:rPr lang="en-GB" dirty="0"/>
+              <a:t>Weekday</a:t>
+            </a:r>
+          </a:p>
+          <a:p>
+            <a:pPr algn="ctr">
+              <a:lnSpc>
+                <a:spcPct val="150000"/>
+              </a:lnSpc>
+              <a:buNone/>
+            </a:pPr>
+            <a:r>
+              <a:rPr lang="en-GB" dirty="0"/>
+              <a:t>Days till NYE</a:t>
+            </a:r>
+          </a:p>
+        </p:txBody>
+      </p:sp>
+      <p:sp>
+        <p:nvSpPr>
+          <p:cNvPr id="37" name="TextBox 36">
+            <a:extLst>
+              <a:ext uri="{FF2B5EF4-FFF2-40B4-BE49-F238E27FC236}">
+                <a16:creationId xmlns:a16="http://schemas.microsoft.com/office/drawing/2014/main" id="{213AA277-D541-DE90-66F5-A68FDC064C74}"/>
+              </a:ext>
+            </a:extLst>
+          </p:cNvPr>
+          <p:cNvSpPr txBox="1"/>
+          <p:nvPr/>
+        </p:nvSpPr>
+        <p:spPr>
+          <a:xfrm>
+            <a:off x="196374" y="2515034"/>
+            <a:ext cx="2060293" cy="369332"/>
+          </a:xfrm>
+          <a:prstGeom prst="rect">
+            <a:avLst/>
+          </a:prstGeom>
+          <a:noFill/>
+        </p:spPr>
+        <p:txBody>
+          <a:bodyPr wrap="square">
+            <a:spAutoFit/>
+          </a:bodyPr>
+          <a:lstStyle/>
+          <a:p>
+            <a:pPr algn="ctr"/>
+            <a:r>
+              <a:rPr lang="en-US" b="1" dirty="0"/>
+              <a:t>Features</a:t>
+            </a:r>
+            <a:r>
+              <a:rPr lang="en-GB" b="1" dirty="0"/>
+              <a:t>:</a:t>
+            </a:r>
+          </a:p>
+        </p:txBody>
+      </p:sp>
+      <p:cxnSp>
+        <p:nvCxnSpPr>
+          <p:cNvPr id="39" name="Straight Arrow Connector 38">
+            <a:extLst>
+              <a:ext uri="{FF2B5EF4-FFF2-40B4-BE49-F238E27FC236}">
+                <a16:creationId xmlns:a16="http://schemas.microsoft.com/office/drawing/2014/main" id="{B1BD9003-8AD4-D5FB-41BC-91B720CD5C6D}"/>
+              </a:ext>
+            </a:extLst>
+          </p:cNvPr>
+          <p:cNvCxnSpPr>
+            <a:cxnSpLocks/>
+          </p:cNvCxnSpPr>
+          <p:nvPr/>
+        </p:nvCxnSpPr>
+        <p:spPr>
+          <a:xfrm>
+            <a:off x="2453833" y="3507912"/>
+            <a:ext cx="382601" cy="0"/>
+          </a:xfrm>
+          <a:prstGeom prst="straightConnector1">
+            <a:avLst/>
+          </a:prstGeom>
+          <a:ln>
+            <a:tailEnd type="triangle"/>
+          </a:ln>
+        </p:spPr>
+        <p:style>
+          <a:lnRef idx="2">
+            <a:schemeClr val="accent1"/>
+          </a:lnRef>
+          <a:fillRef idx="0">
+            <a:schemeClr val="accent1"/>
+          </a:fillRef>
+          <a:effectRef idx="1">
+            <a:schemeClr val="accent1"/>
+          </a:effectRef>
+          <a:fontRef idx="minor">
+            <a:schemeClr val="tx1"/>
+          </a:fontRef>
+        </p:style>
+      </p:cxnSp>
+      <p:sp>
+        <p:nvSpPr>
+          <p:cNvPr id="41" name="Rectangle 40">
+            <a:extLst>
+              <a:ext uri="{FF2B5EF4-FFF2-40B4-BE49-F238E27FC236}">
+                <a16:creationId xmlns:a16="http://schemas.microsoft.com/office/drawing/2014/main" id="{DDFB0E2C-9FD8-79D9-69B0-9DF171AE3039}"/>
+              </a:ext>
+            </a:extLst>
+          </p:cNvPr>
+          <p:cNvSpPr/>
+          <p:nvPr/>
+        </p:nvSpPr>
+        <p:spPr>
+          <a:xfrm>
+            <a:off x="9139345" y="1842912"/>
+            <a:ext cx="2640059" cy="1792313"/>
+          </a:xfrm>
+          <a:prstGeom prst="rect">
+            <a:avLst/>
+          </a:prstGeom>
+          <a:noFill/>
+          <a:ln>
+            <a:noFill/>
+          </a:ln>
+        </p:spPr>
+        <p:style>
+          <a:lnRef idx="0">
+            <a:scrgbClr r="0" g="0" b="0"/>
+          </a:lnRef>
+          <a:fillRef idx="0">
+            <a:scrgbClr r="0" g="0" b="0"/>
+          </a:fillRef>
+          <a:effectRef idx="0">
+            <a:scrgbClr r="0" g="0" b="0"/>
+          </a:effectRef>
+          <a:fontRef idx="minor">
+            <a:schemeClr val="dk1"/>
+          </a:fontRef>
+        </p:style>
+        <p:txBody>
+          <a:bodyPr rtlCol="0" anchor="ctr"/>
+          <a:lstStyle/>
+          <a:p>
+            <a:pPr algn="ctr">
+              <a:lnSpc>
+                <a:spcPct val="150000"/>
+              </a:lnSpc>
+            </a:pPr>
+            <a:r>
+              <a:rPr lang="en-GB" sz="2400" b="1" dirty="0"/>
+              <a:t>MAPE</a:t>
+            </a:r>
+          </a:p>
+          <a:p>
+            <a:pPr>
+              <a:lnSpc>
+                <a:spcPct val="150000"/>
+              </a:lnSpc>
+            </a:pPr>
+            <a:r>
+              <a:rPr lang="en-GB" dirty="0"/>
+              <a:t>Validation Data :</a:t>
+            </a:r>
+          </a:p>
+          <a:p>
+            <a:pPr>
+              <a:lnSpc>
+                <a:spcPct val="150000"/>
+              </a:lnSpc>
+            </a:pPr>
+            <a:r>
+              <a:rPr lang="en-GB" dirty="0"/>
+              <a:t>Train + Validation Data :</a:t>
+            </a:r>
+          </a:p>
+        </p:txBody>
+      </p:sp>
+      <p:sp>
+        <p:nvSpPr>
+          <p:cNvPr id="4" name="TextBox 3">
+            <a:extLst>
+              <a:ext uri="{FF2B5EF4-FFF2-40B4-BE49-F238E27FC236}">
+                <a16:creationId xmlns:a16="http://schemas.microsoft.com/office/drawing/2014/main" id="{87F71682-02EA-F19A-3E6C-75AA394FC281}"/>
+              </a:ext>
+            </a:extLst>
+          </p:cNvPr>
+          <p:cNvSpPr txBox="1"/>
+          <p:nvPr/>
+        </p:nvSpPr>
+        <p:spPr>
+          <a:xfrm>
+            <a:off x="3778474" y="6538912"/>
+            <a:ext cx="4635051" cy="276999"/>
           </a:xfrm>
           <a:prstGeom prst="rect">
             <a:avLst/>
@@ -6568,7 +7748,7 @@
                 <a:ea typeface="Calibri" panose="020F0502020204030204" pitchFamily="34" charset="0"/>
                 <a:cs typeface="Calibri" panose="020F0502020204030204" pitchFamily="34" charset="0"/>
               </a:rPr>
-              <a:t>– Results – Challenges </a:t>
+              <a:t>– Challenges </a:t>
             </a:r>
             <a:endParaRPr lang="de-DE" sz="1200" dirty="0">
               <a:solidFill>
@@ -6580,6 +7760,173 @@
           </a:p>
         </p:txBody>
       </p:sp>
+      <p:sp>
+        <p:nvSpPr>
+          <p:cNvPr id="11" name="TextBox 10">
+            <a:extLst>
+              <a:ext uri="{FF2B5EF4-FFF2-40B4-BE49-F238E27FC236}">
+                <a16:creationId xmlns:a16="http://schemas.microsoft.com/office/drawing/2014/main" id="{DEFED84A-8214-F476-2F15-1D9828652E0C}"/>
+              </a:ext>
+            </a:extLst>
+          </p:cNvPr>
+          <p:cNvSpPr txBox="1"/>
+          <p:nvPr/>
+        </p:nvSpPr>
+        <p:spPr>
+          <a:xfrm>
+            <a:off x="3245824" y="1922363"/>
+            <a:ext cx="4716147" cy="3056350"/>
+          </a:xfrm>
+          <a:prstGeom prst="rect">
+            <a:avLst/>
+          </a:prstGeom>
+          <a:noFill/>
+        </p:spPr>
+        <p:style>
+          <a:lnRef idx="2">
+            <a:schemeClr val="dk1"/>
+          </a:lnRef>
+          <a:fillRef idx="1">
+            <a:schemeClr val="lt1"/>
+          </a:fillRef>
+          <a:effectRef idx="0">
+            <a:schemeClr val="dk1"/>
+          </a:effectRef>
+          <a:fontRef idx="minor">
+            <a:schemeClr val="dk1"/>
+          </a:fontRef>
+        </p:style>
+        <p:txBody>
+          <a:bodyPr wrap="square" rtlCol="0">
+            <a:spAutoFit/>
+          </a:bodyPr>
+          <a:lstStyle/>
+          <a:p>
+            <a:r>
+              <a:rPr lang="en-US" dirty="0"/>
+              <a:t>Paste code here:</a:t>
+            </a:r>
+          </a:p>
+          <a:p>
+            <a:endParaRPr lang="en-US" dirty="0"/>
+          </a:p>
+          <a:p>
+            <a:endParaRPr lang="en-US" dirty="0"/>
+          </a:p>
+          <a:p>
+            <a:endParaRPr lang="en-US" dirty="0"/>
+          </a:p>
+          <a:p>
+            <a:endParaRPr lang="en-US" dirty="0"/>
+          </a:p>
+          <a:p>
+            <a:endParaRPr lang="en-US" dirty="0"/>
+          </a:p>
+          <a:p>
+            <a:endParaRPr lang="en-US" dirty="0"/>
+          </a:p>
+          <a:p>
+            <a:endParaRPr lang="en-US" dirty="0"/>
+          </a:p>
+          <a:p>
+            <a:endParaRPr lang="en-US" dirty="0"/>
+          </a:p>
+          <a:p>
+            <a:endParaRPr lang="en-US" dirty="0"/>
+          </a:p>
+          <a:p>
+            <a:pPr>
+              <a:lnSpc>
+                <a:spcPts val="1425"/>
+              </a:lnSpc>
+              <a:buNone/>
+            </a:pPr>
+            <a:endParaRPr lang="en-GB" dirty="0">
+              <a:solidFill>
+                <a:srgbClr val="CCCCCC"/>
+              </a:solidFill>
+              <a:latin typeface="Consolas" panose="020B0609020204030204" pitchFamily="49" charset="0"/>
+            </a:endParaRPr>
+          </a:p>
+        </p:txBody>
+      </p:sp>
+      <p:cxnSp>
+        <p:nvCxnSpPr>
+          <p:cNvPr id="15" name="Straight Arrow Connector 14">
+            <a:extLst>
+              <a:ext uri="{FF2B5EF4-FFF2-40B4-BE49-F238E27FC236}">
+                <a16:creationId xmlns:a16="http://schemas.microsoft.com/office/drawing/2014/main" id="{FF90E0F4-DC7B-FB01-B08C-F930D3D2B032}"/>
+              </a:ext>
+            </a:extLst>
+          </p:cNvPr>
+          <p:cNvCxnSpPr>
+            <a:cxnSpLocks/>
+          </p:cNvCxnSpPr>
+          <p:nvPr/>
+        </p:nvCxnSpPr>
+        <p:spPr>
+          <a:xfrm>
+            <a:off x="8527530" y="3555229"/>
+            <a:ext cx="382601" cy="0"/>
+          </a:xfrm>
+          <a:prstGeom prst="straightConnector1">
+            <a:avLst/>
+          </a:prstGeom>
+          <a:ln>
+            <a:tailEnd type="triangle"/>
+          </a:ln>
+        </p:spPr>
+        <p:style>
+          <a:lnRef idx="2">
+            <a:schemeClr val="accent1"/>
+          </a:lnRef>
+          <a:fillRef idx="0">
+            <a:schemeClr val="accent1"/>
+          </a:fillRef>
+          <a:effectRef idx="1">
+            <a:schemeClr val="accent1"/>
+          </a:effectRef>
+          <a:fontRef idx="minor">
+            <a:schemeClr val="tx1"/>
+          </a:fontRef>
+        </p:style>
+      </p:cxnSp>
+    </p:spTree>
+    <p:extLst>
+      <p:ext uri="{BB962C8B-B14F-4D97-AF65-F5344CB8AC3E}">
+        <p14:creationId xmlns:p14="http://schemas.microsoft.com/office/powerpoint/2010/main" val="1505701908"/>
+      </p:ext>
+    </p:extLst>
+  </p:cSld>
+  <p:clrMapOvr>
+    <a:masterClrMapping/>
+  </p:clrMapOvr>
+</p:sld>
+</file>
+
+<file path=ppt/slides/slide11.xml><?xml version="1.0" encoding="utf-8"?>
+<p:sld xmlns:a="http://schemas.openxmlformats.org/drawingml/2006/main" xmlns:r="http://schemas.openxmlformats.org/officeDocument/2006/relationships" xmlns:p="http://schemas.openxmlformats.org/presentationml/2006/main">
+  <p:cSld>
+    <p:spTree>
+      <p:nvGrpSpPr>
+        <p:cNvPr id="1" name="">
+          <a:extLst>
+            <a:ext uri="{FF2B5EF4-FFF2-40B4-BE49-F238E27FC236}">
+              <a16:creationId xmlns:a16="http://schemas.microsoft.com/office/drawing/2014/main" id="{6CE49186-8DD2-F2F3-41CA-BE44A614FA4B}"/>
+            </a:ext>
+          </a:extLst>
+        </p:cNvPr>
+        <p:cNvGrpSpPr/>
+        <p:nvPr/>
+      </p:nvGrpSpPr>
+      <p:grpSpPr>
+        <a:xfrm>
+          <a:off x="0" y="0"/>
+          <a:ext cx="0" cy="0"/>
+          <a:chOff x="0" y="0"/>
+          <a:chExt cx="0" cy="0"/>
+        </a:xfrm>
+      </p:grpSpPr>
       <p:sp>
         <p:nvSpPr>
           <p:cNvPr id="3" name="Title 2">
@@ -6632,7 +7979,7 @@
           <a:p>
             <a:fld id="{FEE63D0E-FFEF-43D1-BE35-64C33AF422FD}" type="slidenum">
               <a:rPr lang="de-DE" smtClean="0"/>
-              <a:t>10</a:t>
+              <a:t>11</a:t>
             </a:fld>
             <a:endParaRPr lang="de-DE"/>
           </a:p>
@@ -6686,6 +8033,88 @@
           </a:p>
         </p:txBody>
       </p:sp>
+      <p:sp>
+        <p:nvSpPr>
+          <p:cNvPr id="6" name="TextBox 5">
+            <a:extLst>
+              <a:ext uri="{FF2B5EF4-FFF2-40B4-BE49-F238E27FC236}">
+                <a16:creationId xmlns:a16="http://schemas.microsoft.com/office/drawing/2014/main" id="{97442BF3-911B-A19B-2353-A151027BAD55}"/>
+              </a:ext>
+            </a:extLst>
+          </p:cNvPr>
+          <p:cNvSpPr txBox="1"/>
+          <p:nvPr/>
+        </p:nvSpPr>
+        <p:spPr>
+          <a:xfrm>
+            <a:off x="3778474" y="6538912"/>
+            <a:ext cx="4635051" cy="276999"/>
+          </a:xfrm>
+          <a:prstGeom prst="rect">
+            <a:avLst/>
+          </a:prstGeom>
+          <a:noFill/>
+        </p:spPr>
+        <p:txBody>
+          <a:bodyPr wrap="none" rtlCol="0">
+            <a:spAutoFit/>
+          </a:bodyPr>
+          <a:lstStyle/>
+          <a:p>
+            <a:r>
+              <a:rPr lang="en-GB" sz="1200" dirty="0">
+                <a:solidFill>
+                  <a:schemeClr val="bg1">
+                    <a:lumMod val="75000"/>
+                  </a:schemeClr>
+                </a:solidFill>
+              </a:rPr>
+              <a:t>Dataset Characteristics </a:t>
+            </a:r>
+            <a:r>
+              <a:rPr lang="en-GB" sz="1200" dirty="0">
+                <a:solidFill>
+                  <a:schemeClr val="bg1">
+                    <a:lumMod val="75000"/>
+                  </a:schemeClr>
+                </a:solidFill>
+                <a:latin typeface="Calibri" panose="020F0502020204030204" pitchFamily="34" charset="0"/>
+                <a:ea typeface="Calibri" panose="020F0502020204030204" pitchFamily="34" charset="0"/>
+                <a:cs typeface="Calibri" panose="020F0502020204030204" pitchFamily="34" charset="0"/>
+              </a:rPr>
+              <a:t>– Baseline Model – </a:t>
+            </a:r>
+            <a:r>
+              <a:rPr lang="en-GB" sz="1200" b="1" dirty="0">
+                <a:latin typeface="Calibri" panose="020F0502020204030204" pitchFamily="34" charset="0"/>
+                <a:ea typeface="Calibri" panose="020F0502020204030204" pitchFamily="34" charset="0"/>
+                <a:cs typeface="Calibri" panose="020F0502020204030204" pitchFamily="34" charset="0"/>
+              </a:rPr>
+              <a:t>Neural Net </a:t>
+            </a:r>
+            <a:r>
+              <a:rPr lang="en-GB" sz="1200" dirty="0">
+                <a:solidFill>
+                  <a:schemeClr val="bg1">
+                    <a:lumMod val="75000"/>
+                  </a:schemeClr>
+                </a:solidFill>
+                <a:latin typeface="Calibri" panose="020F0502020204030204" pitchFamily="34" charset="0"/>
+                <a:ea typeface="Calibri" panose="020F0502020204030204" pitchFamily="34" charset="0"/>
+                <a:cs typeface="Calibri" panose="020F0502020204030204" pitchFamily="34" charset="0"/>
+              </a:rPr>
+              <a:t>– Challenges </a:t>
+            </a:r>
+            <a:endParaRPr lang="de-DE" sz="1200" dirty="0">
+              <a:solidFill>
+                <a:schemeClr val="bg1">
+                  <a:lumMod val="75000"/>
+                </a:schemeClr>
+              </a:solidFill>
+            </a:endParaRPr>
+          </a:p>
+        </p:txBody>
+      </p:sp>
     </p:spTree>
     <p:extLst>
       <p:ext uri="{BB962C8B-B14F-4D97-AF65-F5344CB8AC3E}">
@@ -6699,7 +8128,7 @@
 </p:sld>
 </file>
 
-<file path=ppt/slides/slide11.xml><?xml version="1.0" encoding="utf-8"?>
+<file path=ppt/slides/slide12.xml><?xml version="1.0" encoding="utf-8"?>
 <p:sld xmlns:a="http://schemas.openxmlformats.org/drawingml/2006/main" xmlns:r="http://schemas.openxmlformats.org/officeDocument/2006/relationships" xmlns:p="http://schemas.openxmlformats.org/presentationml/2006/main">
   <p:cSld>
     <p:spTree>
@@ -6736,8 +8165,8 @@
         </p:nvSpPr>
         <p:spPr>
           <a:xfrm>
-            <a:off x="3524719" y="6581001"/>
-            <a:ext cx="5142562" cy="276999"/>
+            <a:off x="3778474" y="6538912"/>
+            <a:ext cx="4635051" cy="276999"/>
           </a:xfrm>
           <a:prstGeom prst="rect">
             <a:avLst/>
@@ -6792,7 +8221,7 @@
                 <a:ea typeface="Calibri" panose="020F0502020204030204" pitchFamily="34" charset="0"/>
                 <a:cs typeface="Calibri" panose="020F0502020204030204" pitchFamily="34" charset="0"/>
               </a:rPr>
-              <a:t>– Results – Challenges </a:t>
+              <a:t>– Challenges </a:t>
             </a:r>
             <a:endParaRPr lang="de-DE" sz="1200" dirty="0">
               <a:solidFill>
@@ -6856,9 +8285,9 @@
           <a:p>
             <a:fld id="{FEE63D0E-FFEF-43D1-BE35-64C33AF422FD}" type="slidenum">
               <a:rPr lang="de-DE" smtClean="0"/>
-              <a:t>11</a:t>
+              <a:t>12</a:t>
             </a:fld>
-            <a:endParaRPr lang="de-DE"/>
+            <a:endParaRPr lang="de-DE" dirty="0"/>
           </a:p>
         </p:txBody>
       </p:sp>
@@ -6876,7 +8305,7 @@
         </p:nvSpPr>
         <p:spPr>
           <a:xfrm>
-            <a:off x="3223067" y="1614930"/>
+            <a:off x="5410565" y="1775931"/>
             <a:ext cx="5914664" cy="4443894"/>
           </a:xfrm>
           <a:prstGeom prst="rect">
@@ -6916,6 +8345,252 @@
           </a:p>
         </p:txBody>
       </p:sp>
+      <p:graphicFrame>
+        <p:nvGraphicFramePr>
+          <p:cNvPr id="5" name="Table 4">
+            <a:extLst>
+              <a:ext uri="{FF2B5EF4-FFF2-40B4-BE49-F238E27FC236}">
+                <a16:creationId xmlns:a16="http://schemas.microsoft.com/office/drawing/2014/main" id="{278E0325-FA2E-8937-2771-8B89B3D9E8E6}"/>
+              </a:ext>
+            </a:extLst>
+          </p:cNvPr>
+          <p:cNvGraphicFramePr>
+            <a:graphicFrameLocks noGrp="1"/>
+          </p:cNvGraphicFramePr>
+          <p:nvPr>
+            <p:extLst>
+              <p:ext uri="{D42A27DB-BD31-4B8C-83A1-F6EECF244321}">
+                <p14:modId xmlns:p14="http://schemas.microsoft.com/office/powerpoint/2010/main" val="271893373"/>
+              </p:ext>
+            </p:extLst>
+          </p:nvPr>
+        </p:nvGraphicFramePr>
+        <p:xfrm>
+          <a:off x="838200" y="2642838"/>
+          <a:ext cx="3264465" cy="2312591"/>
+        </p:xfrm>
+        <a:graphic>
+          <a:graphicData uri="http://schemas.openxmlformats.org/drawingml/2006/table">
+            <a:tbl>
+              <a:tblPr firstRow="1" bandRow="1">
+                <a:tableStyleId>{69012ECD-51FC-41F1-AA8D-1B2483CD663E}</a:tableStyleId>
+              </a:tblPr>
+              <a:tblGrid>
+                <a:gridCol w="1747584">
+                  <a:extLst>
+                    <a:ext uri="{9D8B030D-6E8A-4147-A177-3AD203B41FA5}">
+                      <a16:colId xmlns:a16="http://schemas.microsoft.com/office/drawing/2014/main" val="241538181"/>
+                    </a:ext>
+                  </a:extLst>
+                </a:gridCol>
+                <a:gridCol w="1516881">
+                  <a:extLst>
+                    <a:ext uri="{9D8B030D-6E8A-4147-A177-3AD203B41FA5}">
+                      <a16:colId xmlns:a16="http://schemas.microsoft.com/office/drawing/2014/main" val="1421997003"/>
+                    </a:ext>
+                  </a:extLst>
+                </a:gridCol>
+              </a:tblGrid>
+              <a:tr h="412595">
+                <a:tc>
+                  <a:txBody>
+                    <a:bodyPr/>
+                    <a:lstStyle/>
+                    <a:p>
+                      <a:pPr algn="ctr"/>
+                      <a:r>
+                        <a:rPr lang="en-US" dirty="0"/>
+                        <a:t>Product</a:t>
+                      </a:r>
+                      <a:endParaRPr lang="en-GB" dirty="0"/>
+                    </a:p>
+                  </a:txBody>
+                  <a:tcPr/>
+                </a:tc>
+                <a:tc>
+                  <a:txBody>
+                    <a:bodyPr/>
+                    <a:lstStyle/>
+                    <a:p>
+                      <a:pPr algn="ctr"/>
+                      <a:r>
+                        <a:rPr lang="en-US" dirty="0"/>
+                        <a:t>MAPE</a:t>
+                      </a:r>
+                      <a:endParaRPr lang="en-GB" dirty="0"/>
+                    </a:p>
+                  </a:txBody>
+                  <a:tcPr/>
+                </a:tc>
+                <a:extLst>
+                  <a:ext uri="{0D108BD9-81ED-4DB2-BD59-A6C34878D82A}">
+                    <a16:rowId xmlns:a16="http://schemas.microsoft.com/office/drawing/2014/main" val="2904346026"/>
+                  </a:ext>
+                </a:extLst>
+              </a:tr>
+              <a:tr h="383559">
+                <a:tc>
+                  <a:txBody>
+                    <a:bodyPr/>
+                    <a:lstStyle/>
+                    <a:p>
+                      <a:pPr algn="ctr"/>
+                      <a:r>
+                        <a:rPr lang="en-US" dirty="0"/>
+                        <a:t>1</a:t>
+                      </a:r>
+                      <a:endParaRPr lang="en-GB" dirty="0"/>
+                    </a:p>
+                  </a:txBody>
+                  <a:tcPr/>
+                </a:tc>
+                <a:tc>
+                  <a:txBody>
+                    <a:bodyPr/>
+                    <a:lstStyle/>
+                    <a:p>
+                      <a:endParaRPr lang="en-GB" dirty="0"/>
+                    </a:p>
+                  </a:txBody>
+                  <a:tcPr/>
+                </a:tc>
+                <a:extLst>
+                  <a:ext uri="{0D108BD9-81ED-4DB2-BD59-A6C34878D82A}">
+                    <a16:rowId xmlns:a16="http://schemas.microsoft.com/office/drawing/2014/main" val="898996522"/>
+                  </a:ext>
+                </a:extLst>
+              </a:tr>
+              <a:tr h="383559">
+                <a:tc>
+                  <a:txBody>
+                    <a:bodyPr/>
+                    <a:lstStyle/>
+                    <a:p>
+                      <a:pPr algn="ctr"/>
+                      <a:r>
+                        <a:rPr lang="en-US" dirty="0"/>
+                        <a:t>2</a:t>
+                      </a:r>
+                    </a:p>
+                  </a:txBody>
+                  <a:tcPr/>
+                </a:tc>
+                <a:tc>
+                  <a:txBody>
+                    <a:bodyPr/>
+                    <a:lstStyle/>
+                    <a:p>
+                      <a:endParaRPr lang="en-GB"/>
+                    </a:p>
+                  </a:txBody>
+                  <a:tcPr/>
+                </a:tc>
+                <a:extLst>
+                  <a:ext uri="{0D108BD9-81ED-4DB2-BD59-A6C34878D82A}">
+                    <a16:rowId xmlns:a16="http://schemas.microsoft.com/office/drawing/2014/main" val="1323336285"/>
+                  </a:ext>
+                </a:extLst>
+              </a:tr>
+              <a:tr h="383559">
+                <a:tc>
+                  <a:txBody>
+                    <a:bodyPr/>
+                    <a:lstStyle/>
+                    <a:p>
+                      <a:pPr algn="ctr"/>
+                      <a:r>
+                        <a:rPr lang="en-US" dirty="0"/>
+                        <a:t>3</a:t>
+                      </a:r>
+                      <a:endParaRPr lang="en-GB" dirty="0"/>
+                    </a:p>
+                  </a:txBody>
+                  <a:tcPr/>
+                </a:tc>
+                <a:tc>
+                  <a:txBody>
+                    <a:bodyPr/>
+                    <a:lstStyle/>
+                    <a:p>
+                      <a:endParaRPr lang="en-GB"/>
+                    </a:p>
+                  </a:txBody>
+                  <a:tcPr/>
+                </a:tc>
+                <a:extLst>
+                  <a:ext uri="{0D108BD9-81ED-4DB2-BD59-A6C34878D82A}">
+                    <a16:rowId xmlns:a16="http://schemas.microsoft.com/office/drawing/2014/main" val="2511470930"/>
+                  </a:ext>
+                </a:extLst>
+              </a:tr>
+              <a:tr h="383559">
+                <a:tc>
+                  <a:txBody>
+                    <a:bodyPr/>
+                    <a:lstStyle/>
+                    <a:p>
+                      <a:pPr algn="ctr"/>
+                      <a:r>
+                        <a:rPr lang="en-US" dirty="0"/>
+                        <a:t>4</a:t>
+                      </a:r>
+                      <a:endParaRPr lang="en-GB" dirty="0"/>
+                    </a:p>
+                  </a:txBody>
+                  <a:tcPr/>
+                </a:tc>
+                <a:tc>
+                  <a:txBody>
+                    <a:bodyPr/>
+                    <a:lstStyle/>
+                    <a:p>
+                      <a:endParaRPr lang="en-GB" dirty="0"/>
+                    </a:p>
+                  </a:txBody>
+                  <a:tcPr/>
+                </a:tc>
+                <a:extLst>
+                  <a:ext uri="{0D108BD9-81ED-4DB2-BD59-A6C34878D82A}">
+                    <a16:rowId xmlns:a16="http://schemas.microsoft.com/office/drawing/2014/main" val="3488154091"/>
+                  </a:ext>
+                </a:extLst>
+              </a:tr>
+              <a:tr h="283197">
+                <a:tc>
+                  <a:txBody>
+                    <a:bodyPr/>
+                    <a:lstStyle/>
+                    <a:p>
+                      <a:pPr algn="ctr"/>
+                      <a:r>
+                        <a:rPr lang="en-US" dirty="0"/>
+                        <a:t>5</a:t>
+                      </a:r>
+                      <a:endParaRPr lang="en-GB" dirty="0"/>
+                    </a:p>
+                  </a:txBody>
+                  <a:tcPr/>
+                </a:tc>
+                <a:tc>
+                  <a:txBody>
+                    <a:bodyPr/>
+                    <a:lstStyle/>
+                    <a:p>
+                      <a:endParaRPr lang="en-GB" dirty="0"/>
+                    </a:p>
+                  </a:txBody>
+                  <a:tcPr/>
+                </a:tc>
+                <a:extLst>
+                  <a:ext uri="{0D108BD9-81ED-4DB2-BD59-A6C34878D82A}">
+                    <a16:rowId xmlns:a16="http://schemas.microsoft.com/office/drawing/2014/main" val="1052651994"/>
+                  </a:ext>
+                </a:extLst>
+              </a:tr>
+            </a:tbl>
+          </a:graphicData>
+        </a:graphic>
+      </p:graphicFrame>
     </p:spTree>
     <p:extLst>
       <p:ext uri="{BB962C8B-B14F-4D97-AF65-F5344CB8AC3E}">
@@ -6929,7 +8604,7 @@
 </p:sld>
 </file>
 
-<file path=ppt/slides/slide12.xml><?xml version="1.0" encoding="utf-8"?>
+<file path=ppt/slides/slide13.xml><?xml version="1.0" encoding="utf-8"?>
 <p:sld xmlns:a="http://schemas.openxmlformats.org/drawingml/2006/main" xmlns:r="http://schemas.openxmlformats.org/officeDocument/2006/relationships" xmlns:p="http://schemas.openxmlformats.org/presentationml/2006/main">
   <p:cSld>
     <p:spTree>
@@ -7011,31 +8686,31 @@
             </a:r>
           </a:p>
           <a:p>
+            <a:pPr marL="0" indent="0">
+              <a:buNone/>
+            </a:pPr>
             <a:endParaRPr lang="en-GB" dirty="0"/>
           </a:p>
           <a:p>
             <a:r>
               <a:rPr lang="en-GB" dirty="0"/>
-              <a:t>To Predict Group 5 + 6</a:t>
-            </a:r>
-          </a:p>
-          <a:p>
+              <a:t> Predict Group 6</a:t>
+            </a:r>
+          </a:p>
+          <a:p>
+            <a:pPr marL="0" indent="0">
+              <a:buNone/>
+            </a:pPr>
             <a:endParaRPr lang="en-GB" dirty="0"/>
           </a:p>
           <a:p>
             <a:r>
               <a:rPr lang="en-GB" dirty="0"/>
-              <a:t>Biggest Improvement &gt; (maybe to remove variables that caused overfitting)</a:t>
+              <a:t>Biggest Improvement: Removing variables, simplifying the model</a:t>
             </a:r>
           </a:p>
           <a:p>
             <a:endParaRPr lang="en-GB" dirty="0"/>
-          </a:p>
-          <a:p>
-            <a:r>
-              <a:rPr lang="en-GB" dirty="0"/>
-              <a:t>I can run the over fitted model and show their very good MAPEs but very bad Kaggle score </a:t>
-            </a:r>
           </a:p>
           <a:p>
             <a:endParaRPr lang="en-GB" dirty="0"/>
@@ -7068,42 +8743,227 @@
           <a:p>
             <a:fld id="{FEE63D0E-FFEF-43D1-BE35-64C33AF422FD}" type="slidenum">
               <a:rPr lang="de-DE" smtClean="0"/>
-              <a:t>12</a:t>
+              <a:t>13</a:t>
             </a:fld>
-            <a:endParaRPr lang="de-DE"/>
+            <a:endParaRPr lang="de-DE" dirty="0"/>
           </a:p>
         </p:txBody>
       </p:sp>
-      <p:pic>
-        <p:nvPicPr>
-          <p:cNvPr id="6" name="Picture 5">
+      <p:sp>
+        <p:nvSpPr>
+          <p:cNvPr id="4" name="TextBox 4">
             <a:extLst>
               <a:ext uri="{FF2B5EF4-FFF2-40B4-BE49-F238E27FC236}">
-                <a16:creationId xmlns:a16="http://schemas.microsoft.com/office/drawing/2014/main" id="{01D91FEA-F958-4002-08FB-3BA044445E86}"/>
+                <a16:creationId xmlns:a16="http://schemas.microsoft.com/office/drawing/2014/main" id="{FD92427E-BECE-FD08-4379-58F3CDFB7E67}"/>
               </a:ext>
             </a:extLst>
           </p:cNvPr>
-          <p:cNvPicPr>
-            <a:picLocks noChangeAspect="1"/>
-          </p:cNvPicPr>
+          <p:cNvSpPr txBox="1"/>
           <p:nvPr/>
-        </p:nvPicPr>
-        <p:blipFill>
-          <a:blip r:embed="rId3"/>
-          <a:stretch>
-            <a:fillRect/>
-          </a:stretch>
-        </p:blipFill>
+        </p:nvSpPr>
         <p:spPr>
           <a:xfrm>
-            <a:off x="10266420" y="1482093"/>
-            <a:ext cx="1574481" cy="4874257"/>
+            <a:off x="3778474" y="6538912"/>
+            <a:ext cx="4635051" cy="276999"/>
           </a:xfrm>
           <a:prstGeom prst="rect">
             <a:avLst/>
           </a:prstGeom>
+          <a:noFill/>
         </p:spPr>
-      </p:pic>
+        <p:txBody>
+          <a:bodyPr wrap="none" rtlCol="0">
+            <a:spAutoFit/>
+          </a:bodyPr>
+          <a:lstStyle/>
+          <a:p>
+            <a:r>
+              <a:rPr lang="en-GB" sz="1200" dirty="0">
+                <a:solidFill>
+                  <a:schemeClr val="bg1">
+                    <a:lumMod val="75000"/>
+                  </a:schemeClr>
+                </a:solidFill>
+              </a:rPr>
+              <a:t>Dataset Characteristics </a:t>
+            </a:r>
+            <a:r>
+              <a:rPr lang="en-GB" sz="1200" dirty="0">
+                <a:solidFill>
+                  <a:schemeClr val="bg1">
+                    <a:lumMod val="75000"/>
+                  </a:schemeClr>
+                </a:solidFill>
+                <a:latin typeface="Calibri" panose="020F0502020204030204" pitchFamily="34" charset="0"/>
+                <a:ea typeface="Calibri" panose="020F0502020204030204" pitchFamily="34" charset="0"/>
+                <a:cs typeface="Calibri" panose="020F0502020204030204" pitchFamily="34" charset="0"/>
+              </a:rPr>
+              <a:t>– Baseline Model – </a:t>
+            </a:r>
+            <a:r>
+              <a:rPr lang="en-GB" sz="1200" dirty="0">
+                <a:solidFill>
+                  <a:schemeClr val="bg1">
+                    <a:lumMod val="75000"/>
+                  </a:schemeClr>
+                </a:solidFill>
+                <a:latin typeface="Calibri" panose="020F0502020204030204" pitchFamily="34" charset="0"/>
+                <a:cs typeface="Calibri" panose="020F0502020204030204" pitchFamily="34" charset="0"/>
+              </a:rPr>
+              <a:t>Neural Net </a:t>
+            </a:r>
+            <a:r>
+              <a:rPr lang="en-GB" sz="1200" dirty="0">
+                <a:solidFill>
+                  <a:schemeClr val="bg1">
+                    <a:lumMod val="75000"/>
+                  </a:schemeClr>
+                </a:solidFill>
+                <a:latin typeface="Calibri" panose="020F0502020204030204" pitchFamily="34" charset="0"/>
+                <a:ea typeface="Calibri" panose="020F0502020204030204" pitchFamily="34" charset="0"/>
+                <a:cs typeface="Calibri" panose="020F0502020204030204" pitchFamily="34" charset="0"/>
+              </a:rPr>
+              <a:t>– </a:t>
+            </a:r>
+            <a:r>
+              <a:rPr lang="en-GB" sz="1200" b="1" dirty="0">
+                <a:latin typeface="Calibri" panose="020F0502020204030204" pitchFamily="34" charset="0"/>
+                <a:cs typeface="Calibri" panose="020F0502020204030204" pitchFamily="34" charset="0"/>
+              </a:rPr>
+              <a:t>Challenges</a:t>
+            </a:r>
+            <a:r>
+              <a:rPr lang="en-GB" sz="1200" dirty="0">
+                <a:solidFill>
+                  <a:schemeClr val="bg1">
+                    <a:lumMod val="75000"/>
+                  </a:schemeClr>
+                </a:solidFill>
+                <a:latin typeface="Calibri" panose="020F0502020204030204" pitchFamily="34" charset="0"/>
+                <a:ea typeface="Calibri" panose="020F0502020204030204" pitchFamily="34" charset="0"/>
+                <a:cs typeface="Calibri" panose="020F0502020204030204" pitchFamily="34" charset="0"/>
+              </a:rPr>
+              <a:t> </a:t>
+            </a:r>
+            <a:endParaRPr lang="de-DE" sz="1200" dirty="0">
+              <a:solidFill>
+                <a:schemeClr val="bg1">
+                  <a:lumMod val="75000"/>
+                </a:schemeClr>
+              </a:solidFill>
+            </a:endParaRPr>
+          </a:p>
+        </p:txBody>
+      </p:sp>
+      <p:grpSp>
+        <p:nvGrpSpPr>
+          <p:cNvPr id="10" name="Group 9">
+            <a:extLst>
+              <a:ext uri="{FF2B5EF4-FFF2-40B4-BE49-F238E27FC236}">
+                <a16:creationId xmlns:a16="http://schemas.microsoft.com/office/drawing/2014/main" id="{9D175437-8C7C-BB7F-11BE-9634A9F03D77}"/>
+              </a:ext>
+            </a:extLst>
+          </p:cNvPr>
+          <p:cNvGrpSpPr/>
+          <p:nvPr/>
+        </p:nvGrpSpPr>
+        <p:grpSpPr>
+          <a:xfrm>
+            <a:off x="9097729" y="1177488"/>
+            <a:ext cx="1595548" cy="1756414"/>
+            <a:chOff x="5966837" y="4599935"/>
+            <a:chExt cx="1595548" cy="1756414"/>
+          </a:xfrm>
+        </p:grpSpPr>
+        <p:pic>
+          <p:nvPicPr>
+            <p:cNvPr id="8" name="Picture 7">
+              <a:extLst>
+                <a:ext uri="{FF2B5EF4-FFF2-40B4-BE49-F238E27FC236}">
+                  <a16:creationId xmlns:a16="http://schemas.microsoft.com/office/drawing/2014/main" id="{326D9126-266E-3DB6-1D11-ECE38E8A58F1}"/>
+                </a:ext>
+              </a:extLst>
+            </p:cNvPr>
+            <p:cNvPicPr>
+              <a:picLocks noChangeAspect="1"/>
+            </p:cNvPicPr>
+            <p:nvPr/>
+          </p:nvPicPr>
+          <p:blipFill>
+            <a:blip r:embed="rId3"/>
+            <a:srcRect t="6395"/>
+            <a:stretch>
+              <a:fillRect/>
+            </a:stretch>
+          </p:blipFill>
+          <p:spPr>
+            <a:xfrm>
+              <a:off x="5966837" y="4894728"/>
+              <a:ext cx="1595548" cy="1461621"/>
+            </a:xfrm>
+            <a:prstGeom prst="rect">
+              <a:avLst/>
+            </a:prstGeom>
+            <a:ln>
+              <a:noFill/>
+            </a:ln>
+            <a:effectLst>
+              <a:outerShdw blurRad="292100" dist="139700" dir="2700000" algn="tl" rotWithShape="0">
+                <a:srgbClr val="333333">
+                  <a:alpha val="65000"/>
+                </a:srgbClr>
+              </a:outerShdw>
+            </a:effectLst>
+          </p:spPr>
+        </p:pic>
+        <p:pic>
+          <p:nvPicPr>
+            <p:cNvPr id="9" name="Picture 2">
+              <a:extLst>
+                <a:ext uri="{FF2B5EF4-FFF2-40B4-BE49-F238E27FC236}">
+                  <a16:creationId xmlns:a16="http://schemas.microsoft.com/office/drawing/2014/main" id="{5F0E0502-D00B-2C08-CA98-AAB364AFDDA2}"/>
+                </a:ext>
+              </a:extLst>
+            </p:cNvPr>
+            <p:cNvPicPr>
+              <a:picLocks noChangeAspect="1" noChangeArrowheads="1"/>
+            </p:cNvPicPr>
+            <p:nvPr/>
+          </p:nvPicPr>
+          <p:blipFill>
+            <a:blip r:embed="rId4">
+              <a:extLst>
+                <a:ext uri="{28A0092B-C50C-407E-A947-70E740481C1C}">
+                  <a14:useLocalDpi xmlns:a14="http://schemas.microsoft.com/office/drawing/2010/main" val="0"/>
+                </a:ext>
+              </a:extLst>
+            </a:blip>
+            <a:srcRect/>
+            <a:stretch>
+              <a:fillRect/>
+            </a:stretch>
+          </p:blipFill>
+          <p:spPr bwMode="auto">
+            <a:xfrm>
+              <a:off x="6395708" y="4599935"/>
+              <a:ext cx="737806" cy="286188"/>
+            </a:xfrm>
+            <a:prstGeom prst="rect">
+              <a:avLst/>
+            </a:prstGeom>
+            <a:noFill/>
+            <a:extLst>
+              <a:ext uri="{909E8E84-426E-40DD-AFC4-6F175D3DCCD1}">
+                <a14:hiddenFill xmlns:a14="http://schemas.microsoft.com/office/drawing/2010/main">
+                  <a:solidFill>
+                    <a:srgbClr val="FFFFFF"/>
+                  </a:solidFill>
+                </a14:hiddenFill>
+              </a:ext>
+            </a:extLst>
+          </p:spPr>
+        </p:pic>
+      </p:grpSp>
     </p:spTree>
     <p:extLst>
       <p:ext uri="{BB962C8B-B14F-4D97-AF65-F5344CB8AC3E}">
@@ -7114,10 +8974,130 @@
   <p:clrMapOvr>
     <a:masterClrMapping/>
   </p:clrMapOvr>
+  <p:timing>
+    <p:tnLst>
+      <p:par>
+        <p:cTn id="1" dur="indefinite" restart="never" nodeType="tmRoot">
+          <p:childTnLst>
+            <p:seq concurrent="1" nextAc="seek">
+              <p:cTn id="2" dur="indefinite" nodeType="mainSeq">
+                <p:childTnLst>
+                  <p:par>
+                    <p:cTn id="3" fill="hold">
+                      <p:stCondLst>
+                        <p:cond delay="indefinite"/>
+                      </p:stCondLst>
+                      <p:childTnLst>
+                        <p:par>
+                          <p:cTn id="4" fill="hold">
+                            <p:stCondLst>
+                              <p:cond delay="0"/>
+                            </p:stCondLst>
+                            <p:childTnLst>
+                              <p:par>
+                                <p:cTn id="5" presetID="1" presetClass="entr" presetSubtype="0" fill="hold" nodeType="clickEffect">
+                                  <p:stCondLst>
+                                    <p:cond delay="0"/>
+                                  </p:stCondLst>
+                                  <p:childTnLst>
+                                    <p:set>
+                                      <p:cBhvr>
+                                        <p:cTn id="6" dur="1" fill="hold">
+                                          <p:stCondLst>
+                                            <p:cond delay="0"/>
+                                          </p:stCondLst>
+                                        </p:cTn>
+                                        <p:tgtEl>
+                                          <p:spTgt spid="10"/>
+                                        </p:tgtEl>
+                                        <p:attrNameLst>
+                                          <p:attrName>style.visibility</p:attrName>
+                                        </p:attrNameLst>
+                                      </p:cBhvr>
+                                      <p:to>
+                                        <p:strVal val="visible"/>
+                                      </p:to>
+                                    </p:set>
+                                  </p:childTnLst>
+                                </p:cTn>
+                              </p:par>
+                            </p:childTnLst>
+                          </p:cTn>
+                        </p:par>
+                      </p:childTnLst>
+                    </p:cTn>
+                  </p:par>
+                  <p:par>
+                    <p:cTn id="7" fill="hold">
+                      <p:stCondLst>
+                        <p:cond delay="indefinite"/>
+                      </p:stCondLst>
+                      <p:childTnLst>
+                        <p:par>
+                          <p:cTn id="8" fill="hold">
+                            <p:stCondLst>
+                              <p:cond delay="0"/>
+                            </p:stCondLst>
+                            <p:childTnLst>
+                              <p:par>
+                                <p:cTn id="9" presetID="1" presetClass="exit" presetSubtype="0" fill="hold" nodeType="clickEffect">
+                                  <p:stCondLst>
+                                    <p:cond delay="0"/>
+                                  </p:stCondLst>
+                                  <p:childTnLst>
+                                    <p:set>
+                                      <p:cBhvr>
+                                        <p:cTn id="10" dur="1" fill="hold">
+                                          <p:stCondLst>
+                                            <p:cond delay="0"/>
+                                          </p:stCondLst>
+                                        </p:cTn>
+                                        <p:tgtEl>
+                                          <p:spTgt spid="10"/>
+                                        </p:tgtEl>
+                                        <p:attrNameLst>
+                                          <p:attrName>style.visibility</p:attrName>
+                                        </p:attrNameLst>
+                                      </p:cBhvr>
+                                      <p:to>
+                                        <p:strVal val="hidden"/>
+                                      </p:to>
+                                    </p:set>
+                                  </p:childTnLst>
+                                </p:cTn>
+                              </p:par>
+                            </p:childTnLst>
+                          </p:cTn>
+                        </p:par>
+                      </p:childTnLst>
+                    </p:cTn>
+                  </p:par>
+                </p:childTnLst>
+              </p:cTn>
+              <p:prevCondLst>
+                <p:cond evt="onPrev" delay="0">
+                  <p:tgtEl>
+                    <p:sldTgt/>
+                  </p:tgtEl>
+                </p:cond>
+              </p:prevCondLst>
+              <p:nextCondLst>
+                <p:cond evt="onNext" delay="0">
+                  <p:tgtEl>
+                    <p:sldTgt/>
+                  </p:tgtEl>
+                </p:cond>
+              </p:nextCondLst>
+            </p:seq>
+          </p:childTnLst>
+        </p:cTn>
+      </p:par>
+    </p:tnLst>
+  </p:timing>
 </p:sld>
 </file>
 
-<file path=ppt/slides/slide13.xml><?xml version="1.0" encoding="utf-8"?>
+<file path=ppt/slides/slide14.xml><?xml version="1.0" encoding="utf-8"?>
 <p:sld xmlns:a="http://schemas.openxmlformats.org/drawingml/2006/main" xmlns:r="http://schemas.openxmlformats.org/officeDocument/2006/relationships" xmlns:p="http://schemas.openxmlformats.org/presentationml/2006/main">
   <p:cSld>
     <p:spTree>
@@ -8001,7 +9981,7 @@
 </p:sld>
 </file>
 
-<file path=ppt/slides/slide14.xml><?xml version="1.0" encoding="utf-8"?>
+<file path=ppt/slides/slide15.xml><?xml version="1.0" encoding="utf-8"?>
 <p:sld xmlns:a="http://schemas.openxmlformats.org/drawingml/2006/main" xmlns:r="http://schemas.openxmlformats.org/officeDocument/2006/relationships" xmlns:p="http://schemas.openxmlformats.org/presentationml/2006/main">
   <p:cSld>
     <p:spTree>
@@ -8075,7 +10055,7 @@
           <a:p>
             <a:fld id="{FEE63D0E-FFEF-43D1-BE35-64C33AF422FD}" type="slidenum">
               <a:rPr lang="de-DE" smtClean="0"/>
-              <a:t>14</a:t>
+              <a:t>15</a:t>
             </a:fld>
             <a:endParaRPr lang="de-DE"/>
           </a:p>
@@ -8094,7 +10074,7 @@
 </p:sld>
 </file>
 
-<file path=ppt/slides/slide15.xml><?xml version="1.0" encoding="utf-8"?>
+<file path=ppt/slides/slide16.xml><?xml version="1.0" encoding="utf-8"?>
 <p:sld xmlns:a="http://schemas.openxmlformats.org/drawingml/2006/main" xmlns:r="http://schemas.openxmlformats.org/officeDocument/2006/relationships" xmlns:p="http://schemas.openxmlformats.org/presentationml/2006/main">
   <p:cSld>
     <p:spTree>
@@ -8266,7 +10246,7 @@
           <a:p>
             <a:fld id="{FEE63D0E-FFEF-43D1-BE35-64C33AF422FD}" type="slidenum">
               <a:rPr lang="de-DE" smtClean="0"/>
-              <a:t>15</a:t>
+              <a:t>16</a:t>
             </a:fld>
             <a:endParaRPr lang="de-DE"/>
           </a:p>
@@ -8285,7 +10265,7 @@
 </p:sld>
 </file>
 
-<file path=ppt/slides/slide16.xml><?xml version="1.0" encoding="utf-8"?>
+<file path=ppt/slides/slide17.xml><?xml version="1.0" encoding="utf-8"?>
 <p:sld xmlns:a="http://schemas.openxmlformats.org/drawingml/2006/main" xmlns:r="http://schemas.openxmlformats.org/officeDocument/2006/relationships" xmlns:p="http://schemas.openxmlformats.org/presentationml/2006/main">
   <p:cSld>
     <p:spTree>
@@ -8421,7 +10401,7 @@
           <a:p>
             <a:fld id="{FEE63D0E-FFEF-43D1-BE35-64C33AF422FD}" type="slidenum">
               <a:rPr lang="de-DE" smtClean="0"/>
-              <a:t>16</a:t>
+              <a:t>17</a:t>
             </a:fld>
             <a:endParaRPr lang="de-DE"/>
           </a:p>
@@ -8495,7 +10475,7 @@
 </p:sld>
 </file>
 
-<file path=ppt/slides/slide17.xml><?xml version="1.0" encoding="utf-8"?>
+<file path=ppt/slides/slide18.xml><?xml version="1.0" encoding="utf-8"?>
 <p:sld xmlns:a="http://schemas.openxmlformats.org/drawingml/2006/main" xmlns:r="http://schemas.openxmlformats.org/officeDocument/2006/relationships" xmlns:p="http://schemas.openxmlformats.org/presentationml/2006/main">
   <p:cSld>
     <p:spTree>
@@ -8631,7 +10611,7 @@
           <a:p>
             <a:fld id="{FEE63D0E-FFEF-43D1-BE35-64C33AF422FD}" type="slidenum">
               <a:rPr lang="de-DE" smtClean="0"/>
-              <a:t>17</a:t>
+              <a:t>18</a:t>
             </a:fld>
             <a:endParaRPr lang="de-DE"/>
           </a:p>
@@ -8650,7 +10630,7 @@
 </p:sld>
 </file>
 
-<file path=ppt/slides/slide18.xml><?xml version="1.0" encoding="utf-8"?>
+<file path=ppt/slides/slide19.xml><?xml version="1.0" encoding="utf-8"?>
 <p:sld xmlns:a="http://schemas.openxmlformats.org/drawingml/2006/main" xmlns:r="http://schemas.openxmlformats.org/officeDocument/2006/relationships" xmlns:p="http://schemas.openxmlformats.org/presentationml/2006/main">
   <p:cSld>
     <p:bg>
@@ -8828,7 +10808,7 @@
           <a:p>
             <a:fld id="{FEE63D0E-FFEF-43D1-BE35-64C33AF422FD}" type="slidenum">
               <a:rPr lang="de-DE" smtClean="0"/>
-              <a:t>18</a:t>
+              <a:t>19</a:t>
             </a:fld>
             <a:endParaRPr lang="de-DE"/>
           </a:p>
@@ -8838,189 +10818,6 @@
     <p:extLst>
       <p:ext uri="{BB962C8B-B14F-4D97-AF65-F5344CB8AC3E}">
         <p14:creationId xmlns:p14="http://schemas.microsoft.com/office/powerpoint/2010/main" val="2699491584"/>
-      </p:ext>
-    </p:extLst>
-  </p:cSld>
-  <p:clrMapOvr>
-    <a:masterClrMapping/>
-  </p:clrMapOvr>
-</p:sld>
-</file>
-
-<file path=ppt/slides/slide19.xml><?xml version="1.0" encoding="utf-8"?>
-<p:sld xmlns:a="http://schemas.openxmlformats.org/drawingml/2006/main" xmlns:r="http://schemas.openxmlformats.org/officeDocument/2006/relationships" xmlns:p="http://schemas.openxmlformats.org/presentationml/2006/main">
-  <p:cSld>
-    <p:spTree>
-      <p:nvGrpSpPr>
-        <p:cNvPr id="1" name="">
-          <a:extLst>
-            <a:ext uri="{FF2B5EF4-FFF2-40B4-BE49-F238E27FC236}">
-              <a16:creationId xmlns:a16="http://schemas.microsoft.com/office/drawing/2014/main" id="{080F9B6C-ADC8-1490-E36A-62E075121EA4}"/>
-            </a:ext>
-          </a:extLst>
-        </p:cNvPr>
-        <p:cNvGrpSpPr/>
-        <p:nvPr/>
-      </p:nvGrpSpPr>
-      <p:grpSpPr>
-        <a:xfrm>
-          <a:off x="0" y="0"/>
-          <a:ext cx="0" cy="0"/>
-          <a:chOff x="0" y="0"/>
-          <a:chExt cx="0" cy="0"/>
-        </a:xfrm>
-      </p:grpSpPr>
-      <p:pic>
-        <p:nvPicPr>
-          <p:cNvPr id="4" name="Grafik 3" descr="Ein Bild, das Text, Screenshot, Diagramm, Reihe enthält.&#10;&#10;KI-generierte Inhalte können fehlerhaft sein.">
-            <a:extLst>
-              <a:ext uri="{FF2B5EF4-FFF2-40B4-BE49-F238E27FC236}">
-                <a16:creationId xmlns:a16="http://schemas.microsoft.com/office/drawing/2014/main" id="{42986ED7-7F81-65BF-4E62-4C08801FBF9C}"/>
-              </a:ext>
-            </a:extLst>
-          </p:cNvPr>
-          <p:cNvPicPr>
-            <a:picLocks noChangeAspect="1"/>
-          </p:cNvPicPr>
-          <p:nvPr/>
-        </p:nvPicPr>
-        <p:blipFill>
-          <a:blip r:embed="rId2">
-            <a:extLst>
-              <a:ext uri="{28A0092B-C50C-407E-A947-70E740481C1C}">
-                <a14:useLocalDpi xmlns:a14="http://schemas.microsoft.com/office/drawing/2010/main" val="0"/>
-              </a:ext>
-            </a:extLst>
-          </a:blip>
-          <a:stretch>
-            <a:fillRect/>
-          </a:stretch>
-        </p:blipFill>
-        <p:spPr>
-          <a:xfrm>
-            <a:off x="456605" y="470780"/>
-            <a:ext cx="11278789" cy="5639395"/>
-          </a:xfrm>
-          <a:prstGeom prst="rect">
-            <a:avLst/>
-          </a:prstGeom>
-        </p:spPr>
-      </p:pic>
-      <p:sp>
-        <p:nvSpPr>
-          <p:cNvPr id="7" name="TextBox 4">
-            <a:extLst>
-              <a:ext uri="{FF2B5EF4-FFF2-40B4-BE49-F238E27FC236}">
-                <a16:creationId xmlns:a16="http://schemas.microsoft.com/office/drawing/2014/main" id="{53BAA4C1-94F1-F42B-C394-4865B7E235D6}"/>
-              </a:ext>
-            </a:extLst>
-          </p:cNvPr>
-          <p:cNvSpPr txBox="1"/>
-          <p:nvPr/>
-        </p:nvSpPr>
-        <p:spPr>
-          <a:xfrm>
-            <a:off x="3524719" y="6581001"/>
-            <a:ext cx="5142562" cy="276999"/>
-          </a:xfrm>
-          <a:prstGeom prst="rect">
-            <a:avLst/>
-          </a:prstGeom>
-          <a:noFill/>
-        </p:spPr>
-        <p:txBody>
-          <a:bodyPr wrap="none" rtlCol="0">
-            <a:spAutoFit/>
-          </a:bodyPr>
-          <a:lstStyle/>
-          <a:p>
-            <a:r>
-              <a:rPr lang="en-GB" sz="1200" dirty="0">
-                <a:solidFill>
-                  <a:schemeClr val="bg1">
-                    <a:lumMod val="75000"/>
-                  </a:schemeClr>
-                </a:solidFill>
-              </a:rPr>
-              <a:t>Dataset Characteristics </a:t>
-            </a:r>
-            <a:r>
-              <a:rPr lang="en-GB" sz="1200" dirty="0">
-                <a:solidFill>
-                  <a:schemeClr val="bg1">
-                    <a:lumMod val="75000"/>
-                  </a:schemeClr>
-                </a:solidFill>
-                <a:latin typeface="Calibri" panose="020F0502020204030204" pitchFamily="34" charset="0"/>
-                <a:ea typeface="Calibri" panose="020F0502020204030204" pitchFamily="34" charset="0"/>
-                <a:cs typeface="Calibri" panose="020F0502020204030204" pitchFamily="34" charset="0"/>
-              </a:rPr>
-              <a:t>– Baseline Model – </a:t>
-            </a:r>
-            <a:r>
-              <a:rPr lang="en-GB" sz="1200" dirty="0">
-                <a:latin typeface="Calibri" panose="020F0502020204030204" pitchFamily="34" charset="0"/>
-                <a:ea typeface="Calibri" panose="020F0502020204030204" pitchFamily="34" charset="0"/>
-                <a:cs typeface="Calibri" panose="020F0502020204030204" pitchFamily="34" charset="0"/>
-              </a:rPr>
-              <a:t>Neural Net </a:t>
-            </a:r>
-            <a:r>
-              <a:rPr lang="en-GB" sz="1200" dirty="0">
-                <a:solidFill>
-                  <a:schemeClr val="bg1">
-                    <a:lumMod val="75000"/>
-                  </a:schemeClr>
-                </a:solidFill>
-                <a:latin typeface="Calibri" panose="020F0502020204030204" pitchFamily="34" charset="0"/>
-                <a:ea typeface="Calibri" panose="020F0502020204030204" pitchFamily="34" charset="0"/>
-                <a:cs typeface="Calibri" panose="020F0502020204030204" pitchFamily="34" charset="0"/>
-              </a:rPr>
-              <a:t>– Results – Challenges </a:t>
-            </a:r>
-            <a:endParaRPr lang="de-DE" sz="1200" dirty="0">
-              <a:solidFill>
-                <a:schemeClr val="bg1">
-                  <a:lumMod val="75000"/>
-                </a:schemeClr>
-              </a:solidFill>
-            </a:endParaRPr>
-          </a:p>
-        </p:txBody>
-      </p:sp>
-      <p:sp>
-        <p:nvSpPr>
-          <p:cNvPr id="2" name="Slide Number Placeholder 1">
-            <a:extLst>
-              <a:ext uri="{FF2B5EF4-FFF2-40B4-BE49-F238E27FC236}">
-                <a16:creationId xmlns:a16="http://schemas.microsoft.com/office/drawing/2014/main" id="{C5A0711C-F0D9-1923-8FB4-A707908C1A1B}"/>
-              </a:ext>
-            </a:extLst>
-          </p:cNvPr>
-          <p:cNvSpPr>
-            <a:spLocks noGrp="1"/>
-          </p:cNvSpPr>
-          <p:nvPr>
-            <p:ph type="sldNum" sz="quarter" idx="12"/>
-          </p:nvPr>
-        </p:nvSpPr>
-        <p:spPr/>
-        <p:txBody>
-          <a:bodyPr/>
-          <a:lstStyle/>
-          <a:p>
-            <a:fld id="{FEE63D0E-FFEF-43D1-BE35-64C33AF422FD}" type="slidenum">
-              <a:rPr lang="de-DE" smtClean="0"/>
-              <a:t>19</a:t>
-            </a:fld>
-            <a:endParaRPr lang="de-DE"/>
-          </a:p>
-        </p:txBody>
-      </p:sp>
-    </p:spTree>
-    <p:extLst>
-      <p:ext uri="{BB962C8B-B14F-4D97-AF65-F5344CB8AC3E}">
-        <p14:creationId xmlns:p14="http://schemas.microsoft.com/office/powerpoint/2010/main" val="1448705476"/>
       </p:ext>
     </p:extLst>
   </p:cSld>
@@ -15768,6 +17565,189 @@
         <p:cNvPr id="1" name="">
           <a:extLst>
             <a:ext uri="{FF2B5EF4-FFF2-40B4-BE49-F238E27FC236}">
+              <a16:creationId xmlns:a16="http://schemas.microsoft.com/office/drawing/2014/main" id="{080F9B6C-ADC8-1490-E36A-62E075121EA4}"/>
+            </a:ext>
+          </a:extLst>
+        </p:cNvPr>
+        <p:cNvGrpSpPr/>
+        <p:nvPr/>
+      </p:nvGrpSpPr>
+      <p:grpSpPr>
+        <a:xfrm>
+          <a:off x="0" y="0"/>
+          <a:ext cx="0" cy="0"/>
+          <a:chOff x="0" y="0"/>
+          <a:chExt cx="0" cy="0"/>
+        </a:xfrm>
+      </p:grpSpPr>
+      <p:pic>
+        <p:nvPicPr>
+          <p:cNvPr id="4" name="Grafik 3" descr="Ein Bild, das Text, Screenshot, Diagramm, Reihe enthält.&#10;&#10;KI-generierte Inhalte können fehlerhaft sein.">
+            <a:extLst>
+              <a:ext uri="{FF2B5EF4-FFF2-40B4-BE49-F238E27FC236}">
+                <a16:creationId xmlns:a16="http://schemas.microsoft.com/office/drawing/2014/main" id="{42986ED7-7F81-65BF-4E62-4C08801FBF9C}"/>
+              </a:ext>
+            </a:extLst>
+          </p:cNvPr>
+          <p:cNvPicPr>
+            <a:picLocks noChangeAspect="1"/>
+          </p:cNvPicPr>
+          <p:nvPr/>
+        </p:nvPicPr>
+        <p:blipFill>
+          <a:blip r:embed="rId2">
+            <a:extLst>
+              <a:ext uri="{28A0092B-C50C-407E-A947-70E740481C1C}">
+                <a14:useLocalDpi xmlns:a14="http://schemas.microsoft.com/office/drawing/2010/main" val="0"/>
+              </a:ext>
+            </a:extLst>
+          </a:blip>
+          <a:stretch>
+            <a:fillRect/>
+          </a:stretch>
+        </p:blipFill>
+        <p:spPr>
+          <a:xfrm>
+            <a:off x="456605" y="470780"/>
+            <a:ext cx="11278789" cy="5639395"/>
+          </a:xfrm>
+          <a:prstGeom prst="rect">
+            <a:avLst/>
+          </a:prstGeom>
+        </p:spPr>
+      </p:pic>
+      <p:sp>
+        <p:nvSpPr>
+          <p:cNvPr id="7" name="TextBox 4">
+            <a:extLst>
+              <a:ext uri="{FF2B5EF4-FFF2-40B4-BE49-F238E27FC236}">
+                <a16:creationId xmlns:a16="http://schemas.microsoft.com/office/drawing/2014/main" id="{53BAA4C1-94F1-F42B-C394-4865B7E235D6}"/>
+              </a:ext>
+            </a:extLst>
+          </p:cNvPr>
+          <p:cNvSpPr txBox="1"/>
+          <p:nvPr/>
+        </p:nvSpPr>
+        <p:spPr>
+          <a:xfrm>
+            <a:off x="3524719" y="6581001"/>
+            <a:ext cx="5142562" cy="276999"/>
+          </a:xfrm>
+          <a:prstGeom prst="rect">
+            <a:avLst/>
+          </a:prstGeom>
+          <a:noFill/>
+        </p:spPr>
+        <p:txBody>
+          <a:bodyPr wrap="none" rtlCol="0">
+            <a:spAutoFit/>
+          </a:bodyPr>
+          <a:lstStyle/>
+          <a:p>
+            <a:r>
+              <a:rPr lang="en-GB" sz="1200" dirty="0">
+                <a:solidFill>
+                  <a:schemeClr val="bg1">
+                    <a:lumMod val="75000"/>
+                  </a:schemeClr>
+                </a:solidFill>
+              </a:rPr>
+              <a:t>Dataset Characteristics </a:t>
+            </a:r>
+            <a:r>
+              <a:rPr lang="en-GB" sz="1200" dirty="0">
+                <a:solidFill>
+                  <a:schemeClr val="bg1">
+                    <a:lumMod val="75000"/>
+                  </a:schemeClr>
+                </a:solidFill>
+                <a:latin typeface="Calibri" panose="020F0502020204030204" pitchFamily="34" charset="0"/>
+                <a:ea typeface="Calibri" panose="020F0502020204030204" pitchFamily="34" charset="0"/>
+                <a:cs typeface="Calibri" panose="020F0502020204030204" pitchFamily="34" charset="0"/>
+              </a:rPr>
+              <a:t>– Baseline Model – </a:t>
+            </a:r>
+            <a:r>
+              <a:rPr lang="en-GB" sz="1200" dirty="0">
+                <a:latin typeface="Calibri" panose="020F0502020204030204" pitchFamily="34" charset="0"/>
+                <a:ea typeface="Calibri" panose="020F0502020204030204" pitchFamily="34" charset="0"/>
+                <a:cs typeface="Calibri" panose="020F0502020204030204" pitchFamily="34" charset="0"/>
+              </a:rPr>
+              <a:t>Neural Net </a:t>
+            </a:r>
+            <a:r>
+              <a:rPr lang="en-GB" sz="1200" dirty="0">
+                <a:solidFill>
+                  <a:schemeClr val="bg1">
+                    <a:lumMod val="75000"/>
+                  </a:schemeClr>
+                </a:solidFill>
+                <a:latin typeface="Calibri" panose="020F0502020204030204" pitchFamily="34" charset="0"/>
+                <a:ea typeface="Calibri" panose="020F0502020204030204" pitchFamily="34" charset="0"/>
+                <a:cs typeface="Calibri" panose="020F0502020204030204" pitchFamily="34" charset="0"/>
+              </a:rPr>
+              <a:t>– Results – Challenges </a:t>
+            </a:r>
+            <a:endParaRPr lang="de-DE" sz="1200" dirty="0">
+              <a:solidFill>
+                <a:schemeClr val="bg1">
+                  <a:lumMod val="75000"/>
+                </a:schemeClr>
+              </a:solidFill>
+            </a:endParaRPr>
+          </a:p>
+        </p:txBody>
+      </p:sp>
+      <p:sp>
+        <p:nvSpPr>
+          <p:cNvPr id="2" name="Slide Number Placeholder 1">
+            <a:extLst>
+              <a:ext uri="{FF2B5EF4-FFF2-40B4-BE49-F238E27FC236}">
+                <a16:creationId xmlns:a16="http://schemas.microsoft.com/office/drawing/2014/main" id="{C5A0711C-F0D9-1923-8FB4-A707908C1A1B}"/>
+              </a:ext>
+            </a:extLst>
+          </p:cNvPr>
+          <p:cNvSpPr>
+            <a:spLocks noGrp="1"/>
+          </p:cNvSpPr>
+          <p:nvPr>
+            <p:ph type="sldNum" sz="quarter" idx="12"/>
+          </p:nvPr>
+        </p:nvSpPr>
+        <p:spPr/>
+        <p:txBody>
+          <a:bodyPr/>
+          <a:lstStyle/>
+          <a:p>
+            <a:fld id="{FEE63D0E-FFEF-43D1-BE35-64C33AF422FD}" type="slidenum">
+              <a:rPr lang="de-DE" smtClean="0"/>
+              <a:t>20</a:t>
+            </a:fld>
+            <a:endParaRPr lang="de-DE"/>
+          </a:p>
+        </p:txBody>
+      </p:sp>
+    </p:spTree>
+    <p:extLst>
+      <p:ext uri="{BB962C8B-B14F-4D97-AF65-F5344CB8AC3E}">
+        <p14:creationId xmlns:p14="http://schemas.microsoft.com/office/powerpoint/2010/main" val="1448705476"/>
+      </p:ext>
+    </p:extLst>
+  </p:cSld>
+  <p:clrMapOvr>
+    <a:masterClrMapping/>
+  </p:clrMapOvr>
+</p:sld>
+</file>
+
+<file path=ppt/slides/slide21.xml><?xml version="1.0" encoding="utf-8"?>
+<p:sld xmlns:a="http://schemas.openxmlformats.org/drawingml/2006/main" xmlns:r="http://schemas.openxmlformats.org/officeDocument/2006/relationships" xmlns:p="http://schemas.openxmlformats.org/presentationml/2006/main">
+  <p:cSld>
+    <p:spTree>
+      <p:nvGrpSpPr>
+        <p:cNvPr id="1" name="">
+          <a:extLst>
+            <a:ext uri="{FF2B5EF4-FFF2-40B4-BE49-F238E27FC236}">
               <a16:creationId xmlns:a16="http://schemas.microsoft.com/office/drawing/2014/main" id="{05D4050B-A8AD-D44C-BDB5-DAEF0748352F}"/>
             </a:ext>
           </a:extLst>
@@ -15925,7 +17905,7 @@
           <a:p>
             <a:fld id="{FEE63D0E-FFEF-43D1-BE35-64C33AF422FD}" type="slidenum">
               <a:rPr lang="de-DE" smtClean="0"/>
-              <a:t>20</a:t>
+              <a:t>21</a:t>
             </a:fld>
             <a:endParaRPr lang="de-DE"/>
           </a:p>
@@ -15944,7 +17924,7 @@
 </p:sld>
 </file>
 
-<file path=ppt/slides/slide21.xml><?xml version="1.0" encoding="utf-8"?>
+<file path=ppt/slides/slide22.xml><?xml version="1.0" encoding="utf-8"?>
 <p:sld xmlns:a="http://schemas.openxmlformats.org/drawingml/2006/main" xmlns:r="http://schemas.openxmlformats.org/officeDocument/2006/relationships" xmlns:p="http://schemas.openxmlformats.org/presentationml/2006/main">
   <p:cSld>
     <p:spTree>
@@ -16109,7 +18089,7 @@
           <a:p>
             <a:fld id="{FEE63D0E-FFEF-43D1-BE35-64C33AF422FD}" type="slidenum">
               <a:rPr lang="de-DE" smtClean="0"/>
-              <a:t>21</a:t>
+              <a:t>22</a:t>
             </a:fld>
             <a:endParaRPr lang="de-DE"/>
           </a:p>
@@ -16128,7 +18108,7 @@
 </p:sld>
 </file>
 
-<file path=ppt/slides/slide22.xml><?xml version="1.0" encoding="utf-8"?>
+<file path=ppt/slides/slide23.xml><?xml version="1.0" encoding="utf-8"?>
 <p:sld xmlns:a="http://schemas.openxmlformats.org/drawingml/2006/main" xmlns:r="http://schemas.openxmlformats.org/officeDocument/2006/relationships" xmlns:p="http://schemas.openxmlformats.org/presentationml/2006/main" show="0">
   <p:cSld>
     <p:bg>
@@ -16308,7 +18288,7 @@
           <a:p>
             <a:fld id="{FEE63D0E-FFEF-43D1-BE35-64C33AF422FD}" type="slidenum">
               <a:rPr lang="de-DE" smtClean="0"/>
-              <a:t>22</a:t>
+              <a:t>23</a:t>
             </a:fld>
             <a:endParaRPr lang="de-DE"/>
           </a:p>
@@ -16318,6 +18298,1341 @@
     <p:extLst>
       <p:ext uri="{BB962C8B-B14F-4D97-AF65-F5344CB8AC3E}">
         <p14:creationId xmlns:p14="http://schemas.microsoft.com/office/powerpoint/2010/main" val="1731321607"/>
+      </p:ext>
+    </p:extLst>
+  </p:cSld>
+  <p:clrMapOvr>
+    <a:masterClrMapping/>
+  </p:clrMapOvr>
+</p:sld>
+</file>
+
+<file path=ppt/slides/slide24.xml><?xml version="1.0" encoding="utf-8"?>
+<p:sld xmlns:a="http://schemas.openxmlformats.org/drawingml/2006/main" xmlns:r="http://schemas.openxmlformats.org/officeDocument/2006/relationships" xmlns:p="http://schemas.openxmlformats.org/presentationml/2006/main">
+  <p:cSld>
+    <p:spTree>
+      <p:nvGrpSpPr>
+        <p:cNvPr id="1" name="">
+          <a:extLst>
+            <a:ext uri="{FF2B5EF4-FFF2-40B4-BE49-F238E27FC236}">
+              <a16:creationId xmlns:a16="http://schemas.microsoft.com/office/drawing/2014/main" id="{E474F7B3-7E84-BDB7-EE3A-B17750D621F4}"/>
+            </a:ext>
+          </a:extLst>
+        </p:cNvPr>
+        <p:cNvGrpSpPr/>
+        <p:nvPr/>
+      </p:nvGrpSpPr>
+      <p:grpSpPr>
+        <a:xfrm>
+          <a:off x="0" y="0"/>
+          <a:ext cx="0" cy="0"/>
+          <a:chOff x="0" y="0"/>
+          <a:chExt cx="0" cy="0"/>
+        </a:xfrm>
+      </p:grpSpPr>
+      <p:sp>
+        <p:nvSpPr>
+          <p:cNvPr id="3" name="Title 2">
+            <a:extLst>
+              <a:ext uri="{FF2B5EF4-FFF2-40B4-BE49-F238E27FC236}">
+                <a16:creationId xmlns:a16="http://schemas.microsoft.com/office/drawing/2014/main" id="{92CE0A70-2ABA-2EA3-66C5-4004AAA22941}"/>
+              </a:ext>
+            </a:extLst>
+          </p:cNvPr>
+          <p:cNvSpPr>
+            <a:spLocks noGrp="1"/>
+          </p:cNvSpPr>
+          <p:nvPr>
+            <p:ph type="title"/>
+          </p:nvPr>
+        </p:nvSpPr>
+        <p:spPr/>
+        <p:txBody>
+          <a:bodyPr/>
+          <a:lstStyle/>
+          <a:p>
+            <a:r>
+              <a:rPr lang="en-US" dirty="0"/>
+              <a:t>Neural Network</a:t>
+            </a:r>
+            <a:endParaRPr lang="en-GB" dirty="0"/>
+          </a:p>
+        </p:txBody>
+      </p:sp>
+      <p:sp>
+        <p:nvSpPr>
+          <p:cNvPr id="2" name="Slide Number Placeholder 1">
+            <a:extLst>
+              <a:ext uri="{FF2B5EF4-FFF2-40B4-BE49-F238E27FC236}">
+                <a16:creationId xmlns:a16="http://schemas.microsoft.com/office/drawing/2014/main" id="{F09B9EAB-729B-286E-841D-270974CDD1FC}"/>
+              </a:ext>
+            </a:extLst>
+          </p:cNvPr>
+          <p:cNvSpPr>
+            <a:spLocks noGrp="1"/>
+          </p:cNvSpPr>
+          <p:nvPr>
+            <p:ph type="sldNum" sz="quarter" idx="12"/>
+          </p:nvPr>
+        </p:nvSpPr>
+        <p:spPr/>
+        <p:txBody>
+          <a:bodyPr/>
+          <a:lstStyle/>
+          <a:p>
+            <a:fld id="{FEE63D0E-FFEF-43D1-BE35-64C33AF422FD}" type="slidenum">
+              <a:rPr lang="de-DE" smtClean="0"/>
+              <a:t>24</a:t>
+            </a:fld>
+            <a:endParaRPr lang="de-DE"/>
+          </a:p>
+        </p:txBody>
+      </p:sp>
+      <p:sp>
+        <p:nvSpPr>
+          <p:cNvPr id="25" name="TextBox 24">
+            <a:extLst>
+              <a:ext uri="{FF2B5EF4-FFF2-40B4-BE49-F238E27FC236}">
+                <a16:creationId xmlns:a16="http://schemas.microsoft.com/office/drawing/2014/main" id="{2695C1F2-6B30-2F7A-2778-93CE3CD56B4A}"/>
+              </a:ext>
+            </a:extLst>
+          </p:cNvPr>
+          <p:cNvSpPr txBox="1"/>
+          <p:nvPr/>
+        </p:nvSpPr>
+        <p:spPr>
+          <a:xfrm>
+            <a:off x="10152105" y="4233003"/>
+            <a:ext cx="1439730" cy="369332"/>
+          </a:xfrm>
+          <a:prstGeom prst="rect">
+            <a:avLst/>
+          </a:prstGeom>
+          <a:noFill/>
+        </p:spPr>
+        <p:txBody>
+          <a:bodyPr wrap="square" rtlCol="0">
+            <a:spAutoFit/>
+          </a:bodyPr>
+          <a:lstStyle/>
+          <a:p>
+            <a:pPr algn="ctr"/>
+            <a:r>
+              <a:rPr lang="en-GB" dirty="0"/>
+              <a:t>0.18081</a:t>
+            </a:r>
+            <a:endParaRPr lang="en-GB" b="1" dirty="0"/>
+          </a:p>
+        </p:txBody>
+      </p:sp>
+      <p:pic>
+        <p:nvPicPr>
+          <p:cNvPr id="2050" name="Picture 2">
+            <a:extLst>
+              <a:ext uri="{FF2B5EF4-FFF2-40B4-BE49-F238E27FC236}">
+                <a16:creationId xmlns:a16="http://schemas.microsoft.com/office/drawing/2014/main" id="{EA847370-ACF1-23B8-CEEC-E23AFA3FB148}"/>
+              </a:ext>
+            </a:extLst>
+          </p:cNvPr>
+          <p:cNvPicPr>
+            <a:picLocks noChangeAspect="1" noChangeArrowheads="1"/>
+          </p:cNvPicPr>
+          <p:nvPr/>
+        </p:nvPicPr>
+        <p:blipFill>
+          <a:blip r:embed="rId3">
+            <a:extLst>
+              <a:ext uri="{28A0092B-C50C-407E-A947-70E740481C1C}">
+                <a14:useLocalDpi xmlns:a14="http://schemas.microsoft.com/office/drawing/2010/main" val="0"/>
+              </a:ext>
+            </a:extLst>
+          </a:blip>
+          <a:srcRect/>
+          <a:stretch>
+            <a:fillRect/>
+          </a:stretch>
+        </p:blipFill>
+        <p:spPr bwMode="auto">
+          <a:xfrm>
+            <a:off x="10362024" y="3839965"/>
+            <a:ext cx="1019892" cy="395607"/>
+          </a:xfrm>
+          <a:prstGeom prst="rect">
+            <a:avLst/>
+          </a:prstGeom>
+          <a:noFill/>
+          <a:extLst>
+            <a:ext uri="{909E8E84-426E-40DD-AFC4-6F175D3DCCD1}">
+              <a14:hiddenFill xmlns:a14="http://schemas.microsoft.com/office/drawing/2010/main">
+                <a:solidFill>
+                  <a:srgbClr val="FFFFFF"/>
+                </a:solidFill>
+              </a14:hiddenFill>
+            </a:ext>
+          </a:extLst>
+        </p:spPr>
+      </p:pic>
+      <p:grpSp>
+        <p:nvGrpSpPr>
+          <p:cNvPr id="34" name="Group 33">
+            <a:extLst>
+              <a:ext uri="{FF2B5EF4-FFF2-40B4-BE49-F238E27FC236}">
+                <a16:creationId xmlns:a16="http://schemas.microsoft.com/office/drawing/2014/main" id="{2CA44A45-087A-C3C2-2F29-FDA950B19C98}"/>
+              </a:ext>
+            </a:extLst>
+          </p:cNvPr>
+          <p:cNvGrpSpPr/>
+          <p:nvPr/>
+        </p:nvGrpSpPr>
+        <p:grpSpPr>
+          <a:xfrm>
+            <a:off x="3071962" y="1900172"/>
+            <a:ext cx="6694805" cy="3425895"/>
+            <a:chOff x="2058288" y="1690688"/>
+            <a:chExt cx="6694805" cy="3425895"/>
+          </a:xfrm>
+        </p:grpSpPr>
+        <p:sp>
+          <p:nvSpPr>
+            <p:cNvPr id="12" name="TextBox 11">
+              <a:extLst>
+                <a:ext uri="{FF2B5EF4-FFF2-40B4-BE49-F238E27FC236}">
+                  <a16:creationId xmlns:a16="http://schemas.microsoft.com/office/drawing/2014/main" id="{833F92DB-B4B3-6464-9CD4-B65592C22CEA}"/>
+                </a:ext>
+              </a:extLst>
+            </p:cNvPr>
+            <p:cNvSpPr txBox="1"/>
+            <p:nvPr/>
+          </p:nvSpPr>
+          <p:spPr>
+            <a:xfrm>
+              <a:off x="2058288" y="4680283"/>
+              <a:ext cx="1507958" cy="369332"/>
+            </a:xfrm>
+            <a:prstGeom prst="rect">
+              <a:avLst/>
+            </a:prstGeom>
+            <a:noFill/>
+          </p:spPr>
+          <p:txBody>
+            <a:bodyPr wrap="square" rtlCol="0">
+              <a:spAutoFit/>
+            </a:bodyPr>
+            <a:lstStyle/>
+            <a:p>
+              <a:r>
+                <a:rPr lang="en-GB" b="1" dirty="0"/>
+                <a:t>Input Layer</a:t>
+              </a:r>
+              <a:endParaRPr lang="en-GB" dirty="0"/>
+            </a:p>
+          </p:txBody>
+        </p:sp>
+        <p:sp>
+          <p:nvSpPr>
+            <p:cNvPr id="13" name="TextBox 12">
+              <a:extLst>
+                <a:ext uri="{FF2B5EF4-FFF2-40B4-BE49-F238E27FC236}">
+                  <a16:creationId xmlns:a16="http://schemas.microsoft.com/office/drawing/2014/main" id="{80913096-728C-D0D0-6365-4D06BEE23123}"/>
+                </a:ext>
+              </a:extLst>
+            </p:cNvPr>
+            <p:cNvSpPr txBox="1"/>
+            <p:nvPr/>
+          </p:nvSpPr>
+          <p:spPr>
+            <a:xfrm>
+              <a:off x="4448910" y="4734732"/>
+              <a:ext cx="1905001" cy="369332"/>
+            </a:xfrm>
+            <a:prstGeom prst="rect">
+              <a:avLst/>
+            </a:prstGeom>
+            <a:noFill/>
+          </p:spPr>
+          <p:txBody>
+            <a:bodyPr wrap="square" rtlCol="0">
+              <a:spAutoFit/>
+            </a:bodyPr>
+            <a:lstStyle/>
+            <a:p>
+              <a:r>
+                <a:rPr lang="en-GB" b="1" dirty="0"/>
+                <a:t>Hidden Layers</a:t>
+              </a:r>
+              <a:endParaRPr lang="en-GB" dirty="0"/>
+            </a:p>
+          </p:txBody>
+        </p:sp>
+        <p:sp>
+          <p:nvSpPr>
+            <p:cNvPr id="14" name="TextBox 13">
+              <a:extLst>
+                <a:ext uri="{FF2B5EF4-FFF2-40B4-BE49-F238E27FC236}">
+                  <a16:creationId xmlns:a16="http://schemas.microsoft.com/office/drawing/2014/main" id="{85088378-9253-79E8-0EE5-53520AD1447D}"/>
+                </a:ext>
+              </a:extLst>
+            </p:cNvPr>
+            <p:cNvSpPr txBox="1"/>
+            <p:nvPr/>
+          </p:nvSpPr>
+          <p:spPr>
+            <a:xfrm>
+              <a:off x="6931654" y="4747251"/>
+              <a:ext cx="1821439" cy="369332"/>
+            </a:xfrm>
+            <a:prstGeom prst="rect">
+              <a:avLst/>
+            </a:prstGeom>
+            <a:noFill/>
+          </p:spPr>
+          <p:txBody>
+            <a:bodyPr wrap="square" rtlCol="0">
+              <a:spAutoFit/>
+            </a:bodyPr>
+            <a:lstStyle/>
+            <a:p>
+              <a:r>
+                <a:rPr lang="en-GB" b="1" dirty="0"/>
+                <a:t>Output Layer</a:t>
+              </a:r>
+              <a:endParaRPr lang="en-GB" dirty="0"/>
+            </a:p>
+          </p:txBody>
+        </p:sp>
+        <p:sp>
+          <p:nvSpPr>
+            <p:cNvPr id="18" name="Rectangle 17">
+              <a:extLst>
+                <a:ext uri="{FF2B5EF4-FFF2-40B4-BE49-F238E27FC236}">
+                  <a16:creationId xmlns:a16="http://schemas.microsoft.com/office/drawing/2014/main" id="{BBDEA889-EEB6-9B48-CC68-CDB7B6A3F6EB}"/>
+                </a:ext>
+              </a:extLst>
+            </p:cNvPr>
+            <p:cNvSpPr/>
+            <p:nvPr/>
+          </p:nvSpPr>
+          <p:spPr>
+            <a:xfrm>
+              <a:off x="7291135" y="2177716"/>
+              <a:ext cx="1050757" cy="2502568"/>
+            </a:xfrm>
+            <a:prstGeom prst="rect">
+              <a:avLst/>
+            </a:prstGeom>
+            <a:noFill/>
+            <a:ln>
+              <a:noFill/>
+            </a:ln>
+          </p:spPr>
+          <p:style>
+            <a:lnRef idx="0">
+              <a:scrgbClr r="0" g="0" b="0"/>
+            </a:lnRef>
+            <a:fillRef idx="0">
+              <a:scrgbClr r="0" g="0" b="0"/>
+            </a:fillRef>
+            <a:effectRef idx="0">
+              <a:scrgbClr r="0" g="0" b="0"/>
+            </a:effectRef>
+            <a:fontRef idx="minor">
+              <a:schemeClr val="lt1"/>
+            </a:fontRef>
+          </p:style>
+          <p:txBody>
+            <a:bodyPr rtlCol="0" anchor="ctr"/>
+            <a:lstStyle/>
+            <a:p>
+              <a:pPr algn="ctr"/>
+              <a:endParaRPr lang="en-GB"/>
+            </a:p>
+          </p:txBody>
+        </p:sp>
+        <p:grpSp>
+          <p:nvGrpSpPr>
+            <p:cNvPr id="30" name="Group 29">
+              <a:extLst>
+                <a:ext uri="{FF2B5EF4-FFF2-40B4-BE49-F238E27FC236}">
+                  <a16:creationId xmlns:a16="http://schemas.microsoft.com/office/drawing/2014/main" id="{5923FBCA-5D58-5EF5-9D30-BCE8F455DF56}"/>
+                </a:ext>
+              </a:extLst>
+            </p:cNvPr>
+            <p:cNvGrpSpPr/>
+            <p:nvPr/>
+          </p:nvGrpSpPr>
+          <p:grpSpPr>
+            <a:xfrm>
+              <a:off x="2379133" y="2305550"/>
+              <a:ext cx="866273" cy="1648872"/>
+              <a:chOff x="1766256" y="2357642"/>
+              <a:chExt cx="866273" cy="1648872"/>
+            </a:xfrm>
+          </p:grpSpPr>
+          <p:sp>
+            <p:nvSpPr>
+              <p:cNvPr id="5" name="Rectangle 4">
+                <a:extLst>
+                  <a:ext uri="{FF2B5EF4-FFF2-40B4-BE49-F238E27FC236}">
+                    <a16:creationId xmlns:a16="http://schemas.microsoft.com/office/drawing/2014/main" id="{D3061EA9-C787-4181-650A-EEFD172A41E1}"/>
+                  </a:ext>
+                </a:extLst>
+              </p:cNvPr>
+              <p:cNvSpPr/>
+              <p:nvPr/>
+            </p:nvSpPr>
+            <p:spPr>
+              <a:xfrm>
+                <a:off x="1766256" y="2851483"/>
+                <a:ext cx="866273" cy="1155031"/>
+              </a:xfrm>
+              <a:prstGeom prst="rect">
+                <a:avLst/>
+              </a:prstGeom>
+              <a:effectLst>
+                <a:outerShdw blurRad="63500" sx="102000" sy="102000" algn="ctr" rotWithShape="0">
+                  <a:prstClr val="black">
+                    <a:alpha val="40000"/>
+                  </a:prstClr>
+                </a:outerShdw>
+              </a:effectLst>
+            </p:spPr>
+            <p:style>
+              <a:lnRef idx="2">
+                <a:schemeClr val="accent1">
+                  <a:shade val="15000"/>
+                </a:schemeClr>
+              </a:lnRef>
+              <a:fillRef idx="1">
+                <a:schemeClr val="accent1"/>
+              </a:fillRef>
+              <a:effectRef idx="0">
+                <a:schemeClr val="accent1"/>
+              </a:effectRef>
+              <a:fontRef idx="minor">
+                <a:schemeClr val="lt1"/>
+              </a:fontRef>
+            </p:style>
+            <p:txBody>
+              <a:bodyPr rtlCol="0" anchor="ctr"/>
+              <a:lstStyle/>
+              <a:p>
+                <a:pPr algn="ctr"/>
+                <a:endParaRPr lang="en-GB" dirty="0"/>
+              </a:p>
+            </p:txBody>
+          </p:sp>
+          <p:sp>
+            <p:nvSpPr>
+              <p:cNvPr id="20" name="TextBox 19">
+                <a:extLst>
+                  <a:ext uri="{FF2B5EF4-FFF2-40B4-BE49-F238E27FC236}">
+                    <a16:creationId xmlns:a16="http://schemas.microsoft.com/office/drawing/2014/main" id="{A3E7341E-6507-1310-04A4-F3A16DA1B026}"/>
+                  </a:ext>
+                </a:extLst>
+              </p:cNvPr>
+              <p:cNvSpPr txBox="1"/>
+              <p:nvPr/>
+            </p:nvSpPr>
+            <p:spPr>
+              <a:xfrm>
+                <a:off x="1980817" y="2357642"/>
+                <a:ext cx="437147" cy="369332"/>
+              </a:xfrm>
+              <a:prstGeom prst="rect">
+                <a:avLst/>
+              </a:prstGeom>
+              <a:noFill/>
+            </p:spPr>
+            <p:txBody>
+              <a:bodyPr wrap="square" rtlCol="0">
+                <a:spAutoFit/>
+              </a:bodyPr>
+              <a:lstStyle/>
+              <a:p>
+                <a:pPr algn="ctr"/>
+                <a:r>
+                  <a:rPr lang="en-US" dirty="0"/>
+                  <a:t>1</a:t>
+                </a:r>
+                <a:endParaRPr lang="en-GB" dirty="0"/>
+              </a:p>
+            </p:txBody>
+          </p:sp>
+        </p:grpSp>
+        <p:grpSp>
+          <p:nvGrpSpPr>
+            <p:cNvPr id="26" name="Group 25">
+              <a:extLst>
+                <a:ext uri="{FF2B5EF4-FFF2-40B4-BE49-F238E27FC236}">
+                  <a16:creationId xmlns:a16="http://schemas.microsoft.com/office/drawing/2014/main" id="{097B4C84-D3AF-6BD7-C794-550C32EFB3E6}"/>
+                </a:ext>
+              </a:extLst>
+            </p:cNvPr>
+            <p:cNvGrpSpPr/>
+            <p:nvPr/>
+          </p:nvGrpSpPr>
+          <p:grpSpPr>
+            <a:xfrm>
+              <a:off x="3376863" y="1690688"/>
+              <a:ext cx="1050758" cy="2989596"/>
+              <a:chOff x="3376863" y="1690688"/>
+              <a:chExt cx="1050758" cy="2989596"/>
+            </a:xfrm>
+          </p:grpSpPr>
+          <p:sp>
+            <p:nvSpPr>
+              <p:cNvPr id="6" name="Rectangle 5">
+                <a:extLst>
+                  <a:ext uri="{FF2B5EF4-FFF2-40B4-BE49-F238E27FC236}">
+                    <a16:creationId xmlns:a16="http://schemas.microsoft.com/office/drawing/2014/main" id="{420C766B-C4A1-6C16-BB67-22B0344A12E6}"/>
+                  </a:ext>
+                </a:extLst>
+              </p:cNvPr>
+              <p:cNvSpPr/>
+              <p:nvPr/>
+            </p:nvSpPr>
+            <p:spPr>
+              <a:xfrm>
+                <a:off x="3376864" y="2177715"/>
+                <a:ext cx="1050757" cy="2502568"/>
+              </a:xfrm>
+              <a:prstGeom prst="rect">
+                <a:avLst/>
+              </a:prstGeom>
+              <a:effectLst>
+                <a:outerShdw blurRad="63500" sx="102000" sy="102000" algn="ctr" rotWithShape="0">
+                  <a:prstClr val="black">
+                    <a:alpha val="40000"/>
+                  </a:prstClr>
+                </a:outerShdw>
+              </a:effectLst>
+            </p:spPr>
+            <p:style>
+              <a:lnRef idx="2">
+                <a:schemeClr val="accent1">
+                  <a:shade val="15000"/>
+                </a:schemeClr>
+              </a:lnRef>
+              <a:fillRef idx="1">
+                <a:schemeClr val="accent1"/>
+              </a:fillRef>
+              <a:effectRef idx="0">
+                <a:schemeClr val="accent1"/>
+              </a:effectRef>
+              <a:fontRef idx="minor">
+                <a:schemeClr val="lt1"/>
+              </a:fontRef>
+            </p:style>
+            <p:txBody>
+              <a:bodyPr rtlCol="0" anchor="ctr"/>
+              <a:lstStyle/>
+              <a:p>
+                <a:pPr algn="ctr"/>
+                <a:endParaRPr lang="en-GB" dirty="0"/>
+              </a:p>
+            </p:txBody>
+          </p:sp>
+          <p:sp>
+            <p:nvSpPr>
+              <p:cNvPr id="16" name="Rectangle 15">
+                <a:extLst>
+                  <a:ext uri="{FF2B5EF4-FFF2-40B4-BE49-F238E27FC236}">
+                    <a16:creationId xmlns:a16="http://schemas.microsoft.com/office/drawing/2014/main" id="{0FAC438F-1331-50AE-818F-FD64636F5AE7}"/>
+                  </a:ext>
+                </a:extLst>
+              </p:cNvPr>
+              <p:cNvSpPr/>
+              <p:nvPr/>
+            </p:nvSpPr>
+            <p:spPr>
+              <a:xfrm>
+                <a:off x="3376863" y="2177716"/>
+                <a:ext cx="1050757" cy="2502568"/>
+              </a:xfrm>
+              <a:prstGeom prst="rect">
+                <a:avLst/>
+              </a:prstGeom>
+              <a:noFill/>
+              <a:ln>
+                <a:noFill/>
+              </a:ln>
+            </p:spPr>
+            <p:style>
+              <a:lnRef idx="0">
+                <a:scrgbClr r="0" g="0" b="0"/>
+              </a:lnRef>
+              <a:fillRef idx="0">
+                <a:scrgbClr r="0" g="0" b="0"/>
+              </a:fillRef>
+              <a:effectRef idx="0">
+                <a:scrgbClr r="0" g="0" b="0"/>
+              </a:effectRef>
+              <a:fontRef idx="minor">
+                <a:schemeClr val="lt1"/>
+              </a:fontRef>
+            </p:style>
+            <p:txBody>
+              <a:bodyPr rtlCol="0" anchor="ctr"/>
+              <a:lstStyle/>
+              <a:p>
+                <a:pPr algn="ctr"/>
+                <a:endParaRPr lang="en-GB"/>
+              </a:p>
+            </p:txBody>
+          </p:sp>
+          <p:sp>
+            <p:nvSpPr>
+              <p:cNvPr id="21" name="TextBox 20">
+                <a:extLst>
+                  <a:ext uri="{FF2B5EF4-FFF2-40B4-BE49-F238E27FC236}">
+                    <a16:creationId xmlns:a16="http://schemas.microsoft.com/office/drawing/2014/main" id="{2C212044-FC3C-455B-A6AD-B48C1BEE026F}"/>
+                  </a:ext>
+                </a:extLst>
+              </p:cNvPr>
+              <p:cNvSpPr txBox="1"/>
+              <p:nvPr/>
+            </p:nvSpPr>
+            <p:spPr>
+              <a:xfrm>
+                <a:off x="3603531" y="1690688"/>
+                <a:ext cx="564948" cy="369332"/>
+              </a:xfrm>
+              <a:prstGeom prst="rect">
+                <a:avLst/>
+              </a:prstGeom>
+              <a:noFill/>
+            </p:spPr>
+            <p:txBody>
+              <a:bodyPr wrap="square" rtlCol="0">
+                <a:spAutoFit/>
+              </a:bodyPr>
+              <a:lstStyle/>
+              <a:p>
+                <a:pPr algn="ctr"/>
+                <a:r>
+                  <a:rPr lang="en-US" dirty="0"/>
+                  <a:t>128</a:t>
+                </a:r>
+                <a:endParaRPr lang="en-GB" dirty="0"/>
+              </a:p>
+            </p:txBody>
+          </p:sp>
+        </p:grpSp>
+        <p:grpSp>
+          <p:nvGrpSpPr>
+            <p:cNvPr id="27" name="Group 26">
+              <a:extLst>
+                <a:ext uri="{FF2B5EF4-FFF2-40B4-BE49-F238E27FC236}">
+                  <a16:creationId xmlns:a16="http://schemas.microsoft.com/office/drawing/2014/main" id="{3681D48A-3D3F-4F47-D619-545381DC7DAB}"/>
+                </a:ext>
+              </a:extLst>
+            </p:cNvPr>
+            <p:cNvGrpSpPr/>
+            <p:nvPr/>
+          </p:nvGrpSpPr>
+          <p:grpSpPr>
+            <a:xfrm>
+              <a:off x="4608096" y="1705855"/>
+              <a:ext cx="1050758" cy="2988893"/>
+              <a:chOff x="5333999" y="1691391"/>
+              <a:chExt cx="1050758" cy="2988893"/>
+            </a:xfrm>
+          </p:grpSpPr>
+          <p:sp>
+            <p:nvSpPr>
+              <p:cNvPr id="8" name="Rectangle 7">
+                <a:extLst>
+                  <a:ext uri="{FF2B5EF4-FFF2-40B4-BE49-F238E27FC236}">
+                    <a16:creationId xmlns:a16="http://schemas.microsoft.com/office/drawing/2014/main" id="{ABF72721-3F6C-8728-1351-3E4093F51F5B}"/>
+                  </a:ext>
+                </a:extLst>
+              </p:cNvPr>
+              <p:cNvSpPr/>
+              <p:nvPr/>
+            </p:nvSpPr>
+            <p:spPr>
+              <a:xfrm>
+                <a:off x="5334000" y="2177715"/>
+                <a:ext cx="1050757" cy="2502568"/>
+              </a:xfrm>
+              <a:prstGeom prst="rect">
+                <a:avLst/>
+              </a:prstGeom>
+              <a:effectLst>
+                <a:outerShdw blurRad="63500" sx="102000" sy="102000" algn="ctr" rotWithShape="0">
+                  <a:prstClr val="black">
+                    <a:alpha val="40000"/>
+                  </a:prstClr>
+                </a:outerShdw>
+              </a:effectLst>
+            </p:spPr>
+            <p:style>
+              <a:lnRef idx="2">
+                <a:schemeClr val="accent1">
+                  <a:shade val="15000"/>
+                </a:schemeClr>
+              </a:lnRef>
+              <a:fillRef idx="1">
+                <a:schemeClr val="accent1"/>
+              </a:fillRef>
+              <a:effectRef idx="0">
+                <a:schemeClr val="accent1"/>
+              </a:effectRef>
+              <a:fontRef idx="minor">
+                <a:schemeClr val="lt1"/>
+              </a:fontRef>
+            </p:style>
+            <p:txBody>
+              <a:bodyPr rtlCol="0" anchor="ctr"/>
+              <a:lstStyle/>
+              <a:p>
+                <a:pPr algn="ctr"/>
+                <a:endParaRPr lang="en-GB"/>
+              </a:p>
+            </p:txBody>
+          </p:sp>
+          <p:sp>
+            <p:nvSpPr>
+              <p:cNvPr id="17" name="Rectangle 16">
+                <a:extLst>
+                  <a:ext uri="{FF2B5EF4-FFF2-40B4-BE49-F238E27FC236}">
+                    <a16:creationId xmlns:a16="http://schemas.microsoft.com/office/drawing/2014/main" id="{BDBCB588-1A2E-013A-BC93-AB356B50A8A1}"/>
+                  </a:ext>
+                </a:extLst>
+              </p:cNvPr>
+              <p:cNvSpPr/>
+              <p:nvPr/>
+            </p:nvSpPr>
+            <p:spPr>
+              <a:xfrm>
+                <a:off x="5333999" y="2177716"/>
+                <a:ext cx="1050757" cy="2502568"/>
+              </a:xfrm>
+              <a:prstGeom prst="rect">
+                <a:avLst/>
+              </a:prstGeom>
+              <a:noFill/>
+              <a:ln>
+                <a:noFill/>
+              </a:ln>
+            </p:spPr>
+            <p:style>
+              <a:lnRef idx="0">
+                <a:scrgbClr r="0" g="0" b="0"/>
+              </a:lnRef>
+              <a:fillRef idx="0">
+                <a:scrgbClr r="0" g="0" b="0"/>
+              </a:fillRef>
+              <a:effectRef idx="0">
+                <a:scrgbClr r="0" g="0" b="0"/>
+              </a:effectRef>
+              <a:fontRef idx="minor">
+                <a:schemeClr val="lt1"/>
+              </a:fontRef>
+            </p:style>
+            <p:txBody>
+              <a:bodyPr rtlCol="0" anchor="ctr"/>
+              <a:lstStyle/>
+              <a:p>
+                <a:pPr algn="ctr"/>
+                <a:endParaRPr lang="en-GB"/>
+              </a:p>
+            </p:txBody>
+          </p:sp>
+          <p:sp>
+            <p:nvSpPr>
+              <p:cNvPr id="22" name="TextBox 21">
+                <a:extLst>
+                  <a:ext uri="{FF2B5EF4-FFF2-40B4-BE49-F238E27FC236}">
+                    <a16:creationId xmlns:a16="http://schemas.microsoft.com/office/drawing/2014/main" id="{1FE1A0C7-456B-847A-CC98-BE791AB5FBDA}"/>
+                  </a:ext>
+                </a:extLst>
+              </p:cNvPr>
+              <p:cNvSpPr txBox="1"/>
+              <p:nvPr/>
+            </p:nvSpPr>
+            <p:spPr>
+              <a:xfrm>
+                <a:off x="5572688" y="1691391"/>
+                <a:ext cx="437147" cy="369332"/>
+              </a:xfrm>
+              <a:prstGeom prst="rect">
+                <a:avLst/>
+              </a:prstGeom>
+              <a:noFill/>
+            </p:spPr>
+            <p:txBody>
+              <a:bodyPr wrap="square" rtlCol="0">
+                <a:spAutoFit/>
+              </a:bodyPr>
+              <a:lstStyle/>
+              <a:p>
+                <a:pPr algn="ctr"/>
+                <a:r>
+                  <a:rPr lang="en-US" dirty="0"/>
+                  <a:t>64</a:t>
+                </a:r>
+                <a:endParaRPr lang="en-GB" dirty="0"/>
+              </a:p>
+            </p:txBody>
+          </p:sp>
+        </p:grpSp>
+        <p:grpSp>
+          <p:nvGrpSpPr>
+            <p:cNvPr id="28" name="Group 27">
+              <a:extLst>
+                <a:ext uri="{FF2B5EF4-FFF2-40B4-BE49-F238E27FC236}">
+                  <a16:creationId xmlns:a16="http://schemas.microsoft.com/office/drawing/2014/main" id="{963C09D6-7B79-2EDC-894C-0DD68A67B8DC}"/>
+                </a:ext>
+              </a:extLst>
+            </p:cNvPr>
+            <p:cNvGrpSpPr/>
+            <p:nvPr/>
+          </p:nvGrpSpPr>
+          <p:grpSpPr>
+            <a:xfrm>
+              <a:off x="5880897" y="1690688"/>
+              <a:ext cx="1050757" cy="2989595"/>
+              <a:chOff x="7291136" y="1690688"/>
+              <a:chExt cx="1050757" cy="2989595"/>
+            </a:xfrm>
+          </p:grpSpPr>
+          <p:sp>
+            <p:nvSpPr>
+              <p:cNvPr id="9" name="Rectangle 8">
+                <a:extLst>
+                  <a:ext uri="{FF2B5EF4-FFF2-40B4-BE49-F238E27FC236}">
+                    <a16:creationId xmlns:a16="http://schemas.microsoft.com/office/drawing/2014/main" id="{ADB25965-5B7A-D31B-B068-CFD89BD770D2}"/>
+                  </a:ext>
+                </a:extLst>
+              </p:cNvPr>
+              <p:cNvSpPr/>
+              <p:nvPr/>
+            </p:nvSpPr>
+            <p:spPr>
+              <a:xfrm>
+                <a:off x="7291136" y="2177715"/>
+                <a:ext cx="1050757" cy="2502568"/>
+              </a:xfrm>
+              <a:prstGeom prst="rect">
+                <a:avLst/>
+              </a:prstGeom>
+              <a:effectLst>
+                <a:outerShdw blurRad="63500" sx="102000" sy="102000" algn="ctr" rotWithShape="0">
+                  <a:prstClr val="black">
+                    <a:alpha val="40000"/>
+                  </a:prstClr>
+                </a:outerShdw>
+              </a:effectLst>
+            </p:spPr>
+            <p:style>
+              <a:lnRef idx="2">
+                <a:schemeClr val="accent1">
+                  <a:shade val="15000"/>
+                </a:schemeClr>
+              </a:lnRef>
+              <a:fillRef idx="1">
+                <a:schemeClr val="accent1"/>
+              </a:fillRef>
+              <a:effectRef idx="0">
+                <a:schemeClr val="accent1"/>
+              </a:effectRef>
+              <a:fontRef idx="minor">
+                <a:schemeClr val="lt1"/>
+              </a:fontRef>
+            </p:style>
+            <p:txBody>
+              <a:bodyPr rtlCol="0" anchor="ctr"/>
+              <a:lstStyle/>
+              <a:p>
+                <a:pPr algn="ctr"/>
+                <a:endParaRPr lang="en-GB" dirty="0"/>
+              </a:p>
+            </p:txBody>
+          </p:sp>
+          <p:sp>
+            <p:nvSpPr>
+              <p:cNvPr id="23" name="TextBox 22">
+                <a:extLst>
+                  <a:ext uri="{FF2B5EF4-FFF2-40B4-BE49-F238E27FC236}">
+                    <a16:creationId xmlns:a16="http://schemas.microsoft.com/office/drawing/2014/main" id="{F41B708B-3EB1-84B3-CCA7-DF33128B16C0}"/>
+                  </a:ext>
+                </a:extLst>
+              </p:cNvPr>
+              <p:cNvSpPr txBox="1"/>
+              <p:nvPr/>
+            </p:nvSpPr>
+            <p:spPr>
+              <a:xfrm>
+                <a:off x="7634041" y="1690688"/>
+                <a:ext cx="437147" cy="369332"/>
+              </a:xfrm>
+              <a:prstGeom prst="rect">
+                <a:avLst/>
+              </a:prstGeom>
+              <a:noFill/>
+            </p:spPr>
+            <p:txBody>
+              <a:bodyPr wrap="square" rtlCol="0">
+                <a:spAutoFit/>
+              </a:bodyPr>
+              <a:lstStyle/>
+              <a:p>
+                <a:pPr algn="ctr"/>
+                <a:r>
+                  <a:rPr lang="en-US" dirty="0"/>
+                  <a:t>32</a:t>
+                </a:r>
+                <a:endParaRPr lang="en-GB" dirty="0"/>
+              </a:p>
+            </p:txBody>
+          </p:sp>
+        </p:grpSp>
+        <p:grpSp>
+          <p:nvGrpSpPr>
+            <p:cNvPr id="31" name="Group 30">
+              <a:extLst>
+                <a:ext uri="{FF2B5EF4-FFF2-40B4-BE49-F238E27FC236}">
+                  <a16:creationId xmlns:a16="http://schemas.microsoft.com/office/drawing/2014/main" id="{FF35CA1E-719D-2CF3-9AA9-FC73377CE196}"/>
+                </a:ext>
+              </a:extLst>
+            </p:cNvPr>
+            <p:cNvGrpSpPr/>
+            <p:nvPr/>
+          </p:nvGrpSpPr>
+          <p:grpSpPr>
+            <a:xfrm>
+              <a:off x="7059637" y="2374647"/>
+              <a:ext cx="866273" cy="1648872"/>
+              <a:chOff x="1372715" y="2357642"/>
+              <a:chExt cx="866273" cy="1648872"/>
+            </a:xfrm>
+          </p:grpSpPr>
+          <p:sp>
+            <p:nvSpPr>
+              <p:cNvPr id="32" name="Rectangle 31">
+                <a:extLst>
+                  <a:ext uri="{FF2B5EF4-FFF2-40B4-BE49-F238E27FC236}">
+                    <a16:creationId xmlns:a16="http://schemas.microsoft.com/office/drawing/2014/main" id="{1637D48E-57A3-4816-C433-3DA9E257891A}"/>
+                  </a:ext>
+                </a:extLst>
+              </p:cNvPr>
+              <p:cNvSpPr/>
+              <p:nvPr/>
+            </p:nvSpPr>
+            <p:spPr>
+              <a:xfrm>
+                <a:off x="1372715" y="2851483"/>
+                <a:ext cx="866273" cy="1155031"/>
+              </a:xfrm>
+              <a:prstGeom prst="rect">
+                <a:avLst/>
+              </a:prstGeom>
+              <a:effectLst>
+                <a:outerShdw blurRad="63500" sx="102000" sy="102000" algn="ctr" rotWithShape="0">
+                  <a:prstClr val="black">
+                    <a:alpha val="40000"/>
+                  </a:prstClr>
+                </a:outerShdw>
+              </a:effectLst>
+            </p:spPr>
+            <p:style>
+              <a:lnRef idx="2">
+                <a:schemeClr val="accent1">
+                  <a:shade val="15000"/>
+                </a:schemeClr>
+              </a:lnRef>
+              <a:fillRef idx="1">
+                <a:schemeClr val="accent1"/>
+              </a:fillRef>
+              <a:effectRef idx="0">
+                <a:schemeClr val="accent1"/>
+              </a:effectRef>
+              <a:fontRef idx="minor">
+                <a:schemeClr val="lt1"/>
+              </a:fontRef>
+            </p:style>
+            <p:txBody>
+              <a:bodyPr rtlCol="0" anchor="ctr"/>
+              <a:lstStyle/>
+              <a:p>
+                <a:pPr algn="ctr"/>
+                <a:endParaRPr lang="en-GB" dirty="0"/>
+              </a:p>
+            </p:txBody>
+          </p:sp>
+          <p:sp>
+            <p:nvSpPr>
+              <p:cNvPr id="33" name="TextBox 32">
+                <a:extLst>
+                  <a:ext uri="{FF2B5EF4-FFF2-40B4-BE49-F238E27FC236}">
+                    <a16:creationId xmlns:a16="http://schemas.microsoft.com/office/drawing/2014/main" id="{88ED33CF-85BC-3F7B-B58E-D90BFC0FAF8D}"/>
+                  </a:ext>
+                </a:extLst>
+              </p:cNvPr>
+              <p:cNvSpPr txBox="1"/>
+              <p:nvPr/>
+            </p:nvSpPr>
+            <p:spPr>
+              <a:xfrm>
+                <a:off x="1587276" y="2357642"/>
+                <a:ext cx="437147" cy="369332"/>
+              </a:xfrm>
+              <a:prstGeom prst="rect">
+                <a:avLst/>
+              </a:prstGeom>
+              <a:noFill/>
+            </p:spPr>
+            <p:txBody>
+              <a:bodyPr wrap="square" rtlCol="0">
+                <a:spAutoFit/>
+              </a:bodyPr>
+              <a:lstStyle/>
+              <a:p>
+                <a:pPr algn="ctr"/>
+                <a:r>
+                  <a:rPr lang="en-US" dirty="0"/>
+                  <a:t>1</a:t>
+                </a:r>
+                <a:endParaRPr lang="en-GB" dirty="0"/>
+              </a:p>
+            </p:txBody>
+          </p:sp>
+        </p:grpSp>
+      </p:grpSp>
+      <p:sp>
+        <p:nvSpPr>
+          <p:cNvPr id="35" name="Rectangle 34">
+            <a:extLst>
+              <a:ext uri="{FF2B5EF4-FFF2-40B4-BE49-F238E27FC236}">
+                <a16:creationId xmlns:a16="http://schemas.microsoft.com/office/drawing/2014/main" id="{15ADB37F-5D05-936D-6838-6E0BFBDA6C26}"/>
+              </a:ext>
+            </a:extLst>
+          </p:cNvPr>
+          <p:cNvSpPr/>
+          <p:nvPr/>
+        </p:nvSpPr>
+        <p:spPr>
+          <a:xfrm>
+            <a:off x="196375" y="2953463"/>
+            <a:ext cx="2060293" cy="1792313"/>
+          </a:xfrm>
+          <a:prstGeom prst="rect">
+            <a:avLst/>
+          </a:prstGeom>
+          <a:noFill/>
+          <a:ln>
+            <a:noFill/>
+          </a:ln>
+        </p:spPr>
+        <p:style>
+          <a:lnRef idx="0">
+            <a:scrgbClr r="0" g="0" b="0"/>
+          </a:lnRef>
+          <a:fillRef idx="0">
+            <a:scrgbClr r="0" g="0" b="0"/>
+          </a:fillRef>
+          <a:effectRef idx="0">
+            <a:scrgbClr r="0" g="0" b="0"/>
+          </a:effectRef>
+          <a:fontRef idx="minor">
+            <a:schemeClr val="dk1"/>
+          </a:fontRef>
+        </p:style>
+        <p:txBody>
+          <a:bodyPr rtlCol="0" anchor="ctr"/>
+          <a:lstStyle/>
+          <a:p>
+            <a:pPr algn="ctr">
+              <a:lnSpc>
+                <a:spcPct val="150000"/>
+              </a:lnSpc>
+            </a:pPr>
+            <a:r>
+              <a:rPr lang="en-GB" dirty="0"/>
+              <a:t>Temperature</a:t>
+            </a:r>
+          </a:p>
+          <a:p>
+            <a:pPr algn="ctr">
+              <a:lnSpc>
+                <a:spcPct val="150000"/>
+              </a:lnSpc>
+            </a:pPr>
+            <a:r>
+              <a:rPr lang="en-GB" dirty="0"/>
+              <a:t>School Holidays</a:t>
+            </a:r>
+          </a:p>
+          <a:p>
+            <a:pPr algn="ctr">
+              <a:lnSpc>
+                <a:spcPct val="150000"/>
+              </a:lnSpc>
+            </a:pPr>
+            <a:r>
+              <a:rPr lang="en-GB" dirty="0"/>
+              <a:t>Weekday</a:t>
+            </a:r>
+          </a:p>
+          <a:p>
+            <a:pPr algn="ctr">
+              <a:lnSpc>
+                <a:spcPct val="150000"/>
+              </a:lnSpc>
+              <a:buNone/>
+            </a:pPr>
+            <a:r>
+              <a:rPr lang="en-GB" dirty="0"/>
+              <a:t>Days till NYE</a:t>
+            </a:r>
+          </a:p>
+        </p:txBody>
+      </p:sp>
+      <p:sp>
+        <p:nvSpPr>
+          <p:cNvPr id="37" name="TextBox 36">
+            <a:extLst>
+              <a:ext uri="{FF2B5EF4-FFF2-40B4-BE49-F238E27FC236}">
+                <a16:creationId xmlns:a16="http://schemas.microsoft.com/office/drawing/2014/main" id="{956498C1-B726-968C-45CE-1C366351198D}"/>
+              </a:ext>
+            </a:extLst>
+          </p:cNvPr>
+          <p:cNvSpPr txBox="1"/>
+          <p:nvPr/>
+        </p:nvSpPr>
+        <p:spPr>
+          <a:xfrm>
+            <a:off x="196374" y="2515034"/>
+            <a:ext cx="2060293" cy="369332"/>
+          </a:xfrm>
+          <a:prstGeom prst="rect">
+            <a:avLst/>
+          </a:prstGeom>
+          <a:noFill/>
+        </p:spPr>
+        <p:txBody>
+          <a:bodyPr wrap="square">
+            <a:spAutoFit/>
+          </a:bodyPr>
+          <a:lstStyle/>
+          <a:p>
+            <a:pPr algn="ctr"/>
+            <a:r>
+              <a:rPr lang="en-US" b="1" dirty="0"/>
+              <a:t>Features</a:t>
+            </a:r>
+            <a:r>
+              <a:rPr lang="en-GB" b="1" dirty="0"/>
+              <a:t>:</a:t>
+            </a:r>
+          </a:p>
+        </p:txBody>
+      </p:sp>
+      <p:cxnSp>
+        <p:nvCxnSpPr>
+          <p:cNvPr id="39" name="Straight Arrow Connector 38">
+            <a:extLst>
+              <a:ext uri="{FF2B5EF4-FFF2-40B4-BE49-F238E27FC236}">
+                <a16:creationId xmlns:a16="http://schemas.microsoft.com/office/drawing/2014/main" id="{3C525AE7-D423-56C9-0A92-A5FFF3B48F4F}"/>
+              </a:ext>
+            </a:extLst>
+          </p:cNvPr>
+          <p:cNvCxnSpPr>
+            <a:cxnSpLocks/>
+          </p:cNvCxnSpPr>
+          <p:nvPr/>
+        </p:nvCxnSpPr>
+        <p:spPr>
+          <a:xfrm>
+            <a:off x="2453833" y="3507912"/>
+            <a:ext cx="382601" cy="0"/>
+          </a:xfrm>
+          <a:prstGeom prst="straightConnector1">
+            <a:avLst/>
+          </a:prstGeom>
+          <a:ln>
+            <a:tailEnd type="triangle"/>
+          </a:ln>
+        </p:spPr>
+        <p:style>
+          <a:lnRef idx="2">
+            <a:schemeClr val="accent1"/>
+          </a:lnRef>
+          <a:fillRef idx="0">
+            <a:schemeClr val="accent1"/>
+          </a:fillRef>
+          <a:effectRef idx="1">
+            <a:schemeClr val="accent1"/>
+          </a:effectRef>
+          <a:fontRef idx="minor">
+            <a:schemeClr val="tx1"/>
+          </a:fontRef>
+        </p:style>
+      </p:cxnSp>
+      <p:sp>
+        <p:nvSpPr>
+          <p:cNvPr id="41" name="Rectangle 40">
+            <a:extLst>
+              <a:ext uri="{FF2B5EF4-FFF2-40B4-BE49-F238E27FC236}">
+                <a16:creationId xmlns:a16="http://schemas.microsoft.com/office/drawing/2014/main" id="{9E116F47-98E5-2396-BCC3-0246C5EEB45D}"/>
+              </a:ext>
+            </a:extLst>
+          </p:cNvPr>
+          <p:cNvSpPr/>
+          <p:nvPr/>
+        </p:nvSpPr>
+        <p:spPr>
+          <a:xfrm>
+            <a:off x="9551941" y="2047652"/>
+            <a:ext cx="2640059" cy="1792313"/>
+          </a:xfrm>
+          <a:prstGeom prst="rect">
+            <a:avLst/>
+          </a:prstGeom>
+          <a:noFill/>
+          <a:ln>
+            <a:noFill/>
+          </a:ln>
+        </p:spPr>
+        <p:style>
+          <a:lnRef idx="0">
+            <a:scrgbClr r="0" g="0" b="0"/>
+          </a:lnRef>
+          <a:fillRef idx="0">
+            <a:scrgbClr r="0" g="0" b="0"/>
+          </a:fillRef>
+          <a:effectRef idx="0">
+            <a:scrgbClr r="0" g="0" b="0"/>
+          </a:effectRef>
+          <a:fontRef idx="minor">
+            <a:schemeClr val="dk1"/>
+          </a:fontRef>
+        </p:style>
+        <p:txBody>
+          <a:bodyPr rtlCol="0" anchor="ctr"/>
+          <a:lstStyle/>
+          <a:p>
+            <a:pPr algn="ctr">
+              <a:lnSpc>
+                <a:spcPct val="150000"/>
+              </a:lnSpc>
+            </a:pPr>
+            <a:r>
+              <a:rPr lang="en-GB" b="1" dirty="0"/>
+              <a:t>MAPE</a:t>
+            </a:r>
+          </a:p>
+          <a:p>
+            <a:pPr>
+              <a:lnSpc>
+                <a:spcPct val="150000"/>
+              </a:lnSpc>
+            </a:pPr>
+            <a:r>
+              <a:rPr lang="en-GB" dirty="0"/>
+              <a:t>Validation Data :</a:t>
+            </a:r>
+          </a:p>
+          <a:p>
+            <a:pPr>
+              <a:lnSpc>
+                <a:spcPct val="150000"/>
+              </a:lnSpc>
+            </a:pPr>
+            <a:r>
+              <a:rPr lang="en-GB" dirty="0"/>
+              <a:t>Train + Validation Data :</a:t>
+            </a:r>
+          </a:p>
+        </p:txBody>
+      </p:sp>
+      <p:sp>
+        <p:nvSpPr>
+          <p:cNvPr id="4" name="TextBox 3">
+            <a:extLst>
+              <a:ext uri="{FF2B5EF4-FFF2-40B4-BE49-F238E27FC236}">
+                <a16:creationId xmlns:a16="http://schemas.microsoft.com/office/drawing/2014/main" id="{AECE0876-EABA-CF74-7594-600CE0B3BF86}"/>
+              </a:ext>
+            </a:extLst>
+          </p:cNvPr>
+          <p:cNvSpPr txBox="1"/>
+          <p:nvPr/>
+        </p:nvSpPr>
+        <p:spPr>
+          <a:xfrm>
+            <a:off x="3778474" y="6538912"/>
+            <a:ext cx="4635051" cy="276999"/>
+          </a:xfrm>
+          <a:prstGeom prst="rect">
+            <a:avLst/>
+          </a:prstGeom>
+          <a:noFill/>
+        </p:spPr>
+        <p:txBody>
+          <a:bodyPr wrap="none" rtlCol="0">
+            <a:spAutoFit/>
+          </a:bodyPr>
+          <a:lstStyle/>
+          <a:p>
+            <a:r>
+              <a:rPr lang="en-GB" sz="1200" dirty="0">
+                <a:solidFill>
+                  <a:schemeClr val="bg1">
+                    <a:lumMod val="75000"/>
+                  </a:schemeClr>
+                </a:solidFill>
+              </a:rPr>
+              <a:t>Dataset Characteristics </a:t>
+            </a:r>
+            <a:r>
+              <a:rPr lang="en-GB" sz="1200" dirty="0">
+                <a:solidFill>
+                  <a:schemeClr val="bg1">
+                    <a:lumMod val="75000"/>
+                  </a:schemeClr>
+                </a:solidFill>
+                <a:latin typeface="Calibri" panose="020F0502020204030204" pitchFamily="34" charset="0"/>
+                <a:ea typeface="Calibri" panose="020F0502020204030204" pitchFamily="34" charset="0"/>
+                <a:cs typeface="Calibri" panose="020F0502020204030204" pitchFamily="34" charset="0"/>
+              </a:rPr>
+              <a:t>– Baseline Model – </a:t>
+            </a:r>
+            <a:r>
+              <a:rPr lang="en-GB" sz="1200" b="1" dirty="0">
+                <a:latin typeface="Calibri" panose="020F0502020204030204" pitchFamily="34" charset="0"/>
+                <a:ea typeface="Calibri" panose="020F0502020204030204" pitchFamily="34" charset="0"/>
+                <a:cs typeface="Calibri" panose="020F0502020204030204" pitchFamily="34" charset="0"/>
+              </a:rPr>
+              <a:t>Neural Net </a:t>
+            </a:r>
+            <a:r>
+              <a:rPr lang="en-GB" sz="1200" dirty="0">
+                <a:solidFill>
+                  <a:schemeClr val="bg1">
+                    <a:lumMod val="75000"/>
+                  </a:schemeClr>
+                </a:solidFill>
+                <a:latin typeface="Calibri" panose="020F0502020204030204" pitchFamily="34" charset="0"/>
+                <a:ea typeface="Calibri" panose="020F0502020204030204" pitchFamily="34" charset="0"/>
+                <a:cs typeface="Calibri" panose="020F0502020204030204" pitchFamily="34" charset="0"/>
+              </a:rPr>
+              <a:t>– Challenges </a:t>
+            </a:r>
+            <a:endParaRPr lang="de-DE" sz="1200" dirty="0">
+              <a:solidFill>
+                <a:schemeClr val="bg1">
+                  <a:lumMod val="75000"/>
+                </a:schemeClr>
+              </a:solidFill>
+            </a:endParaRPr>
+          </a:p>
+        </p:txBody>
+      </p:sp>
+    </p:spTree>
+    <p:extLst>
+      <p:ext uri="{BB962C8B-B14F-4D97-AF65-F5344CB8AC3E}">
+        <p14:creationId xmlns:p14="http://schemas.microsoft.com/office/powerpoint/2010/main" val="4272230859"/>
       </p:ext>
     </p:extLst>
   </p:cSld>
@@ -16410,61 +19725,6 @@
       </p:sp>
       <p:sp>
         <p:nvSpPr>
-          <p:cNvPr id="2" name="TextBox 4">
-            <a:extLst>
-              <a:ext uri="{FF2B5EF4-FFF2-40B4-BE49-F238E27FC236}">
-                <a16:creationId xmlns:a16="http://schemas.microsoft.com/office/drawing/2014/main" id="{A07E9ECC-E897-24E9-D3E5-620530AFEEC3}"/>
-              </a:ext>
-            </a:extLst>
-          </p:cNvPr>
-          <p:cNvSpPr txBox="1"/>
-          <p:nvPr/>
-        </p:nvSpPr>
-        <p:spPr>
-          <a:xfrm>
-            <a:off x="3524719" y="6581001"/>
-            <a:ext cx="5230663" cy="276999"/>
-          </a:xfrm>
-          <a:prstGeom prst="rect">
-            <a:avLst/>
-          </a:prstGeom>
-          <a:noFill/>
-        </p:spPr>
-        <p:txBody>
-          <a:bodyPr wrap="none" rtlCol="0">
-            <a:spAutoFit/>
-          </a:bodyPr>
-          <a:lstStyle/>
-          <a:p>
-            <a:r>
-              <a:rPr lang="en-GB" sz="1200" b="1" dirty="0"/>
-              <a:t>Dataset Characteristics </a:t>
-            </a:r>
-            <a:r>
-              <a:rPr lang="en-GB" sz="1200" dirty="0">
-                <a:solidFill>
-                  <a:schemeClr val="bg1">
-                    <a:lumMod val="75000"/>
-                  </a:schemeClr>
-                </a:solidFill>
-                <a:latin typeface="Calibri" panose="020F0502020204030204" pitchFamily="34" charset="0"/>
-                <a:ea typeface="Calibri" panose="020F0502020204030204" pitchFamily="34" charset="0"/>
-                <a:cs typeface="Calibri" panose="020F0502020204030204" pitchFamily="34" charset="0"/>
-              </a:rPr>
-              <a:t>– Baseline Model – Neural Net – Results – Challenges </a:t>
-            </a:r>
-            <a:endParaRPr lang="de-DE" sz="1200" dirty="0">
-              <a:solidFill>
-                <a:schemeClr val="bg1">
-                  <a:lumMod val="75000"/>
-                </a:schemeClr>
-              </a:solidFill>
-            </a:endParaRPr>
-          </a:p>
-        </p:txBody>
-      </p:sp>
-      <p:sp>
-        <p:nvSpPr>
           <p:cNvPr id="27" name="TextBox 26">
             <a:extLst>
               <a:ext uri="{FF2B5EF4-FFF2-40B4-BE49-F238E27FC236}">
@@ -16895,6 +20155,89 @@
           </a:p>
           <a:p>
             <a:endParaRPr lang="en-GB" dirty="0"/>
+          </a:p>
+        </p:txBody>
+      </p:sp>
+      <p:sp>
+        <p:nvSpPr>
+          <p:cNvPr id="3" name="TextBox 2">
+            <a:extLst>
+              <a:ext uri="{FF2B5EF4-FFF2-40B4-BE49-F238E27FC236}">
+                <a16:creationId xmlns:a16="http://schemas.microsoft.com/office/drawing/2014/main" id="{25EBCD2A-18DC-3E97-67D9-91008E963526}"/>
+              </a:ext>
+            </a:extLst>
+          </p:cNvPr>
+          <p:cNvSpPr txBox="1"/>
+          <p:nvPr/>
+        </p:nvSpPr>
+        <p:spPr>
+          <a:xfrm>
+            <a:off x="3778474" y="6538912"/>
+            <a:ext cx="4440062" cy="276999"/>
+          </a:xfrm>
+          <a:prstGeom prst="rect">
+            <a:avLst/>
+          </a:prstGeom>
+          <a:noFill/>
+        </p:spPr>
+        <p:txBody>
+          <a:bodyPr wrap="none" rtlCol="0">
+            <a:spAutoFit/>
+          </a:bodyPr>
+          <a:lstStyle/>
+          <a:p>
+            <a:r>
+              <a:rPr lang="en-GB" sz="1200" b="1" dirty="0">
+                <a:latin typeface="Calibri" panose="020F0502020204030204" pitchFamily="34" charset="0"/>
+                <a:cs typeface="Calibri" panose="020F0502020204030204" pitchFamily="34" charset="0"/>
+              </a:rPr>
+              <a:t>Dataset Characteristics </a:t>
+            </a:r>
+            <a:r>
+              <a:rPr lang="en-GB" sz="1200" dirty="0">
+                <a:solidFill>
+                  <a:schemeClr val="bg1">
+                    <a:lumMod val="75000"/>
+                  </a:schemeClr>
+                </a:solidFill>
+                <a:latin typeface="Calibri" panose="020F0502020204030204" pitchFamily="34" charset="0"/>
+                <a:ea typeface="Calibri" panose="020F0502020204030204" pitchFamily="34" charset="0"/>
+                <a:cs typeface="Calibri" panose="020F0502020204030204" pitchFamily="34" charset="0"/>
+              </a:rPr>
+              <a:t>– Baseline Model </a:t>
+            </a:r>
+            <a:r>
+              <a:rPr lang="en-GB" sz="1200" dirty="0">
+                <a:solidFill>
+                  <a:schemeClr val="bg1">
+                    <a:lumMod val="75000"/>
+                  </a:schemeClr>
+                </a:solidFill>
+                <a:latin typeface="Calibri" panose="020F0502020204030204" pitchFamily="34" charset="0"/>
+                <a:cs typeface="Calibri" panose="020F0502020204030204" pitchFamily="34" charset="0"/>
+              </a:rPr>
+              <a:t>– Neural Net </a:t>
+            </a:r>
+            <a:r>
+              <a:rPr lang="en-GB" sz="1200" dirty="0">
+                <a:solidFill>
+                  <a:schemeClr val="bg1">
+                    <a:lumMod val="75000"/>
+                  </a:schemeClr>
+                </a:solidFill>
+                <a:latin typeface="Calibri" panose="020F0502020204030204" pitchFamily="34" charset="0"/>
+                <a:ea typeface="Calibri" panose="020F0502020204030204" pitchFamily="34" charset="0"/>
+                <a:cs typeface="Calibri" panose="020F0502020204030204" pitchFamily="34" charset="0"/>
+              </a:rPr>
+              <a:t>– Challenges </a:t>
+            </a:r>
+            <a:endParaRPr lang="de-DE" sz="1200" dirty="0">
+              <a:solidFill>
+                <a:schemeClr val="bg1">
+                  <a:lumMod val="75000"/>
+                </a:schemeClr>
+              </a:solidFill>
+            </a:endParaRPr>
           </a:p>
         </p:txBody>
       </p:sp>
@@ -19302,9 +22645,10 @@
           <a:lstStyle/>
           <a:p>
             <a:r>
-              <a:rPr lang="en-GB" dirty="0"/>
-              <a:t>2 Bar charts for 1 variable for each category</a:t>
-            </a:r>
+              <a:rPr lang="en-US" dirty="0"/>
+              <a:t>Additional variables</a:t>
+            </a:r>
+            <a:endParaRPr lang="en-GB" dirty="0"/>
           </a:p>
         </p:txBody>
       </p:sp>
@@ -19368,10 +22712,10 @@
       </p:sp>
       <p:sp>
         <p:nvSpPr>
-          <p:cNvPr id="4" name="TextBox 4">
+          <p:cNvPr id="7" name="TextBox 6">
             <a:extLst>
               <a:ext uri="{FF2B5EF4-FFF2-40B4-BE49-F238E27FC236}">
-                <a16:creationId xmlns:a16="http://schemas.microsoft.com/office/drawing/2014/main" id="{AF291078-0E20-271B-32A3-CC741D79C1D3}"/>
+                <a16:creationId xmlns:a16="http://schemas.microsoft.com/office/drawing/2014/main" id="{DC299683-6A2E-9766-C092-9F38A873A9E3}"/>
               </a:ext>
             </a:extLst>
           </p:cNvPr>
@@ -19380,8 +22724,8 @@
         </p:nvSpPr>
         <p:spPr>
           <a:xfrm>
-            <a:off x="3524719" y="6581001"/>
-            <a:ext cx="5230663" cy="276999"/>
+            <a:off x="3778474" y="6538912"/>
+            <a:ext cx="4440062" cy="276999"/>
           </a:xfrm>
           <a:prstGeom prst="rect">
             <a:avLst/>
@@ -19395,7 +22739,10 @@
           <a:lstStyle/>
           <a:p>
             <a:r>
-              <a:rPr lang="en-GB" sz="1200" b="1" dirty="0"/>
+              <a:rPr lang="en-GB" sz="1200" b="1" dirty="0">
+                <a:latin typeface="Calibri" panose="020F0502020204030204" pitchFamily="34" charset="0"/>
+                <a:cs typeface="Calibri" panose="020F0502020204030204" pitchFamily="34" charset="0"/>
+              </a:rPr>
               <a:t>Dataset Characteristics </a:t>
             </a:r>
             <a:r>
@@ -19409,7 +22756,32 @@
                 <a:ea typeface="Calibri" panose="020F0502020204030204" pitchFamily="34" charset="0"/>
                 <a:cs typeface="Calibri" panose="020F0502020204030204" pitchFamily="34" charset="0"/>
               </a:rPr>
-              <a:t>– Baseline Model – Neural Net – Results – Challenges </a:t>
+              <a:t>– Baseline Model </a:t>
+            </a:r>
+            <a:r>
+              <a:rPr lang="en-GB" sz="1200" dirty="0">
+                <a:solidFill>
+                  <a:schemeClr val="bg1">
+                    <a:lumMod val="75000"/>
+                  </a:schemeClr>
+                </a:solidFill>
+                <a:latin typeface="Calibri" panose="020F0502020204030204" pitchFamily="34" charset="0"/>
+                <a:cs typeface="Calibri" panose="020F0502020204030204" pitchFamily="34" charset="0"/>
+              </a:rPr>
+              <a:t>– Neural Net </a:t>
+            </a:r>
+            <a:r>
+              <a:rPr lang="en-GB" sz="1200" dirty="0">
+                <a:solidFill>
+                  <a:schemeClr val="bg1">
+                    <a:lumMod val="75000"/>
+                  </a:schemeClr>
+                </a:solidFill>
+                <a:latin typeface="Calibri" panose="020F0502020204030204" pitchFamily="34" charset="0"/>
+                <a:ea typeface="Calibri" panose="020F0502020204030204" pitchFamily="34" charset="0"/>
+                <a:cs typeface="Calibri" panose="020F0502020204030204" pitchFamily="34" charset="0"/>
+              </a:rPr>
+              <a:t>– Challenges </a:t>
             </a:r>
             <a:endParaRPr lang="de-DE" sz="1200" dirty="0">
               <a:solidFill>
@@ -19421,6 +22793,66 @@
           </a:p>
         </p:txBody>
       </p:sp>
+      <p:pic>
+        <p:nvPicPr>
+          <p:cNvPr id="9" name="Picture 8">
+            <a:extLst>
+              <a:ext uri="{FF2B5EF4-FFF2-40B4-BE49-F238E27FC236}">
+                <a16:creationId xmlns:a16="http://schemas.microsoft.com/office/drawing/2014/main" id="{624469D7-0090-1FCF-6B44-1C04D1D9FB7C}"/>
+              </a:ext>
+            </a:extLst>
+          </p:cNvPr>
+          <p:cNvPicPr>
+            <a:picLocks noChangeAspect="1"/>
+          </p:cNvPicPr>
+          <p:nvPr/>
+        </p:nvPicPr>
+        <p:blipFill>
+          <a:blip r:embed="rId3"/>
+          <a:stretch>
+            <a:fillRect/>
+          </a:stretch>
+        </p:blipFill>
+        <p:spPr>
+          <a:xfrm>
+            <a:off x="6333274" y="2714324"/>
+            <a:ext cx="5229022" cy="3119437"/>
+          </a:xfrm>
+          <a:prstGeom prst="rect">
+            <a:avLst/>
+          </a:prstGeom>
+        </p:spPr>
+      </p:pic>
+      <p:pic>
+        <p:nvPicPr>
+          <p:cNvPr id="17" name="Picture 16">
+            <a:extLst>
+              <a:ext uri="{FF2B5EF4-FFF2-40B4-BE49-F238E27FC236}">
+                <a16:creationId xmlns:a16="http://schemas.microsoft.com/office/drawing/2014/main" id="{3DD2F842-E89B-1B52-F36F-3706BB779247}"/>
+              </a:ext>
+            </a:extLst>
+          </p:cNvPr>
+          <p:cNvPicPr>
+            <a:picLocks noChangeAspect="1"/>
+          </p:cNvPicPr>
+          <p:nvPr/>
+        </p:nvPicPr>
+        <p:blipFill>
+          <a:blip r:embed="rId4"/>
+          <a:stretch>
+            <a:fillRect/>
+          </a:stretch>
+        </p:blipFill>
+        <p:spPr>
+          <a:xfrm>
+            <a:off x="706877" y="2404761"/>
+            <a:ext cx="5173884" cy="3429000"/>
+          </a:xfrm>
+          <a:prstGeom prst="rect">
+            <a:avLst/>
+          </a:prstGeom>
+        </p:spPr>
+      </p:pic>
     </p:spTree>
     <p:extLst>
       <p:ext uri="{BB962C8B-B14F-4D97-AF65-F5344CB8AC3E}">
@@ -19435,6 +22867,271 @@
 </file>
 
 <file path=ppt/slides/slide5.xml><?xml version="1.0" encoding="utf-8"?>
+<p:sld xmlns:a="http://schemas.openxmlformats.org/drawingml/2006/main" xmlns:r="http://schemas.openxmlformats.org/officeDocument/2006/relationships" xmlns:p="http://schemas.openxmlformats.org/presentationml/2006/main">
+  <p:cSld>
+    <p:spTree>
+      <p:nvGrpSpPr>
+        <p:cNvPr id="1" name="">
+          <a:extLst>
+            <a:ext uri="{FF2B5EF4-FFF2-40B4-BE49-F238E27FC236}">
+              <a16:creationId xmlns:a16="http://schemas.microsoft.com/office/drawing/2014/main" id="{49BE7B0D-EF2E-FEDD-F1E2-6440161D38AE}"/>
+            </a:ext>
+          </a:extLst>
+        </p:cNvPr>
+        <p:cNvGrpSpPr/>
+        <p:nvPr/>
+      </p:nvGrpSpPr>
+      <p:grpSpPr>
+        <a:xfrm>
+          <a:off x="0" y="0"/>
+          <a:ext cx="0" cy="0"/>
+          <a:chOff x="0" y="0"/>
+          <a:chExt cx="0" cy="0"/>
+        </a:xfrm>
+      </p:grpSpPr>
+      <p:sp>
+        <p:nvSpPr>
+          <p:cNvPr id="2" name="Title 1">
+            <a:extLst>
+              <a:ext uri="{FF2B5EF4-FFF2-40B4-BE49-F238E27FC236}">
+                <a16:creationId xmlns:a16="http://schemas.microsoft.com/office/drawing/2014/main" id="{D4B3F2A1-9367-240D-9693-174005C6BB3B}"/>
+              </a:ext>
+            </a:extLst>
+          </p:cNvPr>
+          <p:cNvSpPr>
+            <a:spLocks noGrp="1"/>
+          </p:cNvSpPr>
+          <p:nvPr>
+            <p:ph type="title"/>
+          </p:nvPr>
+        </p:nvSpPr>
+        <p:spPr/>
+        <p:txBody>
+          <a:bodyPr/>
+          <a:lstStyle/>
+          <a:p>
+            <a:r>
+              <a:rPr lang="en-GB" dirty="0"/>
+              <a:t>2 Bar charts for 1 variable for each category</a:t>
+            </a:r>
+          </a:p>
+        </p:txBody>
+      </p:sp>
+      <p:sp>
+        <p:nvSpPr>
+          <p:cNvPr id="3" name="Content Placeholder 2">
+            <a:extLst>
+              <a:ext uri="{FF2B5EF4-FFF2-40B4-BE49-F238E27FC236}">
+                <a16:creationId xmlns:a16="http://schemas.microsoft.com/office/drawing/2014/main" id="{7566EF36-5AB5-BD61-139A-5291CC7A308A}"/>
+              </a:ext>
+            </a:extLst>
+          </p:cNvPr>
+          <p:cNvSpPr>
+            <a:spLocks noGrp="1"/>
+          </p:cNvSpPr>
+          <p:nvPr>
+            <p:ph sz="half" idx="1"/>
+          </p:nvPr>
+        </p:nvSpPr>
+        <p:spPr/>
+        <p:txBody>
+          <a:bodyPr/>
+          <a:lstStyle/>
+          <a:p>
+            <a:r>
+              <a:rPr lang="en-US" dirty="0"/>
+              <a:t>Working on it</a:t>
+            </a:r>
+            <a:endParaRPr lang="en-GB" dirty="0"/>
+          </a:p>
+        </p:txBody>
+      </p:sp>
+      <p:sp>
+        <p:nvSpPr>
+          <p:cNvPr id="5" name="Slide Number Placeholder 4">
+            <a:extLst>
+              <a:ext uri="{FF2B5EF4-FFF2-40B4-BE49-F238E27FC236}">
+                <a16:creationId xmlns:a16="http://schemas.microsoft.com/office/drawing/2014/main" id="{AFADF633-6812-8C55-E3F4-025DC1E195A7}"/>
+              </a:ext>
+            </a:extLst>
+          </p:cNvPr>
+          <p:cNvSpPr>
+            <a:spLocks noGrp="1"/>
+          </p:cNvSpPr>
+          <p:nvPr>
+            <p:ph type="sldNum" sz="quarter" idx="12"/>
+          </p:nvPr>
+        </p:nvSpPr>
+        <p:spPr/>
+        <p:txBody>
+          <a:bodyPr/>
+          <a:lstStyle/>
+          <a:p>
+            <a:fld id="{FEE63D0E-FFEF-43D1-BE35-64C33AF422FD}" type="slidenum">
+              <a:rPr lang="de-DE" smtClean="0"/>
+              <a:t>5</a:t>
+            </a:fld>
+            <a:endParaRPr lang="de-DE"/>
+          </a:p>
+        </p:txBody>
+      </p:sp>
+      <p:sp>
+        <p:nvSpPr>
+          <p:cNvPr id="7" name="TextBox 6">
+            <a:extLst>
+              <a:ext uri="{FF2B5EF4-FFF2-40B4-BE49-F238E27FC236}">
+                <a16:creationId xmlns:a16="http://schemas.microsoft.com/office/drawing/2014/main" id="{CE5868E9-8533-9A2A-29CA-130A8F95F610}"/>
+              </a:ext>
+            </a:extLst>
+          </p:cNvPr>
+          <p:cNvSpPr txBox="1"/>
+          <p:nvPr/>
+        </p:nvSpPr>
+        <p:spPr>
+          <a:xfrm>
+            <a:off x="3778474" y="6538912"/>
+            <a:ext cx="4440062" cy="276999"/>
+          </a:xfrm>
+          <a:prstGeom prst="rect">
+            <a:avLst/>
+          </a:prstGeom>
+          <a:noFill/>
+        </p:spPr>
+        <p:txBody>
+          <a:bodyPr wrap="none" rtlCol="0">
+            <a:spAutoFit/>
+          </a:bodyPr>
+          <a:lstStyle/>
+          <a:p>
+            <a:r>
+              <a:rPr lang="en-GB" sz="1200" b="1" dirty="0">
+                <a:latin typeface="Calibri" panose="020F0502020204030204" pitchFamily="34" charset="0"/>
+                <a:cs typeface="Calibri" panose="020F0502020204030204" pitchFamily="34" charset="0"/>
+              </a:rPr>
+              <a:t>Dataset Characteristics </a:t>
+            </a:r>
+            <a:r>
+              <a:rPr lang="en-GB" sz="1200" dirty="0">
+                <a:solidFill>
+                  <a:schemeClr val="bg1">
+                    <a:lumMod val="75000"/>
+                  </a:schemeClr>
+                </a:solidFill>
+                <a:latin typeface="Calibri" panose="020F0502020204030204" pitchFamily="34" charset="0"/>
+                <a:ea typeface="Calibri" panose="020F0502020204030204" pitchFamily="34" charset="0"/>
+                <a:cs typeface="Calibri" panose="020F0502020204030204" pitchFamily="34" charset="0"/>
+              </a:rPr>
+              <a:t>– Baseline Model </a:t>
+            </a:r>
+            <a:r>
+              <a:rPr lang="en-GB" sz="1200" dirty="0">
+                <a:solidFill>
+                  <a:schemeClr val="bg1">
+                    <a:lumMod val="75000"/>
+                  </a:schemeClr>
+                </a:solidFill>
+                <a:latin typeface="Calibri" panose="020F0502020204030204" pitchFamily="34" charset="0"/>
+                <a:cs typeface="Calibri" panose="020F0502020204030204" pitchFamily="34" charset="0"/>
+              </a:rPr>
+              <a:t>– Neural Net </a:t>
+            </a:r>
+            <a:r>
+              <a:rPr lang="en-GB" sz="1200" dirty="0">
+                <a:solidFill>
+                  <a:schemeClr val="bg1">
+                    <a:lumMod val="75000"/>
+                  </a:schemeClr>
+                </a:solidFill>
+                <a:latin typeface="Calibri" panose="020F0502020204030204" pitchFamily="34" charset="0"/>
+                <a:ea typeface="Calibri" panose="020F0502020204030204" pitchFamily="34" charset="0"/>
+                <a:cs typeface="Calibri" panose="020F0502020204030204" pitchFamily="34" charset="0"/>
+              </a:rPr>
+              <a:t>– Challenges </a:t>
+            </a:r>
+            <a:endParaRPr lang="de-DE" sz="1200" dirty="0">
+              <a:solidFill>
+                <a:schemeClr val="bg1">
+                  <a:lumMod val="75000"/>
+                </a:schemeClr>
+              </a:solidFill>
+            </a:endParaRPr>
+          </a:p>
+        </p:txBody>
+      </p:sp>
+      <p:pic>
+        <p:nvPicPr>
+          <p:cNvPr id="15" name="Picture 14">
+            <a:extLst>
+              <a:ext uri="{FF2B5EF4-FFF2-40B4-BE49-F238E27FC236}">
+                <a16:creationId xmlns:a16="http://schemas.microsoft.com/office/drawing/2014/main" id="{33B71C7A-B971-5E9E-E5F2-720ABA542E41}"/>
+              </a:ext>
+            </a:extLst>
+          </p:cNvPr>
+          <p:cNvPicPr>
+            <a:picLocks noChangeAspect="1"/>
+          </p:cNvPicPr>
+          <p:nvPr/>
+        </p:nvPicPr>
+        <p:blipFill>
+          <a:blip r:embed="rId3"/>
+          <a:stretch>
+            <a:fillRect/>
+          </a:stretch>
+        </p:blipFill>
+        <p:spPr>
+          <a:xfrm>
+            <a:off x="5278262" y="1824036"/>
+            <a:ext cx="6597072" cy="4351339"/>
+          </a:xfrm>
+          <a:prstGeom prst="rect">
+            <a:avLst/>
+          </a:prstGeom>
+        </p:spPr>
+      </p:pic>
+      <p:pic>
+        <p:nvPicPr>
+          <p:cNvPr id="4" name="Picture 3">
+            <a:extLst>
+              <a:ext uri="{FF2B5EF4-FFF2-40B4-BE49-F238E27FC236}">
+                <a16:creationId xmlns:a16="http://schemas.microsoft.com/office/drawing/2014/main" id="{F15D9625-8304-B8A6-4306-D2881F22B882}"/>
+              </a:ext>
+            </a:extLst>
+          </p:cNvPr>
+          <p:cNvPicPr>
+            <a:picLocks noChangeAspect="1"/>
+          </p:cNvPicPr>
+          <p:nvPr/>
+        </p:nvPicPr>
+        <p:blipFill>
+          <a:blip r:embed="rId4"/>
+          <a:stretch>
+            <a:fillRect/>
+          </a:stretch>
+        </p:blipFill>
+        <p:spPr>
+          <a:xfrm>
+            <a:off x="0" y="2996120"/>
+            <a:ext cx="5069662" cy="2515643"/>
+          </a:xfrm>
+          <a:prstGeom prst="rect">
+            <a:avLst/>
+          </a:prstGeom>
+        </p:spPr>
+      </p:pic>
+    </p:spTree>
+    <p:extLst>
+      <p:ext uri="{BB962C8B-B14F-4D97-AF65-F5344CB8AC3E}">
+        <p14:creationId xmlns:p14="http://schemas.microsoft.com/office/powerpoint/2010/main" val="2567287787"/>
+      </p:ext>
+    </p:extLst>
+  </p:cSld>
+  <p:clrMapOvr>
+    <a:masterClrMapping/>
+  </p:clrMapOvr>
+</p:sld>
+</file>
+
+<file path=ppt/slides/slide6.xml><?xml version="1.0" encoding="utf-8"?>
 <p:sld xmlns:a="http://schemas.openxmlformats.org/drawingml/2006/main" xmlns:r="http://schemas.openxmlformats.org/officeDocument/2006/relationships" xmlns:p="http://schemas.openxmlformats.org/presentationml/2006/main">
   <p:cSld>
     <p:spTree>
@@ -19457,61 +23154,6 @@
           <a:chExt cx="0" cy="0"/>
         </a:xfrm>
       </p:grpSpPr>
-      <p:sp>
-        <p:nvSpPr>
-          <p:cNvPr id="2" name="TextBox 4">
-            <a:extLst>
-              <a:ext uri="{FF2B5EF4-FFF2-40B4-BE49-F238E27FC236}">
-                <a16:creationId xmlns:a16="http://schemas.microsoft.com/office/drawing/2014/main" id="{036FED8D-28A8-8B7C-0B68-9B26471B82D4}"/>
-              </a:ext>
-            </a:extLst>
-          </p:cNvPr>
-          <p:cNvSpPr txBox="1"/>
-          <p:nvPr/>
-        </p:nvSpPr>
-        <p:spPr>
-          <a:xfrm>
-            <a:off x="3524719" y="6581001"/>
-            <a:ext cx="5230663" cy="276999"/>
-          </a:xfrm>
-          <a:prstGeom prst="rect">
-            <a:avLst/>
-          </a:prstGeom>
-          <a:noFill/>
-        </p:spPr>
-        <p:txBody>
-          <a:bodyPr wrap="none" rtlCol="0">
-            <a:spAutoFit/>
-          </a:bodyPr>
-          <a:lstStyle/>
-          <a:p>
-            <a:r>
-              <a:rPr lang="en-GB" sz="1200" b="1" dirty="0"/>
-              <a:t>Dataset Characteristics </a:t>
-            </a:r>
-            <a:r>
-              <a:rPr lang="en-GB" sz="1200" dirty="0">
-                <a:solidFill>
-                  <a:schemeClr val="bg1">
-                    <a:lumMod val="75000"/>
-                  </a:schemeClr>
-                </a:solidFill>
-                <a:latin typeface="Calibri" panose="020F0502020204030204" pitchFamily="34" charset="0"/>
-                <a:ea typeface="Calibri" panose="020F0502020204030204" pitchFamily="34" charset="0"/>
-                <a:cs typeface="Calibri" panose="020F0502020204030204" pitchFamily="34" charset="0"/>
-              </a:rPr>
-              <a:t>– Baseline Model – Neural Net – Results – Challenges </a:t>
-            </a:r>
-            <a:endParaRPr lang="de-DE" sz="1200" dirty="0">
-              <a:solidFill>
-                <a:schemeClr val="bg1">
-                  <a:lumMod val="75000"/>
-                </a:schemeClr>
-              </a:solidFill>
-            </a:endParaRPr>
-          </a:p>
-        </p:txBody>
-      </p:sp>
       <p:pic>
         <p:nvPicPr>
           <p:cNvPr id="15" name="Grafik 14">
@@ -19613,14 +23255,14 @@
           <a:p>
             <a:fld id="{FEE63D0E-FFEF-43D1-BE35-64C33AF422FD}" type="slidenum">
               <a:rPr lang="de-DE" smtClean="0"/>
-              <a:t>5</a:t>
+              <a:t>6</a:t>
             </a:fld>
             <a:endParaRPr lang="de-DE"/>
           </a:p>
         </p:txBody>
       </p:sp>
-      <mc:AlternateContent xmlns:mc="http://schemas.openxmlformats.org/markup-compatibility/2006">
-        <mc:Choice xmlns:p14="http://schemas.microsoft.com/office/powerpoint/2010/main" Requires="p14">
+      <mc:AlternateContent xmlns:mc="http://schemas.openxmlformats.org/markup-compatibility/2006" xmlns:p14="http://schemas.microsoft.com/office/powerpoint/2010/main">
+        <mc:Choice Requires="p14">
           <p:contentPart p14:bwMode="auto" r:id="rId4">
             <p14:nvContentPartPr>
               <p14:cNvPr id="12" name="Ink 11">
@@ -19639,7 +23281,7 @@
             </p14:xfrm>
           </p:contentPart>
         </mc:Choice>
-        <mc:Fallback>
+        <mc:Fallback xmlns="">
           <p:pic>
             <p:nvPicPr>
               <p:cNvPr id="12" name="Ink 11">
@@ -19722,8 +23364,8 @@
           </a:p>
         </p:txBody>
       </p:sp>
-      <mc:AlternateContent xmlns:mc="http://schemas.openxmlformats.org/markup-compatibility/2006">
-        <mc:Choice xmlns:p14="http://schemas.microsoft.com/office/powerpoint/2010/main" Requires="p14">
+      <mc:AlternateContent xmlns:mc="http://schemas.openxmlformats.org/markup-compatibility/2006" xmlns:p14="http://schemas.microsoft.com/office/powerpoint/2010/main">
+        <mc:Choice Requires="p14">
           <p:contentPart p14:bwMode="auto" r:id="rId6">
             <p14:nvContentPartPr>
               <p14:cNvPr id="17" name="Ink 16">
@@ -19742,7 +23384,7 @@
             </p14:xfrm>
           </p:contentPart>
         </mc:Choice>
-        <mc:Fallback>
+        <mc:Fallback xmlns="">
           <p:pic>
             <p:nvPicPr>
               <p:cNvPr id="17" name="Ink 16">
@@ -20651,6 +24293,89 @@
           </p:txBody>
         </p:sp>
       </p:grpSp>
+      <p:sp>
+        <p:nvSpPr>
+          <p:cNvPr id="4" name="TextBox 3">
+            <a:extLst>
+              <a:ext uri="{FF2B5EF4-FFF2-40B4-BE49-F238E27FC236}">
+                <a16:creationId xmlns:a16="http://schemas.microsoft.com/office/drawing/2014/main" id="{6365EC40-4383-E05F-1116-971DFDA7AF03}"/>
+              </a:ext>
+            </a:extLst>
+          </p:cNvPr>
+          <p:cNvSpPr txBox="1"/>
+          <p:nvPr/>
+        </p:nvSpPr>
+        <p:spPr>
+          <a:xfrm>
+            <a:off x="3778474" y="6538912"/>
+            <a:ext cx="4440062" cy="276999"/>
+          </a:xfrm>
+          <a:prstGeom prst="rect">
+            <a:avLst/>
+          </a:prstGeom>
+          <a:noFill/>
+        </p:spPr>
+        <p:txBody>
+          <a:bodyPr wrap="none" rtlCol="0">
+            <a:spAutoFit/>
+          </a:bodyPr>
+          <a:lstStyle/>
+          <a:p>
+            <a:r>
+              <a:rPr lang="en-GB" sz="1200" b="1" dirty="0">
+                <a:latin typeface="Calibri" panose="020F0502020204030204" pitchFamily="34" charset="0"/>
+                <a:cs typeface="Calibri" panose="020F0502020204030204" pitchFamily="34" charset="0"/>
+              </a:rPr>
+              <a:t>Dataset Characteristics </a:t>
+            </a:r>
+            <a:r>
+              <a:rPr lang="en-GB" sz="1200" dirty="0">
+                <a:solidFill>
+                  <a:schemeClr val="bg1">
+                    <a:lumMod val="75000"/>
+                  </a:schemeClr>
+                </a:solidFill>
+                <a:latin typeface="Calibri" panose="020F0502020204030204" pitchFamily="34" charset="0"/>
+                <a:ea typeface="Calibri" panose="020F0502020204030204" pitchFamily="34" charset="0"/>
+                <a:cs typeface="Calibri" panose="020F0502020204030204" pitchFamily="34" charset="0"/>
+              </a:rPr>
+              <a:t>– Baseline Model </a:t>
+            </a:r>
+            <a:r>
+              <a:rPr lang="en-GB" sz="1200" dirty="0">
+                <a:solidFill>
+                  <a:schemeClr val="bg1">
+                    <a:lumMod val="75000"/>
+                  </a:schemeClr>
+                </a:solidFill>
+                <a:latin typeface="Calibri" panose="020F0502020204030204" pitchFamily="34" charset="0"/>
+                <a:cs typeface="Calibri" panose="020F0502020204030204" pitchFamily="34" charset="0"/>
+              </a:rPr>
+              <a:t>– Neural Net </a:t>
+            </a:r>
+            <a:r>
+              <a:rPr lang="en-GB" sz="1200" dirty="0">
+                <a:solidFill>
+                  <a:schemeClr val="bg1">
+                    <a:lumMod val="75000"/>
+                  </a:schemeClr>
+                </a:solidFill>
+                <a:latin typeface="Calibri" panose="020F0502020204030204" pitchFamily="34" charset="0"/>
+                <a:ea typeface="Calibri" panose="020F0502020204030204" pitchFamily="34" charset="0"/>
+                <a:cs typeface="Calibri" panose="020F0502020204030204" pitchFamily="34" charset="0"/>
+              </a:rPr>
+              <a:t>– Challenges </a:t>
+            </a:r>
+            <a:endParaRPr lang="de-DE" sz="1200" dirty="0">
+              <a:solidFill>
+                <a:schemeClr val="bg1">
+                  <a:lumMod val="75000"/>
+                </a:schemeClr>
+              </a:solidFill>
+            </a:endParaRPr>
+          </a:p>
+        </p:txBody>
+      </p:sp>
     </p:spTree>
     <p:extLst>
       <p:ext uri="{BB962C8B-B14F-4D97-AF65-F5344CB8AC3E}">
@@ -20747,7 +24472,7 @@
 </p:sld>
 </file>
 
-<file path=ppt/slides/slide6.xml><?xml version="1.0" encoding="utf-8"?>
+<file path=ppt/slides/slide7.xml><?xml version="1.0" encoding="utf-8"?>
 <p:sld xmlns:a="http://schemas.openxmlformats.org/drawingml/2006/main" xmlns:r="http://schemas.openxmlformats.org/officeDocument/2006/relationships" xmlns:p="http://schemas.openxmlformats.org/presentationml/2006/main">
   <p:cSld>
     <p:spTree>
@@ -20770,61 +24495,6 @@
           <a:chExt cx="0" cy="0"/>
         </a:xfrm>
       </p:grpSpPr>
-      <p:sp>
-        <p:nvSpPr>
-          <p:cNvPr id="2" name="TextBox 4">
-            <a:extLst>
-              <a:ext uri="{FF2B5EF4-FFF2-40B4-BE49-F238E27FC236}">
-                <a16:creationId xmlns:a16="http://schemas.microsoft.com/office/drawing/2014/main" id="{AA1FABD7-1FB0-748D-315A-1880485D33F6}"/>
-              </a:ext>
-            </a:extLst>
-          </p:cNvPr>
-          <p:cNvSpPr txBox="1"/>
-          <p:nvPr/>
-        </p:nvSpPr>
-        <p:spPr>
-          <a:xfrm>
-            <a:off x="3524719" y="6581001"/>
-            <a:ext cx="5230663" cy="276999"/>
-          </a:xfrm>
-          <a:prstGeom prst="rect">
-            <a:avLst/>
-          </a:prstGeom>
-          <a:noFill/>
-        </p:spPr>
-        <p:txBody>
-          <a:bodyPr wrap="none" rtlCol="0">
-            <a:spAutoFit/>
-          </a:bodyPr>
-          <a:lstStyle/>
-          <a:p>
-            <a:r>
-              <a:rPr lang="en-GB" sz="1200" b="1" dirty="0"/>
-              <a:t>Dataset Characteristics </a:t>
-            </a:r>
-            <a:r>
-              <a:rPr lang="en-GB" sz="1200" dirty="0">
-                <a:solidFill>
-                  <a:schemeClr val="bg1">
-                    <a:lumMod val="75000"/>
-                  </a:schemeClr>
-                </a:solidFill>
-                <a:latin typeface="Calibri" panose="020F0502020204030204" pitchFamily="34" charset="0"/>
-                <a:ea typeface="Calibri" panose="020F0502020204030204" pitchFamily="34" charset="0"/>
-                <a:cs typeface="Calibri" panose="020F0502020204030204" pitchFamily="34" charset="0"/>
-              </a:rPr>
-              <a:t>– Baseline Model – Neural Net – Results – Challenges </a:t>
-            </a:r>
-            <a:endParaRPr lang="de-DE" sz="1200" dirty="0">
-              <a:solidFill>
-                <a:schemeClr val="bg1">
-                  <a:lumMod val="75000"/>
-                </a:schemeClr>
-              </a:solidFill>
-            </a:endParaRPr>
-          </a:p>
-        </p:txBody>
-      </p:sp>
       <p:sp>
         <p:nvSpPr>
           <p:cNvPr id="3" name="Slide Number Placeholder 2">
@@ -20853,14 +24523,14 @@
           <a:p>
             <a:fld id="{FEE63D0E-FFEF-43D1-BE35-64C33AF422FD}" type="slidenum">
               <a:rPr lang="de-DE" smtClean="0"/>
-              <a:t>6</a:t>
+              <a:t>7</a:t>
             </a:fld>
             <a:endParaRPr lang="de-DE"/>
           </a:p>
         </p:txBody>
       </p:sp>
-      <mc:AlternateContent xmlns:mc="http://schemas.openxmlformats.org/markup-compatibility/2006">
-        <mc:Choice xmlns:p14="http://schemas.microsoft.com/office/powerpoint/2010/main" Requires="p14">
+      <mc:AlternateContent xmlns:mc="http://schemas.openxmlformats.org/markup-compatibility/2006" xmlns:p14="http://schemas.microsoft.com/office/powerpoint/2010/main">
+        <mc:Choice Requires="p14">
           <p:contentPart p14:bwMode="auto" r:id="rId3">
             <p14:nvContentPartPr>
               <p14:cNvPr id="12" name="Ink 11">
@@ -20879,7 +24549,7 @@
             </p14:xfrm>
           </p:contentPart>
         </mc:Choice>
-        <mc:Fallback>
+        <mc:Fallback xmlns="">
           <p:pic>
             <p:nvPicPr>
               <p:cNvPr id="12" name="Ink 11">
@@ -21770,6 +25440,89 @@
           </a:p>
         </p:txBody>
       </p:sp>
+      <p:sp>
+        <p:nvSpPr>
+          <p:cNvPr id="5" name="TextBox 4">
+            <a:extLst>
+              <a:ext uri="{FF2B5EF4-FFF2-40B4-BE49-F238E27FC236}">
+                <a16:creationId xmlns:a16="http://schemas.microsoft.com/office/drawing/2014/main" id="{82C1BC01-A05E-750F-C2DE-497CA9583F5D}"/>
+              </a:ext>
+            </a:extLst>
+          </p:cNvPr>
+          <p:cNvSpPr txBox="1"/>
+          <p:nvPr/>
+        </p:nvSpPr>
+        <p:spPr>
+          <a:xfrm>
+            <a:off x="3778474" y="6538912"/>
+            <a:ext cx="4440062" cy="276999"/>
+          </a:xfrm>
+          <a:prstGeom prst="rect">
+            <a:avLst/>
+          </a:prstGeom>
+          <a:noFill/>
+        </p:spPr>
+        <p:txBody>
+          <a:bodyPr wrap="none" rtlCol="0">
+            <a:spAutoFit/>
+          </a:bodyPr>
+          <a:lstStyle/>
+          <a:p>
+            <a:r>
+              <a:rPr lang="en-GB" sz="1200" b="1" dirty="0">
+                <a:latin typeface="Calibri" panose="020F0502020204030204" pitchFamily="34" charset="0"/>
+                <a:cs typeface="Calibri" panose="020F0502020204030204" pitchFamily="34" charset="0"/>
+              </a:rPr>
+              <a:t>Dataset Characteristics </a:t>
+            </a:r>
+            <a:r>
+              <a:rPr lang="en-GB" sz="1200" dirty="0">
+                <a:solidFill>
+                  <a:schemeClr val="bg1">
+                    <a:lumMod val="75000"/>
+                  </a:schemeClr>
+                </a:solidFill>
+                <a:latin typeface="Calibri" panose="020F0502020204030204" pitchFamily="34" charset="0"/>
+                <a:ea typeface="Calibri" panose="020F0502020204030204" pitchFamily="34" charset="0"/>
+                <a:cs typeface="Calibri" panose="020F0502020204030204" pitchFamily="34" charset="0"/>
+              </a:rPr>
+              <a:t>– Baseline Model </a:t>
+            </a:r>
+            <a:r>
+              <a:rPr lang="en-GB" sz="1200" dirty="0">
+                <a:solidFill>
+                  <a:schemeClr val="bg1">
+                    <a:lumMod val="75000"/>
+                  </a:schemeClr>
+                </a:solidFill>
+                <a:latin typeface="Calibri" panose="020F0502020204030204" pitchFamily="34" charset="0"/>
+                <a:cs typeface="Calibri" panose="020F0502020204030204" pitchFamily="34" charset="0"/>
+              </a:rPr>
+              <a:t>– Neural Net </a:t>
+            </a:r>
+            <a:r>
+              <a:rPr lang="en-GB" sz="1200" dirty="0">
+                <a:solidFill>
+                  <a:schemeClr val="bg1">
+                    <a:lumMod val="75000"/>
+                  </a:schemeClr>
+                </a:solidFill>
+                <a:latin typeface="Calibri" panose="020F0502020204030204" pitchFamily="34" charset="0"/>
+                <a:ea typeface="Calibri" panose="020F0502020204030204" pitchFamily="34" charset="0"/>
+                <a:cs typeface="Calibri" panose="020F0502020204030204" pitchFamily="34" charset="0"/>
+              </a:rPr>
+              <a:t>– Challenges </a:t>
+            </a:r>
+            <a:endParaRPr lang="de-DE" sz="1200" dirty="0">
+              <a:solidFill>
+                <a:schemeClr val="bg1">
+                  <a:lumMod val="75000"/>
+                </a:schemeClr>
+              </a:solidFill>
+            </a:endParaRPr>
+          </a:p>
+        </p:txBody>
+      </p:sp>
     </p:spTree>
     <p:extLst>
       <p:ext uri="{BB962C8B-B14F-4D97-AF65-F5344CB8AC3E}">
@@ -21783,7 +25536,7 @@
 </p:sld>
 </file>
 
-<file path=ppt/slides/slide7.xml><?xml version="1.0" encoding="utf-8"?>
+<file path=ppt/slides/slide8.xml><?xml version="1.0" encoding="utf-8"?>
 <p:sld xmlns:a="http://schemas.openxmlformats.org/drawingml/2006/main" xmlns:r="http://schemas.openxmlformats.org/officeDocument/2006/relationships" xmlns:p="http://schemas.openxmlformats.org/presentationml/2006/main">
   <p:cSld>
     <p:spTree>
@@ -21806,61 +25559,6 @@
           <a:chExt cx="0" cy="0"/>
         </a:xfrm>
       </p:grpSpPr>
-      <p:sp>
-        <p:nvSpPr>
-          <p:cNvPr id="2" name="TextBox 4">
-            <a:extLst>
-              <a:ext uri="{FF2B5EF4-FFF2-40B4-BE49-F238E27FC236}">
-                <a16:creationId xmlns:a16="http://schemas.microsoft.com/office/drawing/2014/main" id="{E7BCC090-C36A-89F7-6166-983AA319B98C}"/>
-              </a:ext>
-            </a:extLst>
-          </p:cNvPr>
-          <p:cNvSpPr txBox="1"/>
-          <p:nvPr/>
-        </p:nvSpPr>
-        <p:spPr>
-          <a:xfrm>
-            <a:off x="3524719" y="6581001"/>
-            <a:ext cx="5142562" cy="276999"/>
-          </a:xfrm>
-          <a:prstGeom prst="rect">
-            <a:avLst/>
-          </a:prstGeom>
-          <a:noFill/>
-        </p:spPr>
-        <p:txBody>
-          <a:bodyPr wrap="none" rtlCol="0">
-            <a:spAutoFit/>
-          </a:bodyPr>
-          <a:lstStyle/>
-          <a:p>
-            <a:r>
-              <a:rPr lang="en-GB" sz="1200" dirty="0"/>
-              <a:t>Dataset Characteristics </a:t>
-            </a:r>
-            <a:r>
-              <a:rPr lang="en-GB" sz="1200" dirty="0">
-                <a:solidFill>
-                  <a:schemeClr val="bg1">
-                    <a:lumMod val="75000"/>
-                  </a:schemeClr>
-                </a:solidFill>
-                <a:latin typeface="Calibri" panose="020F0502020204030204" pitchFamily="34" charset="0"/>
-                <a:ea typeface="Calibri" panose="020F0502020204030204" pitchFamily="34" charset="0"/>
-                <a:cs typeface="Calibri" panose="020F0502020204030204" pitchFamily="34" charset="0"/>
-              </a:rPr>
-              <a:t>– Baseline Model – Neural Net – Results – Challenges </a:t>
-            </a:r>
-            <a:endParaRPr lang="de-DE" sz="1200" dirty="0">
-              <a:solidFill>
-                <a:schemeClr val="bg1">
-                  <a:lumMod val="75000"/>
-                </a:schemeClr>
-              </a:solidFill>
-            </a:endParaRPr>
-          </a:p>
-        </p:txBody>
-      </p:sp>
       <p:pic>
         <p:nvPicPr>
           <p:cNvPr id="15" name="Grafik 14">
@@ -21921,7 +25619,7 @@
           <a:p>
             <a:fld id="{FEE63D0E-FFEF-43D1-BE35-64C33AF422FD}" type="slidenum">
               <a:rPr lang="de-DE" smtClean="0"/>
-              <a:t>7</a:t>
+              <a:t>8</a:t>
             </a:fld>
             <a:endParaRPr lang="de-DE"/>
           </a:p>
@@ -22250,6 +25948,89 @@
           </a:p>
         </p:txBody>
       </p:sp>
+      <p:sp>
+        <p:nvSpPr>
+          <p:cNvPr id="4" name="TextBox 3">
+            <a:extLst>
+              <a:ext uri="{FF2B5EF4-FFF2-40B4-BE49-F238E27FC236}">
+                <a16:creationId xmlns:a16="http://schemas.microsoft.com/office/drawing/2014/main" id="{7D89083A-BE9E-C0CF-FE77-0E29A0512F8C}"/>
+              </a:ext>
+            </a:extLst>
+          </p:cNvPr>
+          <p:cNvSpPr txBox="1"/>
+          <p:nvPr/>
+        </p:nvSpPr>
+        <p:spPr>
+          <a:xfrm>
+            <a:off x="3778474" y="6538912"/>
+            <a:ext cx="4440062" cy="276999"/>
+          </a:xfrm>
+          <a:prstGeom prst="rect">
+            <a:avLst/>
+          </a:prstGeom>
+          <a:noFill/>
+        </p:spPr>
+        <p:txBody>
+          <a:bodyPr wrap="none" rtlCol="0">
+            <a:spAutoFit/>
+          </a:bodyPr>
+          <a:lstStyle/>
+          <a:p>
+            <a:r>
+              <a:rPr lang="en-GB" sz="1200" b="1" dirty="0">
+                <a:latin typeface="Calibri" panose="020F0502020204030204" pitchFamily="34" charset="0"/>
+                <a:cs typeface="Calibri" panose="020F0502020204030204" pitchFamily="34" charset="0"/>
+              </a:rPr>
+              <a:t>Dataset Characteristics </a:t>
+            </a:r>
+            <a:r>
+              <a:rPr lang="en-GB" sz="1200" dirty="0">
+                <a:solidFill>
+                  <a:schemeClr val="bg1">
+                    <a:lumMod val="75000"/>
+                  </a:schemeClr>
+                </a:solidFill>
+                <a:latin typeface="Calibri" panose="020F0502020204030204" pitchFamily="34" charset="0"/>
+                <a:ea typeface="Calibri" panose="020F0502020204030204" pitchFamily="34" charset="0"/>
+                <a:cs typeface="Calibri" panose="020F0502020204030204" pitchFamily="34" charset="0"/>
+              </a:rPr>
+              <a:t>– Baseline Model </a:t>
+            </a:r>
+            <a:r>
+              <a:rPr lang="en-GB" sz="1200" dirty="0">
+                <a:solidFill>
+                  <a:schemeClr val="bg1">
+                    <a:lumMod val="75000"/>
+                  </a:schemeClr>
+                </a:solidFill>
+                <a:latin typeface="Calibri" panose="020F0502020204030204" pitchFamily="34" charset="0"/>
+                <a:cs typeface="Calibri" panose="020F0502020204030204" pitchFamily="34" charset="0"/>
+              </a:rPr>
+              <a:t>– Neural Net </a:t>
+            </a:r>
+            <a:r>
+              <a:rPr lang="en-GB" sz="1200" dirty="0">
+                <a:solidFill>
+                  <a:schemeClr val="bg1">
+                    <a:lumMod val="75000"/>
+                  </a:schemeClr>
+                </a:solidFill>
+                <a:latin typeface="Calibri" panose="020F0502020204030204" pitchFamily="34" charset="0"/>
+                <a:ea typeface="Calibri" panose="020F0502020204030204" pitchFamily="34" charset="0"/>
+                <a:cs typeface="Calibri" panose="020F0502020204030204" pitchFamily="34" charset="0"/>
+              </a:rPr>
+              <a:t>– Challenges </a:t>
+            </a:r>
+            <a:endParaRPr lang="de-DE" sz="1200" dirty="0">
+              <a:solidFill>
+                <a:schemeClr val="bg1">
+                  <a:lumMod val="75000"/>
+                </a:schemeClr>
+              </a:solidFill>
+            </a:endParaRPr>
+          </a:p>
+        </p:txBody>
+      </p:sp>
     </p:spTree>
     <p:extLst>
       <p:ext uri="{BB962C8B-B14F-4D97-AF65-F5344CB8AC3E}">
@@ -22263,7 +26044,7 @@
 </p:sld>
 </file>
 
-<file path=ppt/slides/slide8.xml><?xml version="1.0" encoding="utf-8"?>
+<file path=ppt/slides/slide9.xml><?xml version="1.0" encoding="utf-8"?>
 <p:sld xmlns:a="http://schemas.openxmlformats.org/drawingml/2006/main" xmlns:r="http://schemas.openxmlformats.org/officeDocument/2006/relationships" xmlns:p="http://schemas.openxmlformats.org/presentationml/2006/main">
   <p:cSld>
     <p:spTree>
@@ -22365,88 +26146,6 @@
       </p:pic>
       <p:sp>
         <p:nvSpPr>
-          <p:cNvPr id="3" name="TextBox 4">
-            <a:extLst>
-              <a:ext uri="{FF2B5EF4-FFF2-40B4-BE49-F238E27FC236}">
-                <a16:creationId xmlns:a16="http://schemas.microsoft.com/office/drawing/2014/main" id="{AA969668-41C2-2371-36BB-952A209FC55C}"/>
-              </a:ext>
-            </a:extLst>
-          </p:cNvPr>
-          <p:cNvSpPr txBox="1"/>
-          <p:nvPr/>
-        </p:nvSpPr>
-        <p:spPr>
-          <a:xfrm>
-            <a:off x="3524719" y="6581001"/>
-            <a:ext cx="5142562" cy="276999"/>
-          </a:xfrm>
-          <a:prstGeom prst="rect">
-            <a:avLst/>
-          </a:prstGeom>
-          <a:noFill/>
-        </p:spPr>
-        <p:txBody>
-          <a:bodyPr wrap="none" rtlCol="0">
-            <a:spAutoFit/>
-          </a:bodyPr>
-          <a:lstStyle/>
-          <a:p>
-            <a:r>
-              <a:rPr lang="en-GB" sz="1200" dirty="0">
-                <a:solidFill>
-                  <a:schemeClr val="bg1">
-                    <a:lumMod val="75000"/>
-                  </a:schemeClr>
-                </a:solidFill>
-              </a:rPr>
-              <a:t>Dataset Characteristics </a:t>
-            </a:r>
-            <a:r>
-              <a:rPr lang="en-GB" sz="1200" dirty="0">
-                <a:solidFill>
-                  <a:schemeClr val="bg1">
-                    <a:lumMod val="75000"/>
-                  </a:schemeClr>
-                </a:solidFill>
-                <a:latin typeface="Calibri" panose="020F0502020204030204" pitchFamily="34" charset="0"/>
-                <a:ea typeface="Calibri" panose="020F0502020204030204" pitchFamily="34" charset="0"/>
-                <a:cs typeface="Calibri" panose="020F0502020204030204" pitchFamily="34" charset="0"/>
-              </a:rPr>
-              <a:t>– </a:t>
-            </a:r>
-            <a:r>
-              <a:rPr lang="en-GB" sz="1200" dirty="0">
-                <a:latin typeface="Calibri" panose="020F0502020204030204" pitchFamily="34" charset="0"/>
-                <a:ea typeface="Calibri" panose="020F0502020204030204" pitchFamily="34" charset="0"/>
-                <a:cs typeface="Calibri" panose="020F0502020204030204" pitchFamily="34" charset="0"/>
-              </a:rPr>
-              <a:t>Baseline Model </a:t>
-            </a:r>
-            <a:r>
-              <a:rPr lang="en-GB" sz="1200" dirty="0">
-                <a:solidFill>
-                  <a:schemeClr val="bg1">
-                    <a:lumMod val="75000"/>
-                  </a:schemeClr>
-                </a:solidFill>
-                <a:latin typeface="Calibri" panose="020F0502020204030204" pitchFamily="34" charset="0"/>
-                <a:ea typeface="Calibri" panose="020F0502020204030204" pitchFamily="34" charset="0"/>
-                <a:cs typeface="Calibri" panose="020F0502020204030204" pitchFamily="34" charset="0"/>
-              </a:rPr>
-              <a:t>– Neural Net – Results – Challenges </a:t>
-            </a:r>
-            <a:endParaRPr lang="de-DE" sz="1200" dirty="0">
-              <a:solidFill>
-                <a:schemeClr val="bg1">
-                  <a:lumMod val="75000"/>
-                </a:schemeClr>
-              </a:solidFill>
-            </a:endParaRPr>
-          </a:p>
-        </p:txBody>
-      </p:sp>
-      <p:sp>
-        <p:nvSpPr>
           <p:cNvPr id="2" name="Slide Number Placeholder 1">
             <a:extLst>
               <a:ext uri="{FF2B5EF4-FFF2-40B4-BE49-F238E27FC236}">
@@ -22468,9 +26167,143 @@
           <a:p>
             <a:fld id="{FEE63D0E-FFEF-43D1-BE35-64C33AF422FD}" type="slidenum">
               <a:rPr lang="de-DE" smtClean="0"/>
-              <a:t>8</a:t>
+              <a:t>9</a:t>
             </a:fld>
             <a:endParaRPr lang="de-DE"/>
+          </a:p>
+        </p:txBody>
+      </p:sp>
+      <p:sp>
+        <p:nvSpPr>
+          <p:cNvPr id="4" name="TextBox 3">
+            <a:extLst>
+              <a:ext uri="{FF2B5EF4-FFF2-40B4-BE49-F238E27FC236}">
+                <a16:creationId xmlns:a16="http://schemas.microsoft.com/office/drawing/2014/main" id="{EE31033C-67BC-9764-3CEC-05688F5CF210}"/>
+              </a:ext>
+            </a:extLst>
+          </p:cNvPr>
+          <p:cNvSpPr txBox="1"/>
+          <p:nvPr/>
+        </p:nvSpPr>
+        <p:spPr>
+          <a:xfrm>
+            <a:off x="3778474" y="6538912"/>
+            <a:ext cx="4635051" cy="276999"/>
+          </a:xfrm>
+          <a:prstGeom prst="rect">
+            <a:avLst/>
+          </a:prstGeom>
+          <a:noFill/>
+        </p:spPr>
+        <p:txBody>
+          <a:bodyPr wrap="none" rtlCol="0">
+            <a:spAutoFit/>
+          </a:bodyPr>
+          <a:lstStyle/>
+          <a:p>
+            <a:r>
+              <a:rPr lang="en-GB" sz="1200" dirty="0">
+                <a:solidFill>
+                  <a:schemeClr val="bg1">
+                    <a:lumMod val="75000"/>
+                  </a:schemeClr>
+                </a:solidFill>
+              </a:rPr>
+              <a:t>Dataset Characteristics </a:t>
+            </a:r>
+            <a:r>
+              <a:rPr lang="en-GB" sz="1200" dirty="0">
+                <a:solidFill>
+                  <a:schemeClr val="bg1">
+                    <a:lumMod val="75000"/>
+                  </a:schemeClr>
+                </a:solidFill>
+                <a:latin typeface="Calibri" panose="020F0502020204030204" pitchFamily="34" charset="0"/>
+                <a:ea typeface="Calibri" panose="020F0502020204030204" pitchFamily="34" charset="0"/>
+                <a:cs typeface="Calibri" panose="020F0502020204030204" pitchFamily="34" charset="0"/>
+              </a:rPr>
+              <a:t>– </a:t>
+            </a:r>
+            <a:r>
+              <a:rPr lang="en-GB" sz="1200" b="1" dirty="0">
+                <a:latin typeface="Calibri" panose="020F0502020204030204" pitchFamily="34" charset="0"/>
+                <a:cs typeface="Calibri" panose="020F0502020204030204" pitchFamily="34" charset="0"/>
+              </a:rPr>
+              <a:t>Baseline Model </a:t>
+            </a:r>
+            <a:r>
+              <a:rPr lang="en-GB" sz="1200" dirty="0">
+                <a:solidFill>
+                  <a:schemeClr val="bg1">
+                    <a:lumMod val="75000"/>
+                  </a:schemeClr>
+                </a:solidFill>
+                <a:latin typeface="Calibri" panose="020F0502020204030204" pitchFamily="34" charset="0"/>
+                <a:ea typeface="Calibri" panose="020F0502020204030204" pitchFamily="34" charset="0"/>
+                <a:cs typeface="Calibri" panose="020F0502020204030204" pitchFamily="34" charset="0"/>
+              </a:rPr>
+              <a:t>– </a:t>
+            </a:r>
+            <a:r>
+              <a:rPr lang="en-GB" sz="1200" dirty="0">
+                <a:solidFill>
+                  <a:schemeClr val="bg1">
+                    <a:lumMod val="75000"/>
+                  </a:schemeClr>
+                </a:solidFill>
+                <a:latin typeface="Calibri" panose="020F0502020204030204" pitchFamily="34" charset="0"/>
+                <a:cs typeface="Calibri" panose="020F0502020204030204" pitchFamily="34" charset="0"/>
+              </a:rPr>
+              <a:t>Neural</a:t>
+            </a:r>
+            <a:r>
+              <a:rPr lang="en-GB" sz="1200" b="1" dirty="0">
+                <a:latin typeface="Calibri" panose="020F0502020204030204" pitchFamily="34" charset="0"/>
+                <a:ea typeface="Calibri" panose="020F0502020204030204" pitchFamily="34" charset="0"/>
+                <a:cs typeface="Calibri" panose="020F0502020204030204" pitchFamily="34" charset="0"/>
+              </a:rPr>
+              <a:t> </a:t>
+            </a:r>
+            <a:r>
+              <a:rPr lang="en-GB" sz="1200" dirty="0">
+                <a:solidFill>
+                  <a:schemeClr val="bg1">
+                    <a:lumMod val="75000"/>
+                  </a:schemeClr>
+                </a:solidFill>
+                <a:latin typeface="Calibri" panose="020F0502020204030204" pitchFamily="34" charset="0"/>
+                <a:cs typeface="Calibri" panose="020F0502020204030204" pitchFamily="34" charset="0"/>
+              </a:rPr>
+              <a:t>Net</a:t>
+            </a:r>
+            <a:r>
+              <a:rPr lang="en-GB" sz="1200" b="1" dirty="0">
+                <a:latin typeface="Calibri" panose="020F0502020204030204" pitchFamily="34" charset="0"/>
+                <a:ea typeface="Calibri" panose="020F0502020204030204" pitchFamily="34" charset="0"/>
+                <a:cs typeface="Calibri" panose="020F0502020204030204" pitchFamily="34" charset="0"/>
+              </a:rPr>
+              <a:t> </a:t>
+            </a:r>
+            <a:r>
+              <a:rPr lang="en-GB" sz="1200" dirty="0">
+                <a:solidFill>
+                  <a:schemeClr val="bg1">
+                    <a:lumMod val="75000"/>
+                  </a:schemeClr>
+                </a:solidFill>
+                <a:latin typeface="Calibri" panose="020F0502020204030204" pitchFamily="34" charset="0"/>
+                <a:ea typeface="Calibri" panose="020F0502020204030204" pitchFamily="34" charset="0"/>
+                <a:cs typeface="Calibri" panose="020F0502020204030204" pitchFamily="34" charset="0"/>
+              </a:rPr>
+              <a:t>– Challenges </a:t>
+            </a:r>
+            <a:endParaRPr lang="de-DE" sz="1200" dirty="0">
+              <a:solidFill>
+                <a:schemeClr val="bg1">
+                  <a:lumMod val="75000"/>
+                </a:schemeClr>
+              </a:solidFill>
+            </a:endParaRPr>
           </a:p>
         </p:txBody>
       </p:sp>
@@ -22602,1411 +26435,6 @@
       </p:par>
     </p:tnLst>
   </p:timing>
-</p:sld>
-</file>
-
-<file path=ppt/slides/slide9.xml><?xml version="1.0" encoding="utf-8"?>
-<p:sld xmlns:a="http://schemas.openxmlformats.org/drawingml/2006/main" xmlns:r="http://schemas.openxmlformats.org/officeDocument/2006/relationships" xmlns:p="http://schemas.openxmlformats.org/presentationml/2006/main">
-  <p:cSld>
-    <p:spTree>
-      <p:nvGrpSpPr>
-        <p:cNvPr id="1" name="">
-          <a:extLst>
-            <a:ext uri="{FF2B5EF4-FFF2-40B4-BE49-F238E27FC236}">
-              <a16:creationId xmlns:a16="http://schemas.microsoft.com/office/drawing/2014/main" id="{C9AFB400-4531-965B-0FD5-CF4AAA00FE76}"/>
-            </a:ext>
-          </a:extLst>
-        </p:cNvPr>
-        <p:cNvGrpSpPr/>
-        <p:nvPr/>
-      </p:nvGrpSpPr>
-      <p:grpSpPr>
-        <a:xfrm>
-          <a:off x="0" y="0"/>
-          <a:ext cx="0" cy="0"/>
-          <a:chOff x="0" y="0"/>
-          <a:chExt cx="0" cy="0"/>
-        </a:xfrm>
-      </p:grpSpPr>
-      <p:sp>
-        <p:nvSpPr>
-          <p:cNvPr id="7" name="TextBox 4">
-            <a:extLst>
-              <a:ext uri="{FF2B5EF4-FFF2-40B4-BE49-F238E27FC236}">
-                <a16:creationId xmlns:a16="http://schemas.microsoft.com/office/drawing/2014/main" id="{EAAFB241-0783-9EEE-3685-C6C20A71A409}"/>
-              </a:ext>
-            </a:extLst>
-          </p:cNvPr>
-          <p:cNvSpPr txBox="1"/>
-          <p:nvPr/>
-        </p:nvSpPr>
-        <p:spPr>
-          <a:xfrm>
-            <a:off x="3524719" y="6581001"/>
-            <a:ext cx="5142562" cy="276999"/>
-          </a:xfrm>
-          <a:prstGeom prst="rect">
-            <a:avLst/>
-          </a:prstGeom>
-          <a:noFill/>
-        </p:spPr>
-        <p:txBody>
-          <a:bodyPr wrap="none" rtlCol="0">
-            <a:spAutoFit/>
-          </a:bodyPr>
-          <a:lstStyle/>
-          <a:p>
-            <a:r>
-              <a:rPr lang="en-GB" sz="1200" dirty="0">
-                <a:solidFill>
-                  <a:schemeClr val="bg1">
-                    <a:lumMod val="75000"/>
-                  </a:schemeClr>
-                </a:solidFill>
-              </a:rPr>
-              <a:t>Dataset Characteristics </a:t>
-            </a:r>
-            <a:r>
-              <a:rPr lang="en-GB" sz="1200" dirty="0">
-                <a:solidFill>
-                  <a:schemeClr val="bg1">
-                    <a:lumMod val="75000"/>
-                  </a:schemeClr>
-                </a:solidFill>
-                <a:latin typeface="Calibri" panose="020F0502020204030204" pitchFamily="34" charset="0"/>
-                <a:ea typeface="Calibri" panose="020F0502020204030204" pitchFamily="34" charset="0"/>
-                <a:cs typeface="Calibri" panose="020F0502020204030204" pitchFamily="34" charset="0"/>
-              </a:rPr>
-              <a:t>– Baseline Model – </a:t>
-            </a:r>
-            <a:r>
-              <a:rPr lang="en-GB" sz="1200" b="1" dirty="0">
-                <a:latin typeface="Calibri" panose="020F0502020204030204" pitchFamily="34" charset="0"/>
-                <a:ea typeface="Calibri" panose="020F0502020204030204" pitchFamily="34" charset="0"/>
-                <a:cs typeface="Calibri" panose="020F0502020204030204" pitchFamily="34" charset="0"/>
-              </a:rPr>
-              <a:t>Neural Net </a:t>
-            </a:r>
-            <a:r>
-              <a:rPr lang="en-GB" sz="1200" dirty="0">
-                <a:solidFill>
-                  <a:schemeClr val="bg1">
-                    <a:lumMod val="75000"/>
-                  </a:schemeClr>
-                </a:solidFill>
-                <a:latin typeface="Calibri" panose="020F0502020204030204" pitchFamily="34" charset="0"/>
-                <a:ea typeface="Calibri" panose="020F0502020204030204" pitchFamily="34" charset="0"/>
-                <a:cs typeface="Calibri" panose="020F0502020204030204" pitchFamily="34" charset="0"/>
-              </a:rPr>
-              <a:t>– Results – Challenges </a:t>
-            </a:r>
-            <a:endParaRPr lang="de-DE" sz="1200" dirty="0">
-              <a:solidFill>
-                <a:schemeClr val="bg1">
-                  <a:lumMod val="75000"/>
-                </a:schemeClr>
-              </a:solidFill>
-            </a:endParaRPr>
-          </a:p>
-        </p:txBody>
-      </p:sp>
-      <p:sp>
-        <p:nvSpPr>
-          <p:cNvPr id="3" name="Title 2">
-            <a:extLst>
-              <a:ext uri="{FF2B5EF4-FFF2-40B4-BE49-F238E27FC236}">
-                <a16:creationId xmlns:a16="http://schemas.microsoft.com/office/drawing/2014/main" id="{1E8B247F-76E9-DEE9-CA7F-0A59B568FA83}"/>
-              </a:ext>
-            </a:extLst>
-          </p:cNvPr>
-          <p:cNvSpPr>
-            <a:spLocks noGrp="1"/>
-          </p:cNvSpPr>
-          <p:nvPr>
-            <p:ph type="title"/>
-          </p:nvPr>
-        </p:nvSpPr>
-        <p:spPr/>
-        <p:txBody>
-          <a:bodyPr/>
-          <a:lstStyle/>
-          <a:p>
-            <a:r>
-              <a:rPr lang="en-US" dirty="0"/>
-              <a:t>Neural Network</a:t>
-            </a:r>
-            <a:endParaRPr lang="en-GB" dirty="0"/>
-          </a:p>
-        </p:txBody>
-      </p:sp>
-      <p:sp>
-        <p:nvSpPr>
-          <p:cNvPr id="2" name="Slide Number Placeholder 1">
-            <a:extLst>
-              <a:ext uri="{FF2B5EF4-FFF2-40B4-BE49-F238E27FC236}">
-                <a16:creationId xmlns:a16="http://schemas.microsoft.com/office/drawing/2014/main" id="{574E58EE-AC79-B367-77AB-BC04DD1F4E9D}"/>
-              </a:ext>
-            </a:extLst>
-          </p:cNvPr>
-          <p:cNvSpPr>
-            <a:spLocks noGrp="1"/>
-          </p:cNvSpPr>
-          <p:nvPr>
-            <p:ph type="sldNum" sz="quarter" idx="12"/>
-          </p:nvPr>
-        </p:nvSpPr>
-        <p:spPr/>
-        <p:txBody>
-          <a:bodyPr/>
-          <a:lstStyle/>
-          <a:p>
-            <a:fld id="{FEE63D0E-FFEF-43D1-BE35-64C33AF422FD}" type="slidenum">
-              <a:rPr lang="de-DE" smtClean="0"/>
-              <a:t>9</a:t>
-            </a:fld>
-            <a:endParaRPr lang="de-DE"/>
-          </a:p>
-        </p:txBody>
-      </p:sp>
-      <p:sp>
-        <p:nvSpPr>
-          <p:cNvPr id="25" name="TextBox 24">
-            <a:extLst>
-              <a:ext uri="{FF2B5EF4-FFF2-40B4-BE49-F238E27FC236}">
-                <a16:creationId xmlns:a16="http://schemas.microsoft.com/office/drawing/2014/main" id="{852FAF9E-1FFA-DA77-35CD-2C61E5B0CA7D}"/>
-              </a:ext>
-            </a:extLst>
-          </p:cNvPr>
-          <p:cNvSpPr txBox="1"/>
-          <p:nvPr/>
-        </p:nvSpPr>
-        <p:spPr>
-          <a:xfrm>
-            <a:off x="10152105" y="4233003"/>
-            <a:ext cx="1439730" cy="369332"/>
-          </a:xfrm>
-          <a:prstGeom prst="rect">
-            <a:avLst/>
-          </a:prstGeom>
-          <a:noFill/>
-        </p:spPr>
-        <p:txBody>
-          <a:bodyPr wrap="square" rtlCol="0">
-            <a:spAutoFit/>
-          </a:bodyPr>
-          <a:lstStyle/>
-          <a:p>
-            <a:pPr algn="ctr"/>
-            <a:r>
-              <a:rPr lang="en-GB" dirty="0"/>
-              <a:t>0.18081</a:t>
-            </a:r>
-            <a:endParaRPr lang="en-GB" b="1" dirty="0"/>
-          </a:p>
-        </p:txBody>
-      </p:sp>
-      <p:pic>
-        <p:nvPicPr>
-          <p:cNvPr id="2050" name="Picture 2">
-            <a:extLst>
-              <a:ext uri="{FF2B5EF4-FFF2-40B4-BE49-F238E27FC236}">
-                <a16:creationId xmlns:a16="http://schemas.microsoft.com/office/drawing/2014/main" id="{05625916-4F74-97B2-CA33-FED8ADFE5C39}"/>
-              </a:ext>
-            </a:extLst>
-          </p:cNvPr>
-          <p:cNvPicPr>
-            <a:picLocks noChangeAspect="1" noChangeArrowheads="1"/>
-          </p:cNvPicPr>
-          <p:nvPr/>
-        </p:nvPicPr>
-        <p:blipFill>
-          <a:blip r:embed="rId3">
-            <a:extLst>
-              <a:ext uri="{28A0092B-C50C-407E-A947-70E740481C1C}">
-                <a14:useLocalDpi xmlns:a14="http://schemas.microsoft.com/office/drawing/2010/main" val="0"/>
-              </a:ext>
-            </a:extLst>
-          </a:blip>
-          <a:srcRect/>
-          <a:stretch>
-            <a:fillRect/>
-          </a:stretch>
-        </p:blipFill>
-        <p:spPr bwMode="auto">
-          <a:xfrm>
-            <a:off x="10362024" y="3839965"/>
-            <a:ext cx="1019892" cy="395607"/>
-          </a:xfrm>
-          <a:prstGeom prst="rect">
-            <a:avLst/>
-          </a:prstGeom>
-          <a:noFill/>
-          <a:extLst>
-            <a:ext uri="{909E8E84-426E-40DD-AFC4-6F175D3DCCD1}">
-              <a14:hiddenFill xmlns:a14="http://schemas.microsoft.com/office/drawing/2010/main">
-                <a:solidFill>
-                  <a:srgbClr val="FFFFFF"/>
-                </a:solidFill>
-              </a14:hiddenFill>
-            </a:ext>
-          </a:extLst>
-        </p:spPr>
-      </p:pic>
-      <p:grpSp>
-        <p:nvGrpSpPr>
-          <p:cNvPr id="34" name="Group 33">
-            <a:extLst>
-              <a:ext uri="{FF2B5EF4-FFF2-40B4-BE49-F238E27FC236}">
-                <a16:creationId xmlns:a16="http://schemas.microsoft.com/office/drawing/2014/main" id="{92CBC182-FF9E-399B-4ED0-50B195D147E2}"/>
-              </a:ext>
-            </a:extLst>
-          </p:cNvPr>
-          <p:cNvGrpSpPr/>
-          <p:nvPr/>
-        </p:nvGrpSpPr>
-        <p:grpSpPr>
-          <a:xfrm>
-            <a:off x="3071962" y="1900172"/>
-            <a:ext cx="6694805" cy="3425895"/>
-            <a:chOff x="2058288" y="1690688"/>
-            <a:chExt cx="6694805" cy="3425895"/>
-          </a:xfrm>
-        </p:grpSpPr>
-        <p:sp>
-          <p:nvSpPr>
-            <p:cNvPr id="12" name="TextBox 11">
-              <a:extLst>
-                <a:ext uri="{FF2B5EF4-FFF2-40B4-BE49-F238E27FC236}">
-                  <a16:creationId xmlns:a16="http://schemas.microsoft.com/office/drawing/2014/main" id="{467E1574-6256-8D43-E015-709807E911C9}"/>
-                </a:ext>
-              </a:extLst>
-            </p:cNvPr>
-            <p:cNvSpPr txBox="1"/>
-            <p:nvPr/>
-          </p:nvSpPr>
-          <p:spPr>
-            <a:xfrm>
-              <a:off x="2058288" y="4680283"/>
-              <a:ext cx="1507958" cy="369332"/>
-            </a:xfrm>
-            <a:prstGeom prst="rect">
-              <a:avLst/>
-            </a:prstGeom>
-            <a:noFill/>
-          </p:spPr>
-          <p:txBody>
-            <a:bodyPr wrap="square" rtlCol="0">
-              <a:spAutoFit/>
-            </a:bodyPr>
-            <a:lstStyle/>
-            <a:p>
-              <a:r>
-                <a:rPr lang="en-GB" b="1" dirty="0"/>
-                <a:t>Input Layer</a:t>
-              </a:r>
-              <a:endParaRPr lang="en-GB" dirty="0"/>
-            </a:p>
-          </p:txBody>
-        </p:sp>
-        <p:sp>
-          <p:nvSpPr>
-            <p:cNvPr id="13" name="TextBox 12">
-              <a:extLst>
-                <a:ext uri="{FF2B5EF4-FFF2-40B4-BE49-F238E27FC236}">
-                  <a16:creationId xmlns:a16="http://schemas.microsoft.com/office/drawing/2014/main" id="{4B139BA1-8EA7-842A-0B4D-7DBA92601BE2}"/>
-                </a:ext>
-              </a:extLst>
-            </p:cNvPr>
-            <p:cNvSpPr txBox="1"/>
-            <p:nvPr/>
-          </p:nvSpPr>
-          <p:spPr>
-            <a:xfrm>
-              <a:off x="4448910" y="4734732"/>
-              <a:ext cx="1905001" cy="369332"/>
-            </a:xfrm>
-            <a:prstGeom prst="rect">
-              <a:avLst/>
-            </a:prstGeom>
-            <a:noFill/>
-          </p:spPr>
-          <p:txBody>
-            <a:bodyPr wrap="square" rtlCol="0">
-              <a:spAutoFit/>
-            </a:bodyPr>
-            <a:lstStyle/>
-            <a:p>
-              <a:r>
-                <a:rPr lang="en-GB" b="1" dirty="0"/>
-                <a:t>Hidden Layers</a:t>
-              </a:r>
-              <a:endParaRPr lang="en-GB" dirty="0"/>
-            </a:p>
-          </p:txBody>
-        </p:sp>
-        <p:sp>
-          <p:nvSpPr>
-            <p:cNvPr id="14" name="TextBox 13">
-              <a:extLst>
-                <a:ext uri="{FF2B5EF4-FFF2-40B4-BE49-F238E27FC236}">
-                  <a16:creationId xmlns:a16="http://schemas.microsoft.com/office/drawing/2014/main" id="{65B5CBCC-B05E-C2BD-68D7-4CD8F4668DA4}"/>
-                </a:ext>
-              </a:extLst>
-            </p:cNvPr>
-            <p:cNvSpPr txBox="1"/>
-            <p:nvPr/>
-          </p:nvSpPr>
-          <p:spPr>
-            <a:xfrm>
-              <a:off x="6931654" y="4747251"/>
-              <a:ext cx="1821439" cy="369332"/>
-            </a:xfrm>
-            <a:prstGeom prst="rect">
-              <a:avLst/>
-            </a:prstGeom>
-            <a:noFill/>
-          </p:spPr>
-          <p:txBody>
-            <a:bodyPr wrap="square" rtlCol="0">
-              <a:spAutoFit/>
-            </a:bodyPr>
-            <a:lstStyle/>
-            <a:p>
-              <a:r>
-                <a:rPr lang="en-GB" b="1" dirty="0"/>
-                <a:t>Output Layer</a:t>
-              </a:r>
-              <a:endParaRPr lang="en-GB" dirty="0"/>
-            </a:p>
-          </p:txBody>
-        </p:sp>
-        <p:sp>
-          <p:nvSpPr>
-            <p:cNvPr id="18" name="Rectangle 17">
-              <a:extLst>
-                <a:ext uri="{FF2B5EF4-FFF2-40B4-BE49-F238E27FC236}">
-                  <a16:creationId xmlns:a16="http://schemas.microsoft.com/office/drawing/2014/main" id="{5DDC2633-0948-D3A6-A5EF-840C099CDCBE}"/>
-                </a:ext>
-              </a:extLst>
-            </p:cNvPr>
-            <p:cNvSpPr/>
-            <p:nvPr/>
-          </p:nvSpPr>
-          <p:spPr>
-            <a:xfrm>
-              <a:off x="7291135" y="2177716"/>
-              <a:ext cx="1050757" cy="2502568"/>
-            </a:xfrm>
-            <a:prstGeom prst="rect">
-              <a:avLst/>
-            </a:prstGeom>
-            <a:noFill/>
-            <a:ln>
-              <a:noFill/>
-            </a:ln>
-          </p:spPr>
-          <p:style>
-            <a:lnRef idx="0">
-              <a:scrgbClr r="0" g="0" b="0"/>
-            </a:lnRef>
-            <a:fillRef idx="0">
-              <a:scrgbClr r="0" g="0" b="0"/>
-            </a:fillRef>
-            <a:effectRef idx="0">
-              <a:scrgbClr r="0" g="0" b="0"/>
-            </a:effectRef>
-            <a:fontRef idx="minor">
-              <a:schemeClr val="lt1"/>
-            </a:fontRef>
-          </p:style>
-          <p:txBody>
-            <a:bodyPr rtlCol="0" anchor="ctr"/>
-            <a:lstStyle/>
-            <a:p>
-              <a:pPr algn="ctr"/>
-              <a:endParaRPr lang="en-GB"/>
-            </a:p>
-          </p:txBody>
-        </p:sp>
-        <p:grpSp>
-          <p:nvGrpSpPr>
-            <p:cNvPr id="30" name="Group 29">
-              <a:extLst>
-                <a:ext uri="{FF2B5EF4-FFF2-40B4-BE49-F238E27FC236}">
-                  <a16:creationId xmlns:a16="http://schemas.microsoft.com/office/drawing/2014/main" id="{95A3F1CA-4C4F-4623-ADC5-84A401B252D3}"/>
-                </a:ext>
-              </a:extLst>
-            </p:cNvPr>
-            <p:cNvGrpSpPr/>
-            <p:nvPr/>
-          </p:nvGrpSpPr>
-          <p:grpSpPr>
-            <a:xfrm>
-              <a:off x="2379133" y="2305550"/>
-              <a:ext cx="866273" cy="1648872"/>
-              <a:chOff x="1766256" y="2357642"/>
-              <a:chExt cx="866273" cy="1648872"/>
-            </a:xfrm>
-          </p:grpSpPr>
-          <p:sp>
-            <p:nvSpPr>
-              <p:cNvPr id="5" name="Rectangle 4">
-                <a:extLst>
-                  <a:ext uri="{FF2B5EF4-FFF2-40B4-BE49-F238E27FC236}">
-                    <a16:creationId xmlns:a16="http://schemas.microsoft.com/office/drawing/2014/main" id="{721E7BDB-7A18-BC94-D870-6138E49AFFC0}"/>
-                  </a:ext>
-                </a:extLst>
-              </p:cNvPr>
-              <p:cNvSpPr/>
-              <p:nvPr/>
-            </p:nvSpPr>
-            <p:spPr>
-              <a:xfrm>
-                <a:off x="1766256" y="2851483"/>
-                <a:ext cx="866273" cy="1155031"/>
-              </a:xfrm>
-              <a:prstGeom prst="rect">
-                <a:avLst/>
-              </a:prstGeom>
-              <a:effectLst>
-                <a:outerShdw blurRad="63500" sx="102000" sy="102000" algn="ctr" rotWithShape="0">
-                  <a:prstClr val="black">
-                    <a:alpha val="40000"/>
-                  </a:prstClr>
-                </a:outerShdw>
-              </a:effectLst>
-            </p:spPr>
-            <p:style>
-              <a:lnRef idx="2">
-                <a:schemeClr val="accent1">
-                  <a:shade val="15000"/>
-                </a:schemeClr>
-              </a:lnRef>
-              <a:fillRef idx="1">
-                <a:schemeClr val="accent1"/>
-              </a:fillRef>
-              <a:effectRef idx="0">
-                <a:schemeClr val="accent1"/>
-              </a:effectRef>
-              <a:fontRef idx="minor">
-                <a:schemeClr val="lt1"/>
-              </a:fontRef>
-            </p:style>
-            <p:txBody>
-              <a:bodyPr rtlCol="0" anchor="ctr"/>
-              <a:lstStyle/>
-              <a:p>
-                <a:pPr algn="ctr"/>
-                <a:endParaRPr lang="en-GB" dirty="0"/>
-              </a:p>
-            </p:txBody>
-          </p:sp>
-          <p:sp>
-            <p:nvSpPr>
-              <p:cNvPr id="20" name="TextBox 19">
-                <a:extLst>
-                  <a:ext uri="{FF2B5EF4-FFF2-40B4-BE49-F238E27FC236}">
-                    <a16:creationId xmlns:a16="http://schemas.microsoft.com/office/drawing/2014/main" id="{A10B006B-F869-0F02-2458-08591215FB7D}"/>
-                  </a:ext>
-                </a:extLst>
-              </p:cNvPr>
-              <p:cNvSpPr txBox="1"/>
-              <p:nvPr/>
-            </p:nvSpPr>
-            <p:spPr>
-              <a:xfrm>
-                <a:off x="1980817" y="2357642"/>
-                <a:ext cx="437147" cy="369332"/>
-              </a:xfrm>
-              <a:prstGeom prst="rect">
-                <a:avLst/>
-              </a:prstGeom>
-              <a:noFill/>
-            </p:spPr>
-            <p:txBody>
-              <a:bodyPr wrap="square" rtlCol="0">
-                <a:spAutoFit/>
-              </a:bodyPr>
-              <a:lstStyle/>
-              <a:p>
-                <a:pPr algn="ctr"/>
-                <a:r>
-                  <a:rPr lang="en-US" dirty="0"/>
-                  <a:t>1</a:t>
-                </a:r>
-                <a:endParaRPr lang="en-GB" dirty="0"/>
-              </a:p>
-            </p:txBody>
-          </p:sp>
-        </p:grpSp>
-        <p:grpSp>
-          <p:nvGrpSpPr>
-            <p:cNvPr id="26" name="Group 25">
-              <a:extLst>
-                <a:ext uri="{FF2B5EF4-FFF2-40B4-BE49-F238E27FC236}">
-                  <a16:creationId xmlns:a16="http://schemas.microsoft.com/office/drawing/2014/main" id="{5B05BC1A-8421-D3DB-F52D-F491D6613C69}"/>
-                </a:ext>
-              </a:extLst>
-            </p:cNvPr>
-            <p:cNvGrpSpPr/>
-            <p:nvPr/>
-          </p:nvGrpSpPr>
-          <p:grpSpPr>
-            <a:xfrm>
-              <a:off x="3376863" y="1690688"/>
-              <a:ext cx="1050758" cy="2989596"/>
-              <a:chOff x="3376863" y="1690688"/>
-              <a:chExt cx="1050758" cy="2989596"/>
-            </a:xfrm>
-          </p:grpSpPr>
-          <p:sp>
-            <p:nvSpPr>
-              <p:cNvPr id="6" name="Rectangle 5">
-                <a:extLst>
-                  <a:ext uri="{FF2B5EF4-FFF2-40B4-BE49-F238E27FC236}">
-                    <a16:creationId xmlns:a16="http://schemas.microsoft.com/office/drawing/2014/main" id="{C7575598-D569-0FC7-1CB7-4CA74E755AD6}"/>
-                  </a:ext>
-                </a:extLst>
-              </p:cNvPr>
-              <p:cNvSpPr/>
-              <p:nvPr/>
-            </p:nvSpPr>
-            <p:spPr>
-              <a:xfrm>
-                <a:off x="3376864" y="2177715"/>
-                <a:ext cx="1050757" cy="2502568"/>
-              </a:xfrm>
-              <a:prstGeom prst="rect">
-                <a:avLst/>
-              </a:prstGeom>
-              <a:effectLst>
-                <a:outerShdw blurRad="63500" sx="102000" sy="102000" algn="ctr" rotWithShape="0">
-                  <a:prstClr val="black">
-                    <a:alpha val="40000"/>
-                  </a:prstClr>
-                </a:outerShdw>
-              </a:effectLst>
-            </p:spPr>
-            <p:style>
-              <a:lnRef idx="2">
-                <a:schemeClr val="accent1">
-                  <a:shade val="15000"/>
-                </a:schemeClr>
-              </a:lnRef>
-              <a:fillRef idx="1">
-                <a:schemeClr val="accent1"/>
-              </a:fillRef>
-              <a:effectRef idx="0">
-                <a:schemeClr val="accent1"/>
-              </a:effectRef>
-              <a:fontRef idx="minor">
-                <a:schemeClr val="lt1"/>
-              </a:fontRef>
-            </p:style>
-            <p:txBody>
-              <a:bodyPr rtlCol="0" anchor="ctr"/>
-              <a:lstStyle/>
-              <a:p>
-                <a:pPr algn="ctr"/>
-                <a:endParaRPr lang="en-GB" dirty="0"/>
-              </a:p>
-            </p:txBody>
-          </p:sp>
-          <p:sp>
-            <p:nvSpPr>
-              <p:cNvPr id="16" name="Rectangle 15">
-                <a:extLst>
-                  <a:ext uri="{FF2B5EF4-FFF2-40B4-BE49-F238E27FC236}">
-                    <a16:creationId xmlns:a16="http://schemas.microsoft.com/office/drawing/2014/main" id="{6CC3172F-B391-217E-C601-A15EDF634E50}"/>
-                  </a:ext>
-                </a:extLst>
-              </p:cNvPr>
-              <p:cNvSpPr/>
-              <p:nvPr/>
-            </p:nvSpPr>
-            <p:spPr>
-              <a:xfrm>
-                <a:off x="3376863" y="2177716"/>
-                <a:ext cx="1050757" cy="2502568"/>
-              </a:xfrm>
-              <a:prstGeom prst="rect">
-                <a:avLst/>
-              </a:prstGeom>
-              <a:noFill/>
-              <a:ln>
-                <a:noFill/>
-              </a:ln>
-            </p:spPr>
-            <p:style>
-              <a:lnRef idx="0">
-                <a:scrgbClr r="0" g="0" b="0"/>
-              </a:lnRef>
-              <a:fillRef idx="0">
-                <a:scrgbClr r="0" g="0" b="0"/>
-              </a:fillRef>
-              <a:effectRef idx="0">
-                <a:scrgbClr r="0" g="0" b="0"/>
-              </a:effectRef>
-              <a:fontRef idx="minor">
-                <a:schemeClr val="lt1"/>
-              </a:fontRef>
-            </p:style>
-            <p:txBody>
-              <a:bodyPr rtlCol="0" anchor="ctr"/>
-              <a:lstStyle/>
-              <a:p>
-                <a:pPr algn="ctr"/>
-                <a:endParaRPr lang="en-GB"/>
-              </a:p>
-            </p:txBody>
-          </p:sp>
-          <p:sp>
-            <p:nvSpPr>
-              <p:cNvPr id="21" name="TextBox 20">
-                <a:extLst>
-                  <a:ext uri="{FF2B5EF4-FFF2-40B4-BE49-F238E27FC236}">
-                    <a16:creationId xmlns:a16="http://schemas.microsoft.com/office/drawing/2014/main" id="{89C6C6E3-645F-24DA-3FF4-EB7F25B90BBA}"/>
-                  </a:ext>
-                </a:extLst>
-              </p:cNvPr>
-              <p:cNvSpPr txBox="1"/>
-              <p:nvPr/>
-            </p:nvSpPr>
-            <p:spPr>
-              <a:xfrm>
-                <a:off x="3603531" y="1690688"/>
-                <a:ext cx="564948" cy="369332"/>
-              </a:xfrm>
-              <a:prstGeom prst="rect">
-                <a:avLst/>
-              </a:prstGeom>
-              <a:noFill/>
-            </p:spPr>
-            <p:txBody>
-              <a:bodyPr wrap="square" rtlCol="0">
-                <a:spAutoFit/>
-              </a:bodyPr>
-              <a:lstStyle/>
-              <a:p>
-                <a:pPr algn="ctr"/>
-                <a:r>
-                  <a:rPr lang="en-US" dirty="0"/>
-                  <a:t>128</a:t>
-                </a:r>
-                <a:endParaRPr lang="en-GB" dirty="0"/>
-              </a:p>
-            </p:txBody>
-          </p:sp>
-        </p:grpSp>
-        <p:grpSp>
-          <p:nvGrpSpPr>
-            <p:cNvPr id="27" name="Group 26">
-              <a:extLst>
-                <a:ext uri="{FF2B5EF4-FFF2-40B4-BE49-F238E27FC236}">
-                  <a16:creationId xmlns:a16="http://schemas.microsoft.com/office/drawing/2014/main" id="{A00C3E40-5F51-3255-1F00-9D10803B1581}"/>
-                </a:ext>
-              </a:extLst>
-            </p:cNvPr>
-            <p:cNvGrpSpPr/>
-            <p:nvPr/>
-          </p:nvGrpSpPr>
-          <p:grpSpPr>
-            <a:xfrm>
-              <a:off x="4608096" y="1705855"/>
-              <a:ext cx="1050758" cy="2988893"/>
-              <a:chOff x="5333999" y="1691391"/>
-              <a:chExt cx="1050758" cy="2988893"/>
-            </a:xfrm>
-          </p:grpSpPr>
-          <p:sp>
-            <p:nvSpPr>
-              <p:cNvPr id="8" name="Rectangle 7">
-                <a:extLst>
-                  <a:ext uri="{FF2B5EF4-FFF2-40B4-BE49-F238E27FC236}">
-                    <a16:creationId xmlns:a16="http://schemas.microsoft.com/office/drawing/2014/main" id="{95BFA064-F1BB-16E8-11EF-F1E8FE0EF52C}"/>
-                  </a:ext>
-                </a:extLst>
-              </p:cNvPr>
-              <p:cNvSpPr/>
-              <p:nvPr/>
-            </p:nvSpPr>
-            <p:spPr>
-              <a:xfrm>
-                <a:off x="5334000" y="2177715"/>
-                <a:ext cx="1050757" cy="2502568"/>
-              </a:xfrm>
-              <a:prstGeom prst="rect">
-                <a:avLst/>
-              </a:prstGeom>
-              <a:effectLst>
-                <a:outerShdw blurRad="63500" sx="102000" sy="102000" algn="ctr" rotWithShape="0">
-                  <a:prstClr val="black">
-                    <a:alpha val="40000"/>
-                  </a:prstClr>
-                </a:outerShdw>
-              </a:effectLst>
-            </p:spPr>
-            <p:style>
-              <a:lnRef idx="2">
-                <a:schemeClr val="accent1">
-                  <a:shade val="15000"/>
-                </a:schemeClr>
-              </a:lnRef>
-              <a:fillRef idx="1">
-                <a:schemeClr val="accent1"/>
-              </a:fillRef>
-              <a:effectRef idx="0">
-                <a:schemeClr val="accent1"/>
-              </a:effectRef>
-              <a:fontRef idx="minor">
-                <a:schemeClr val="lt1"/>
-              </a:fontRef>
-            </p:style>
-            <p:txBody>
-              <a:bodyPr rtlCol="0" anchor="ctr"/>
-              <a:lstStyle/>
-              <a:p>
-                <a:pPr algn="ctr"/>
-                <a:endParaRPr lang="en-GB"/>
-              </a:p>
-            </p:txBody>
-          </p:sp>
-          <p:sp>
-            <p:nvSpPr>
-              <p:cNvPr id="17" name="Rectangle 16">
-                <a:extLst>
-                  <a:ext uri="{FF2B5EF4-FFF2-40B4-BE49-F238E27FC236}">
-                    <a16:creationId xmlns:a16="http://schemas.microsoft.com/office/drawing/2014/main" id="{6BE887DE-7105-7D4C-DFFE-70588C1EEB20}"/>
-                  </a:ext>
-                </a:extLst>
-              </p:cNvPr>
-              <p:cNvSpPr/>
-              <p:nvPr/>
-            </p:nvSpPr>
-            <p:spPr>
-              <a:xfrm>
-                <a:off x="5333999" y="2177716"/>
-                <a:ext cx="1050757" cy="2502568"/>
-              </a:xfrm>
-              <a:prstGeom prst="rect">
-                <a:avLst/>
-              </a:prstGeom>
-              <a:noFill/>
-              <a:ln>
-                <a:noFill/>
-              </a:ln>
-            </p:spPr>
-            <p:style>
-              <a:lnRef idx="0">
-                <a:scrgbClr r="0" g="0" b="0"/>
-              </a:lnRef>
-              <a:fillRef idx="0">
-                <a:scrgbClr r="0" g="0" b="0"/>
-              </a:fillRef>
-              <a:effectRef idx="0">
-                <a:scrgbClr r="0" g="0" b="0"/>
-              </a:effectRef>
-              <a:fontRef idx="minor">
-                <a:schemeClr val="lt1"/>
-              </a:fontRef>
-            </p:style>
-            <p:txBody>
-              <a:bodyPr rtlCol="0" anchor="ctr"/>
-              <a:lstStyle/>
-              <a:p>
-                <a:pPr algn="ctr"/>
-                <a:endParaRPr lang="en-GB"/>
-              </a:p>
-            </p:txBody>
-          </p:sp>
-          <p:sp>
-            <p:nvSpPr>
-              <p:cNvPr id="22" name="TextBox 21">
-                <a:extLst>
-                  <a:ext uri="{FF2B5EF4-FFF2-40B4-BE49-F238E27FC236}">
-                    <a16:creationId xmlns:a16="http://schemas.microsoft.com/office/drawing/2014/main" id="{0CD23BA4-7281-426E-485D-54366FFEE931}"/>
-                  </a:ext>
-                </a:extLst>
-              </p:cNvPr>
-              <p:cNvSpPr txBox="1"/>
-              <p:nvPr/>
-            </p:nvSpPr>
-            <p:spPr>
-              <a:xfrm>
-                <a:off x="5572688" y="1691391"/>
-                <a:ext cx="437147" cy="369332"/>
-              </a:xfrm>
-              <a:prstGeom prst="rect">
-                <a:avLst/>
-              </a:prstGeom>
-              <a:noFill/>
-            </p:spPr>
-            <p:txBody>
-              <a:bodyPr wrap="square" rtlCol="0">
-                <a:spAutoFit/>
-              </a:bodyPr>
-              <a:lstStyle/>
-              <a:p>
-                <a:pPr algn="ctr"/>
-                <a:r>
-                  <a:rPr lang="en-US" dirty="0"/>
-                  <a:t>64</a:t>
-                </a:r>
-                <a:endParaRPr lang="en-GB" dirty="0"/>
-              </a:p>
-            </p:txBody>
-          </p:sp>
-        </p:grpSp>
-        <p:grpSp>
-          <p:nvGrpSpPr>
-            <p:cNvPr id="28" name="Group 27">
-              <a:extLst>
-                <a:ext uri="{FF2B5EF4-FFF2-40B4-BE49-F238E27FC236}">
-                  <a16:creationId xmlns:a16="http://schemas.microsoft.com/office/drawing/2014/main" id="{7638EAB7-50CE-0C58-52A9-4F260C141D6C}"/>
-                </a:ext>
-              </a:extLst>
-            </p:cNvPr>
-            <p:cNvGrpSpPr/>
-            <p:nvPr/>
-          </p:nvGrpSpPr>
-          <p:grpSpPr>
-            <a:xfrm>
-              <a:off x="5880897" y="1690688"/>
-              <a:ext cx="1050757" cy="2989595"/>
-              <a:chOff x="7291136" y="1690688"/>
-              <a:chExt cx="1050757" cy="2989595"/>
-            </a:xfrm>
-          </p:grpSpPr>
-          <p:sp>
-            <p:nvSpPr>
-              <p:cNvPr id="9" name="Rectangle 8">
-                <a:extLst>
-                  <a:ext uri="{FF2B5EF4-FFF2-40B4-BE49-F238E27FC236}">
-                    <a16:creationId xmlns:a16="http://schemas.microsoft.com/office/drawing/2014/main" id="{6270D976-6A08-5277-910A-C931B4B85D2C}"/>
-                  </a:ext>
-                </a:extLst>
-              </p:cNvPr>
-              <p:cNvSpPr/>
-              <p:nvPr/>
-            </p:nvSpPr>
-            <p:spPr>
-              <a:xfrm>
-                <a:off x="7291136" y="2177715"/>
-                <a:ext cx="1050757" cy="2502568"/>
-              </a:xfrm>
-              <a:prstGeom prst="rect">
-                <a:avLst/>
-              </a:prstGeom>
-              <a:effectLst>
-                <a:outerShdw blurRad="63500" sx="102000" sy="102000" algn="ctr" rotWithShape="0">
-                  <a:prstClr val="black">
-                    <a:alpha val="40000"/>
-                  </a:prstClr>
-                </a:outerShdw>
-              </a:effectLst>
-            </p:spPr>
-            <p:style>
-              <a:lnRef idx="2">
-                <a:schemeClr val="accent1">
-                  <a:shade val="15000"/>
-                </a:schemeClr>
-              </a:lnRef>
-              <a:fillRef idx="1">
-                <a:schemeClr val="accent1"/>
-              </a:fillRef>
-              <a:effectRef idx="0">
-                <a:schemeClr val="accent1"/>
-              </a:effectRef>
-              <a:fontRef idx="minor">
-                <a:schemeClr val="lt1"/>
-              </a:fontRef>
-            </p:style>
-            <p:txBody>
-              <a:bodyPr rtlCol="0" anchor="ctr"/>
-              <a:lstStyle/>
-              <a:p>
-                <a:pPr algn="ctr"/>
-                <a:endParaRPr lang="en-GB" dirty="0"/>
-              </a:p>
-            </p:txBody>
-          </p:sp>
-          <p:sp>
-            <p:nvSpPr>
-              <p:cNvPr id="23" name="TextBox 22">
-                <a:extLst>
-                  <a:ext uri="{FF2B5EF4-FFF2-40B4-BE49-F238E27FC236}">
-                    <a16:creationId xmlns:a16="http://schemas.microsoft.com/office/drawing/2014/main" id="{DAFB9A14-A888-9AAB-E597-CE51AEF66530}"/>
-                  </a:ext>
-                </a:extLst>
-              </p:cNvPr>
-              <p:cNvSpPr txBox="1"/>
-              <p:nvPr/>
-            </p:nvSpPr>
-            <p:spPr>
-              <a:xfrm>
-                <a:off x="7634041" y="1690688"/>
-                <a:ext cx="437147" cy="369332"/>
-              </a:xfrm>
-              <a:prstGeom prst="rect">
-                <a:avLst/>
-              </a:prstGeom>
-              <a:noFill/>
-            </p:spPr>
-            <p:txBody>
-              <a:bodyPr wrap="square" rtlCol="0">
-                <a:spAutoFit/>
-              </a:bodyPr>
-              <a:lstStyle/>
-              <a:p>
-                <a:pPr algn="ctr"/>
-                <a:r>
-                  <a:rPr lang="en-US" dirty="0"/>
-                  <a:t>32</a:t>
-                </a:r>
-                <a:endParaRPr lang="en-GB" dirty="0"/>
-              </a:p>
-            </p:txBody>
-          </p:sp>
-        </p:grpSp>
-        <p:grpSp>
-          <p:nvGrpSpPr>
-            <p:cNvPr id="31" name="Group 30">
-              <a:extLst>
-                <a:ext uri="{FF2B5EF4-FFF2-40B4-BE49-F238E27FC236}">
-                  <a16:creationId xmlns:a16="http://schemas.microsoft.com/office/drawing/2014/main" id="{343122A3-08D4-5E60-4569-0A9ED7217F2A}"/>
-                </a:ext>
-              </a:extLst>
-            </p:cNvPr>
-            <p:cNvGrpSpPr/>
-            <p:nvPr/>
-          </p:nvGrpSpPr>
-          <p:grpSpPr>
-            <a:xfrm>
-              <a:off x="7059637" y="2374647"/>
-              <a:ext cx="866273" cy="1648872"/>
-              <a:chOff x="1372715" y="2357642"/>
-              <a:chExt cx="866273" cy="1648872"/>
-            </a:xfrm>
-          </p:grpSpPr>
-          <p:sp>
-            <p:nvSpPr>
-              <p:cNvPr id="32" name="Rectangle 31">
-                <a:extLst>
-                  <a:ext uri="{FF2B5EF4-FFF2-40B4-BE49-F238E27FC236}">
-                    <a16:creationId xmlns:a16="http://schemas.microsoft.com/office/drawing/2014/main" id="{B1D1E401-FE21-9B84-13F2-8CE70D8A9D86}"/>
-                  </a:ext>
-                </a:extLst>
-              </p:cNvPr>
-              <p:cNvSpPr/>
-              <p:nvPr/>
-            </p:nvSpPr>
-            <p:spPr>
-              <a:xfrm>
-                <a:off x="1372715" y="2851483"/>
-                <a:ext cx="866273" cy="1155031"/>
-              </a:xfrm>
-              <a:prstGeom prst="rect">
-                <a:avLst/>
-              </a:prstGeom>
-              <a:effectLst>
-                <a:outerShdw blurRad="63500" sx="102000" sy="102000" algn="ctr" rotWithShape="0">
-                  <a:prstClr val="black">
-                    <a:alpha val="40000"/>
-                  </a:prstClr>
-                </a:outerShdw>
-              </a:effectLst>
-            </p:spPr>
-            <p:style>
-              <a:lnRef idx="2">
-                <a:schemeClr val="accent1">
-                  <a:shade val="15000"/>
-                </a:schemeClr>
-              </a:lnRef>
-              <a:fillRef idx="1">
-                <a:schemeClr val="accent1"/>
-              </a:fillRef>
-              <a:effectRef idx="0">
-                <a:schemeClr val="accent1"/>
-              </a:effectRef>
-              <a:fontRef idx="minor">
-                <a:schemeClr val="lt1"/>
-              </a:fontRef>
-            </p:style>
-            <p:txBody>
-              <a:bodyPr rtlCol="0" anchor="ctr"/>
-              <a:lstStyle/>
-              <a:p>
-                <a:pPr algn="ctr"/>
-                <a:endParaRPr lang="en-GB" dirty="0"/>
-              </a:p>
-            </p:txBody>
-          </p:sp>
-          <p:sp>
-            <p:nvSpPr>
-              <p:cNvPr id="33" name="TextBox 32">
-                <a:extLst>
-                  <a:ext uri="{FF2B5EF4-FFF2-40B4-BE49-F238E27FC236}">
-                    <a16:creationId xmlns:a16="http://schemas.microsoft.com/office/drawing/2014/main" id="{359156CE-2DAD-E5BE-2161-0A63982451A1}"/>
-                  </a:ext>
-                </a:extLst>
-              </p:cNvPr>
-              <p:cNvSpPr txBox="1"/>
-              <p:nvPr/>
-            </p:nvSpPr>
-            <p:spPr>
-              <a:xfrm>
-                <a:off x="1587276" y="2357642"/>
-                <a:ext cx="437147" cy="369332"/>
-              </a:xfrm>
-              <a:prstGeom prst="rect">
-                <a:avLst/>
-              </a:prstGeom>
-              <a:noFill/>
-            </p:spPr>
-            <p:txBody>
-              <a:bodyPr wrap="square" rtlCol="0">
-                <a:spAutoFit/>
-              </a:bodyPr>
-              <a:lstStyle/>
-              <a:p>
-                <a:pPr algn="ctr"/>
-                <a:r>
-                  <a:rPr lang="en-US" dirty="0"/>
-                  <a:t>1</a:t>
-                </a:r>
-                <a:endParaRPr lang="en-GB" dirty="0"/>
-              </a:p>
-            </p:txBody>
-          </p:sp>
-        </p:grpSp>
-      </p:grpSp>
-      <p:sp>
-        <p:nvSpPr>
-          <p:cNvPr id="35" name="Rectangle 34">
-            <a:extLst>
-              <a:ext uri="{FF2B5EF4-FFF2-40B4-BE49-F238E27FC236}">
-                <a16:creationId xmlns:a16="http://schemas.microsoft.com/office/drawing/2014/main" id="{28297CAB-61F1-1C7C-66B3-09BA0BBB0A31}"/>
-              </a:ext>
-            </a:extLst>
-          </p:cNvPr>
-          <p:cNvSpPr/>
-          <p:nvPr/>
-        </p:nvSpPr>
-        <p:spPr>
-          <a:xfrm>
-            <a:off x="196375" y="2953463"/>
-            <a:ext cx="2060293" cy="1792313"/>
-          </a:xfrm>
-          <a:prstGeom prst="rect">
-            <a:avLst/>
-          </a:prstGeom>
-          <a:noFill/>
-          <a:ln>
-            <a:noFill/>
-          </a:ln>
-        </p:spPr>
-        <p:style>
-          <a:lnRef idx="0">
-            <a:scrgbClr r="0" g="0" b="0"/>
-          </a:lnRef>
-          <a:fillRef idx="0">
-            <a:scrgbClr r="0" g="0" b="0"/>
-          </a:fillRef>
-          <a:effectRef idx="0">
-            <a:scrgbClr r="0" g="0" b="0"/>
-          </a:effectRef>
-          <a:fontRef idx="minor">
-            <a:schemeClr val="dk1"/>
-          </a:fontRef>
-        </p:style>
-        <p:txBody>
-          <a:bodyPr rtlCol="0" anchor="ctr"/>
-          <a:lstStyle/>
-          <a:p>
-            <a:pPr algn="ctr">
-              <a:lnSpc>
-                <a:spcPct val="150000"/>
-              </a:lnSpc>
-            </a:pPr>
-            <a:r>
-              <a:rPr lang="en-GB" dirty="0"/>
-              <a:t>Temperature</a:t>
-            </a:r>
-          </a:p>
-          <a:p>
-            <a:pPr algn="ctr">
-              <a:lnSpc>
-                <a:spcPct val="150000"/>
-              </a:lnSpc>
-            </a:pPr>
-            <a:r>
-              <a:rPr lang="en-GB" dirty="0"/>
-              <a:t>School Holidays</a:t>
-            </a:r>
-          </a:p>
-          <a:p>
-            <a:pPr algn="ctr">
-              <a:lnSpc>
-                <a:spcPct val="150000"/>
-              </a:lnSpc>
-            </a:pPr>
-            <a:r>
-              <a:rPr lang="en-GB" dirty="0"/>
-              <a:t>Weekday</a:t>
-            </a:r>
-          </a:p>
-          <a:p>
-            <a:pPr algn="ctr">
-              <a:lnSpc>
-                <a:spcPct val="150000"/>
-              </a:lnSpc>
-              <a:buNone/>
-            </a:pPr>
-            <a:r>
-              <a:rPr lang="en-GB" dirty="0"/>
-              <a:t>Days till NYE</a:t>
-            </a:r>
-          </a:p>
-        </p:txBody>
-      </p:sp>
-      <p:sp>
-        <p:nvSpPr>
-          <p:cNvPr id="37" name="TextBox 36">
-            <a:extLst>
-              <a:ext uri="{FF2B5EF4-FFF2-40B4-BE49-F238E27FC236}">
-                <a16:creationId xmlns:a16="http://schemas.microsoft.com/office/drawing/2014/main" id="{213AA277-D541-DE90-66F5-A68FDC064C74}"/>
-              </a:ext>
-            </a:extLst>
-          </p:cNvPr>
-          <p:cNvSpPr txBox="1"/>
-          <p:nvPr/>
-        </p:nvSpPr>
-        <p:spPr>
-          <a:xfrm>
-            <a:off x="196374" y="2515034"/>
-            <a:ext cx="2060293" cy="369332"/>
-          </a:xfrm>
-          <a:prstGeom prst="rect">
-            <a:avLst/>
-          </a:prstGeom>
-          <a:noFill/>
-        </p:spPr>
-        <p:txBody>
-          <a:bodyPr wrap="square">
-            <a:spAutoFit/>
-          </a:bodyPr>
-          <a:lstStyle/>
-          <a:p>
-            <a:pPr algn="ctr"/>
-            <a:r>
-              <a:rPr lang="en-US" b="1" dirty="0"/>
-              <a:t>Features</a:t>
-            </a:r>
-            <a:r>
-              <a:rPr lang="en-GB" b="1" dirty="0"/>
-              <a:t>:</a:t>
-            </a:r>
-          </a:p>
-        </p:txBody>
-      </p:sp>
-      <p:cxnSp>
-        <p:nvCxnSpPr>
-          <p:cNvPr id="39" name="Straight Arrow Connector 38">
-            <a:extLst>
-              <a:ext uri="{FF2B5EF4-FFF2-40B4-BE49-F238E27FC236}">
-                <a16:creationId xmlns:a16="http://schemas.microsoft.com/office/drawing/2014/main" id="{B1BD9003-8AD4-D5FB-41BC-91B720CD5C6D}"/>
-              </a:ext>
-            </a:extLst>
-          </p:cNvPr>
-          <p:cNvCxnSpPr>
-            <a:cxnSpLocks/>
-          </p:cNvCxnSpPr>
-          <p:nvPr/>
-        </p:nvCxnSpPr>
-        <p:spPr>
-          <a:xfrm>
-            <a:off x="2453833" y="3507912"/>
-            <a:ext cx="382601" cy="0"/>
-          </a:xfrm>
-          <a:prstGeom prst="straightConnector1">
-            <a:avLst/>
-          </a:prstGeom>
-          <a:ln>
-            <a:tailEnd type="triangle"/>
-          </a:ln>
-        </p:spPr>
-        <p:style>
-          <a:lnRef idx="2">
-            <a:schemeClr val="accent1"/>
-          </a:lnRef>
-          <a:fillRef idx="0">
-            <a:schemeClr val="accent1"/>
-          </a:fillRef>
-          <a:effectRef idx="1">
-            <a:schemeClr val="accent1"/>
-          </a:effectRef>
-          <a:fontRef idx="minor">
-            <a:schemeClr val="tx1"/>
-          </a:fontRef>
-        </p:style>
-      </p:cxnSp>
-      <p:sp>
-        <p:nvSpPr>
-          <p:cNvPr id="41" name="Rectangle 40">
-            <a:extLst>
-              <a:ext uri="{FF2B5EF4-FFF2-40B4-BE49-F238E27FC236}">
-                <a16:creationId xmlns:a16="http://schemas.microsoft.com/office/drawing/2014/main" id="{DDFB0E2C-9FD8-79D9-69B0-9DF171AE3039}"/>
-              </a:ext>
-            </a:extLst>
-          </p:cNvPr>
-          <p:cNvSpPr/>
-          <p:nvPr/>
-        </p:nvSpPr>
-        <p:spPr>
-          <a:xfrm>
-            <a:off x="9551941" y="2047652"/>
-            <a:ext cx="2640059" cy="1792313"/>
-          </a:xfrm>
-          <a:prstGeom prst="rect">
-            <a:avLst/>
-          </a:prstGeom>
-          <a:noFill/>
-          <a:ln>
-            <a:noFill/>
-          </a:ln>
-        </p:spPr>
-        <p:style>
-          <a:lnRef idx="0">
-            <a:scrgbClr r="0" g="0" b="0"/>
-          </a:lnRef>
-          <a:fillRef idx="0">
-            <a:scrgbClr r="0" g="0" b="0"/>
-          </a:fillRef>
-          <a:effectRef idx="0">
-            <a:scrgbClr r="0" g="0" b="0"/>
-          </a:effectRef>
-          <a:fontRef idx="minor">
-            <a:schemeClr val="dk1"/>
-          </a:fontRef>
-        </p:style>
-        <p:txBody>
-          <a:bodyPr rtlCol="0" anchor="ctr"/>
-          <a:lstStyle/>
-          <a:p>
-            <a:pPr algn="ctr">
-              <a:lnSpc>
-                <a:spcPct val="150000"/>
-              </a:lnSpc>
-            </a:pPr>
-            <a:r>
-              <a:rPr lang="en-GB" b="1" dirty="0"/>
-              <a:t>MAPE</a:t>
-            </a:r>
-          </a:p>
-          <a:p>
-            <a:pPr>
-              <a:lnSpc>
-                <a:spcPct val="150000"/>
-              </a:lnSpc>
-            </a:pPr>
-            <a:r>
-              <a:rPr lang="en-GB" dirty="0"/>
-              <a:t>Validation Data :</a:t>
-            </a:r>
-          </a:p>
-          <a:p>
-            <a:pPr>
-              <a:lnSpc>
-                <a:spcPct val="150000"/>
-              </a:lnSpc>
-            </a:pPr>
-            <a:r>
-              <a:rPr lang="en-GB" dirty="0"/>
-              <a:t>Train + Validation Data :</a:t>
-            </a:r>
-          </a:p>
-        </p:txBody>
-      </p:sp>
-      <p:sp>
-        <p:nvSpPr>
-          <p:cNvPr id="2056" name="TextBox 2055">
-            <a:extLst>
-              <a:ext uri="{FF2B5EF4-FFF2-40B4-BE49-F238E27FC236}">
-                <a16:creationId xmlns:a16="http://schemas.microsoft.com/office/drawing/2014/main" id="{1E9FC7F8-12DA-4FF9-BBB4-AD585E1BB919}"/>
-              </a:ext>
-            </a:extLst>
-          </p:cNvPr>
-          <p:cNvSpPr txBox="1"/>
-          <p:nvPr/>
-        </p:nvSpPr>
-        <p:spPr>
-          <a:xfrm>
-            <a:off x="7682731" y="360266"/>
-            <a:ext cx="795821" cy="369332"/>
-          </a:xfrm>
-          <a:prstGeom prst="rect">
-            <a:avLst/>
-          </a:prstGeom>
-          <a:noFill/>
-        </p:spPr>
-        <p:txBody>
-          <a:bodyPr wrap="square">
-            <a:spAutoFit/>
-          </a:bodyPr>
-          <a:lstStyle/>
-          <a:p>
-            <a:r>
-              <a:rPr lang="en-GB" dirty="0"/>
-              <a:t>ReLU</a:t>
-            </a:r>
-          </a:p>
-        </p:txBody>
-      </p:sp>
-      <p:sp>
-        <p:nvSpPr>
-          <p:cNvPr id="2058" name="TextBox 2057">
-            <a:extLst>
-              <a:ext uri="{FF2B5EF4-FFF2-40B4-BE49-F238E27FC236}">
-                <a16:creationId xmlns:a16="http://schemas.microsoft.com/office/drawing/2014/main" id="{4145C1F0-B4B1-775C-0E57-57160E2F16AD}"/>
-              </a:ext>
-            </a:extLst>
-          </p:cNvPr>
-          <p:cNvSpPr txBox="1"/>
-          <p:nvPr/>
-        </p:nvSpPr>
-        <p:spPr>
-          <a:xfrm>
-            <a:off x="7682731" y="840811"/>
-            <a:ext cx="6094140" cy="369332"/>
-          </a:xfrm>
-          <a:prstGeom prst="rect">
-            <a:avLst/>
-          </a:prstGeom>
-          <a:noFill/>
-        </p:spPr>
-        <p:txBody>
-          <a:bodyPr wrap="square">
-            <a:spAutoFit/>
-          </a:bodyPr>
-          <a:lstStyle/>
-          <a:p>
-            <a:r>
-              <a:rPr lang="en-GB" dirty="0"/>
-              <a:t>Regularization: L2</a:t>
-            </a:r>
-          </a:p>
-        </p:txBody>
-      </p:sp>
-    </p:spTree>
-    <p:extLst>
-      <p:ext uri="{BB962C8B-B14F-4D97-AF65-F5344CB8AC3E}">
-        <p14:creationId xmlns:p14="http://schemas.microsoft.com/office/powerpoint/2010/main" val="1505701908"/>
-      </p:ext>
-    </p:extLst>
-  </p:cSld>
-  <p:clrMapOvr>
-    <a:masterClrMapping/>
-  </p:clrMapOvr>
 </p:sld>
 </file>
 

--- a/4_Presentation/Group 3.pptx
+++ b/4_Presentation/Group 3.pptx
@@ -304,7 +304,7 @@
           <a:p>
             <a:fld id="{D702BB35-AE6A-4528-8F32-D1F8A7B871D9}" type="datetimeFigureOut">
               <a:rPr lang="en-GB" smtClean="0"/>
-              <a:t>02/07/2025</a:t>
+              <a:t>03/07/2025</a:t>
             </a:fld>
             <a:endParaRPr lang="en-GB"/>
           </a:p>
@@ -616,481 +616,6 @@
           <a:bodyPr/>
           <a:lstStyle/>
           <a:p>
-            <a:r>
-              <a:rPr lang="en-US" dirty="0"/>
-              <a:t>The photos thing is just a suggestion, </a:t>
-            </a:r>
-            <a:r>
-              <a:rPr lang="en-US" dirty="0" err="1"/>
-              <a:t>i</a:t>
-            </a:r>
-            <a:r>
-              <a:rPr lang="en-US" dirty="0"/>
-              <a:t> find it good idea since people from online never saw us, but I understand if you don’t like it. (stole your linked in photo for that lol)</a:t>
-            </a:r>
-          </a:p>
-          <a:p>
-            <a:endParaRPr lang="en-US" dirty="0"/>
-          </a:p>
-          <a:p>
-            <a:endParaRPr lang="en-US" dirty="0"/>
-          </a:p>
-          <a:p>
-            <a:pPr marL="0" marR="0" lvl="0" indent="0" algn="l" defTabSz="914400" rtl="0" eaLnBrk="1" fontAlgn="auto" latinLnBrk="0" hangingPunct="1">
-              <a:lnSpc>
-                <a:spcPct val="100000"/>
-              </a:lnSpc>
-              <a:spcBef>
-                <a:spcPts val="0"/>
-              </a:spcBef>
-              <a:spcAft>
-                <a:spcPts val="0"/>
-              </a:spcAft>
-              <a:buClrTx/>
-              <a:buSzTx/>
-              <a:buFontTx/>
-              <a:buNone/>
-              <a:tabLst/>
-              <a:defRPr/>
-            </a:pPr>
-            <a:r>
-              <a:rPr lang="en-US" dirty="0"/>
-              <a:t>Also the </a:t>
-            </a:r>
-            <a:r>
-              <a:rPr lang="en-GB" sz="1200" dirty="0">
-                <a:solidFill>
-                  <a:schemeClr val="bg1">
-                    <a:lumMod val="75000"/>
-                  </a:schemeClr>
-                </a:solidFill>
-              </a:rPr>
-              <a:t>Dataset Characteristics </a:t>
-            </a:r>
-            <a:r>
-              <a:rPr lang="en-GB" sz="1200" dirty="0">
-                <a:solidFill>
-                  <a:schemeClr val="bg1">
-                    <a:lumMod val="75000"/>
-                  </a:schemeClr>
-                </a:solidFill>
-                <a:latin typeface="Calibri" panose="020F0502020204030204" pitchFamily="34" charset="0"/>
-                <a:ea typeface="Calibri" panose="020F0502020204030204" pitchFamily="34" charset="0"/>
-                <a:cs typeface="Calibri" panose="020F0502020204030204" pitchFamily="34" charset="0"/>
-              </a:rPr>
-              <a:t>– </a:t>
-            </a:r>
-            <a:r>
-              <a:rPr lang="en-GB" sz="1200" dirty="0">
-                <a:latin typeface="Calibri" panose="020F0502020204030204" pitchFamily="34" charset="0"/>
-                <a:ea typeface="Calibri" panose="020F0502020204030204" pitchFamily="34" charset="0"/>
-                <a:cs typeface="Calibri" panose="020F0502020204030204" pitchFamily="34" charset="0"/>
-              </a:rPr>
-              <a:t>Baseline Model </a:t>
-            </a:r>
-            <a:r>
-              <a:rPr lang="en-GB" sz="1200" dirty="0">
-                <a:solidFill>
-                  <a:schemeClr val="bg1">
-                    <a:lumMod val="75000"/>
-                  </a:schemeClr>
-                </a:solidFill>
-                <a:latin typeface="Calibri" panose="020F0502020204030204" pitchFamily="34" charset="0"/>
-                <a:ea typeface="Calibri" panose="020F0502020204030204" pitchFamily="34" charset="0"/>
-                <a:cs typeface="Calibri" panose="020F0502020204030204" pitchFamily="34" charset="0"/>
-              </a:rPr>
-              <a:t>– Neural Net – Results – Challenges </a:t>
-            </a:r>
-            <a:r>
-              <a:rPr lang="de-DE" sz="1200" dirty="0">
-                <a:solidFill>
-                  <a:schemeClr val="bg1">
-                    <a:lumMod val="75000"/>
-                  </a:schemeClr>
-                </a:solidFill>
-                <a:latin typeface="Calibri" panose="020F0502020204030204" pitchFamily="34" charset="0"/>
-                <a:ea typeface="Calibri" panose="020F0502020204030204" pitchFamily="34" charset="0"/>
-                <a:cs typeface="Calibri" panose="020F0502020204030204" pitchFamily="34" charset="0"/>
-              </a:rPr>
-              <a:t> </a:t>
-            </a:r>
-            <a:r>
-              <a:rPr lang="de-DE" sz="1200" dirty="0" err="1">
-                <a:solidFill>
-                  <a:schemeClr val="bg1">
-                    <a:lumMod val="75000"/>
-                  </a:schemeClr>
-                </a:solidFill>
-                <a:latin typeface="Calibri" panose="020F0502020204030204" pitchFamily="34" charset="0"/>
-                <a:ea typeface="Calibri" panose="020F0502020204030204" pitchFamily="34" charset="0"/>
-                <a:cs typeface="Calibri" panose="020F0502020204030204" pitchFamily="34" charset="0"/>
-              </a:rPr>
-              <a:t>footer</a:t>
-            </a:r>
-            <a:r>
-              <a:rPr lang="de-DE" sz="1200" dirty="0">
-                <a:solidFill>
-                  <a:schemeClr val="bg1">
-                    <a:lumMod val="75000"/>
-                  </a:schemeClr>
-                </a:solidFill>
-                <a:latin typeface="Calibri" panose="020F0502020204030204" pitchFamily="34" charset="0"/>
-                <a:ea typeface="Calibri" panose="020F0502020204030204" pitchFamily="34" charset="0"/>
-                <a:cs typeface="Calibri" panose="020F0502020204030204" pitchFamily="34" charset="0"/>
-              </a:rPr>
-              <a:t> </a:t>
-            </a:r>
-            <a:r>
-              <a:rPr lang="de-DE" sz="1200" dirty="0" err="1">
-                <a:solidFill>
-                  <a:schemeClr val="bg1">
-                    <a:lumMod val="75000"/>
-                  </a:schemeClr>
-                </a:solidFill>
-                <a:latin typeface="Calibri" panose="020F0502020204030204" pitchFamily="34" charset="0"/>
-                <a:ea typeface="Calibri" panose="020F0502020204030204" pitchFamily="34" charset="0"/>
-                <a:cs typeface="Calibri" panose="020F0502020204030204" pitchFamily="34" charset="0"/>
-              </a:rPr>
-              <a:t>is</a:t>
-            </a:r>
-            <a:r>
-              <a:rPr lang="de-DE" sz="1200" dirty="0">
-                <a:solidFill>
-                  <a:schemeClr val="bg1">
-                    <a:lumMod val="75000"/>
-                  </a:schemeClr>
-                </a:solidFill>
-                <a:latin typeface="Calibri" panose="020F0502020204030204" pitchFamily="34" charset="0"/>
-                <a:ea typeface="Calibri" panose="020F0502020204030204" pitchFamily="34" charset="0"/>
-                <a:cs typeface="Calibri" panose="020F0502020204030204" pitchFamily="34" charset="0"/>
-              </a:rPr>
-              <a:t> </a:t>
-            </a:r>
-            <a:r>
-              <a:rPr lang="de-DE" sz="1200" dirty="0" err="1">
-                <a:solidFill>
-                  <a:schemeClr val="bg1">
-                    <a:lumMod val="75000"/>
-                  </a:schemeClr>
-                </a:solidFill>
-                <a:latin typeface="Calibri" panose="020F0502020204030204" pitchFamily="34" charset="0"/>
-                <a:ea typeface="Calibri" panose="020F0502020204030204" pitchFamily="34" charset="0"/>
-                <a:cs typeface="Calibri" panose="020F0502020204030204" pitchFamily="34" charset="0"/>
-              </a:rPr>
-              <a:t>the</a:t>
-            </a:r>
-            <a:r>
-              <a:rPr lang="de-DE" sz="1200" dirty="0">
-                <a:solidFill>
-                  <a:schemeClr val="bg1">
-                    <a:lumMod val="75000"/>
-                  </a:schemeClr>
-                </a:solidFill>
-                <a:latin typeface="Calibri" panose="020F0502020204030204" pitchFamily="34" charset="0"/>
-                <a:ea typeface="Calibri" panose="020F0502020204030204" pitchFamily="34" charset="0"/>
-                <a:cs typeface="Calibri" panose="020F0502020204030204" pitchFamily="34" charset="0"/>
-              </a:rPr>
-              <a:t> last </a:t>
-            </a:r>
-            <a:r>
-              <a:rPr lang="de-DE" sz="1200" dirty="0" err="1">
-                <a:solidFill>
-                  <a:schemeClr val="bg1">
-                    <a:lumMod val="75000"/>
-                  </a:schemeClr>
-                </a:solidFill>
-                <a:latin typeface="Calibri" panose="020F0502020204030204" pitchFamily="34" charset="0"/>
-                <a:ea typeface="Calibri" panose="020F0502020204030204" pitchFamily="34" charset="0"/>
-                <a:cs typeface="Calibri" panose="020F0502020204030204" pitchFamily="34" charset="0"/>
-              </a:rPr>
-              <a:t>thing</a:t>
-            </a:r>
-            <a:r>
-              <a:rPr lang="de-DE" sz="1200" dirty="0">
-                <a:solidFill>
-                  <a:schemeClr val="bg1">
-                    <a:lumMod val="75000"/>
-                  </a:schemeClr>
-                </a:solidFill>
-                <a:latin typeface="Calibri" panose="020F0502020204030204" pitchFamily="34" charset="0"/>
-                <a:ea typeface="Calibri" panose="020F0502020204030204" pitchFamily="34" charset="0"/>
-                <a:cs typeface="Calibri" panose="020F0502020204030204" pitchFamily="34" charset="0"/>
-              </a:rPr>
-              <a:t> i will </a:t>
-            </a:r>
-            <a:r>
-              <a:rPr lang="de-DE" sz="1200" dirty="0" err="1">
-                <a:solidFill>
-                  <a:schemeClr val="bg1">
-                    <a:lumMod val="75000"/>
-                  </a:schemeClr>
-                </a:solidFill>
-                <a:latin typeface="Calibri" panose="020F0502020204030204" pitchFamily="34" charset="0"/>
-                <a:ea typeface="Calibri" panose="020F0502020204030204" pitchFamily="34" charset="0"/>
-                <a:cs typeface="Calibri" panose="020F0502020204030204" pitchFamily="34" charset="0"/>
-              </a:rPr>
-              <a:t>correct</a:t>
-            </a:r>
-            <a:r>
-              <a:rPr lang="de-DE" sz="1200" dirty="0">
-                <a:solidFill>
-                  <a:schemeClr val="bg1">
-                    <a:lumMod val="75000"/>
-                  </a:schemeClr>
-                </a:solidFill>
-                <a:latin typeface="Calibri" panose="020F0502020204030204" pitchFamily="34" charset="0"/>
-                <a:ea typeface="Calibri" panose="020F0502020204030204" pitchFamily="34" charset="0"/>
-                <a:cs typeface="Calibri" panose="020F0502020204030204" pitchFamily="34" charset="0"/>
-              </a:rPr>
-              <a:t>! In </a:t>
-            </a:r>
-            <a:r>
-              <a:rPr lang="de-DE" sz="1200" dirty="0" err="1">
-                <a:solidFill>
-                  <a:schemeClr val="bg1">
-                    <a:lumMod val="75000"/>
-                  </a:schemeClr>
-                </a:solidFill>
-                <a:latin typeface="Calibri" panose="020F0502020204030204" pitchFamily="34" charset="0"/>
-                <a:ea typeface="Calibri" panose="020F0502020204030204" pitchFamily="34" charset="0"/>
-                <a:cs typeface="Calibri" panose="020F0502020204030204" pitchFamily="34" charset="0"/>
-              </a:rPr>
-              <a:t>case</a:t>
-            </a:r>
-            <a:r>
-              <a:rPr lang="de-DE" sz="1200" dirty="0">
-                <a:solidFill>
-                  <a:schemeClr val="bg1">
-                    <a:lumMod val="75000"/>
-                  </a:schemeClr>
-                </a:solidFill>
-                <a:latin typeface="Calibri" panose="020F0502020204030204" pitchFamily="34" charset="0"/>
-                <a:ea typeface="Calibri" panose="020F0502020204030204" pitchFamily="34" charset="0"/>
-                <a:cs typeface="Calibri" panose="020F0502020204030204" pitchFamily="34" charset="0"/>
-              </a:rPr>
-              <a:t> </a:t>
-            </a:r>
-            <a:r>
-              <a:rPr lang="de-DE" sz="1200" dirty="0" err="1">
-                <a:solidFill>
-                  <a:schemeClr val="bg1">
-                    <a:lumMod val="75000"/>
-                  </a:schemeClr>
-                </a:solidFill>
-                <a:latin typeface="Calibri" panose="020F0502020204030204" pitchFamily="34" charset="0"/>
-                <a:ea typeface="Calibri" panose="020F0502020204030204" pitchFamily="34" charset="0"/>
-                <a:cs typeface="Calibri" panose="020F0502020204030204" pitchFamily="34" charset="0"/>
-              </a:rPr>
-              <a:t>you</a:t>
-            </a:r>
-            <a:r>
-              <a:rPr lang="de-DE" sz="1200" dirty="0">
-                <a:solidFill>
-                  <a:schemeClr val="bg1">
-                    <a:lumMod val="75000"/>
-                  </a:schemeClr>
-                </a:solidFill>
-                <a:latin typeface="Calibri" panose="020F0502020204030204" pitchFamily="34" charset="0"/>
-                <a:ea typeface="Calibri" panose="020F0502020204030204" pitchFamily="34" charset="0"/>
-                <a:cs typeface="Calibri" panose="020F0502020204030204" pitchFamily="34" charset="0"/>
-              </a:rPr>
-              <a:t> </a:t>
-            </a:r>
-            <a:r>
-              <a:rPr lang="de-DE" sz="1200" dirty="0" err="1">
-                <a:solidFill>
-                  <a:schemeClr val="bg1">
-                    <a:lumMod val="75000"/>
-                  </a:schemeClr>
-                </a:solidFill>
-                <a:latin typeface="Calibri" panose="020F0502020204030204" pitchFamily="34" charset="0"/>
-                <a:ea typeface="Calibri" panose="020F0502020204030204" pitchFamily="34" charset="0"/>
-                <a:cs typeface="Calibri" panose="020F0502020204030204" pitchFamily="34" charset="0"/>
-              </a:rPr>
-              <a:t>are</a:t>
-            </a:r>
-            <a:r>
-              <a:rPr lang="de-DE" sz="1200" dirty="0">
-                <a:solidFill>
-                  <a:schemeClr val="bg1">
-                    <a:lumMod val="75000"/>
-                  </a:schemeClr>
-                </a:solidFill>
-                <a:latin typeface="Calibri" panose="020F0502020204030204" pitchFamily="34" charset="0"/>
-                <a:ea typeface="Calibri" panose="020F0502020204030204" pitchFamily="34" charset="0"/>
-                <a:cs typeface="Calibri" panose="020F0502020204030204" pitchFamily="34" charset="0"/>
-              </a:rPr>
-              <a:t> </a:t>
-            </a:r>
-            <a:r>
-              <a:rPr lang="de-DE" sz="1200" dirty="0" err="1">
-                <a:solidFill>
-                  <a:schemeClr val="bg1">
-                    <a:lumMod val="75000"/>
-                  </a:schemeClr>
-                </a:solidFill>
-                <a:latin typeface="Calibri" panose="020F0502020204030204" pitchFamily="34" charset="0"/>
-                <a:ea typeface="Calibri" panose="020F0502020204030204" pitchFamily="34" charset="0"/>
-                <a:cs typeface="Calibri" panose="020F0502020204030204" pitchFamily="34" charset="0"/>
-              </a:rPr>
-              <a:t>seeing</a:t>
-            </a:r>
-            <a:r>
-              <a:rPr lang="de-DE" sz="1200" dirty="0">
-                <a:solidFill>
-                  <a:schemeClr val="bg1">
-                    <a:lumMod val="75000"/>
-                  </a:schemeClr>
-                </a:solidFill>
-                <a:latin typeface="Calibri" panose="020F0502020204030204" pitchFamily="34" charset="0"/>
-                <a:ea typeface="Calibri" panose="020F0502020204030204" pitchFamily="34" charset="0"/>
-                <a:cs typeface="Calibri" panose="020F0502020204030204" pitchFamily="34" charset="0"/>
-              </a:rPr>
-              <a:t> </a:t>
-            </a:r>
-            <a:r>
-              <a:rPr lang="de-DE" sz="1200" dirty="0" err="1">
-                <a:solidFill>
-                  <a:schemeClr val="bg1">
-                    <a:lumMod val="75000"/>
-                  </a:schemeClr>
-                </a:solidFill>
-                <a:latin typeface="Calibri" panose="020F0502020204030204" pitchFamily="34" charset="0"/>
-                <a:ea typeface="Calibri" panose="020F0502020204030204" pitchFamily="34" charset="0"/>
-                <a:cs typeface="Calibri" panose="020F0502020204030204" pitchFamily="34" charset="0"/>
-              </a:rPr>
-              <a:t>it</a:t>
-            </a:r>
-            <a:r>
-              <a:rPr lang="de-DE" sz="1200" dirty="0">
-                <a:solidFill>
-                  <a:schemeClr val="bg1">
-                    <a:lumMod val="75000"/>
-                  </a:schemeClr>
-                </a:solidFill>
-                <a:latin typeface="Calibri" panose="020F0502020204030204" pitchFamily="34" charset="0"/>
-                <a:ea typeface="Calibri" panose="020F0502020204030204" pitchFamily="34" charset="0"/>
-                <a:cs typeface="Calibri" panose="020F0502020204030204" pitchFamily="34" charset="0"/>
-              </a:rPr>
-              <a:t> </a:t>
-            </a:r>
-            <a:r>
-              <a:rPr lang="de-DE" sz="1200" dirty="0" err="1">
-                <a:solidFill>
-                  <a:schemeClr val="bg1">
-                    <a:lumMod val="75000"/>
-                  </a:schemeClr>
-                </a:solidFill>
-                <a:latin typeface="Calibri" panose="020F0502020204030204" pitchFamily="34" charset="0"/>
-                <a:ea typeface="Calibri" panose="020F0502020204030204" pitchFamily="34" charset="0"/>
-                <a:cs typeface="Calibri" panose="020F0502020204030204" pitchFamily="34" charset="0"/>
-              </a:rPr>
-              <a:t>missing</a:t>
-            </a:r>
-            <a:r>
-              <a:rPr lang="de-DE" sz="1200" dirty="0">
-                <a:solidFill>
-                  <a:schemeClr val="bg1">
-                    <a:lumMod val="75000"/>
-                  </a:schemeClr>
-                </a:solidFill>
-                <a:latin typeface="Calibri" panose="020F0502020204030204" pitchFamily="34" charset="0"/>
-                <a:ea typeface="Calibri" panose="020F0502020204030204" pitchFamily="34" charset="0"/>
-                <a:cs typeface="Calibri" panose="020F0502020204030204" pitchFamily="34" charset="0"/>
-              </a:rPr>
-              <a:t> </a:t>
-            </a:r>
-            <a:r>
-              <a:rPr lang="de-DE" sz="1200" dirty="0" err="1">
-                <a:solidFill>
-                  <a:schemeClr val="bg1">
-                    <a:lumMod val="75000"/>
-                  </a:schemeClr>
-                </a:solidFill>
-                <a:latin typeface="Calibri" panose="020F0502020204030204" pitchFamily="34" charset="0"/>
-                <a:ea typeface="Calibri" panose="020F0502020204030204" pitchFamily="34" charset="0"/>
-                <a:cs typeface="Calibri" panose="020F0502020204030204" pitchFamily="34" charset="0"/>
-              </a:rPr>
-              <a:t>or</a:t>
-            </a:r>
-            <a:r>
-              <a:rPr lang="de-DE" sz="1200" dirty="0">
-                <a:solidFill>
-                  <a:schemeClr val="bg1">
-                    <a:lumMod val="75000"/>
-                  </a:schemeClr>
-                </a:solidFill>
-                <a:latin typeface="Calibri" panose="020F0502020204030204" pitchFamily="34" charset="0"/>
-                <a:ea typeface="Calibri" panose="020F0502020204030204" pitchFamily="34" charset="0"/>
-                <a:cs typeface="Calibri" panose="020F0502020204030204" pitchFamily="34" charset="0"/>
-              </a:rPr>
-              <a:t> </a:t>
-            </a:r>
-            <a:r>
-              <a:rPr lang="de-DE" sz="1200" dirty="0" err="1">
-                <a:solidFill>
-                  <a:schemeClr val="bg1">
-                    <a:lumMod val="75000"/>
-                  </a:schemeClr>
-                </a:solidFill>
-                <a:latin typeface="Calibri" panose="020F0502020204030204" pitchFamily="34" charset="0"/>
-                <a:ea typeface="Calibri" panose="020F0502020204030204" pitchFamily="34" charset="0"/>
-                <a:cs typeface="Calibri" panose="020F0502020204030204" pitchFamily="34" charset="0"/>
-              </a:rPr>
-              <a:t>there</a:t>
-            </a:r>
-            <a:r>
-              <a:rPr lang="de-DE" sz="1200" dirty="0">
-                <a:solidFill>
-                  <a:schemeClr val="bg1">
-                    <a:lumMod val="75000"/>
-                  </a:schemeClr>
-                </a:solidFill>
-                <a:latin typeface="Calibri" panose="020F0502020204030204" pitchFamily="34" charset="0"/>
-                <a:ea typeface="Calibri" panose="020F0502020204030204" pitchFamily="34" charset="0"/>
-                <a:cs typeface="Calibri" panose="020F0502020204030204" pitchFamily="34" charset="0"/>
-              </a:rPr>
-              <a:t> </a:t>
-            </a:r>
-            <a:r>
-              <a:rPr lang="de-DE" sz="1200" dirty="0" err="1">
-                <a:solidFill>
-                  <a:schemeClr val="bg1">
-                    <a:lumMod val="75000"/>
-                  </a:schemeClr>
-                </a:solidFill>
-                <a:latin typeface="Calibri" panose="020F0502020204030204" pitchFamily="34" charset="0"/>
-                <a:ea typeface="Calibri" panose="020F0502020204030204" pitchFamily="34" charset="0"/>
-                <a:cs typeface="Calibri" panose="020F0502020204030204" pitchFamily="34" charset="0"/>
-              </a:rPr>
-              <a:t>are</a:t>
-            </a:r>
-            <a:r>
-              <a:rPr lang="de-DE" sz="1200" dirty="0">
-                <a:solidFill>
-                  <a:schemeClr val="bg1">
-                    <a:lumMod val="75000"/>
-                  </a:schemeClr>
-                </a:solidFill>
-                <a:latin typeface="Calibri" panose="020F0502020204030204" pitchFamily="34" charset="0"/>
-                <a:ea typeface="Calibri" panose="020F0502020204030204" pitchFamily="34" charset="0"/>
-                <a:cs typeface="Calibri" panose="020F0502020204030204" pitchFamily="34" charset="0"/>
-              </a:rPr>
-              <a:t> </a:t>
-            </a:r>
-            <a:r>
-              <a:rPr lang="de-DE" sz="1200" dirty="0" err="1">
-                <a:solidFill>
-                  <a:schemeClr val="bg1">
-                    <a:lumMod val="75000"/>
-                  </a:schemeClr>
-                </a:solidFill>
-                <a:latin typeface="Calibri" panose="020F0502020204030204" pitchFamily="34" charset="0"/>
-                <a:ea typeface="Calibri" panose="020F0502020204030204" pitchFamily="34" charset="0"/>
-                <a:cs typeface="Calibri" panose="020F0502020204030204" pitchFamily="34" charset="0"/>
-              </a:rPr>
-              <a:t>inconsistencies</a:t>
-            </a:r>
             <a:endParaRPr lang="en-US" dirty="0"/>
           </a:p>
         </p:txBody>
@@ -1277,481 +802,6 @@
           <a:bodyPr/>
           <a:lstStyle/>
           <a:p>
-            <a:r>
-              <a:rPr lang="en-US" dirty="0"/>
-              <a:t>The photos thing is just a suggestion, </a:t>
-            </a:r>
-            <a:r>
-              <a:rPr lang="en-US" dirty="0" err="1"/>
-              <a:t>i</a:t>
-            </a:r>
-            <a:r>
-              <a:rPr lang="en-US" dirty="0"/>
-              <a:t> find it good idea since people from online never saw us, but I understand if you don’t like it. (stole your linked in photo for that lol)</a:t>
-            </a:r>
-          </a:p>
-          <a:p>
-            <a:endParaRPr lang="en-US" dirty="0"/>
-          </a:p>
-          <a:p>
-            <a:endParaRPr lang="en-US" dirty="0"/>
-          </a:p>
-          <a:p>
-            <a:pPr marL="0" marR="0" lvl="0" indent="0" algn="l" defTabSz="914400" rtl="0" eaLnBrk="1" fontAlgn="auto" latinLnBrk="0" hangingPunct="1">
-              <a:lnSpc>
-                <a:spcPct val="100000"/>
-              </a:lnSpc>
-              <a:spcBef>
-                <a:spcPts val="0"/>
-              </a:spcBef>
-              <a:spcAft>
-                <a:spcPts val="0"/>
-              </a:spcAft>
-              <a:buClrTx/>
-              <a:buSzTx/>
-              <a:buFontTx/>
-              <a:buNone/>
-              <a:tabLst/>
-              <a:defRPr/>
-            </a:pPr>
-            <a:r>
-              <a:rPr lang="en-US" dirty="0"/>
-              <a:t>Also the </a:t>
-            </a:r>
-            <a:r>
-              <a:rPr lang="en-GB" sz="1200" dirty="0">
-                <a:solidFill>
-                  <a:schemeClr val="bg1">
-                    <a:lumMod val="75000"/>
-                  </a:schemeClr>
-                </a:solidFill>
-              </a:rPr>
-              <a:t>Dataset Characteristics </a:t>
-            </a:r>
-            <a:r>
-              <a:rPr lang="en-GB" sz="1200" dirty="0">
-                <a:solidFill>
-                  <a:schemeClr val="bg1">
-                    <a:lumMod val="75000"/>
-                  </a:schemeClr>
-                </a:solidFill>
-                <a:latin typeface="Calibri" panose="020F0502020204030204" pitchFamily="34" charset="0"/>
-                <a:ea typeface="Calibri" panose="020F0502020204030204" pitchFamily="34" charset="0"/>
-                <a:cs typeface="Calibri" panose="020F0502020204030204" pitchFamily="34" charset="0"/>
-              </a:rPr>
-              <a:t>– </a:t>
-            </a:r>
-            <a:r>
-              <a:rPr lang="en-GB" sz="1200" dirty="0">
-                <a:latin typeface="Calibri" panose="020F0502020204030204" pitchFamily="34" charset="0"/>
-                <a:ea typeface="Calibri" panose="020F0502020204030204" pitchFamily="34" charset="0"/>
-                <a:cs typeface="Calibri" panose="020F0502020204030204" pitchFamily="34" charset="0"/>
-              </a:rPr>
-              <a:t>Baseline Model </a:t>
-            </a:r>
-            <a:r>
-              <a:rPr lang="en-GB" sz="1200" dirty="0">
-                <a:solidFill>
-                  <a:schemeClr val="bg1">
-                    <a:lumMod val="75000"/>
-                  </a:schemeClr>
-                </a:solidFill>
-                <a:latin typeface="Calibri" panose="020F0502020204030204" pitchFamily="34" charset="0"/>
-                <a:ea typeface="Calibri" panose="020F0502020204030204" pitchFamily="34" charset="0"/>
-                <a:cs typeface="Calibri" panose="020F0502020204030204" pitchFamily="34" charset="0"/>
-              </a:rPr>
-              <a:t>– Neural Net – Results – Challenges </a:t>
-            </a:r>
-            <a:r>
-              <a:rPr lang="de-DE" sz="1200" dirty="0">
-                <a:solidFill>
-                  <a:schemeClr val="bg1">
-                    <a:lumMod val="75000"/>
-                  </a:schemeClr>
-                </a:solidFill>
-                <a:latin typeface="Calibri" panose="020F0502020204030204" pitchFamily="34" charset="0"/>
-                <a:ea typeface="Calibri" panose="020F0502020204030204" pitchFamily="34" charset="0"/>
-                <a:cs typeface="Calibri" panose="020F0502020204030204" pitchFamily="34" charset="0"/>
-              </a:rPr>
-              <a:t> </a:t>
-            </a:r>
-            <a:r>
-              <a:rPr lang="de-DE" sz="1200" dirty="0" err="1">
-                <a:solidFill>
-                  <a:schemeClr val="bg1">
-                    <a:lumMod val="75000"/>
-                  </a:schemeClr>
-                </a:solidFill>
-                <a:latin typeface="Calibri" panose="020F0502020204030204" pitchFamily="34" charset="0"/>
-                <a:ea typeface="Calibri" panose="020F0502020204030204" pitchFamily="34" charset="0"/>
-                <a:cs typeface="Calibri" panose="020F0502020204030204" pitchFamily="34" charset="0"/>
-              </a:rPr>
-              <a:t>footer</a:t>
-            </a:r>
-            <a:r>
-              <a:rPr lang="de-DE" sz="1200" dirty="0">
-                <a:solidFill>
-                  <a:schemeClr val="bg1">
-                    <a:lumMod val="75000"/>
-                  </a:schemeClr>
-                </a:solidFill>
-                <a:latin typeface="Calibri" panose="020F0502020204030204" pitchFamily="34" charset="0"/>
-                <a:ea typeface="Calibri" panose="020F0502020204030204" pitchFamily="34" charset="0"/>
-                <a:cs typeface="Calibri" panose="020F0502020204030204" pitchFamily="34" charset="0"/>
-              </a:rPr>
-              <a:t> </a:t>
-            </a:r>
-            <a:r>
-              <a:rPr lang="de-DE" sz="1200" dirty="0" err="1">
-                <a:solidFill>
-                  <a:schemeClr val="bg1">
-                    <a:lumMod val="75000"/>
-                  </a:schemeClr>
-                </a:solidFill>
-                <a:latin typeface="Calibri" panose="020F0502020204030204" pitchFamily="34" charset="0"/>
-                <a:ea typeface="Calibri" panose="020F0502020204030204" pitchFamily="34" charset="0"/>
-                <a:cs typeface="Calibri" panose="020F0502020204030204" pitchFamily="34" charset="0"/>
-              </a:rPr>
-              <a:t>is</a:t>
-            </a:r>
-            <a:r>
-              <a:rPr lang="de-DE" sz="1200" dirty="0">
-                <a:solidFill>
-                  <a:schemeClr val="bg1">
-                    <a:lumMod val="75000"/>
-                  </a:schemeClr>
-                </a:solidFill>
-                <a:latin typeface="Calibri" panose="020F0502020204030204" pitchFamily="34" charset="0"/>
-                <a:ea typeface="Calibri" panose="020F0502020204030204" pitchFamily="34" charset="0"/>
-                <a:cs typeface="Calibri" panose="020F0502020204030204" pitchFamily="34" charset="0"/>
-              </a:rPr>
-              <a:t> </a:t>
-            </a:r>
-            <a:r>
-              <a:rPr lang="de-DE" sz="1200" dirty="0" err="1">
-                <a:solidFill>
-                  <a:schemeClr val="bg1">
-                    <a:lumMod val="75000"/>
-                  </a:schemeClr>
-                </a:solidFill>
-                <a:latin typeface="Calibri" panose="020F0502020204030204" pitchFamily="34" charset="0"/>
-                <a:ea typeface="Calibri" panose="020F0502020204030204" pitchFamily="34" charset="0"/>
-                <a:cs typeface="Calibri" panose="020F0502020204030204" pitchFamily="34" charset="0"/>
-              </a:rPr>
-              <a:t>the</a:t>
-            </a:r>
-            <a:r>
-              <a:rPr lang="de-DE" sz="1200" dirty="0">
-                <a:solidFill>
-                  <a:schemeClr val="bg1">
-                    <a:lumMod val="75000"/>
-                  </a:schemeClr>
-                </a:solidFill>
-                <a:latin typeface="Calibri" panose="020F0502020204030204" pitchFamily="34" charset="0"/>
-                <a:ea typeface="Calibri" panose="020F0502020204030204" pitchFamily="34" charset="0"/>
-                <a:cs typeface="Calibri" panose="020F0502020204030204" pitchFamily="34" charset="0"/>
-              </a:rPr>
-              <a:t> last </a:t>
-            </a:r>
-            <a:r>
-              <a:rPr lang="de-DE" sz="1200" dirty="0" err="1">
-                <a:solidFill>
-                  <a:schemeClr val="bg1">
-                    <a:lumMod val="75000"/>
-                  </a:schemeClr>
-                </a:solidFill>
-                <a:latin typeface="Calibri" panose="020F0502020204030204" pitchFamily="34" charset="0"/>
-                <a:ea typeface="Calibri" panose="020F0502020204030204" pitchFamily="34" charset="0"/>
-                <a:cs typeface="Calibri" panose="020F0502020204030204" pitchFamily="34" charset="0"/>
-              </a:rPr>
-              <a:t>thing</a:t>
-            </a:r>
-            <a:r>
-              <a:rPr lang="de-DE" sz="1200" dirty="0">
-                <a:solidFill>
-                  <a:schemeClr val="bg1">
-                    <a:lumMod val="75000"/>
-                  </a:schemeClr>
-                </a:solidFill>
-                <a:latin typeface="Calibri" panose="020F0502020204030204" pitchFamily="34" charset="0"/>
-                <a:ea typeface="Calibri" panose="020F0502020204030204" pitchFamily="34" charset="0"/>
-                <a:cs typeface="Calibri" panose="020F0502020204030204" pitchFamily="34" charset="0"/>
-              </a:rPr>
-              <a:t> i will </a:t>
-            </a:r>
-            <a:r>
-              <a:rPr lang="de-DE" sz="1200" dirty="0" err="1">
-                <a:solidFill>
-                  <a:schemeClr val="bg1">
-                    <a:lumMod val="75000"/>
-                  </a:schemeClr>
-                </a:solidFill>
-                <a:latin typeface="Calibri" panose="020F0502020204030204" pitchFamily="34" charset="0"/>
-                <a:ea typeface="Calibri" panose="020F0502020204030204" pitchFamily="34" charset="0"/>
-                <a:cs typeface="Calibri" panose="020F0502020204030204" pitchFamily="34" charset="0"/>
-              </a:rPr>
-              <a:t>correct</a:t>
-            </a:r>
-            <a:r>
-              <a:rPr lang="de-DE" sz="1200" dirty="0">
-                <a:solidFill>
-                  <a:schemeClr val="bg1">
-                    <a:lumMod val="75000"/>
-                  </a:schemeClr>
-                </a:solidFill>
-                <a:latin typeface="Calibri" panose="020F0502020204030204" pitchFamily="34" charset="0"/>
-                <a:ea typeface="Calibri" panose="020F0502020204030204" pitchFamily="34" charset="0"/>
-                <a:cs typeface="Calibri" panose="020F0502020204030204" pitchFamily="34" charset="0"/>
-              </a:rPr>
-              <a:t>! In </a:t>
-            </a:r>
-            <a:r>
-              <a:rPr lang="de-DE" sz="1200" dirty="0" err="1">
-                <a:solidFill>
-                  <a:schemeClr val="bg1">
-                    <a:lumMod val="75000"/>
-                  </a:schemeClr>
-                </a:solidFill>
-                <a:latin typeface="Calibri" panose="020F0502020204030204" pitchFamily="34" charset="0"/>
-                <a:ea typeface="Calibri" panose="020F0502020204030204" pitchFamily="34" charset="0"/>
-                <a:cs typeface="Calibri" panose="020F0502020204030204" pitchFamily="34" charset="0"/>
-              </a:rPr>
-              <a:t>case</a:t>
-            </a:r>
-            <a:r>
-              <a:rPr lang="de-DE" sz="1200" dirty="0">
-                <a:solidFill>
-                  <a:schemeClr val="bg1">
-                    <a:lumMod val="75000"/>
-                  </a:schemeClr>
-                </a:solidFill>
-                <a:latin typeface="Calibri" panose="020F0502020204030204" pitchFamily="34" charset="0"/>
-                <a:ea typeface="Calibri" panose="020F0502020204030204" pitchFamily="34" charset="0"/>
-                <a:cs typeface="Calibri" panose="020F0502020204030204" pitchFamily="34" charset="0"/>
-              </a:rPr>
-              <a:t> </a:t>
-            </a:r>
-            <a:r>
-              <a:rPr lang="de-DE" sz="1200" dirty="0" err="1">
-                <a:solidFill>
-                  <a:schemeClr val="bg1">
-                    <a:lumMod val="75000"/>
-                  </a:schemeClr>
-                </a:solidFill>
-                <a:latin typeface="Calibri" panose="020F0502020204030204" pitchFamily="34" charset="0"/>
-                <a:ea typeface="Calibri" panose="020F0502020204030204" pitchFamily="34" charset="0"/>
-                <a:cs typeface="Calibri" panose="020F0502020204030204" pitchFamily="34" charset="0"/>
-              </a:rPr>
-              <a:t>you</a:t>
-            </a:r>
-            <a:r>
-              <a:rPr lang="de-DE" sz="1200" dirty="0">
-                <a:solidFill>
-                  <a:schemeClr val="bg1">
-                    <a:lumMod val="75000"/>
-                  </a:schemeClr>
-                </a:solidFill>
-                <a:latin typeface="Calibri" panose="020F0502020204030204" pitchFamily="34" charset="0"/>
-                <a:ea typeface="Calibri" panose="020F0502020204030204" pitchFamily="34" charset="0"/>
-                <a:cs typeface="Calibri" panose="020F0502020204030204" pitchFamily="34" charset="0"/>
-              </a:rPr>
-              <a:t> </a:t>
-            </a:r>
-            <a:r>
-              <a:rPr lang="de-DE" sz="1200" dirty="0" err="1">
-                <a:solidFill>
-                  <a:schemeClr val="bg1">
-                    <a:lumMod val="75000"/>
-                  </a:schemeClr>
-                </a:solidFill>
-                <a:latin typeface="Calibri" panose="020F0502020204030204" pitchFamily="34" charset="0"/>
-                <a:ea typeface="Calibri" panose="020F0502020204030204" pitchFamily="34" charset="0"/>
-                <a:cs typeface="Calibri" panose="020F0502020204030204" pitchFamily="34" charset="0"/>
-              </a:rPr>
-              <a:t>are</a:t>
-            </a:r>
-            <a:r>
-              <a:rPr lang="de-DE" sz="1200" dirty="0">
-                <a:solidFill>
-                  <a:schemeClr val="bg1">
-                    <a:lumMod val="75000"/>
-                  </a:schemeClr>
-                </a:solidFill>
-                <a:latin typeface="Calibri" panose="020F0502020204030204" pitchFamily="34" charset="0"/>
-                <a:ea typeface="Calibri" panose="020F0502020204030204" pitchFamily="34" charset="0"/>
-                <a:cs typeface="Calibri" panose="020F0502020204030204" pitchFamily="34" charset="0"/>
-              </a:rPr>
-              <a:t> </a:t>
-            </a:r>
-            <a:r>
-              <a:rPr lang="de-DE" sz="1200" dirty="0" err="1">
-                <a:solidFill>
-                  <a:schemeClr val="bg1">
-                    <a:lumMod val="75000"/>
-                  </a:schemeClr>
-                </a:solidFill>
-                <a:latin typeface="Calibri" panose="020F0502020204030204" pitchFamily="34" charset="0"/>
-                <a:ea typeface="Calibri" panose="020F0502020204030204" pitchFamily="34" charset="0"/>
-                <a:cs typeface="Calibri" panose="020F0502020204030204" pitchFamily="34" charset="0"/>
-              </a:rPr>
-              <a:t>seeing</a:t>
-            </a:r>
-            <a:r>
-              <a:rPr lang="de-DE" sz="1200" dirty="0">
-                <a:solidFill>
-                  <a:schemeClr val="bg1">
-                    <a:lumMod val="75000"/>
-                  </a:schemeClr>
-                </a:solidFill>
-                <a:latin typeface="Calibri" panose="020F0502020204030204" pitchFamily="34" charset="0"/>
-                <a:ea typeface="Calibri" panose="020F0502020204030204" pitchFamily="34" charset="0"/>
-                <a:cs typeface="Calibri" panose="020F0502020204030204" pitchFamily="34" charset="0"/>
-              </a:rPr>
-              <a:t> </a:t>
-            </a:r>
-            <a:r>
-              <a:rPr lang="de-DE" sz="1200" dirty="0" err="1">
-                <a:solidFill>
-                  <a:schemeClr val="bg1">
-                    <a:lumMod val="75000"/>
-                  </a:schemeClr>
-                </a:solidFill>
-                <a:latin typeface="Calibri" panose="020F0502020204030204" pitchFamily="34" charset="0"/>
-                <a:ea typeface="Calibri" panose="020F0502020204030204" pitchFamily="34" charset="0"/>
-                <a:cs typeface="Calibri" panose="020F0502020204030204" pitchFamily="34" charset="0"/>
-              </a:rPr>
-              <a:t>it</a:t>
-            </a:r>
-            <a:r>
-              <a:rPr lang="de-DE" sz="1200" dirty="0">
-                <a:solidFill>
-                  <a:schemeClr val="bg1">
-                    <a:lumMod val="75000"/>
-                  </a:schemeClr>
-                </a:solidFill>
-                <a:latin typeface="Calibri" panose="020F0502020204030204" pitchFamily="34" charset="0"/>
-                <a:ea typeface="Calibri" panose="020F0502020204030204" pitchFamily="34" charset="0"/>
-                <a:cs typeface="Calibri" panose="020F0502020204030204" pitchFamily="34" charset="0"/>
-              </a:rPr>
-              <a:t> </a:t>
-            </a:r>
-            <a:r>
-              <a:rPr lang="de-DE" sz="1200" dirty="0" err="1">
-                <a:solidFill>
-                  <a:schemeClr val="bg1">
-                    <a:lumMod val="75000"/>
-                  </a:schemeClr>
-                </a:solidFill>
-                <a:latin typeface="Calibri" panose="020F0502020204030204" pitchFamily="34" charset="0"/>
-                <a:ea typeface="Calibri" panose="020F0502020204030204" pitchFamily="34" charset="0"/>
-                <a:cs typeface="Calibri" panose="020F0502020204030204" pitchFamily="34" charset="0"/>
-              </a:rPr>
-              <a:t>missing</a:t>
-            </a:r>
-            <a:r>
-              <a:rPr lang="de-DE" sz="1200" dirty="0">
-                <a:solidFill>
-                  <a:schemeClr val="bg1">
-                    <a:lumMod val="75000"/>
-                  </a:schemeClr>
-                </a:solidFill>
-                <a:latin typeface="Calibri" panose="020F0502020204030204" pitchFamily="34" charset="0"/>
-                <a:ea typeface="Calibri" panose="020F0502020204030204" pitchFamily="34" charset="0"/>
-                <a:cs typeface="Calibri" panose="020F0502020204030204" pitchFamily="34" charset="0"/>
-              </a:rPr>
-              <a:t> </a:t>
-            </a:r>
-            <a:r>
-              <a:rPr lang="de-DE" sz="1200" dirty="0" err="1">
-                <a:solidFill>
-                  <a:schemeClr val="bg1">
-                    <a:lumMod val="75000"/>
-                  </a:schemeClr>
-                </a:solidFill>
-                <a:latin typeface="Calibri" panose="020F0502020204030204" pitchFamily="34" charset="0"/>
-                <a:ea typeface="Calibri" panose="020F0502020204030204" pitchFamily="34" charset="0"/>
-                <a:cs typeface="Calibri" panose="020F0502020204030204" pitchFamily="34" charset="0"/>
-              </a:rPr>
-              <a:t>or</a:t>
-            </a:r>
-            <a:r>
-              <a:rPr lang="de-DE" sz="1200" dirty="0">
-                <a:solidFill>
-                  <a:schemeClr val="bg1">
-                    <a:lumMod val="75000"/>
-                  </a:schemeClr>
-                </a:solidFill>
-                <a:latin typeface="Calibri" panose="020F0502020204030204" pitchFamily="34" charset="0"/>
-                <a:ea typeface="Calibri" panose="020F0502020204030204" pitchFamily="34" charset="0"/>
-                <a:cs typeface="Calibri" panose="020F0502020204030204" pitchFamily="34" charset="0"/>
-              </a:rPr>
-              <a:t> </a:t>
-            </a:r>
-            <a:r>
-              <a:rPr lang="de-DE" sz="1200" dirty="0" err="1">
-                <a:solidFill>
-                  <a:schemeClr val="bg1">
-                    <a:lumMod val="75000"/>
-                  </a:schemeClr>
-                </a:solidFill>
-                <a:latin typeface="Calibri" panose="020F0502020204030204" pitchFamily="34" charset="0"/>
-                <a:ea typeface="Calibri" panose="020F0502020204030204" pitchFamily="34" charset="0"/>
-                <a:cs typeface="Calibri" panose="020F0502020204030204" pitchFamily="34" charset="0"/>
-              </a:rPr>
-              <a:t>there</a:t>
-            </a:r>
-            <a:r>
-              <a:rPr lang="de-DE" sz="1200" dirty="0">
-                <a:solidFill>
-                  <a:schemeClr val="bg1">
-                    <a:lumMod val="75000"/>
-                  </a:schemeClr>
-                </a:solidFill>
-                <a:latin typeface="Calibri" panose="020F0502020204030204" pitchFamily="34" charset="0"/>
-                <a:ea typeface="Calibri" panose="020F0502020204030204" pitchFamily="34" charset="0"/>
-                <a:cs typeface="Calibri" panose="020F0502020204030204" pitchFamily="34" charset="0"/>
-              </a:rPr>
-              <a:t> </a:t>
-            </a:r>
-            <a:r>
-              <a:rPr lang="de-DE" sz="1200" dirty="0" err="1">
-                <a:solidFill>
-                  <a:schemeClr val="bg1">
-                    <a:lumMod val="75000"/>
-                  </a:schemeClr>
-                </a:solidFill>
-                <a:latin typeface="Calibri" panose="020F0502020204030204" pitchFamily="34" charset="0"/>
-                <a:ea typeface="Calibri" panose="020F0502020204030204" pitchFamily="34" charset="0"/>
-                <a:cs typeface="Calibri" panose="020F0502020204030204" pitchFamily="34" charset="0"/>
-              </a:rPr>
-              <a:t>are</a:t>
-            </a:r>
-            <a:r>
-              <a:rPr lang="de-DE" sz="1200" dirty="0">
-                <a:solidFill>
-                  <a:schemeClr val="bg1">
-                    <a:lumMod val="75000"/>
-                  </a:schemeClr>
-                </a:solidFill>
-                <a:latin typeface="Calibri" panose="020F0502020204030204" pitchFamily="34" charset="0"/>
-                <a:ea typeface="Calibri" panose="020F0502020204030204" pitchFamily="34" charset="0"/>
-                <a:cs typeface="Calibri" panose="020F0502020204030204" pitchFamily="34" charset="0"/>
-              </a:rPr>
-              <a:t> </a:t>
-            </a:r>
-            <a:r>
-              <a:rPr lang="de-DE" sz="1200" dirty="0" err="1">
-                <a:solidFill>
-                  <a:schemeClr val="bg1">
-                    <a:lumMod val="75000"/>
-                  </a:schemeClr>
-                </a:solidFill>
-                <a:latin typeface="Calibri" panose="020F0502020204030204" pitchFamily="34" charset="0"/>
-                <a:ea typeface="Calibri" panose="020F0502020204030204" pitchFamily="34" charset="0"/>
-                <a:cs typeface="Calibri" panose="020F0502020204030204" pitchFamily="34" charset="0"/>
-              </a:rPr>
-              <a:t>inconsistencies</a:t>
-            </a:r>
             <a:endParaRPr lang="en-US" dirty="0"/>
           </a:p>
         </p:txBody>
@@ -2238,10 +1288,6 @@
           <a:bodyPr/>
           <a:lstStyle/>
           <a:p>
-            <a:r>
-              <a:rPr lang="en-US" dirty="0"/>
-              <a:t>Though it’s nice to have this in the background when one is talking about the project in general, as a smooth transition to the next slide</a:t>
-            </a:r>
             <a:endParaRPr lang="en-GB" dirty="0"/>
           </a:p>
         </p:txBody>
@@ -2388,15 +1434,7 @@
           <a:p>
             <a:r>
               <a:rPr lang="en-GB" dirty="0"/>
-              <a:t>The 4 last of the </a:t>
-            </a:r>
-            <a:r>
-              <a:rPr lang="en-GB" dirty="0" err="1"/>
-              <a:t>givem</a:t>
-            </a:r>
-            <a:r>
-              <a:rPr lang="en-GB" dirty="0"/>
-              <a:t> were not initially made, I made them later while struggling to predict Group 6 </a:t>
+              <a:t>The 4 last of the given were not initially made, I made them later while struggling to predict Group 6 </a:t>
             </a:r>
           </a:p>
         </p:txBody>
@@ -2964,6 +2002,1649 @@
               </a:rPr>
               <a:t>()</a:t>
             </a:r>
+          </a:p>
+          <a:p>
+            <a:endParaRPr lang="en-GB" dirty="0"/>
+          </a:p>
+          <a:p>
+            <a:endParaRPr lang="en-GB" dirty="0"/>
+          </a:p>
+          <a:p>
+            <a:endParaRPr lang="en-GB" dirty="0"/>
+          </a:p>
+          <a:p>
+            <a:endParaRPr lang="en-GB" dirty="0"/>
+          </a:p>
+          <a:p>
+            <a:r>
+              <a:rPr lang="en-GB" sz="1200" b="0" kern="1200" dirty="0">
+                <a:solidFill>
+                  <a:schemeClr val="tx1"/>
+                </a:solidFill>
+                <a:effectLst/>
+                <a:latin typeface="+mn-lt"/>
+                <a:ea typeface="+mn-ea"/>
+                <a:cs typeface="+mn-cs"/>
+              </a:rPr>
+              <a:t>data = </a:t>
+            </a:r>
+            <a:r>
+              <a:rPr lang="en-GB" sz="1200" b="0" kern="1200" dirty="0" err="1">
+                <a:solidFill>
+                  <a:schemeClr val="tx1"/>
+                </a:solidFill>
+                <a:effectLst/>
+                <a:latin typeface="+mn-lt"/>
+                <a:ea typeface="+mn-ea"/>
+                <a:cs typeface="+mn-cs"/>
+              </a:rPr>
+              <a:t>data.drop</a:t>
+            </a:r>
+            <a:r>
+              <a:rPr lang="en-GB" sz="1200" b="0" kern="1200" dirty="0">
+                <a:solidFill>
+                  <a:schemeClr val="tx1"/>
+                </a:solidFill>
+                <a:effectLst/>
+                <a:latin typeface="+mn-lt"/>
+                <a:ea typeface="+mn-ea"/>
+                <a:cs typeface="+mn-cs"/>
+              </a:rPr>
+              <a:t>(columns=</a:t>
+            </a:r>
+            <a:r>
+              <a:rPr lang="en-GB" sz="1200" b="0" kern="1200" dirty="0" err="1">
+                <a:solidFill>
+                  <a:schemeClr val="tx1"/>
+                </a:solidFill>
+                <a:effectLst/>
+                <a:latin typeface="+mn-lt"/>
+                <a:ea typeface="+mn-ea"/>
+                <a:cs typeface="+mn-cs"/>
+              </a:rPr>
+              <a:t>cols_to_remove</a:t>
+            </a:r>
+            <a:r>
+              <a:rPr lang="en-GB" sz="1200" b="0" kern="1200" dirty="0">
+                <a:solidFill>
+                  <a:schemeClr val="tx1"/>
+                </a:solidFill>
+                <a:effectLst/>
+                <a:latin typeface="+mn-lt"/>
+                <a:ea typeface="+mn-ea"/>
+                <a:cs typeface="+mn-cs"/>
+              </a:rPr>
+              <a:t>)</a:t>
+            </a:r>
+          </a:p>
+          <a:p>
+            <a:br>
+              <a:rPr lang="en-GB" sz="1200" b="0" kern="1200" dirty="0">
+                <a:solidFill>
+                  <a:schemeClr val="tx1"/>
+                </a:solidFill>
+                <a:effectLst/>
+                <a:latin typeface="+mn-lt"/>
+                <a:ea typeface="+mn-ea"/>
+                <a:cs typeface="+mn-cs"/>
+              </a:rPr>
+            </a:br>
+            <a:r>
+              <a:rPr lang="en-GB" sz="1200" b="0" kern="1200" dirty="0">
+                <a:solidFill>
+                  <a:schemeClr val="tx1"/>
+                </a:solidFill>
+                <a:effectLst/>
+                <a:latin typeface="+mn-lt"/>
+                <a:ea typeface="+mn-ea"/>
+                <a:cs typeface="+mn-cs"/>
+              </a:rPr>
+              <a:t>import pandas as pd</a:t>
+            </a:r>
+          </a:p>
+          <a:p>
+            <a:r>
+              <a:rPr lang="en-GB" sz="1200" b="0" kern="1200" dirty="0">
+                <a:solidFill>
+                  <a:schemeClr val="tx1"/>
+                </a:solidFill>
+                <a:effectLst/>
+                <a:latin typeface="+mn-lt"/>
+                <a:ea typeface="+mn-ea"/>
+                <a:cs typeface="+mn-cs"/>
+              </a:rPr>
+              <a:t>import seaborn as </a:t>
+            </a:r>
+            <a:r>
+              <a:rPr lang="en-GB" sz="1200" b="0" kern="1200" dirty="0" err="1">
+                <a:solidFill>
+                  <a:schemeClr val="tx1"/>
+                </a:solidFill>
+                <a:effectLst/>
+                <a:latin typeface="+mn-lt"/>
+                <a:ea typeface="+mn-ea"/>
+                <a:cs typeface="+mn-cs"/>
+              </a:rPr>
+              <a:t>sns</a:t>
+            </a:r>
+            <a:endParaRPr lang="en-GB" sz="1200" b="0" kern="1200" dirty="0">
+              <a:solidFill>
+                <a:schemeClr val="tx1"/>
+              </a:solidFill>
+              <a:effectLst/>
+              <a:latin typeface="+mn-lt"/>
+              <a:ea typeface="+mn-ea"/>
+              <a:cs typeface="+mn-cs"/>
+            </a:endParaRPr>
+          </a:p>
+          <a:p>
+            <a:r>
+              <a:rPr lang="en-GB" sz="1200" b="0" kern="1200" dirty="0">
+                <a:solidFill>
+                  <a:schemeClr val="tx1"/>
+                </a:solidFill>
+                <a:effectLst/>
+                <a:latin typeface="+mn-lt"/>
+                <a:ea typeface="+mn-ea"/>
+                <a:cs typeface="+mn-cs"/>
+              </a:rPr>
+              <a:t>import </a:t>
+            </a:r>
+            <a:r>
+              <a:rPr lang="en-GB" sz="1200" b="0" kern="1200" dirty="0" err="1">
+                <a:solidFill>
+                  <a:schemeClr val="tx1"/>
+                </a:solidFill>
+                <a:effectLst/>
+                <a:latin typeface="+mn-lt"/>
+                <a:ea typeface="+mn-ea"/>
+                <a:cs typeface="+mn-cs"/>
+              </a:rPr>
+              <a:t>matplotlib.pyplot</a:t>
+            </a:r>
+            <a:r>
+              <a:rPr lang="en-GB" sz="1200" b="0" kern="1200" dirty="0">
+                <a:solidFill>
+                  <a:schemeClr val="tx1"/>
+                </a:solidFill>
+                <a:effectLst/>
+                <a:latin typeface="+mn-lt"/>
+                <a:ea typeface="+mn-ea"/>
+                <a:cs typeface="+mn-cs"/>
+              </a:rPr>
+              <a:t> as </a:t>
+            </a:r>
+            <a:r>
+              <a:rPr lang="en-GB" sz="1200" b="0" kern="1200" dirty="0" err="1">
+                <a:solidFill>
+                  <a:schemeClr val="tx1"/>
+                </a:solidFill>
+                <a:effectLst/>
+                <a:latin typeface="+mn-lt"/>
+                <a:ea typeface="+mn-ea"/>
+                <a:cs typeface="+mn-cs"/>
+              </a:rPr>
+              <a:t>plt</a:t>
+            </a:r>
+            <a:endParaRPr lang="en-GB" sz="1200" b="0" kern="1200" dirty="0">
+              <a:solidFill>
+                <a:schemeClr val="tx1"/>
+              </a:solidFill>
+              <a:effectLst/>
+              <a:latin typeface="+mn-lt"/>
+              <a:ea typeface="+mn-ea"/>
+              <a:cs typeface="+mn-cs"/>
+            </a:endParaRPr>
+          </a:p>
+          <a:p>
+            <a:br>
+              <a:rPr lang="en-GB" sz="1200" b="0" kern="1200" dirty="0">
+                <a:solidFill>
+                  <a:schemeClr val="tx1"/>
+                </a:solidFill>
+                <a:effectLst/>
+                <a:latin typeface="+mn-lt"/>
+                <a:ea typeface="+mn-ea"/>
+                <a:cs typeface="+mn-cs"/>
+              </a:rPr>
+            </a:br>
+            <a:r>
+              <a:rPr lang="en-GB" sz="1200" b="0" kern="1200" dirty="0">
+                <a:solidFill>
+                  <a:schemeClr val="tx1"/>
+                </a:solidFill>
+                <a:effectLst/>
+                <a:latin typeface="+mn-lt"/>
+                <a:ea typeface="+mn-ea"/>
+                <a:cs typeface="+mn-cs"/>
+              </a:rPr>
+              <a:t># Assuming your data is in a </a:t>
+            </a:r>
+            <a:r>
+              <a:rPr lang="en-GB" sz="1200" b="0" kern="1200" dirty="0" err="1">
+                <a:solidFill>
+                  <a:schemeClr val="tx1"/>
+                </a:solidFill>
+                <a:effectLst/>
+                <a:latin typeface="+mn-lt"/>
+                <a:ea typeface="+mn-ea"/>
+                <a:cs typeface="+mn-cs"/>
+              </a:rPr>
+              <a:t>DataFrame</a:t>
+            </a:r>
+            <a:r>
+              <a:rPr lang="en-GB" sz="1200" b="0" kern="1200" dirty="0">
+                <a:solidFill>
+                  <a:schemeClr val="tx1"/>
+                </a:solidFill>
+                <a:effectLst/>
+                <a:latin typeface="+mn-lt"/>
+                <a:ea typeface="+mn-ea"/>
+                <a:cs typeface="+mn-cs"/>
+              </a:rPr>
+              <a:t> called 'data'</a:t>
+            </a:r>
+          </a:p>
+          <a:p>
+            <a:r>
+              <a:rPr lang="en-GB" sz="1200" b="0" kern="1200" dirty="0">
+                <a:solidFill>
+                  <a:schemeClr val="tx1"/>
+                </a:solidFill>
+                <a:effectLst/>
+                <a:latin typeface="+mn-lt"/>
+                <a:ea typeface="+mn-ea"/>
+                <a:cs typeface="+mn-cs"/>
+              </a:rPr>
+              <a:t># Melt data to have all groups in one plot for Silvester variable</a:t>
+            </a:r>
+          </a:p>
+          <a:p>
+            <a:r>
+              <a:rPr lang="en-GB" sz="1200" b="0" kern="1200" dirty="0" err="1">
+                <a:solidFill>
+                  <a:schemeClr val="tx1"/>
+                </a:solidFill>
+                <a:effectLst/>
+                <a:latin typeface="+mn-lt"/>
+                <a:ea typeface="+mn-ea"/>
+                <a:cs typeface="+mn-cs"/>
+              </a:rPr>
+              <a:t>melted_data</a:t>
+            </a:r>
+            <a:r>
+              <a:rPr lang="en-GB" sz="1200" b="0" kern="1200" dirty="0">
+                <a:solidFill>
+                  <a:schemeClr val="tx1"/>
+                </a:solidFill>
+                <a:effectLst/>
+                <a:latin typeface="+mn-lt"/>
+                <a:ea typeface="+mn-ea"/>
+                <a:cs typeface="+mn-cs"/>
+              </a:rPr>
+              <a:t> = []</a:t>
+            </a:r>
+          </a:p>
+          <a:p>
+            <a:br>
+              <a:rPr lang="en-GB" sz="1200" b="0" kern="1200" dirty="0">
+                <a:solidFill>
+                  <a:schemeClr val="tx1"/>
+                </a:solidFill>
+                <a:effectLst/>
+                <a:latin typeface="+mn-lt"/>
+                <a:ea typeface="+mn-ea"/>
+                <a:cs typeface="+mn-cs"/>
+              </a:rPr>
+            </a:br>
+            <a:r>
+              <a:rPr lang="en-GB" sz="1200" b="0" kern="1200" dirty="0">
+                <a:solidFill>
+                  <a:schemeClr val="tx1"/>
+                </a:solidFill>
+                <a:effectLst/>
+                <a:latin typeface="+mn-lt"/>
+                <a:ea typeface="+mn-ea"/>
+                <a:cs typeface="+mn-cs"/>
+              </a:rPr>
+              <a:t>for </a:t>
+            </a:r>
+            <a:r>
+              <a:rPr lang="en-GB" sz="1200" b="0" kern="1200" dirty="0" err="1">
+                <a:solidFill>
+                  <a:schemeClr val="tx1"/>
+                </a:solidFill>
+                <a:effectLst/>
+                <a:latin typeface="+mn-lt"/>
+                <a:ea typeface="+mn-ea"/>
+                <a:cs typeface="+mn-cs"/>
+              </a:rPr>
+              <a:t>i</a:t>
+            </a:r>
+            <a:r>
+              <a:rPr lang="en-GB" sz="1200" b="0" kern="1200" dirty="0">
+                <a:solidFill>
+                  <a:schemeClr val="tx1"/>
+                </a:solidFill>
+                <a:effectLst/>
+                <a:latin typeface="+mn-lt"/>
+                <a:ea typeface="+mn-ea"/>
+                <a:cs typeface="+mn-cs"/>
+              </a:rPr>
+              <a:t> in range(1, 7):  # Assuming 6 groups like your example</a:t>
+            </a:r>
+          </a:p>
+          <a:p>
+            <a:r>
+              <a:rPr lang="en-GB" sz="1200" b="0" kern="1200" dirty="0">
+                <a:solidFill>
+                  <a:schemeClr val="tx1"/>
+                </a:solidFill>
+                <a:effectLst/>
+                <a:latin typeface="+mn-lt"/>
+                <a:ea typeface="+mn-ea"/>
+                <a:cs typeface="+mn-cs"/>
+              </a:rPr>
+              <a:t>    # Filter data for current group</a:t>
+            </a:r>
+          </a:p>
+          <a:p>
+            <a:r>
+              <a:rPr lang="en-GB" sz="1200" b="0" kern="1200" dirty="0">
+                <a:solidFill>
+                  <a:schemeClr val="tx1"/>
+                </a:solidFill>
+                <a:effectLst/>
+                <a:latin typeface="+mn-lt"/>
+                <a:ea typeface="+mn-ea"/>
+                <a:cs typeface="+mn-cs"/>
+              </a:rPr>
+              <a:t>    </a:t>
+            </a:r>
+            <a:r>
+              <a:rPr lang="en-GB" sz="1200" b="0" kern="1200" dirty="0" err="1">
+                <a:solidFill>
+                  <a:schemeClr val="tx1"/>
+                </a:solidFill>
+                <a:effectLst/>
+                <a:latin typeface="+mn-lt"/>
+                <a:ea typeface="+mn-ea"/>
+                <a:cs typeface="+mn-cs"/>
+              </a:rPr>
+              <a:t>group_data</a:t>
+            </a:r>
+            <a:r>
+              <a:rPr lang="en-GB" sz="1200" b="0" kern="1200" dirty="0">
+                <a:solidFill>
+                  <a:schemeClr val="tx1"/>
+                </a:solidFill>
+                <a:effectLst/>
+                <a:latin typeface="+mn-lt"/>
+                <a:ea typeface="+mn-ea"/>
+                <a:cs typeface="+mn-cs"/>
+              </a:rPr>
+              <a:t> = data[data[</a:t>
+            </a:r>
+            <a:r>
+              <a:rPr lang="en-GB" sz="1200" b="0" kern="1200" dirty="0" err="1">
+                <a:solidFill>
+                  <a:schemeClr val="tx1"/>
+                </a:solidFill>
+                <a:effectLst/>
+                <a:latin typeface="+mn-lt"/>
+                <a:ea typeface="+mn-ea"/>
+                <a:cs typeface="+mn-cs"/>
+              </a:rPr>
+              <a:t>f'Warengruppe</a:t>
+            </a:r>
+            <a:r>
+              <a:rPr lang="en-GB" sz="1200" b="0" kern="1200" dirty="0">
+                <a:solidFill>
+                  <a:schemeClr val="tx1"/>
+                </a:solidFill>
+                <a:effectLst/>
+                <a:latin typeface="+mn-lt"/>
+                <a:ea typeface="+mn-ea"/>
+                <a:cs typeface="+mn-cs"/>
+              </a:rPr>
+              <a:t>_{</a:t>
+            </a:r>
+            <a:r>
+              <a:rPr lang="en-GB" sz="1200" b="0" kern="1200" dirty="0" err="1">
+                <a:solidFill>
+                  <a:schemeClr val="tx1"/>
+                </a:solidFill>
+                <a:effectLst/>
+                <a:latin typeface="+mn-lt"/>
+                <a:ea typeface="+mn-ea"/>
+                <a:cs typeface="+mn-cs"/>
+              </a:rPr>
+              <a:t>i</a:t>
+            </a:r>
+            <a:r>
+              <a:rPr lang="en-GB" sz="1200" b="0" kern="1200" dirty="0">
+                <a:solidFill>
+                  <a:schemeClr val="tx1"/>
+                </a:solidFill>
+                <a:effectLst/>
+                <a:latin typeface="+mn-lt"/>
+                <a:ea typeface="+mn-ea"/>
+                <a:cs typeface="+mn-cs"/>
+              </a:rPr>
+              <a:t>}'] == 1].copy()</a:t>
+            </a:r>
+          </a:p>
+          <a:p>
+            <a:r>
+              <a:rPr lang="en-GB" sz="1200" b="0" kern="1200" dirty="0">
+                <a:solidFill>
+                  <a:schemeClr val="tx1"/>
+                </a:solidFill>
+                <a:effectLst/>
+                <a:latin typeface="+mn-lt"/>
+                <a:ea typeface="+mn-ea"/>
+                <a:cs typeface="+mn-cs"/>
+              </a:rPr>
+              <a:t>    </a:t>
+            </a:r>
+            <a:r>
+              <a:rPr lang="en-GB" sz="1200" b="0" kern="1200" dirty="0" err="1">
+                <a:solidFill>
+                  <a:schemeClr val="tx1"/>
+                </a:solidFill>
+                <a:effectLst/>
+                <a:latin typeface="+mn-lt"/>
+                <a:ea typeface="+mn-ea"/>
+                <a:cs typeface="+mn-cs"/>
+              </a:rPr>
+              <a:t>group_data</a:t>
+            </a:r>
+            <a:r>
+              <a:rPr lang="en-GB" sz="1200" b="0" kern="1200" dirty="0">
+                <a:solidFill>
+                  <a:schemeClr val="tx1"/>
+                </a:solidFill>
+                <a:effectLst/>
+                <a:latin typeface="+mn-lt"/>
+                <a:ea typeface="+mn-ea"/>
+                <a:cs typeface="+mn-cs"/>
+              </a:rPr>
+              <a:t>['</a:t>
+            </a:r>
+            <a:r>
+              <a:rPr lang="en-GB" sz="1200" b="0" kern="1200" dirty="0" err="1">
+                <a:solidFill>
+                  <a:schemeClr val="tx1"/>
+                </a:solidFill>
+                <a:effectLst/>
+                <a:latin typeface="+mn-lt"/>
+                <a:ea typeface="+mn-ea"/>
+                <a:cs typeface="+mn-cs"/>
+              </a:rPr>
+              <a:t>Product_Group</a:t>
+            </a:r>
+            <a:r>
+              <a:rPr lang="en-GB" sz="1200" b="0" kern="1200" dirty="0">
+                <a:solidFill>
+                  <a:schemeClr val="tx1"/>
+                </a:solidFill>
+                <a:effectLst/>
+                <a:latin typeface="+mn-lt"/>
+                <a:ea typeface="+mn-ea"/>
+                <a:cs typeface="+mn-cs"/>
+              </a:rPr>
+              <a:t>'] = </a:t>
+            </a:r>
+            <a:r>
+              <a:rPr lang="en-GB" sz="1200" b="0" kern="1200" dirty="0" err="1">
+                <a:solidFill>
+                  <a:schemeClr val="tx1"/>
+                </a:solidFill>
+                <a:effectLst/>
+                <a:latin typeface="+mn-lt"/>
+                <a:ea typeface="+mn-ea"/>
+                <a:cs typeface="+mn-cs"/>
+              </a:rPr>
+              <a:t>f'Group</a:t>
+            </a:r>
+            <a:r>
+              <a:rPr lang="en-GB" sz="1200" b="0" kern="1200" dirty="0">
+                <a:solidFill>
+                  <a:schemeClr val="tx1"/>
+                </a:solidFill>
+                <a:effectLst/>
+                <a:latin typeface="+mn-lt"/>
+                <a:ea typeface="+mn-ea"/>
+                <a:cs typeface="+mn-cs"/>
+              </a:rPr>
+              <a:t> {</a:t>
+            </a:r>
+            <a:r>
+              <a:rPr lang="en-GB" sz="1200" b="0" kern="1200" dirty="0" err="1">
+                <a:solidFill>
+                  <a:schemeClr val="tx1"/>
+                </a:solidFill>
+                <a:effectLst/>
+                <a:latin typeface="+mn-lt"/>
+                <a:ea typeface="+mn-ea"/>
+                <a:cs typeface="+mn-cs"/>
+              </a:rPr>
+              <a:t>i</a:t>
+            </a:r>
+            <a:r>
+              <a:rPr lang="en-GB" sz="1200" b="0" kern="1200" dirty="0">
+                <a:solidFill>
+                  <a:schemeClr val="tx1"/>
+                </a:solidFill>
+                <a:effectLst/>
+                <a:latin typeface="+mn-lt"/>
+                <a:ea typeface="+mn-ea"/>
+                <a:cs typeface="+mn-cs"/>
+              </a:rPr>
+              <a:t>}'</a:t>
+            </a:r>
+          </a:p>
+          <a:p>
+            <a:r>
+              <a:rPr lang="en-GB" sz="1200" b="0" kern="1200" dirty="0">
+                <a:solidFill>
+                  <a:schemeClr val="tx1"/>
+                </a:solidFill>
+                <a:effectLst/>
+                <a:latin typeface="+mn-lt"/>
+                <a:ea typeface="+mn-ea"/>
+                <a:cs typeface="+mn-cs"/>
+              </a:rPr>
+              <a:t>    </a:t>
+            </a:r>
+          </a:p>
+          <a:p>
+            <a:r>
+              <a:rPr lang="en-GB" sz="1200" b="0" kern="1200" dirty="0">
+                <a:solidFill>
+                  <a:schemeClr val="tx1"/>
+                </a:solidFill>
+                <a:effectLst/>
+                <a:latin typeface="+mn-lt"/>
+                <a:ea typeface="+mn-ea"/>
+                <a:cs typeface="+mn-cs"/>
+              </a:rPr>
+              <a:t>    # Select relevant columns including Silvester</a:t>
+            </a:r>
+          </a:p>
+          <a:p>
+            <a:r>
+              <a:rPr lang="en-GB" sz="1200" b="0" kern="1200" dirty="0">
+                <a:solidFill>
+                  <a:schemeClr val="tx1"/>
+                </a:solidFill>
+                <a:effectLst/>
+                <a:latin typeface="+mn-lt"/>
+                <a:ea typeface="+mn-ea"/>
+                <a:cs typeface="+mn-cs"/>
+              </a:rPr>
+              <a:t>    # Adjust column names based on your actual data structure</a:t>
+            </a:r>
+          </a:p>
+          <a:p>
+            <a:r>
+              <a:rPr lang="en-GB" sz="1200" b="0" kern="1200" dirty="0">
+                <a:solidFill>
+                  <a:schemeClr val="tx1"/>
+                </a:solidFill>
+                <a:effectLst/>
+                <a:latin typeface="+mn-lt"/>
+                <a:ea typeface="+mn-ea"/>
+                <a:cs typeface="+mn-cs"/>
+              </a:rPr>
+              <a:t>    </a:t>
+            </a:r>
+            <a:r>
+              <a:rPr lang="en-GB" sz="1200" b="0" kern="1200" dirty="0" err="1">
+                <a:solidFill>
+                  <a:schemeClr val="tx1"/>
+                </a:solidFill>
+                <a:effectLst/>
+                <a:latin typeface="+mn-lt"/>
+                <a:ea typeface="+mn-ea"/>
+                <a:cs typeface="+mn-cs"/>
+              </a:rPr>
+              <a:t>melted_data.append</a:t>
+            </a:r>
+            <a:r>
+              <a:rPr lang="en-GB" sz="1200" b="0" kern="1200" dirty="0">
+                <a:solidFill>
+                  <a:schemeClr val="tx1"/>
+                </a:solidFill>
+                <a:effectLst/>
+                <a:latin typeface="+mn-lt"/>
+                <a:ea typeface="+mn-ea"/>
+                <a:cs typeface="+mn-cs"/>
+              </a:rPr>
+              <a:t>(</a:t>
+            </a:r>
+            <a:r>
+              <a:rPr lang="en-GB" sz="1200" b="0" kern="1200" dirty="0" err="1">
+                <a:solidFill>
+                  <a:schemeClr val="tx1"/>
+                </a:solidFill>
+                <a:effectLst/>
+                <a:latin typeface="+mn-lt"/>
+                <a:ea typeface="+mn-ea"/>
+                <a:cs typeface="+mn-cs"/>
+              </a:rPr>
+              <a:t>group_data</a:t>
+            </a:r>
+            <a:r>
+              <a:rPr lang="en-GB" sz="1200" b="0" kern="1200" dirty="0">
+                <a:solidFill>
+                  <a:schemeClr val="tx1"/>
+                </a:solidFill>
+                <a:effectLst/>
+                <a:latin typeface="+mn-lt"/>
+                <a:ea typeface="+mn-ea"/>
+                <a:cs typeface="+mn-cs"/>
+              </a:rPr>
+              <a:t>[['Silvester', '</a:t>
+            </a:r>
+            <a:r>
+              <a:rPr lang="en-GB" sz="1200" b="0" kern="1200" dirty="0" err="1">
+                <a:solidFill>
+                  <a:schemeClr val="tx1"/>
+                </a:solidFill>
+                <a:effectLst/>
+                <a:latin typeface="+mn-lt"/>
+                <a:ea typeface="+mn-ea"/>
+                <a:cs typeface="+mn-cs"/>
+              </a:rPr>
+              <a:t>Umsatz</a:t>
+            </a:r>
+            <a:r>
+              <a:rPr lang="en-GB" sz="1200" b="0" kern="1200" dirty="0">
+                <a:solidFill>
+                  <a:schemeClr val="tx1"/>
+                </a:solidFill>
+                <a:effectLst/>
+                <a:latin typeface="+mn-lt"/>
+                <a:ea typeface="+mn-ea"/>
+                <a:cs typeface="+mn-cs"/>
+              </a:rPr>
+              <a:t>', '</a:t>
+            </a:r>
+            <a:r>
+              <a:rPr lang="en-GB" sz="1200" b="0" kern="1200" dirty="0" err="1">
+                <a:solidFill>
+                  <a:schemeClr val="tx1"/>
+                </a:solidFill>
+                <a:effectLst/>
+                <a:latin typeface="+mn-lt"/>
+                <a:ea typeface="+mn-ea"/>
+                <a:cs typeface="+mn-cs"/>
+              </a:rPr>
+              <a:t>Product_Group</a:t>
+            </a:r>
+            <a:r>
+              <a:rPr lang="en-GB" sz="1200" b="0" kern="1200" dirty="0">
+                <a:solidFill>
+                  <a:schemeClr val="tx1"/>
+                </a:solidFill>
+                <a:effectLst/>
+                <a:latin typeface="+mn-lt"/>
+                <a:ea typeface="+mn-ea"/>
+                <a:cs typeface="+mn-cs"/>
+              </a:rPr>
+              <a:t>']])</a:t>
+            </a:r>
+          </a:p>
+          <a:p>
+            <a:br>
+              <a:rPr lang="en-GB" sz="1200" b="0" kern="1200" dirty="0">
+                <a:solidFill>
+                  <a:schemeClr val="tx1"/>
+                </a:solidFill>
+                <a:effectLst/>
+                <a:latin typeface="+mn-lt"/>
+                <a:ea typeface="+mn-ea"/>
+                <a:cs typeface="+mn-cs"/>
+              </a:rPr>
+            </a:br>
+            <a:r>
+              <a:rPr lang="en-GB" sz="1200" b="0" kern="1200" dirty="0">
+                <a:solidFill>
+                  <a:schemeClr val="tx1"/>
+                </a:solidFill>
+                <a:effectLst/>
+                <a:latin typeface="+mn-lt"/>
+                <a:ea typeface="+mn-ea"/>
+                <a:cs typeface="+mn-cs"/>
+              </a:rPr>
+              <a:t># Combine all group data</a:t>
+            </a:r>
+          </a:p>
+          <a:p>
+            <a:r>
+              <a:rPr lang="en-GB" sz="1200" b="0" kern="1200" dirty="0" err="1">
+                <a:solidFill>
+                  <a:schemeClr val="tx1"/>
+                </a:solidFill>
+                <a:effectLst/>
+                <a:latin typeface="+mn-lt"/>
+                <a:ea typeface="+mn-ea"/>
+                <a:cs typeface="+mn-cs"/>
+              </a:rPr>
+              <a:t>combined_data</a:t>
+            </a:r>
+            <a:r>
+              <a:rPr lang="en-GB" sz="1200" b="0" kern="1200" dirty="0">
+                <a:solidFill>
+                  <a:schemeClr val="tx1"/>
+                </a:solidFill>
+                <a:effectLst/>
+                <a:latin typeface="+mn-lt"/>
+                <a:ea typeface="+mn-ea"/>
+                <a:cs typeface="+mn-cs"/>
+              </a:rPr>
+              <a:t> = </a:t>
+            </a:r>
+            <a:r>
+              <a:rPr lang="en-GB" sz="1200" b="0" kern="1200" dirty="0" err="1">
+                <a:solidFill>
+                  <a:schemeClr val="tx1"/>
+                </a:solidFill>
+                <a:effectLst/>
+                <a:latin typeface="+mn-lt"/>
+                <a:ea typeface="+mn-ea"/>
+                <a:cs typeface="+mn-cs"/>
+              </a:rPr>
+              <a:t>pd.concat</a:t>
+            </a:r>
+            <a:r>
+              <a:rPr lang="en-GB" sz="1200" b="0" kern="1200" dirty="0">
+                <a:solidFill>
+                  <a:schemeClr val="tx1"/>
+                </a:solidFill>
+                <a:effectLst/>
+                <a:latin typeface="+mn-lt"/>
+                <a:ea typeface="+mn-ea"/>
+                <a:cs typeface="+mn-cs"/>
+              </a:rPr>
+              <a:t>(</a:t>
+            </a:r>
+            <a:r>
+              <a:rPr lang="en-GB" sz="1200" b="0" kern="1200" dirty="0" err="1">
+                <a:solidFill>
+                  <a:schemeClr val="tx1"/>
+                </a:solidFill>
+                <a:effectLst/>
+                <a:latin typeface="+mn-lt"/>
+                <a:ea typeface="+mn-ea"/>
+                <a:cs typeface="+mn-cs"/>
+              </a:rPr>
+              <a:t>melted_data</a:t>
+            </a:r>
+            <a:r>
+              <a:rPr lang="en-GB" sz="1200" b="0" kern="1200" dirty="0">
+                <a:solidFill>
+                  <a:schemeClr val="tx1"/>
+                </a:solidFill>
+                <a:effectLst/>
+                <a:latin typeface="+mn-lt"/>
+                <a:ea typeface="+mn-ea"/>
+                <a:cs typeface="+mn-cs"/>
+              </a:rPr>
+              <a:t>, </a:t>
+            </a:r>
+            <a:r>
+              <a:rPr lang="en-GB" sz="1200" b="0" kern="1200" dirty="0" err="1">
+                <a:solidFill>
+                  <a:schemeClr val="tx1"/>
+                </a:solidFill>
+                <a:effectLst/>
+                <a:latin typeface="+mn-lt"/>
+                <a:ea typeface="+mn-ea"/>
+                <a:cs typeface="+mn-cs"/>
+              </a:rPr>
+              <a:t>ignore_index</a:t>
+            </a:r>
+            <a:r>
+              <a:rPr lang="en-GB" sz="1200" b="0" kern="1200" dirty="0">
+                <a:solidFill>
+                  <a:schemeClr val="tx1"/>
+                </a:solidFill>
+                <a:effectLst/>
+                <a:latin typeface="+mn-lt"/>
+                <a:ea typeface="+mn-ea"/>
+                <a:cs typeface="+mn-cs"/>
+              </a:rPr>
+              <a:t>=True)</a:t>
+            </a:r>
+          </a:p>
+          <a:p>
+            <a:br>
+              <a:rPr lang="en-GB" sz="1200" b="0" kern="1200" dirty="0">
+                <a:solidFill>
+                  <a:schemeClr val="tx1"/>
+                </a:solidFill>
+                <a:effectLst/>
+                <a:latin typeface="+mn-lt"/>
+                <a:ea typeface="+mn-ea"/>
+                <a:cs typeface="+mn-cs"/>
+              </a:rPr>
+            </a:br>
+            <a:r>
+              <a:rPr lang="en-GB" sz="1200" b="0" kern="1200" dirty="0">
+                <a:solidFill>
+                  <a:schemeClr val="tx1"/>
+                </a:solidFill>
+                <a:effectLst/>
+                <a:latin typeface="+mn-lt"/>
+                <a:ea typeface="+mn-ea"/>
+                <a:cs typeface="+mn-cs"/>
+              </a:rPr>
+              <a:t># Create the plot</a:t>
+            </a:r>
+          </a:p>
+          <a:p>
+            <a:r>
+              <a:rPr lang="en-GB" sz="1200" b="0" kern="1200" dirty="0" err="1">
+                <a:solidFill>
+                  <a:schemeClr val="tx1"/>
+                </a:solidFill>
+                <a:effectLst/>
+                <a:latin typeface="+mn-lt"/>
+                <a:ea typeface="+mn-ea"/>
+                <a:cs typeface="+mn-cs"/>
+              </a:rPr>
+              <a:t>plt.figure</a:t>
+            </a:r>
+            <a:r>
+              <a:rPr lang="en-GB" sz="1200" b="0" kern="1200" dirty="0">
+                <a:solidFill>
+                  <a:schemeClr val="tx1"/>
+                </a:solidFill>
+                <a:effectLst/>
+                <a:latin typeface="+mn-lt"/>
+                <a:ea typeface="+mn-ea"/>
+                <a:cs typeface="+mn-cs"/>
+              </a:rPr>
+              <a:t>(</a:t>
+            </a:r>
+            <a:r>
+              <a:rPr lang="en-GB" sz="1200" b="0" kern="1200" dirty="0" err="1">
+                <a:solidFill>
+                  <a:schemeClr val="tx1"/>
+                </a:solidFill>
+                <a:effectLst/>
+                <a:latin typeface="+mn-lt"/>
+                <a:ea typeface="+mn-ea"/>
+                <a:cs typeface="+mn-cs"/>
+              </a:rPr>
+              <a:t>figsize</a:t>
+            </a:r>
+            <a:r>
+              <a:rPr lang="en-GB" sz="1200" b="0" kern="1200" dirty="0">
+                <a:solidFill>
+                  <a:schemeClr val="tx1"/>
+                </a:solidFill>
+                <a:effectLst/>
+                <a:latin typeface="+mn-lt"/>
+                <a:ea typeface="+mn-ea"/>
+                <a:cs typeface="+mn-cs"/>
+              </a:rPr>
+              <a:t>=(12, 8))</a:t>
+            </a:r>
+          </a:p>
+          <a:p>
+            <a:br>
+              <a:rPr lang="en-GB" sz="1200" b="0" kern="1200" dirty="0">
+                <a:solidFill>
+                  <a:schemeClr val="tx1"/>
+                </a:solidFill>
+                <a:effectLst/>
+                <a:latin typeface="+mn-lt"/>
+                <a:ea typeface="+mn-ea"/>
+                <a:cs typeface="+mn-cs"/>
+              </a:rPr>
+            </a:br>
+            <a:r>
+              <a:rPr lang="en-GB" sz="1200" b="0" kern="1200" dirty="0">
+                <a:solidFill>
+                  <a:schemeClr val="tx1"/>
+                </a:solidFill>
+                <a:effectLst/>
+                <a:latin typeface="+mn-lt"/>
+                <a:ea typeface="+mn-ea"/>
+                <a:cs typeface="+mn-cs"/>
+              </a:rPr>
+              <a:t># Create grouped </a:t>
+            </a:r>
+            <a:r>
+              <a:rPr lang="en-GB" sz="1200" b="0" kern="1200" dirty="0" err="1">
+                <a:solidFill>
+                  <a:schemeClr val="tx1"/>
+                </a:solidFill>
+                <a:effectLst/>
+                <a:latin typeface="+mn-lt"/>
+                <a:ea typeface="+mn-ea"/>
+                <a:cs typeface="+mn-cs"/>
+              </a:rPr>
+              <a:t>barplot</a:t>
+            </a:r>
+            <a:r>
+              <a:rPr lang="en-GB" sz="1200" b="0" kern="1200" dirty="0">
+                <a:solidFill>
+                  <a:schemeClr val="tx1"/>
+                </a:solidFill>
+                <a:effectLst/>
+                <a:latin typeface="+mn-lt"/>
+                <a:ea typeface="+mn-ea"/>
+                <a:cs typeface="+mn-cs"/>
+              </a:rPr>
+              <a:t> with confidence intervals</a:t>
+            </a:r>
+          </a:p>
+          <a:p>
+            <a:r>
+              <a:rPr lang="en-GB" sz="1200" b="0" kern="1200" dirty="0" err="1">
+                <a:solidFill>
+                  <a:schemeClr val="tx1"/>
+                </a:solidFill>
+                <a:effectLst/>
+                <a:latin typeface="+mn-lt"/>
+                <a:ea typeface="+mn-ea"/>
+                <a:cs typeface="+mn-cs"/>
+              </a:rPr>
+              <a:t>ax</a:t>
+            </a:r>
+            <a:r>
+              <a:rPr lang="en-GB" sz="1200" b="0" kern="1200" dirty="0">
+                <a:solidFill>
+                  <a:schemeClr val="tx1"/>
+                </a:solidFill>
+                <a:effectLst/>
+                <a:latin typeface="+mn-lt"/>
+                <a:ea typeface="+mn-ea"/>
+                <a:cs typeface="+mn-cs"/>
+              </a:rPr>
+              <a:t> = </a:t>
+            </a:r>
+            <a:r>
+              <a:rPr lang="en-GB" sz="1200" b="0" kern="1200" dirty="0" err="1">
+                <a:solidFill>
+                  <a:schemeClr val="tx1"/>
+                </a:solidFill>
+                <a:effectLst/>
+                <a:latin typeface="+mn-lt"/>
+                <a:ea typeface="+mn-ea"/>
+                <a:cs typeface="+mn-cs"/>
+              </a:rPr>
+              <a:t>sns.barplot</a:t>
+            </a:r>
+            <a:r>
+              <a:rPr lang="en-GB" sz="1200" b="0" kern="1200" dirty="0">
+                <a:solidFill>
+                  <a:schemeClr val="tx1"/>
+                </a:solidFill>
+                <a:effectLst/>
+                <a:latin typeface="+mn-lt"/>
+                <a:ea typeface="+mn-ea"/>
+                <a:cs typeface="+mn-cs"/>
+              </a:rPr>
+              <a:t>(data=</a:t>
+            </a:r>
+            <a:r>
+              <a:rPr lang="en-GB" sz="1200" b="0" kern="1200" dirty="0" err="1">
+                <a:solidFill>
+                  <a:schemeClr val="tx1"/>
+                </a:solidFill>
+                <a:effectLst/>
+                <a:latin typeface="+mn-lt"/>
+                <a:ea typeface="+mn-ea"/>
+                <a:cs typeface="+mn-cs"/>
+              </a:rPr>
+              <a:t>combined_data</a:t>
+            </a:r>
+            <a:r>
+              <a:rPr lang="en-GB" sz="1200" b="0" kern="1200" dirty="0">
+                <a:solidFill>
+                  <a:schemeClr val="tx1"/>
+                </a:solidFill>
+                <a:effectLst/>
+                <a:latin typeface="+mn-lt"/>
+                <a:ea typeface="+mn-ea"/>
+                <a:cs typeface="+mn-cs"/>
+              </a:rPr>
+              <a:t>, </a:t>
+            </a:r>
+          </a:p>
+          <a:p>
+            <a:r>
+              <a:rPr lang="en-GB" sz="1200" b="0" kern="1200" dirty="0">
+                <a:solidFill>
+                  <a:schemeClr val="tx1"/>
+                </a:solidFill>
+                <a:effectLst/>
+                <a:latin typeface="+mn-lt"/>
+                <a:ea typeface="+mn-ea"/>
+                <a:cs typeface="+mn-cs"/>
+              </a:rPr>
+              <a:t>                x='</a:t>
+            </a:r>
+            <a:r>
+              <a:rPr lang="en-GB" sz="1200" b="0" kern="1200" dirty="0" err="1">
+                <a:solidFill>
+                  <a:schemeClr val="tx1"/>
+                </a:solidFill>
+                <a:effectLst/>
+                <a:latin typeface="+mn-lt"/>
+                <a:ea typeface="+mn-ea"/>
+                <a:cs typeface="+mn-cs"/>
+              </a:rPr>
+              <a:t>Product_Group</a:t>
+            </a:r>
+            <a:r>
+              <a:rPr lang="en-GB" sz="1200" b="0" kern="1200" dirty="0">
+                <a:solidFill>
+                  <a:schemeClr val="tx1"/>
+                </a:solidFill>
+                <a:effectLst/>
+                <a:latin typeface="+mn-lt"/>
+                <a:ea typeface="+mn-ea"/>
+                <a:cs typeface="+mn-cs"/>
+              </a:rPr>
+              <a:t>', </a:t>
+            </a:r>
+          </a:p>
+          <a:p>
+            <a:r>
+              <a:rPr lang="en-GB" sz="1200" b="0" kern="1200" dirty="0">
+                <a:solidFill>
+                  <a:schemeClr val="tx1"/>
+                </a:solidFill>
+                <a:effectLst/>
+                <a:latin typeface="+mn-lt"/>
+                <a:ea typeface="+mn-ea"/>
+                <a:cs typeface="+mn-cs"/>
+              </a:rPr>
+              <a:t>                y='</a:t>
+            </a:r>
+            <a:r>
+              <a:rPr lang="en-GB" sz="1200" b="0" kern="1200" dirty="0" err="1">
+                <a:solidFill>
+                  <a:schemeClr val="tx1"/>
+                </a:solidFill>
+                <a:effectLst/>
+                <a:latin typeface="+mn-lt"/>
+                <a:ea typeface="+mn-ea"/>
+                <a:cs typeface="+mn-cs"/>
+              </a:rPr>
+              <a:t>Umsatz</a:t>
+            </a:r>
+            <a:r>
+              <a:rPr lang="en-GB" sz="1200" b="0" kern="1200" dirty="0">
+                <a:solidFill>
+                  <a:schemeClr val="tx1"/>
+                </a:solidFill>
+                <a:effectLst/>
+                <a:latin typeface="+mn-lt"/>
+                <a:ea typeface="+mn-ea"/>
+                <a:cs typeface="+mn-cs"/>
+              </a:rPr>
+              <a:t>', </a:t>
+            </a:r>
+          </a:p>
+          <a:p>
+            <a:r>
+              <a:rPr lang="en-GB" sz="1200" b="0" kern="1200" dirty="0">
+                <a:solidFill>
+                  <a:schemeClr val="tx1"/>
+                </a:solidFill>
+                <a:effectLst/>
+                <a:latin typeface="+mn-lt"/>
+                <a:ea typeface="+mn-ea"/>
+                <a:cs typeface="+mn-cs"/>
+              </a:rPr>
+              <a:t>                hue='Silvester', </a:t>
+            </a:r>
+          </a:p>
+          <a:p>
+            <a:r>
+              <a:rPr lang="en-GB" sz="1200" b="0" kern="1200" dirty="0">
+                <a:solidFill>
+                  <a:schemeClr val="tx1"/>
+                </a:solidFill>
+                <a:effectLst/>
+                <a:latin typeface="+mn-lt"/>
+                <a:ea typeface="+mn-ea"/>
+                <a:cs typeface="+mn-cs"/>
+              </a:rPr>
+              <a:t>                ci=95,  # 95% confidence interval</a:t>
+            </a:r>
+          </a:p>
+          <a:p>
+            <a:r>
+              <a:rPr lang="en-GB" sz="1200" b="0" kern="1200" dirty="0">
+                <a:solidFill>
+                  <a:schemeClr val="tx1"/>
+                </a:solidFill>
+                <a:effectLst/>
+                <a:latin typeface="+mn-lt"/>
+                <a:ea typeface="+mn-ea"/>
+                <a:cs typeface="+mn-cs"/>
+              </a:rPr>
+              <a:t>                # Cap size for error bars</a:t>
+            </a:r>
+          </a:p>
+          <a:p>
+            <a:r>
+              <a:rPr lang="en-GB" sz="1200" b="0" kern="1200" dirty="0">
+                <a:solidFill>
+                  <a:schemeClr val="tx1"/>
+                </a:solidFill>
+                <a:effectLst/>
+                <a:latin typeface="+mn-lt"/>
+                <a:ea typeface="+mn-ea"/>
+                <a:cs typeface="+mn-cs"/>
+              </a:rPr>
+              <a:t>                </a:t>
+            </a:r>
+            <a:r>
+              <a:rPr lang="en-GB" sz="1200" b="0" kern="1200" dirty="0" err="1">
+                <a:solidFill>
+                  <a:schemeClr val="tx1"/>
+                </a:solidFill>
+                <a:effectLst/>
+                <a:latin typeface="+mn-lt"/>
+                <a:ea typeface="+mn-ea"/>
+                <a:cs typeface="+mn-cs"/>
+              </a:rPr>
+              <a:t>errwidth</a:t>
+            </a:r>
+            <a:r>
+              <a:rPr lang="en-GB" sz="1200" b="0" kern="1200" dirty="0">
+                <a:solidFill>
+                  <a:schemeClr val="tx1"/>
+                </a:solidFill>
+                <a:effectLst/>
+                <a:latin typeface="+mn-lt"/>
+                <a:ea typeface="+mn-ea"/>
+                <a:cs typeface="+mn-cs"/>
+              </a:rPr>
+              <a:t>=2)   # Width of error bars</a:t>
+            </a:r>
+          </a:p>
+          <a:p>
+            <a:br>
+              <a:rPr lang="en-GB" sz="1200" b="0" kern="1200" dirty="0">
+                <a:solidFill>
+                  <a:schemeClr val="tx1"/>
+                </a:solidFill>
+                <a:effectLst/>
+                <a:latin typeface="+mn-lt"/>
+                <a:ea typeface="+mn-ea"/>
+                <a:cs typeface="+mn-cs"/>
+              </a:rPr>
+            </a:br>
+            <a:r>
+              <a:rPr lang="en-GB" sz="1200" b="0" kern="1200" dirty="0">
+                <a:solidFill>
+                  <a:schemeClr val="tx1"/>
+                </a:solidFill>
+                <a:effectLst/>
+                <a:latin typeface="+mn-lt"/>
+                <a:ea typeface="+mn-ea"/>
+                <a:cs typeface="+mn-cs"/>
+              </a:rPr>
+              <a:t># Customize the plot</a:t>
+            </a:r>
+          </a:p>
+          <a:p>
+            <a:r>
+              <a:rPr lang="en-GB" sz="1200" b="0" kern="1200" dirty="0" err="1">
+                <a:solidFill>
+                  <a:schemeClr val="tx1"/>
+                </a:solidFill>
+                <a:effectLst/>
+                <a:latin typeface="+mn-lt"/>
+                <a:ea typeface="+mn-ea"/>
+                <a:cs typeface="+mn-cs"/>
+              </a:rPr>
+              <a:t>plt.title</a:t>
+            </a:r>
+            <a:r>
+              <a:rPr lang="en-GB" sz="1200" b="0" kern="1200" dirty="0">
+                <a:solidFill>
+                  <a:schemeClr val="tx1"/>
+                </a:solidFill>
+                <a:effectLst/>
+                <a:latin typeface="+mn-lt"/>
+                <a:ea typeface="+mn-ea"/>
+                <a:cs typeface="+mn-cs"/>
+              </a:rPr>
+              <a:t>('Sales by Product Group and New Year\'s Eve', </a:t>
+            </a:r>
+          </a:p>
+          <a:p>
+            <a:r>
+              <a:rPr lang="en-GB" sz="1200" b="0" kern="1200" dirty="0">
+                <a:solidFill>
+                  <a:schemeClr val="tx1"/>
+                </a:solidFill>
+                <a:effectLst/>
+                <a:latin typeface="+mn-lt"/>
+                <a:ea typeface="+mn-ea"/>
+                <a:cs typeface="+mn-cs"/>
+              </a:rPr>
+              <a:t>          </a:t>
+            </a:r>
+            <a:r>
+              <a:rPr lang="en-GB" sz="1200" b="0" kern="1200" dirty="0" err="1">
+                <a:solidFill>
+                  <a:schemeClr val="tx1"/>
+                </a:solidFill>
+                <a:effectLst/>
+                <a:latin typeface="+mn-lt"/>
+                <a:ea typeface="+mn-ea"/>
+                <a:cs typeface="+mn-cs"/>
+              </a:rPr>
+              <a:t>fontsize</a:t>
+            </a:r>
+            <a:r>
+              <a:rPr lang="en-GB" sz="1200" b="0" kern="1200" dirty="0">
+                <a:solidFill>
+                  <a:schemeClr val="tx1"/>
+                </a:solidFill>
+                <a:effectLst/>
+                <a:latin typeface="+mn-lt"/>
+                <a:ea typeface="+mn-ea"/>
+                <a:cs typeface="+mn-cs"/>
+              </a:rPr>
+              <a:t>=14, </a:t>
+            </a:r>
+            <a:r>
+              <a:rPr lang="en-GB" sz="1200" b="0" kern="1200" dirty="0" err="1">
+                <a:solidFill>
+                  <a:schemeClr val="tx1"/>
+                </a:solidFill>
+                <a:effectLst/>
+                <a:latin typeface="+mn-lt"/>
+                <a:ea typeface="+mn-ea"/>
+                <a:cs typeface="+mn-cs"/>
+              </a:rPr>
+              <a:t>fontweight</a:t>
+            </a:r>
+            <a:r>
+              <a:rPr lang="en-GB" sz="1200" b="0" kern="1200" dirty="0">
+                <a:solidFill>
+                  <a:schemeClr val="tx1"/>
+                </a:solidFill>
+                <a:effectLst/>
+                <a:latin typeface="+mn-lt"/>
+                <a:ea typeface="+mn-ea"/>
+                <a:cs typeface="+mn-cs"/>
+              </a:rPr>
+              <a:t>='bold')</a:t>
+            </a:r>
+          </a:p>
+          <a:p>
+            <a:r>
+              <a:rPr lang="en-GB" sz="1200" b="0" kern="1200" dirty="0" err="1">
+                <a:solidFill>
+                  <a:schemeClr val="tx1"/>
+                </a:solidFill>
+                <a:effectLst/>
+                <a:latin typeface="+mn-lt"/>
+                <a:ea typeface="+mn-ea"/>
+                <a:cs typeface="+mn-cs"/>
+              </a:rPr>
+              <a:t>plt.xlabel</a:t>
+            </a:r>
+            <a:r>
+              <a:rPr lang="en-GB" sz="1200" b="0" kern="1200" dirty="0">
+                <a:solidFill>
+                  <a:schemeClr val="tx1"/>
+                </a:solidFill>
+                <a:effectLst/>
+                <a:latin typeface="+mn-lt"/>
+                <a:ea typeface="+mn-ea"/>
+                <a:cs typeface="+mn-cs"/>
+              </a:rPr>
+              <a:t>('Product Group', </a:t>
+            </a:r>
+            <a:r>
+              <a:rPr lang="en-GB" sz="1200" b="0" kern="1200" dirty="0" err="1">
+                <a:solidFill>
+                  <a:schemeClr val="tx1"/>
+                </a:solidFill>
+                <a:effectLst/>
+                <a:latin typeface="+mn-lt"/>
+                <a:ea typeface="+mn-ea"/>
+                <a:cs typeface="+mn-cs"/>
+              </a:rPr>
+              <a:t>fontsize</a:t>
+            </a:r>
+            <a:r>
+              <a:rPr lang="en-GB" sz="1200" b="0" kern="1200" dirty="0">
+                <a:solidFill>
+                  <a:schemeClr val="tx1"/>
+                </a:solidFill>
+                <a:effectLst/>
+                <a:latin typeface="+mn-lt"/>
+                <a:ea typeface="+mn-ea"/>
+                <a:cs typeface="+mn-cs"/>
+              </a:rPr>
+              <a:t>=12)</a:t>
+            </a:r>
+          </a:p>
+          <a:p>
+            <a:r>
+              <a:rPr lang="en-GB" sz="1200" b="0" kern="1200" dirty="0" err="1">
+                <a:solidFill>
+                  <a:schemeClr val="tx1"/>
+                </a:solidFill>
+                <a:effectLst/>
+                <a:latin typeface="+mn-lt"/>
+                <a:ea typeface="+mn-ea"/>
+                <a:cs typeface="+mn-cs"/>
+              </a:rPr>
+              <a:t>plt.ylabel</a:t>
+            </a:r>
+            <a:r>
+              <a:rPr lang="en-GB" sz="1200" b="0" kern="1200" dirty="0">
+                <a:solidFill>
+                  <a:schemeClr val="tx1"/>
+                </a:solidFill>
+                <a:effectLst/>
+                <a:latin typeface="+mn-lt"/>
+                <a:ea typeface="+mn-ea"/>
+                <a:cs typeface="+mn-cs"/>
+              </a:rPr>
+              <a:t>('Sales (</a:t>
+            </a:r>
+            <a:r>
+              <a:rPr lang="en-GB" sz="1200" b="0" kern="1200" dirty="0" err="1">
+                <a:solidFill>
+                  <a:schemeClr val="tx1"/>
+                </a:solidFill>
+                <a:effectLst/>
+                <a:latin typeface="+mn-lt"/>
+                <a:ea typeface="+mn-ea"/>
+                <a:cs typeface="+mn-cs"/>
+              </a:rPr>
+              <a:t>Umsatz</a:t>
+            </a:r>
+            <a:r>
+              <a:rPr lang="en-GB" sz="1200" b="0" kern="1200" dirty="0">
+                <a:solidFill>
+                  <a:schemeClr val="tx1"/>
+                </a:solidFill>
+                <a:effectLst/>
+                <a:latin typeface="+mn-lt"/>
+                <a:ea typeface="+mn-ea"/>
+                <a:cs typeface="+mn-cs"/>
+              </a:rPr>
+              <a:t>)', </a:t>
+            </a:r>
+            <a:r>
+              <a:rPr lang="en-GB" sz="1200" b="0" kern="1200" dirty="0" err="1">
+                <a:solidFill>
+                  <a:schemeClr val="tx1"/>
+                </a:solidFill>
+                <a:effectLst/>
+                <a:latin typeface="+mn-lt"/>
+                <a:ea typeface="+mn-ea"/>
+                <a:cs typeface="+mn-cs"/>
+              </a:rPr>
+              <a:t>fontsize</a:t>
+            </a:r>
+            <a:r>
+              <a:rPr lang="en-GB" sz="1200" b="0" kern="1200" dirty="0">
+                <a:solidFill>
+                  <a:schemeClr val="tx1"/>
+                </a:solidFill>
+                <a:effectLst/>
+                <a:latin typeface="+mn-lt"/>
+                <a:ea typeface="+mn-ea"/>
+                <a:cs typeface="+mn-cs"/>
+              </a:rPr>
+              <a:t>=12)</a:t>
+            </a:r>
+          </a:p>
+          <a:p>
+            <a:r>
+              <a:rPr lang="en-GB" sz="1200" b="0" kern="1200" dirty="0" err="1">
+                <a:solidFill>
+                  <a:schemeClr val="tx1"/>
+                </a:solidFill>
+                <a:effectLst/>
+                <a:latin typeface="+mn-lt"/>
+                <a:ea typeface="+mn-ea"/>
+                <a:cs typeface="+mn-cs"/>
+              </a:rPr>
+              <a:t>plt.legend</a:t>
+            </a:r>
+            <a:r>
+              <a:rPr lang="en-GB" sz="1200" b="0" kern="1200" dirty="0">
+                <a:solidFill>
+                  <a:schemeClr val="tx1"/>
+                </a:solidFill>
+                <a:effectLst/>
+                <a:latin typeface="+mn-lt"/>
+                <a:ea typeface="+mn-ea"/>
+                <a:cs typeface="+mn-cs"/>
+              </a:rPr>
+              <a:t>(title='Silvester', </a:t>
+            </a:r>
+            <a:r>
+              <a:rPr lang="en-GB" sz="1200" b="0" kern="1200" dirty="0" err="1">
+                <a:solidFill>
+                  <a:schemeClr val="tx1"/>
+                </a:solidFill>
+                <a:effectLst/>
+                <a:latin typeface="+mn-lt"/>
+                <a:ea typeface="+mn-ea"/>
+                <a:cs typeface="+mn-cs"/>
+              </a:rPr>
+              <a:t>bbox_to_anchor</a:t>
+            </a:r>
+            <a:r>
+              <a:rPr lang="en-GB" sz="1200" b="0" kern="1200" dirty="0">
+                <a:solidFill>
+                  <a:schemeClr val="tx1"/>
+                </a:solidFill>
+                <a:effectLst/>
+                <a:latin typeface="+mn-lt"/>
+                <a:ea typeface="+mn-ea"/>
+                <a:cs typeface="+mn-cs"/>
+              </a:rPr>
+              <a:t>=(1.05, 1), loc='upper left')</a:t>
+            </a:r>
+          </a:p>
+          <a:p>
+            <a:br>
+              <a:rPr lang="en-GB" sz="1200" b="0" kern="1200" dirty="0">
+                <a:solidFill>
+                  <a:schemeClr val="tx1"/>
+                </a:solidFill>
+                <a:effectLst/>
+                <a:latin typeface="+mn-lt"/>
+                <a:ea typeface="+mn-ea"/>
+                <a:cs typeface="+mn-cs"/>
+              </a:rPr>
+            </a:br>
+            <a:br>
+              <a:rPr lang="en-GB" sz="1200" b="0" kern="1200" dirty="0">
+                <a:solidFill>
+                  <a:schemeClr val="tx1"/>
+                </a:solidFill>
+                <a:effectLst/>
+                <a:latin typeface="+mn-lt"/>
+                <a:ea typeface="+mn-ea"/>
+                <a:cs typeface="+mn-cs"/>
+              </a:rPr>
+            </a:br>
+            <a:r>
+              <a:rPr lang="en-GB" sz="1200" b="0" kern="1200" dirty="0">
+                <a:solidFill>
+                  <a:schemeClr val="tx1"/>
+                </a:solidFill>
+                <a:effectLst/>
+                <a:latin typeface="+mn-lt"/>
+                <a:ea typeface="+mn-ea"/>
+                <a:cs typeface="+mn-cs"/>
+              </a:rPr>
+              <a:t># Rotate x-axis labels if needed</a:t>
+            </a:r>
+          </a:p>
+          <a:p>
+            <a:r>
+              <a:rPr lang="en-GB" sz="1200" b="0" kern="1200" dirty="0" err="1">
+                <a:solidFill>
+                  <a:schemeClr val="tx1"/>
+                </a:solidFill>
+                <a:effectLst/>
+                <a:latin typeface="+mn-lt"/>
+                <a:ea typeface="+mn-ea"/>
+                <a:cs typeface="+mn-cs"/>
+              </a:rPr>
+              <a:t>plt.xticks</a:t>
+            </a:r>
+            <a:r>
+              <a:rPr lang="en-GB" sz="1200" b="0" kern="1200" dirty="0">
+                <a:solidFill>
+                  <a:schemeClr val="tx1"/>
+                </a:solidFill>
+                <a:effectLst/>
+                <a:latin typeface="+mn-lt"/>
+                <a:ea typeface="+mn-ea"/>
+                <a:cs typeface="+mn-cs"/>
+              </a:rPr>
+              <a:t>(rotation=0)</a:t>
+            </a:r>
+          </a:p>
+          <a:p>
+            <a:br>
+              <a:rPr lang="en-GB" sz="1200" b="0" kern="1200" dirty="0">
+                <a:solidFill>
+                  <a:schemeClr val="tx1"/>
+                </a:solidFill>
+                <a:effectLst/>
+                <a:latin typeface="+mn-lt"/>
+                <a:ea typeface="+mn-ea"/>
+                <a:cs typeface="+mn-cs"/>
+              </a:rPr>
+            </a:br>
+            <a:r>
+              <a:rPr lang="en-GB" sz="1200" b="0" kern="1200" dirty="0">
+                <a:solidFill>
+                  <a:schemeClr val="tx1"/>
+                </a:solidFill>
+                <a:effectLst/>
+                <a:latin typeface="+mn-lt"/>
+                <a:ea typeface="+mn-ea"/>
+                <a:cs typeface="+mn-cs"/>
+              </a:rPr>
+              <a:t># Adjust layout to prevent label cutoff</a:t>
+            </a:r>
+          </a:p>
+          <a:p>
+            <a:r>
+              <a:rPr lang="en-GB" sz="1200" b="0" kern="1200" dirty="0" err="1">
+                <a:solidFill>
+                  <a:schemeClr val="tx1"/>
+                </a:solidFill>
+                <a:effectLst/>
+                <a:latin typeface="+mn-lt"/>
+                <a:ea typeface="+mn-ea"/>
+                <a:cs typeface="+mn-cs"/>
+              </a:rPr>
+              <a:t>plt.tight_layout</a:t>
+            </a:r>
+            <a:r>
+              <a:rPr lang="en-GB" sz="1200" b="0" kern="1200" dirty="0">
+                <a:solidFill>
+                  <a:schemeClr val="tx1"/>
+                </a:solidFill>
+                <a:effectLst/>
+                <a:latin typeface="+mn-lt"/>
+                <a:ea typeface="+mn-ea"/>
+                <a:cs typeface="+mn-cs"/>
+              </a:rPr>
+              <a:t>()</a:t>
+            </a:r>
+          </a:p>
+          <a:p>
+            <a:br>
+              <a:rPr lang="en-GB" sz="1200" b="0" kern="1200" dirty="0">
+                <a:solidFill>
+                  <a:schemeClr val="tx1"/>
+                </a:solidFill>
+                <a:effectLst/>
+                <a:latin typeface="+mn-lt"/>
+                <a:ea typeface="+mn-ea"/>
+                <a:cs typeface="+mn-cs"/>
+              </a:rPr>
+            </a:br>
+            <a:r>
+              <a:rPr lang="en-GB" sz="1200" b="0" kern="1200" dirty="0">
+                <a:solidFill>
+                  <a:schemeClr val="tx1"/>
+                </a:solidFill>
+                <a:effectLst/>
+                <a:latin typeface="+mn-lt"/>
+                <a:ea typeface="+mn-ea"/>
+                <a:cs typeface="+mn-cs"/>
+              </a:rPr>
+              <a:t># Display the plot</a:t>
+            </a:r>
+          </a:p>
+          <a:p>
+            <a:r>
+              <a:rPr lang="en-GB" sz="1200" b="0" kern="1200" dirty="0" err="1">
+                <a:solidFill>
+                  <a:schemeClr val="tx1"/>
+                </a:solidFill>
+                <a:effectLst/>
+                <a:latin typeface="+mn-lt"/>
+                <a:ea typeface="+mn-ea"/>
+                <a:cs typeface="+mn-cs"/>
+              </a:rPr>
+              <a:t>plt.show</a:t>
+            </a:r>
+            <a:r>
+              <a:rPr lang="en-GB" sz="1200" b="0" kern="1200" dirty="0">
+                <a:solidFill>
+                  <a:schemeClr val="tx1"/>
+                </a:solidFill>
+                <a:effectLst/>
+                <a:latin typeface="+mn-lt"/>
+                <a:ea typeface="+mn-ea"/>
+                <a:cs typeface="+mn-cs"/>
+              </a:rPr>
+              <a:t>()</a:t>
+            </a:r>
+          </a:p>
+          <a:p>
+            <a:br>
+              <a:rPr lang="en-GB" sz="1200" b="0" kern="1200" dirty="0">
+                <a:solidFill>
+                  <a:schemeClr val="tx1"/>
+                </a:solidFill>
+                <a:effectLst/>
+                <a:latin typeface="+mn-lt"/>
+                <a:ea typeface="+mn-ea"/>
+                <a:cs typeface="+mn-cs"/>
+              </a:rPr>
+            </a:br>
+            <a:endParaRPr lang="en-GB" sz="1200" b="0" kern="1200" dirty="0">
+              <a:solidFill>
+                <a:schemeClr val="tx1"/>
+              </a:solidFill>
+              <a:effectLst/>
+              <a:latin typeface="+mn-lt"/>
+              <a:ea typeface="+mn-ea"/>
+              <a:cs typeface="+mn-cs"/>
+            </a:endParaRPr>
           </a:p>
           <a:p>
             <a:endParaRPr lang="en-GB" dirty="0"/>
@@ -3322,18 +4003,8 @@
           <a:lstStyle/>
           <a:p>
             <a:r>
-              <a:rPr lang="en-US" dirty="0"/>
-              <a:t>Moved the title bit to make some space</a:t>
-            </a:r>
-            <a:endParaRPr lang="el-GR" dirty="0"/>
-          </a:p>
-          <a:p>
-            <a:endParaRPr lang="el-GR" dirty="0"/>
-          </a:p>
-          <a:p>
-            <a:r>
-              <a:rPr lang="en-US" dirty="0"/>
-              <a:t>Suggestion is to keep only the missing values columns we worked on  and next to talk about wetter code </a:t>
+              <a:rPr lang="en-US"/>
+              <a:t> </a:t>
             </a:r>
             <a:endParaRPr lang="en-GB" dirty="0"/>
           </a:p>
@@ -3713,7 +4384,7 @@
           <a:p>
             <a:fld id="{BC38F1CC-ABF1-4C16-BBB2-7CC8083DBD41}" type="datetime1">
               <a:rPr lang="de-DE" smtClean="0"/>
-              <a:t>02.07.2025</a:t>
+              <a:t>03.07.2025</a:t>
             </a:fld>
             <a:endParaRPr lang="de-DE"/>
           </a:p>
@@ -3913,7 +4584,7 @@
           <a:p>
             <a:fld id="{5AD46073-F360-4B03-9A78-9F6E24BF38BF}" type="datetime1">
               <a:rPr lang="de-DE" smtClean="0"/>
-              <a:t>02.07.2025</a:t>
+              <a:t>03.07.2025</a:t>
             </a:fld>
             <a:endParaRPr lang="de-DE"/>
           </a:p>
@@ -4123,7 +4794,7 @@
           <a:p>
             <a:fld id="{60947668-F355-4DBF-B716-42DB1C64DFB7}" type="datetime1">
               <a:rPr lang="de-DE" smtClean="0"/>
-              <a:t>02.07.2025</a:t>
+              <a:t>03.07.2025</a:t>
             </a:fld>
             <a:endParaRPr lang="de-DE"/>
           </a:p>
@@ -4323,7 +4994,7 @@
           <a:p>
             <a:fld id="{CA09A6BA-2653-433C-BA9E-57AD9EE3A712}" type="datetime1">
               <a:rPr lang="de-DE" smtClean="0"/>
-              <a:t>02.07.2025</a:t>
+              <a:t>03.07.2025</a:t>
             </a:fld>
             <a:endParaRPr lang="de-DE"/>
           </a:p>
@@ -4599,7 +5270,7 @@
           <a:p>
             <a:fld id="{088226A6-5467-47C4-B46A-D1C4752B6C50}" type="datetime1">
               <a:rPr lang="de-DE" smtClean="0"/>
-              <a:t>02.07.2025</a:t>
+              <a:t>03.07.2025</a:t>
             </a:fld>
             <a:endParaRPr lang="de-DE"/>
           </a:p>
@@ -4867,7 +5538,7 @@
           <a:p>
             <a:fld id="{4DAD014D-DF7A-4A17-BE70-CBDCCD05F312}" type="datetime1">
               <a:rPr lang="de-DE" smtClean="0"/>
-              <a:t>02.07.2025</a:t>
+              <a:t>03.07.2025</a:t>
             </a:fld>
             <a:endParaRPr lang="de-DE"/>
           </a:p>
@@ -5282,7 +5953,7 @@
           <a:p>
             <a:fld id="{3DB58879-59D9-4DFD-ACCE-8F9DA76AC11D}" type="datetime1">
               <a:rPr lang="de-DE" smtClean="0"/>
-              <a:t>02.07.2025</a:t>
+              <a:t>03.07.2025</a:t>
             </a:fld>
             <a:endParaRPr lang="de-DE"/>
           </a:p>
@@ -5424,7 +6095,7 @@
           <a:p>
             <a:fld id="{1D668223-0355-4A47-87D8-E56CD5791C42}" type="datetime1">
               <a:rPr lang="de-DE" smtClean="0"/>
-              <a:t>02.07.2025</a:t>
+              <a:t>03.07.2025</a:t>
             </a:fld>
             <a:endParaRPr lang="de-DE"/>
           </a:p>
@@ -5537,7 +6208,7 @@
           <a:p>
             <a:fld id="{EC3C88DA-2725-48DA-8CAB-E21C779E0A52}" type="datetime1">
               <a:rPr lang="de-DE" smtClean="0"/>
-              <a:t>02.07.2025</a:t>
+              <a:t>03.07.2025</a:t>
             </a:fld>
             <a:endParaRPr lang="de-DE"/>
           </a:p>
@@ -5850,7 +6521,7 @@
           <a:p>
             <a:fld id="{F6DFF235-647B-4139-A6C7-FD3E9D31CB9A}" type="datetime1">
               <a:rPr lang="de-DE" smtClean="0"/>
-              <a:t>02.07.2025</a:t>
+              <a:t>03.07.2025</a:t>
             </a:fld>
             <a:endParaRPr lang="de-DE"/>
           </a:p>
@@ -6139,7 +6810,7 @@
           <a:p>
             <a:fld id="{7D1839DE-6FAF-4E43-BF2D-2423A301DC2E}" type="datetime1">
               <a:rPr lang="de-DE" smtClean="0"/>
-              <a:t>02.07.2025</a:t>
+              <a:t>03.07.2025</a:t>
             </a:fld>
             <a:endParaRPr lang="de-DE"/>
           </a:p>
@@ -6382,7 +7053,7 @@
           <a:p>
             <a:fld id="{CC0A0AA2-7FF6-400D-97F4-AF38EF94CB43}" type="datetime1">
               <a:rPr lang="de-DE" smtClean="0"/>
-              <a:t>02.07.2025</a:t>
+              <a:t>03.07.2025</a:t>
             </a:fld>
             <a:endParaRPr lang="de-DE"/>
           </a:p>
@@ -20010,7 +20681,7 @@
         <p:spPr>
           <a:xfrm>
             <a:off x="1893345" y="1547809"/>
-            <a:ext cx="3537857" cy="4351338"/>
+            <a:ext cx="3890131" cy="4351338"/>
           </a:xfrm>
         </p:spPr>
         <p:txBody>
@@ -20150,7 +20821,7 @@
                   </a:schemeClr>
                 </a:solidFill>
               </a:rPr>
-              <a:t>Group 6 Season</a:t>
+              <a:t>Group 6 Season Score</a:t>
             </a:r>
           </a:p>
           <a:p>
@@ -22654,35 +23325,6 @@
       </p:sp>
       <p:sp>
         <p:nvSpPr>
-          <p:cNvPr id="3" name="Content Placeholder 2">
-            <a:extLst>
-              <a:ext uri="{FF2B5EF4-FFF2-40B4-BE49-F238E27FC236}">
-                <a16:creationId xmlns:a16="http://schemas.microsoft.com/office/drawing/2014/main" id="{2371C3C5-6EFD-1B97-9AAA-CF5B412BEAED}"/>
-              </a:ext>
-            </a:extLst>
-          </p:cNvPr>
-          <p:cNvSpPr>
-            <a:spLocks noGrp="1"/>
-          </p:cNvSpPr>
-          <p:nvPr>
-            <p:ph sz="half" idx="1"/>
-          </p:nvPr>
-        </p:nvSpPr>
-        <p:spPr/>
-        <p:txBody>
-          <a:bodyPr/>
-          <a:lstStyle/>
-          <a:p>
-            <a:r>
-              <a:rPr lang="en-US" dirty="0"/>
-              <a:t>Working on it</a:t>
-            </a:r>
-            <a:endParaRPr lang="en-GB" dirty="0"/>
-          </a:p>
-        </p:txBody>
-      </p:sp>
-      <p:sp>
-        <p:nvSpPr>
           <p:cNvPr id="5" name="Slide Number Placeholder 4">
             <a:extLst>
               <a:ext uri="{FF2B5EF4-FFF2-40B4-BE49-F238E27FC236}">
@@ -22815,8 +23457,8 @@
         </p:blipFill>
         <p:spPr>
           <a:xfrm>
-            <a:off x="6333274" y="2714324"/>
-            <a:ext cx="5229022" cy="3119437"/>
+            <a:off x="6333274" y="2548328"/>
+            <a:ext cx="5507276" cy="3285433"/>
           </a:xfrm>
           <a:prstGeom prst="rect">
             <a:avLst/>
@@ -22845,7 +23487,7 @@
         </p:blipFill>
         <p:spPr>
           <a:xfrm>
-            <a:off x="706877" y="2404761"/>
+            <a:off x="684843" y="2404761"/>
             <a:ext cx="5173884" cy="3429000"/>
           </a:xfrm>
           <a:prstGeom prst="rect">

--- a/4_Presentation/Group 3.pptx
+++ b/4_Presentation/Group 3.pptx
@@ -5,7 +5,7 @@
     <p:sldMasterId id="2147483660" r:id="rId1"/>
   </p:sldMasterIdLst>
   <p:notesMasterIdLst>
-    <p:notesMasterId r:id="rId26"/>
+    <p:notesMasterId r:id="rId27"/>
   </p:notesMasterIdLst>
   <p:sldIdLst>
     <p:sldId id="256" r:id="rId2"/>
@@ -32,6 +32,7 @@
     <p:sldId id="265" r:id="rId23"/>
     <p:sldId id="262" r:id="rId24"/>
     <p:sldId id="286" r:id="rId25"/>
+    <p:sldId id="288" r:id="rId26"/>
   </p:sldIdLst>
   <p:sldSz cx="12192000" cy="6858000"/>
   <p:notesSz cx="6858000" cy="9144000"/>
@@ -4186,13 +4187,8 @@
           <a:p>
             <a:r>
               <a:rPr lang="en-US" dirty="0"/>
-              <a:t>Still to be added: Model details + </a:t>
-            </a:r>
-            <a:r>
-              <a:rPr lang="en-US" dirty="0" err="1"/>
-              <a:t>Hyperparams</a:t>
-            </a:r>
-            <a:endParaRPr lang="en-US" dirty="0"/>
+              <a:t>Data were normalized before entering the model</a:t>
+            </a:r>
           </a:p>
           <a:p>
             <a:endParaRPr lang="en-GB" dirty="0"/>
@@ -8020,90 +8016,6 @@
       </p:sp>
       <p:sp>
         <p:nvSpPr>
-          <p:cNvPr id="25" name="TextBox 24">
-            <a:extLst>
-              <a:ext uri="{FF2B5EF4-FFF2-40B4-BE49-F238E27FC236}">
-                <a16:creationId xmlns:a16="http://schemas.microsoft.com/office/drawing/2014/main" id="{852FAF9E-1FFA-DA77-35CD-2C61E5B0CA7D}"/>
-              </a:ext>
-            </a:extLst>
-          </p:cNvPr>
-          <p:cNvSpPr txBox="1"/>
-          <p:nvPr/>
-        </p:nvSpPr>
-        <p:spPr>
-          <a:xfrm>
-            <a:off x="9739510" y="4378949"/>
-            <a:ext cx="1439730" cy="369332"/>
-          </a:xfrm>
-          <a:prstGeom prst="rect">
-            <a:avLst/>
-          </a:prstGeom>
-          <a:noFill/>
-        </p:spPr>
-        <p:txBody>
-          <a:bodyPr wrap="square" rtlCol="0">
-            <a:spAutoFit/>
-          </a:bodyPr>
-          <a:lstStyle/>
-          <a:p>
-            <a:pPr algn="ctr"/>
-            <a:r>
-              <a:rPr lang="en-GB" dirty="0"/>
-              <a:t>0.18081</a:t>
-            </a:r>
-            <a:endParaRPr lang="en-GB" b="1" dirty="0"/>
-          </a:p>
-        </p:txBody>
-      </p:sp>
-      <p:pic>
-        <p:nvPicPr>
-          <p:cNvPr id="2050" name="Picture 2">
-            <a:extLst>
-              <a:ext uri="{FF2B5EF4-FFF2-40B4-BE49-F238E27FC236}">
-                <a16:creationId xmlns:a16="http://schemas.microsoft.com/office/drawing/2014/main" id="{05625916-4F74-97B2-CA33-FED8ADFE5C39}"/>
-              </a:ext>
-            </a:extLst>
-          </p:cNvPr>
-          <p:cNvPicPr>
-            <a:picLocks noChangeAspect="1" noChangeArrowheads="1"/>
-          </p:cNvPicPr>
-          <p:nvPr/>
-        </p:nvPicPr>
-        <p:blipFill>
-          <a:blip r:embed="rId3">
-            <a:extLst>
-              <a:ext uri="{28A0092B-C50C-407E-A947-70E740481C1C}">
-                <a14:useLocalDpi xmlns:a14="http://schemas.microsoft.com/office/drawing/2010/main" val="0"/>
-              </a:ext>
-            </a:extLst>
-          </a:blip>
-          <a:srcRect/>
-          <a:stretch>
-            <a:fillRect/>
-          </a:stretch>
-        </p:blipFill>
-        <p:spPr bwMode="auto">
-          <a:xfrm>
-            <a:off x="9949429" y="3985911"/>
-            <a:ext cx="1019892" cy="395607"/>
-          </a:xfrm>
-          <a:prstGeom prst="rect">
-            <a:avLst/>
-          </a:prstGeom>
-          <a:noFill/>
-          <a:extLst>
-            <a:ext uri="{909E8E84-426E-40DD-AFC4-6F175D3DCCD1}">
-              <a14:hiddenFill xmlns:a14="http://schemas.microsoft.com/office/drawing/2010/main">
-                <a:solidFill>
-                  <a:srgbClr val="FFFFFF"/>
-                </a:solidFill>
-              </a14:hiddenFill>
-            </a:ext>
-          </a:extLst>
-        </p:spPr>
-      </p:pic>
-      <p:sp>
-        <p:nvSpPr>
           <p:cNvPr id="35" name="Rectangle 34">
             <a:extLst>
               <a:ext uri="{FF2B5EF4-FFF2-40B4-BE49-F238E27FC236}">
@@ -8274,83 +8186,6 @@
       </p:cxnSp>
       <p:sp>
         <p:nvSpPr>
-          <p:cNvPr id="41" name="Rectangle 40">
-            <a:extLst>
-              <a:ext uri="{FF2B5EF4-FFF2-40B4-BE49-F238E27FC236}">
-                <a16:creationId xmlns:a16="http://schemas.microsoft.com/office/drawing/2014/main" id="{DDFB0E2C-9FD8-79D9-69B0-9DF171AE3039}"/>
-              </a:ext>
-            </a:extLst>
-          </p:cNvPr>
-          <p:cNvSpPr/>
-          <p:nvPr/>
-        </p:nvSpPr>
-        <p:spPr>
-          <a:xfrm>
-            <a:off x="9139345" y="1842912"/>
-            <a:ext cx="2640059" cy="1792313"/>
-          </a:xfrm>
-          <a:prstGeom prst="rect">
-            <a:avLst/>
-          </a:prstGeom>
-          <a:noFill/>
-          <a:ln>
-            <a:noFill/>
-          </a:ln>
-        </p:spPr>
-        <p:style>
-          <a:lnRef idx="0">
-            <a:scrgbClr r="0" g="0" b="0"/>
-          </a:lnRef>
-          <a:fillRef idx="0">
-            <a:scrgbClr r="0" g="0" b="0"/>
-          </a:fillRef>
-          <a:effectRef idx="0">
-            <a:scrgbClr r="0" g="0" b="0"/>
-          </a:effectRef>
-          <a:fontRef idx="minor">
-            <a:schemeClr val="dk1"/>
-          </a:fontRef>
-        </p:style>
-        <p:txBody>
-          <a:bodyPr rtlCol="0" anchor="ctr"/>
-          <a:lstStyle/>
-          <a:p>
-            <a:pPr algn="ctr">
-              <a:lnSpc>
-                <a:spcPct val="150000"/>
-              </a:lnSpc>
-            </a:pPr>
-            <a:r>
-              <a:rPr lang="en-GB" sz="2400" b="1" dirty="0"/>
-              <a:t>MAPE</a:t>
-            </a:r>
-          </a:p>
-          <a:p>
-            <a:pPr>
-              <a:lnSpc>
-                <a:spcPct val="150000"/>
-              </a:lnSpc>
-            </a:pPr>
-            <a:r>
-              <a:rPr lang="en-GB" dirty="0"/>
-              <a:t>Validation Data :</a:t>
-            </a:r>
-          </a:p>
-          <a:p>
-            <a:pPr>
-              <a:lnSpc>
-                <a:spcPct val="150000"/>
-              </a:lnSpc>
-            </a:pPr>
-            <a:r>
-              <a:rPr lang="en-GB" dirty="0"/>
-              <a:t>Train + Validation Data :</a:t>
-            </a:r>
-          </a:p>
-        </p:txBody>
-      </p:sp>
-      <p:sp>
-        <p:nvSpPr>
           <p:cNvPr id="4" name="TextBox 3">
             <a:extLst>
               <a:ext uri="{FF2B5EF4-FFF2-40B4-BE49-F238E27FC236}">
@@ -8427,96 +8262,6 @@
                   <a:lumMod val="75000"/>
                 </a:schemeClr>
               </a:solidFill>
-            </a:endParaRPr>
-          </a:p>
-        </p:txBody>
-      </p:sp>
-      <p:sp>
-        <p:nvSpPr>
-          <p:cNvPr id="11" name="TextBox 10">
-            <a:extLst>
-              <a:ext uri="{FF2B5EF4-FFF2-40B4-BE49-F238E27FC236}">
-                <a16:creationId xmlns:a16="http://schemas.microsoft.com/office/drawing/2014/main" id="{DEFED84A-8214-F476-2F15-1D9828652E0C}"/>
-              </a:ext>
-            </a:extLst>
-          </p:cNvPr>
-          <p:cNvSpPr txBox="1"/>
-          <p:nvPr/>
-        </p:nvSpPr>
-        <p:spPr>
-          <a:xfrm>
-            <a:off x="3245824" y="1922363"/>
-            <a:ext cx="4716147" cy="3056350"/>
-          </a:xfrm>
-          <a:prstGeom prst="rect">
-            <a:avLst/>
-          </a:prstGeom>
-          <a:noFill/>
-        </p:spPr>
-        <p:style>
-          <a:lnRef idx="2">
-            <a:schemeClr val="dk1"/>
-          </a:lnRef>
-          <a:fillRef idx="1">
-            <a:schemeClr val="lt1"/>
-          </a:fillRef>
-          <a:effectRef idx="0">
-            <a:schemeClr val="dk1"/>
-          </a:effectRef>
-          <a:fontRef idx="minor">
-            <a:schemeClr val="dk1"/>
-          </a:fontRef>
-        </p:style>
-        <p:txBody>
-          <a:bodyPr wrap="square" rtlCol="0">
-            <a:spAutoFit/>
-          </a:bodyPr>
-          <a:lstStyle/>
-          <a:p>
-            <a:r>
-              <a:rPr lang="en-US" dirty="0"/>
-              <a:t>Paste code here:</a:t>
-            </a:r>
-          </a:p>
-          <a:p>
-            <a:endParaRPr lang="en-US" dirty="0"/>
-          </a:p>
-          <a:p>
-            <a:endParaRPr lang="en-US" dirty="0"/>
-          </a:p>
-          <a:p>
-            <a:endParaRPr lang="en-US" dirty="0"/>
-          </a:p>
-          <a:p>
-            <a:endParaRPr lang="en-US" dirty="0"/>
-          </a:p>
-          <a:p>
-            <a:endParaRPr lang="en-US" dirty="0"/>
-          </a:p>
-          <a:p>
-            <a:endParaRPr lang="en-US" dirty="0"/>
-          </a:p>
-          <a:p>
-            <a:endParaRPr lang="en-US" dirty="0"/>
-          </a:p>
-          <a:p>
-            <a:endParaRPr lang="en-US" dirty="0"/>
-          </a:p>
-          <a:p>
-            <a:endParaRPr lang="en-US" dirty="0"/>
-          </a:p>
-          <a:p>
-            <a:pPr>
-              <a:lnSpc>
-                <a:spcPts val="1425"/>
-              </a:lnSpc>
-              <a:buNone/>
-            </a:pPr>
-            <a:endParaRPr lang="en-GB" dirty="0">
-              <a:solidFill>
-                <a:srgbClr val="CCCCCC"/>
-              </a:solidFill>
-              <a:latin typeface="Consolas" panose="020B0609020204030204" pitchFamily="49" charset="0"/>
             </a:endParaRPr>
           </a:p>
         </p:txBody>
@@ -8562,6 +8307,129 @@
           </a:fontRef>
         </p:style>
       </p:cxnSp>
+      <p:pic>
+        <p:nvPicPr>
+          <p:cNvPr id="6" name="Picture 5">
+            <a:extLst>
+              <a:ext uri="{FF2B5EF4-FFF2-40B4-BE49-F238E27FC236}">
+                <a16:creationId xmlns:a16="http://schemas.microsoft.com/office/drawing/2014/main" id="{F2DCCB91-F3A7-D5E5-EEB8-6956B3E4E65C}"/>
+              </a:ext>
+            </a:extLst>
+          </p:cNvPr>
+          <p:cNvPicPr>
+            <a:picLocks noChangeAspect="1"/>
+          </p:cNvPicPr>
+          <p:nvPr/>
+        </p:nvPicPr>
+        <p:blipFill>
+          <a:blip r:embed="rId3"/>
+          <a:stretch>
+            <a:fillRect/>
+          </a:stretch>
+        </p:blipFill>
+        <p:spPr>
+          <a:xfrm>
+            <a:off x="3440890" y="1723690"/>
+            <a:ext cx="7744906" cy="2391109"/>
+          </a:xfrm>
+          <a:prstGeom prst="rect">
+            <a:avLst/>
+          </a:prstGeom>
+        </p:spPr>
+      </p:pic>
+      <p:sp>
+        <p:nvSpPr>
+          <p:cNvPr id="9" name="TextBox 8">
+            <a:extLst>
+              <a:ext uri="{FF2B5EF4-FFF2-40B4-BE49-F238E27FC236}">
+                <a16:creationId xmlns:a16="http://schemas.microsoft.com/office/drawing/2014/main" id="{54A500CD-B940-4014-0654-38E3571E8465}"/>
+              </a:ext>
+            </a:extLst>
+          </p:cNvPr>
+          <p:cNvSpPr txBox="1"/>
+          <p:nvPr/>
+        </p:nvSpPr>
+        <p:spPr>
+          <a:xfrm>
+            <a:off x="3988768" y="4382077"/>
+            <a:ext cx="4214462" cy="1889556"/>
+          </a:xfrm>
+          <a:prstGeom prst="rect">
+            <a:avLst/>
+          </a:prstGeom>
+          <a:noFill/>
+        </p:spPr>
+        <p:txBody>
+          <a:bodyPr wrap="square">
+            <a:spAutoFit/>
+          </a:bodyPr>
+          <a:lstStyle/>
+          <a:p>
+            <a:pPr>
+              <a:lnSpc>
+                <a:spcPct val="150000"/>
+              </a:lnSpc>
+            </a:pPr>
+            <a:r>
+              <a:rPr lang="en-GB" sz="2000" dirty="0" err="1">
+                <a:latin typeface="Consolas" panose="020B0609020204030204" pitchFamily="49" charset="0"/>
+              </a:rPr>
+              <a:t>learning_rate</a:t>
+            </a:r>
+            <a:r>
+              <a:rPr lang="en-GB" sz="2000" dirty="0">
+                <a:latin typeface="Consolas" panose="020B0609020204030204" pitchFamily="49" charset="0"/>
+              </a:rPr>
+              <a:t>=0.0001</a:t>
+            </a:r>
+          </a:p>
+          <a:p>
+            <a:pPr>
+              <a:lnSpc>
+                <a:spcPct val="150000"/>
+              </a:lnSpc>
+            </a:pPr>
+            <a:r>
+              <a:rPr lang="en-GB" sz="2000" dirty="0">
+                <a:latin typeface="Consolas" panose="020B0609020204030204" pitchFamily="49" charset="0"/>
+              </a:rPr>
+              <a:t>Epochs = 600</a:t>
+            </a:r>
+          </a:p>
+          <a:p>
+            <a:pPr>
+              <a:lnSpc>
+                <a:spcPct val="150000"/>
+              </a:lnSpc>
+            </a:pPr>
+            <a:r>
+              <a:rPr lang="en-GB" sz="2000" dirty="0" err="1">
+                <a:latin typeface="Consolas" panose="020B0609020204030204" pitchFamily="49" charset="0"/>
+              </a:rPr>
+              <a:t>Batch_Size</a:t>
+            </a:r>
+            <a:r>
+              <a:rPr lang="en-GB" sz="2000" dirty="0">
+                <a:latin typeface="Consolas" panose="020B0609020204030204" pitchFamily="49" charset="0"/>
+              </a:rPr>
+              <a:t> = 32</a:t>
+            </a:r>
+          </a:p>
+          <a:p>
+            <a:pPr>
+              <a:lnSpc>
+                <a:spcPct val="150000"/>
+              </a:lnSpc>
+            </a:pPr>
+            <a:r>
+              <a:rPr lang="en-GB" sz="2000" dirty="0">
+                <a:latin typeface="Consolas" panose="020B0609020204030204" pitchFamily="49" charset="0"/>
+              </a:rPr>
+              <a:t>Early stop</a:t>
+            </a:r>
+          </a:p>
+        </p:txBody>
+      </p:sp>
     </p:spTree>
     <p:extLst>
       <p:ext uri="{BB962C8B-B14F-4D97-AF65-F5344CB8AC3E}">
@@ -8658,54 +8526,6 @@
       </p:sp>
       <p:sp>
         <p:nvSpPr>
-          <p:cNvPr id="4" name="Rectangle 3">
-            <a:extLst>
-              <a:ext uri="{FF2B5EF4-FFF2-40B4-BE49-F238E27FC236}">
-                <a16:creationId xmlns:a16="http://schemas.microsoft.com/office/drawing/2014/main" id="{4262B335-4EB5-7EF3-EAB4-4A7EF923E377}"/>
-              </a:ext>
-            </a:extLst>
-          </p:cNvPr>
-          <p:cNvSpPr/>
-          <p:nvPr/>
-        </p:nvSpPr>
-        <p:spPr>
-          <a:xfrm>
-            <a:off x="3223067" y="1614930"/>
-            <a:ext cx="5914664" cy="4443894"/>
-          </a:xfrm>
-          <a:prstGeom prst="rect">
-            <a:avLst/>
-          </a:prstGeom>
-        </p:spPr>
-        <p:style>
-          <a:lnRef idx="2">
-            <a:schemeClr val="accent1"/>
-          </a:lnRef>
-          <a:fillRef idx="1">
-            <a:schemeClr val="lt1"/>
-          </a:fillRef>
-          <a:effectRef idx="0">
-            <a:schemeClr val="accent1"/>
-          </a:effectRef>
-          <a:fontRef idx="minor">
-            <a:schemeClr val="dk1"/>
-          </a:fontRef>
-        </p:style>
-        <p:txBody>
-          <a:bodyPr rtlCol="0" anchor="ctr"/>
-          <a:lstStyle/>
-          <a:p>
-            <a:pPr algn="ctr"/>
-            <a:r>
-              <a:rPr lang="en-US" dirty="0"/>
-              <a:t>Loss plot</a:t>
-            </a:r>
-            <a:endParaRPr lang="en-GB" dirty="0"/>
-          </a:p>
-        </p:txBody>
-      </p:sp>
-      <p:sp>
-        <p:nvSpPr>
           <p:cNvPr id="6" name="TextBox 5">
             <a:extLst>
               <a:ext uri="{FF2B5EF4-FFF2-40B4-BE49-F238E27FC236}">
@@ -8786,6 +8606,207 @@
           </a:p>
         </p:txBody>
       </p:sp>
+      <p:grpSp>
+        <p:nvGrpSpPr>
+          <p:cNvPr id="7" name="Group 6">
+            <a:extLst>
+              <a:ext uri="{FF2B5EF4-FFF2-40B4-BE49-F238E27FC236}">
+                <a16:creationId xmlns:a16="http://schemas.microsoft.com/office/drawing/2014/main" id="{DBFC92FE-CA2C-ED19-2DC4-4C360470C863}"/>
+              </a:ext>
+            </a:extLst>
+          </p:cNvPr>
+          <p:cNvGrpSpPr/>
+          <p:nvPr/>
+        </p:nvGrpSpPr>
+        <p:grpSpPr>
+          <a:xfrm>
+            <a:off x="355109" y="2142715"/>
+            <a:ext cx="2640059" cy="2905369"/>
+            <a:chOff x="9139345" y="1842912"/>
+            <a:chExt cx="2640059" cy="2905369"/>
+          </a:xfrm>
+        </p:grpSpPr>
+        <p:sp>
+          <p:nvSpPr>
+            <p:cNvPr id="25" name="TextBox 24">
+              <a:extLst>
+                <a:ext uri="{FF2B5EF4-FFF2-40B4-BE49-F238E27FC236}">
+                  <a16:creationId xmlns:a16="http://schemas.microsoft.com/office/drawing/2014/main" id="{852FAF9E-1FFA-DA77-35CD-2C61E5B0CA7D}"/>
+                </a:ext>
+              </a:extLst>
+            </p:cNvPr>
+            <p:cNvSpPr txBox="1"/>
+            <p:nvPr/>
+          </p:nvSpPr>
+          <p:spPr>
+            <a:xfrm>
+              <a:off x="9739510" y="4378949"/>
+              <a:ext cx="1439730" cy="369332"/>
+            </a:xfrm>
+            <a:prstGeom prst="rect">
+              <a:avLst/>
+            </a:prstGeom>
+            <a:noFill/>
+          </p:spPr>
+          <p:txBody>
+            <a:bodyPr wrap="square" rtlCol="0">
+              <a:spAutoFit/>
+            </a:bodyPr>
+            <a:lstStyle/>
+            <a:p>
+              <a:pPr algn="ctr"/>
+              <a:r>
+                <a:rPr lang="en-GB" dirty="0"/>
+                <a:t>0.18081</a:t>
+              </a:r>
+              <a:endParaRPr lang="en-GB" b="1" dirty="0"/>
+            </a:p>
+          </p:txBody>
+        </p:sp>
+        <p:pic>
+          <p:nvPicPr>
+            <p:cNvPr id="2050" name="Picture 2">
+              <a:extLst>
+                <a:ext uri="{FF2B5EF4-FFF2-40B4-BE49-F238E27FC236}">
+                  <a16:creationId xmlns:a16="http://schemas.microsoft.com/office/drawing/2014/main" id="{05625916-4F74-97B2-CA33-FED8ADFE5C39}"/>
+                </a:ext>
+              </a:extLst>
+            </p:cNvPr>
+            <p:cNvPicPr>
+              <a:picLocks noChangeAspect="1" noChangeArrowheads="1"/>
+            </p:cNvPicPr>
+            <p:nvPr/>
+          </p:nvPicPr>
+          <p:blipFill>
+            <a:blip r:embed="rId2">
+              <a:extLst>
+                <a:ext uri="{28A0092B-C50C-407E-A947-70E740481C1C}">
+                  <a14:useLocalDpi xmlns:a14="http://schemas.microsoft.com/office/drawing/2010/main" val="0"/>
+                </a:ext>
+              </a:extLst>
+            </a:blip>
+            <a:srcRect/>
+            <a:stretch>
+              <a:fillRect/>
+            </a:stretch>
+          </p:blipFill>
+          <p:spPr bwMode="auto">
+            <a:xfrm>
+              <a:off x="9949429" y="3985911"/>
+              <a:ext cx="1019892" cy="395607"/>
+            </a:xfrm>
+            <a:prstGeom prst="rect">
+              <a:avLst/>
+            </a:prstGeom>
+            <a:noFill/>
+            <a:extLst>
+              <a:ext uri="{909E8E84-426E-40DD-AFC4-6F175D3DCCD1}">
+                <a14:hiddenFill xmlns:a14="http://schemas.microsoft.com/office/drawing/2010/main">
+                  <a:solidFill>
+                    <a:srgbClr val="FFFFFF"/>
+                  </a:solidFill>
+                </a14:hiddenFill>
+              </a:ext>
+            </a:extLst>
+          </p:spPr>
+        </p:pic>
+        <p:sp>
+          <p:nvSpPr>
+            <p:cNvPr id="41" name="Rectangle 40">
+              <a:extLst>
+                <a:ext uri="{FF2B5EF4-FFF2-40B4-BE49-F238E27FC236}">
+                  <a16:creationId xmlns:a16="http://schemas.microsoft.com/office/drawing/2014/main" id="{DDFB0E2C-9FD8-79D9-69B0-9DF171AE3039}"/>
+                </a:ext>
+              </a:extLst>
+            </p:cNvPr>
+            <p:cNvSpPr/>
+            <p:nvPr/>
+          </p:nvSpPr>
+          <p:spPr>
+            <a:xfrm>
+              <a:off x="9139345" y="1842912"/>
+              <a:ext cx="2640059" cy="1792313"/>
+            </a:xfrm>
+            <a:prstGeom prst="rect">
+              <a:avLst/>
+            </a:prstGeom>
+            <a:noFill/>
+            <a:ln>
+              <a:noFill/>
+            </a:ln>
+          </p:spPr>
+          <p:style>
+            <a:lnRef idx="0">
+              <a:scrgbClr r="0" g="0" b="0"/>
+            </a:lnRef>
+            <a:fillRef idx="0">
+              <a:scrgbClr r="0" g="0" b="0"/>
+            </a:fillRef>
+            <a:effectRef idx="0">
+              <a:scrgbClr r="0" g="0" b="0"/>
+            </a:effectRef>
+            <a:fontRef idx="minor">
+              <a:schemeClr val="dk1"/>
+            </a:fontRef>
+          </p:style>
+          <p:txBody>
+            <a:bodyPr rtlCol="0" anchor="ctr"/>
+            <a:lstStyle/>
+            <a:p>
+              <a:pPr algn="ctr">
+                <a:lnSpc>
+                  <a:spcPct val="150000"/>
+                </a:lnSpc>
+              </a:pPr>
+              <a:r>
+                <a:rPr lang="en-GB" sz="2400" b="1" dirty="0"/>
+                <a:t>MAPE</a:t>
+              </a:r>
+            </a:p>
+            <a:p>
+              <a:pPr algn="ctr">
+                <a:lnSpc>
+                  <a:spcPct val="150000"/>
+                </a:lnSpc>
+              </a:pPr>
+              <a:r>
+                <a:rPr lang="en-GB" dirty="0"/>
+                <a:t>Validation Data : 19%</a:t>
+              </a:r>
+            </a:p>
+          </p:txBody>
+        </p:sp>
+      </p:grpSp>
+      <p:pic>
+        <p:nvPicPr>
+          <p:cNvPr id="8" name="Picture 7">
+            <a:extLst>
+              <a:ext uri="{FF2B5EF4-FFF2-40B4-BE49-F238E27FC236}">
+                <a16:creationId xmlns:a16="http://schemas.microsoft.com/office/drawing/2014/main" id="{70F9E39B-E5F2-B8FE-493E-7BEE99B16063}"/>
+              </a:ext>
+            </a:extLst>
+          </p:cNvPr>
+          <p:cNvPicPr>
+            <a:picLocks noChangeAspect="1"/>
+          </p:cNvPicPr>
+          <p:nvPr/>
+        </p:nvPicPr>
+        <p:blipFill>
+          <a:blip r:embed="rId3"/>
+          <a:stretch>
+            <a:fillRect/>
+          </a:stretch>
+        </p:blipFill>
+        <p:spPr>
+          <a:xfrm>
+            <a:off x="3992880" y="1890938"/>
+            <a:ext cx="7645717" cy="4088179"/>
+          </a:xfrm>
+          <a:prstGeom prst="rect">
+            <a:avLst/>
+          </a:prstGeom>
+        </p:spPr>
+      </p:pic>
     </p:spTree>
     <p:extLst>
       <p:ext uri="{BB962C8B-B14F-4D97-AF65-F5344CB8AC3E}">
@@ -8927,7 +8948,11 @@
           <a:p>
             <a:r>
               <a:rPr lang="en-US" dirty="0"/>
-              <a:t>Neural Network</a:t>
+              <a:t>Neural Network </a:t>
+            </a:r>
+            <a:r>
+              <a:rPr lang="en-US" sz="2400" dirty="0"/>
+              <a:t>– Validation Dataset</a:t>
             </a:r>
             <a:endParaRPr lang="en-GB" dirty="0"/>
           </a:p>
@@ -8962,60 +8987,6 @@
           </a:p>
         </p:txBody>
       </p:sp>
-      <p:sp>
-        <p:nvSpPr>
-          <p:cNvPr id="4" name="Rectangle 3">
-            <a:extLst>
-              <a:ext uri="{FF2B5EF4-FFF2-40B4-BE49-F238E27FC236}">
-                <a16:creationId xmlns:a16="http://schemas.microsoft.com/office/drawing/2014/main" id="{424E986F-5C86-F6CB-4D08-9708A6683000}"/>
-              </a:ext>
-            </a:extLst>
-          </p:cNvPr>
-          <p:cNvSpPr/>
-          <p:nvPr/>
-        </p:nvSpPr>
-        <p:spPr>
-          <a:xfrm>
-            <a:off x="5410565" y="1775931"/>
-            <a:ext cx="5914664" cy="4443894"/>
-          </a:xfrm>
-          <a:prstGeom prst="rect">
-            <a:avLst/>
-          </a:prstGeom>
-        </p:spPr>
-        <p:style>
-          <a:lnRef idx="2">
-            <a:schemeClr val="accent1"/>
-          </a:lnRef>
-          <a:fillRef idx="1">
-            <a:schemeClr val="lt1"/>
-          </a:fillRef>
-          <a:effectRef idx="0">
-            <a:schemeClr val="accent1"/>
-          </a:effectRef>
-          <a:fontRef idx="minor">
-            <a:schemeClr val="dk1"/>
-          </a:fontRef>
-        </p:style>
-        <p:txBody>
-          <a:bodyPr rtlCol="0" anchor="ctr"/>
-          <a:lstStyle/>
-          <a:p>
-            <a:pPr algn="ctr"/>
-            <a:r>
-              <a:rPr lang="en-US" dirty="0"/>
-              <a:t>MAPEs per prod group + </a:t>
-            </a:r>
-          </a:p>
-          <a:p>
-            <a:pPr algn="ctr"/>
-            <a:r>
-              <a:rPr lang="en-US" dirty="0"/>
-              <a:t>real vs predicted data for validation dataset</a:t>
-            </a:r>
-          </a:p>
-        </p:txBody>
-      </p:sp>
       <p:graphicFrame>
         <p:nvGraphicFramePr>
           <p:cNvPr id="5" name="Table 4">
@@ -9031,14 +9002,14 @@
           <p:nvPr>
             <p:extLst>
               <p:ext uri="{D42A27DB-BD31-4B8C-83A1-F6EECF244321}">
-                <p14:modId xmlns:p14="http://schemas.microsoft.com/office/powerpoint/2010/main" val="271893373"/>
+                <p14:modId xmlns:p14="http://schemas.microsoft.com/office/powerpoint/2010/main" val="2593535252"/>
               </p:ext>
             </p:extLst>
           </p:nvPr>
         </p:nvGraphicFramePr>
         <p:xfrm>
-          <a:off x="838200" y="2642838"/>
-          <a:ext cx="3264465" cy="2312591"/>
+          <a:off x="514009" y="2582874"/>
+          <a:ext cx="3264465" cy="2678351"/>
         </p:xfrm>
         <a:graphic>
           <a:graphicData uri="http://schemas.openxmlformats.org/drawingml/2006/table">
@@ -9120,6 +9091,19 @@
                     <a:bodyPr/>
                     <a:lstStyle/>
                     <a:p>
+                      <a:pPr algn="ctr"/>
+                      <a:r>
+                        <a:rPr lang="en-GB" sz="1800" b="0" i="0" kern="1200" dirty="0">
+                          <a:solidFill>
+                            <a:schemeClr val="tx1"/>
+                          </a:solidFill>
+                          <a:effectLst/>
+                          <a:latin typeface="+mn-lt"/>
+                          <a:ea typeface="+mn-ea"/>
+                          <a:cs typeface="+mn-cs"/>
+                        </a:rPr>
+                        <a:t>20.29</a:t>
+                      </a:r>
                       <a:endParaRPr lang="en-GB" dirty="0"/>
                     </a:p>
                   </a:txBody>
@@ -9151,7 +9135,12 @@
                     <a:bodyPr/>
                     <a:lstStyle/>
                     <a:p>
-                      <a:endParaRPr lang="en-GB"/>
+                      <a:pPr algn="ctr"/>
+                      <a:r>
+                        <a:rPr lang="en-US" dirty="0"/>
+                        <a:t>15.52</a:t>
+                      </a:r>
+                      <a:endParaRPr lang="en-GB" dirty="0"/>
                     </a:p>
                   </a:txBody>
                   <a:tcPr/>
@@ -9183,7 +9172,20 @@
                     <a:bodyPr/>
                     <a:lstStyle/>
                     <a:p>
-                      <a:endParaRPr lang="en-GB"/>
+                      <a:pPr algn="ctr"/>
+                      <a:r>
+                        <a:rPr lang="en-GB" sz="1800" b="0" i="0" kern="1200" dirty="0">
+                          <a:solidFill>
+                            <a:schemeClr val="tx1"/>
+                          </a:solidFill>
+                          <a:effectLst/>
+                          <a:latin typeface="+mn-lt"/>
+                          <a:ea typeface="+mn-ea"/>
+                          <a:cs typeface="+mn-cs"/>
+                        </a:rPr>
+                        <a:t>19.75</a:t>
+                      </a:r>
+                      <a:endParaRPr lang="en-GB" dirty="0"/>
                     </a:p>
                   </a:txBody>
                   <a:tcPr/>
@@ -9215,6 +9217,11 @@
                     <a:bodyPr/>
                     <a:lstStyle/>
                     <a:p>
+                      <a:pPr algn="ctr"/>
+                      <a:r>
+                        <a:rPr lang="en-US" dirty="0"/>
+                        <a:t>22.85</a:t>
+                      </a:r>
                       <a:endParaRPr lang="en-GB" dirty="0"/>
                     </a:p>
                   </a:txBody>
@@ -9226,7 +9233,7 @@
                   </a:ext>
                 </a:extLst>
               </a:tr>
-              <a:tr h="283197">
+              <a:tr h="0">
                 <a:tc>
                   <a:txBody>
                     <a:bodyPr/>
@@ -9247,6 +9254,11 @@
                     <a:bodyPr/>
                     <a:lstStyle/>
                     <a:p>
+                      <a:pPr algn="ctr"/>
+                      <a:r>
+                        <a:rPr lang="en-US" dirty="0"/>
+                        <a:t>17.95</a:t>
+                      </a:r>
                       <a:endParaRPr lang="en-GB" dirty="0"/>
                     </a:p>
                   </a:txBody>
@@ -9258,10 +9270,87 @@
                   </a:ext>
                 </a:extLst>
               </a:tr>
+              <a:tr h="0">
+                <a:tc>
+                  <a:txBody>
+                    <a:bodyPr/>
+                    <a:lstStyle/>
+                    <a:p>
+                      <a:pPr algn="ctr"/>
+                      <a:r>
+                        <a:rPr lang="en-US" dirty="0"/>
+                        <a:t>6</a:t>
+                      </a:r>
+                      <a:endParaRPr lang="en-GB" dirty="0"/>
+                    </a:p>
+                  </a:txBody>
+                  <a:tcPr/>
+                </a:tc>
+                <a:tc>
+                  <a:txBody>
+                    <a:bodyPr/>
+                    <a:lstStyle/>
+                    <a:p>
+                      <a:pPr algn="ctr"/>
+                      <a:r>
+                        <a:rPr lang="en-US" dirty="0"/>
+                        <a:t>50.12</a:t>
+                      </a:r>
+                      <a:endParaRPr lang="en-GB" dirty="0"/>
+                    </a:p>
+                  </a:txBody>
+                  <a:tcPr/>
+                </a:tc>
+                <a:extLst>
+                  <a:ext uri="{0D108BD9-81ED-4DB2-BD59-A6C34878D82A}">
+                    <a16:rowId xmlns:a16="http://schemas.microsoft.com/office/drawing/2014/main" val="1162067448"/>
+                  </a:ext>
+                </a:extLst>
+              </a:tr>
             </a:tbl>
           </a:graphicData>
         </a:graphic>
       </p:graphicFrame>
+      <p:pic>
+        <p:nvPicPr>
+          <p:cNvPr id="8" name="Picture 7">
+            <a:extLst>
+              <a:ext uri="{FF2B5EF4-FFF2-40B4-BE49-F238E27FC236}">
+                <a16:creationId xmlns:a16="http://schemas.microsoft.com/office/drawing/2014/main" id="{443FC44C-1194-8DEA-1578-33A199AC4D71}"/>
+              </a:ext>
+            </a:extLst>
+          </p:cNvPr>
+          <p:cNvPicPr>
+            <a:picLocks noChangeAspect="1"/>
+          </p:cNvPicPr>
+          <p:nvPr/>
+        </p:nvPicPr>
+        <p:blipFill>
+          <a:blip r:embed="rId2"/>
+          <a:stretch>
+            <a:fillRect/>
+          </a:stretch>
+        </p:blipFill>
+        <p:spPr>
+          <a:xfrm>
+            <a:off x="4212590" y="2142675"/>
+            <a:ext cx="7753493" cy="3421933"/>
+          </a:xfrm>
+          <a:prstGeom prst="rect">
+            <a:avLst/>
+          </a:prstGeom>
+          <a:ln>
+            <a:noFill/>
+          </a:ln>
+          <a:effectLst>
+            <a:outerShdw blurRad="292100" dist="139700" dir="2700000" algn="tl" rotWithShape="0">
+              <a:srgbClr val="333333">
+                <a:alpha val="65000"/>
+              </a:srgbClr>
+            </a:outerShdw>
+          </a:effectLst>
+        </p:spPr>
+      </p:pic>
     </p:spTree>
     <p:extLst>
       <p:ext uri="{BB962C8B-B14F-4D97-AF65-F5344CB8AC3E}">
@@ -9635,6 +9724,51 @@
           </p:spPr>
         </p:pic>
       </p:grpSp>
+      <p:pic>
+        <p:nvPicPr>
+          <p:cNvPr id="7" name="Picture 6">
+            <a:extLst>
+              <a:ext uri="{FF2B5EF4-FFF2-40B4-BE49-F238E27FC236}">
+                <a16:creationId xmlns:a16="http://schemas.microsoft.com/office/drawing/2014/main" id="{C9E71C30-8BFE-4796-341A-734ED6752496}"/>
+              </a:ext>
+            </a:extLst>
+          </p:cNvPr>
+          <p:cNvPicPr>
+            <a:picLocks noChangeAspect="1"/>
+          </p:cNvPicPr>
+          <p:nvPr/>
+        </p:nvPicPr>
+        <p:blipFill>
+          <a:blip r:embed="rId5">
+            <a:extLst>
+              <a:ext uri="{28A0092B-C50C-407E-A947-70E740481C1C}">
+                <a14:useLocalDpi xmlns:a14="http://schemas.microsoft.com/office/drawing/2010/main" val="0"/>
+              </a:ext>
+            </a:extLst>
+          </a:blip>
+          <a:srcRect/>
+          <a:stretch/>
+        </p:blipFill>
+        <p:spPr>
+          <a:xfrm>
+            <a:off x="7204362" y="750326"/>
+            <a:ext cx="4232977" cy="2905530"/>
+          </a:xfrm>
+          <a:prstGeom prst="rect">
+            <a:avLst/>
+          </a:prstGeom>
+          <a:ln>
+            <a:noFill/>
+          </a:ln>
+          <a:effectLst>
+            <a:outerShdw blurRad="292100" dist="139700" dir="2700000" algn="tl" rotWithShape="0">
+              <a:srgbClr val="333333">
+                <a:alpha val="65000"/>
+              </a:srgbClr>
+            </a:outerShdw>
+          </a:effectLst>
+        </p:spPr>
+      </p:pic>
     </p:spTree>
     <p:extLst>
       <p:ext uri="{BB962C8B-B14F-4D97-AF65-F5344CB8AC3E}">
@@ -9725,6 +9859,96 @@
                                         </p:cTn>
                                         <p:tgtEl>
                                           <p:spTgt spid="10"/>
+                                        </p:tgtEl>
+                                        <p:attrNameLst>
+                                          <p:attrName>style.visibility</p:attrName>
+                                        </p:attrNameLst>
+                                      </p:cBhvr>
+                                      <p:to>
+                                        <p:strVal val="hidden"/>
+                                      </p:to>
+                                    </p:set>
+                                  </p:childTnLst>
+                                </p:cTn>
+                              </p:par>
+                            </p:childTnLst>
+                          </p:cTn>
+                        </p:par>
+                      </p:childTnLst>
+                    </p:cTn>
+                  </p:par>
+                  <p:par>
+                    <p:cTn id="11" fill="hold">
+                      <p:stCondLst>
+                        <p:cond delay="indefinite"/>
+                      </p:stCondLst>
+                      <p:childTnLst>
+                        <p:par>
+                          <p:cTn id="12" fill="hold">
+                            <p:stCondLst>
+                              <p:cond delay="0"/>
+                            </p:stCondLst>
+                            <p:childTnLst>
+                              <p:par>
+                                <p:cTn id="13" presetID="1" presetClass="entr" presetSubtype="0" fill="hold" nodeType="clickEffect">
+                                  <p:stCondLst>
+                                    <p:cond delay="0"/>
+                                  </p:stCondLst>
+                                  <p:childTnLst>
+                                    <p:set>
+                                      <p:cBhvr>
+                                        <p:cTn id="14" dur="1" fill="hold">
+                                          <p:stCondLst>
+                                            <p:cond delay="0"/>
+                                          </p:stCondLst>
+                                        </p:cTn>
+                                        <p:tgtEl>
+                                          <p:spTgt spid="7"/>
+                                        </p:tgtEl>
+                                        <p:attrNameLst>
+                                          <p:attrName>style.visibility</p:attrName>
+                                        </p:attrNameLst>
+                                      </p:cBhvr>
+                                      <p:to>
+                                        <p:strVal val="visible"/>
+                                      </p:to>
+                                    </p:set>
+                                  </p:childTnLst>
+                                </p:cTn>
+                              </p:par>
+                            </p:childTnLst>
+                          </p:cTn>
+                        </p:par>
+                      </p:childTnLst>
+                    </p:cTn>
+                  </p:par>
+                  <p:par>
+                    <p:cTn id="15" fill="hold">
+                      <p:stCondLst>
+                        <p:cond delay="indefinite"/>
+                      </p:stCondLst>
+                      <p:childTnLst>
+                        <p:par>
+                          <p:cTn id="16" fill="hold">
+                            <p:stCondLst>
+                              <p:cond delay="0"/>
+                            </p:stCondLst>
+                            <p:childTnLst>
+                              <p:par>
+                                <p:cTn id="17" presetID="1" presetClass="exit" presetSubtype="0" fill="hold" nodeType="clickEffect">
+                                  <p:stCondLst>
+                                    <p:cond delay="0"/>
+                                  </p:stCondLst>
+                                  <p:childTnLst>
+                                    <p:set>
+                                      <p:cBhvr>
+                                        <p:cTn id="18" dur="1" fill="hold">
+                                          <p:stCondLst>
+                                            <p:cond delay="0"/>
+                                          </p:stCondLst>
+                                        </p:cTn>
+                                        <p:tgtEl>
+                                          <p:spTgt spid="7"/>
                                         </p:tgtEl>
                                         <p:attrNameLst>
                                           <p:attrName>style.visibility</p:attrName>
@@ -20304,6 +20528,127 @@
     <p:extLst>
       <p:ext uri="{BB962C8B-B14F-4D97-AF65-F5344CB8AC3E}">
         <p14:creationId xmlns:p14="http://schemas.microsoft.com/office/powerpoint/2010/main" val="4272230859"/>
+      </p:ext>
+    </p:extLst>
+  </p:cSld>
+  <p:clrMapOvr>
+    <a:masterClrMapping/>
+  </p:clrMapOvr>
+</p:sld>
+</file>
+
+<file path=ppt/slides/slide25.xml><?xml version="1.0" encoding="utf-8"?>
+<p:sld xmlns:a="http://schemas.openxmlformats.org/drawingml/2006/main" xmlns:r="http://schemas.openxmlformats.org/officeDocument/2006/relationships" xmlns:p="http://schemas.openxmlformats.org/presentationml/2006/main">
+  <p:cSld>
+    <p:spTree>
+      <p:nvGrpSpPr>
+        <p:cNvPr id="1" name=""/>
+        <p:cNvGrpSpPr/>
+        <p:nvPr/>
+      </p:nvGrpSpPr>
+      <p:grpSpPr>
+        <a:xfrm>
+          <a:off x="0" y="0"/>
+          <a:ext cx="0" cy="0"/>
+          <a:chOff x="0" y="0"/>
+          <a:chExt cx="0" cy="0"/>
+        </a:xfrm>
+      </p:grpSpPr>
+      <p:sp>
+        <p:nvSpPr>
+          <p:cNvPr id="2" name="Title 1">
+            <a:extLst>
+              <a:ext uri="{FF2B5EF4-FFF2-40B4-BE49-F238E27FC236}">
+                <a16:creationId xmlns:a16="http://schemas.microsoft.com/office/drawing/2014/main" id="{C538011C-A36C-7314-9F77-69BA64CC4D77}"/>
+              </a:ext>
+            </a:extLst>
+          </p:cNvPr>
+          <p:cNvSpPr>
+            <a:spLocks noGrp="1"/>
+          </p:cNvSpPr>
+          <p:nvPr>
+            <p:ph type="title"/>
+          </p:nvPr>
+        </p:nvSpPr>
+        <p:spPr/>
+        <p:txBody>
+          <a:bodyPr/>
+          <a:lstStyle/>
+          <a:p>
+            <a:endParaRPr lang="en-GB"/>
+          </a:p>
+        </p:txBody>
+      </p:sp>
+      <p:sp>
+        <p:nvSpPr>
+          <p:cNvPr id="3" name="Slide Number Placeholder 2">
+            <a:extLst>
+              <a:ext uri="{FF2B5EF4-FFF2-40B4-BE49-F238E27FC236}">
+                <a16:creationId xmlns:a16="http://schemas.microsoft.com/office/drawing/2014/main" id="{1FC8B083-DB47-93CD-5BB2-80D02FF34162}"/>
+              </a:ext>
+            </a:extLst>
+          </p:cNvPr>
+          <p:cNvSpPr>
+            <a:spLocks noGrp="1"/>
+          </p:cNvSpPr>
+          <p:nvPr>
+            <p:ph type="sldNum" sz="quarter" idx="12"/>
+          </p:nvPr>
+        </p:nvSpPr>
+        <p:spPr/>
+        <p:txBody>
+          <a:bodyPr/>
+          <a:lstStyle/>
+          <a:p>
+            <a:fld id="{FEE63D0E-FFEF-43D1-BE35-64C33AF422FD}" type="slidenum">
+              <a:rPr lang="de-DE" smtClean="0"/>
+              <a:t>25</a:t>
+            </a:fld>
+            <a:endParaRPr lang="de-DE"/>
+          </a:p>
+        </p:txBody>
+      </p:sp>
+      <p:pic>
+        <p:nvPicPr>
+          <p:cNvPr id="5" name="Picture 4" descr="A screenshot of a computer&#10;&#10;AI-generated content may be incorrect.">
+            <a:extLst>
+              <a:ext uri="{FF2B5EF4-FFF2-40B4-BE49-F238E27FC236}">
+                <a16:creationId xmlns:a16="http://schemas.microsoft.com/office/drawing/2014/main" id="{8F96D49E-1D91-057D-C5E7-873A38F9CD0B}"/>
+              </a:ext>
+            </a:extLst>
+          </p:cNvPr>
+          <p:cNvPicPr>
+            <a:picLocks noChangeAspect="1"/>
+          </p:cNvPicPr>
+          <p:nvPr/>
+        </p:nvPicPr>
+        <p:blipFill>
+          <a:blip r:embed="rId2">
+            <a:extLst>
+              <a:ext uri="{28A0092B-C50C-407E-A947-70E740481C1C}">
+                <a14:useLocalDpi xmlns:a14="http://schemas.microsoft.com/office/drawing/2010/main" val="0"/>
+              </a:ext>
+            </a:extLst>
+          </a:blip>
+          <a:srcRect l="2967" t="8222" r="4424" b="8765"/>
+          <a:stretch>
+            <a:fillRect/>
+          </a:stretch>
+        </p:blipFill>
+        <p:spPr>
+          <a:xfrm>
+            <a:off x="2222862" y="2163172"/>
+            <a:ext cx="7746275" cy="3905795"/>
+          </a:xfrm>
+          <a:prstGeom prst="rect">
+            <a:avLst/>
+          </a:prstGeom>
+        </p:spPr>
+      </p:pic>
+    </p:spTree>
+    <p:extLst>
+      <p:ext uri="{BB962C8B-B14F-4D97-AF65-F5344CB8AC3E}">
+        <p14:creationId xmlns:p14="http://schemas.microsoft.com/office/powerpoint/2010/main" val="3472974658"/>
       </p:ext>
     </p:extLst>
   </p:cSld>
@@ -23509,7 +23854,7 @@
 </file>
 
 <file path=ppt/slides/slide5.xml><?xml version="1.0" encoding="utf-8"?>
-<p:sld xmlns:a="http://schemas.openxmlformats.org/drawingml/2006/main" xmlns:r="http://schemas.openxmlformats.org/officeDocument/2006/relationships" xmlns:p="http://schemas.openxmlformats.org/presentationml/2006/main">
+<p:sld xmlns:a="http://schemas.openxmlformats.org/drawingml/2006/main" xmlns:r="http://schemas.openxmlformats.org/officeDocument/2006/relationships" xmlns:p="http://schemas.openxmlformats.org/presentationml/2006/main" show="0">
   <p:cSld>
     <p:spTree>
       <p:nvGrpSpPr>

--- a/4_Presentation/Group 3.pptx
+++ b/4_Presentation/Group 3.pptx
@@ -8771,7 +8771,7 @@
               </a:pPr>
               <a:r>
                 <a:rPr lang="en-GB" dirty="0"/>
-                <a:t>Validation Data : 19%</a:t>
+                <a:t>Validation Data : 20.28%</a:t>
               </a:r>
             </a:p>
           </p:txBody>

--- a/4_Presentation/Group 3.pptx
+++ b/4_Presentation/Group 3.pptx
@@ -16951,6 +16951,43 @@
           </a:p>
         </p:txBody>
       </p:sp>
+      <p:pic>
+        <p:nvPicPr>
+          <p:cNvPr id="3" name="Picture 2" descr="A screenshot of a computer&#10;&#10;AI-generated content may be incorrect.">
+            <a:extLst>
+              <a:ext uri="{FF2B5EF4-FFF2-40B4-BE49-F238E27FC236}">
+                <a16:creationId xmlns:a16="http://schemas.microsoft.com/office/drawing/2014/main" id="{39DDC5B1-13D0-3AC0-D3C9-8EE3879DBC0C}"/>
+              </a:ext>
+            </a:extLst>
+          </p:cNvPr>
+          <p:cNvPicPr>
+            <a:picLocks noChangeAspect="1"/>
+          </p:cNvPicPr>
+          <p:nvPr/>
+        </p:nvPicPr>
+        <p:blipFill>
+          <a:blip r:embed="rId4">
+            <a:extLst>
+              <a:ext uri="{28A0092B-C50C-407E-A947-70E740481C1C}">
+                <a14:useLocalDpi xmlns:a14="http://schemas.microsoft.com/office/drawing/2010/main" val="0"/>
+              </a:ext>
+            </a:extLst>
+          </a:blip>
+          <a:srcRect l="2967" t="8222" r="4424" b="8765"/>
+          <a:stretch>
+            <a:fillRect/>
+          </a:stretch>
+        </p:blipFill>
+        <p:spPr>
+          <a:xfrm>
+            <a:off x="667167" y="691696"/>
+            <a:ext cx="10857664" cy="5474607"/>
+          </a:xfrm>
+          <a:prstGeom prst="rect">
+            <a:avLst/>
+          </a:prstGeom>
+        </p:spPr>
+      </p:pic>
     </p:spTree>
     <p:extLst>
       <p:ext uri="{BB962C8B-B14F-4D97-AF65-F5344CB8AC3E}">
@@ -17057,6 +17094,51 @@
                       </p:childTnLst>
                     </p:cTn>
                   </p:par>
+                  <p:par>
+                    <p:cTn id="11" fill="hold">
+                      <p:stCondLst>
+                        <p:cond delay="indefinite"/>
+                      </p:stCondLst>
+                      <p:childTnLst>
+                        <p:par>
+                          <p:cTn id="12" fill="hold">
+                            <p:stCondLst>
+                              <p:cond delay="0"/>
+                            </p:stCondLst>
+                            <p:childTnLst>
+                              <p:par>
+                                <p:cTn id="13" presetID="1" presetClass="entr" presetSubtype="0" fill="hold" nodeType="clickEffect">
+                                  <p:stCondLst>
+                                    <p:cond delay="0"/>
+                                  </p:stCondLst>
+                                  <p:childTnLst>
+                                    <p:set>
+                                      <p:cBhvr>
+                                        <p:cTn id="14" dur="1" fill="hold">
+                                          <p:stCondLst>
+                                            <p:cond delay="0"/>
+                                          </p:stCondLst>
+                                        </p:cTn>
+                                        <p:tgtEl>
+                                          <p:spTgt spid="3"/>
+                                        </p:tgtEl>
+                                        <p:attrNameLst>
+                                          <p:attrName>style.visibility</p:attrName>
+                                        </p:attrNameLst>
+                                      </p:cBhvr>
+                                      <p:to>
+                                        <p:strVal val="visible"/>
+                                      </p:to>
+                                    </p:set>
+                                  </p:childTnLst>
+                                </p:cTn>
+                              </p:par>
+                            </p:childTnLst>
+                          </p:cTn>
+                        </p:par>
+                      </p:childTnLst>
+                    </p:cTn>
+                  </p:par>
                 </p:childTnLst>
               </p:cTn>
               <p:prevCondLst>
@@ -17235,7 +17317,7 @@
             </a:pPr>
             <a:r>
               <a:rPr lang="en-GB" dirty="0"/>
-              <a:t>Weekday</a:t>
+              <a:t>Day of the Week</a:t>
             </a:r>
           </a:p>
           <a:p>
@@ -33024,13 +33106,13 @@
   <p:clrMapOvr>
     <a:masterClrMapping/>
   </p:clrMapOvr>
-  <mc:AlternateContent xmlns:mc="http://schemas.openxmlformats.org/markup-compatibility/2006">
-    <mc:Choice xmlns:p159="http://schemas.microsoft.com/office/powerpoint/2015/09/main" Requires="p159">
+  <mc:AlternateContent xmlns:mc="http://schemas.openxmlformats.org/markup-compatibility/2006" xmlns:p159="http://schemas.microsoft.com/office/powerpoint/2015/09/main">
+    <mc:Choice Requires="p159">
       <p:transition xmlns:p14="http://schemas.microsoft.com/office/powerpoint/2010/main" spd="slow" p14:dur="2000">
         <p159:morph option="byObject"/>
       </p:transition>
     </mc:Choice>
-    <mc:Fallback>
+    <mc:Fallback xmlns="">
       <p:transition spd="slow">
         <p:fade/>
       </p:transition>
@@ -33278,13 +33360,13 @@
   <p:clrMapOvr>
     <a:masterClrMapping/>
   </p:clrMapOvr>
-  <mc:AlternateContent xmlns:mc="http://schemas.openxmlformats.org/markup-compatibility/2006">
-    <mc:Choice xmlns:p159="http://schemas.microsoft.com/office/powerpoint/2015/09/main" Requires="p159">
+  <mc:AlternateContent xmlns:mc="http://schemas.openxmlformats.org/markup-compatibility/2006" xmlns:p159="http://schemas.microsoft.com/office/powerpoint/2015/09/main">
+    <mc:Choice Requires="p159">
       <p:transition xmlns:p14="http://schemas.microsoft.com/office/powerpoint/2010/main" spd="slow" p14:dur="2000">
         <p159:morph option="byObject"/>
       </p:transition>
     </mc:Choice>
-    <mc:Fallback>
+    <mc:Fallback xmlns="">
       <p:transition spd="slow">
         <p:fade/>
       </p:transition>
@@ -33527,13 +33609,13 @@
   <p:clrMapOvr>
     <a:masterClrMapping/>
   </p:clrMapOvr>
-  <mc:AlternateContent xmlns:mc="http://schemas.openxmlformats.org/markup-compatibility/2006">
-    <mc:Choice xmlns:p159="http://schemas.microsoft.com/office/powerpoint/2015/09/main" Requires="p159">
+  <mc:AlternateContent xmlns:mc="http://schemas.openxmlformats.org/markup-compatibility/2006" xmlns:p159="http://schemas.microsoft.com/office/powerpoint/2015/09/main">
+    <mc:Choice Requires="p159">
       <p:transition xmlns:p14="http://schemas.microsoft.com/office/powerpoint/2010/main" spd="slow" p14:dur="2000">
         <p159:morph option="byObject"/>
       </p:transition>
     </mc:Choice>
-    <mc:Fallback>
+    <mc:Fallback xmlns="">
       <p:transition spd="slow">
         <p:fade/>
       </p:transition>

--- a/4_Presentation/Group 3.pptx
+++ b/4_Presentation/Group 3.pptx
@@ -5,7 +5,7 @@
     <p:sldMasterId id="2147483660" r:id="rId1"/>
   </p:sldMasterIdLst>
   <p:notesMasterIdLst>
-    <p:notesMasterId r:id="rId30"/>
+    <p:notesMasterId r:id="rId31"/>
   </p:notesMasterIdLst>
   <p:sldIdLst>
     <p:sldId id="256" r:id="rId2"/>
@@ -15,12 +15,12 @@
     <p:sldId id="289" r:id="rId6"/>
     <p:sldId id="290" r:id="rId7"/>
     <p:sldId id="291" r:id="rId8"/>
-    <p:sldId id="287" r:id="rId9"/>
-    <p:sldId id="278" r:id="rId10"/>
-    <p:sldId id="279" r:id="rId11"/>
-    <p:sldId id="269" r:id="rId12"/>
-    <p:sldId id="260" r:id="rId13"/>
-    <p:sldId id="283" r:id="rId14"/>
+    <p:sldId id="278" r:id="rId9"/>
+    <p:sldId id="279" r:id="rId10"/>
+    <p:sldId id="269" r:id="rId11"/>
+    <p:sldId id="260" r:id="rId12"/>
+    <p:sldId id="283" r:id="rId13"/>
+    <p:sldId id="292" r:id="rId14"/>
     <p:sldId id="284" r:id="rId15"/>
     <p:sldId id="285" r:id="rId16"/>
     <p:sldId id="275" r:id="rId17"/>
@@ -31,11 +31,12 @@
     <p:sldId id="268" r:id="rId22"/>
     <p:sldId id="266" r:id="rId23"/>
     <p:sldId id="263" r:id="rId24"/>
-    <p:sldId id="264" r:id="rId25"/>
-    <p:sldId id="265" r:id="rId26"/>
-    <p:sldId id="262" r:id="rId27"/>
-    <p:sldId id="286" r:id="rId28"/>
-    <p:sldId id="288" r:id="rId29"/>
+    <p:sldId id="287" r:id="rId25"/>
+    <p:sldId id="264" r:id="rId26"/>
+    <p:sldId id="265" r:id="rId27"/>
+    <p:sldId id="262" r:id="rId28"/>
+    <p:sldId id="286" r:id="rId29"/>
+    <p:sldId id="288" r:id="rId30"/>
   </p:sldIdLst>
   <p:sldSz cx="12192000" cy="6858000"/>
   <p:notesSz cx="6858000" cy="9144000"/>
@@ -665,13 +666,7 @@
   <p:cSld>
     <p:spTree>
       <p:nvGrpSpPr>
-        <p:cNvPr id="1" name="">
-          <a:extLst>
-            <a:ext uri="{FF2B5EF4-FFF2-40B4-BE49-F238E27FC236}">
-              <a16:creationId xmlns:a16="http://schemas.microsoft.com/office/drawing/2014/main" id="{FC86DA3C-7F4B-A86D-DEF4-340963E8A29B}"/>
-            </a:ext>
-          </a:extLst>
-        </p:cNvPr>
+        <p:cNvPr id="1" name=""/>
         <p:cNvGrpSpPr/>
         <p:nvPr/>
       </p:nvGrpSpPr>
@@ -685,13 +680,7 @@
       </p:grpSpPr>
       <p:sp>
         <p:nvSpPr>
-          <p:cNvPr id="2" name="Slide Image Placeholder 1">
-            <a:extLst>
-              <a:ext uri="{FF2B5EF4-FFF2-40B4-BE49-F238E27FC236}">
-                <a16:creationId xmlns:a16="http://schemas.microsoft.com/office/drawing/2014/main" id="{4886EDDE-05C4-D394-BDDC-5FECD211527E}"/>
-              </a:ext>
-            </a:extLst>
-          </p:cNvPr>
+          <p:cNvPr id="2" name="Slide Image Placeholder 1"/>
           <p:cNvSpPr>
             <a:spLocks noGrp="1" noRot="1" noChangeAspect="1"/>
           </p:cNvSpPr>
@@ -703,13 +692,7 @@
       </p:sp>
       <p:sp>
         <p:nvSpPr>
-          <p:cNvPr id="3" name="Notes Placeholder 2">
-            <a:extLst>
-              <a:ext uri="{FF2B5EF4-FFF2-40B4-BE49-F238E27FC236}">
-                <a16:creationId xmlns:a16="http://schemas.microsoft.com/office/drawing/2014/main" id="{163AA61B-3DB8-2898-1177-E09990948004}"/>
-              </a:ext>
-            </a:extLst>
-          </p:cNvPr>
+          <p:cNvPr id="3" name="Notes Placeholder 2"/>
           <p:cNvSpPr>
             <a:spLocks noGrp="1"/>
           </p:cNvSpPr>
@@ -723,8 +706,8 @@
           <a:lstStyle/>
           <a:p>
             <a:r>
-              <a:rPr lang="en-US"/>
-              <a:t> </a:t>
+              <a:rPr lang="en-US" dirty="0"/>
+              <a:t>Full (initial) dataset</a:t>
             </a:r>
             <a:endParaRPr lang="en-GB" dirty="0"/>
           </a:p>
@@ -732,13 +715,7 @@
       </p:sp>
       <p:sp>
         <p:nvSpPr>
-          <p:cNvPr id="4" name="Slide Number Placeholder 3">
-            <a:extLst>
-              <a:ext uri="{FF2B5EF4-FFF2-40B4-BE49-F238E27FC236}">
-                <a16:creationId xmlns:a16="http://schemas.microsoft.com/office/drawing/2014/main" id="{644228FF-C3FB-82A6-7644-2DF9CB6CEF26}"/>
-              </a:ext>
-            </a:extLst>
-          </p:cNvPr>
+          <p:cNvPr id="4" name="Slide Number Placeholder 3"/>
           <p:cNvSpPr>
             <a:spLocks noGrp="1"/>
           </p:cNvSpPr>
@@ -762,7 +739,7 @@
     </p:spTree>
     <p:extLst>
       <p:ext uri="{BB962C8B-B14F-4D97-AF65-F5344CB8AC3E}">
-        <p14:creationId xmlns:p14="http://schemas.microsoft.com/office/powerpoint/2010/main" val="2739639426"/>
+        <p14:creationId xmlns:p14="http://schemas.microsoft.com/office/powerpoint/2010/main" val="1897491180"/>
       </p:ext>
     </p:extLst>
   </p:cSld>
@@ -818,9 +795,50 @@
           <a:p>
             <a:r>
               <a:rPr lang="en-US" dirty="0"/>
-              <a:t>Full (initial) dataset</a:t>
-            </a:r>
-            <a:endParaRPr lang="en-GB" dirty="0"/>
+              <a:t>Data were normalized before entering the model</a:t>
+            </a:r>
+          </a:p>
+          <a:p>
+            <a:br>
+              <a:rPr lang="en-GB" dirty="0"/>
+            </a:br>
+            <a:r>
+              <a:rPr lang="en-GB" dirty="0"/>
+              <a:t>normalized earlier</a:t>
+            </a:r>
+            <a:br>
+              <a:rPr lang="en-GB" dirty="0"/>
+            </a:br>
+            <a:br>
+              <a:rPr lang="en-GB" dirty="0"/>
+            </a:br>
+            <a:r>
+              <a:rPr lang="en-GB" dirty="0"/>
+              <a:t>4 layers, numbers of neurons, activation functions </a:t>
+            </a:r>
+            <a:r>
+              <a:rPr lang="en-GB" dirty="0" err="1"/>
+              <a:t>relu</a:t>
+            </a:r>
+            <a:r>
+              <a:rPr lang="en-GB" dirty="0"/>
+              <a:t>, first layer had l2 </a:t>
+            </a:r>
+            <a:r>
+              <a:rPr lang="en-GB" dirty="0" err="1"/>
+              <a:t>regulization</a:t>
+            </a:r>
+            <a:r>
+              <a:rPr lang="en-GB" dirty="0"/>
+              <a:t> parameter of 0.001</a:t>
+            </a:r>
+            <a:br>
+              <a:rPr lang="en-GB" dirty="0"/>
+            </a:br>
+            <a:r>
+              <a:rPr lang="en-GB" dirty="0"/>
+              <a:t>Early stop with patience of 50 epochs, restoring best weights</a:t>
+            </a:r>
           </a:p>
         </p:txBody>
       </p:sp>
@@ -841,7 +859,7 @@
           <a:p>
             <a:fld id="{809340A9-5F99-47E5-A3AD-FD228EA849F8}" type="slidenum">
               <a:rPr lang="en-GB" smtClean="0"/>
-              <a:t>11</a:t>
+              <a:t>12</a:t>
             </a:fld>
             <a:endParaRPr lang="en-GB"/>
           </a:p>
@@ -850,7 +868,7 @@
     </p:spTree>
     <p:extLst>
       <p:ext uri="{BB962C8B-B14F-4D97-AF65-F5344CB8AC3E}">
-        <p14:creationId xmlns:p14="http://schemas.microsoft.com/office/powerpoint/2010/main" val="1897491180"/>
+        <p14:creationId xmlns:p14="http://schemas.microsoft.com/office/powerpoint/2010/main" val="812862749"/>
       </p:ext>
     </p:extLst>
   </p:cSld>
@@ -865,7 +883,13 @@
   <p:cSld>
     <p:spTree>
       <p:nvGrpSpPr>
-        <p:cNvPr id="1" name=""/>
+        <p:cNvPr id="1" name="">
+          <a:extLst>
+            <a:ext uri="{FF2B5EF4-FFF2-40B4-BE49-F238E27FC236}">
+              <a16:creationId xmlns:a16="http://schemas.microsoft.com/office/drawing/2014/main" id="{47E148AA-51BB-2E5E-6EE1-F37CD096A108}"/>
+            </a:ext>
+          </a:extLst>
+        </p:cNvPr>
         <p:cNvGrpSpPr/>
         <p:nvPr/>
       </p:nvGrpSpPr>
@@ -879,7 +903,13 @@
       </p:grpSpPr>
       <p:sp>
         <p:nvSpPr>
-          <p:cNvPr id="2" name="Slide Image Placeholder 1"/>
+          <p:cNvPr id="2" name="Slide Image Placeholder 1">
+            <a:extLst>
+              <a:ext uri="{FF2B5EF4-FFF2-40B4-BE49-F238E27FC236}">
+                <a16:creationId xmlns:a16="http://schemas.microsoft.com/office/drawing/2014/main" id="{57450495-648A-2B66-72AC-6019E6AABC89}"/>
+              </a:ext>
+            </a:extLst>
+          </p:cNvPr>
           <p:cNvSpPr>
             <a:spLocks noGrp="1" noRot="1" noChangeAspect="1"/>
           </p:cNvSpPr>
@@ -891,7 +921,13 @@
       </p:sp>
       <p:sp>
         <p:nvSpPr>
-          <p:cNvPr id="3" name="Notes Placeholder 2"/>
+          <p:cNvPr id="3" name="Notes Placeholder 2">
+            <a:extLst>
+              <a:ext uri="{FF2B5EF4-FFF2-40B4-BE49-F238E27FC236}">
+                <a16:creationId xmlns:a16="http://schemas.microsoft.com/office/drawing/2014/main" id="{46D46D17-55C3-AD37-4A06-FF43784CEA2D}"/>
+              </a:ext>
+            </a:extLst>
+          </p:cNvPr>
           <p:cNvSpPr>
             <a:spLocks noGrp="1"/>
           </p:cNvSpPr>
@@ -955,7 +991,13 @@
       </p:sp>
       <p:sp>
         <p:nvSpPr>
-          <p:cNvPr id="4" name="Slide Number Placeholder 3"/>
+          <p:cNvPr id="4" name="Slide Number Placeholder 3">
+            <a:extLst>
+              <a:ext uri="{FF2B5EF4-FFF2-40B4-BE49-F238E27FC236}">
+                <a16:creationId xmlns:a16="http://schemas.microsoft.com/office/drawing/2014/main" id="{F84A22CE-658F-BAEB-22F0-92F75E17AC8F}"/>
+              </a:ext>
+            </a:extLst>
+          </p:cNvPr>
           <p:cNvSpPr>
             <a:spLocks noGrp="1"/>
           </p:cNvSpPr>
@@ -979,7 +1021,7 @@
     </p:spTree>
     <p:extLst>
       <p:ext uri="{BB962C8B-B14F-4D97-AF65-F5344CB8AC3E}">
-        <p14:creationId xmlns:p14="http://schemas.microsoft.com/office/powerpoint/2010/main" val="812862749"/>
+        <p14:creationId xmlns:p14="http://schemas.microsoft.com/office/powerpoint/2010/main" val="3519880630"/>
       </p:ext>
     </p:extLst>
   </p:cSld>
@@ -1729,6 +1771,128 @@
         <p:cNvPr id="1" name="">
           <a:extLst>
             <a:ext uri="{FF2B5EF4-FFF2-40B4-BE49-F238E27FC236}">
+              <a16:creationId xmlns:a16="http://schemas.microsoft.com/office/drawing/2014/main" id="{4868B7AE-DCA0-C088-FA18-C941AC042FAC}"/>
+            </a:ext>
+          </a:extLst>
+        </p:cNvPr>
+        <p:cNvGrpSpPr/>
+        <p:nvPr/>
+      </p:nvGrpSpPr>
+      <p:grpSpPr>
+        <a:xfrm>
+          <a:off x="0" y="0"/>
+          <a:ext cx="0" cy="0"/>
+          <a:chOff x="0" y="0"/>
+          <a:chExt cx="0" cy="0"/>
+        </a:xfrm>
+      </p:grpSpPr>
+      <p:sp>
+        <p:nvSpPr>
+          <p:cNvPr id="2" name="Slide Image Placeholder 1">
+            <a:extLst>
+              <a:ext uri="{FF2B5EF4-FFF2-40B4-BE49-F238E27FC236}">
+                <a16:creationId xmlns:a16="http://schemas.microsoft.com/office/drawing/2014/main" id="{FC2A508A-C9E2-6317-0313-B7D9B3E241B8}"/>
+              </a:ext>
+            </a:extLst>
+          </p:cNvPr>
+          <p:cNvSpPr>
+            <a:spLocks noGrp="1" noRot="1" noChangeAspect="1"/>
+          </p:cNvSpPr>
+          <p:nvPr>
+            <p:ph type="sldImg"/>
+          </p:nvPr>
+        </p:nvSpPr>
+        <p:spPr/>
+      </p:sp>
+      <p:sp>
+        <p:nvSpPr>
+          <p:cNvPr id="3" name="Notes Placeholder 2">
+            <a:extLst>
+              <a:ext uri="{FF2B5EF4-FFF2-40B4-BE49-F238E27FC236}">
+                <a16:creationId xmlns:a16="http://schemas.microsoft.com/office/drawing/2014/main" id="{30B444DD-79C8-9EC0-30B1-0AE0D83ABE16}"/>
+              </a:ext>
+            </a:extLst>
+          </p:cNvPr>
+          <p:cNvSpPr>
+            <a:spLocks noGrp="1"/>
+          </p:cNvSpPr>
+          <p:nvPr>
+            <p:ph type="body" idx="1"/>
+          </p:nvPr>
+        </p:nvSpPr>
+        <p:spPr/>
+        <p:txBody>
+          <a:bodyPr/>
+          <a:lstStyle/>
+          <a:p>
+            <a:r>
+              <a:rPr lang="en-GB" sz="1200" b="0" kern="1200" dirty="0">
+                <a:solidFill>
+                  <a:schemeClr val="tx1"/>
+                </a:solidFill>
+                <a:effectLst/>
+                <a:latin typeface="+mn-lt"/>
+                <a:ea typeface="+mn-ea"/>
+                <a:cs typeface="+mn-cs"/>
+              </a:rPr>
+              <a:t>Made several so we can choose</a:t>
+            </a:r>
+          </a:p>
+          <a:p>
+            <a:endParaRPr lang="en-GB" dirty="0"/>
+          </a:p>
+        </p:txBody>
+      </p:sp>
+      <p:sp>
+        <p:nvSpPr>
+          <p:cNvPr id="4" name="Slide Number Placeholder 3">
+            <a:extLst>
+              <a:ext uri="{FF2B5EF4-FFF2-40B4-BE49-F238E27FC236}">
+                <a16:creationId xmlns:a16="http://schemas.microsoft.com/office/drawing/2014/main" id="{A8A11FBC-1B5B-E39E-006F-B274AD735BBE}"/>
+              </a:ext>
+            </a:extLst>
+          </p:cNvPr>
+          <p:cNvSpPr>
+            <a:spLocks noGrp="1"/>
+          </p:cNvSpPr>
+          <p:nvPr>
+            <p:ph type="sldNum" sz="quarter" idx="5"/>
+          </p:nvPr>
+        </p:nvSpPr>
+        <p:spPr/>
+        <p:txBody>
+          <a:bodyPr/>
+          <a:lstStyle/>
+          <a:p>
+            <a:fld id="{809340A9-5F99-47E5-A3AD-FD228EA849F8}" type="slidenum">
+              <a:rPr lang="en-GB" smtClean="0"/>
+              <a:t>24</a:t>
+            </a:fld>
+            <a:endParaRPr lang="en-GB"/>
+          </a:p>
+        </p:txBody>
+      </p:sp>
+    </p:spTree>
+    <p:extLst>
+      <p:ext uri="{BB962C8B-B14F-4D97-AF65-F5344CB8AC3E}">
+        <p14:creationId xmlns:p14="http://schemas.microsoft.com/office/powerpoint/2010/main" val="487031629"/>
+      </p:ext>
+    </p:extLst>
+  </p:cSld>
+  <p:clrMapOvr>
+    <a:masterClrMapping/>
+  </p:clrMapOvr>
+</p:notes>
+</file>
+
+<file path=ppt/notesSlides/notesSlide21.xml><?xml version="1.0" encoding="utf-8"?>
+<p:notes xmlns:a="http://schemas.openxmlformats.org/drawingml/2006/main" xmlns:r="http://schemas.openxmlformats.org/officeDocument/2006/relationships" xmlns:p="http://schemas.openxmlformats.org/presentationml/2006/main">
+  <p:cSld>
+    <p:spTree>
+      <p:nvGrpSpPr>
+        <p:cNvPr id="1" name="">
+          <a:extLst>
+            <a:ext uri="{FF2B5EF4-FFF2-40B4-BE49-F238E27FC236}">
               <a16:creationId xmlns:a16="http://schemas.microsoft.com/office/drawing/2014/main" id="{2FCEE60D-B047-017F-1CC1-F6F8A2BCB66C}"/>
             </a:ext>
           </a:extLst>
@@ -1810,7 +1974,7 @@
           <a:p>
             <a:fld id="{809340A9-5F99-47E5-A3AD-FD228EA849F8}" type="slidenum">
               <a:rPr lang="en-GB" smtClean="0"/>
-              <a:t>27</a:t>
+              <a:t>28</a:t>
             </a:fld>
             <a:endParaRPr lang="en-GB"/>
           </a:p>
@@ -10886,128 +11050,6 @@
         <p:cNvPr id="1" name="">
           <a:extLst>
             <a:ext uri="{FF2B5EF4-FFF2-40B4-BE49-F238E27FC236}">
-              <a16:creationId xmlns:a16="http://schemas.microsoft.com/office/drawing/2014/main" id="{4868B7AE-DCA0-C088-FA18-C941AC042FAC}"/>
-            </a:ext>
-          </a:extLst>
-        </p:cNvPr>
-        <p:cNvGrpSpPr/>
-        <p:nvPr/>
-      </p:nvGrpSpPr>
-      <p:grpSpPr>
-        <a:xfrm>
-          <a:off x="0" y="0"/>
-          <a:ext cx="0" cy="0"/>
-          <a:chOff x="0" y="0"/>
-          <a:chExt cx="0" cy="0"/>
-        </a:xfrm>
-      </p:grpSpPr>
-      <p:sp>
-        <p:nvSpPr>
-          <p:cNvPr id="2" name="Slide Image Placeholder 1">
-            <a:extLst>
-              <a:ext uri="{FF2B5EF4-FFF2-40B4-BE49-F238E27FC236}">
-                <a16:creationId xmlns:a16="http://schemas.microsoft.com/office/drawing/2014/main" id="{FC2A508A-C9E2-6317-0313-B7D9B3E241B8}"/>
-              </a:ext>
-            </a:extLst>
-          </p:cNvPr>
-          <p:cNvSpPr>
-            <a:spLocks noGrp="1" noRot="1" noChangeAspect="1"/>
-          </p:cNvSpPr>
-          <p:nvPr>
-            <p:ph type="sldImg"/>
-          </p:nvPr>
-        </p:nvSpPr>
-        <p:spPr/>
-      </p:sp>
-      <p:sp>
-        <p:nvSpPr>
-          <p:cNvPr id="3" name="Notes Placeholder 2">
-            <a:extLst>
-              <a:ext uri="{FF2B5EF4-FFF2-40B4-BE49-F238E27FC236}">
-                <a16:creationId xmlns:a16="http://schemas.microsoft.com/office/drawing/2014/main" id="{30B444DD-79C8-9EC0-30B1-0AE0D83ABE16}"/>
-              </a:ext>
-            </a:extLst>
-          </p:cNvPr>
-          <p:cNvSpPr>
-            <a:spLocks noGrp="1"/>
-          </p:cNvSpPr>
-          <p:nvPr>
-            <p:ph type="body" idx="1"/>
-          </p:nvPr>
-        </p:nvSpPr>
-        <p:spPr/>
-        <p:txBody>
-          <a:bodyPr/>
-          <a:lstStyle/>
-          <a:p>
-            <a:r>
-              <a:rPr lang="en-GB" sz="1200" b="0" kern="1200" dirty="0">
-                <a:solidFill>
-                  <a:schemeClr val="tx1"/>
-                </a:solidFill>
-                <a:effectLst/>
-                <a:latin typeface="+mn-lt"/>
-                <a:ea typeface="+mn-ea"/>
-                <a:cs typeface="+mn-cs"/>
-              </a:rPr>
-              <a:t>Made several so we can choose</a:t>
-            </a:r>
-          </a:p>
-          <a:p>
-            <a:endParaRPr lang="en-GB" dirty="0"/>
-          </a:p>
-        </p:txBody>
-      </p:sp>
-      <p:sp>
-        <p:nvSpPr>
-          <p:cNvPr id="4" name="Slide Number Placeholder 3">
-            <a:extLst>
-              <a:ext uri="{FF2B5EF4-FFF2-40B4-BE49-F238E27FC236}">
-                <a16:creationId xmlns:a16="http://schemas.microsoft.com/office/drawing/2014/main" id="{A8A11FBC-1B5B-E39E-006F-B274AD735BBE}"/>
-              </a:ext>
-            </a:extLst>
-          </p:cNvPr>
-          <p:cNvSpPr>
-            <a:spLocks noGrp="1"/>
-          </p:cNvSpPr>
-          <p:nvPr>
-            <p:ph type="sldNum" sz="quarter" idx="5"/>
-          </p:nvPr>
-        </p:nvSpPr>
-        <p:spPr/>
-        <p:txBody>
-          <a:bodyPr/>
-          <a:lstStyle/>
-          <a:p>
-            <a:fld id="{809340A9-5F99-47E5-A3AD-FD228EA849F8}" type="slidenum">
-              <a:rPr lang="en-GB" smtClean="0"/>
-              <a:t>8</a:t>
-            </a:fld>
-            <a:endParaRPr lang="en-GB"/>
-          </a:p>
-        </p:txBody>
-      </p:sp>
-    </p:spTree>
-    <p:extLst>
-      <p:ext uri="{BB962C8B-B14F-4D97-AF65-F5344CB8AC3E}">
-        <p14:creationId xmlns:p14="http://schemas.microsoft.com/office/powerpoint/2010/main" val="487031629"/>
-      </p:ext>
-    </p:extLst>
-  </p:cSld>
-  <p:clrMapOvr>
-    <a:masterClrMapping/>
-  </p:clrMapOvr>
-</p:notes>
-</file>
-
-<file path=ppt/notesSlides/notesSlide9.xml><?xml version="1.0" encoding="utf-8"?>
-<p:notes xmlns:a="http://schemas.openxmlformats.org/drawingml/2006/main" xmlns:r="http://schemas.openxmlformats.org/officeDocument/2006/relationships" xmlns:p="http://schemas.openxmlformats.org/presentationml/2006/main">
-  <p:cSld>
-    <p:spTree>
-      <p:nvGrpSpPr>
-        <p:cNvPr id="1" name="">
-          <a:extLst>
-            <a:ext uri="{FF2B5EF4-FFF2-40B4-BE49-F238E27FC236}">
               <a16:creationId xmlns:a16="http://schemas.microsoft.com/office/drawing/2014/main" id="{ABF462BA-275E-ED3C-503B-602DB2EB9B39}"/>
             </a:ext>
           </a:extLst>
@@ -11112,7 +11154,7 @@
           <a:p>
             <a:fld id="{809340A9-5F99-47E5-A3AD-FD228EA849F8}" type="slidenum">
               <a:rPr lang="en-GB" smtClean="0"/>
-              <a:t>9</a:t>
+              <a:t>8</a:t>
             </a:fld>
             <a:endParaRPr lang="en-GB"/>
           </a:p>
@@ -11122,6 +11164,118 @@
     <p:extLst>
       <p:ext uri="{BB962C8B-B14F-4D97-AF65-F5344CB8AC3E}">
         <p14:creationId xmlns:p14="http://schemas.microsoft.com/office/powerpoint/2010/main" val="3188270856"/>
+      </p:ext>
+    </p:extLst>
+  </p:cSld>
+  <p:clrMapOvr>
+    <a:masterClrMapping/>
+  </p:clrMapOvr>
+</p:notes>
+</file>
+
+<file path=ppt/notesSlides/notesSlide9.xml><?xml version="1.0" encoding="utf-8"?>
+<p:notes xmlns:a="http://schemas.openxmlformats.org/drawingml/2006/main" xmlns:r="http://schemas.openxmlformats.org/officeDocument/2006/relationships" xmlns:p="http://schemas.openxmlformats.org/presentationml/2006/main">
+  <p:cSld>
+    <p:spTree>
+      <p:nvGrpSpPr>
+        <p:cNvPr id="1" name="">
+          <a:extLst>
+            <a:ext uri="{FF2B5EF4-FFF2-40B4-BE49-F238E27FC236}">
+              <a16:creationId xmlns:a16="http://schemas.microsoft.com/office/drawing/2014/main" id="{FC86DA3C-7F4B-A86D-DEF4-340963E8A29B}"/>
+            </a:ext>
+          </a:extLst>
+        </p:cNvPr>
+        <p:cNvGrpSpPr/>
+        <p:nvPr/>
+      </p:nvGrpSpPr>
+      <p:grpSpPr>
+        <a:xfrm>
+          <a:off x="0" y="0"/>
+          <a:ext cx="0" cy="0"/>
+          <a:chOff x="0" y="0"/>
+          <a:chExt cx="0" cy="0"/>
+        </a:xfrm>
+      </p:grpSpPr>
+      <p:sp>
+        <p:nvSpPr>
+          <p:cNvPr id="2" name="Slide Image Placeholder 1">
+            <a:extLst>
+              <a:ext uri="{FF2B5EF4-FFF2-40B4-BE49-F238E27FC236}">
+                <a16:creationId xmlns:a16="http://schemas.microsoft.com/office/drawing/2014/main" id="{4886EDDE-05C4-D394-BDDC-5FECD211527E}"/>
+              </a:ext>
+            </a:extLst>
+          </p:cNvPr>
+          <p:cNvSpPr>
+            <a:spLocks noGrp="1" noRot="1" noChangeAspect="1"/>
+          </p:cNvSpPr>
+          <p:nvPr>
+            <p:ph type="sldImg"/>
+          </p:nvPr>
+        </p:nvSpPr>
+        <p:spPr/>
+      </p:sp>
+      <p:sp>
+        <p:nvSpPr>
+          <p:cNvPr id="3" name="Notes Placeholder 2">
+            <a:extLst>
+              <a:ext uri="{FF2B5EF4-FFF2-40B4-BE49-F238E27FC236}">
+                <a16:creationId xmlns:a16="http://schemas.microsoft.com/office/drawing/2014/main" id="{163AA61B-3DB8-2898-1177-E09990948004}"/>
+              </a:ext>
+            </a:extLst>
+          </p:cNvPr>
+          <p:cNvSpPr>
+            <a:spLocks noGrp="1"/>
+          </p:cNvSpPr>
+          <p:nvPr>
+            <p:ph type="body" idx="1"/>
+          </p:nvPr>
+        </p:nvSpPr>
+        <p:spPr/>
+        <p:txBody>
+          <a:bodyPr/>
+          <a:lstStyle/>
+          <a:p>
+            <a:r>
+              <a:rPr lang="en-US"/>
+              <a:t> </a:t>
+            </a:r>
+            <a:endParaRPr lang="en-GB" dirty="0"/>
+          </a:p>
+        </p:txBody>
+      </p:sp>
+      <p:sp>
+        <p:nvSpPr>
+          <p:cNvPr id="4" name="Slide Number Placeholder 3">
+            <a:extLst>
+              <a:ext uri="{FF2B5EF4-FFF2-40B4-BE49-F238E27FC236}">
+                <a16:creationId xmlns:a16="http://schemas.microsoft.com/office/drawing/2014/main" id="{644228FF-C3FB-82A6-7644-2DF9CB6CEF26}"/>
+              </a:ext>
+            </a:extLst>
+          </p:cNvPr>
+          <p:cNvSpPr>
+            <a:spLocks noGrp="1"/>
+          </p:cNvSpPr>
+          <p:nvPr>
+            <p:ph type="sldNum" sz="quarter" idx="5"/>
+          </p:nvPr>
+        </p:nvSpPr>
+        <p:spPr/>
+        <p:txBody>
+          <a:bodyPr/>
+          <a:lstStyle/>
+          <a:p>
+            <a:fld id="{809340A9-5F99-47E5-A3AD-FD228EA849F8}" type="slidenum">
+              <a:rPr lang="en-GB" smtClean="0"/>
+              <a:t>9</a:t>
+            </a:fld>
+            <a:endParaRPr lang="en-GB"/>
+          </a:p>
+        </p:txBody>
+      </p:sp>
+    </p:spTree>
+    <p:extLst>
+      <p:ext uri="{BB962C8B-B14F-4D97-AF65-F5344CB8AC3E}">
+        <p14:creationId xmlns:p14="http://schemas.microsoft.com/office/powerpoint/2010/main" val="2739639426"/>
       </p:ext>
     </p:extLst>
   </p:cSld>
@@ -14841,1353 +14995,6 @@
         <p:cNvPr id="1" name="">
           <a:extLst>
             <a:ext uri="{FF2B5EF4-FFF2-40B4-BE49-F238E27FC236}">
-              <a16:creationId xmlns:a16="http://schemas.microsoft.com/office/drawing/2014/main" id="{92C95C09-80A5-2AAD-E849-D44AE127DA0A}"/>
-            </a:ext>
-          </a:extLst>
-        </p:cNvPr>
-        <p:cNvGrpSpPr/>
-        <p:nvPr/>
-      </p:nvGrpSpPr>
-      <p:grpSpPr>
-        <a:xfrm>
-          <a:off x="0" y="0"/>
-          <a:ext cx="0" cy="0"/>
-          <a:chOff x="0" y="0"/>
-          <a:chExt cx="0" cy="0"/>
-        </a:xfrm>
-      </p:grpSpPr>
-      <p:sp>
-        <p:nvSpPr>
-          <p:cNvPr id="3" name="Slide Number Placeholder 2">
-            <a:extLst>
-              <a:ext uri="{FF2B5EF4-FFF2-40B4-BE49-F238E27FC236}">
-                <a16:creationId xmlns:a16="http://schemas.microsoft.com/office/drawing/2014/main" id="{47A0FE8B-EBF8-F253-14B5-51C406AC0ED9}"/>
-              </a:ext>
-            </a:extLst>
-          </p:cNvPr>
-          <p:cNvSpPr>
-            <a:spLocks noGrp="1"/>
-          </p:cNvSpPr>
-          <p:nvPr>
-            <p:ph type="sldNum" sz="quarter" idx="12"/>
-          </p:nvPr>
-        </p:nvSpPr>
-        <p:spPr>
-          <a:xfrm>
-            <a:off x="9103894" y="6356350"/>
-            <a:ext cx="2743200" cy="365125"/>
-          </a:xfrm>
-        </p:spPr>
-        <p:txBody>
-          <a:bodyPr/>
-          <a:lstStyle/>
-          <a:p>
-            <a:fld id="{FEE63D0E-FFEF-43D1-BE35-64C33AF422FD}" type="slidenum">
-              <a:rPr lang="de-DE" smtClean="0"/>
-              <a:t>10</a:t>
-            </a:fld>
-            <a:endParaRPr lang="de-DE"/>
-          </a:p>
-        </p:txBody>
-      </p:sp>
-      <mc:AlternateContent xmlns:mc="http://schemas.openxmlformats.org/markup-compatibility/2006" xmlns:p14="http://schemas.microsoft.com/office/powerpoint/2010/main">
-        <mc:Choice Requires="p14">
-          <p:contentPart p14:bwMode="auto" r:id="rId3">
-            <p14:nvContentPartPr>
-              <p14:cNvPr id="12" name="Ink 11">
-                <a:extLst>
-                  <a:ext uri="{FF2B5EF4-FFF2-40B4-BE49-F238E27FC236}">
-                    <a16:creationId xmlns:a16="http://schemas.microsoft.com/office/drawing/2014/main" id="{E55F1D86-F054-C0C7-0C83-B5E08974F030}"/>
-                  </a:ext>
-                </a:extLst>
-              </p14:cNvPr>
-              <p14:cNvContentPartPr/>
-              <p14:nvPr/>
-            </p14:nvContentPartPr>
-            <p14:xfrm>
-              <a:off x="2369426" y="1718669"/>
-              <a:ext cx="213840" cy="371880"/>
-            </p14:xfrm>
-          </p:contentPart>
-        </mc:Choice>
-        <mc:Fallback xmlns="">
-          <p:pic>
-            <p:nvPicPr>
-              <p:cNvPr id="12" name="Ink 11">
-                <a:extLst>
-                  <a:ext uri="{FF2B5EF4-FFF2-40B4-BE49-F238E27FC236}">
-                    <a16:creationId xmlns:a16="http://schemas.microsoft.com/office/drawing/2014/main" id="{E55F1D86-F054-C0C7-0C83-B5E08974F030}"/>
-                  </a:ext>
-                </a:extLst>
-              </p:cNvPr>
-              <p:cNvPicPr/>
-              <p:nvPr/>
-            </p:nvPicPr>
-            <p:blipFill>
-              <a:blip r:embed="rId4"/>
-              <a:stretch>
-                <a:fillRect/>
-              </a:stretch>
-            </p:blipFill>
-            <p:spPr>
-              <a:xfrm>
-                <a:off x="2306426" y="1655669"/>
-                <a:ext cx="339480" cy="497520"/>
-              </a:xfrm>
-              <a:prstGeom prst="rect">
-                <a:avLst/>
-              </a:prstGeom>
-            </p:spPr>
-          </p:pic>
-        </mc:Fallback>
-      </mc:AlternateContent>
-      <p:grpSp>
-        <p:nvGrpSpPr>
-          <p:cNvPr id="35" name="Group 34">
-            <a:extLst>
-              <a:ext uri="{FF2B5EF4-FFF2-40B4-BE49-F238E27FC236}">
-                <a16:creationId xmlns:a16="http://schemas.microsoft.com/office/drawing/2014/main" id="{E35B6ECA-E31F-6054-6D62-93D14E62DE45}"/>
-              </a:ext>
-            </a:extLst>
-          </p:cNvPr>
-          <p:cNvGrpSpPr/>
-          <p:nvPr/>
-        </p:nvGrpSpPr>
-        <p:grpSpPr>
-          <a:xfrm>
-            <a:off x="897389" y="929894"/>
-            <a:ext cx="4595558" cy="5426456"/>
-            <a:chOff x="3698850" y="996742"/>
-            <a:chExt cx="4595558" cy="5426456"/>
-          </a:xfrm>
-        </p:grpSpPr>
-        <p:grpSp>
-          <p:nvGrpSpPr>
-            <p:cNvPr id="27" name="Group 26">
-              <a:extLst>
-                <a:ext uri="{FF2B5EF4-FFF2-40B4-BE49-F238E27FC236}">
-                  <a16:creationId xmlns:a16="http://schemas.microsoft.com/office/drawing/2014/main" id="{0DA4FC97-2A4B-11A3-4A00-947FFDE92E6E}"/>
-                </a:ext>
-              </a:extLst>
-            </p:cNvPr>
-            <p:cNvGrpSpPr/>
-            <p:nvPr/>
-          </p:nvGrpSpPr>
-          <p:grpSpPr>
-            <a:xfrm>
-              <a:off x="3698850" y="996742"/>
-              <a:ext cx="3393640" cy="5426456"/>
-              <a:chOff x="3698850" y="996742"/>
-              <a:chExt cx="3393640" cy="5426456"/>
-            </a:xfrm>
-          </p:grpSpPr>
-          <p:pic>
-            <p:nvPicPr>
-              <p:cNvPr id="22" name="Grafik 14">
-                <a:extLst>
-                  <a:ext uri="{FF2B5EF4-FFF2-40B4-BE49-F238E27FC236}">
-                    <a16:creationId xmlns:a16="http://schemas.microsoft.com/office/drawing/2014/main" id="{D43F8B25-925B-E708-7000-77875C38CBAC}"/>
-                  </a:ext>
-                </a:extLst>
-              </p:cNvPr>
-              <p:cNvPicPr>
-                <a:picLocks noChangeAspect="1"/>
-              </p:cNvPicPr>
-              <p:nvPr/>
-            </p:nvPicPr>
-            <p:blipFill>
-              <a:blip r:embed="rId5">
-                <a:extLst>
-                  <a:ext uri="{28A0092B-C50C-407E-A947-70E740481C1C}">
-                    <a14:useLocalDpi xmlns:a14="http://schemas.microsoft.com/office/drawing/2010/main" val="0"/>
-                  </a:ext>
-                </a:extLst>
-              </a:blip>
-              <a:srcRect l="22070" r="50936"/>
-              <a:stretch>
-                <a:fillRect/>
-              </a:stretch>
-            </p:blipFill>
-            <p:spPr>
-              <a:xfrm>
-                <a:off x="4070619" y="996742"/>
-                <a:ext cx="2326654" cy="5426456"/>
-              </a:xfrm>
-              <a:prstGeom prst="rect">
-                <a:avLst/>
-              </a:prstGeom>
-            </p:spPr>
-          </p:pic>
-          <p:sp>
-            <p:nvSpPr>
-              <p:cNvPr id="23" name="Rectangle 22">
-                <a:extLst>
-                  <a:ext uri="{FF2B5EF4-FFF2-40B4-BE49-F238E27FC236}">
-                    <a16:creationId xmlns:a16="http://schemas.microsoft.com/office/drawing/2014/main" id="{633ACC6B-D50F-78D3-40E3-664258D4EAFB}"/>
-                  </a:ext>
-                </a:extLst>
-              </p:cNvPr>
-              <p:cNvSpPr/>
-              <p:nvPr/>
-            </p:nvSpPr>
-            <p:spPr>
-              <a:xfrm>
-                <a:off x="5419169" y="2492877"/>
-                <a:ext cx="1040458" cy="3860630"/>
-              </a:xfrm>
-              <a:prstGeom prst="rect">
-                <a:avLst/>
-              </a:prstGeom>
-              <a:solidFill>
-                <a:schemeClr val="bg1"/>
-              </a:solidFill>
-              <a:ln>
-                <a:noFill/>
-              </a:ln>
-            </p:spPr>
-            <p:style>
-              <a:lnRef idx="2">
-                <a:schemeClr val="accent1">
-                  <a:shade val="15000"/>
-                </a:schemeClr>
-              </a:lnRef>
-              <a:fillRef idx="1">
-                <a:schemeClr val="accent1"/>
-              </a:fillRef>
-              <a:effectRef idx="0">
-                <a:schemeClr val="accent1"/>
-              </a:effectRef>
-              <a:fontRef idx="minor">
-                <a:schemeClr val="lt1"/>
-              </a:fontRef>
-            </p:style>
-            <p:txBody>
-              <a:bodyPr rtlCol="0" anchor="ctr"/>
-              <a:lstStyle/>
-              <a:p>
-                <a:pPr algn="ctr"/>
-                <a:endParaRPr lang="en-GB"/>
-              </a:p>
-            </p:txBody>
-          </p:sp>
-          <p:sp>
-            <p:nvSpPr>
-              <p:cNvPr id="25" name="Rectangle 24">
-                <a:extLst>
-                  <a:ext uri="{FF2B5EF4-FFF2-40B4-BE49-F238E27FC236}">
-                    <a16:creationId xmlns:a16="http://schemas.microsoft.com/office/drawing/2014/main" id="{A577B111-BB54-2CD4-BB94-F942146706A5}"/>
-                  </a:ext>
-                </a:extLst>
-              </p:cNvPr>
-              <p:cNvSpPr/>
-              <p:nvPr/>
-            </p:nvSpPr>
-            <p:spPr>
-              <a:xfrm rot="2812795">
-                <a:off x="5857525" y="1670389"/>
-                <a:ext cx="1058779" cy="1411150"/>
-              </a:xfrm>
-              <a:prstGeom prst="rect">
-                <a:avLst/>
-              </a:prstGeom>
-              <a:solidFill>
-                <a:schemeClr val="bg1"/>
-              </a:solidFill>
-              <a:ln>
-                <a:noFill/>
-              </a:ln>
-            </p:spPr>
-            <p:style>
-              <a:lnRef idx="2">
-                <a:schemeClr val="accent1">
-                  <a:shade val="15000"/>
-                </a:schemeClr>
-              </a:lnRef>
-              <a:fillRef idx="1">
-                <a:schemeClr val="accent1"/>
-              </a:fillRef>
-              <a:effectRef idx="0">
-                <a:schemeClr val="accent1"/>
-              </a:effectRef>
-              <a:fontRef idx="minor">
-                <a:schemeClr val="lt1"/>
-              </a:fontRef>
-            </p:style>
-            <p:txBody>
-              <a:bodyPr rtlCol="0" anchor="ctr"/>
-              <a:lstStyle/>
-              <a:p>
-                <a:pPr algn="ctr"/>
-                <a:endParaRPr lang="en-GB"/>
-              </a:p>
-            </p:txBody>
-          </p:sp>
-          <p:sp>
-            <p:nvSpPr>
-              <p:cNvPr id="26" name="Rectangle 25">
-                <a:extLst>
-                  <a:ext uri="{FF2B5EF4-FFF2-40B4-BE49-F238E27FC236}">
-                    <a16:creationId xmlns:a16="http://schemas.microsoft.com/office/drawing/2014/main" id="{1549EDED-B7D3-EDFD-8AAB-4A0793DBE78E}"/>
-                  </a:ext>
-                </a:extLst>
-              </p:cNvPr>
-              <p:cNvSpPr/>
-              <p:nvPr/>
-            </p:nvSpPr>
-            <p:spPr>
-              <a:xfrm rot="2812795">
-                <a:off x="3995515" y="1184665"/>
-                <a:ext cx="670216" cy="1263546"/>
-              </a:xfrm>
-              <a:prstGeom prst="rect">
-                <a:avLst/>
-              </a:prstGeom>
-              <a:solidFill>
-                <a:schemeClr val="bg1"/>
-              </a:solidFill>
-              <a:ln>
-                <a:noFill/>
-              </a:ln>
-            </p:spPr>
-            <p:style>
-              <a:lnRef idx="2">
-                <a:schemeClr val="accent1">
-                  <a:shade val="15000"/>
-                </a:schemeClr>
-              </a:lnRef>
-              <a:fillRef idx="1">
-                <a:schemeClr val="accent1"/>
-              </a:fillRef>
-              <a:effectRef idx="0">
-                <a:schemeClr val="accent1"/>
-              </a:effectRef>
-              <a:fontRef idx="minor">
-                <a:schemeClr val="lt1"/>
-              </a:fontRef>
-            </p:style>
-            <p:txBody>
-              <a:bodyPr rtlCol="0" anchor="ctr"/>
-              <a:lstStyle/>
-              <a:p>
-                <a:pPr algn="ctr"/>
-                <a:endParaRPr lang="en-GB"/>
-              </a:p>
-            </p:txBody>
-          </p:sp>
-        </p:grpSp>
-        <p:grpSp>
-          <p:nvGrpSpPr>
-            <p:cNvPr id="33" name="Group 32">
-              <a:extLst>
-                <a:ext uri="{FF2B5EF4-FFF2-40B4-BE49-F238E27FC236}">
-                  <a16:creationId xmlns:a16="http://schemas.microsoft.com/office/drawing/2014/main" id="{D286413E-EAD1-1B7D-5FD7-1A7CD9E456DF}"/>
-                </a:ext>
-              </a:extLst>
-            </p:cNvPr>
-            <p:cNvGrpSpPr/>
-            <p:nvPr/>
-          </p:nvGrpSpPr>
-          <p:grpSpPr>
-            <a:xfrm>
-              <a:off x="6179611" y="1733853"/>
-              <a:ext cx="2114797" cy="4526605"/>
-              <a:chOff x="6179611" y="1733853"/>
-              <a:chExt cx="2114797" cy="4526605"/>
-            </a:xfrm>
-          </p:grpSpPr>
-          <p:sp>
-            <p:nvSpPr>
-              <p:cNvPr id="31" name="Rectangle 30">
-                <a:extLst>
-                  <a:ext uri="{FF2B5EF4-FFF2-40B4-BE49-F238E27FC236}">
-                    <a16:creationId xmlns:a16="http://schemas.microsoft.com/office/drawing/2014/main" id="{DB2F1729-197C-A2AF-AB1E-8333AAA1692C}"/>
-                  </a:ext>
-                </a:extLst>
-              </p:cNvPr>
-              <p:cNvSpPr/>
-              <p:nvPr/>
-            </p:nvSpPr>
-            <p:spPr>
-              <a:xfrm rot="2812795">
-                <a:off x="6810034" y="1103430"/>
-                <a:ext cx="225360" cy="1486206"/>
-              </a:xfrm>
-              <a:prstGeom prst="rect">
-                <a:avLst/>
-              </a:prstGeom>
-              <a:solidFill>
-                <a:schemeClr val="bg1"/>
-              </a:solidFill>
-              <a:ln>
-                <a:noFill/>
-              </a:ln>
-            </p:spPr>
-            <p:style>
-              <a:lnRef idx="2">
-                <a:schemeClr val="accent1">
-                  <a:shade val="15000"/>
-                </a:schemeClr>
-              </a:lnRef>
-              <a:fillRef idx="1">
-                <a:schemeClr val="accent1"/>
-              </a:fillRef>
-              <a:effectRef idx="0">
-                <a:schemeClr val="accent1"/>
-              </a:effectRef>
-              <a:fontRef idx="minor">
-                <a:schemeClr val="lt1"/>
-              </a:fontRef>
-            </p:style>
-            <p:txBody>
-              <a:bodyPr rtlCol="0" anchor="ctr"/>
-              <a:lstStyle/>
-              <a:p>
-                <a:pPr algn="ctr"/>
-                <a:endParaRPr lang="en-GB"/>
-              </a:p>
-            </p:txBody>
-          </p:sp>
-          <p:sp>
-            <p:nvSpPr>
-              <p:cNvPr id="32" name="Rectangle 31">
-                <a:extLst>
-                  <a:ext uri="{FF2B5EF4-FFF2-40B4-BE49-F238E27FC236}">
-                    <a16:creationId xmlns:a16="http://schemas.microsoft.com/office/drawing/2014/main" id="{8979381A-B618-2062-8189-AAF5A27847B0}"/>
-                  </a:ext>
-                </a:extLst>
-              </p:cNvPr>
-              <p:cNvSpPr/>
-              <p:nvPr/>
-            </p:nvSpPr>
-            <p:spPr>
-              <a:xfrm rot="10800000">
-                <a:off x="7291951" y="2460777"/>
-                <a:ext cx="1002457" cy="3799681"/>
-              </a:xfrm>
-              <a:prstGeom prst="rect">
-                <a:avLst/>
-              </a:prstGeom>
-              <a:solidFill>
-                <a:schemeClr val="bg1"/>
-              </a:solidFill>
-              <a:ln>
-                <a:noFill/>
-              </a:ln>
-            </p:spPr>
-            <p:style>
-              <a:lnRef idx="2">
-                <a:schemeClr val="accent1">
-                  <a:shade val="15000"/>
-                </a:schemeClr>
-              </a:lnRef>
-              <a:fillRef idx="1">
-                <a:schemeClr val="accent1"/>
-              </a:fillRef>
-              <a:effectRef idx="0">
-                <a:schemeClr val="accent1"/>
-              </a:effectRef>
-              <a:fontRef idx="minor">
-                <a:schemeClr val="lt1"/>
-              </a:fontRef>
-            </p:style>
-            <p:txBody>
-              <a:bodyPr rtlCol="0" anchor="ctr"/>
-              <a:lstStyle/>
-              <a:p>
-                <a:pPr algn="ctr"/>
-                <a:endParaRPr lang="en-GB"/>
-              </a:p>
-            </p:txBody>
-          </p:sp>
-        </p:grpSp>
-      </p:grpSp>
-      <p:pic>
-        <p:nvPicPr>
-          <p:cNvPr id="4" name="Grafik 14">
-            <a:extLst>
-              <a:ext uri="{FF2B5EF4-FFF2-40B4-BE49-F238E27FC236}">
-                <a16:creationId xmlns:a16="http://schemas.microsoft.com/office/drawing/2014/main" id="{AA2031BB-7E68-561C-793D-7D875B0DC299}"/>
-              </a:ext>
-            </a:extLst>
-          </p:cNvPr>
-          <p:cNvPicPr>
-            <a:picLocks noChangeAspect="1"/>
-          </p:cNvPicPr>
-          <p:nvPr/>
-        </p:nvPicPr>
-        <p:blipFill>
-          <a:blip r:embed="rId6">
-            <a:extLst>
-              <a:ext uri="{28A0092B-C50C-407E-A947-70E740481C1C}">
-                <a14:useLocalDpi xmlns:a14="http://schemas.microsoft.com/office/drawing/2010/main" val="0"/>
-              </a:ext>
-            </a:extLst>
-          </a:blip>
-          <a:srcRect t="4842"/>
-          <a:stretch>
-            <a:fillRect/>
-          </a:stretch>
-        </p:blipFill>
-        <p:spPr>
-          <a:xfrm>
-            <a:off x="3926063" y="2812387"/>
-            <a:ext cx="4305143" cy="2689781"/>
-          </a:xfrm>
-          <a:prstGeom prst="rect">
-            <a:avLst/>
-          </a:prstGeom>
-        </p:spPr>
-      </p:pic>
-      <p:sp>
-        <p:nvSpPr>
-          <p:cNvPr id="7" name="Google Shape;741;p54">
-            <a:extLst>
-              <a:ext uri="{FF2B5EF4-FFF2-40B4-BE49-F238E27FC236}">
-                <a16:creationId xmlns:a16="http://schemas.microsoft.com/office/drawing/2014/main" id="{B8964C78-2DD9-204D-D6A9-B1ABD6C716FE}"/>
-              </a:ext>
-            </a:extLst>
-          </p:cNvPr>
-          <p:cNvSpPr/>
-          <p:nvPr/>
-        </p:nvSpPr>
-        <p:spPr>
-          <a:xfrm>
-            <a:off x="3172803" y="3971180"/>
-            <a:ext cx="617053" cy="470200"/>
-          </a:xfrm>
-          <a:custGeom>
-            <a:avLst/>
-            <a:gdLst/>
-            <a:ahLst/>
-            <a:cxnLst/>
-            <a:rect l="l" t="t" r="r" b="b"/>
-            <a:pathLst>
-              <a:path w="1580" h="1352" extrusionOk="0">
-                <a:moveTo>
-                  <a:pt x="891" y="1"/>
-                </a:moveTo>
-                <a:cubicBezTo>
-                  <a:pt x="859" y="1"/>
-                  <a:pt x="828" y="12"/>
-                  <a:pt x="801" y="32"/>
-                </a:cubicBezTo>
-                <a:cubicBezTo>
-                  <a:pt x="743" y="89"/>
-                  <a:pt x="743" y="176"/>
-                  <a:pt x="801" y="226"/>
-                </a:cubicBezTo>
-                <a:lnTo>
-                  <a:pt x="1039" y="472"/>
-                </a:lnTo>
-                <a:cubicBezTo>
-                  <a:pt x="1068" y="493"/>
-                  <a:pt x="1046" y="544"/>
-                  <a:pt x="1010" y="544"/>
-                </a:cubicBezTo>
-                <a:lnTo>
-                  <a:pt x="152" y="544"/>
-                </a:lnTo>
-                <a:cubicBezTo>
-                  <a:pt x="147" y="543"/>
-                  <a:pt x="143" y="543"/>
-                  <a:pt x="139" y="543"/>
-                </a:cubicBezTo>
-                <a:cubicBezTo>
-                  <a:pt x="66" y="543"/>
-                  <a:pt x="14" y="598"/>
-                  <a:pt x="8" y="666"/>
-                </a:cubicBezTo>
-                <a:cubicBezTo>
-                  <a:pt x="0" y="746"/>
-                  <a:pt x="65" y="811"/>
-                  <a:pt x="145" y="811"/>
-                </a:cubicBezTo>
-                <a:lnTo>
-                  <a:pt x="1010" y="811"/>
-                </a:lnTo>
-                <a:cubicBezTo>
-                  <a:pt x="1046" y="811"/>
-                  <a:pt x="1068" y="854"/>
-                  <a:pt x="1039" y="883"/>
-                </a:cubicBezTo>
-                <a:lnTo>
-                  <a:pt x="808" y="1113"/>
-                </a:lnTo>
-                <a:cubicBezTo>
-                  <a:pt x="758" y="1164"/>
-                  <a:pt x="751" y="1251"/>
-                  <a:pt x="794" y="1308"/>
-                </a:cubicBezTo>
-                <a:cubicBezTo>
-                  <a:pt x="823" y="1337"/>
-                  <a:pt x="859" y="1351"/>
-                  <a:pt x="895" y="1351"/>
-                </a:cubicBezTo>
-                <a:cubicBezTo>
-                  <a:pt x="931" y="1351"/>
-                  <a:pt x="967" y="1337"/>
-                  <a:pt x="996" y="1308"/>
-                </a:cubicBezTo>
-                <a:lnTo>
-                  <a:pt x="1522" y="774"/>
-                </a:lnTo>
-                <a:cubicBezTo>
-                  <a:pt x="1580" y="717"/>
-                  <a:pt x="1573" y="630"/>
-                  <a:pt x="1522" y="573"/>
-                </a:cubicBezTo>
-                <a:lnTo>
-                  <a:pt x="996" y="46"/>
-                </a:lnTo>
-                <a:cubicBezTo>
-                  <a:pt x="965" y="15"/>
-                  <a:pt x="928" y="1"/>
-                  <a:pt x="891" y="1"/>
-                </a:cubicBezTo>
-                <a:close/>
-              </a:path>
-            </a:pathLst>
-          </a:custGeom>
-          <a:solidFill>
-            <a:schemeClr val="bg1">
-              <a:lumMod val="85000"/>
-            </a:schemeClr>
-          </a:solidFill>
-          <a:ln>
-            <a:noFill/>
-          </a:ln>
-        </p:spPr>
-        <p:txBody>
-          <a:bodyPr spcFirstLastPara="1" wrap="square" lIns="91425" tIns="91425" rIns="91425" bIns="91425" anchor="ctr" anchorCtr="0">
-            <a:noAutofit/>
-          </a:bodyPr>
-          <a:lstStyle/>
-          <a:p>
-            <a:pPr marL="0" lvl="0" indent="0" algn="l" rtl="0">
-              <a:spcBef>
-                <a:spcPts val="0"/>
-              </a:spcBef>
-              <a:spcAft>
-                <a:spcPts val="0"/>
-              </a:spcAft>
-              <a:buNone/>
-            </a:pPr>
-            <a:endParaRPr/>
-          </a:p>
-        </p:txBody>
-      </p:sp>
-      <p:sp>
-        <p:nvSpPr>
-          <p:cNvPr id="8" name="Google Shape;741;p54">
-            <a:extLst>
-              <a:ext uri="{FF2B5EF4-FFF2-40B4-BE49-F238E27FC236}">
-                <a16:creationId xmlns:a16="http://schemas.microsoft.com/office/drawing/2014/main" id="{63C354AE-1F67-0CA3-0632-73EB24BDD573}"/>
-              </a:ext>
-            </a:extLst>
-          </p:cNvPr>
-          <p:cNvSpPr/>
-          <p:nvPr/>
-        </p:nvSpPr>
-        <p:spPr>
-          <a:xfrm>
-            <a:off x="8442063" y="3786444"/>
-            <a:ext cx="617053" cy="470200"/>
-          </a:xfrm>
-          <a:custGeom>
-            <a:avLst/>
-            <a:gdLst/>
-            <a:ahLst/>
-            <a:cxnLst/>
-            <a:rect l="l" t="t" r="r" b="b"/>
-            <a:pathLst>
-              <a:path w="1580" h="1352" extrusionOk="0">
-                <a:moveTo>
-                  <a:pt x="891" y="1"/>
-                </a:moveTo>
-                <a:cubicBezTo>
-                  <a:pt x="859" y="1"/>
-                  <a:pt x="828" y="12"/>
-                  <a:pt x="801" y="32"/>
-                </a:cubicBezTo>
-                <a:cubicBezTo>
-                  <a:pt x="743" y="89"/>
-                  <a:pt x="743" y="176"/>
-                  <a:pt x="801" y="226"/>
-                </a:cubicBezTo>
-                <a:lnTo>
-                  <a:pt x="1039" y="472"/>
-                </a:lnTo>
-                <a:cubicBezTo>
-                  <a:pt x="1068" y="493"/>
-                  <a:pt x="1046" y="544"/>
-                  <a:pt x="1010" y="544"/>
-                </a:cubicBezTo>
-                <a:lnTo>
-                  <a:pt x="152" y="544"/>
-                </a:lnTo>
-                <a:cubicBezTo>
-                  <a:pt x="147" y="543"/>
-                  <a:pt x="143" y="543"/>
-                  <a:pt x="139" y="543"/>
-                </a:cubicBezTo>
-                <a:cubicBezTo>
-                  <a:pt x="66" y="543"/>
-                  <a:pt x="14" y="598"/>
-                  <a:pt x="8" y="666"/>
-                </a:cubicBezTo>
-                <a:cubicBezTo>
-                  <a:pt x="0" y="746"/>
-                  <a:pt x="65" y="811"/>
-                  <a:pt x="145" y="811"/>
-                </a:cubicBezTo>
-                <a:lnTo>
-                  <a:pt x="1010" y="811"/>
-                </a:lnTo>
-                <a:cubicBezTo>
-                  <a:pt x="1046" y="811"/>
-                  <a:pt x="1068" y="854"/>
-                  <a:pt x="1039" y="883"/>
-                </a:cubicBezTo>
-                <a:lnTo>
-                  <a:pt x="808" y="1113"/>
-                </a:lnTo>
-                <a:cubicBezTo>
-                  <a:pt x="758" y="1164"/>
-                  <a:pt x="751" y="1251"/>
-                  <a:pt x="794" y="1308"/>
-                </a:cubicBezTo>
-                <a:cubicBezTo>
-                  <a:pt x="823" y="1337"/>
-                  <a:pt x="859" y="1351"/>
-                  <a:pt x="895" y="1351"/>
-                </a:cubicBezTo>
-                <a:cubicBezTo>
-                  <a:pt x="931" y="1351"/>
-                  <a:pt x="967" y="1337"/>
-                  <a:pt x="996" y="1308"/>
-                </a:cubicBezTo>
-                <a:lnTo>
-                  <a:pt x="1522" y="774"/>
-                </a:lnTo>
-                <a:cubicBezTo>
-                  <a:pt x="1580" y="717"/>
-                  <a:pt x="1573" y="630"/>
-                  <a:pt x="1522" y="573"/>
-                </a:cubicBezTo>
-                <a:lnTo>
-                  <a:pt x="996" y="46"/>
-                </a:lnTo>
-                <a:cubicBezTo>
-                  <a:pt x="965" y="15"/>
-                  <a:pt x="928" y="1"/>
-                  <a:pt x="891" y="1"/>
-                </a:cubicBezTo>
-                <a:close/>
-              </a:path>
-            </a:pathLst>
-          </a:custGeom>
-          <a:solidFill>
-            <a:schemeClr val="bg1">
-              <a:lumMod val="85000"/>
-            </a:schemeClr>
-          </a:solidFill>
-          <a:ln>
-            <a:noFill/>
-          </a:ln>
-        </p:spPr>
-        <p:txBody>
-          <a:bodyPr spcFirstLastPara="1" wrap="square" lIns="91425" tIns="91425" rIns="91425" bIns="91425" anchor="ctr" anchorCtr="0">
-            <a:noAutofit/>
-          </a:bodyPr>
-          <a:lstStyle/>
-          <a:p>
-            <a:pPr marL="0" lvl="0" indent="0" algn="l" rtl="0">
-              <a:spcBef>
-                <a:spcPts val="0"/>
-              </a:spcBef>
-              <a:spcAft>
-                <a:spcPts val="0"/>
-              </a:spcAft>
-              <a:buNone/>
-            </a:pPr>
-            <a:endParaRPr/>
-          </a:p>
-        </p:txBody>
-      </p:sp>
-      <p:sp>
-        <p:nvSpPr>
-          <p:cNvPr id="10" name="TextBox 9">
-            <a:extLst>
-              <a:ext uri="{FF2B5EF4-FFF2-40B4-BE49-F238E27FC236}">
-                <a16:creationId xmlns:a16="http://schemas.microsoft.com/office/drawing/2014/main" id="{0A597BE1-FC5D-7442-24C2-FDEAEC49F58A}"/>
-              </a:ext>
-            </a:extLst>
-          </p:cNvPr>
-          <p:cNvSpPr txBox="1"/>
-          <p:nvPr/>
-        </p:nvSpPr>
-        <p:spPr>
-          <a:xfrm>
-            <a:off x="9389367" y="2923235"/>
-            <a:ext cx="2172253" cy="2308324"/>
-          </a:xfrm>
-          <a:prstGeom prst="rect">
-            <a:avLst/>
-          </a:prstGeom>
-          <a:noFill/>
-        </p:spPr>
-        <p:txBody>
-          <a:bodyPr wrap="square" rtlCol="0">
-            <a:spAutoFit/>
-          </a:bodyPr>
-          <a:lstStyle/>
-          <a:p>
-            <a:r>
-              <a:rPr lang="en-GB" dirty="0"/>
-              <a:t>Wettercode_0</a:t>
-            </a:r>
-          </a:p>
-          <a:p>
-            <a:r>
-              <a:rPr lang="en-GB" dirty="0"/>
-              <a:t>Wettercode_5</a:t>
-            </a:r>
-          </a:p>
-          <a:p>
-            <a:r>
-              <a:rPr lang="en-GB" dirty="0"/>
-              <a:t>Wettercode_10</a:t>
-            </a:r>
-          </a:p>
-          <a:p>
-            <a:r>
-              <a:rPr lang="en-GB" dirty="0"/>
-              <a:t>Wettercode_21</a:t>
-            </a:r>
-          </a:p>
-          <a:p>
-            <a:r>
-              <a:rPr lang="en-GB" dirty="0"/>
-              <a:t>Wettercode_61</a:t>
-            </a:r>
-          </a:p>
-          <a:p>
-            <a:r>
-              <a:rPr lang="en-GB" dirty="0"/>
-              <a:t>Wettercode_63</a:t>
-            </a:r>
-          </a:p>
-          <a:p>
-            <a:r>
-              <a:rPr lang="en-GB" dirty="0" err="1"/>
-              <a:t>Wettercode_NAN</a:t>
-            </a:r>
-            <a:endParaRPr lang="en-GB" dirty="0"/>
-          </a:p>
-          <a:p>
-            <a:r>
-              <a:rPr lang="en-GB" dirty="0" err="1"/>
-              <a:t>Wettercode_REST</a:t>
-            </a:r>
-            <a:endParaRPr lang="en-GB" dirty="0"/>
-          </a:p>
-        </p:txBody>
-      </p:sp>
-      <p:sp>
-        <p:nvSpPr>
-          <p:cNvPr id="6" name="Title 5">
-            <a:extLst>
-              <a:ext uri="{FF2B5EF4-FFF2-40B4-BE49-F238E27FC236}">
-                <a16:creationId xmlns:a16="http://schemas.microsoft.com/office/drawing/2014/main" id="{2DB7B1AB-58C3-1E8F-8D9F-A984EC8EE9F4}"/>
-              </a:ext>
-            </a:extLst>
-          </p:cNvPr>
-          <p:cNvSpPr>
-            <a:spLocks noGrp="1"/>
-          </p:cNvSpPr>
-          <p:nvPr>
-            <p:ph type="title"/>
-          </p:nvPr>
-        </p:nvSpPr>
-        <p:spPr>
-          <a:xfrm>
-            <a:off x="229515" y="136525"/>
-            <a:ext cx="10515600" cy="1325563"/>
-          </a:xfrm>
-        </p:spPr>
-        <p:txBody>
-          <a:bodyPr>
-            <a:normAutofit/>
-          </a:bodyPr>
-          <a:lstStyle/>
-          <a:p>
-            <a:r>
-              <a:rPr lang="en-US" sz="3600" dirty="0"/>
-              <a:t>Dealing with missing values</a:t>
-            </a:r>
-            <a:endParaRPr lang="en-GB" sz="3600" dirty="0"/>
-          </a:p>
-        </p:txBody>
-      </p:sp>
-      <p:sp>
-        <p:nvSpPr>
-          <p:cNvPr id="44" name="TextBox 43">
-            <a:extLst>
-              <a:ext uri="{FF2B5EF4-FFF2-40B4-BE49-F238E27FC236}">
-                <a16:creationId xmlns:a16="http://schemas.microsoft.com/office/drawing/2014/main" id="{83FC25D8-D11B-A7CE-BD9D-6C8275F0289E}"/>
-              </a:ext>
-            </a:extLst>
-          </p:cNvPr>
-          <p:cNvSpPr txBox="1"/>
-          <p:nvPr/>
-        </p:nvSpPr>
-        <p:spPr>
-          <a:xfrm>
-            <a:off x="4740681" y="1948859"/>
-            <a:ext cx="3057627" cy="400110"/>
-          </a:xfrm>
-          <a:prstGeom prst="rect">
-            <a:avLst/>
-          </a:prstGeom>
-          <a:noFill/>
-        </p:spPr>
-        <p:txBody>
-          <a:bodyPr wrap="square" rtlCol="0">
-            <a:spAutoFit/>
-          </a:bodyPr>
-          <a:lstStyle/>
-          <a:p>
-            <a:r>
-              <a:rPr lang="en-US" sz="2000" dirty="0"/>
-              <a:t>Weather code distribution</a:t>
-            </a:r>
-            <a:endParaRPr lang="en-GB" sz="2000" dirty="0"/>
-          </a:p>
-        </p:txBody>
-      </p:sp>
-      <p:sp>
-        <p:nvSpPr>
-          <p:cNvPr id="45" name="TextBox 44">
-            <a:extLst>
-              <a:ext uri="{FF2B5EF4-FFF2-40B4-BE49-F238E27FC236}">
-                <a16:creationId xmlns:a16="http://schemas.microsoft.com/office/drawing/2014/main" id="{2305B253-4052-6ABC-53FA-6AF69E3CDA79}"/>
-              </a:ext>
-            </a:extLst>
-          </p:cNvPr>
-          <p:cNvSpPr txBox="1"/>
-          <p:nvPr/>
-        </p:nvSpPr>
-        <p:spPr>
-          <a:xfrm>
-            <a:off x="9134373" y="1948859"/>
-            <a:ext cx="3057627" cy="400110"/>
-          </a:xfrm>
-          <a:prstGeom prst="rect">
-            <a:avLst/>
-          </a:prstGeom>
-          <a:noFill/>
-        </p:spPr>
-        <p:txBody>
-          <a:bodyPr wrap="square" rtlCol="0">
-            <a:spAutoFit/>
-          </a:bodyPr>
-          <a:lstStyle/>
-          <a:p>
-            <a:r>
-              <a:rPr lang="en-US" sz="2000" dirty="0"/>
-              <a:t>One-Hot Encoding</a:t>
-            </a:r>
-            <a:endParaRPr lang="en-GB" sz="2000" dirty="0"/>
-          </a:p>
-        </p:txBody>
-      </p:sp>
-      <p:sp>
-        <p:nvSpPr>
-          <p:cNvPr id="5" name="TextBox 4">
-            <a:extLst>
-              <a:ext uri="{FF2B5EF4-FFF2-40B4-BE49-F238E27FC236}">
-                <a16:creationId xmlns:a16="http://schemas.microsoft.com/office/drawing/2014/main" id="{82C1BC01-A05E-750F-C2DE-497CA9583F5D}"/>
-              </a:ext>
-            </a:extLst>
-          </p:cNvPr>
-          <p:cNvSpPr txBox="1"/>
-          <p:nvPr/>
-        </p:nvSpPr>
-        <p:spPr>
-          <a:xfrm>
-            <a:off x="3778474" y="6538912"/>
-            <a:ext cx="4440062" cy="276999"/>
-          </a:xfrm>
-          <a:prstGeom prst="rect">
-            <a:avLst/>
-          </a:prstGeom>
-          <a:noFill/>
-        </p:spPr>
-        <p:txBody>
-          <a:bodyPr wrap="none" rtlCol="0">
-            <a:spAutoFit/>
-          </a:bodyPr>
-          <a:lstStyle/>
-          <a:p>
-            <a:r>
-              <a:rPr lang="en-GB" sz="1200" b="1" dirty="0">
-                <a:latin typeface="Calibri" panose="020F0502020204030204" pitchFamily="34" charset="0"/>
-                <a:cs typeface="Calibri" panose="020F0502020204030204" pitchFamily="34" charset="0"/>
-              </a:rPr>
-              <a:t>Dataset Characteristics </a:t>
-            </a:r>
-            <a:r>
-              <a:rPr lang="en-GB" sz="1200" dirty="0">
-                <a:solidFill>
-                  <a:schemeClr val="bg1">
-                    <a:lumMod val="75000"/>
-                  </a:schemeClr>
-                </a:solidFill>
-                <a:latin typeface="Calibri" panose="020F0502020204030204" pitchFamily="34" charset="0"/>
-                <a:ea typeface="Calibri" panose="020F0502020204030204" pitchFamily="34" charset="0"/>
-                <a:cs typeface="Calibri" panose="020F0502020204030204" pitchFamily="34" charset="0"/>
-              </a:rPr>
-              <a:t>– Baseline Model </a:t>
-            </a:r>
-            <a:r>
-              <a:rPr lang="en-GB" sz="1200" dirty="0">
-                <a:solidFill>
-                  <a:schemeClr val="bg1">
-                    <a:lumMod val="75000"/>
-                  </a:schemeClr>
-                </a:solidFill>
-                <a:latin typeface="Calibri" panose="020F0502020204030204" pitchFamily="34" charset="0"/>
-                <a:cs typeface="Calibri" panose="020F0502020204030204" pitchFamily="34" charset="0"/>
-              </a:rPr>
-              <a:t>– Neural Net </a:t>
-            </a:r>
-            <a:r>
-              <a:rPr lang="en-GB" sz="1200" dirty="0">
-                <a:solidFill>
-                  <a:schemeClr val="bg1">
-                    <a:lumMod val="75000"/>
-                  </a:schemeClr>
-                </a:solidFill>
-                <a:latin typeface="Calibri" panose="020F0502020204030204" pitchFamily="34" charset="0"/>
-                <a:ea typeface="Calibri" panose="020F0502020204030204" pitchFamily="34" charset="0"/>
-                <a:cs typeface="Calibri" panose="020F0502020204030204" pitchFamily="34" charset="0"/>
-              </a:rPr>
-              <a:t>– Challenges </a:t>
-            </a:r>
-            <a:endParaRPr lang="de-DE" sz="1200" dirty="0">
-              <a:solidFill>
-                <a:schemeClr val="bg1">
-                  <a:lumMod val="75000"/>
-                </a:schemeClr>
-              </a:solidFill>
-            </a:endParaRPr>
-          </a:p>
-        </p:txBody>
-      </p:sp>
-    </p:spTree>
-    <p:extLst>
-      <p:ext uri="{BB962C8B-B14F-4D97-AF65-F5344CB8AC3E}">
-        <p14:creationId xmlns:p14="http://schemas.microsoft.com/office/powerpoint/2010/main" val="1228581449"/>
-      </p:ext>
-    </p:extLst>
-  </p:cSld>
-  <p:clrMapOvr>
-    <a:masterClrMapping/>
-  </p:clrMapOvr>
-  <p:timing>
-    <p:tnLst>
-      <p:par>
-        <p:cTn id="1" dur="indefinite" restart="never" nodeType="tmRoot">
-          <p:childTnLst>
-            <p:seq concurrent="1" nextAc="seek">
-              <p:cTn id="2" dur="indefinite" nodeType="mainSeq">
-                <p:childTnLst>
-                  <p:par>
-                    <p:cTn id="3" fill="hold">
-                      <p:stCondLst>
-                        <p:cond delay="indefinite"/>
-                      </p:stCondLst>
-                      <p:childTnLst>
-                        <p:par>
-                          <p:cTn id="4" fill="hold">
-                            <p:stCondLst>
-                              <p:cond delay="0"/>
-                            </p:stCondLst>
-                            <p:childTnLst>
-                              <p:par>
-                                <p:cTn id="5" presetID="10" presetClass="entr" presetSubtype="0" fill="hold" grpId="0" nodeType="clickEffect">
-                                  <p:stCondLst>
-                                    <p:cond delay="0"/>
-                                  </p:stCondLst>
-                                  <p:childTnLst>
-                                    <p:set>
-                                      <p:cBhvr>
-                                        <p:cTn id="6" dur="1" fill="hold">
-                                          <p:stCondLst>
-                                            <p:cond delay="0"/>
-                                          </p:stCondLst>
-                                        </p:cTn>
-                                        <p:tgtEl>
-                                          <p:spTgt spid="7"/>
-                                        </p:tgtEl>
-                                        <p:attrNameLst>
-                                          <p:attrName>style.visibility</p:attrName>
-                                        </p:attrNameLst>
-                                      </p:cBhvr>
-                                      <p:to>
-                                        <p:strVal val="visible"/>
-                                      </p:to>
-                                    </p:set>
-                                    <p:animEffect transition="in" filter="fade">
-                                      <p:cBhvr>
-                                        <p:cTn id="7" dur="500"/>
-                                        <p:tgtEl>
-                                          <p:spTgt spid="7"/>
-                                        </p:tgtEl>
-                                      </p:cBhvr>
-                                    </p:animEffect>
-                                  </p:childTnLst>
-                                </p:cTn>
-                              </p:par>
-                              <p:par>
-                                <p:cTn id="8" presetID="10" presetClass="entr" presetSubtype="0" fill="hold" nodeType="withEffect">
-                                  <p:stCondLst>
-                                    <p:cond delay="0"/>
-                                  </p:stCondLst>
-                                  <p:childTnLst>
-                                    <p:set>
-                                      <p:cBhvr>
-                                        <p:cTn id="9" dur="1" fill="hold">
-                                          <p:stCondLst>
-                                            <p:cond delay="0"/>
-                                          </p:stCondLst>
-                                        </p:cTn>
-                                        <p:tgtEl>
-                                          <p:spTgt spid="4"/>
-                                        </p:tgtEl>
-                                        <p:attrNameLst>
-                                          <p:attrName>style.visibility</p:attrName>
-                                        </p:attrNameLst>
-                                      </p:cBhvr>
-                                      <p:to>
-                                        <p:strVal val="visible"/>
-                                      </p:to>
-                                    </p:set>
-                                    <p:animEffect transition="in" filter="fade">
-                                      <p:cBhvr>
-                                        <p:cTn id="10" dur="500"/>
-                                        <p:tgtEl>
-                                          <p:spTgt spid="4"/>
-                                        </p:tgtEl>
-                                      </p:cBhvr>
-                                    </p:animEffect>
-                                  </p:childTnLst>
-                                </p:cTn>
-                              </p:par>
-                              <p:par>
-                                <p:cTn id="11" presetID="10" presetClass="entr" presetSubtype="0" fill="hold" grpId="0" nodeType="withEffect">
-                                  <p:stCondLst>
-                                    <p:cond delay="0"/>
-                                  </p:stCondLst>
-                                  <p:childTnLst>
-                                    <p:set>
-                                      <p:cBhvr>
-                                        <p:cTn id="12" dur="1" fill="hold">
-                                          <p:stCondLst>
-                                            <p:cond delay="0"/>
-                                          </p:stCondLst>
-                                        </p:cTn>
-                                        <p:tgtEl>
-                                          <p:spTgt spid="44"/>
-                                        </p:tgtEl>
-                                        <p:attrNameLst>
-                                          <p:attrName>style.visibility</p:attrName>
-                                        </p:attrNameLst>
-                                      </p:cBhvr>
-                                      <p:to>
-                                        <p:strVal val="visible"/>
-                                      </p:to>
-                                    </p:set>
-                                    <p:animEffect transition="in" filter="fade">
-                                      <p:cBhvr>
-                                        <p:cTn id="13" dur="500"/>
-                                        <p:tgtEl>
-                                          <p:spTgt spid="44"/>
-                                        </p:tgtEl>
-                                      </p:cBhvr>
-                                    </p:animEffect>
-                                  </p:childTnLst>
-                                </p:cTn>
-                              </p:par>
-                            </p:childTnLst>
-                          </p:cTn>
-                        </p:par>
-                      </p:childTnLst>
-                    </p:cTn>
-                  </p:par>
-                  <p:par>
-                    <p:cTn id="14" fill="hold">
-                      <p:stCondLst>
-                        <p:cond delay="indefinite"/>
-                      </p:stCondLst>
-                      <p:childTnLst>
-                        <p:par>
-                          <p:cTn id="15" fill="hold">
-                            <p:stCondLst>
-                              <p:cond delay="0"/>
-                            </p:stCondLst>
-                            <p:childTnLst>
-                              <p:par>
-                                <p:cTn id="16" presetID="10" presetClass="entr" presetSubtype="0" fill="hold" grpId="0" nodeType="clickEffect">
-                                  <p:stCondLst>
-                                    <p:cond delay="0"/>
-                                  </p:stCondLst>
-                                  <p:childTnLst>
-                                    <p:set>
-                                      <p:cBhvr>
-                                        <p:cTn id="17" dur="1" fill="hold">
-                                          <p:stCondLst>
-                                            <p:cond delay="0"/>
-                                          </p:stCondLst>
-                                        </p:cTn>
-                                        <p:tgtEl>
-                                          <p:spTgt spid="8"/>
-                                        </p:tgtEl>
-                                        <p:attrNameLst>
-                                          <p:attrName>style.visibility</p:attrName>
-                                        </p:attrNameLst>
-                                      </p:cBhvr>
-                                      <p:to>
-                                        <p:strVal val="visible"/>
-                                      </p:to>
-                                    </p:set>
-                                    <p:animEffect transition="in" filter="fade">
-                                      <p:cBhvr>
-                                        <p:cTn id="18" dur="500"/>
-                                        <p:tgtEl>
-                                          <p:spTgt spid="8"/>
-                                        </p:tgtEl>
-                                      </p:cBhvr>
-                                    </p:animEffect>
-                                  </p:childTnLst>
-                                </p:cTn>
-                              </p:par>
-                              <p:par>
-                                <p:cTn id="19" presetID="10" presetClass="entr" presetSubtype="0" fill="hold" grpId="0" nodeType="withEffect">
-                                  <p:stCondLst>
-                                    <p:cond delay="0"/>
-                                  </p:stCondLst>
-                                  <p:childTnLst>
-                                    <p:set>
-                                      <p:cBhvr>
-                                        <p:cTn id="20" dur="1" fill="hold">
-                                          <p:stCondLst>
-                                            <p:cond delay="0"/>
-                                          </p:stCondLst>
-                                        </p:cTn>
-                                        <p:tgtEl>
-                                          <p:spTgt spid="10"/>
-                                        </p:tgtEl>
-                                        <p:attrNameLst>
-                                          <p:attrName>style.visibility</p:attrName>
-                                        </p:attrNameLst>
-                                      </p:cBhvr>
-                                      <p:to>
-                                        <p:strVal val="visible"/>
-                                      </p:to>
-                                    </p:set>
-                                    <p:animEffect transition="in" filter="fade">
-                                      <p:cBhvr>
-                                        <p:cTn id="21" dur="500"/>
-                                        <p:tgtEl>
-                                          <p:spTgt spid="10"/>
-                                        </p:tgtEl>
-                                      </p:cBhvr>
-                                    </p:animEffect>
-                                  </p:childTnLst>
-                                </p:cTn>
-                              </p:par>
-                              <p:par>
-                                <p:cTn id="22" presetID="10" presetClass="entr" presetSubtype="0" fill="hold" grpId="0" nodeType="withEffect">
-                                  <p:stCondLst>
-                                    <p:cond delay="0"/>
-                                  </p:stCondLst>
-                                  <p:childTnLst>
-                                    <p:set>
-                                      <p:cBhvr>
-                                        <p:cTn id="23" dur="1" fill="hold">
-                                          <p:stCondLst>
-                                            <p:cond delay="0"/>
-                                          </p:stCondLst>
-                                        </p:cTn>
-                                        <p:tgtEl>
-                                          <p:spTgt spid="45"/>
-                                        </p:tgtEl>
-                                        <p:attrNameLst>
-                                          <p:attrName>style.visibility</p:attrName>
-                                        </p:attrNameLst>
-                                      </p:cBhvr>
-                                      <p:to>
-                                        <p:strVal val="visible"/>
-                                      </p:to>
-                                    </p:set>
-                                    <p:animEffect transition="in" filter="fade">
-                                      <p:cBhvr>
-                                        <p:cTn id="24" dur="500"/>
-                                        <p:tgtEl>
-                                          <p:spTgt spid="45"/>
-                                        </p:tgtEl>
-                                      </p:cBhvr>
-                                    </p:animEffect>
-                                  </p:childTnLst>
-                                </p:cTn>
-                              </p:par>
-                            </p:childTnLst>
-                          </p:cTn>
-                        </p:par>
-                      </p:childTnLst>
-                    </p:cTn>
-                  </p:par>
-                </p:childTnLst>
-              </p:cTn>
-              <p:prevCondLst>
-                <p:cond evt="onPrev" delay="0">
-                  <p:tgtEl>
-                    <p:sldTgt/>
-                  </p:tgtEl>
-                </p:cond>
-              </p:prevCondLst>
-              <p:nextCondLst>
-                <p:cond evt="onNext" delay="0">
-                  <p:tgtEl>
-                    <p:sldTgt/>
-                  </p:tgtEl>
-                </p:cond>
-              </p:nextCondLst>
-            </p:seq>
-          </p:childTnLst>
-        </p:cTn>
-      </p:par>
-    </p:tnLst>
-    <p:bldLst>
-      <p:bldP spid="7" grpId="0" animBg="1"/>
-      <p:bldP spid="8" grpId="0" animBg="1"/>
-      <p:bldP spid="10" grpId="0"/>
-      <p:bldP spid="44" grpId="0"/>
-      <p:bldP spid="45" grpId="0"/>
-    </p:bldLst>
-  </p:timing>
-</p:sld>
-</file>
-
-<file path=ppt/slides/slide11.xml><?xml version="1.0" encoding="utf-8"?>
-<p:sld xmlns:a="http://schemas.openxmlformats.org/drawingml/2006/main" xmlns:r="http://schemas.openxmlformats.org/officeDocument/2006/relationships" xmlns:p="http://schemas.openxmlformats.org/presentationml/2006/main">
-  <p:cSld>
-    <p:spTree>
-      <p:nvGrpSpPr>
-        <p:cNvPr id="1" name="">
-          <a:extLst>
-            <a:ext uri="{FF2B5EF4-FFF2-40B4-BE49-F238E27FC236}">
               <a16:creationId xmlns:a16="http://schemas.microsoft.com/office/drawing/2014/main" id="{DB45A4B5-0372-3F67-AC94-F9B608C8F329}"/>
             </a:ext>
           </a:extLst>
@@ -16263,7 +15070,7 @@
           <a:p>
             <a:fld id="{FEE63D0E-FFEF-43D1-BE35-64C33AF422FD}" type="slidenum">
               <a:rPr lang="de-DE" smtClean="0"/>
-              <a:t>11</a:t>
+              <a:t>10</a:t>
             </a:fld>
             <a:endParaRPr lang="de-DE"/>
           </a:p>
@@ -16688,7 +15495,7 @@
 </p:sld>
 </file>
 
-<file path=ppt/slides/slide12.xml><?xml version="1.0" encoding="utf-8"?>
+<file path=ppt/slides/slide11.xml><?xml version="1.0" encoding="utf-8"?>
 <p:sld xmlns:a="http://schemas.openxmlformats.org/drawingml/2006/main" xmlns:r="http://schemas.openxmlformats.org/officeDocument/2006/relationships" xmlns:p="http://schemas.openxmlformats.org/presentationml/2006/main">
   <p:cSld>
     <p:spTree>
@@ -16811,7 +15618,7 @@
           <a:p>
             <a:fld id="{FEE63D0E-FFEF-43D1-BE35-64C33AF422FD}" type="slidenum">
               <a:rPr lang="de-DE" smtClean="0"/>
-              <a:t>12</a:t>
+              <a:t>11</a:t>
             </a:fld>
             <a:endParaRPr lang="de-DE"/>
           </a:p>
@@ -17164,7 +15971,7 @@
 </p:sld>
 </file>
 
-<file path=ppt/slides/slide13.xml><?xml version="1.0" encoding="utf-8"?>
+<file path=ppt/slides/slide12.xml><?xml version="1.0" encoding="utf-8"?>
 <p:sld xmlns:a="http://schemas.openxmlformats.org/drawingml/2006/main" xmlns:r="http://schemas.openxmlformats.org/officeDocument/2006/relationships" xmlns:p="http://schemas.openxmlformats.org/presentationml/2006/main">
   <p:cSld>
     <p:spTree>
@@ -17239,7 +16046,7 @@
           <a:p>
             <a:fld id="{FEE63D0E-FFEF-43D1-BE35-64C33AF422FD}" type="slidenum">
               <a:rPr lang="de-DE" smtClean="0"/>
-              <a:t>13</a:t>
+              <a:t>12</a:t>
             </a:fld>
             <a:endParaRPr lang="de-DE" dirty="0"/>
           </a:p>
@@ -17584,7 +16391,7 @@
         </p:blipFill>
         <p:spPr>
           <a:xfrm>
-            <a:off x="3440890" y="1723690"/>
+            <a:off x="3334013" y="2699700"/>
             <a:ext cx="7744906" cy="2391109"/>
           </a:xfrm>
           <a:prstGeom prst="rect">
@@ -17592,12 +16399,219 @@
           </a:prstGeom>
         </p:spPr>
       </p:pic>
+    </p:spTree>
+    <p:extLst>
+      <p:ext uri="{BB962C8B-B14F-4D97-AF65-F5344CB8AC3E}">
+        <p14:creationId xmlns:p14="http://schemas.microsoft.com/office/powerpoint/2010/main" val="1505701908"/>
+      </p:ext>
+    </p:extLst>
+  </p:cSld>
+  <p:clrMapOvr>
+    <a:masterClrMapping/>
+  </p:clrMapOvr>
+</p:sld>
+</file>
+
+<file path=ppt/slides/slide13.xml><?xml version="1.0" encoding="utf-8"?>
+<p:sld xmlns:a="http://schemas.openxmlformats.org/drawingml/2006/main" xmlns:r="http://schemas.openxmlformats.org/officeDocument/2006/relationships" xmlns:p="http://schemas.openxmlformats.org/presentationml/2006/main">
+  <p:cSld>
+    <p:spTree>
+      <p:nvGrpSpPr>
+        <p:cNvPr id="1" name="">
+          <a:extLst>
+            <a:ext uri="{FF2B5EF4-FFF2-40B4-BE49-F238E27FC236}">
+              <a16:creationId xmlns:a16="http://schemas.microsoft.com/office/drawing/2014/main" id="{67704798-6F91-C626-3D41-B8A07C5AA5B6}"/>
+            </a:ext>
+          </a:extLst>
+        </p:cNvPr>
+        <p:cNvGrpSpPr/>
+        <p:nvPr/>
+      </p:nvGrpSpPr>
+      <p:grpSpPr>
+        <a:xfrm>
+          <a:off x="0" y="0"/>
+          <a:ext cx="0" cy="0"/>
+          <a:chOff x="0" y="0"/>
+          <a:chExt cx="0" cy="0"/>
+        </a:xfrm>
+      </p:grpSpPr>
       <p:sp>
         <p:nvSpPr>
-          <p:cNvPr id="9" name="TextBox 8">
+          <p:cNvPr id="3" name="Title 2">
             <a:extLst>
               <a:ext uri="{FF2B5EF4-FFF2-40B4-BE49-F238E27FC236}">
-                <a16:creationId xmlns:a16="http://schemas.microsoft.com/office/drawing/2014/main" id="{54A500CD-B940-4014-0654-38E3571E8465}"/>
+                <a16:creationId xmlns:a16="http://schemas.microsoft.com/office/drawing/2014/main" id="{3C690BF5-2E27-00EC-E2A3-1D35CB1B873E}"/>
+              </a:ext>
+            </a:extLst>
+          </p:cNvPr>
+          <p:cNvSpPr>
+            <a:spLocks noGrp="1"/>
+          </p:cNvSpPr>
+          <p:nvPr>
+            <p:ph type="title"/>
+          </p:nvPr>
+        </p:nvSpPr>
+        <p:spPr/>
+        <p:txBody>
+          <a:bodyPr/>
+          <a:lstStyle/>
+          <a:p>
+            <a:r>
+              <a:rPr lang="en-US" dirty="0"/>
+              <a:t>Neural Network</a:t>
+            </a:r>
+            <a:endParaRPr lang="en-GB" dirty="0"/>
+          </a:p>
+        </p:txBody>
+      </p:sp>
+      <p:sp>
+        <p:nvSpPr>
+          <p:cNvPr id="2" name="Slide Number Placeholder 1">
+            <a:extLst>
+              <a:ext uri="{FF2B5EF4-FFF2-40B4-BE49-F238E27FC236}">
+                <a16:creationId xmlns:a16="http://schemas.microsoft.com/office/drawing/2014/main" id="{4126D018-6B91-C180-2095-7D1AA029E48A}"/>
+              </a:ext>
+            </a:extLst>
+          </p:cNvPr>
+          <p:cNvSpPr>
+            <a:spLocks noGrp="1"/>
+          </p:cNvSpPr>
+          <p:nvPr>
+            <p:ph type="sldNum" sz="quarter" idx="12"/>
+          </p:nvPr>
+        </p:nvSpPr>
+        <p:spPr/>
+        <p:txBody>
+          <a:bodyPr/>
+          <a:lstStyle/>
+          <a:p>
+            <a:fld id="{FEE63D0E-FFEF-43D1-BE35-64C33AF422FD}" type="slidenum">
+              <a:rPr lang="de-DE" smtClean="0"/>
+              <a:t>13</a:t>
+            </a:fld>
+            <a:endParaRPr lang="de-DE" dirty="0"/>
+          </a:p>
+        </p:txBody>
+      </p:sp>
+      <p:sp>
+        <p:nvSpPr>
+          <p:cNvPr id="35" name="Rectangle 34">
+            <a:extLst>
+              <a:ext uri="{FF2B5EF4-FFF2-40B4-BE49-F238E27FC236}">
+                <a16:creationId xmlns:a16="http://schemas.microsoft.com/office/drawing/2014/main" id="{9EE30DCB-8A18-10B6-C326-B639AEA071B8}"/>
+              </a:ext>
+            </a:extLst>
+          </p:cNvPr>
+          <p:cNvSpPr/>
+          <p:nvPr/>
+        </p:nvSpPr>
+        <p:spPr>
+          <a:xfrm>
+            <a:off x="196375" y="2953463"/>
+            <a:ext cx="2060293" cy="2949496"/>
+          </a:xfrm>
+          <a:prstGeom prst="rect">
+            <a:avLst/>
+          </a:prstGeom>
+          <a:noFill/>
+          <a:ln>
+            <a:noFill/>
+          </a:ln>
+        </p:spPr>
+        <p:style>
+          <a:lnRef idx="0">
+            <a:scrgbClr r="0" g="0" b="0"/>
+          </a:lnRef>
+          <a:fillRef idx="0">
+            <a:scrgbClr r="0" g="0" b="0"/>
+          </a:fillRef>
+          <a:effectRef idx="0">
+            <a:scrgbClr r="0" g="0" b="0"/>
+          </a:effectRef>
+          <a:fontRef idx="minor">
+            <a:schemeClr val="dk1"/>
+          </a:fontRef>
+        </p:style>
+        <p:txBody>
+          <a:bodyPr rtlCol="0" anchor="ctr"/>
+          <a:lstStyle/>
+          <a:p>
+            <a:pPr algn="ctr">
+              <a:lnSpc>
+                <a:spcPct val="150000"/>
+              </a:lnSpc>
+            </a:pPr>
+            <a:r>
+              <a:rPr lang="en-GB" dirty="0"/>
+              <a:t>Temperature</a:t>
+            </a:r>
+          </a:p>
+          <a:p>
+            <a:pPr algn="ctr">
+              <a:lnSpc>
+                <a:spcPct val="150000"/>
+              </a:lnSpc>
+            </a:pPr>
+            <a:r>
+              <a:rPr lang="en-GB" dirty="0"/>
+              <a:t>School Holidays</a:t>
+            </a:r>
+          </a:p>
+          <a:p>
+            <a:pPr algn="ctr">
+              <a:lnSpc>
+                <a:spcPct val="150000"/>
+              </a:lnSpc>
+            </a:pPr>
+            <a:r>
+              <a:rPr lang="en-GB" dirty="0"/>
+              <a:t>Day of the Week</a:t>
+            </a:r>
+          </a:p>
+          <a:p>
+            <a:pPr algn="ctr">
+              <a:lnSpc>
+                <a:spcPct val="150000"/>
+              </a:lnSpc>
+              <a:buNone/>
+            </a:pPr>
+            <a:r>
+              <a:rPr lang="en-GB" dirty="0"/>
+              <a:t>Days till NYE</a:t>
+            </a:r>
+          </a:p>
+          <a:p>
+            <a:pPr algn="ctr">
+              <a:lnSpc>
+                <a:spcPct val="150000"/>
+              </a:lnSpc>
+              <a:buNone/>
+            </a:pPr>
+            <a:r>
+              <a:rPr lang="en-GB" dirty="0"/>
+              <a:t>+</a:t>
+            </a:r>
+          </a:p>
+          <a:p>
+            <a:pPr algn="ctr">
+              <a:lnSpc>
+                <a:spcPct val="150000"/>
+              </a:lnSpc>
+              <a:buNone/>
+            </a:pPr>
+            <a:r>
+              <a:rPr lang="en-GB" dirty="0"/>
+              <a:t>One Hot encoded sales groups</a:t>
+            </a:r>
+          </a:p>
+        </p:txBody>
+      </p:sp>
+      <p:sp>
+        <p:nvSpPr>
+          <p:cNvPr id="37" name="TextBox 36">
+            <a:extLst>
+              <a:ext uri="{FF2B5EF4-FFF2-40B4-BE49-F238E27FC236}">
+                <a16:creationId xmlns:a16="http://schemas.microsoft.com/office/drawing/2014/main" id="{9C0EC071-3A0B-1C12-84A0-08A7453F8F90}"/>
               </a:ext>
             </a:extLst>
           </p:cNvPr>
@@ -17606,8 +16620,8 @@
         </p:nvSpPr>
         <p:spPr>
           <a:xfrm>
-            <a:off x="3988768" y="4382077"/>
-            <a:ext cx="4214462" cy="1889556"/>
+            <a:off x="196374" y="2515034"/>
+            <a:ext cx="2060293" cy="369332"/>
           </a:xfrm>
           <a:prstGeom prst="rect">
             <a:avLst/>
@@ -17620,81 +16634,264 @@
           </a:bodyPr>
           <a:lstStyle/>
           <a:p>
-            <a:pPr>
-              <a:lnSpc>
-                <a:spcPct val="150000"/>
-              </a:lnSpc>
-            </a:pPr>
-            <a:r>
-              <a:rPr lang="en-GB" sz="2000" dirty="0" err="1">
-                <a:latin typeface="Consolas" panose="020B0609020204030204" pitchFamily="49" charset="0"/>
-              </a:rPr>
-              <a:t>learning_rate</a:t>
-            </a:r>
-            <a:r>
-              <a:rPr lang="en-GB" sz="2000" dirty="0">
-                <a:latin typeface="Consolas" panose="020B0609020204030204" pitchFamily="49" charset="0"/>
-              </a:rPr>
-              <a:t>=0.0001</a:t>
-            </a:r>
-          </a:p>
-          <a:p>
-            <a:pPr>
-              <a:lnSpc>
-                <a:spcPct val="150000"/>
-              </a:lnSpc>
-            </a:pPr>
-            <a:r>
-              <a:rPr lang="en-GB" sz="2000" dirty="0" err="1">
-                <a:latin typeface="Consolas" panose="020B0609020204030204" pitchFamily="49" charset="0"/>
-              </a:rPr>
-              <a:t>Batch_Size</a:t>
-            </a:r>
-            <a:r>
-              <a:rPr lang="en-GB" sz="2000" dirty="0">
-                <a:latin typeface="Consolas" panose="020B0609020204030204" pitchFamily="49" charset="0"/>
-              </a:rPr>
-              <a:t> = 32</a:t>
-            </a:r>
-          </a:p>
-          <a:p>
-            <a:pPr>
-              <a:lnSpc>
-                <a:spcPct val="150000"/>
-              </a:lnSpc>
-            </a:pPr>
-            <a:r>
-              <a:rPr lang="en-GB" sz="2000" dirty="0">
-                <a:latin typeface="Consolas" panose="020B0609020204030204" pitchFamily="49" charset="0"/>
-              </a:rPr>
-              <a:t>Epochs = 600</a:t>
-            </a:r>
-          </a:p>
-          <a:p>
-            <a:pPr>
-              <a:lnSpc>
-                <a:spcPct val="150000"/>
-              </a:lnSpc>
-            </a:pPr>
-            <a:r>
-              <a:rPr lang="en-GB" sz="2000" dirty="0">
-                <a:latin typeface="Consolas" panose="020B0609020204030204" pitchFamily="49" charset="0"/>
-              </a:rPr>
-              <a:t>Early stop</a:t>
+            <a:pPr algn="ctr"/>
+            <a:r>
+              <a:rPr lang="en-US" b="1" dirty="0"/>
+              <a:t>Features</a:t>
+            </a:r>
+            <a:r>
+              <a:rPr lang="en-GB" b="1" dirty="0"/>
+              <a:t>:</a:t>
             </a:r>
           </a:p>
         </p:txBody>
       </p:sp>
+      <p:cxnSp>
+        <p:nvCxnSpPr>
+          <p:cNvPr id="39" name="Straight Arrow Connector 38">
+            <a:extLst>
+              <a:ext uri="{FF2B5EF4-FFF2-40B4-BE49-F238E27FC236}">
+                <a16:creationId xmlns:a16="http://schemas.microsoft.com/office/drawing/2014/main" id="{3BB1AA7F-89FD-EED1-E5E4-1086D4B541AF}"/>
+              </a:ext>
+            </a:extLst>
+          </p:cNvPr>
+          <p:cNvCxnSpPr>
+            <a:cxnSpLocks/>
+          </p:cNvCxnSpPr>
+          <p:nvPr/>
+        </p:nvCxnSpPr>
+        <p:spPr>
+          <a:xfrm>
+            <a:off x="2453833" y="3507912"/>
+            <a:ext cx="382601" cy="0"/>
+          </a:xfrm>
+          <a:prstGeom prst="straightConnector1">
+            <a:avLst/>
+          </a:prstGeom>
+          <a:ln>
+            <a:tailEnd type="triangle"/>
+          </a:ln>
+        </p:spPr>
+        <p:style>
+          <a:lnRef idx="2">
+            <a:schemeClr val="accent1"/>
+          </a:lnRef>
+          <a:fillRef idx="0">
+            <a:schemeClr val="accent1"/>
+          </a:fillRef>
+          <a:effectRef idx="1">
+            <a:schemeClr val="accent1"/>
+          </a:effectRef>
+          <a:fontRef idx="minor">
+            <a:schemeClr val="tx1"/>
+          </a:fontRef>
+        </p:style>
+      </p:cxnSp>
+      <p:sp>
+        <p:nvSpPr>
+          <p:cNvPr id="4" name="TextBox 3">
+            <a:extLst>
+              <a:ext uri="{FF2B5EF4-FFF2-40B4-BE49-F238E27FC236}">
+                <a16:creationId xmlns:a16="http://schemas.microsoft.com/office/drawing/2014/main" id="{8A27E7AE-FA91-651E-7757-D13A1E22791B}"/>
+              </a:ext>
+            </a:extLst>
+          </p:cNvPr>
+          <p:cNvSpPr txBox="1"/>
+          <p:nvPr/>
+        </p:nvSpPr>
+        <p:spPr>
+          <a:xfrm>
+            <a:off x="3778474" y="6538912"/>
+            <a:ext cx="4635051" cy="276999"/>
+          </a:xfrm>
+          <a:prstGeom prst="rect">
+            <a:avLst/>
+          </a:prstGeom>
+          <a:noFill/>
+        </p:spPr>
+        <p:txBody>
+          <a:bodyPr wrap="none" rtlCol="0">
+            <a:spAutoFit/>
+          </a:bodyPr>
+          <a:lstStyle/>
+          <a:p>
+            <a:r>
+              <a:rPr lang="en-GB" sz="1200" dirty="0">
+                <a:solidFill>
+                  <a:schemeClr val="bg1">
+                    <a:lumMod val="75000"/>
+                  </a:schemeClr>
+                </a:solidFill>
+              </a:rPr>
+              <a:t>Dataset Characteristics </a:t>
+            </a:r>
+            <a:r>
+              <a:rPr lang="en-GB" sz="1200" dirty="0">
+                <a:solidFill>
+                  <a:schemeClr val="bg1">
+                    <a:lumMod val="75000"/>
+                  </a:schemeClr>
+                </a:solidFill>
+                <a:latin typeface="Calibri" panose="020F0502020204030204" pitchFamily="34" charset="0"/>
+                <a:ea typeface="Calibri" panose="020F0502020204030204" pitchFamily="34" charset="0"/>
+                <a:cs typeface="Calibri" panose="020F0502020204030204" pitchFamily="34" charset="0"/>
+              </a:rPr>
+              <a:t>– Baseline Model – </a:t>
+            </a:r>
+            <a:r>
+              <a:rPr lang="en-GB" sz="1200" b="1" dirty="0">
+                <a:latin typeface="Calibri" panose="020F0502020204030204" pitchFamily="34" charset="0"/>
+                <a:ea typeface="Calibri" panose="020F0502020204030204" pitchFamily="34" charset="0"/>
+                <a:cs typeface="Calibri" panose="020F0502020204030204" pitchFamily="34" charset="0"/>
+              </a:rPr>
+              <a:t>Neural Net </a:t>
+            </a:r>
+            <a:r>
+              <a:rPr lang="en-GB" sz="1200" dirty="0">
+                <a:solidFill>
+                  <a:schemeClr val="bg1">
+                    <a:lumMod val="75000"/>
+                  </a:schemeClr>
+                </a:solidFill>
+                <a:latin typeface="Calibri" panose="020F0502020204030204" pitchFamily="34" charset="0"/>
+                <a:ea typeface="Calibri" panose="020F0502020204030204" pitchFamily="34" charset="0"/>
+                <a:cs typeface="Calibri" panose="020F0502020204030204" pitchFamily="34" charset="0"/>
+              </a:rPr>
+              <a:t>– Challenges </a:t>
+            </a:r>
+            <a:endParaRPr lang="de-DE" sz="1200" dirty="0">
+              <a:solidFill>
+                <a:schemeClr val="bg1">
+                  <a:lumMod val="75000"/>
+                </a:schemeClr>
+              </a:solidFill>
+            </a:endParaRPr>
+          </a:p>
+        </p:txBody>
+      </p:sp>
+      <p:cxnSp>
+        <p:nvCxnSpPr>
+          <p:cNvPr id="15" name="Straight Arrow Connector 14">
+            <a:extLst>
+              <a:ext uri="{FF2B5EF4-FFF2-40B4-BE49-F238E27FC236}">
+                <a16:creationId xmlns:a16="http://schemas.microsoft.com/office/drawing/2014/main" id="{542437D5-2932-56B6-9363-01A69E9D8737}"/>
+              </a:ext>
+            </a:extLst>
+          </p:cNvPr>
+          <p:cNvCxnSpPr>
+            <a:cxnSpLocks/>
+          </p:cNvCxnSpPr>
+          <p:nvPr/>
+        </p:nvCxnSpPr>
+        <p:spPr>
+          <a:xfrm>
+            <a:off x="8527530" y="3555229"/>
+            <a:ext cx="382601" cy="0"/>
+          </a:xfrm>
+          <a:prstGeom prst="straightConnector1">
+            <a:avLst/>
+          </a:prstGeom>
+          <a:ln>
+            <a:tailEnd type="triangle"/>
+          </a:ln>
+        </p:spPr>
+        <p:style>
+          <a:lnRef idx="2">
+            <a:schemeClr val="accent1"/>
+          </a:lnRef>
+          <a:fillRef idx="0">
+            <a:schemeClr val="accent1"/>
+          </a:fillRef>
+          <a:effectRef idx="1">
+            <a:schemeClr val="accent1"/>
+          </a:effectRef>
+          <a:fontRef idx="minor">
+            <a:schemeClr val="tx1"/>
+          </a:fontRef>
+        </p:style>
+      </p:cxnSp>
+      <p:pic>
+        <p:nvPicPr>
+          <p:cNvPr id="6" name="Picture 5">
+            <a:extLst>
+              <a:ext uri="{FF2B5EF4-FFF2-40B4-BE49-F238E27FC236}">
+                <a16:creationId xmlns:a16="http://schemas.microsoft.com/office/drawing/2014/main" id="{2912FCF7-6E48-6230-33F5-7A4E2198B7B3}"/>
+              </a:ext>
+            </a:extLst>
+          </p:cNvPr>
+          <p:cNvPicPr>
+            <a:picLocks noChangeAspect="1"/>
+          </p:cNvPicPr>
+          <p:nvPr/>
+        </p:nvPicPr>
+        <p:blipFill>
+          <a:blip r:embed="rId3"/>
+          <a:stretch>
+            <a:fillRect/>
+          </a:stretch>
+        </p:blipFill>
+        <p:spPr>
+          <a:xfrm>
+            <a:off x="5022617" y="437459"/>
+            <a:ext cx="6613796" cy="2041898"/>
+          </a:xfrm>
+          <a:prstGeom prst="rect">
+            <a:avLst/>
+          </a:prstGeom>
+        </p:spPr>
+      </p:pic>
+      <p:pic>
+        <p:nvPicPr>
+          <p:cNvPr id="7" name="Picture 6">
+            <a:extLst>
+              <a:ext uri="{FF2B5EF4-FFF2-40B4-BE49-F238E27FC236}">
+                <a16:creationId xmlns:a16="http://schemas.microsoft.com/office/drawing/2014/main" id="{8FC30588-46DA-7B4B-D47B-49E8D5D6F9BD}"/>
+              </a:ext>
+            </a:extLst>
+          </p:cNvPr>
+          <p:cNvPicPr>
+            <a:picLocks noChangeAspect="1"/>
+          </p:cNvPicPr>
+          <p:nvPr/>
+        </p:nvPicPr>
+        <p:blipFill>
+          <a:blip r:embed="rId4"/>
+          <a:stretch>
+            <a:fillRect/>
+          </a:stretch>
+        </p:blipFill>
+        <p:spPr>
+          <a:xfrm>
+            <a:off x="3033599" y="2628794"/>
+            <a:ext cx="8602814" cy="3121449"/>
+          </a:xfrm>
+          <a:prstGeom prst="rect">
+            <a:avLst/>
+          </a:prstGeom>
+        </p:spPr>
+      </p:pic>
     </p:spTree>
     <p:extLst>
       <p:ext uri="{BB962C8B-B14F-4D97-AF65-F5344CB8AC3E}">
-        <p14:creationId xmlns:p14="http://schemas.microsoft.com/office/powerpoint/2010/main" val="1505701908"/>
+        <p14:creationId xmlns:p14="http://schemas.microsoft.com/office/powerpoint/2010/main" val="3900713666"/>
       </p:ext>
     </p:extLst>
   </p:cSld>
   <p:clrMapOvr>
     <a:masterClrMapping/>
   </p:clrMapOvr>
+  <mc:AlternateContent xmlns:mc="http://schemas.openxmlformats.org/markup-compatibility/2006">
+    <mc:Choice xmlns:p159="http://schemas.microsoft.com/office/powerpoint/2015/09/main" Requires="p159">
+      <p:transition xmlns:p14="http://schemas.microsoft.com/office/powerpoint/2010/main" spd="slow" p14:dur="2000">
+        <p159:morph option="byObject"/>
+      </p:transition>
+    </mc:Choice>
+    <mc:Fallback>
+      <p:transition spd="slow">
+        <p:fade/>
+      </p:transition>
+    </mc:Fallback>
+  </mc:AlternateContent>
 </p:sld>
 </file>
 
@@ -27898,6 +27095,271 @@
         <p:cNvPr id="1" name="">
           <a:extLst>
             <a:ext uri="{FF2B5EF4-FFF2-40B4-BE49-F238E27FC236}">
+              <a16:creationId xmlns:a16="http://schemas.microsoft.com/office/drawing/2014/main" id="{49BE7B0D-EF2E-FEDD-F1E2-6440161D38AE}"/>
+            </a:ext>
+          </a:extLst>
+        </p:cNvPr>
+        <p:cNvGrpSpPr/>
+        <p:nvPr/>
+      </p:nvGrpSpPr>
+      <p:grpSpPr>
+        <a:xfrm>
+          <a:off x="0" y="0"/>
+          <a:ext cx="0" cy="0"/>
+          <a:chOff x="0" y="0"/>
+          <a:chExt cx="0" cy="0"/>
+        </a:xfrm>
+      </p:grpSpPr>
+      <p:sp>
+        <p:nvSpPr>
+          <p:cNvPr id="2" name="Title 1">
+            <a:extLst>
+              <a:ext uri="{FF2B5EF4-FFF2-40B4-BE49-F238E27FC236}">
+                <a16:creationId xmlns:a16="http://schemas.microsoft.com/office/drawing/2014/main" id="{D4B3F2A1-9367-240D-9693-174005C6BB3B}"/>
+              </a:ext>
+            </a:extLst>
+          </p:cNvPr>
+          <p:cNvSpPr>
+            <a:spLocks noGrp="1"/>
+          </p:cNvSpPr>
+          <p:nvPr>
+            <p:ph type="title"/>
+          </p:nvPr>
+        </p:nvSpPr>
+        <p:spPr/>
+        <p:txBody>
+          <a:bodyPr/>
+          <a:lstStyle/>
+          <a:p>
+            <a:r>
+              <a:rPr lang="en-GB" dirty="0"/>
+              <a:t>2 Bar charts for 1 variable for each category</a:t>
+            </a:r>
+          </a:p>
+        </p:txBody>
+      </p:sp>
+      <p:sp>
+        <p:nvSpPr>
+          <p:cNvPr id="3" name="Content Placeholder 2">
+            <a:extLst>
+              <a:ext uri="{FF2B5EF4-FFF2-40B4-BE49-F238E27FC236}">
+                <a16:creationId xmlns:a16="http://schemas.microsoft.com/office/drawing/2014/main" id="{7566EF36-5AB5-BD61-139A-5291CC7A308A}"/>
+              </a:ext>
+            </a:extLst>
+          </p:cNvPr>
+          <p:cNvSpPr>
+            <a:spLocks noGrp="1"/>
+          </p:cNvSpPr>
+          <p:nvPr>
+            <p:ph sz="half" idx="1"/>
+          </p:nvPr>
+        </p:nvSpPr>
+        <p:spPr/>
+        <p:txBody>
+          <a:bodyPr/>
+          <a:lstStyle/>
+          <a:p>
+            <a:r>
+              <a:rPr lang="en-US" dirty="0"/>
+              <a:t>Working on it</a:t>
+            </a:r>
+            <a:endParaRPr lang="en-GB" dirty="0"/>
+          </a:p>
+        </p:txBody>
+      </p:sp>
+      <p:sp>
+        <p:nvSpPr>
+          <p:cNvPr id="5" name="Slide Number Placeholder 4">
+            <a:extLst>
+              <a:ext uri="{FF2B5EF4-FFF2-40B4-BE49-F238E27FC236}">
+                <a16:creationId xmlns:a16="http://schemas.microsoft.com/office/drawing/2014/main" id="{AFADF633-6812-8C55-E3F4-025DC1E195A7}"/>
+              </a:ext>
+            </a:extLst>
+          </p:cNvPr>
+          <p:cNvSpPr>
+            <a:spLocks noGrp="1"/>
+          </p:cNvSpPr>
+          <p:nvPr>
+            <p:ph type="sldNum" sz="quarter" idx="12"/>
+          </p:nvPr>
+        </p:nvSpPr>
+        <p:spPr/>
+        <p:txBody>
+          <a:bodyPr/>
+          <a:lstStyle/>
+          <a:p>
+            <a:fld id="{FEE63D0E-FFEF-43D1-BE35-64C33AF422FD}" type="slidenum">
+              <a:rPr lang="de-DE" smtClean="0"/>
+              <a:t>24</a:t>
+            </a:fld>
+            <a:endParaRPr lang="de-DE"/>
+          </a:p>
+        </p:txBody>
+      </p:sp>
+      <p:sp>
+        <p:nvSpPr>
+          <p:cNvPr id="7" name="TextBox 6">
+            <a:extLst>
+              <a:ext uri="{FF2B5EF4-FFF2-40B4-BE49-F238E27FC236}">
+                <a16:creationId xmlns:a16="http://schemas.microsoft.com/office/drawing/2014/main" id="{CE5868E9-8533-9A2A-29CA-130A8F95F610}"/>
+              </a:ext>
+            </a:extLst>
+          </p:cNvPr>
+          <p:cNvSpPr txBox="1"/>
+          <p:nvPr/>
+        </p:nvSpPr>
+        <p:spPr>
+          <a:xfrm>
+            <a:off x="3778474" y="6538912"/>
+            <a:ext cx="4440062" cy="276999"/>
+          </a:xfrm>
+          <a:prstGeom prst="rect">
+            <a:avLst/>
+          </a:prstGeom>
+          <a:noFill/>
+        </p:spPr>
+        <p:txBody>
+          <a:bodyPr wrap="none" rtlCol="0">
+            <a:spAutoFit/>
+          </a:bodyPr>
+          <a:lstStyle/>
+          <a:p>
+            <a:r>
+              <a:rPr lang="en-GB" sz="1200" b="1" dirty="0">
+                <a:latin typeface="Calibri" panose="020F0502020204030204" pitchFamily="34" charset="0"/>
+                <a:cs typeface="Calibri" panose="020F0502020204030204" pitchFamily="34" charset="0"/>
+              </a:rPr>
+              <a:t>Dataset Characteristics </a:t>
+            </a:r>
+            <a:r>
+              <a:rPr lang="en-GB" sz="1200" dirty="0">
+                <a:solidFill>
+                  <a:schemeClr val="bg1">
+                    <a:lumMod val="75000"/>
+                  </a:schemeClr>
+                </a:solidFill>
+                <a:latin typeface="Calibri" panose="020F0502020204030204" pitchFamily="34" charset="0"/>
+                <a:ea typeface="Calibri" panose="020F0502020204030204" pitchFamily="34" charset="0"/>
+                <a:cs typeface="Calibri" panose="020F0502020204030204" pitchFamily="34" charset="0"/>
+              </a:rPr>
+              <a:t>– Baseline Model </a:t>
+            </a:r>
+            <a:r>
+              <a:rPr lang="en-GB" sz="1200" dirty="0">
+                <a:solidFill>
+                  <a:schemeClr val="bg1">
+                    <a:lumMod val="75000"/>
+                  </a:schemeClr>
+                </a:solidFill>
+                <a:latin typeface="Calibri" panose="020F0502020204030204" pitchFamily="34" charset="0"/>
+                <a:cs typeface="Calibri" panose="020F0502020204030204" pitchFamily="34" charset="0"/>
+              </a:rPr>
+              <a:t>– Neural Net </a:t>
+            </a:r>
+            <a:r>
+              <a:rPr lang="en-GB" sz="1200" dirty="0">
+                <a:solidFill>
+                  <a:schemeClr val="bg1">
+                    <a:lumMod val="75000"/>
+                  </a:schemeClr>
+                </a:solidFill>
+                <a:latin typeface="Calibri" panose="020F0502020204030204" pitchFamily="34" charset="0"/>
+                <a:ea typeface="Calibri" panose="020F0502020204030204" pitchFamily="34" charset="0"/>
+                <a:cs typeface="Calibri" panose="020F0502020204030204" pitchFamily="34" charset="0"/>
+              </a:rPr>
+              <a:t>– Challenges </a:t>
+            </a:r>
+            <a:endParaRPr lang="de-DE" sz="1200" dirty="0">
+              <a:solidFill>
+                <a:schemeClr val="bg1">
+                  <a:lumMod val="75000"/>
+                </a:schemeClr>
+              </a:solidFill>
+            </a:endParaRPr>
+          </a:p>
+        </p:txBody>
+      </p:sp>
+      <p:pic>
+        <p:nvPicPr>
+          <p:cNvPr id="15" name="Picture 14">
+            <a:extLst>
+              <a:ext uri="{FF2B5EF4-FFF2-40B4-BE49-F238E27FC236}">
+                <a16:creationId xmlns:a16="http://schemas.microsoft.com/office/drawing/2014/main" id="{33B71C7A-B971-5E9E-E5F2-720ABA542E41}"/>
+              </a:ext>
+            </a:extLst>
+          </p:cNvPr>
+          <p:cNvPicPr>
+            <a:picLocks noChangeAspect="1"/>
+          </p:cNvPicPr>
+          <p:nvPr/>
+        </p:nvPicPr>
+        <p:blipFill>
+          <a:blip r:embed="rId3"/>
+          <a:stretch>
+            <a:fillRect/>
+          </a:stretch>
+        </p:blipFill>
+        <p:spPr>
+          <a:xfrm>
+            <a:off x="5278262" y="1824036"/>
+            <a:ext cx="6597072" cy="4351339"/>
+          </a:xfrm>
+          <a:prstGeom prst="rect">
+            <a:avLst/>
+          </a:prstGeom>
+        </p:spPr>
+      </p:pic>
+      <p:pic>
+        <p:nvPicPr>
+          <p:cNvPr id="4" name="Picture 3">
+            <a:extLst>
+              <a:ext uri="{FF2B5EF4-FFF2-40B4-BE49-F238E27FC236}">
+                <a16:creationId xmlns:a16="http://schemas.microsoft.com/office/drawing/2014/main" id="{F15D9625-8304-B8A6-4306-D2881F22B882}"/>
+              </a:ext>
+            </a:extLst>
+          </p:cNvPr>
+          <p:cNvPicPr>
+            <a:picLocks noChangeAspect="1"/>
+          </p:cNvPicPr>
+          <p:nvPr/>
+        </p:nvPicPr>
+        <p:blipFill>
+          <a:blip r:embed="rId4"/>
+          <a:stretch>
+            <a:fillRect/>
+          </a:stretch>
+        </p:blipFill>
+        <p:spPr>
+          <a:xfrm>
+            <a:off x="0" y="2996120"/>
+            <a:ext cx="5069662" cy="2515643"/>
+          </a:xfrm>
+          <a:prstGeom prst="rect">
+            <a:avLst/>
+          </a:prstGeom>
+        </p:spPr>
+      </p:pic>
+    </p:spTree>
+    <p:extLst>
+      <p:ext uri="{BB962C8B-B14F-4D97-AF65-F5344CB8AC3E}">
+        <p14:creationId xmlns:p14="http://schemas.microsoft.com/office/powerpoint/2010/main" val="2567287787"/>
+      </p:ext>
+    </p:extLst>
+  </p:cSld>
+  <p:clrMapOvr>
+    <a:masterClrMapping/>
+  </p:clrMapOvr>
+</p:sld>
+</file>
+
+<file path=ppt/slides/slide25.xml><?xml version="1.0" encoding="utf-8"?>
+<p:sld xmlns:a="http://schemas.openxmlformats.org/drawingml/2006/main" xmlns:r="http://schemas.openxmlformats.org/officeDocument/2006/relationships" xmlns:p="http://schemas.openxmlformats.org/presentationml/2006/main" show="0">
+  <p:cSld>
+    <p:spTree>
+      <p:nvGrpSpPr>
+        <p:cNvPr id="1" name="">
+          <a:extLst>
+            <a:ext uri="{FF2B5EF4-FFF2-40B4-BE49-F238E27FC236}">
               <a16:creationId xmlns:a16="http://schemas.microsoft.com/office/drawing/2014/main" id="{05D4050B-A8AD-D44C-BDB5-DAEF0748352F}"/>
             </a:ext>
           </a:extLst>
@@ -28055,7 +27517,7 @@
           <a:p>
             <a:fld id="{FEE63D0E-FFEF-43D1-BE35-64C33AF422FD}" type="slidenum">
               <a:rPr lang="de-DE" smtClean="0"/>
-              <a:t>24</a:t>
+              <a:t>25</a:t>
             </a:fld>
             <a:endParaRPr lang="de-DE"/>
           </a:p>
@@ -28074,7 +27536,7 @@
 </p:sld>
 </file>
 
-<file path=ppt/slides/slide25.xml><?xml version="1.0" encoding="utf-8"?>
+<file path=ppt/slides/slide26.xml><?xml version="1.0" encoding="utf-8"?>
 <p:sld xmlns:a="http://schemas.openxmlformats.org/drawingml/2006/main" xmlns:r="http://schemas.openxmlformats.org/officeDocument/2006/relationships" xmlns:p="http://schemas.openxmlformats.org/presentationml/2006/main" show="0">
   <p:cSld>
     <p:spTree>
@@ -28239,7 +27701,7 @@
           <a:p>
             <a:fld id="{FEE63D0E-FFEF-43D1-BE35-64C33AF422FD}" type="slidenum">
               <a:rPr lang="de-DE" smtClean="0"/>
-              <a:t>25</a:t>
+              <a:t>26</a:t>
             </a:fld>
             <a:endParaRPr lang="de-DE"/>
           </a:p>
@@ -28258,7 +27720,7 @@
 </p:sld>
 </file>
 
-<file path=ppt/slides/slide26.xml><?xml version="1.0" encoding="utf-8"?>
+<file path=ppt/slides/slide27.xml><?xml version="1.0" encoding="utf-8"?>
 <p:sld xmlns:a="http://schemas.openxmlformats.org/drawingml/2006/main" xmlns:r="http://schemas.openxmlformats.org/officeDocument/2006/relationships" xmlns:p="http://schemas.openxmlformats.org/presentationml/2006/main" show="0">
   <p:cSld>
     <p:bg>
@@ -28438,7 +27900,7 @@
           <a:p>
             <a:fld id="{FEE63D0E-FFEF-43D1-BE35-64C33AF422FD}" type="slidenum">
               <a:rPr lang="de-DE" smtClean="0"/>
-              <a:t>26</a:t>
+              <a:t>27</a:t>
             </a:fld>
             <a:endParaRPr lang="de-DE"/>
           </a:p>
@@ -28457,7 +27919,7 @@
 </p:sld>
 </file>
 
-<file path=ppt/slides/slide27.xml><?xml version="1.0" encoding="utf-8"?>
+<file path=ppt/slides/slide28.xml><?xml version="1.0" encoding="utf-8"?>
 <p:sld xmlns:a="http://schemas.openxmlformats.org/drawingml/2006/main" xmlns:r="http://schemas.openxmlformats.org/officeDocument/2006/relationships" xmlns:p="http://schemas.openxmlformats.org/presentationml/2006/main" show="0">
   <p:cSld>
     <p:spTree>
@@ -28532,7 +27994,7 @@
           <a:p>
             <a:fld id="{FEE63D0E-FFEF-43D1-BE35-64C33AF422FD}" type="slidenum">
               <a:rPr lang="de-DE" smtClean="0"/>
-              <a:t>27</a:t>
+              <a:t>28</a:t>
             </a:fld>
             <a:endParaRPr lang="de-DE"/>
           </a:p>
@@ -29792,7 +29254,7 @@
 </p:sld>
 </file>
 
-<file path=ppt/slides/slide28.xml><?xml version="1.0" encoding="utf-8"?>
+<file path=ppt/slides/slide29.xml><?xml version="1.0" encoding="utf-8"?>
 <p:sld xmlns:a="http://schemas.openxmlformats.org/drawingml/2006/main" xmlns:r="http://schemas.openxmlformats.org/officeDocument/2006/relationships" xmlns:p="http://schemas.openxmlformats.org/presentationml/2006/main" show="0">
   <p:cSld>
     <p:spTree>
@@ -29857,7 +29319,7 @@
           <a:p>
             <a:fld id="{FEE63D0E-FFEF-43D1-BE35-64C33AF422FD}" type="slidenum">
               <a:rPr lang="de-DE" smtClean="0"/>
-              <a:t>28</a:t>
+              <a:t>29</a:t>
             </a:fld>
             <a:endParaRPr lang="de-DE"/>
           </a:p>
@@ -33625,271 +33087,6 @@
 </file>
 
 <file path=ppt/slides/slide8.xml><?xml version="1.0" encoding="utf-8"?>
-<p:sld xmlns:a="http://schemas.openxmlformats.org/drawingml/2006/main" xmlns:r="http://schemas.openxmlformats.org/officeDocument/2006/relationships" xmlns:p="http://schemas.openxmlformats.org/presentationml/2006/main" show="0">
-  <p:cSld>
-    <p:spTree>
-      <p:nvGrpSpPr>
-        <p:cNvPr id="1" name="">
-          <a:extLst>
-            <a:ext uri="{FF2B5EF4-FFF2-40B4-BE49-F238E27FC236}">
-              <a16:creationId xmlns:a16="http://schemas.microsoft.com/office/drawing/2014/main" id="{49BE7B0D-EF2E-FEDD-F1E2-6440161D38AE}"/>
-            </a:ext>
-          </a:extLst>
-        </p:cNvPr>
-        <p:cNvGrpSpPr/>
-        <p:nvPr/>
-      </p:nvGrpSpPr>
-      <p:grpSpPr>
-        <a:xfrm>
-          <a:off x="0" y="0"/>
-          <a:ext cx="0" cy="0"/>
-          <a:chOff x="0" y="0"/>
-          <a:chExt cx="0" cy="0"/>
-        </a:xfrm>
-      </p:grpSpPr>
-      <p:sp>
-        <p:nvSpPr>
-          <p:cNvPr id="2" name="Title 1">
-            <a:extLst>
-              <a:ext uri="{FF2B5EF4-FFF2-40B4-BE49-F238E27FC236}">
-                <a16:creationId xmlns:a16="http://schemas.microsoft.com/office/drawing/2014/main" id="{D4B3F2A1-9367-240D-9693-174005C6BB3B}"/>
-              </a:ext>
-            </a:extLst>
-          </p:cNvPr>
-          <p:cNvSpPr>
-            <a:spLocks noGrp="1"/>
-          </p:cNvSpPr>
-          <p:nvPr>
-            <p:ph type="title"/>
-          </p:nvPr>
-        </p:nvSpPr>
-        <p:spPr/>
-        <p:txBody>
-          <a:bodyPr/>
-          <a:lstStyle/>
-          <a:p>
-            <a:r>
-              <a:rPr lang="en-GB" dirty="0"/>
-              <a:t>2 Bar charts for 1 variable for each category</a:t>
-            </a:r>
-          </a:p>
-        </p:txBody>
-      </p:sp>
-      <p:sp>
-        <p:nvSpPr>
-          <p:cNvPr id="3" name="Content Placeholder 2">
-            <a:extLst>
-              <a:ext uri="{FF2B5EF4-FFF2-40B4-BE49-F238E27FC236}">
-                <a16:creationId xmlns:a16="http://schemas.microsoft.com/office/drawing/2014/main" id="{7566EF36-5AB5-BD61-139A-5291CC7A308A}"/>
-              </a:ext>
-            </a:extLst>
-          </p:cNvPr>
-          <p:cNvSpPr>
-            <a:spLocks noGrp="1"/>
-          </p:cNvSpPr>
-          <p:nvPr>
-            <p:ph sz="half" idx="1"/>
-          </p:nvPr>
-        </p:nvSpPr>
-        <p:spPr/>
-        <p:txBody>
-          <a:bodyPr/>
-          <a:lstStyle/>
-          <a:p>
-            <a:r>
-              <a:rPr lang="en-US" dirty="0"/>
-              <a:t>Working on it</a:t>
-            </a:r>
-            <a:endParaRPr lang="en-GB" dirty="0"/>
-          </a:p>
-        </p:txBody>
-      </p:sp>
-      <p:sp>
-        <p:nvSpPr>
-          <p:cNvPr id="5" name="Slide Number Placeholder 4">
-            <a:extLst>
-              <a:ext uri="{FF2B5EF4-FFF2-40B4-BE49-F238E27FC236}">
-                <a16:creationId xmlns:a16="http://schemas.microsoft.com/office/drawing/2014/main" id="{AFADF633-6812-8C55-E3F4-025DC1E195A7}"/>
-              </a:ext>
-            </a:extLst>
-          </p:cNvPr>
-          <p:cNvSpPr>
-            <a:spLocks noGrp="1"/>
-          </p:cNvSpPr>
-          <p:nvPr>
-            <p:ph type="sldNum" sz="quarter" idx="12"/>
-          </p:nvPr>
-        </p:nvSpPr>
-        <p:spPr/>
-        <p:txBody>
-          <a:bodyPr/>
-          <a:lstStyle/>
-          <a:p>
-            <a:fld id="{FEE63D0E-FFEF-43D1-BE35-64C33AF422FD}" type="slidenum">
-              <a:rPr lang="de-DE" smtClean="0"/>
-              <a:t>8</a:t>
-            </a:fld>
-            <a:endParaRPr lang="de-DE"/>
-          </a:p>
-        </p:txBody>
-      </p:sp>
-      <p:sp>
-        <p:nvSpPr>
-          <p:cNvPr id="7" name="TextBox 6">
-            <a:extLst>
-              <a:ext uri="{FF2B5EF4-FFF2-40B4-BE49-F238E27FC236}">
-                <a16:creationId xmlns:a16="http://schemas.microsoft.com/office/drawing/2014/main" id="{CE5868E9-8533-9A2A-29CA-130A8F95F610}"/>
-              </a:ext>
-            </a:extLst>
-          </p:cNvPr>
-          <p:cNvSpPr txBox="1"/>
-          <p:nvPr/>
-        </p:nvSpPr>
-        <p:spPr>
-          <a:xfrm>
-            <a:off x="3778474" y="6538912"/>
-            <a:ext cx="4440062" cy="276999"/>
-          </a:xfrm>
-          <a:prstGeom prst="rect">
-            <a:avLst/>
-          </a:prstGeom>
-          <a:noFill/>
-        </p:spPr>
-        <p:txBody>
-          <a:bodyPr wrap="none" rtlCol="0">
-            <a:spAutoFit/>
-          </a:bodyPr>
-          <a:lstStyle/>
-          <a:p>
-            <a:r>
-              <a:rPr lang="en-GB" sz="1200" b="1" dirty="0">
-                <a:latin typeface="Calibri" panose="020F0502020204030204" pitchFamily="34" charset="0"/>
-                <a:cs typeface="Calibri" panose="020F0502020204030204" pitchFamily="34" charset="0"/>
-              </a:rPr>
-              <a:t>Dataset Characteristics </a:t>
-            </a:r>
-            <a:r>
-              <a:rPr lang="en-GB" sz="1200" dirty="0">
-                <a:solidFill>
-                  <a:schemeClr val="bg1">
-                    <a:lumMod val="75000"/>
-                  </a:schemeClr>
-                </a:solidFill>
-                <a:latin typeface="Calibri" panose="020F0502020204030204" pitchFamily="34" charset="0"/>
-                <a:ea typeface="Calibri" panose="020F0502020204030204" pitchFamily="34" charset="0"/>
-                <a:cs typeface="Calibri" panose="020F0502020204030204" pitchFamily="34" charset="0"/>
-              </a:rPr>
-              <a:t>– Baseline Model </a:t>
-            </a:r>
-            <a:r>
-              <a:rPr lang="en-GB" sz="1200" dirty="0">
-                <a:solidFill>
-                  <a:schemeClr val="bg1">
-                    <a:lumMod val="75000"/>
-                  </a:schemeClr>
-                </a:solidFill>
-                <a:latin typeface="Calibri" panose="020F0502020204030204" pitchFamily="34" charset="0"/>
-                <a:cs typeface="Calibri" panose="020F0502020204030204" pitchFamily="34" charset="0"/>
-              </a:rPr>
-              <a:t>– Neural Net </a:t>
-            </a:r>
-            <a:r>
-              <a:rPr lang="en-GB" sz="1200" dirty="0">
-                <a:solidFill>
-                  <a:schemeClr val="bg1">
-                    <a:lumMod val="75000"/>
-                  </a:schemeClr>
-                </a:solidFill>
-                <a:latin typeface="Calibri" panose="020F0502020204030204" pitchFamily="34" charset="0"/>
-                <a:ea typeface="Calibri" panose="020F0502020204030204" pitchFamily="34" charset="0"/>
-                <a:cs typeface="Calibri" panose="020F0502020204030204" pitchFamily="34" charset="0"/>
-              </a:rPr>
-              <a:t>– Challenges </a:t>
-            </a:r>
-            <a:endParaRPr lang="de-DE" sz="1200" dirty="0">
-              <a:solidFill>
-                <a:schemeClr val="bg1">
-                  <a:lumMod val="75000"/>
-                </a:schemeClr>
-              </a:solidFill>
-            </a:endParaRPr>
-          </a:p>
-        </p:txBody>
-      </p:sp>
-      <p:pic>
-        <p:nvPicPr>
-          <p:cNvPr id="15" name="Picture 14">
-            <a:extLst>
-              <a:ext uri="{FF2B5EF4-FFF2-40B4-BE49-F238E27FC236}">
-                <a16:creationId xmlns:a16="http://schemas.microsoft.com/office/drawing/2014/main" id="{33B71C7A-B971-5E9E-E5F2-720ABA542E41}"/>
-              </a:ext>
-            </a:extLst>
-          </p:cNvPr>
-          <p:cNvPicPr>
-            <a:picLocks noChangeAspect="1"/>
-          </p:cNvPicPr>
-          <p:nvPr/>
-        </p:nvPicPr>
-        <p:blipFill>
-          <a:blip r:embed="rId3"/>
-          <a:stretch>
-            <a:fillRect/>
-          </a:stretch>
-        </p:blipFill>
-        <p:spPr>
-          <a:xfrm>
-            <a:off x="5278262" y="1824036"/>
-            <a:ext cx="6597072" cy="4351339"/>
-          </a:xfrm>
-          <a:prstGeom prst="rect">
-            <a:avLst/>
-          </a:prstGeom>
-        </p:spPr>
-      </p:pic>
-      <p:pic>
-        <p:nvPicPr>
-          <p:cNvPr id="4" name="Picture 3">
-            <a:extLst>
-              <a:ext uri="{FF2B5EF4-FFF2-40B4-BE49-F238E27FC236}">
-                <a16:creationId xmlns:a16="http://schemas.microsoft.com/office/drawing/2014/main" id="{F15D9625-8304-B8A6-4306-D2881F22B882}"/>
-              </a:ext>
-            </a:extLst>
-          </p:cNvPr>
-          <p:cNvPicPr>
-            <a:picLocks noChangeAspect="1"/>
-          </p:cNvPicPr>
-          <p:nvPr/>
-        </p:nvPicPr>
-        <p:blipFill>
-          <a:blip r:embed="rId4"/>
-          <a:stretch>
-            <a:fillRect/>
-          </a:stretch>
-        </p:blipFill>
-        <p:spPr>
-          <a:xfrm>
-            <a:off x="0" y="2996120"/>
-            <a:ext cx="5069662" cy="2515643"/>
-          </a:xfrm>
-          <a:prstGeom prst="rect">
-            <a:avLst/>
-          </a:prstGeom>
-        </p:spPr>
-      </p:pic>
-    </p:spTree>
-    <p:extLst>
-      <p:ext uri="{BB962C8B-B14F-4D97-AF65-F5344CB8AC3E}">
-        <p14:creationId xmlns:p14="http://schemas.microsoft.com/office/powerpoint/2010/main" val="2567287787"/>
-      </p:ext>
-    </p:extLst>
-  </p:cSld>
-  <p:clrMapOvr>
-    <a:masterClrMapping/>
-  </p:clrMapOvr>
-</p:sld>
-</file>
-
-<file path=ppt/slides/slide9.xml><?xml version="1.0" encoding="utf-8"?>
 <p:sld xmlns:a="http://schemas.openxmlformats.org/drawingml/2006/main" xmlns:r="http://schemas.openxmlformats.org/officeDocument/2006/relationships" xmlns:p="http://schemas.openxmlformats.org/presentationml/2006/main">
   <p:cSld>
     <p:spTree>
@@ -34013,7 +33210,7 @@
           <a:p>
             <a:fld id="{FEE63D0E-FFEF-43D1-BE35-64C33AF422FD}" type="slidenum">
               <a:rPr lang="de-DE" smtClean="0"/>
-              <a:t>9</a:t>
+              <a:t>8</a:t>
             </a:fld>
             <a:endParaRPr lang="de-DE"/>
           </a:p>
@@ -35226,6 +34423,1353 @@
         </p:cTn>
       </p:par>
     </p:tnLst>
+  </p:timing>
+</p:sld>
+</file>
+
+<file path=ppt/slides/slide9.xml><?xml version="1.0" encoding="utf-8"?>
+<p:sld xmlns:a="http://schemas.openxmlformats.org/drawingml/2006/main" xmlns:r="http://schemas.openxmlformats.org/officeDocument/2006/relationships" xmlns:p="http://schemas.openxmlformats.org/presentationml/2006/main">
+  <p:cSld>
+    <p:spTree>
+      <p:nvGrpSpPr>
+        <p:cNvPr id="1" name="">
+          <a:extLst>
+            <a:ext uri="{FF2B5EF4-FFF2-40B4-BE49-F238E27FC236}">
+              <a16:creationId xmlns:a16="http://schemas.microsoft.com/office/drawing/2014/main" id="{92C95C09-80A5-2AAD-E849-D44AE127DA0A}"/>
+            </a:ext>
+          </a:extLst>
+        </p:cNvPr>
+        <p:cNvGrpSpPr/>
+        <p:nvPr/>
+      </p:nvGrpSpPr>
+      <p:grpSpPr>
+        <a:xfrm>
+          <a:off x="0" y="0"/>
+          <a:ext cx="0" cy="0"/>
+          <a:chOff x="0" y="0"/>
+          <a:chExt cx="0" cy="0"/>
+        </a:xfrm>
+      </p:grpSpPr>
+      <p:sp>
+        <p:nvSpPr>
+          <p:cNvPr id="3" name="Slide Number Placeholder 2">
+            <a:extLst>
+              <a:ext uri="{FF2B5EF4-FFF2-40B4-BE49-F238E27FC236}">
+                <a16:creationId xmlns:a16="http://schemas.microsoft.com/office/drawing/2014/main" id="{47A0FE8B-EBF8-F253-14B5-51C406AC0ED9}"/>
+              </a:ext>
+            </a:extLst>
+          </p:cNvPr>
+          <p:cNvSpPr>
+            <a:spLocks noGrp="1"/>
+          </p:cNvSpPr>
+          <p:nvPr>
+            <p:ph type="sldNum" sz="quarter" idx="12"/>
+          </p:nvPr>
+        </p:nvSpPr>
+        <p:spPr>
+          <a:xfrm>
+            <a:off x="9103894" y="6356350"/>
+            <a:ext cx="2743200" cy="365125"/>
+          </a:xfrm>
+        </p:spPr>
+        <p:txBody>
+          <a:bodyPr/>
+          <a:lstStyle/>
+          <a:p>
+            <a:fld id="{FEE63D0E-FFEF-43D1-BE35-64C33AF422FD}" type="slidenum">
+              <a:rPr lang="de-DE" smtClean="0"/>
+              <a:t>9</a:t>
+            </a:fld>
+            <a:endParaRPr lang="de-DE"/>
+          </a:p>
+        </p:txBody>
+      </p:sp>
+      <mc:AlternateContent xmlns:mc="http://schemas.openxmlformats.org/markup-compatibility/2006" xmlns:p14="http://schemas.microsoft.com/office/powerpoint/2010/main">
+        <mc:Choice Requires="p14">
+          <p:contentPart p14:bwMode="auto" r:id="rId3">
+            <p14:nvContentPartPr>
+              <p14:cNvPr id="12" name="Ink 11">
+                <a:extLst>
+                  <a:ext uri="{FF2B5EF4-FFF2-40B4-BE49-F238E27FC236}">
+                    <a16:creationId xmlns:a16="http://schemas.microsoft.com/office/drawing/2014/main" id="{E55F1D86-F054-C0C7-0C83-B5E08974F030}"/>
+                  </a:ext>
+                </a:extLst>
+              </p14:cNvPr>
+              <p14:cNvContentPartPr/>
+              <p14:nvPr/>
+            </p14:nvContentPartPr>
+            <p14:xfrm>
+              <a:off x="2369426" y="1718669"/>
+              <a:ext cx="213840" cy="371880"/>
+            </p14:xfrm>
+          </p:contentPart>
+        </mc:Choice>
+        <mc:Fallback xmlns="">
+          <p:pic>
+            <p:nvPicPr>
+              <p:cNvPr id="12" name="Ink 11">
+                <a:extLst>
+                  <a:ext uri="{FF2B5EF4-FFF2-40B4-BE49-F238E27FC236}">
+                    <a16:creationId xmlns:a16="http://schemas.microsoft.com/office/drawing/2014/main" id="{E55F1D86-F054-C0C7-0C83-B5E08974F030}"/>
+                  </a:ext>
+                </a:extLst>
+              </p:cNvPr>
+              <p:cNvPicPr/>
+              <p:nvPr/>
+            </p:nvPicPr>
+            <p:blipFill>
+              <a:blip r:embed="rId4"/>
+              <a:stretch>
+                <a:fillRect/>
+              </a:stretch>
+            </p:blipFill>
+            <p:spPr>
+              <a:xfrm>
+                <a:off x="2306426" y="1655669"/>
+                <a:ext cx="339480" cy="497520"/>
+              </a:xfrm>
+              <a:prstGeom prst="rect">
+                <a:avLst/>
+              </a:prstGeom>
+            </p:spPr>
+          </p:pic>
+        </mc:Fallback>
+      </mc:AlternateContent>
+      <p:grpSp>
+        <p:nvGrpSpPr>
+          <p:cNvPr id="35" name="Group 34">
+            <a:extLst>
+              <a:ext uri="{FF2B5EF4-FFF2-40B4-BE49-F238E27FC236}">
+                <a16:creationId xmlns:a16="http://schemas.microsoft.com/office/drawing/2014/main" id="{E35B6ECA-E31F-6054-6D62-93D14E62DE45}"/>
+              </a:ext>
+            </a:extLst>
+          </p:cNvPr>
+          <p:cNvGrpSpPr/>
+          <p:nvPr/>
+        </p:nvGrpSpPr>
+        <p:grpSpPr>
+          <a:xfrm>
+            <a:off x="897389" y="929894"/>
+            <a:ext cx="4595558" cy="5426456"/>
+            <a:chOff x="3698850" y="996742"/>
+            <a:chExt cx="4595558" cy="5426456"/>
+          </a:xfrm>
+        </p:grpSpPr>
+        <p:grpSp>
+          <p:nvGrpSpPr>
+            <p:cNvPr id="27" name="Group 26">
+              <a:extLst>
+                <a:ext uri="{FF2B5EF4-FFF2-40B4-BE49-F238E27FC236}">
+                  <a16:creationId xmlns:a16="http://schemas.microsoft.com/office/drawing/2014/main" id="{0DA4FC97-2A4B-11A3-4A00-947FFDE92E6E}"/>
+                </a:ext>
+              </a:extLst>
+            </p:cNvPr>
+            <p:cNvGrpSpPr/>
+            <p:nvPr/>
+          </p:nvGrpSpPr>
+          <p:grpSpPr>
+            <a:xfrm>
+              <a:off x="3698850" y="996742"/>
+              <a:ext cx="3393640" cy="5426456"/>
+              <a:chOff x="3698850" y="996742"/>
+              <a:chExt cx="3393640" cy="5426456"/>
+            </a:xfrm>
+          </p:grpSpPr>
+          <p:pic>
+            <p:nvPicPr>
+              <p:cNvPr id="22" name="Grafik 14">
+                <a:extLst>
+                  <a:ext uri="{FF2B5EF4-FFF2-40B4-BE49-F238E27FC236}">
+                    <a16:creationId xmlns:a16="http://schemas.microsoft.com/office/drawing/2014/main" id="{D43F8B25-925B-E708-7000-77875C38CBAC}"/>
+                  </a:ext>
+                </a:extLst>
+              </p:cNvPr>
+              <p:cNvPicPr>
+                <a:picLocks noChangeAspect="1"/>
+              </p:cNvPicPr>
+              <p:nvPr/>
+            </p:nvPicPr>
+            <p:blipFill>
+              <a:blip r:embed="rId5">
+                <a:extLst>
+                  <a:ext uri="{28A0092B-C50C-407E-A947-70E740481C1C}">
+                    <a14:useLocalDpi xmlns:a14="http://schemas.microsoft.com/office/drawing/2010/main" val="0"/>
+                  </a:ext>
+                </a:extLst>
+              </a:blip>
+              <a:srcRect l="22070" r="50936"/>
+              <a:stretch>
+                <a:fillRect/>
+              </a:stretch>
+            </p:blipFill>
+            <p:spPr>
+              <a:xfrm>
+                <a:off x="4070619" y="996742"/>
+                <a:ext cx="2326654" cy="5426456"/>
+              </a:xfrm>
+              <a:prstGeom prst="rect">
+                <a:avLst/>
+              </a:prstGeom>
+            </p:spPr>
+          </p:pic>
+          <p:sp>
+            <p:nvSpPr>
+              <p:cNvPr id="23" name="Rectangle 22">
+                <a:extLst>
+                  <a:ext uri="{FF2B5EF4-FFF2-40B4-BE49-F238E27FC236}">
+                    <a16:creationId xmlns:a16="http://schemas.microsoft.com/office/drawing/2014/main" id="{633ACC6B-D50F-78D3-40E3-664258D4EAFB}"/>
+                  </a:ext>
+                </a:extLst>
+              </p:cNvPr>
+              <p:cNvSpPr/>
+              <p:nvPr/>
+            </p:nvSpPr>
+            <p:spPr>
+              <a:xfrm>
+                <a:off x="5419169" y="2492877"/>
+                <a:ext cx="1040458" cy="3860630"/>
+              </a:xfrm>
+              <a:prstGeom prst="rect">
+                <a:avLst/>
+              </a:prstGeom>
+              <a:solidFill>
+                <a:schemeClr val="bg1"/>
+              </a:solidFill>
+              <a:ln>
+                <a:noFill/>
+              </a:ln>
+            </p:spPr>
+            <p:style>
+              <a:lnRef idx="2">
+                <a:schemeClr val="accent1">
+                  <a:shade val="15000"/>
+                </a:schemeClr>
+              </a:lnRef>
+              <a:fillRef idx="1">
+                <a:schemeClr val="accent1"/>
+              </a:fillRef>
+              <a:effectRef idx="0">
+                <a:schemeClr val="accent1"/>
+              </a:effectRef>
+              <a:fontRef idx="minor">
+                <a:schemeClr val="lt1"/>
+              </a:fontRef>
+            </p:style>
+            <p:txBody>
+              <a:bodyPr rtlCol="0" anchor="ctr"/>
+              <a:lstStyle/>
+              <a:p>
+                <a:pPr algn="ctr"/>
+                <a:endParaRPr lang="en-GB"/>
+              </a:p>
+            </p:txBody>
+          </p:sp>
+          <p:sp>
+            <p:nvSpPr>
+              <p:cNvPr id="25" name="Rectangle 24">
+                <a:extLst>
+                  <a:ext uri="{FF2B5EF4-FFF2-40B4-BE49-F238E27FC236}">
+                    <a16:creationId xmlns:a16="http://schemas.microsoft.com/office/drawing/2014/main" id="{A577B111-BB54-2CD4-BB94-F942146706A5}"/>
+                  </a:ext>
+                </a:extLst>
+              </p:cNvPr>
+              <p:cNvSpPr/>
+              <p:nvPr/>
+            </p:nvSpPr>
+            <p:spPr>
+              <a:xfrm rot="2812795">
+                <a:off x="5857525" y="1670389"/>
+                <a:ext cx="1058779" cy="1411150"/>
+              </a:xfrm>
+              <a:prstGeom prst="rect">
+                <a:avLst/>
+              </a:prstGeom>
+              <a:solidFill>
+                <a:schemeClr val="bg1"/>
+              </a:solidFill>
+              <a:ln>
+                <a:noFill/>
+              </a:ln>
+            </p:spPr>
+            <p:style>
+              <a:lnRef idx="2">
+                <a:schemeClr val="accent1">
+                  <a:shade val="15000"/>
+                </a:schemeClr>
+              </a:lnRef>
+              <a:fillRef idx="1">
+                <a:schemeClr val="accent1"/>
+              </a:fillRef>
+              <a:effectRef idx="0">
+                <a:schemeClr val="accent1"/>
+              </a:effectRef>
+              <a:fontRef idx="minor">
+                <a:schemeClr val="lt1"/>
+              </a:fontRef>
+            </p:style>
+            <p:txBody>
+              <a:bodyPr rtlCol="0" anchor="ctr"/>
+              <a:lstStyle/>
+              <a:p>
+                <a:pPr algn="ctr"/>
+                <a:endParaRPr lang="en-GB"/>
+              </a:p>
+            </p:txBody>
+          </p:sp>
+          <p:sp>
+            <p:nvSpPr>
+              <p:cNvPr id="26" name="Rectangle 25">
+                <a:extLst>
+                  <a:ext uri="{FF2B5EF4-FFF2-40B4-BE49-F238E27FC236}">
+                    <a16:creationId xmlns:a16="http://schemas.microsoft.com/office/drawing/2014/main" id="{1549EDED-B7D3-EDFD-8AAB-4A0793DBE78E}"/>
+                  </a:ext>
+                </a:extLst>
+              </p:cNvPr>
+              <p:cNvSpPr/>
+              <p:nvPr/>
+            </p:nvSpPr>
+            <p:spPr>
+              <a:xfrm rot="2812795">
+                <a:off x="3995515" y="1184665"/>
+                <a:ext cx="670216" cy="1263546"/>
+              </a:xfrm>
+              <a:prstGeom prst="rect">
+                <a:avLst/>
+              </a:prstGeom>
+              <a:solidFill>
+                <a:schemeClr val="bg1"/>
+              </a:solidFill>
+              <a:ln>
+                <a:noFill/>
+              </a:ln>
+            </p:spPr>
+            <p:style>
+              <a:lnRef idx="2">
+                <a:schemeClr val="accent1">
+                  <a:shade val="15000"/>
+                </a:schemeClr>
+              </a:lnRef>
+              <a:fillRef idx="1">
+                <a:schemeClr val="accent1"/>
+              </a:fillRef>
+              <a:effectRef idx="0">
+                <a:schemeClr val="accent1"/>
+              </a:effectRef>
+              <a:fontRef idx="minor">
+                <a:schemeClr val="lt1"/>
+              </a:fontRef>
+            </p:style>
+            <p:txBody>
+              <a:bodyPr rtlCol="0" anchor="ctr"/>
+              <a:lstStyle/>
+              <a:p>
+                <a:pPr algn="ctr"/>
+                <a:endParaRPr lang="en-GB"/>
+              </a:p>
+            </p:txBody>
+          </p:sp>
+        </p:grpSp>
+        <p:grpSp>
+          <p:nvGrpSpPr>
+            <p:cNvPr id="33" name="Group 32">
+              <a:extLst>
+                <a:ext uri="{FF2B5EF4-FFF2-40B4-BE49-F238E27FC236}">
+                  <a16:creationId xmlns:a16="http://schemas.microsoft.com/office/drawing/2014/main" id="{D286413E-EAD1-1B7D-5FD7-1A7CD9E456DF}"/>
+                </a:ext>
+              </a:extLst>
+            </p:cNvPr>
+            <p:cNvGrpSpPr/>
+            <p:nvPr/>
+          </p:nvGrpSpPr>
+          <p:grpSpPr>
+            <a:xfrm>
+              <a:off x="6179611" y="1733853"/>
+              <a:ext cx="2114797" cy="4526605"/>
+              <a:chOff x="6179611" y="1733853"/>
+              <a:chExt cx="2114797" cy="4526605"/>
+            </a:xfrm>
+          </p:grpSpPr>
+          <p:sp>
+            <p:nvSpPr>
+              <p:cNvPr id="31" name="Rectangle 30">
+                <a:extLst>
+                  <a:ext uri="{FF2B5EF4-FFF2-40B4-BE49-F238E27FC236}">
+                    <a16:creationId xmlns:a16="http://schemas.microsoft.com/office/drawing/2014/main" id="{DB2F1729-197C-A2AF-AB1E-8333AAA1692C}"/>
+                  </a:ext>
+                </a:extLst>
+              </p:cNvPr>
+              <p:cNvSpPr/>
+              <p:nvPr/>
+            </p:nvSpPr>
+            <p:spPr>
+              <a:xfrm rot="2812795">
+                <a:off x="6810034" y="1103430"/>
+                <a:ext cx="225360" cy="1486206"/>
+              </a:xfrm>
+              <a:prstGeom prst="rect">
+                <a:avLst/>
+              </a:prstGeom>
+              <a:solidFill>
+                <a:schemeClr val="bg1"/>
+              </a:solidFill>
+              <a:ln>
+                <a:noFill/>
+              </a:ln>
+            </p:spPr>
+            <p:style>
+              <a:lnRef idx="2">
+                <a:schemeClr val="accent1">
+                  <a:shade val="15000"/>
+                </a:schemeClr>
+              </a:lnRef>
+              <a:fillRef idx="1">
+                <a:schemeClr val="accent1"/>
+              </a:fillRef>
+              <a:effectRef idx="0">
+                <a:schemeClr val="accent1"/>
+              </a:effectRef>
+              <a:fontRef idx="minor">
+                <a:schemeClr val="lt1"/>
+              </a:fontRef>
+            </p:style>
+            <p:txBody>
+              <a:bodyPr rtlCol="0" anchor="ctr"/>
+              <a:lstStyle/>
+              <a:p>
+                <a:pPr algn="ctr"/>
+                <a:endParaRPr lang="en-GB"/>
+              </a:p>
+            </p:txBody>
+          </p:sp>
+          <p:sp>
+            <p:nvSpPr>
+              <p:cNvPr id="32" name="Rectangle 31">
+                <a:extLst>
+                  <a:ext uri="{FF2B5EF4-FFF2-40B4-BE49-F238E27FC236}">
+                    <a16:creationId xmlns:a16="http://schemas.microsoft.com/office/drawing/2014/main" id="{8979381A-B618-2062-8189-AAF5A27847B0}"/>
+                  </a:ext>
+                </a:extLst>
+              </p:cNvPr>
+              <p:cNvSpPr/>
+              <p:nvPr/>
+            </p:nvSpPr>
+            <p:spPr>
+              <a:xfrm rot="10800000">
+                <a:off x="7291951" y="2460777"/>
+                <a:ext cx="1002457" cy="3799681"/>
+              </a:xfrm>
+              <a:prstGeom prst="rect">
+                <a:avLst/>
+              </a:prstGeom>
+              <a:solidFill>
+                <a:schemeClr val="bg1"/>
+              </a:solidFill>
+              <a:ln>
+                <a:noFill/>
+              </a:ln>
+            </p:spPr>
+            <p:style>
+              <a:lnRef idx="2">
+                <a:schemeClr val="accent1">
+                  <a:shade val="15000"/>
+                </a:schemeClr>
+              </a:lnRef>
+              <a:fillRef idx="1">
+                <a:schemeClr val="accent1"/>
+              </a:fillRef>
+              <a:effectRef idx="0">
+                <a:schemeClr val="accent1"/>
+              </a:effectRef>
+              <a:fontRef idx="minor">
+                <a:schemeClr val="lt1"/>
+              </a:fontRef>
+            </p:style>
+            <p:txBody>
+              <a:bodyPr rtlCol="0" anchor="ctr"/>
+              <a:lstStyle/>
+              <a:p>
+                <a:pPr algn="ctr"/>
+                <a:endParaRPr lang="en-GB"/>
+              </a:p>
+            </p:txBody>
+          </p:sp>
+        </p:grpSp>
+      </p:grpSp>
+      <p:pic>
+        <p:nvPicPr>
+          <p:cNvPr id="4" name="Grafik 14">
+            <a:extLst>
+              <a:ext uri="{FF2B5EF4-FFF2-40B4-BE49-F238E27FC236}">
+                <a16:creationId xmlns:a16="http://schemas.microsoft.com/office/drawing/2014/main" id="{AA2031BB-7E68-561C-793D-7D875B0DC299}"/>
+              </a:ext>
+            </a:extLst>
+          </p:cNvPr>
+          <p:cNvPicPr>
+            <a:picLocks noChangeAspect="1"/>
+          </p:cNvPicPr>
+          <p:nvPr/>
+        </p:nvPicPr>
+        <p:blipFill>
+          <a:blip r:embed="rId6">
+            <a:extLst>
+              <a:ext uri="{28A0092B-C50C-407E-A947-70E740481C1C}">
+                <a14:useLocalDpi xmlns:a14="http://schemas.microsoft.com/office/drawing/2010/main" val="0"/>
+              </a:ext>
+            </a:extLst>
+          </a:blip>
+          <a:srcRect t="4842"/>
+          <a:stretch>
+            <a:fillRect/>
+          </a:stretch>
+        </p:blipFill>
+        <p:spPr>
+          <a:xfrm>
+            <a:off x="3926063" y="2812387"/>
+            <a:ext cx="4305143" cy="2689781"/>
+          </a:xfrm>
+          <a:prstGeom prst="rect">
+            <a:avLst/>
+          </a:prstGeom>
+        </p:spPr>
+      </p:pic>
+      <p:sp>
+        <p:nvSpPr>
+          <p:cNvPr id="7" name="Google Shape;741;p54">
+            <a:extLst>
+              <a:ext uri="{FF2B5EF4-FFF2-40B4-BE49-F238E27FC236}">
+                <a16:creationId xmlns:a16="http://schemas.microsoft.com/office/drawing/2014/main" id="{B8964C78-2DD9-204D-D6A9-B1ABD6C716FE}"/>
+              </a:ext>
+            </a:extLst>
+          </p:cNvPr>
+          <p:cNvSpPr/>
+          <p:nvPr/>
+        </p:nvSpPr>
+        <p:spPr>
+          <a:xfrm>
+            <a:off x="3172803" y="3971180"/>
+            <a:ext cx="617053" cy="470200"/>
+          </a:xfrm>
+          <a:custGeom>
+            <a:avLst/>
+            <a:gdLst/>
+            <a:ahLst/>
+            <a:cxnLst/>
+            <a:rect l="l" t="t" r="r" b="b"/>
+            <a:pathLst>
+              <a:path w="1580" h="1352" extrusionOk="0">
+                <a:moveTo>
+                  <a:pt x="891" y="1"/>
+                </a:moveTo>
+                <a:cubicBezTo>
+                  <a:pt x="859" y="1"/>
+                  <a:pt x="828" y="12"/>
+                  <a:pt x="801" y="32"/>
+                </a:cubicBezTo>
+                <a:cubicBezTo>
+                  <a:pt x="743" y="89"/>
+                  <a:pt x="743" y="176"/>
+                  <a:pt x="801" y="226"/>
+                </a:cubicBezTo>
+                <a:lnTo>
+                  <a:pt x="1039" y="472"/>
+                </a:lnTo>
+                <a:cubicBezTo>
+                  <a:pt x="1068" y="493"/>
+                  <a:pt x="1046" y="544"/>
+                  <a:pt x="1010" y="544"/>
+                </a:cubicBezTo>
+                <a:lnTo>
+                  <a:pt x="152" y="544"/>
+                </a:lnTo>
+                <a:cubicBezTo>
+                  <a:pt x="147" y="543"/>
+                  <a:pt x="143" y="543"/>
+                  <a:pt x="139" y="543"/>
+                </a:cubicBezTo>
+                <a:cubicBezTo>
+                  <a:pt x="66" y="543"/>
+                  <a:pt x="14" y="598"/>
+                  <a:pt x="8" y="666"/>
+                </a:cubicBezTo>
+                <a:cubicBezTo>
+                  <a:pt x="0" y="746"/>
+                  <a:pt x="65" y="811"/>
+                  <a:pt x="145" y="811"/>
+                </a:cubicBezTo>
+                <a:lnTo>
+                  <a:pt x="1010" y="811"/>
+                </a:lnTo>
+                <a:cubicBezTo>
+                  <a:pt x="1046" y="811"/>
+                  <a:pt x="1068" y="854"/>
+                  <a:pt x="1039" y="883"/>
+                </a:cubicBezTo>
+                <a:lnTo>
+                  <a:pt x="808" y="1113"/>
+                </a:lnTo>
+                <a:cubicBezTo>
+                  <a:pt x="758" y="1164"/>
+                  <a:pt x="751" y="1251"/>
+                  <a:pt x="794" y="1308"/>
+                </a:cubicBezTo>
+                <a:cubicBezTo>
+                  <a:pt x="823" y="1337"/>
+                  <a:pt x="859" y="1351"/>
+                  <a:pt x="895" y="1351"/>
+                </a:cubicBezTo>
+                <a:cubicBezTo>
+                  <a:pt x="931" y="1351"/>
+                  <a:pt x="967" y="1337"/>
+                  <a:pt x="996" y="1308"/>
+                </a:cubicBezTo>
+                <a:lnTo>
+                  <a:pt x="1522" y="774"/>
+                </a:lnTo>
+                <a:cubicBezTo>
+                  <a:pt x="1580" y="717"/>
+                  <a:pt x="1573" y="630"/>
+                  <a:pt x="1522" y="573"/>
+                </a:cubicBezTo>
+                <a:lnTo>
+                  <a:pt x="996" y="46"/>
+                </a:lnTo>
+                <a:cubicBezTo>
+                  <a:pt x="965" y="15"/>
+                  <a:pt x="928" y="1"/>
+                  <a:pt x="891" y="1"/>
+                </a:cubicBezTo>
+                <a:close/>
+              </a:path>
+            </a:pathLst>
+          </a:custGeom>
+          <a:solidFill>
+            <a:schemeClr val="bg1">
+              <a:lumMod val="85000"/>
+            </a:schemeClr>
+          </a:solidFill>
+          <a:ln>
+            <a:noFill/>
+          </a:ln>
+        </p:spPr>
+        <p:txBody>
+          <a:bodyPr spcFirstLastPara="1" wrap="square" lIns="91425" tIns="91425" rIns="91425" bIns="91425" anchor="ctr" anchorCtr="0">
+            <a:noAutofit/>
+          </a:bodyPr>
+          <a:lstStyle/>
+          <a:p>
+            <a:pPr marL="0" lvl="0" indent="0" algn="l" rtl="0">
+              <a:spcBef>
+                <a:spcPts val="0"/>
+              </a:spcBef>
+              <a:spcAft>
+                <a:spcPts val="0"/>
+              </a:spcAft>
+              <a:buNone/>
+            </a:pPr>
+            <a:endParaRPr/>
+          </a:p>
+        </p:txBody>
+      </p:sp>
+      <p:sp>
+        <p:nvSpPr>
+          <p:cNvPr id="8" name="Google Shape;741;p54">
+            <a:extLst>
+              <a:ext uri="{FF2B5EF4-FFF2-40B4-BE49-F238E27FC236}">
+                <a16:creationId xmlns:a16="http://schemas.microsoft.com/office/drawing/2014/main" id="{63C354AE-1F67-0CA3-0632-73EB24BDD573}"/>
+              </a:ext>
+            </a:extLst>
+          </p:cNvPr>
+          <p:cNvSpPr/>
+          <p:nvPr/>
+        </p:nvSpPr>
+        <p:spPr>
+          <a:xfrm>
+            <a:off x="8442063" y="3786444"/>
+            <a:ext cx="617053" cy="470200"/>
+          </a:xfrm>
+          <a:custGeom>
+            <a:avLst/>
+            <a:gdLst/>
+            <a:ahLst/>
+            <a:cxnLst/>
+            <a:rect l="l" t="t" r="r" b="b"/>
+            <a:pathLst>
+              <a:path w="1580" h="1352" extrusionOk="0">
+                <a:moveTo>
+                  <a:pt x="891" y="1"/>
+                </a:moveTo>
+                <a:cubicBezTo>
+                  <a:pt x="859" y="1"/>
+                  <a:pt x="828" y="12"/>
+                  <a:pt x="801" y="32"/>
+                </a:cubicBezTo>
+                <a:cubicBezTo>
+                  <a:pt x="743" y="89"/>
+                  <a:pt x="743" y="176"/>
+                  <a:pt x="801" y="226"/>
+                </a:cubicBezTo>
+                <a:lnTo>
+                  <a:pt x="1039" y="472"/>
+                </a:lnTo>
+                <a:cubicBezTo>
+                  <a:pt x="1068" y="493"/>
+                  <a:pt x="1046" y="544"/>
+                  <a:pt x="1010" y="544"/>
+                </a:cubicBezTo>
+                <a:lnTo>
+                  <a:pt x="152" y="544"/>
+                </a:lnTo>
+                <a:cubicBezTo>
+                  <a:pt x="147" y="543"/>
+                  <a:pt x="143" y="543"/>
+                  <a:pt x="139" y="543"/>
+                </a:cubicBezTo>
+                <a:cubicBezTo>
+                  <a:pt x="66" y="543"/>
+                  <a:pt x="14" y="598"/>
+                  <a:pt x="8" y="666"/>
+                </a:cubicBezTo>
+                <a:cubicBezTo>
+                  <a:pt x="0" y="746"/>
+                  <a:pt x="65" y="811"/>
+                  <a:pt x="145" y="811"/>
+                </a:cubicBezTo>
+                <a:lnTo>
+                  <a:pt x="1010" y="811"/>
+                </a:lnTo>
+                <a:cubicBezTo>
+                  <a:pt x="1046" y="811"/>
+                  <a:pt x="1068" y="854"/>
+                  <a:pt x="1039" y="883"/>
+                </a:cubicBezTo>
+                <a:lnTo>
+                  <a:pt x="808" y="1113"/>
+                </a:lnTo>
+                <a:cubicBezTo>
+                  <a:pt x="758" y="1164"/>
+                  <a:pt x="751" y="1251"/>
+                  <a:pt x="794" y="1308"/>
+                </a:cubicBezTo>
+                <a:cubicBezTo>
+                  <a:pt x="823" y="1337"/>
+                  <a:pt x="859" y="1351"/>
+                  <a:pt x="895" y="1351"/>
+                </a:cubicBezTo>
+                <a:cubicBezTo>
+                  <a:pt x="931" y="1351"/>
+                  <a:pt x="967" y="1337"/>
+                  <a:pt x="996" y="1308"/>
+                </a:cubicBezTo>
+                <a:lnTo>
+                  <a:pt x="1522" y="774"/>
+                </a:lnTo>
+                <a:cubicBezTo>
+                  <a:pt x="1580" y="717"/>
+                  <a:pt x="1573" y="630"/>
+                  <a:pt x="1522" y="573"/>
+                </a:cubicBezTo>
+                <a:lnTo>
+                  <a:pt x="996" y="46"/>
+                </a:lnTo>
+                <a:cubicBezTo>
+                  <a:pt x="965" y="15"/>
+                  <a:pt x="928" y="1"/>
+                  <a:pt x="891" y="1"/>
+                </a:cubicBezTo>
+                <a:close/>
+              </a:path>
+            </a:pathLst>
+          </a:custGeom>
+          <a:solidFill>
+            <a:schemeClr val="bg1">
+              <a:lumMod val="85000"/>
+            </a:schemeClr>
+          </a:solidFill>
+          <a:ln>
+            <a:noFill/>
+          </a:ln>
+        </p:spPr>
+        <p:txBody>
+          <a:bodyPr spcFirstLastPara="1" wrap="square" lIns="91425" tIns="91425" rIns="91425" bIns="91425" anchor="ctr" anchorCtr="0">
+            <a:noAutofit/>
+          </a:bodyPr>
+          <a:lstStyle/>
+          <a:p>
+            <a:pPr marL="0" lvl="0" indent="0" algn="l" rtl="0">
+              <a:spcBef>
+                <a:spcPts val="0"/>
+              </a:spcBef>
+              <a:spcAft>
+                <a:spcPts val="0"/>
+              </a:spcAft>
+              <a:buNone/>
+            </a:pPr>
+            <a:endParaRPr/>
+          </a:p>
+        </p:txBody>
+      </p:sp>
+      <p:sp>
+        <p:nvSpPr>
+          <p:cNvPr id="10" name="TextBox 9">
+            <a:extLst>
+              <a:ext uri="{FF2B5EF4-FFF2-40B4-BE49-F238E27FC236}">
+                <a16:creationId xmlns:a16="http://schemas.microsoft.com/office/drawing/2014/main" id="{0A597BE1-FC5D-7442-24C2-FDEAEC49F58A}"/>
+              </a:ext>
+            </a:extLst>
+          </p:cNvPr>
+          <p:cNvSpPr txBox="1"/>
+          <p:nvPr/>
+        </p:nvSpPr>
+        <p:spPr>
+          <a:xfrm>
+            <a:off x="9389367" y="2923235"/>
+            <a:ext cx="2172253" cy="2308324"/>
+          </a:xfrm>
+          <a:prstGeom prst="rect">
+            <a:avLst/>
+          </a:prstGeom>
+          <a:noFill/>
+        </p:spPr>
+        <p:txBody>
+          <a:bodyPr wrap="square" rtlCol="0">
+            <a:spAutoFit/>
+          </a:bodyPr>
+          <a:lstStyle/>
+          <a:p>
+            <a:r>
+              <a:rPr lang="en-GB" dirty="0"/>
+              <a:t>Wettercode_0</a:t>
+            </a:r>
+          </a:p>
+          <a:p>
+            <a:r>
+              <a:rPr lang="en-GB" dirty="0"/>
+              <a:t>Wettercode_5</a:t>
+            </a:r>
+          </a:p>
+          <a:p>
+            <a:r>
+              <a:rPr lang="en-GB" dirty="0"/>
+              <a:t>Wettercode_10</a:t>
+            </a:r>
+          </a:p>
+          <a:p>
+            <a:r>
+              <a:rPr lang="en-GB" dirty="0"/>
+              <a:t>Wettercode_21</a:t>
+            </a:r>
+          </a:p>
+          <a:p>
+            <a:r>
+              <a:rPr lang="en-GB" dirty="0"/>
+              <a:t>Wettercode_61</a:t>
+            </a:r>
+          </a:p>
+          <a:p>
+            <a:r>
+              <a:rPr lang="en-GB" dirty="0"/>
+              <a:t>Wettercode_63</a:t>
+            </a:r>
+          </a:p>
+          <a:p>
+            <a:r>
+              <a:rPr lang="en-GB" dirty="0" err="1"/>
+              <a:t>Wettercode_NAN</a:t>
+            </a:r>
+            <a:endParaRPr lang="en-GB" dirty="0"/>
+          </a:p>
+          <a:p>
+            <a:r>
+              <a:rPr lang="en-GB" dirty="0" err="1"/>
+              <a:t>Wettercode_REST</a:t>
+            </a:r>
+            <a:endParaRPr lang="en-GB" dirty="0"/>
+          </a:p>
+        </p:txBody>
+      </p:sp>
+      <p:sp>
+        <p:nvSpPr>
+          <p:cNvPr id="6" name="Title 5">
+            <a:extLst>
+              <a:ext uri="{FF2B5EF4-FFF2-40B4-BE49-F238E27FC236}">
+                <a16:creationId xmlns:a16="http://schemas.microsoft.com/office/drawing/2014/main" id="{2DB7B1AB-58C3-1E8F-8D9F-A984EC8EE9F4}"/>
+              </a:ext>
+            </a:extLst>
+          </p:cNvPr>
+          <p:cNvSpPr>
+            <a:spLocks noGrp="1"/>
+          </p:cNvSpPr>
+          <p:nvPr>
+            <p:ph type="title"/>
+          </p:nvPr>
+        </p:nvSpPr>
+        <p:spPr>
+          <a:xfrm>
+            <a:off x="229515" y="136525"/>
+            <a:ext cx="10515600" cy="1325563"/>
+          </a:xfrm>
+        </p:spPr>
+        <p:txBody>
+          <a:bodyPr>
+            <a:normAutofit/>
+          </a:bodyPr>
+          <a:lstStyle/>
+          <a:p>
+            <a:r>
+              <a:rPr lang="en-US" sz="3600" dirty="0"/>
+              <a:t>Dealing with missing values</a:t>
+            </a:r>
+            <a:endParaRPr lang="en-GB" sz="3600" dirty="0"/>
+          </a:p>
+        </p:txBody>
+      </p:sp>
+      <p:sp>
+        <p:nvSpPr>
+          <p:cNvPr id="44" name="TextBox 43">
+            <a:extLst>
+              <a:ext uri="{FF2B5EF4-FFF2-40B4-BE49-F238E27FC236}">
+                <a16:creationId xmlns:a16="http://schemas.microsoft.com/office/drawing/2014/main" id="{83FC25D8-D11B-A7CE-BD9D-6C8275F0289E}"/>
+              </a:ext>
+            </a:extLst>
+          </p:cNvPr>
+          <p:cNvSpPr txBox="1"/>
+          <p:nvPr/>
+        </p:nvSpPr>
+        <p:spPr>
+          <a:xfrm>
+            <a:off x="4740681" y="1948859"/>
+            <a:ext cx="3057627" cy="400110"/>
+          </a:xfrm>
+          <a:prstGeom prst="rect">
+            <a:avLst/>
+          </a:prstGeom>
+          <a:noFill/>
+        </p:spPr>
+        <p:txBody>
+          <a:bodyPr wrap="square" rtlCol="0">
+            <a:spAutoFit/>
+          </a:bodyPr>
+          <a:lstStyle/>
+          <a:p>
+            <a:r>
+              <a:rPr lang="en-US" sz="2000" dirty="0"/>
+              <a:t>Weather code distribution</a:t>
+            </a:r>
+            <a:endParaRPr lang="en-GB" sz="2000" dirty="0"/>
+          </a:p>
+        </p:txBody>
+      </p:sp>
+      <p:sp>
+        <p:nvSpPr>
+          <p:cNvPr id="45" name="TextBox 44">
+            <a:extLst>
+              <a:ext uri="{FF2B5EF4-FFF2-40B4-BE49-F238E27FC236}">
+                <a16:creationId xmlns:a16="http://schemas.microsoft.com/office/drawing/2014/main" id="{2305B253-4052-6ABC-53FA-6AF69E3CDA79}"/>
+              </a:ext>
+            </a:extLst>
+          </p:cNvPr>
+          <p:cNvSpPr txBox="1"/>
+          <p:nvPr/>
+        </p:nvSpPr>
+        <p:spPr>
+          <a:xfrm>
+            <a:off x="9134373" y="1948859"/>
+            <a:ext cx="3057627" cy="400110"/>
+          </a:xfrm>
+          <a:prstGeom prst="rect">
+            <a:avLst/>
+          </a:prstGeom>
+          <a:noFill/>
+        </p:spPr>
+        <p:txBody>
+          <a:bodyPr wrap="square" rtlCol="0">
+            <a:spAutoFit/>
+          </a:bodyPr>
+          <a:lstStyle/>
+          <a:p>
+            <a:r>
+              <a:rPr lang="en-US" sz="2000" dirty="0"/>
+              <a:t>One-Hot Encoding</a:t>
+            </a:r>
+            <a:endParaRPr lang="en-GB" sz="2000" dirty="0"/>
+          </a:p>
+        </p:txBody>
+      </p:sp>
+      <p:sp>
+        <p:nvSpPr>
+          <p:cNvPr id="5" name="TextBox 4">
+            <a:extLst>
+              <a:ext uri="{FF2B5EF4-FFF2-40B4-BE49-F238E27FC236}">
+                <a16:creationId xmlns:a16="http://schemas.microsoft.com/office/drawing/2014/main" id="{82C1BC01-A05E-750F-C2DE-497CA9583F5D}"/>
+              </a:ext>
+            </a:extLst>
+          </p:cNvPr>
+          <p:cNvSpPr txBox="1"/>
+          <p:nvPr/>
+        </p:nvSpPr>
+        <p:spPr>
+          <a:xfrm>
+            <a:off x="3778474" y="6538912"/>
+            <a:ext cx="4440062" cy="276999"/>
+          </a:xfrm>
+          <a:prstGeom prst="rect">
+            <a:avLst/>
+          </a:prstGeom>
+          <a:noFill/>
+        </p:spPr>
+        <p:txBody>
+          <a:bodyPr wrap="none" rtlCol="0">
+            <a:spAutoFit/>
+          </a:bodyPr>
+          <a:lstStyle/>
+          <a:p>
+            <a:r>
+              <a:rPr lang="en-GB" sz="1200" b="1" dirty="0">
+                <a:latin typeface="Calibri" panose="020F0502020204030204" pitchFamily="34" charset="0"/>
+                <a:cs typeface="Calibri" panose="020F0502020204030204" pitchFamily="34" charset="0"/>
+              </a:rPr>
+              <a:t>Dataset Characteristics </a:t>
+            </a:r>
+            <a:r>
+              <a:rPr lang="en-GB" sz="1200" dirty="0">
+                <a:solidFill>
+                  <a:schemeClr val="bg1">
+                    <a:lumMod val="75000"/>
+                  </a:schemeClr>
+                </a:solidFill>
+                <a:latin typeface="Calibri" panose="020F0502020204030204" pitchFamily="34" charset="0"/>
+                <a:ea typeface="Calibri" panose="020F0502020204030204" pitchFamily="34" charset="0"/>
+                <a:cs typeface="Calibri" panose="020F0502020204030204" pitchFamily="34" charset="0"/>
+              </a:rPr>
+              <a:t>– Baseline Model </a:t>
+            </a:r>
+            <a:r>
+              <a:rPr lang="en-GB" sz="1200" dirty="0">
+                <a:solidFill>
+                  <a:schemeClr val="bg1">
+                    <a:lumMod val="75000"/>
+                  </a:schemeClr>
+                </a:solidFill>
+                <a:latin typeface="Calibri" panose="020F0502020204030204" pitchFamily="34" charset="0"/>
+                <a:cs typeface="Calibri" panose="020F0502020204030204" pitchFamily="34" charset="0"/>
+              </a:rPr>
+              <a:t>– Neural Net </a:t>
+            </a:r>
+            <a:r>
+              <a:rPr lang="en-GB" sz="1200" dirty="0">
+                <a:solidFill>
+                  <a:schemeClr val="bg1">
+                    <a:lumMod val="75000"/>
+                  </a:schemeClr>
+                </a:solidFill>
+                <a:latin typeface="Calibri" panose="020F0502020204030204" pitchFamily="34" charset="0"/>
+                <a:ea typeface="Calibri" panose="020F0502020204030204" pitchFamily="34" charset="0"/>
+                <a:cs typeface="Calibri" panose="020F0502020204030204" pitchFamily="34" charset="0"/>
+              </a:rPr>
+              <a:t>– Challenges </a:t>
+            </a:r>
+            <a:endParaRPr lang="de-DE" sz="1200" dirty="0">
+              <a:solidFill>
+                <a:schemeClr val="bg1">
+                  <a:lumMod val="75000"/>
+                </a:schemeClr>
+              </a:solidFill>
+            </a:endParaRPr>
+          </a:p>
+        </p:txBody>
+      </p:sp>
+    </p:spTree>
+    <p:extLst>
+      <p:ext uri="{BB962C8B-B14F-4D97-AF65-F5344CB8AC3E}">
+        <p14:creationId xmlns:p14="http://schemas.microsoft.com/office/powerpoint/2010/main" val="1228581449"/>
+      </p:ext>
+    </p:extLst>
+  </p:cSld>
+  <p:clrMapOvr>
+    <a:masterClrMapping/>
+  </p:clrMapOvr>
+  <p:timing>
+    <p:tnLst>
+      <p:par>
+        <p:cTn id="1" dur="indefinite" restart="never" nodeType="tmRoot">
+          <p:childTnLst>
+            <p:seq concurrent="1" nextAc="seek">
+              <p:cTn id="2" dur="indefinite" nodeType="mainSeq">
+                <p:childTnLst>
+                  <p:par>
+                    <p:cTn id="3" fill="hold">
+                      <p:stCondLst>
+                        <p:cond delay="indefinite"/>
+                      </p:stCondLst>
+                      <p:childTnLst>
+                        <p:par>
+                          <p:cTn id="4" fill="hold">
+                            <p:stCondLst>
+                              <p:cond delay="0"/>
+                            </p:stCondLst>
+                            <p:childTnLst>
+                              <p:par>
+                                <p:cTn id="5" presetID="10" presetClass="entr" presetSubtype="0" fill="hold" grpId="0" nodeType="clickEffect">
+                                  <p:stCondLst>
+                                    <p:cond delay="0"/>
+                                  </p:stCondLst>
+                                  <p:childTnLst>
+                                    <p:set>
+                                      <p:cBhvr>
+                                        <p:cTn id="6" dur="1" fill="hold">
+                                          <p:stCondLst>
+                                            <p:cond delay="0"/>
+                                          </p:stCondLst>
+                                        </p:cTn>
+                                        <p:tgtEl>
+                                          <p:spTgt spid="7"/>
+                                        </p:tgtEl>
+                                        <p:attrNameLst>
+                                          <p:attrName>style.visibility</p:attrName>
+                                        </p:attrNameLst>
+                                      </p:cBhvr>
+                                      <p:to>
+                                        <p:strVal val="visible"/>
+                                      </p:to>
+                                    </p:set>
+                                    <p:animEffect transition="in" filter="fade">
+                                      <p:cBhvr>
+                                        <p:cTn id="7" dur="500"/>
+                                        <p:tgtEl>
+                                          <p:spTgt spid="7"/>
+                                        </p:tgtEl>
+                                      </p:cBhvr>
+                                    </p:animEffect>
+                                  </p:childTnLst>
+                                </p:cTn>
+                              </p:par>
+                              <p:par>
+                                <p:cTn id="8" presetID="10" presetClass="entr" presetSubtype="0" fill="hold" nodeType="withEffect">
+                                  <p:stCondLst>
+                                    <p:cond delay="0"/>
+                                  </p:stCondLst>
+                                  <p:childTnLst>
+                                    <p:set>
+                                      <p:cBhvr>
+                                        <p:cTn id="9" dur="1" fill="hold">
+                                          <p:stCondLst>
+                                            <p:cond delay="0"/>
+                                          </p:stCondLst>
+                                        </p:cTn>
+                                        <p:tgtEl>
+                                          <p:spTgt spid="4"/>
+                                        </p:tgtEl>
+                                        <p:attrNameLst>
+                                          <p:attrName>style.visibility</p:attrName>
+                                        </p:attrNameLst>
+                                      </p:cBhvr>
+                                      <p:to>
+                                        <p:strVal val="visible"/>
+                                      </p:to>
+                                    </p:set>
+                                    <p:animEffect transition="in" filter="fade">
+                                      <p:cBhvr>
+                                        <p:cTn id="10" dur="500"/>
+                                        <p:tgtEl>
+                                          <p:spTgt spid="4"/>
+                                        </p:tgtEl>
+                                      </p:cBhvr>
+                                    </p:animEffect>
+                                  </p:childTnLst>
+                                </p:cTn>
+                              </p:par>
+                              <p:par>
+                                <p:cTn id="11" presetID="10" presetClass="entr" presetSubtype="0" fill="hold" grpId="0" nodeType="withEffect">
+                                  <p:stCondLst>
+                                    <p:cond delay="0"/>
+                                  </p:stCondLst>
+                                  <p:childTnLst>
+                                    <p:set>
+                                      <p:cBhvr>
+                                        <p:cTn id="12" dur="1" fill="hold">
+                                          <p:stCondLst>
+                                            <p:cond delay="0"/>
+                                          </p:stCondLst>
+                                        </p:cTn>
+                                        <p:tgtEl>
+                                          <p:spTgt spid="44"/>
+                                        </p:tgtEl>
+                                        <p:attrNameLst>
+                                          <p:attrName>style.visibility</p:attrName>
+                                        </p:attrNameLst>
+                                      </p:cBhvr>
+                                      <p:to>
+                                        <p:strVal val="visible"/>
+                                      </p:to>
+                                    </p:set>
+                                    <p:animEffect transition="in" filter="fade">
+                                      <p:cBhvr>
+                                        <p:cTn id="13" dur="500"/>
+                                        <p:tgtEl>
+                                          <p:spTgt spid="44"/>
+                                        </p:tgtEl>
+                                      </p:cBhvr>
+                                    </p:animEffect>
+                                  </p:childTnLst>
+                                </p:cTn>
+                              </p:par>
+                            </p:childTnLst>
+                          </p:cTn>
+                        </p:par>
+                      </p:childTnLst>
+                    </p:cTn>
+                  </p:par>
+                  <p:par>
+                    <p:cTn id="14" fill="hold">
+                      <p:stCondLst>
+                        <p:cond delay="indefinite"/>
+                      </p:stCondLst>
+                      <p:childTnLst>
+                        <p:par>
+                          <p:cTn id="15" fill="hold">
+                            <p:stCondLst>
+                              <p:cond delay="0"/>
+                            </p:stCondLst>
+                            <p:childTnLst>
+                              <p:par>
+                                <p:cTn id="16" presetID="10" presetClass="entr" presetSubtype="0" fill="hold" grpId="0" nodeType="clickEffect">
+                                  <p:stCondLst>
+                                    <p:cond delay="0"/>
+                                  </p:stCondLst>
+                                  <p:childTnLst>
+                                    <p:set>
+                                      <p:cBhvr>
+                                        <p:cTn id="17" dur="1" fill="hold">
+                                          <p:stCondLst>
+                                            <p:cond delay="0"/>
+                                          </p:stCondLst>
+                                        </p:cTn>
+                                        <p:tgtEl>
+                                          <p:spTgt spid="8"/>
+                                        </p:tgtEl>
+                                        <p:attrNameLst>
+                                          <p:attrName>style.visibility</p:attrName>
+                                        </p:attrNameLst>
+                                      </p:cBhvr>
+                                      <p:to>
+                                        <p:strVal val="visible"/>
+                                      </p:to>
+                                    </p:set>
+                                    <p:animEffect transition="in" filter="fade">
+                                      <p:cBhvr>
+                                        <p:cTn id="18" dur="500"/>
+                                        <p:tgtEl>
+                                          <p:spTgt spid="8"/>
+                                        </p:tgtEl>
+                                      </p:cBhvr>
+                                    </p:animEffect>
+                                  </p:childTnLst>
+                                </p:cTn>
+                              </p:par>
+                              <p:par>
+                                <p:cTn id="19" presetID="10" presetClass="entr" presetSubtype="0" fill="hold" grpId="0" nodeType="withEffect">
+                                  <p:stCondLst>
+                                    <p:cond delay="0"/>
+                                  </p:stCondLst>
+                                  <p:childTnLst>
+                                    <p:set>
+                                      <p:cBhvr>
+                                        <p:cTn id="20" dur="1" fill="hold">
+                                          <p:stCondLst>
+                                            <p:cond delay="0"/>
+                                          </p:stCondLst>
+                                        </p:cTn>
+                                        <p:tgtEl>
+                                          <p:spTgt spid="10"/>
+                                        </p:tgtEl>
+                                        <p:attrNameLst>
+                                          <p:attrName>style.visibility</p:attrName>
+                                        </p:attrNameLst>
+                                      </p:cBhvr>
+                                      <p:to>
+                                        <p:strVal val="visible"/>
+                                      </p:to>
+                                    </p:set>
+                                    <p:animEffect transition="in" filter="fade">
+                                      <p:cBhvr>
+                                        <p:cTn id="21" dur="500"/>
+                                        <p:tgtEl>
+                                          <p:spTgt spid="10"/>
+                                        </p:tgtEl>
+                                      </p:cBhvr>
+                                    </p:animEffect>
+                                  </p:childTnLst>
+                                </p:cTn>
+                              </p:par>
+                              <p:par>
+                                <p:cTn id="22" presetID="10" presetClass="entr" presetSubtype="0" fill="hold" grpId="0" nodeType="withEffect">
+                                  <p:stCondLst>
+                                    <p:cond delay="0"/>
+                                  </p:stCondLst>
+                                  <p:childTnLst>
+                                    <p:set>
+                                      <p:cBhvr>
+                                        <p:cTn id="23" dur="1" fill="hold">
+                                          <p:stCondLst>
+                                            <p:cond delay="0"/>
+                                          </p:stCondLst>
+                                        </p:cTn>
+                                        <p:tgtEl>
+                                          <p:spTgt spid="45"/>
+                                        </p:tgtEl>
+                                        <p:attrNameLst>
+                                          <p:attrName>style.visibility</p:attrName>
+                                        </p:attrNameLst>
+                                      </p:cBhvr>
+                                      <p:to>
+                                        <p:strVal val="visible"/>
+                                      </p:to>
+                                    </p:set>
+                                    <p:animEffect transition="in" filter="fade">
+                                      <p:cBhvr>
+                                        <p:cTn id="24" dur="500"/>
+                                        <p:tgtEl>
+                                          <p:spTgt spid="45"/>
+                                        </p:tgtEl>
+                                      </p:cBhvr>
+                                    </p:animEffect>
+                                  </p:childTnLst>
+                                </p:cTn>
+                              </p:par>
+                            </p:childTnLst>
+                          </p:cTn>
+                        </p:par>
+                      </p:childTnLst>
+                    </p:cTn>
+                  </p:par>
+                </p:childTnLst>
+              </p:cTn>
+              <p:prevCondLst>
+                <p:cond evt="onPrev" delay="0">
+                  <p:tgtEl>
+                    <p:sldTgt/>
+                  </p:tgtEl>
+                </p:cond>
+              </p:prevCondLst>
+              <p:nextCondLst>
+                <p:cond evt="onNext" delay="0">
+                  <p:tgtEl>
+                    <p:sldTgt/>
+                  </p:tgtEl>
+                </p:cond>
+              </p:nextCondLst>
+            </p:seq>
+          </p:childTnLst>
+        </p:cTn>
+      </p:par>
+    </p:tnLst>
+    <p:bldLst>
+      <p:bldP spid="7" grpId="0" animBg="1"/>
+      <p:bldP spid="8" grpId="0" animBg="1"/>
+      <p:bldP spid="10" grpId="0"/>
+      <p:bldP spid="44" grpId="0"/>
+      <p:bldP spid="45" grpId="0"/>
+    </p:bldLst>
   </p:timing>
 </p:sld>
 </file>

--- a/4_Presentation/Group 3.pptx
+++ b/4_Presentation/Group 3.pptx
@@ -5,7 +5,7 @@
     <p:sldMasterId id="2147483660" r:id="rId1"/>
   </p:sldMasterIdLst>
   <p:notesMasterIdLst>
-    <p:notesMasterId r:id="rId31"/>
+    <p:notesMasterId r:id="rId19"/>
   </p:notesMasterIdLst>
   <p:sldIdLst>
     <p:sldId id="256" r:id="rId2"/>
@@ -25,18 +25,6 @@
     <p:sldId id="285" r:id="rId16"/>
     <p:sldId id="275" r:id="rId17"/>
     <p:sldId id="282" r:id="rId18"/>
-    <p:sldId id="280" r:id="rId19"/>
-    <p:sldId id="267" r:id="rId20"/>
-    <p:sldId id="274" r:id="rId21"/>
-    <p:sldId id="268" r:id="rId22"/>
-    <p:sldId id="266" r:id="rId23"/>
-    <p:sldId id="263" r:id="rId24"/>
-    <p:sldId id="287" r:id="rId25"/>
-    <p:sldId id="264" r:id="rId26"/>
-    <p:sldId id="265" r:id="rId27"/>
-    <p:sldId id="262" r:id="rId28"/>
-    <p:sldId id="286" r:id="rId29"/>
-    <p:sldId id="288" r:id="rId30"/>
   </p:sldIdLst>
   <p:sldSz cx="12192000" cy="6858000"/>
   <p:notesSz cx="6858000" cy="9144000"/>
@@ -309,7 +297,7 @@
           <a:p>
             <a:fld id="{D702BB35-AE6A-4528-8F32-D1F8A7B871D9}" type="datetimeFigureOut">
               <a:rPr lang="en-GB" smtClean="0"/>
-              <a:t>03/07/2025</a:t>
+              <a:t>07/07/2025</a:t>
             </a:fld>
             <a:endParaRPr lang="en-GB"/>
           </a:p>
@@ -793,52 +781,7 @@
           <a:bodyPr/>
           <a:lstStyle/>
           <a:p>
-            <a:r>
-              <a:rPr lang="en-US" dirty="0"/>
-              <a:t>Data were normalized before entering the model</a:t>
-            </a:r>
-          </a:p>
-          <a:p>
-            <a:br>
-              <a:rPr lang="en-GB" dirty="0"/>
-            </a:br>
-            <a:r>
-              <a:rPr lang="en-GB" dirty="0"/>
-              <a:t>normalized earlier</a:t>
-            </a:r>
-            <a:br>
-              <a:rPr lang="en-GB" dirty="0"/>
-            </a:br>
-            <a:br>
-              <a:rPr lang="en-GB" dirty="0"/>
-            </a:br>
-            <a:r>
-              <a:rPr lang="en-GB" dirty="0"/>
-              <a:t>4 layers, numbers of neurons, activation functions </a:t>
-            </a:r>
-            <a:r>
-              <a:rPr lang="en-GB" dirty="0" err="1"/>
-              <a:t>relu</a:t>
-            </a:r>
-            <a:r>
-              <a:rPr lang="en-GB" dirty="0"/>
-              <a:t>, first layer had l2 </a:t>
-            </a:r>
-            <a:r>
-              <a:rPr lang="en-GB" dirty="0" err="1"/>
-              <a:t>regulization</a:t>
-            </a:r>
-            <a:r>
-              <a:rPr lang="en-GB" dirty="0"/>
-              <a:t> parameter of 0.001</a:t>
-            </a:r>
-            <a:br>
-              <a:rPr lang="en-GB" dirty="0"/>
-            </a:br>
-            <a:r>
-              <a:rPr lang="en-GB" dirty="0"/>
-              <a:t>Early stop with patience of 50 epochs, restoring best weights</a:t>
-            </a:r>
+            <a:endParaRPr lang="en-GB" dirty="0"/>
           </a:p>
         </p:txBody>
       </p:sp>
@@ -940,52 +883,7 @@
           <a:bodyPr/>
           <a:lstStyle/>
           <a:p>
-            <a:r>
-              <a:rPr lang="en-US" dirty="0"/>
-              <a:t>Data were normalized before entering the model</a:t>
-            </a:r>
-          </a:p>
-          <a:p>
-            <a:br>
-              <a:rPr lang="en-GB" dirty="0"/>
-            </a:br>
-            <a:r>
-              <a:rPr lang="en-GB" dirty="0"/>
-              <a:t>normalized earlier</a:t>
-            </a:r>
-            <a:br>
-              <a:rPr lang="en-GB" dirty="0"/>
-            </a:br>
-            <a:br>
-              <a:rPr lang="en-GB" dirty="0"/>
-            </a:br>
-            <a:r>
-              <a:rPr lang="en-GB" dirty="0"/>
-              <a:t>4 layers, numbers of neurons, activation functions </a:t>
-            </a:r>
-            <a:r>
-              <a:rPr lang="en-GB" dirty="0" err="1"/>
-              <a:t>relu</a:t>
-            </a:r>
-            <a:r>
-              <a:rPr lang="en-GB" dirty="0"/>
-              <a:t>, first layer had l2 </a:t>
-            </a:r>
-            <a:r>
-              <a:rPr lang="en-GB" dirty="0" err="1"/>
-              <a:t>regulization</a:t>
-            </a:r>
-            <a:r>
-              <a:rPr lang="en-GB" dirty="0"/>
-              <a:t> parameter of 0.001</a:t>
-            </a:r>
-            <a:br>
-              <a:rPr lang="en-GB" dirty="0"/>
-            </a:br>
-            <a:r>
-              <a:rPr lang="en-GB" dirty="0"/>
-              <a:t>Early stop with patience of 50 epochs, restoring best weights</a:t>
-            </a:r>
+            <a:endParaRPr lang="en-GB" dirty="0"/>
           </a:p>
         </p:txBody>
       </p:sp>
@@ -1391,294 +1289,6 @@
 </p:notes>
 </file>
 
-<file path=ppt/notesSlides/notesSlide17.xml><?xml version="1.0" encoding="utf-8"?>
-<p:notes xmlns:a="http://schemas.openxmlformats.org/drawingml/2006/main" xmlns:r="http://schemas.openxmlformats.org/officeDocument/2006/relationships" xmlns:p="http://schemas.openxmlformats.org/presentationml/2006/main">
-  <p:cSld>
-    <p:spTree>
-      <p:nvGrpSpPr>
-        <p:cNvPr id="1" name=""/>
-        <p:cNvGrpSpPr/>
-        <p:nvPr/>
-      </p:nvGrpSpPr>
-      <p:grpSpPr>
-        <a:xfrm>
-          <a:off x="0" y="0"/>
-          <a:ext cx="0" cy="0"/>
-          <a:chOff x="0" y="0"/>
-          <a:chExt cx="0" cy="0"/>
-        </a:xfrm>
-      </p:grpSpPr>
-      <p:sp>
-        <p:nvSpPr>
-          <p:cNvPr id="2" name="Slide Image Placeholder 1"/>
-          <p:cNvSpPr>
-            <a:spLocks noGrp="1" noRot="1" noChangeAspect="1"/>
-          </p:cNvSpPr>
-          <p:nvPr>
-            <p:ph type="sldImg"/>
-          </p:nvPr>
-        </p:nvSpPr>
-        <p:spPr/>
-      </p:sp>
-      <p:sp>
-        <p:nvSpPr>
-          <p:cNvPr id="3" name="Notes Placeholder 2"/>
-          <p:cNvSpPr>
-            <a:spLocks noGrp="1"/>
-          </p:cNvSpPr>
-          <p:nvPr>
-            <p:ph type="body" idx="1"/>
-          </p:nvPr>
-        </p:nvSpPr>
-        <p:spPr/>
-        <p:txBody>
-          <a:bodyPr/>
-          <a:lstStyle/>
-          <a:p>
-            <a:r>
-              <a:rPr lang="en-US" dirty="0"/>
-              <a:t>Moved the title bit to make some space </a:t>
-            </a:r>
-            <a:endParaRPr lang="en-GB" dirty="0"/>
-          </a:p>
-        </p:txBody>
-      </p:sp>
-      <p:sp>
-        <p:nvSpPr>
-          <p:cNvPr id="4" name="Slide Number Placeholder 3"/>
-          <p:cNvSpPr>
-            <a:spLocks noGrp="1"/>
-          </p:cNvSpPr>
-          <p:nvPr>
-            <p:ph type="sldNum" sz="quarter" idx="5"/>
-          </p:nvPr>
-        </p:nvSpPr>
-        <p:spPr/>
-        <p:txBody>
-          <a:bodyPr/>
-          <a:lstStyle/>
-          <a:p>
-            <a:fld id="{809340A9-5F99-47E5-A3AD-FD228EA849F8}" type="slidenum">
-              <a:rPr lang="en-GB" smtClean="0"/>
-              <a:t>19</a:t>
-            </a:fld>
-            <a:endParaRPr lang="en-GB"/>
-          </a:p>
-        </p:txBody>
-      </p:sp>
-    </p:spTree>
-    <p:extLst>
-      <p:ext uri="{BB962C8B-B14F-4D97-AF65-F5344CB8AC3E}">
-        <p14:creationId xmlns:p14="http://schemas.microsoft.com/office/powerpoint/2010/main" val="1142162853"/>
-      </p:ext>
-    </p:extLst>
-  </p:cSld>
-  <p:clrMapOvr>
-    <a:masterClrMapping/>
-  </p:clrMapOvr>
-</p:notes>
-</file>
-
-<file path=ppt/notesSlides/notesSlide18.xml><?xml version="1.0" encoding="utf-8"?>
-<p:notes xmlns:a="http://schemas.openxmlformats.org/drawingml/2006/main" xmlns:r="http://schemas.openxmlformats.org/officeDocument/2006/relationships" xmlns:p="http://schemas.openxmlformats.org/presentationml/2006/main">
-  <p:cSld>
-    <p:spTree>
-      <p:nvGrpSpPr>
-        <p:cNvPr id="1" name="">
-          <a:extLst>
-            <a:ext uri="{FF2B5EF4-FFF2-40B4-BE49-F238E27FC236}">
-              <a16:creationId xmlns:a16="http://schemas.microsoft.com/office/drawing/2014/main" id="{571D4BE6-5076-F4CC-4380-200C5217408E}"/>
-            </a:ext>
-          </a:extLst>
-        </p:cNvPr>
-        <p:cNvGrpSpPr/>
-        <p:nvPr/>
-      </p:nvGrpSpPr>
-      <p:grpSpPr>
-        <a:xfrm>
-          <a:off x="0" y="0"/>
-          <a:ext cx="0" cy="0"/>
-          <a:chOff x="0" y="0"/>
-          <a:chExt cx="0" cy="0"/>
-        </a:xfrm>
-      </p:grpSpPr>
-      <p:sp>
-        <p:nvSpPr>
-          <p:cNvPr id="2" name="Slide Image Placeholder 1">
-            <a:extLst>
-              <a:ext uri="{FF2B5EF4-FFF2-40B4-BE49-F238E27FC236}">
-                <a16:creationId xmlns:a16="http://schemas.microsoft.com/office/drawing/2014/main" id="{91287C50-F6AC-DBD0-504D-6644E03F62D1}"/>
-              </a:ext>
-            </a:extLst>
-          </p:cNvPr>
-          <p:cNvSpPr>
-            <a:spLocks noGrp="1" noRot="1" noChangeAspect="1"/>
-          </p:cNvSpPr>
-          <p:nvPr>
-            <p:ph type="sldImg"/>
-          </p:nvPr>
-        </p:nvSpPr>
-        <p:spPr/>
-      </p:sp>
-      <p:sp>
-        <p:nvSpPr>
-          <p:cNvPr id="3" name="Notes Placeholder 2">
-            <a:extLst>
-              <a:ext uri="{FF2B5EF4-FFF2-40B4-BE49-F238E27FC236}">
-                <a16:creationId xmlns:a16="http://schemas.microsoft.com/office/drawing/2014/main" id="{C99B0657-7A19-BB53-C960-5BB6C3C23CB9}"/>
-              </a:ext>
-            </a:extLst>
-          </p:cNvPr>
-          <p:cNvSpPr>
-            <a:spLocks noGrp="1"/>
-          </p:cNvSpPr>
-          <p:nvPr>
-            <p:ph type="body" idx="1"/>
-          </p:nvPr>
-        </p:nvSpPr>
-        <p:spPr/>
-        <p:txBody>
-          <a:bodyPr/>
-          <a:lstStyle/>
-          <a:p>
-            <a:r>
-              <a:rPr lang="en-US" dirty="0"/>
-              <a:t>Moved the title bit to make some space </a:t>
-            </a:r>
-            <a:endParaRPr lang="en-GB" dirty="0"/>
-          </a:p>
-        </p:txBody>
-      </p:sp>
-      <p:sp>
-        <p:nvSpPr>
-          <p:cNvPr id="4" name="Slide Number Placeholder 3">
-            <a:extLst>
-              <a:ext uri="{FF2B5EF4-FFF2-40B4-BE49-F238E27FC236}">
-                <a16:creationId xmlns:a16="http://schemas.microsoft.com/office/drawing/2014/main" id="{F0543FD0-5253-3770-56C4-FFDF19AB2722}"/>
-              </a:ext>
-            </a:extLst>
-          </p:cNvPr>
-          <p:cNvSpPr>
-            <a:spLocks noGrp="1"/>
-          </p:cNvSpPr>
-          <p:nvPr>
-            <p:ph type="sldNum" sz="quarter" idx="5"/>
-          </p:nvPr>
-        </p:nvSpPr>
-        <p:spPr/>
-        <p:txBody>
-          <a:bodyPr/>
-          <a:lstStyle/>
-          <a:p>
-            <a:fld id="{809340A9-5F99-47E5-A3AD-FD228EA849F8}" type="slidenum">
-              <a:rPr lang="en-GB" smtClean="0"/>
-              <a:t>20</a:t>
-            </a:fld>
-            <a:endParaRPr lang="en-GB"/>
-          </a:p>
-        </p:txBody>
-      </p:sp>
-    </p:spTree>
-    <p:extLst>
-      <p:ext uri="{BB962C8B-B14F-4D97-AF65-F5344CB8AC3E}">
-        <p14:creationId xmlns:p14="http://schemas.microsoft.com/office/powerpoint/2010/main" val="2322748972"/>
-      </p:ext>
-    </p:extLst>
-  </p:cSld>
-  <p:clrMapOvr>
-    <a:masterClrMapping/>
-  </p:clrMapOvr>
-</p:notes>
-</file>
-
-<file path=ppt/notesSlides/notesSlide19.xml><?xml version="1.0" encoding="utf-8"?>
-<p:notes xmlns:a="http://schemas.openxmlformats.org/drawingml/2006/main" xmlns:r="http://schemas.openxmlformats.org/officeDocument/2006/relationships" xmlns:p="http://schemas.openxmlformats.org/presentationml/2006/main">
-  <p:cSld>
-    <p:spTree>
-      <p:nvGrpSpPr>
-        <p:cNvPr id="1" name=""/>
-        <p:cNvGrpSpPr/>
-        <p:nvPr/>
-      </p:nvGrpSpPr>
-      <p:grpSpPr>
-        <a:xfrm>
-          <a:off x="0" y="0"/>
-          <a:ext cx="0" cy="0"/>
-          <a:chOff x="0" y="0"/>
-          <a:chExt cx="0" cy="0"/>
-        </a:xfrm>
-      </p:grpSpPr>
-      <p:sp>
-        <p:nvSpPr>
-          <p:cNvPr id="2" name="Slide Image Placeholder 1"/>
-          <p:cNvSpPr>
-            <a:spLocks noGrp="1" noRot="1" noChangeAspect="1"/>
-          </p:cNvSpPr>
-          <p:nvPr>
-            <p:ph type="sldImg"/>
-          </p:nvPr>
-        </p:nvSpPr>
-        <p:spPr/>
-      </p:sp>
-      <p:sp>
-        <p:nvSpPr>
-          <p:cNvPr id="3" name="Notes Placeholder 2"/>
-          <p:cNvSpPr>
-            <a:spLocks noGrp="1"/>
-          </p:cNvSpPr>
-          <p:nvPr>
-            <p:ph type="body" idx="1"/>
-          </p:nvPr>
-        </p:nvSpPr>
-        <p:spPr/>
-        <p:txBody>
-          <a:bodyPr/>
-          <a:lstStyle/>
-          <a:p>
-            <a:r>
-              <a:rPr lang="en-US" dirty="0"/>
-              <a:t>Not sure if we need a whole slide about it, what do you think about it popping in and out of the slide with the full dataset?</a:t>
-            </a:r>
-            <a:endParaRPr lang="en-GB" dirty="0"/>
-          </a:p>
-        </p:txBody>
-      </p:sp>
-      <p:sp>
-        <p:nvSpPr>
-          <p:cNvPr id="4" name="Slide Number Placeholder 3"/>
-          <p:cNvSpPr>
-            <a:spLocks noGrp="1"/>
-          </p:cNvSpPr>
-          <p:nvPr>
-            <p:ph type="sldNum" sz="quarter" idx="5"/>
-          </p:nvPr>
-        </p:nvSpPr>
-        <p:spPr/>
-        <p:txBody>
-          <a:bodyPr/>
-          <a:lstStyle/>
-          <a:p>
-            <a:fld id="{809340A9-5F99-47E5-A3AD-FD228EA849F8}" type="slidenum">
-              <a:rPr lang="en-GB" smtClean="0"/>
-              <a:t>21</a:t>
-            </a:fld>
-            <a:endParaRPr lang="en-GB"/>
-          </a:p>
-        </p:txBody>
-      </p:sp>
-    </p:spTree>
-    <p:extLst>
-      <p:ext uri="{BB962C8B-B14F-4D97-AF65-F5344CB8AC3E}">
-        <p14:creationId xmlns:p14="http://schemas.microsoft.com/office/powerpoint/2010/main" val="3719185097"/>
-      </p:ext>
-    </p:extLst>
-  </p:cSld>
-  <p:clrMapOvr>
-    <a:masterClrMapping/>
-  </p:clrMapOvr>
-</p:notes>
-</file>
-
 <file path=ppt/notesSlides/notesSlide2.xml><?xml version="1.0" encoding="utf-8"?>
 <p:notes xmlns:a="http://schemas.openxmlformats.org/drawingml/2006/main" xmlns:r="http://schemas.openxmlformats.org/officeDocument/2006/relationships" xmlns:p="http://schemas.openxmlformats.org/presentationml/2006/main">
   <p:cSld>
@@ -1754,236 +1364,6 @@
     <p:extLst>
       <p:ext uri="{BB962C8B-B14F-4D97-AF65-F5344CB8AC3E}">
         <p14:creationId xmlns:p14="http://schemas.microsoft.com/office/powerpoint/2010/main" val="1169616615"/>
-      </p:ext>
-    </p:extLst>
-  </p:cSld>
-  <p:clrMapOvr>
-    <a:masterClrMapping/>
-  </p:clrMapOvr>
-</p:notes>
-</file>
-
-<file path=ppt/notesSlides/notesSlide20.xml><?xml version="1.0" encoding="utf-8"?>
-<p:notes xmlns:a="http://schemas.openxmlformats.org/drawingml/2006/main" xmlns:r="http://schemas.openxmlformats.org/officeDocument/2006/relationships" xmlns:p="http://schemas.openxmlformats.org/presentationml/2006/main">
-  <p:cSld>
-    <p:spTree>
-      <p:nvGrpSpPr>
-        <p:cNvPr id="1" name="">
-          <a:extLst>
-            <a:ext uri="{FF2B5EF4-FFF2-40B4-BE49-F238E27FC236}">
-              <a16:creationId xmlns:a16="http://schemas.microsoft.com/office/drawing/2014/main" id="{4868B7AE-DCA0-C088-FA18-C941AC042FAC}"/>
-            </a:ext>
-          </a:extLst>
-        </p:cNvPr>
-        <p:cNvGrpSpPr/>
-        <p:nvPr/>
-      </p:nvGrpSpPr>
-      <p:grpSpPr>
-        <a:xfrm>
-          <a:off x="0" y="0"/>
-          <a:ext cx="0" cy="0"/>
-          <a:chOff x="0" y="0"/>
-          <a:chExt cx="0" cy="0"/>
-        </a:xfrm>
-      </p:grpSpPr>
-      <p:sp>
-        <p:nvSpPr>
-          <p:cNvPr id="2" name="Slide Image Placeholder 1">
-            <a:extLst>
-              <a:ext uri="{FF2B5EF4-FFF2-40B4-BE49-F238E27FC236}">
-                <a16:creationId xmlns:a16="http://schemas.microsoft.com/office/drawing/2014/main" id="{FC2A508A-C9E2-6317-0313-B7D9B3E241B8}"/>
-              </a:ext>
-            </a:extLst>
-          </p:cNvPr>
-          <p:cNvSpPr>
-            <a:spLocks noGrp="1" noRot="1" noChangeAspect="1"/>
-          </p:cNvSpPr>
-          <p:nvPr>
-            <p:ph type="sldImg"/>
-          </p:nvPr>
-        </p:nvSpPr>
-        <p:spPr/>
-      </p:sp>
-      <p:sp>
-        <p:nvSpPr>
-          <p:cNvPr id="3" name="Notes Placeholder 2">
-            <a:extLst>
-              <a:ext uri="{FF2B5EF4-FFF2-40B4-BE49-F238E27FC236}">
-                <a16:creationId xmlns:a16="http://schemas.microsoft.com/office/drawing/2014/main" id="{30B444DD-79C8-9EC0-30B1-0AE0D83ABE16}"/>
-              </a:ext>
-            </a:extLst>
-          </p:cNvPr>
-          <p:cNvSpPr>
-            <a:spLocks noGrp="1"/>
-          </p:cNvSpPr>
-          <p:nvPr>
-            <p:ph type="body" idx="1"/>
-          </p:nvPr>
-        </p:nvSpPr>
-        <p:spPr/>
-        <p:txBody>
-          <a:bodyPr/>
-          <a:lstStyle/>
-          <a:p>
-            <a:r>
-              <a:rPr lang="en-GB" sz="1200" b="0" kern="1200" dirty="0">
-                <a:solidFill>
-                  <a:schemeClr val="tx1"/>
-                </a:solidFill>
-                <a:effectLst/>
-                <a:latin typeface="+mn-lt"/>
-                <a:ea typeface="+mn-ea"/>
-                <a:cs typeface="+mn-cs"/>
-              </a:rPr>
-              <a:t>Made several so we can choose</a:t>
-            </a:r>
-          </a:p>
-          <a:p>
-            <a:endParaRPr lang="en-GB" dirty="0"/>
-          </a:p>
-        </p:txBody>
-      </p:sp>
-      <p:sp>
-        <p:nvSpPr>
-          <p:cNvPr id="4" name="Slide Number Placeholder 3">
-            <a:extLst>
-              <a:ext uri="{FF2B5EF4-FFF2-40B4-BE49-F238E27FC236}">
-                <a16:creationId xmlns:a16="http://schemas.microsoft.com/office/drawing/2014/main" id="{A8A11FBC-1B5B-E39E-006F-B274AD735BBE}"/>
-              </a:ext>
-            </a:extLst>
-          </p:cNvPr>
-          <p:cNvSpPr>
-            <a:spLocks noGrp="1"/>
-          </p:cNvSpPr>
-          <p:nvPr>
-            <p:ph type="sldNum" sz="quarter" idx="5"/>
-          </p:nvPr>
-        </p:nvSpPr>
-        <p:spPr/>
-        <p:txBody>
-          <a:bodyPr/>
-          <a:lstStyle/>
-          <a:p>
-            <a:fld id="{809340A9-5F99-47E5-A3AD-FD228EA849F8}" type="slidenum">
-              <a:rPr lang="en-GB" smtClean="0"/>
-              <a:t>24</a:t>
-            </a:fld>
-            <a:endParaRPr lang="en-GB"/>
-          </a:p>
-        </p:txBody>
-      </p:sp>
-    </p:spTree>
-    <p:extLst>
-      <p:ext uri="{BB962C8B-B14F-4D97-AF65-F5344CB8AC3E}">
-        <p14:creationId xmlns:p14="http://schemas.microsoft.com/office/powerpoint/2010/main" val="487031629"/>
-      </p:ext>
-    </p:extLst>
-  </p:cSld>
-  <p:clrMapOvr>
-    <a:masterClrMapping/>
-  </p:clrMapOvr>
-</p:notes>
-</file>
-
-<file path=ppt/notesSlides/notesSlide21.xml><?xml version="1.0" encoding="utf-8"?>
-<p:notes xmlns:a="http://schemas.openxmlformats.org/drawingml/2006/main" xmlns:r="http://schemas.openxmlformats.org/officeDocument/2006/relationships" xmlns:p="http://schemas.openxmlformats.org/presentationml/2006/main">
-  <p:cSld>
-    <p:spTree>
-      <p:nvGrpSpPr>
-        <p:cNvPr id="1" name="">
-          <a:extLst>
-            <a:ext uri="{FF2B5EF4-FFF2-40B4-BE49-F238E27FC236}">
-              <a16:creationId xmlns:a16="http://schemas.microsoft.com/office/drawing/2014/main" id="{2FCEE60D-B047-017F-1CC1-F6F8A2BCB66C}"/>
-            </a:ext>
-          </a:extLst>
-        </p:cNvPr>
-        <p:cNvGrpSpPr/>
-        <p:nvPr/>
-      </p:nvGrpSpPr>
-      <p:grpSpPr>
-        <a:xfrm>
-          <a:off x="0" y="0"/>
-          <a:ext cx="0" cy="0"/>
-          <a:chOff x="0" y="0"/>
-          <a:chExt cx="0" cy="0"/>
-        </a:xfrm>
-      </p:grpSpPr>
-      <p:sp>
-        <p:nvSpPr>
-          <p:cNvPr id="2" name="Slide Image Placeholder 1">
-            <a:extLst>
-              <a:ext uri="{FF2B5EF4-FFF2-40B4-BE49-F238E27FC236}">
-                <a16:creationId xmlns:a16="http://schemas.microsoft.com/office/drawing/2014/main" id="{D612BA61-FDF9-030A-F8DD-497EAE2C1483}"/>
-              </a:ext>
-            </a:extLst>
-          </p:cNvPr>
-          <p:cNvSpPr>
-            <a:spLocks noGrp="1" noRot="1" noChangeAspect="1"/>
-          </p:cNvSpPr>
-          <p:nvPr>
-            <p:ph type="sldImg"/>
-          </p:nvPr>
-        </p:nvSpPr>
-        <p:spPr/>
-      </p:sp>
-      <p:sp>
-        <p:nvSpPr>
-          <p:cNvPr id="3" name="Notes Placeholder 2">
-            <a:extLst>
-              <a:ext uri="{FF2B5EF4-FFF2-40B4-BE49-F238E27FC236}">
-                <a16:creationId xmlns:a16="http://schemas.microsoft.com/office/drawing/2014/main" id="{C0BC5209-BE17-2121-CBC6-5B90040C7AFB}"/>
-              </a:ext>
-            </a:extLst>
-          </p:cNvPr>
-          <p:cNvSpPr>
-            <a:spLocks noGrp="1"/>
-          </p:cNvSpPr>
-          <p:nvPr>
-            <p:ph type="body" idx="1"/>
-          </p:nvPr>
-        </p:nvSpPr>
-        <p:spPr/>
-        <p:txBody>
-          <a:bodyPr/>
-          <a:lstStyle/>
-          <a:p>
-            <a:endParaRPr lang="en-GB" dirty="0"/>
-          </a:p>
-        </p:txBody>
-      </p:sp>
-      <p:sp>
-        <p:nvSpPr>
-          <p:cNvPr id="4" name="Slide Number Placeholder 3">
-            <a:extLst>
-              <a:ext uri="{FF2B5EF4-FFF2-40B4-BE49-F238E27FC236}">
-                <a16:creationId xmlns:a16="http://schemas.microsoft.com/office/drawing/2014/main" id="{40105A4A-660C-345E-B643-28CC68E0E806}"/>
-              </a:ext>
-            </a:extLst>
-          </p:cNvPr>
-          <p:cNvSpPr>
-            <a:spLocks noGrp="1"/>
-          </p:cNvSpPr>
-          <p:nvPr>
-            <p:ph type="sldNum" sz="quarter" idx="5"/>
-          </p:nvPr>
-        </p:nvSpPr>
-        <p:spPr/>
-        <p:txBody>
-          <a:bodyPr/>
-          <a:lstStyle/>
-          <a:p>
-            <a:fld id="{809340A9-5F99-47E5-A3AD-FD228EA849F8}" type="slidenum">
-              <a:rPr lang="en-GB" smtClean="0"/>
-              <a:t>28</a:t>
-            </a:fld>
-            <a:endParaRPr lang="en-GB"/>
-          </a:p>
-        </p:txBody>
-      </p:sp>
-    </p:spTree>
-    <p:extLst>
-      <p:ext uri="{BB962C8B-B14F-4D97-AF65-F5344CB8AC3E}">
-        <p14:creationId xmlns:p14="http://schemas.microsoft.com/office/powerpoint/2010/main" val="3520578787"/>
       </p:ext>
     </p:extLst>
   </p:cSld>
@@ -2055,52 +1435,7 @@
           <a:bodyPr/>
           <a:lstStyle/>
           <a:p>
-            <a:r>
-              <a:rPr lang="en-GB" sz="1200" b="0" i="0" kern="1200" dirty="0">
-                <a:solidFill>
-                  <a:schemeClr val="tx1"/>
-                </a:solidFill>
-                <a:effectLst/>
-                <a:latin typeface="+mn-lt"/>
-                <a:ea typeface="+mn-ea"/>
-                <a:cs typeface="+mn-cs"/>
-              </a:rPr>
-              <a:t>The Consumer Price Index (CPI) is a measure of the average change over time in the prices paid by consumers for a representative basket of consumer goods and services</a:t>
-            </a:r>
-          </a:p>
-          <a:p>
-            <a:endParaRPr lang="en-GB" sz="1200" b="0" i="0" kern="1200" dirty="0">
-              <a:solidFill>
-                <a:schemeClr val="tx1"/>
-              </a:solidFill>
-              <a:effectLst/>
-              <a:latin typeface="+mn-lt"/>
-              <a:ea typeface="+mn-ea"/>
-              <a:cs typeface="+mn-cs"/>
-            </a:endParaRPr>
-          </a:p>
-          <a:p>
-            <a:r>
-              <a:rPr lang="en-GB" sz="1200" b="0" i="0" kern="1200" dirty="0">
-                <a:solidFill>
-                  <a:schemeClr val="tx1"/>
-                </a:solidFill>
-                <a:effectLst/>
-                <a:latin typeface="+mn-lt"/>
-                <a:ea typeface="+mn-ea"/>
-                <a:cs typeface="+mn-cs"/>
-              </a:rPr>
-              <a:t>Group 6  season  - 0/1 variable from late Oct till late Dec</a:t>
-            </a:r>
-          </a:p>
-          <a:p>
             <a:endParaRPr lang="en-GB" dirty="0"/>
-          </a:p>
-          <a:p>
-            <a:r>
-              <a:rPr lang="en-GB" dirty="0"/>
-              <a:t>The 4 last of the given were not initially made, I made them later while struggling to predict Group 6 </a:t>
-            </a:r>
           </a:p>
         </p:txBody>
       </p:sp>
@@ -2189,12 +1524,6 @@
         <p:txBody>
           <a:bodyPr/>
           <a:lstStyle/>
-          <a:p>
-            <a:r>
-              <a:rPr lang="en-US" dirty="0"/>
-              <a:t>Seasonal score 2= December 1= November 0=anything else </a:t>
-            </a:r>
-          </a:p>
           <a:p>
             <a:endParaRPr lang="en-US" dirty="0"/>
           </a:p>
@@ -4414,12 +3743,6 @@
           <a:bodyPr/>
           <a:lstStyle/>
           <a:p>
-            <a:r>
-              <a:rPr lang="en-US" dirty="0"/>
-              <a:t>Seasonal score 2= December 1= November 0=anything else </a:t>
-            </a:r>
-          </a:p>
-          <a:p>
             <a:endParaRPr lang="en-US" dirty="0"/>
           </a:p>
           <a:p>
@@ -8874,12 +8197,6 @@
           <a:bodyPr/>
           <a:lstStyle/>
           <a:p>
-            <a:r>
-              <a:rPr lang="en-US" dirty="0"/>
-              <a:t>Seasonal score 2= December 1= November 0=anything else </a:t>
-            </a:r>
-          </a:p>
-          <a:p>
             <a:endParaRPr lang="en-US" dirty="0"/>
           </a:p>
           <a:p>
@@ -11104,13 +10421,6 @@
           <a:bodyPr/>
           <a:lstStyle/>
           <a:p>
-            <a:r>
-              <a:rPr lang="en-US" dirty="0"/>
-              <a:t>Moved the title bit to make some space</a:t>
-            </a:r>
-            <a:endParaRPr lang="el-GR" dirty="0"/>
-          </a:p>
-          <a:p>
             <a:endParaRPr lang="el-GR" dirty="0"/>
           </a:p>
           <a:p>
@@ -11434,7 +10744,7 @@
           <a:p>
             <a:fld id="{BC38F1CC-ABF1-4C16-BBB2-7CC8083DBD41}" type="datetime1">
               <a:rPr lang="de-DE" smtClean="0"/>
-              <a:t>03.07.2025</a:t>
+              <a:t>07.07.2025</a:t>
             </a:fld>
             <a:endParaRPr lang="de-DE"/>
           </a:p>
@@ -11634,7 +10944,7 @@
           <a:p>
             <a:fld id="{5AD46073-F360-4B03-9A78-9F6E24BF38BF}" type="datetime1">
               <a:rPr lang="de-DE" smtClean="0"/>
-              <a:t>03.07.2025</a:t>
+              <a:t>07.07.2025</a:t>
             </a:fld>
             <a:endParaRPr lang="de-DE"/>
           </a:p>
@@ -11844,7 +11154,7 @@
           <a:p>
             <a:fld id="{60947668-F355-4DBF-B716-42DB1C64DFB7}" type="datetime1">
               <a:rPr lang="de-DE" smtClean="0"/>
-              <a:t>03.07.2025</a:t>
+              <a:t>07.07.2025</a:t>
             </a:fld>
             <a:endParaRPr lang="de-DE"/>
           </a:p>
@@ -12044,7 +11354,7 @@
           <a:p>
             <a:fld id="{CA09A6BA-2653-433C-BA9E-57AD9EE3A712}" type="datetime1">
               <a:rPr lang="de-DE" smtClean="0"/>
-              <a:t>03.07.2025</a:t>
+              <a:t>07.07.2025</a:t>
             </a:fld>
             <a:endParaRPr lang="de-DE"/>
           </a:p>
@@ -12320,7 +11630,7 @@
           <a:p>
             <a:fld id="{088226A6-5467-47C4-B46A-D1C4752B6C50}" type="datetime1">
               <a:rPr lang="de-DE" smtClean="0"/>
-              <a:t>03.07.2025</a:t>
+              <a:t>07.07.2025</a:t>
             </a:fld>
             <a:endParaRPr lang="de-DE"/>
           </a:p>
@@ -12588,7 +11898,7 @@
           <a:p>
             <a:fld id="{4DAD014D-DF7A-4A17-BE70-CBDCCD05F312}" type="datetime1">
               <a:rPr lang="de-DE" smtClean="0"/>
-              <a:t>03.07.2025</a:t>
+              <a:t>07.07.2025</a:t>
             </a:fld>
             <a:endParaRPr lang="de-DE"/>
           </a:p>
@@ -13003,7 +12313,7 @@
           <a:p>
             <a:fld id="{3DB58879-59D9-4DFD-ACCE-8F9DA76AC11D}" type="datetime1">
               <a:rPr lang="de-DE" smtClean="0"/>
-              <a:t>03.07.2025</a:t>
+              <a:t>07.07.2025</a:t>
             </a:fld>
             <a:endParaRPr lang="de-DE"/>
           </a:p>
@@ -13145,7 +12455,7 @@
           <a:p>
             <a:fld id="{1D668223-0355-4A47-87D8-E56CD5791C42}" type="datetime1">
               <a:rPr lang="de-DE" smtClean="0"/>
-              <a:t>03.07.2025</a:t>
+              <a:t>07.07.2025</a:t>
             </a:fld>
             <a:endParaRPr lang="de-DE"/>
           </a:p>
@@ -13258,7 +12568,7 @@
           <a:p>
             <a:fld id="{EC3C88DA-2725-48DA-8CAB-E21C779E0A52}" type="datetime1">
               <a:rPr lang="de-DE" smtClean="0"/>
-              <a:t>03.07.2025</a:t>
+              <a:t>07.07.2025</a:t>
             </a:fld>
             <a:endParaRPr lang="de-DE"/>
           </a:p>
@@ -13571,7 +12881,7 @@
           <a:p>
             <a:fld id="{F6DFF235-647B-4139-A6C7-FD3E9D31CB9A}" type="datetime1">
               <a:rPr lang="de-DE" smtClean="0"/>
-              <a:t>03.07.2025</a:t>
+              <a:t>07.07.2025</a:t>
             </a:fld>
             <a:endParaRPr lang="de-DE"/>
           </a:p>
@@ -13860,7 +13170,7 @@
           <a:p>
             <a:fld id="{7D1839DE-6FAF-4E43-BF2D-2423A301DC2E}" type="datetime1">
               <a:rPr lang="de-DE" smtClean="0"/>
-              <a:t>03.07.2025</a:t>
+              <a:t>07.07.2025</a:t>
             </a:fld>
             <a:endParaRPr lang="de-DE"/>
           </a:p>
@@ -14103,7 +13413,7 @@
           <a:p>
             <a:fld id="{CC0A0AA2-7FF6-400D-97F4-AF38EF94CB43}" type="datetime1">
               <a:rPr lang="de-DE" smtClean="0"/>
-              <a:t>03.07.2025</a:t>
+              <a:t>07.07.2025</a:t>
             </a:fld>
             <a:endParaRPr lang="de-DE"/>
           </a:p>
@@ -16880,13 +16190,13 @@
   <p:clrMapOvr>
     <a:masterClrMapping/>
   </p:clrMapOvr>
-  <mc:AlternateContent xmlns:mc="http://schemas.openxmlformats.org/markup-compatibility/2006">
-    <mc:Choice xmlns:p159="http://schemas.microsoft.com/office/powerpoint/2015/09/main" Requires="p159">
+  <mc:AlternateContent xmlns:mc="http://schemas.openxmlformats.org/markup-compatibility/2006" xmlns:p159="http://schemas.microsoft.com/office/powerpoint/2015/09/main">
+    <mc:Choice Requires="p159">
       <p:transition xmlns:p14="http://schemas.microsoft.com/office/powerpoint/2010/main" spd="slow" p14:dur="2000">
         <p159:morph option="byObject"/>
       </p:transition>
     </mc:Choice>
-    <mc:Fallback>
+    <mc:Fallback xmlns="">
       <p:transition spd="slow">
         <p:fade/>
       </p:transition>
@@ -19328,290 +18638,6 @@
 </p:sld>
 </file>
 
-<file path=ppt/slides/slide18.xml><?xml version="1.0" encoding="utf-8"?>
-<p:sld xmlns:a="http://schemas.openxmlformats.org/drawingml/2006/main" xmlns:r="http://schemas.openxmlformats.org/officeDocument/2006/relationships" xmlns:p="http://schemas.openxmlformats.org/presentationml/2006/main" show="0">
-  <p:cSld>
-    <p:spTree>
-      <p:nvGrpSpPr>
-        <p:cNvPr id="1" name=""/>
-        <p:cNvGrpSpPr/>
-        <p:nvPr/>
-      </p:nvGrpSpPr>
-      <p:grpSpPr>
-        <a:xfrm>
-          <a:off x="0" y="0"/>
-          <a:ext cx="0" cy="0"/>
-          <a:chOff x="0" y="0"/>
-          <a:chExt cx="0" cy="0"/>
-        </a:xfrm>
-      </p:grpSpPr>
-      <p:sp>
-        <p:nvSpPr>
-          <p:cNvPr id="2" name="Title 1">
-            <a:extLst>
-              <a:ext uri="{FF2B5EF4-FFF2-40B4-BE49-F238E27FC236}">
-                <a16:creationId xmlns:a16="http://schemas.microsoft.com/office/drawing/2014/main" id="{5CEA3B43-3D6D-3AE0-F5E9-98AFED556D50}"/>
-              </a:ext>
-            </a:extLst>
-          </p:cNvPr>
-          <p:cNvSpPr>
-            <a:spLocks noGrp="1"/>
-          </p:cNvSpPr>
-          <p:nvPr>
-            <p:ph type="title"/>
-          </p:nvPr>
-        </p:nvSpPr>
-        <p:spPr>
-          <a:xfrm>
-            <a:off x="1006642" y="2766218"/>
-            <a:ext cx="10515600" cy="1325563"/>
-          </a:xfrm>
-        </p:spPr>
-        <p:txBody>
-          <a:bodyPr/>
-          <a:lstStyle/>
-          <a:p>
-            <a:r>
-              <a:rPr lang="en-US" dirty="0"/>
-              <a:t>AFTER THIS SLIDE ALL THE UNUSED SLIDES</a:t>
-            </a:r>
-            <a:endParaRPr lang="en-GB" dirty="0"/>
-          </a:p>
-        </p:txBody>
-      </p:sp>
-      <p:sp>
-        <p:nvSpPr>
-          <p:cNvPr id="5" name="Slide Number Placeholder 4">
-            <a:extLst>
-              <a:ext uri="{FF2B5EF4-FFF2-40B4-BE49-F238E27FC236}">
-                <a16:creationId xmlns:a16="http://schemas.microsoft.com/office/drawing/2014/main" id="{52A2FF45-92F5-0725-AFA6-3D55E0F66EA7}"/>
-              </a:ext>
-            </a:extLst>
-          </p:cNvPr>
-          <p:cNvSpPr>
-            <a:spLocks noGrp="1"/>
-          </p:cNvSpPr>
-          <p:nvPr>
-            <p:ph type="sldNum" sz="quarter" idx="12"/>
-          </p:nvPr>
-        </p:nvSpPr>
-        <p:spPr/>
-        <p:txBody>
-          <a:bodyPr/>
-          <a:lstStyle/>
-          <a:p>
-            <a:fld id="{FEE63D0E-FFEF-43D1-BE35-64C33AF422FD}" type="slidenum">
-              <a:rPr lang="de-DE" smtClean="0"/>
-              <a:t>18</a:t>
-            </a:fld>
-            <a:endParaRPr lang="de-DE"/>
-          </a:p>
-        </p:txBody>
-      </p:sp>
-    </p:spTree>
-    <p:extLst>
-      <p:ext uri="{BB962C8B-B14F-4D97-AF65-F5344CB8AC3E}">
-        <p14:creationId xmlns:p14="http://schemas.microsoft.com/office/powerpoint/2010/main" val="2952175734"/>
-      </p:ext>
-    </p:extLst>
-  </p:cSld>
-  <p:clrMapOvr>
-    <a:masterClrMapping/>
-  </p:clrMapOvr>
-</p:sld>
-</file>
-
-<file path=ppt/slides/slide19.xml><?xml version="1.0" encoding="utf-8"?>
-<p:sld xmlns:a="http://schemas.openxmlformats.org/drawingml/2006/main" xmlns:r="http://schemas.openxmlformats.org/officeDocument/2006/relationships" xmlns:p="http://schemas.openxmlformats.org/presentationml/2006/main" show="0">
-  <p:cSld>
-    <p:spTree>
-      <p:nvGrpSpPr>
-        <p:cNvPr id="1" name="">
-          <a:extLst>
-            <a:ext uri="{FF2B5EF4-FFF2-40B4-BE49-F238E27FC236}">
-              <a16:creationId xmlns:a16="http://schemas.microsoft.com/office/drawing/2014/main" id="{19BA4A2B-A563-8D25-F91D-B6DE7CF03D39}"/>
-            </a:ext>
-          </a:extLst>
-        </p:cNvPr>
-        <p:cNvGrpSpPr/>
-        <p:nvPr/>
-      </p:nvGrpSpPr>
-      <p:grpSpPr>
-        <a:xfrm>
-          <a:off x="0" y="0"/>
-          <a:ext cx="0" cy="0"/>
-          <a:chOff x="0" y="0"/>
-          <a:chExt cx="0" cy="0"/>
-        </a:xfrm>
-      </p:grpSpPr>
-      <p:sp>
-        <p:nvSpPr>
-          <p:cNvPr id="2" name="TextBox 4">
-            <a:extLst>
-              <a:ext uri="{FF2B5EF4-FFF2-40B4-BE49-F238E27FC236}">
-                <a16:creationId xmlns:a16="http://schemas.microsoft.com/office/drawing/2014/main" id="{0C0CFE69-0BC5-10DD-F40C-9F5B47C9DB68}"/>
-              </a:ext>
-            </a:extLst>
-          </p:cNvPr>
-          <p:cNvSpPr txBox="1"/>
-          <p:nvPr/>
-        </p:nvSpPr>
-        <p:spPr>
-          <a:xfrm>
-            <a:off x="3524719" y="6581001"/>
-            <a:ext cx="5142562" cy="276999"/>
-          </a:xfrm>
-          <a:prstGeom prst="rect">
-            <a:avLst/>
-          </a:prstGeom>
-          <a:noFill/>
-        </p:spPr>
-        <p:txBody>
-          <a:bodyPr wrap="none" rtlCol="0">
-            <a:spAutoFit/>
-          </a:bodyPr>
-          <a:lstStyle/>
-          <a:p>
-            <a:r>
-              <a:rPr lang="en-GB" sz="1200" dirty="0"/>
-              <a:t>Dataset Characteristics </a:t>
-            </a:r>
-            <a:r>
-              <a:rPr lang="en-GB" sz="1200" dirty="0">
-                <a:solidFill>
-                  <a:schemeClr val="bg1">
-                    <a:lumMod val="75000"/>
-                  </a:schemeClr>
-                </a:solidFill>
-                <a:latin typeface="Calibri" panose="020F0502020204030204" pitchFamily="34" charset="0"/>
-                <a:ea typeface="Calibri" panose="020F0502020204030204" pitchFamily="34" charset="0"/>
-                <a:cs typeface="Calibri" panose="020F0502020204030204" pitchFamily="34" charset="0"/>
-              </a:rPr>
-              <a:t>– Baseline Model – Neural Net – Results – Challenges </a:t>
-            </a:r>
-            <a:endParaRPr lang="de-DE" sz="1200" dirty="0">
-              <a:solidFill>
-                <a:schemeClr val="bg1">
-                  <a:lumMod val="75000"/>
-                </a:schemeClr>
-              </a:solidFill>
-            </a:endParaRPr>
-          </a:p>
-        </p:txBody>
-      </p:sp>
-      <p:pic>
-        <p:nvPicPr>
-          <p:cNvPr id="15" name="Grafik 14">
-            <a:extLst>
-              <a:ext uri="{FF2B5EF4-FFF2-40B4-BE49-F238E27FC236}">
-                <a16:creationId xmlns:a16="http://schemas.microsoft.com/office/drawing/2014/main" id="{74329CC1-3E24-3DC9-0709-E6D9815CDA4A}"/>
-              </a:ext>
-            </a:extLst>
-          </p:cNvPr>
-          <p:cNvPicPr>
-            <a:picLocks noChangeAspect="1"/>
-          </p:cNvPicPr>
-          <p:nvPr/>
-        </p:nvPicPr>
-        <p:blipFill>
-          <a:blip r:embed="rId3">
-            <a:extLst>
-              <a:ext uri="{28A0092B-C50C-407E-A947-70E740481C1C}">
-                <a14:useLocalDpi xmlns:a14="http://schemas.microsoft.com/office/drawing/2010/main" val="0"/>
-              </a:ext>
-            </a:extLst>
-          </a:blip>
-          <a:srcRect/>
-          <a:stretch/>
-        </p:blipFill>
-        <p:spPr>
-          <a:xfrm>
-            <a:off x="1446885" y="605696"/>
-            <a:ext cx="9298230" cy="5975305"/>
-          </a:xfrm>
-          <a:prstGeom prst="rect">
-            <a:avLst/>
-          </a:prstGeom>
-        </p:spPr>
-      </p:pic>
-      <p:sp>
-        <p:nvSpPr>
-          <p:cNvPr id="6" name="Title 5">
-            <a:extLst>
-              <a:ext uri="{FF2B5EF4-FFF2-40B4-BE49-F238E27FC236}">
-                <a16:creationId xmlns:a16="http://schemas.microsoft.com/office/drawing/2014/main" id="{8057835F-B58A-52D7-C8E6-AEE22F08828B}"/>
-              </a:ext>
-            </a:extLst>
-          </p:cNvPr>
-          <p:cNvSpPr>
-            <a:spLocks noGrp="1"/>
-          </p:cNvSpPr>
-          <p:nvPr>
-            <p:ph type="title"/>
-          </p:nvPr>
-        </p:nvSpPr>
-        <p:spPr>
-          <a:xfrm>
-            <a:off x="229515" y="136525"/>
-            <a:ext cx="10515600" cy="1325563"/>
-          </a:xfrm>
-        </p:spPr>
-        <p:txBody>
-          <a:bodyPr>
-            <a:normAutofit/>
-          </a:bodyPr>
-          <a:lstStyle/>
-          <a:p>
-            <a:r>
-              <a:rPr lang="en-US" sz="3600" dirty="0"/>
-              <a:t>Dealing with missing values – option 1</a:t>
-            </a:r>
-            <a:endParaRPr lang="en-GB" sz="3600" dirty="0"/>
-          </a:p>
-        </p:txBody>
-      </p:sp>
-      <p:sp>
-        <p:nvSpPr>
-          <p:cNvPr id="3" name="Slide Number Placeholder 2">
-            <a:extLst>
-              <a:ext uri="{FF2B5EF4-FFF2-40B4-BE49-F238E27FC236}">
-                <a16:creationId xmlns:a16="http://schemas.microsoft.com/office/drawing/2014/main" id="{8FF32F49-F7DC-0B5C-D84D-FF46B6A8AA12}"/>
-              </a:ext>
-            </a:extLst>
-          </p:cNvPr>
-          <p:cNvSpPr>
-            <a:spLocks noGrp="1"/>
-          </p:cNvSpPr>
-          <p:nvPr>
-            <p:ph type="sldNum" sz="quarter" idx="12"/>
-          </p:nvPr>
-        </p:nvSpPr>
-        <p:spPr/>
-        <p:txBody>
-          <a:bodyPr/>
-          <a:lstStyle/>
-          <a:p>
-            <a:fld id="{FEE63D0E-FFEF-43D1-BE35-64C33AF422FD}" type="slidenum">
-              <a:rPr lang="de-DE" smtClean="0"/>
-              <a:t>19</a:t>
-            </a:fld>
-            <a:endParaRPr lang="de-DE"/>
-          </a:p>
-        </p:txBody>
-      </p:sp>
-    </p:spTree>
-    <p:extLst>
-      <p:ext uri="{BB962C8B-B14F-4D97-AF65-F5344CB8AC3E}">
-        <p14:creationId xmlns:p14="http://schemas.microsoft.com/office/powerpoint/2010/main" val="480653654"/>
-      </p:ext>
-    </p:extLst>
-  </p:cSld>
-  <p:clrMapOvr>
-    <a:masterClrMapping/>
-  </p:clrMapOvr>
-</p:sld>
-</file>
-
 <file path=ppt/slides/slide2.xml><?xml version="1.0" encoding="utf-8"?>
 <p:sld xmlns:a="http://schemas.openxmlformats.org/drawingml/2006/main" xmlns:r="http://schemas.openxmlformats.org/officeDocument/2006/relationships" xmlns:p="http://schemas.openxmlformats.org/presentationml/2006/main">
   <p:cSld>
@@ -26333,3039 +25359,6 @@
     <p:extLst>
       <p:ext uri="{BB962C8B-B14F-4D97-AF65-F5344CB8AC3E}">
         <p14:creationId xmlns:p14="http://schemas.microsoft.com/office/powerpoint/2010/main" val="473828746"/>
-      </p:ext>
-    </p:extLst>
-  </p:cSld>
-  <p:clrMapOvr>
-    <a:masterClrMapping/>
-  </p:clrMapOvr>
-</p:sld>
-</file>
-
-<file path=ppt/slides/slide20.xml><?xml version="1.0" encoding="utf-8"?>
-<p:sld xmlns:a="http://schemas.openxmlformats.org/drawingml/2006/main" xmlns:r="http://schemas.openxmlformats.org/officeDocument/2006/relationships" xmlns:p="http://schemas.openxmlformats.org/presentationml/2006/main" show="0">
-  <p:cSld>
-    <p:spTree>
-      <p:nvGrpSpPr>
-        <p:cNvPr id="1" name="">
-          <a:extLst>
-            <a:ext uri="{FF2B5EF4-FFF2-40B4-BE49-F238E27FC236}">
-              <a16:creationId xmlns:a16="http://schemas.microsoft.com/office/drawing/2014/main" id="{D7E8F26B-EEDF-1BF1-8C15-F07959807FCA}"/>
-            </a:ext>
-          </a:extLst>
-        </p:cNvPr>
-        <p:cNvGrpSpPr/>
-        <p:nvPr/>
-      </p:nvGrpSpPr>
-      <p:grpSpPr>
-        <a:xfrm>
-          <a:off x="0" y="0"/>
-          <a:ext cx="0" cy="0"/>
-          <a:chOff x="0" y="0"/>
-          <a:chExt cx="0" cy="0"/>
-        </a:xfrm>
-      </p:grpSpPr>
-      <p:sp>
-        <p:nvSpPr>
-          <p:cNvPr id="2" name="TextBox 4">
-            <a:extLst>
-              <a:ext uri="{FF2B5EF4-FFF2-40B4-BE49-F238E27FC236}">
-                <a16:creationId xmlns:a16="http://schemas.microsoft.com/office/drawing/2014/main" id="{2FA2429B-E532-AE85-3480-7E523B4796F2}"/>
-              </a:ext>
-            </a:extLst>
-          </p:cNvPr>
-          <p:cNvSpPr txBox="1"/>
-          <p:nvPr/>
-        </p:nvSpPr>
-        <p:spPr>
-          <a:xfrm>
-            <a:off x="3524719" y="6581001"/>
-            <a:ext cx="5142562" cy="276999"/>
-          </a:xfrm>
-          <a:prstGeom prst="rect">
-            <a:avLst/>
-          </a:prstGeom>
-          <a:noFill/>
-        </p:spPr>
-        <p:txBody>
-          <a:bodyPr wrap="none" rtlCol="0">
-            <a:spAutoFit/>
-          </a:bodyPr>
-          <a:lstStyle/>
-          <a:p>
-            <a:r>
-              <a:rPr lang="en-GB" sz="1200" dirty="0"/>
-              <a:t>Dataset Characteristics </a:t>
-            </a:r>
-            <a:r>
-              <a:rPr lang="en-GB" sz="1200" dirty="0">
-                <a:solidFill>
-                  <a:schemeClr val="bg1">
-                    <a:lumMod val="75000"/>
-                  </a:schemeClr>
-                </a:solidFill>
-                <a:latin typeface="Calibri" panose="020F0502020204030204" pitchFamily="34" charset="0"/>
-                <a:ea typeface="Calibri" panose="020F0502020204030204" pitchFamily="34" charset="0"/>
-                <a:cs typeface="Calibri" panose="020F0502020204030204" pitchFamily="34" charset="0"/>
-              </a:rPr>
-              <a:t>– Baseline Model – Neural Net – Results – Challenges </a:t>
-            </a:r>
-            <a:endParaRPr lang="de-DE" sz="1200" dirty="0">
-              <a:solidFill>
-                <a:schemeClr val="bg1">
-                  <a:lumMod val="75000"/>
-                </a:schemeClr>
-              </a:solidFill>
-            </a:endParaRPr>
-          </a:p>
-        </p:txBody>
-      </p:sp>
-      <p:pic>
-        <p:nvPicPr>
-          <p:cNvPr id="15" name="Grafik 14">
-            <a:extLst>
-              <a:ext uri="{FF2B5EF4-FFF2-40B4-BE49-F238E27FC236}">
-                <a16:creationId xmlns:a16="http://schemas.microsoft.com/office/drawing/2014/main" id="{DF7EEF2A-24E4-134A-46AC-94E8AD3E4C25}"/>
-              </a:ext>
-            </a:extLst>
-          </p:cNvPr>
-          <p:cNvPicPr>
-            <a:picLocks noChangeAspect="1"/>
-          </p:cNvPicPr>
-          <p:nvPr/>
-        </p:nvPicPr>
-        <p:blipFill>
-          <a:blip r:embed="rId3">
-            <a:extLst>
-              <a:ext uri="{28A0092B-C50C-407E-A947-70E740481C1C}">
-                <a14:useLocalDpi xmlns:a14="http://schemas.microsoft.com/office/drawing/2010/main" val="0"/>
-              </a:ext>
-            </a:extLst>
-          </a:blip>
-          <a:srcRect/>
-          <a:stretch/>
-        </p:blipFill>
-        <p:spPr>
-          <a:xfrm>
-            <a:off x="1446885" y="666332"/>
-            <a:ext cx="9298230" cy="5854033"/>
-          </a:xfrm>
-          <a:prstGeom prst="rect">
-            <a:avLst/>
-          </a:prstGeom>
-        </p:spPr>
-      </p:pic>
-      <p:sp>
-        <p:nvSpPr>
-          <p:cNvPr id="3" name="Slide Number Placeholder 2">
-            <a:extLst>
-              <a:ext uri="{FF2B5EF4-FFF2-40B4-BE49-F238E27FC236}">
-                <a16:creationId xmlns:a16="http://schemas.microsoft.com/office/drawing/2014/main" id="{44E60219-8521-0713-2F56-D31622D060CC}"/>
-              </a:ext>
-            </a:extLst>
-          </p:cNvPr>
-          <p:cNvSpPr>
-            <a:spLocks noGrp="1"/>
-          </p:cNvSpPr>
-          <p:nvPr>
-            <p:ph type="sldNum" sz="quarter" idx="12"/>
-          </p:nvPr>
-        </p:nvSpPr>
-        <p:spPr/>
-        <p:txBody>
-          <a:bodyPr/>
-          <a:lstStyle/>
-          <a:p>
-            <a:fld id="{FEE63D0E-FFEF-43D1-BE35-64C33AF422FD}" type="slidenum">
-              <a:rPr lang="de-DE" smtClean="0"/>
-              <a:t>20</a:t>
-            </a:fld>
-            <a:endParaRPr lang="de-DE"/>
-          </a:p>
-        </p:txBody>
-      </p:sp>
-      <p:sp>
-        <p:nvSpPr>
-          <p:cNvPr id="7" name="Title 5">
-            <a:extLst>
-              <a:ext uri="{FF2B5EF4-FFF2-40B4-BE49-F238E27FC236}">
-                <a16:creationId xmlns:a16="http://schemas.microsoft.com/office/drawing/2014/main" id="{4BC40D21-5199-EE84-FCBB-876E1155AA80}"/>
-              </a:ext>
-            </a:extLst>
-          </p:cNvPr>
-          <p:cNvSpPr txBox="1">
-            <a:spLocks/>
-          </p:cNvSpPr>
-          <p:nvPr/>
-        </p:nvSpPr>
-        <p:spPr>
-          <a:xfrm>
-            <a:off x="229515" y="136525"/>
-            <a:ext cx="10515600" cy="1325563"/>
-          </a:xfrm>
-          <a:prstGeom prst="rect">
-            <a:avLst/>
-          </a:prstGeom>
-        </p:spPr>
-        <p:txBody>
-          <a:bodyPr vert="horz" lIns="91440" tIns="45720" rIns="91440" bIns="45720" rtlCol="0" anchor="ctr">
-            <a:normAutofit/>
-          </a:bodyPr>
-          <a:lstStyle>
-            <a:lvl1pPr algn="l" defTabSz="914400" rtl="0" eaLnBrk="1" latinLnBrk="0" hangingPunct="1">
-              <a:lnSpc>
-                <a:spcPct val="90000"/>
-              </a:lnSpc>
-              <a:spcBef>
-                <a:spcPct val="0"/>
-              </a:spcBef>
-              <a:buNone/>
-              <a:defRPr sz="4400" kern="1200">
-                <a:solidFill>
-                  <a:schemeClr val="tx1"/>
-                </a:solidFill>
-                <a:latin typeface="+mj-lt"/>
-                <a:ea typeface="+mj-ea"/>
-                <a:cs typeface="+mj-cs"/>
-              </a:defRPr>
-            </a:lvl1pPr>
-          </a:lstStyle>
-          <a:p>
-            <a:r>
-              <a:rPr lang="en-US" sz="3600"/>
-              <a:t>Dealing with missing values</a:t>
-            </a:r>
-            <a:endParaRPr lang="en-GB" sz="3600" dirty="0"/>
-          </a:p>
-        </p:txBody>
-      </p:sp>
-    </p:spTree>
-    <p:extLst>
-      <p:ext uri="{BB962C8B-B14F-4D97-AF65-F5344CB8AC3E}">
-        <p14:creationId xmlns:p14="http://schemas.microsoft.com/office/powerpoint/2010/main" val="4007710550"/>
-      </p:ext>
-    </p:extLst>
-  </p:cSld>
-  <p:clrMapOvr>
-    <a:masterClrMapping/>
-  </p:clrMapOvr>
-</p:sld>
-</file>
-
-<file path=ppt/slides/slide21.xml><?xml version="1.0" encoding="utf-8"?>
-<p:sld xmlns:a="http://schemas.openxmlformats.org/drawingml/2006/main" xmlns:r="http://schemas.openxmlformats.org/officeDocument/2006/relationships" xmlns:p="http://schemas.openxmlformats.org/presentationml/2006/main" show="0">
-  <p:cSld>
-    <p:spTree>
-      <p:nvGrpSpPr>
-        <p:cNvPr id="1" name="">
-          <a:extLst>
-            <a:ext uri="{FF2B5EF4-FFF2-40B4-BE49-F238E27FC236}">
-              <a16:creationId xmlns:a16="http://schemas.microsoft.com/office/drawing/2014/main" id="{5A2B9FEE-4B08-6D63-A4FF-795B22CCFECF}"/>
-            </a:ext>
-          </a:extLst>
-        </p:cNvPr>
-        <p:cNvGrpSpPr/>
-        <p:nvPr/>
-      </p:nvGrpSpPr>
-      <p:grpSpPr>
-        <a:xfrm>
-          <a:off x="0" y="0"/>
-          <a:ext cx="0" cy="0"/>
-          <a:chOff x="0" y="0"/>
-          <a:chExt cx="0" cy="0"/>
-        </a:xfrm>
-      </p:grpSpPr>
-      <p:sp>
-        <p:nvSpPr>
-          <p:cNvPr id="2" name="TextBox 4">
-            <a:extLst>
-              <a:ext uri="{FF2B5EF4-FFF2-40B4-BE49-F238E27FC236}">
-                <a16:creationId xmlns:a16="http://schemas.microsoft.com/office/drawing/2014/main" id="{861558DA-2C5D-8E45-448B-CFFE926B267E}"/>
-              </a:ext>
-            </a:extLst>
-          </p:cNvPr>
-          <p:cNvSpPr txBox="1"/>
-          <p:nvPr/>
-        </p:nvSpPr>
-        <p:spPr>
-          <a:xfrm>
-            <a:off x="3524719" y="6581001"/>
-            <a:ext cx="5142562" cy="276999"/>
-          </a:xfrm>
-          <a:prstGeom prst="rect">
-            <a:avLst/>
-          </a:prstGeom>
-          <a:noFill/>
-        </p:spPr>
-        <p:txBody>
-          <a:bodyPr wrap="none" rtlCol="0">
-            <a:spAutoFit/>
-          </a:bodyPr>
-          <a:lstStyle/>
-          <a:p>
-            <a:r>
-              <a:rPr lang="en-GB" sz="1200" dirty="0"/>
-              <a:t>Dataset Characteristics </a:t>
-            </a:r>
-            <a:r>
-              <a:rPr lang="en-GB" sz="1200" dirty="0">
-                <a:solidFill>
-                  <a:schemeClr val="bg1">
-                    <a:lumMod val="75000"/>
-                  </a:schemeClr>
-                </a:solidFill>
-                <a:latin typeface="Calibri" panose="020F0502020204030204" pitchFamily="34" charset="0"/>
-                <a:ea typeface="Calibri" panose="020F0502020204030204" pitchFamily="34" charset="0"/>
-                <a:cs typeface="Calibri" panose="020F0502020204030204" pitchFamily="34" charset="0"/>
-              </a:rPr>
-              <a:t>– Baseline Model – Neural Net – Results – Challenges </a:t>
-            </a:r>
-            <a:endParaRPr lang="de-DE" sz="1200" dirty="0">
-              <a:solidFill>
-                <a:schemeClr val="bg1">
-                  <a:lumMod val="75000"/>
-                </a:schemeClr>
-              </a:solidFill>
-            </a:endParaRPr>
-          </a:p>
-        </p:txBody>
-      </p:sp>
-      <p:pic>
-        <p:nvPicPr>
-          <p:cNvPr id="15" name="Grafik 14">
-            <a:extLst>
-              <a:ext uri="{FF2B5EF4-FFF2-40B4-BE49-F238E27FC236}">
-                <a16:creationId xmlns:a16="http://schemas.microsoft.com/office/drawing/2014/main" id="{363918E8-E9CF-0F0E-2A7E-23840F8B1020}"/>
-              </a:ext>
-            </a:extLst>
-          </p:cNvPr>
-          <p:cNvPicPr>
-            <a:picLocks noChangeAspect="1"/>
-          </p:cNvPicPr>
-          <p:nvPr/>
-        </p:nvPicPr>
-        <p:blipFill>
-          <a:blip r:embed="rId3">
-            <a:extLst>
-              <a:ext uri="{28A0092B-C50C-407E-A947-70E740481C1C}">
-                <a14:useLocalDpi xmlns:a14="http://schemas.microsoft.com/office/drawing/2010/main" val="0"/>
-              </a:ext>
-            </a:extLst>
-          </a:blip>
-          <a:srcRect/>
-          <a:stretch/>
-        </p:blipFill>
-        <p:spPr>
-          <a:xfrm>
-            <a:off x="1156670" y="-129755"/>
-            <a:ext cx="9878660" cy="6486105"/>
-          </a:xfrm>
-          <a:prstGeom prst="rect">
-            <a:avLst/>
-          </a:prstGeom>
-        </p:spPr>
-      </p:pic>
-      <p:sp>
-        <p:nvSpPr>
-          <p:cNvPr id="3" name="Slide Number Placeholder 2">
-            <a:extLst>
-              <a:ext uri="{FF2B5EF4-FFF2-40B4-BE49-F238E27FC236}">
-                <a16:creationId xmlns:a16="http://schemas.microsoft.com/office/drawing/2014/main" id="{B1B44934-BC28-F8ED-5A8B-24681CB3FFEF}"/>
-              </a:ext>
-            </a:extLst>
-          </p:cNvPr>
-          <p:cNvSpPr>
-            <a:spLocks noGrp="1"/>
-          </p:cNvSpPr>
-          <p:nvPr>
-            <p:ph type="sldNum" sz="quarter" idx="12"/>
-          </p:nvPr>
-        </p:nvSpPr>
-        <p:spPr/>
-        <p:txBody>
-          <a:bodyPr/>
-          <a:lstStyle/>
-          <a:p>
-            <a:fld id="{FEE63D0E-FFEF-43D1-BE35-64C33AF422FD}" type="slidenum">
-              <a:rPr lang="de-DE" smtClean="0"/>
-              <a:t>21</a:t>
-            </a:fld>
-            <a:endParaRPr lang="de-DE"/>
-          </a:p>
-        </p:txBody>
-      </p:sp>
-    </p:spTree>
-    <p:extLst>
-      <p:ext uri="{BB962C8B-B14F-4D97-AF65-F5344CB8AC3E}">
-        <p14:creationId xmlns:p14="http://schemas.microsoft.com/office/powerpoint/2010/main" val="571893914"/>
-      </p:ext>
-    </p:extLst>
-  </p:cSld>
-  <p:clrMapOvr>
-    <a:masterClrMapping/>
-  </p:clrMapOvr>
-</p:sld>
-</file>
-
-<file path=ppt/slides/slide22.xml><?xml version="1.0" encoding="utf-8"?>
-<p:sld xmlns:a="http://schemas.openxmlformats.org/drawingml/2006/main" xmlns:r="http://schemas.openxmlformats.org/officeDocument/2006/relationships" xmlns:p="http://schemas.openxmlformats.org/presentationml/2006/main" show="0">
-  <p:cSld>
-    <p:bg>
-      <p:bgPr>
-        <a:solidFill>
-          <a:schemeClr val="tx1"/>
-        </a:solidFill>
-        <a:effectLst/>
-      </p:bgPr>
-    </p:bg>
-    <p:spTree>
-      <p:nvGrpSpPr>
-        <p:cNvPr id="1" name="">
-          <a:extLst>
-            <a:ext uri="{FF2B5EF4-FFF2-40B4-BE49-F238E27FC236}">
-              <a16:creationId xmlns:a16="http://schemas.microsoft.com/office/drawing/2014/main" id="{3DBD1E63-5B3F-2587-2ECC-07EE6B2AF7EB}"/>
-            </a:ext>
-          </a:extLst>
-        </p:cNvPr>
-        <p:cNvGrpSpPr/>
-        <p:nvPr/>
-      </p:nvGrpSpPr>
-      <p:grpSpPr>
-        <a:xfrm>
-          <a:off x="0" y="0"/>
-          <a:ext cx="0" cy="0"/>
-          <a:chOff x="0" y="0"/>
-          <a:chExt cx="0" cy="0"/>
-        </a:xfrm>
-      </p:grpSpPr>
-      <p:pic>
-        <p:nvPicPr>
-          <p:cNvPr id="7" name="Grafik 6">
-            <a:extLst>
-              <a:ext uri="{FF2B5EF4-FFF2-40B4-BE49-F238E27FC236}">
-                <a16:creationId xmlns:a16="http://schemas.microsoft.com/office/drawing/2014/main" id="{44F6CDAE-08BF-E64C-E50F-6340BA704422}"/>
-              </a:ext>
-            </a:extLst>
-          </p:cNvPr>
-          <p:cNvPicPr>
-            <a:picLocks noChangeAspect="1"/>
-          </p:cNvPicPr>
-          <p:nvPr/>
-        </p:nvPicPr>
-        <p:blipFill>
-          <a:blip r:embed="rId2">
-            <a:extLst>
-              <a:ext uri="{28A0092B-C50C-407E-A947-70E740481C1C}">
-                <a14:useLocalDpi xmlns:a14="http://schemas.microsoft.com/office/drawing/2010/main" val="0"/>
-              </a:ext>
-            </a:extLst>
-          </a:blip>
-          <a:srcRect/>
-          <a:stretch/>
-        </p:blipFill>
-        <p:spPr>
-          <a:xfrm>
-            <a:off x="464484" y="0"/>
-            <a:ext cx="11263031" cy="6858000"/>
-          </a:xfrm>
-          <a:prstGeom prst="rect">
-            <a:avLst/>
-          </a:prstGeom>
-        </p:spPr>
-      </p:pic>
-      <p:sp>
-        <p:nvSpPr>
-          <p:cNvPr id="4" name="TextBox 4">
-            <a:extLst>
-              <a:ext uri="{FF2B5EF4-FFF2-40B4-BE49-F238E27FC236}">
-                <a16:creationId xmlns:a16="http://schemas.microsoft.com/office/drawing/2014/main" id="{C5634A94-AF14-F23F-C63C-4A4C613B1048}"/>
-              </a:ext>
-            </a:extLst>
-          </p:cNvPr>
-          <p:cNvSpPr txBox="1"/>
-          <p:nvPr/>
-        </p:nvSpPr>
-        <p:spPr>
-          <a:xfrm>
-            <a:off x="3524719" y="6581001"/>
-            <a:ext cx="5142562" cy="276999"/>
-          </a:xfrm>
-          <a:prstGeom prst="rect">
-            <a:avLst/>
-          </a:prstGeom>
-          <a:solidFill>
-            <a:schemeClr val="bg1"/>
-          </a:solidFill>
-          <a:ln w="12700">
-            <a:solidFill>
-              <a:srgbClr val="7030A0"/>
-            </a:solidFill>
-          </a:ln>
-        </p:spPr>
-        <p:txBody>
-          <a:bodyPr wrap="none" rtlCol="0">
-            <a:spAutoFit/>
-          </a:bodyPr>
-          <a:lstStyle/>
-          <a:p>
-            <a:r>
-              <a:rPr lang="en-GB" sz="1200" dirty="0">
-                <a:solidFill>
-                  <a:schemeClr val="bg1">
-                    <a:lumMod val="75000"/>
-                  </a:schemeClr>
-                </a:solidFill>
-              </a:rPr>
-              <a:t>Dataset Characteristics </a:t>
-            </a:r>
-            <a:r>
-              <a:rPr lang="en-GB" sz="1200" dirty="0">
-                <a:solidFill>
-                  <a:schemeClr val="bg1">
-                    <a:lumMod val="75000"/>
-                  </a:schemeClr>
-                </a:solidFill>
-                <a:latin typeface="Calibri" panose="020F0502020204030204" pitchFamily="34" charset="0"/>
-                <a:ea typeface="Calibri" panose="020F0502020204030204" pitchFamily="34" charset="0"/>
-                <a:cs typeface="Calibri" panose="020F0502020204030204" pitchFamily="34" charset="0"/>
-              </a:rPr>
-              <a:t>– Baseline Model – </a:t>
-            </a:r>
-            <a:r>
-              <a:rPr lang="en-GB" sz="1200" dirty="0">
-                <a:latin typeface="Calibri" panose="020F0502020204030204" pitchFamily="34" charset="0"/>
-                <a:ea typeface="Calibri" panose="020F0502020204030204" pitchFamily="34" charset="0"/>
-                <a:cs typeface="Calibri" panose="020F0502020204030204" pitchFamily="34" charset="0"/>
-              </a:rPr>
-              <a:t>Neural Net </a:t>
-            </a:r>
-            <a:r>
-              <a:rPr lang="en-GB" sz="1200" dirty="0">
-                <a:solidFill>
-                  <a:schemeClr val="bg1">
-                    <a:lumMod val="75000"/>
-                  </a:schemeClr>
-                </a:solidFill>
-                <a:latin typeface="Calibri" panose="020F0502020204030204" pitchFamily="34" charset="0"/>
-                <a:ea typeface="Calibri" panose="020F0502020204030204" pitchFamily="34" charset="0"/>
-                <a:cs typeface="Calibri" panose="020F0502020204030204" pitchFamily="34" charset="0"/>
-              </a:rPr>
-              <a:t>– Results – Challenges </a:t>
-            </a:r>
-            <a:endParaRPr lang="de-DE" sz="1200" dirty="0">
-              <a:solidFill>
-                <a:schemeClr val="bg1">
-                  <a:lumMod val="75000"/>
-                </a:schemeClr>
-              </a:solidFill>
-            </a:endParaRPr>
-          </a:p>
-        </p:txBody>
-      </p:sp>
-      <p:sp>
-        <p:nvSpPr>
-          <p:cNvPr id="2" name="Slide Number Placeholder 1">
-            <a:extLst>
-              <a:ext uri="{FF2B5EF4-FFF2-40B4-BE49-F238E27FC236}">
-                <a16:creationId xmlns:a16="http://schemas.microsoft.com/office/drawing/2014/main" id="{F79C6682-84CB-F038-85C4-D1C6DCB1FF34}"/>
-              </a:ext>
-            </a:extLst>
-          </p:cNvPr>
-          <p:cNvSpPr>
-            <a:spLocks noGrp="1"/>
-          </p:cNvSpPr>
-          <p:nvPr>
-            <p:ph type="sldNum" sz="quarter" idx="12"/>
-          </p:nvPr>
-        </p:nvSpPr>
-        <p:spPr/>
-        <p:txBody>
-          <a:bodyPr/>
-          <a:lstStyle/>
-          <a:p>
-            <a:fld id="{FEE63D0E-FFEF-43D1-BE35-64C33AF422FD}" type="slidenum">
-              <a:rPr lang="de-DE" smtClean="0"/>
-              <a:t>22</a:t>
-            </a:fld>
-            <a:endParaRPr lang="de-DE"/>
-          </a:p>
-        </p:txBody>
-      </p:sp>
-    </p:spTree>
-    <p:extLst>
-      <p:ext uri="{BB962C8B-B14F-4D97-AF65-F5344CB8AC3E}">
-        <p14:creationId xmlns:p14="http://schemas.microsoft.com/office/powerpoint/2010/main" val="2699491584"/>
-      </p:ext>
-    </p:extLst>
-  </p:cSld>
-  <p:clrMapOvr>
-    <a:masterClrMapping/>
-  </p:clrMapOvr>
-</p:sld>
-</file>
-
-<file path=ppt/slides/slide23.xml><?xml version="1.0" encoding="utf-8"?>
-<p:sld xmlns:a="http://schemas.openxmlformats.org/drawingml/2006/main" xmlns:r="http://schemas.openxmlformats.org/officeDocument/2006/relationships" xmlns:p="http://schemas.openxmlformats.org/presentationml/2006/main" show="0">
-  <p:cSld>
-    <p:spTree>
-      <p:nvGrpSpPr>
-        <p:cNvPr id="1" name="">
-          <a:extLst>
-            <a:ext uri="{FF2B5EF4-FFF2-40B4-BE49-F238E27FC236}">
-              <a16:creationId xmlns:a16="http://schemas.microsoft.com/office/drawing/2014/main" id="{080F9B6C-ADC8-1490-E36A-62E075121EA4}"/>
-            </a:ext>
-          </a:extLst>
-        </p:cNvPr>
-        <p:cNvGrpSpPr/>
-        <p:nvPr/>
-      </p:nvGrpSpPr>
-      <p:grpSpPr>
-        <a:xfrm>
-          <a:off x="0" y="0"/>
-          <a:ext cx="0" cy="0"/>
-          <a:chOff x="0" y="0"/>
-          <a:chExt cx="0" cy="0"/>
-        </a:xfrm>
-      </p:grpSpPr>
-      <p:pic>
-        <p:nvPicPr>
-          <p:cNvPr id="4" name="Grafik 3" descr="Ein Bild, das Text, Screenshot, Diagramm, Reihe enthält.&#10;&#10;KI-generierte Inhalte können fehlerhaft sein.">
-            <a:extLst>
-              <a:ext uri="{FF2B5EF4-FFF2-40B4-BE49-F238E27FC236}">
-                <a16:creationId xmlns:a16="http://schemas.microsoft.com/office/drawing/2014/main" id="{42986ED7-7F81-65BF-4E62-4C08801FBF9C}"/>
-              </a:ext>
-            </a:extLst>
-          </p:cNvPr>
-          <p:cNvPicPr>
-            <a:picLocks noChangeAspect="1"/>
-          </p:cNvPicPr>
-          <p:nvPr/>
-        </p:nvPicPr>
-        <p:blipFill>
-          <a:blip r:embed="rId2">
-            <a:extLst>
-              <a:ext uri="{28A0092B-C50C-407E-A947-70E740481C1C}">
-                <a14:useLocalDpi xmlns:a14="http://schemas.microsoft.com/office/drawing/2010/main" val="0"/>
-              </a:ext>
-            </a:extLst>
-          </a:blip>
-          <a:stretch>
-            <a:fillRect/>
-          </a:stretch>
-        </p:blipFill>
-        <p:spPr>
-          <a:xfrm>
-            <a:off x="456605" y="470780"/>
-            <a:ext cx="11278789" cy="5639395"/>
-          </a:xfrm>
-          <a:prstGeom prst="rect">
-            <a:avLst/>
-          </a:prstGeom>
-        </p:spPr>
-      </p:pic>
-      <p:sp>
-        <p:nvSpPr>
-          <p:cNvPr id="7" name="TextBox 4">
-            <a:extLst>
-              <a:ext uri="{FF2B5EF4-FFF2-40B4-BE49-F238E27FC236}">
-                <a16:creationId xmlns:a16="http://schemas.microsoft.com/office/drawing/2014/main" id="{53BAA4C1-94F1-F42B-C394-4865B7E235D6}"/>
-              </a:ext>
-            </a:extLst>
-          </p:cNvPr>
-          <p:cNvSpPr txBox="1"/>
-          <p:nvPr/>
-        </p:nvSpPr>
-        <p:spPr>
-          <a:xfrm>
-            <a:off x="3524719" y="6581001"/>
-            <a:ext cx="5142562" cy="276999"/>
-          </a:xfrm>
-          <a:prstGeom prst="rect">
-            <a:avLst/>
-          </a:prstGeom>
-          <a:noFill/>
-        </p:spPr>
-        <p:txBody>
-          <a:bodyPr wrap="none" rtlCol="0">
-            <a:spAutoFit/>
-          </a:bodyPr>
-          <a:lstStyle/>
-          <a:p>
-            <a:r>
-              <a:rPr lang="en-GB" sz="1200" dirty="0">
-                <a:solidFill>
-                  <a:schemeClr val="bg1">
-                    <a:lumMod val="75000"/>
-                  </a:schemeClr>
-                </a:solidFill>
-              </a:rPr>
-              <a:t>Dataset Characteristics </a:t>
-            </a:r>
-            <a:r>
-              <a:rPr lang="en-GB" sz="1200" dirty="0">
-                <a:solidFill>
-                  <a:schemeClr val="bg1">
-                    <a:lumMod val="75000"/>
-                  </a:schemeClr>
-                </a:solidFill>
-                <a:latin typeface="Calibri" panose="020F0502020204030204" pitchFamily="34" charset="0"/>
-                <a:ea typeface="Calibri" panose="020F0502020204030204" pitchFamily="34" charset="0"/>
-                <a:cs typeface="Calibri" panose="020F0502020204030204" pitchFamily="34" charset="0"/>
-              </a:rPr>
-              <a:t>– Baseline Model – </a:t>
-            </a:r>
-            <a:r>
-              <a:rPr lang="en-GB" sz="1200" dirty="0">
-                <a:latin typeface="Calibri" panose="020F0502020204030204" pitchFamily="34" charset="0"/>
-                <a:ea typeface="Calibri" panose="020F0502020204030204" pitchFamily="34" charset="0"/>
-                <a:cs typeface="Calibri" panose="020F0502020204030204" pitchFamily="34" charset="0"/>
-              </a:rPr>
-              <a:t>Neural Net </a:t>
-            </a:r>
-            <a:r>
-              <a:rPr lang="en-GB" sz="1200" dirty="0">
-                <a:solidFill>
-                  <a:schemeClr val="bg1">
-                    <a:lumMod val="75000"/>
-                  </a:schemeClr>
-                </a:solidFill>
-                <a:latin typeface="Calibri" panose="020F0502020204030204" pitchFamily="34" charset="0"/>
-                <a:ea typeface="Calibri" panose="020F0502020204030204" pitchFamily="34" charset="0"/>
-                <a:cs typeface="Calibri" panose="020F0502020204030204" pitchFamily="34" charset="0"/>
-              </a:rPr>
-              <a:t>– Results – Challenges </a:t>
-            </a:r>
-            <a:endParaRPr lang="de-DE" sz="1200" dirty="0">
-              <a:solidFill>
-                <a:schemeClr val="bg1">
-                  <a:lumMod val="75000"/>
-                </a:schemeClr>
-              </a:solidFill>
-            </a:endParaRPr>
-          </a:p>
-        </p:txBody>
-      </p:sp>
-      <p:sp>
-        <p:nvSpPr>
-          <p:cNvPr id="2" name="Slide Number Placeholder 1">
-            <a:extLst>
-              <a:ext uri="{FF2B5EF4-FFF2-40B4-BE49-F238E27FC236}">
-                <a16:creationId xmlns:a16="http://schemas.microsoft.com/office/drawing/2014/main" id="{C5A0711C-F0D9-1923-8FB4-A707908C1A1B}"/>
-              </a:ext>
-            </a:extLst>
-          </p:cNvPr>
-          <p:cNvSpPr>
-            <a:spLocks noGrp="1"/>
-          </p:cNvSpPr>
-          <p:nvPr>
-            <p:ph type="sldNum" sz="quarter" idx="12"/>
-          </p:nvPr>
-        </p:nvSpPr>
-        <p:spPr/>
-        <p:txBody>
-          <a:bodyPr/>
-          <a:lstStyle/>
-          <a:p>
-            <a:fld id="{FEE63D0E-FFEF-43D1-BE35-64C33AF422FD}" type="slidenum">
-              <a:rPr lang="de-DE" smtClean="0"/>
-              <a:t>23</a:t>
-            </a:fld>
-            <a:endParaRPr lang="de-DE"/>
-          </a:p>
-        </p:txBody>
-      </p:sp>
-    </p:spTree>
-    <p:extLst>
-      <p:ext uri="{BB962C8B-B14F-4D97-AF65-F5344CB8AC3E}">
-        <p14:creationId xmlns:p14="http://schemas.microsoft.com/office/powerpoint/2010/main" val="1448705476"/>
-      </p:ext>
-    </p:extLst>
-  </p:cSld>
-  <p:clrMapOvr>
-    <a:masterClrMapping/>
-  </p:clrMapOvr>
-</p:sld>
-</file>
-
-<file path=ppt/slides/slide24.xml><?xml version="1.0" encoding="utf-8"?>
-<p:sld xmlns:a="http://schemas.openxmlformats.org/drawingml/2006/main" xmlns:r="http://schemas.openxmlformats.org/officeDocument/2006/relationships" xmlns:p="http://schemas.openxmlformats.org/presentationml/2006/main" show="0">
-  <p:cSld>
-    <p:spTree>
-      <p:nvGrpSpPr>
-        <p:cNvPr id="1" name="">
-          <a:extLst>
-            <a:ext uri="{FF2B5EF4-FFF2-40B4-BE49-F238E27FC236}">
-              <a16:creationId xmlns:a16="http://schemas.microsoft.com/office/drawing/2014/main" id="{49BE7B0D-EF2E-FEDD-F1E2-6440161D38AE}"/>
-            </a:ext>
-          </a:extLst>
-        </p:cNvPr>
-        <p:cNvGrpSpPr/>
-        <p:nvPr/>
-      </p:nvGrpSpPr>
-      <p:grpSpPr>
-        <a:xfrm>
-          <a:off x="0" y="0"/>
-          <a:ext cx="0" cy="0"/>
-          <a:chOff x="0" y="0"/>
-          <a:chExt cx="0" cy="0"/>
-        </a:xfrm>
-      </p:grpSpPr>
-      <p:sp>
-        <p:nvSpPr>
-          <p:cNvPr id="2" name="Title 1">
-            <a:extLst>
-              <a:ext uri="{FF2B5EF4-FFF2-40B4-BE49-F238E27FC236}">
-                <a16:creationId xmlns:a16="http://schemas.microsoft.com/office/drawing/2014/main" id="{D4B3F2A1-9367-240D-9693-174005C6BB3B}"/>
-              </a:ext>
-            </a:extLst>
-          </p:cNvPr>
-          <p:cNvSpPr>
-            <a:spLocks noGrp="1"/>
-          </p:cNvSpPr>
-          <p:nvPr>
-            <p:ph type="title"/>
-          </p:nvPr>
-        </p:nvSpPr>
-        <p:spPr/>
-        <p:txBody>
-          <a:bodyPr/>
-          <a:lstStyle/>
-          <a:p>
-            <a:r>
-              <a:rPr lang="en-GB" dirty="0"/>
-              <a:t>2 Bar charts for 1 variable for each category</a:t>
-            </a:r>
-          </a:p>
-        </p:txBody>
-      </p:sp>
-      <p:sp>
-        <p:nvSpPr>
-          <p:cNvPr id="3" name="Content Placeholder 2">
-            <a:extLst>
-              <a:ext uri="{FF2B5EF4-FFF2-40B4-BE49-F238E27FC236}">
-                <a16:creationId xmlns:a16="http://schemas.microsoft.com/office/drawing/2014/main" id="{7566EF36-5AB5-BD61-139A-5291CC7A308A}"/>
-              </a:ext>
-            </a:extLst>
-          </p:cNvPr>
-          <p:cNvSpPr>
-            <a:spLocks noGrp="1"/>
-          </p:cNvSpPr>
-          <p:nvPr>
-            <p:ph sz="half" idx="1"/>
-          </p:nvPr>
-        </p:nvSpPr>
-        <p:spPr/>
-        <p:txBody>
-          <a:bodyPr/>
-          <a:lstStyle/>
-          <a:p>
-            <a:r>
-              <a:rPr lang="en-US" dirty="0"/>
-              <a:t>Working on it</a:t>
-            </a:r>
-            <a:endParaRPr lang="en-GB" dirty="0"/>
-          </a:p>
-        </p:txBody>
-      </p:sp>
-      <p:sp>
-        <p:nvSpPr>
-          <p:cNvPr id="5" name="Slide Number Placeholder 4">
-            <a:extLst>
-              <a:ext uri="{FF2B5EF4-FFF2-40B4-BE49-F238E27FC236}">
-                <a16:creationId xmlns:a16="http://schemas.microsoft.com/office/drawing/2014/main" id="{AFADF633-6812-8C55-E3F4-025DC1E195A7}"/>
-              </a:ext>
-            </a:extLst>
-          </p:cNvPr>
-          <p:cNvSpPr>
-            <a:spLocks noGrp="1"/>
-          </p:cNvSpPr>
-          <p:nvPr>
-            <p:ph type="sldNum" sz="quarter" idx="12"/>
-          </p:nvPr>
-        </p:nvSpPr>
-        <p:spPr/>
-        <p:txBody>
-          <a:bodyPr/>
-          <a:lstStyle/>
-          <a:p>
-            <a:fld id="{FEE63D0E-FFEF-43D1-BE35-64C33AF422FD}" type="slidenum">
-              <a:rPr lang="de-DE" smtClean="0"/>
-              <a:t>24</a:t>
-            </a:fld>
-            <a:endParaRPr lang="de-DE"/>
-          </a:p>
-        </p:txBody>
-      </p:sp>
-      <p:sp>
-        <p:nvSpPr>
-          <p:cNvPr id="7" name="TextBox 6">
-            <a:extLst>
-              <a:ext uri="{FF2B5EF4-FFF2-40B4-BE49-F238E27FC236}">
-                <a16:creationId xmlns:a16="http://schemas.microsoft.com/office/drawing/2014/main" id="{CE5868E9-8533-9A2A-29CA-130A8F95F610}"/>
-              </a:ext>
-            </a:extLst>
-          </p:cNvPr>
-          <p:cNvSpPr txBox="1"/>
-          <p:nvPr/>
-        </p:nvSpPr>
-        <p:spPr>
-          <a:xfrm>
-            <a:off x="3778474" y="6538912"/>
-            <a:ext cx="4440062" cy="276999"/>
-          </a:xfrm>
-          <a:prstGeom prst="rect">
-            <a:avLst/>
-          </a:prstGeom>
-          <a:noFill/>
-        </p:spPr>
-        <p:txBody>
-          <a:bodyPr wrap="none" rtlCol="0">
-            <a:spAutoFit/>
-          </a:bodyPr>
-          <a:lstStyle/>
-          <a:p>
-            <a:r>
-              <a:rPr lang="en-GB" sz="1200" b="1" dirty="0">
-                <a:latin typeface="Calibri" panose="020F0502020204030204" pitchFamily="34" charset="0"/>
-                <a:cs typeface="Calibri" panose="020F0502020204030204" pitchFamily="34" charset="0"/>
-              </a:rPr>
-              <a:t>Dataset Characteristics </a:t>
-            </a:r>
-            <a:r>
-              <a:rPr lang="en-GB" sz="1200" dirty="0">
-                <a:solidFill>
-                  <a:schemeClr val="bg1">
-                    <a:lumMod val="75000"/>
-                  </a:schemeClr>
-                </a:solidFill>
-                <a:latin typeface="Calibri" panose="020F0502020204030204" pitchFamily="34" charset="0"/>
-                <a:ea typeface="Calibri" panose="020F0502020204030204" pitchFamily="34" charset="0"/>
-                <a:cs typeface="Calibri" panose="020F0502020204030204" pitchFamily="34" charset="0"/>
-              </a:rPr>
-              <a:t>– Baseline Model </a:t>
-            </a:r>
-            <a:r>
-              <a:rPr lang="en-GB" sz="1200" dirty="0">
-                <a:solidFill>
-                  <a:schemeClr val="bg1">
-                    <a:lumMod val="75000"/>
-                  </a:schemeClr>
-                </a:solidFill>
-                <a:latin typeface="Calibri" panose="020F0502020204030204" pitchFamily="34" charset="0"/>
-                <a:cs typeface="Calibri" panose="020F0502020204030204" pitchFamily="34" charset="0"/>
-              </a:rPr>
-              <a:t>– Neural Net </a:t>
-            </a:r>
-            <a:r>
-              <a:rPr lang="en-GB" sz="1200" dirty="0">
-                <a:solidFill>
-                  <a:schemeClr val="bg1">
-                    <a:lumMod val="75000"/>
-                  </a:schemeClr>
-                </a:solidFill>
-                <a:latin typeface="Calibri" panose="020F0502020204030204" pitchFamily="34" charset="0"/>
-                <a:ea typeface="Calibri" panose="020F0502020204030204" pitchFamily="34" charset="0"/>
-                <a:cs typeface="Calibri" panose="020F0502020204030204" pitchFamily="34" charset="0"/>
-              </a:rPr>
-              <a:t>– Challenges </a:t>
-            </a:r>
-            <a:endParaRPr lang="de-DE" sz="1200" dirty="0">
-              <a:solidFill>
-                <a:schemeClr val="bg1">
-                  <a:lumMod val="75000"/>
-                </a:schemeClr>
-              </a:solidFill>
-            </a:endParaRPr>
-          </a:p>
-        </p:txBody>
-      </p:sp>
-      <p:pic>
-        <p:nvPicPr>
-          <p:cNvPr id="15" name="Picture 14">
-            <a:extLst>
-              <a:ext uri="{FF2B5EF4-FFF2-40B4-BE49-F238E27FC236}">
-                <a16:creationId xmlns:a16="http://schemas.microsoft.com/office/drawing/2014/main" id="{33B71C7A-B971-5E9E-E5F2-720ABA542E41}"/>
-              </a:ext>
-            </a:extLst>
-          </p:cNvPr>
-          <p:cNvPicPr>
-            <a:picLocks noChangeAspect="1"/>
-          </p:cNvPicPr>
-          <p:nvPr/>
-        </p:nvPicPr>
-        <p:blipFill>
-          <a:blip r:embed="rId3"/>
-          <a:stretch>
-            <a:fillRect/>
-          </a:stretch>
-        </p:blipFill>
-        <p:spPr>
-          <a:xfrm>
-            <a:off x="5278262" y="1824036"/>
-            <a:ext cx="6597072" cy="4351339"/>
-          </a:xfrm>
-          <a:prstGeom prst="rect">
-            <a:avLst/>
-          </a:prstGeom>
-        </p:spPr>
-      </p:pic>
-      <p:pic>
-        <p:nvPicPr>
-          <p:cNvPr id="4" name="Picture 3">
-            <a:extLst>
-              <a:ext uri="{FF2B5EF4-FFF2-40B4-BE49-F238E27FC236}">
-                <a16:creationId xmlns:a16="http://schemas.microsoft.com/office/drawing/2014/main" id="{F15D9625-8304-B8A6-4306-D2881F22B882}"/>
-              </a:ext>
-            </a:extLst>
-          </p:cNvPr>
-          <p:cNvPicPr>
-            <a:picLocks noChangeAspect="1"/>
-          </p:cNvPicPr>
-          <p:nvPr/>
-        </p:nvPicPr>
-        <p:blipFill>
-          <a:blip r:embed="rId4"/>
-          <a:stretch>
-            <a:fillRect/>
-          </a:stretch>
-        </p:blipFill>
-        <p:spPr>
-          <a:xfrm>
-            <a:off x="0" y="2996120"/>
-            <a:ext cx="5069662" cy="2515643"/>
-          </a:xfrm>
-          <a:prstGeom prst="rect">
-            <a:avLst/>
-          </a:prstGeom>
-        </p:spPr>
-      </p:pic>
-    </p:spTree>
-    <p:extLst>
-      <p:ext uri="{BB962C8B-B14F-4D97-AF65-F5344CB8AC3E}">
-        <p14:creationId xmlns:p14="http://schemas.microsoft.com/office/powerpoint/2010/main" val="2567287787"/>
-      </p:ext>
-    </p:extLst>
-  </p:cSld>
-  <p:clrMapOvr>
-    <a:masterClrMapping/>
-  </p:clrMapOvr>
-</p:sld>
-</file>
-
-<file path=ppt/slides/slide25.xml><?xml version="1.0" encoding="utf-8"?>
-<p:sld xmlns:a="http://schemas.openxmlformats.org/drawingml/2006/main" xmlns:r="http://schemas.openxmlformats.org/officeDocument/2006/relationships" xmlns:p="http://schemas.openxmlformats.org/presentationml/2006/main" show="0">
-  <p:cSld>
-    <p:spTree>
-      <p:nvGrpSpPr>
-        <p:cNvPr id="1" name="">
-          <a:extLst>
-            <a:ext uri="{FF2B5EF4-FFF2-40B4-BE49-F238E27FC236}">
-              <a16:creationId xmlns:a16="http://schemas.microsoft.com/office/drawing/2014/main" id="{05D4050B-A8AD-D44C-BDB5-DAEF0748352F}"/>
-            </a:ext>
-          </a:extLst>
-        </p:cNvPr>
-        <p:cNvGrpSpPr/>
-        <p:nvPr/>
-      </p:nvGrpSpPr>
-      <p:grpSpPr>
-        <a:xfrm>
-          <a:off x="0" y="0"/>
-          <a:ext cx="0" cy="0"/>
-          <a:chOff x="0" y="0"/>
-          <a:chExt cx="0" cy="0"/>
-        </a:xfrm>
-      </p:grpSpPr>
-      <p:sp>
-        <p:nvSpPr>
-          <p:cNvPr id="5" name="TextBox 4">
-            <a:extLst>
-              <a:ext uri="{FF2B5EF4-FFF2-40B4-BE49-F238E27FC236}">
-                <a16:creationId xmlns:a16="http://schemas.microsoft.com/office/drawing/2014/main" id="{99A00947-4782-3164-3F43-60FB01F5A96C}"/>
-              </a:ext>
-            </a:extLst>
-          </p:cNvPr>
-          <p:cNvSpPr txBox="1"/>
-          <p:nvPr/>
-        </p:nvSpPr>
-        <p:spPr>
-          <a:xfrm>
-            <a:off x="3524719" y="6581001"/>
-            <a:ext cx="5142562" cy="276999"/>
-          </a:xfrm>
-          <a:prstGeom prst="rect">
-            <a:avLst/>
-          </a:prstGeom>
-          <a:noFill/>
-        </p:spPr>
-        <p:txBody>
-          <a:bodyPr wrap="none" rtlCol="0">
-            <a:spAutoFit/>
-          </a:bodyPr>
-          <a:lstStyle/>
-          <a:p>
-            <a:r>
-              <a:rPr lang="en-GB" sz="1200" dirty="0">
-                <a:solidFill>
-                  <a:schemeClr val="bg1">
-                    <a:lumMod val="75000"/>
-                  </a:schemeClr>
-                </a:solidFill>
-              </a:rPr>
-              <a:t>Dataset Characteristics </a:t>
-            </a:r>
-            <a:r>
-              <a:rPr lang="en-GB" sz="1200" dirty="0">
-                <a:solidFill>
-                  <a:schemeClr val="bg1">
-                    <a:lumMod val="75000"/>
-                  </a:schemeClr>
-                </a:solidFill>
-                <a:latin typeface="Calibri" panose="020F0502020204030204" pitchFamily="34" charset="0"/>
-                <a:ea typeface="Calibri" panose="020F0502020204030204" pitchFamily="34" charset="0"/>
-                <a:cs typeface="Calibri" panose="020F0502020204030204" pitchFamily="34" charset="0"/>
-              </a:rPr>
-              <a:t>– Baseline Model – Neural Net – </a:t>
-            </a:r>
-            <a:r>
-              <a:rPr lang="en-GB" sz="1200" dirty="0">
-                <a:latin typeface="Calibri" panose="020F0502020204030204" pitchFamily="34" charset="0"/>
-                <a:ea typeface="Calibri" panose="020F0502020204030204" pitchFamily="34" charset="0"/>
-                <a:cs typeface="Calibri" panose="020F0502020204030204" pitchFamily="34" charset="0"/>
-              </a:rPr>
-              <a:t>Results</a:t>
-            </a:r>
-            <a:r>
-              <a:rPr lang="en-GB" sz="1200" dirty="0">
-                <a:solidFill>
-                  <a:schemeClr val="bg1">
-                    <a:lumMod val="75000"/>
-                  </a:schemeClr>
-                </a:solidFill>
-                <a:latin typeface="Calibri" panose="020F0502020204030204" pitchFamily="34" charset="0"/>
-                <a:ea typeface="Calibri" panose="020F0502020204030204" pitchFamily="34" charset="0"/>
-                <a:cs typeface="Calibri" panose="020F0502020204030204" pitchFamily="34" charset="0"/>
-              </a:rPr>
-              <a:t> – Challenges </a:t>
-            </a:r>
-            <a:endParaRPr lang="de-DE" sz="1200" dirty="0">
-              <a:solidFill>
-                <a:schemeClr val="bg1">
-                  <a:lumMod val="75000"/>
-                </a:schemeClr>
-              </a:solidFill>
-            </a:endParaRPr>
-          </a:p>
-        </p:txBody>
-      </p:sp>
-      <p:pic>
-        <p:nvPicPr>
-          <p:cNvPr id="7" name="Grafik 6" descr="Ein Bild, das Text, Screenshot, Diagramm, Reihe enthält.&#10;&#10;KI-generierte Inhalte können fehlerhaft sein.">
-            <a:extLst>
-              <a:ext uri="{FF2B5EF4-FFF2-40B4-BE49-F238E27FC236}">
-                <a16:creationId xmlns:a16="http://schemas.microsoft.com/office/drawing/2014/main" id="{EA9C2870-49A5-522B-CF9B-96A71E25A2EE}"/>
-              </a:ext>
-            </a:extLst>
-          </p:cNvPr>
-          <p:cNvPicPr>
-            <a:picLocks noChangeAspect="1"/>
-          </p:cNvPicPr>
-          <p:nvPr/>
-        </p:nvPicPr>
-        <p:blipFill>
-          <a:blip r:embed="rId2">
-            <a:extLst>
-              <a:ext uri="{28A0092B-C50C-407E-A947-70E740481C1C}">
-                <a14:useLocalDpi xmlns:a14="http://schemas.microsoft.com/office/drawing/2010/main" val="0"/>
-              </a:ext>
-            </a:extLst>
-          </a:blip>
-          <a:srcRect b="3839"/>
-          <a:stretch>
-            <a:fillRect/>
-          </a:stretch>
-        </p:blipFill>
-        <p:spPr>
-          <a:xfrm>
-            <a:off x="389487" y="-3886"/>
-            <a:ext cx="11413025" cy="6584887"/>
-          </a:xfrm>
-          <a:prstGeom prst="rect">
-            <a:avLst/>
-          </a:prstGeom>
-        </p:spPr>
-      </p:pic>
-      <p:sp>
-        <p:nvSpPr>
-          <p:cNvPr id="2" name="Slide Number Placeholder 1">
-            <a:extLst>
-              <a:ext uri="{FF2B5EF4-FFF2-40B4-BE49-F238E27FC236}">
-                <a16:creationId xmlns:a16="http://schemas.microsoft.com/office/drawing/2014/main" id="{12679775-37E7-FC6D-85B4-1280FF07D06F}"/>
-              </a:ext>
-            </a:extLst>
-          </p:cNvPr>
-          <p:cNvSpPr>
-            <a:spLocks noGrp="1"/>
-          </p:cNvSpPr>
-          <p:nvPr>
-            <p:ph type="sldNum" sz="quarter" idx="12"/>
-          </p:nvPr>
-        </p:nvSpPr>
-        <p:spPr/>
-        <p:txBody>
-          <a:bodyPr/>
-          <a:lstStyle/>
-          <a:p>
-            <a:fld id="{FEE63D0E-FFEF-43D1-BE35-64C33AF422FD}" type="slidenum">
-              <a:rPr lang="de-DE" smtClean="0"/>
-              <a:t>25</a:t>
-            </a:fld>
-            <a:endParaRPr lang="de-DE"/>
-          </a:p>
-        </p:txBody>
-      </p:sp>
-    </p:spTree>
-    <p:extLst>
-      <p:ext uri="{BB962C8B-B14F-4D97-AF65-F5344CB8AC3E}">
-        <p14:creationId xmlns:p14="http://schemas.microsoft.com/office/powerpoint/2010/main" val="2630275565"/>
-      </p:ext>
-    </p:extLst>
-  </p:cSld>
-  <p:clrMapOvr>
-    <a:masterClrMapping/>
-  </p:clrMapOvr>
-</p:sld>
-</file>
-
-<file path=ppt/slides/slide26.xml><?xml version="1.0" encoding="utf-8"?>
-<p:sld xmlns:a="http://schemas.openxmlformats.org/drawingml/2006/main" xmlns:r="http://schemas.openxmlformats.org/officeDocument/2006/relationships" xmlns:p="http://schemas.openxmlformats.org/presentationml/2006/main" show="0">
-  <p:cSld>
-    <p:spTree>
-      <p:nvGrpSpPr>
-        <p:cNvPr id="1" name="">
-          <a:extLst>
-            <a:ext uri="{FF2B5EF4-FFF2-40B4-BE49-F238E27FC236}">
-              <a16:creationId xmlns:a16="http://schemas.microsoft.com/office/drawing/2014/main" id="{03B2FF10-0B82-01EB-A019-DEB90DCFCC46}"/>
-            </a:ext>
-          </a:extLst>
-        </p:cNvPr>
-        <p:cNvGrpSpPr/>
-        <p:nvPr/>
-      </p:nvGrpSpPr>
-      <p:grpSpPr>
-        <a:xfrm>
-          <a:off x="0" y="0"/>
-          <a:ext cx="0" cy="0"/>
-          <a:chOff x="0" y="0"/>
-          <a:chExt cx="0" cy="0"/>
-        </a:xfrm>
-      </p:grpSpPr>
-      <p:sp>
-        <p:nvSpPr>
-          <p:cNvPr id="5" name="TextBox 4">
-            <a:extLst>
-              <a:ext uri="{FF2B5EF4-FFF2-40B4-BE49-F238E27FC236}">
-                <a16:creationId xmlns:a16="http://schemas.microsoft.com/office/drawing/2014/main" id="{CEA4ED14-29E3-5C36-80A2-23319535962A}"/>
-              </a:ext>
-            </a:extLst>
-          </p:cNvPr>
-          <p:cNvSpPr txBox="1"/>
-          <p:nvPr/>
-        </p:nvSpPr>
-        <p:spPr>
-          <a:xfrm>
-            <a:off x="3524719" y="6581001"/>
-            <a:ext cx="5142562" cy="276999"/>
-          </a:xfrm>
-          <a:prstGeom prst="rect">
-            <a:avLst/>
-          </a:prstGeom>
-          <a:noFill/>
-        </p:spPr>
-        <p:txBody>
-          <a:bodyPr wrap="none" rtlCol="0">
-            <a:spAutoFit/>
-          </a:bodyPr>
-          <a:lstStyle/>
-          <a:p>
-            <a:r>
-              <a:rPr lang="en-GB" sz="1200" dirty="0">
-                <a:solidFill>
-                  <a:schemeClr val="bg1">
-                    <a:lumMod val="75000"/>
-                  </a:schemeClr>
-                </a:solidFill>
-              </a:rPr>
-              <a:t>Dataset Characteristics </a:t>
-            </a:r>
-            <a:r>
-              <a:rPr lang="en-GB" sz="1200" dirty="0">
-                <a:solidFill>
-                  <a:schemeClr val="bg1">
-                    <a:lumMod val="75000"/>
-                  </a:schemeClr>
-                </a:solidFill>
-                <a:latin typeface="Calibri" panose="020F0502020204030204" pitchFamily="34" charset="0"/>
-                <a:ea typeface="Calibri" panose="020F0502020204030204" pitchFamily="34" charset="0"/>
-                <a:cs typeface="Calibri" panose="020F0502020204030204" pitchFamily="34" charset="0"/>
-              </a:rPr>
-              <a:t>– Baseline Model – Neural Net – </a:t>
-            </a:r>
-            <a:r>
-              <a:rPr lang="en-GB" sz="1200" dirty="0">
-                <a:latin typeface="Calibri" panose="020F0502020204030204" pitchFamily="34" charset="0"/>
-                <a:ea typeface="Calibri" panose="020F0502020204030204" pitchFamily="34" charset="0"/>
-                <a:cs typeface="Calibri" panose="020F0502020204030204" pitchFamily="34" charset="0"/>
-              </a:rPr>
-              <a:t>Results</a:t>
-            </a:r>
-            <a:r>
-              <a:rPr lang="en-GB" sz="1200" dirty="0">
-                <a:solidFill>
-                  <a:schemeClr val="bg1">
-                    <a:lumMod val="75000"/>
-                  </a:schemeClr>
-                </a:solidFill>
-                <a:latin typeface="Calibri" panose="020F0502020204030204" pitchFamily="34" charset="0"/>
-                <a:ea typeface="Calibri" panose="020F0502020204030204" pitchFamily="34" charset="0"/>
-                <a:cs typeface="Calibri" panose="020F0502020204030204" pitchFamily="34" charset="0"/>
-              </a:rPr>
-              <a:t> – Challenges </a:t>
-            </a:r>
-            <a:endParaRPr lang="de-DE" sz="1200" dirty="0">
-              <a:solidFill>
-                <a:schemeClr val="bg1">
-                  <a:lumMod val="75000"/>
-                </a:schemeClr>
-              </a:solidFill>
-            </a:endParaRPr>
-          </a:p>
-        </p:txBody>
-      </p:sp>
-      <p:pic>
-        <p:nvPicPr>
-          <p:cNvPr id="3" name="Grafik 2" descr="Ein Bild, das Text, Screenshot, Diagramm, Reihe enthält.&#10;&#10;KI-generierte Inhalte können fehlerhaft sein.">
-            <a:extLst>
-              <a:ext uri="{FF2B5EF4-FFF2-40B4-BE49-F238E27FC236}">
-                <a16:creationId xmlns:a16="http://schemas.microsoft.com/office/drawing/2014/main" id="{760DB1F9-1757-7989-082A-781614D707C6}"/>
-              </a:ext>
-            </a:extLst>
-          </p:cNvPr>
-          <p:cNvPicPr>
-            <a:picLocks noChangeAspect="1"/>
-          </p:cNvPicPr>
-          <p:nvPr/>
-        </p:nvPicPr>
-        <p:blipFill>
-          <a:blip r:embed="rId2">
-            <a:extLst>
-              <a:ext uri="{28A0092B-C50C-407E-A947-70E740481C1C}">
-                <a14:useLocalDpi xmlns:a14="http://schemas.microsoft.com/office/drawing/2010/main" val="0"/>
-              </a:ext>
-            </a:extLst>
-          </a:blip>
-          <a:srcRect b="3456"/>
-          <a:stretch>
-            <a:fillRect/>
-          </a:stretch>
-        </p:blipFill>
-        <p:spPr>
-          <a:xfrm>
-            <a:off x="250257" y="0"/>
-            <a:ext cx="11691486" cy="6581001"/>
-          </a:xfrm>
-          <a:prstGeom prst="rect">
-            <a:avLst/>
-          </a:prstGeom>
-        </p:spPr>
-      </p:pic>
-      <p:sp>
-        <p:nvSpPr>
-          <p:cNvPr id="2" name="Slide Number Placeholder 1">
-            <a:extLst>
-              <a:ext uri="{FF2B5EF4-FFF2-40B4-BE49-F238E27FC236}">
-                <a16:creationId xmlns:a16="http://schemas.microsoft.com/office/drawing/2014/main" id="{A5ADBEA1-31EF-4EE4-0BB8-AD1312F0FEBA}"/>
-              </a:ext>
-            </a:extLst>
-          </p:cNvPr>
-          <p:cNvSpPr>
-            <a:spLocks noGrp="1"/>
-          </p:cNvSpPr>
-          <p:nvPr>
-            <p:ph type="sldNum" sz="quarter" idx="12"/>
-          </p:nvPr>
-        </p:nvSpPr>
-        <p:spPr/>
-        <p:txBody>
-          <a:bodyPr/>
-          <a:lstStyle/>
-          <a:p>
-            <a:fld id="{FEE63D0E-FFEF-43D1-BE35-64C33AF422FD}" type="slidenum">
-              <a:rPr lang="de-DE" smtClean="0"/>
-              <a:t>26</a:t>
-            </a:fld>
-            <a:endParaRPr lang="de-DE"/>
-          </a:p>
-        </p:txBody>
-      </p:sp>
-    </p:spTree>
-    <p:extLst>
-      <p:ext uri="{BB962C8B-B14F-4D97-AF65-F5344CB8AC3E}">
-        <p14:creationId xmlns:p14="http://schemas.microsoft.com/office/powerpoint/2010/main" val="845119171"/>
-      </p:ext>
-    </p:extLst>
-  </p:cSld>
-  <p:clrMapOvr>
-    <a:masterClrMapping/>
-  </p:clrMapOvr>
-</p:sld>
-</file>
-
-<file path=ppt/slides/slide27.xml><?xml version="1.0" encoding="utf-8"?>
-<p:sld xmlns:a="http://schemas.openxmlformats.org/drawingml/2006/main" xmlns:r="http://schemas.openxmlformats.org/officeDocument/2006/relationships" xmlns:p="http://schemas.openxmlformats.org/presentationml/2006/main" show="0">
-  <p:cSld>
-    <p:bg>
-      <p:bgPr>
-        <a:solidFill>
-          <a:schemeClr val="bg1">
-            <a:alpha val="0"/>
-          </a:schemeClr>
-        </a:solidFill>
-        <a:effectLst/>
-      </p:bgPr>
-    </p:bg>
-    <p:spTree>
-      <p:nvGrpSpPr>
-        <p:cNvPr id="1" name="">
-          <a:extLst>
-            <a:ext uri="{FF2B5EF4-FFF2-40B4-BE49-F238E27FC236}">
-              <a16:creationId xmlns:a16="http://schemas.microsoft.com/office/drawing/2014/main" id="{9DF07184-045D-5BD1-0E31-4047B75F7005}"/>
-            </a:ext>
-          </a:extLst>
-        </p:cNvPr>
-        <p:cNvGrpSpPr/>
-        <p:nvPr/>
-      </p:nvGrpSpPr>
-      <p:grpSpPr>
-        <a:xfrm>
-          <a:off x="0" y="0"/>
-          <a:ext cx="0" cy="0"/>
-          <a:chOff x="0" y="0"/>
-          <a:chExt cx="0" cy="0"/>
-        </a:xfrm>
-      </p:grpSpPr>
-      <p:pic>
-        <p:nvPicPr>
-          <p:cNvPr id="7" name="Grafik 6">
-            <a:extLst>
-              <a:ext uri="{FF2B5EF4-FFF2-40B4-BE49-F238E27FC236}">
-                <a16:creationId xmlns:a16="http://schemas.microsoft.com/office/drawing/2014/main" id="{F0A034E7-CA71-E98C-AD52-B30D33186752}"/>
-              </a:ext>
-            </a:extLst>
-          </p:cNvPr>
-          <p:cNvPicPr>
-            <a:picLocks noChangeAspect="1"/>
-          </p:cNvPicPr>
-          <p:nvPr/>
-        </p:nvPicPr>
-        <p:blipFill>
-          <a:blip r:embed="rId2">
-            <a:extLst>
-              <a:ext uri="{28A0092B-C50C-407E-A947-70E740481C1C}">
-                <a14:useLocalDpi xmlns:a14="http://schemas.microsoft.com/office/drawing/2010/main" val="0"/>
-              </a:ext>
-            </a:extLst>
-          </a:blip>
-          <a:srcRect/>
-          <a:stretch/>
-        </p:blipFill>
-        <p:spPr>
-          <a:xfrm>
-            <a:off x="493948" y="0"/>
-            <a:ext cx="11210371" cy="6861838"/>
-          </a:xfrm>
-          <a:prstGeom prst="rect">
-            <a:avLst/>
-          </a:prstGeom>
-        </p:spPr>
-      </p:pic>
-      <p:sp>
-        <p:nvSpPr>
-          <p:cNvPr id="4" name="TextBox 4">
-            <a:extLst>
-              <a:ext uri="{FF2B5EF4-FFF2-40B4-BE49-F238E27FC236}">
-                <a16:creationId xmlns:a16="http://schemas.microsoft.com/office/drawing/2014/main" id="{27971549-C282-0F3B-E751-188C3029DF94}"/>
-              </a:ext>
-            </a:extLst>
-          </p:cNvPr>
-          <p:cNvSpPr txBox="1"/>
-          <p:nvPr/>
-        </p:nvSpPr>
-        <p:spPr>
-          <a:xfrm>
-            <a:off x="3524719" y="6581001"/>
-            <a:ext cx="5142562" cy="276999"/>
-          </a:xfrm>
-          <a:prstGeom prst="rect">
-            <a:avLst/>
-          </a:prstGeom>
-          <a:solidFill>
-            <a:schemeClr val="bg1"/>
-          </a:solidFill>
-          <a:ln w="12700">
-            <a:solidFill>
-              <a:srgbClr val="7030A0"/>
-            </a:solidFill>
-          </a:ln>
-        </p:spPr>
-        <p:txBody>
-          <a:bodyPr wrap="none" rtlCol="0">
-            <a:spAutoFit/>
-          </a:bodyPr>
-          <a:lstStyle/>
-          <a:p>
-            <a:r>
-              <a:rPr lang="en-GB" sz="1200" dirty="0">
-                <a:solidFill>
-                  <a:schemeClr val="bg1">
-                    <a:lumMod val="75000"/>
-                  </a:schemeClr>
-                </a:solidFill>
-              </a:rPr>
-              <a:t>Dataset Characteristics </a:t>
-            </a:r>
-            <a:r>
-              <a:rPr lang="en-GB" sz="1200" dirty="0">
-                <a:solidFill>
-                  <a:schemeClr val="bg1">
-                    <a:lumMod val="75000"/>
-                  </a:schemeClr>
-                </a:solidFill>
-                <a:latin typeface="Calibri" panose="020F0502020204030204" pitchFamily="34" charset="0"/>
-                <a:ea typeface="Calibri" panose="020F0502020204030204" pitchFamily="34" charset="0"/>
-                <a:cs typeface="Calibri" panose="020F0502020204030204" pitchFamily="34" charset="0"/>
-              </a:rPr>
-              <a:t>– Baseline Model – </a:t>
-            </a:r>
-            <a:r>
-              <a:rPr lang="en-GB" sz="1200" dirty="0">
-                <a:latin typeface="Calibri" panose="020F0502020204030204" pitchFamily="34" charset="0"/>
-                <a:ea typeface="Calibri" panose="020F0502020204030204" pitchFamily="34" charset="0"/>
-                <a:cs typeface="Calibri" panose="020F0502020204030204" pitchFamily="34" charset="0"/>
-              </a:rPr>
-              <a:t>Neural Net </a:t>
-            </a:r>
-            <a:r>
-              <a:rPr lang="en-GB" sz="1200" dirty="0">
-                <a:solidFill>
-                  <a:schemeClr val="bg1">
-                    <a:lumMod val="75000"/>
-                  </a:schemeClr>
-                </a:solidFill>
-                <a:latin typeface="Calibri" panose="020F0502020204030204" pitchFamily="34" charset="0"/>
-                <a:ea typeface="Calibri" panose="020F0502020204030204" pitchFamily="34" charset="0"/>
-                <a:cs typeface="Calibri" panose="020F0502020204030204" pitchFamily="34" charset="0"/>
-              </a:rPr>
-              <a:t>– Results – Challenges </a:t>
-            </a:r>
-            <a:endParaRPr lang="de-DE" sz="1200" dirty="0">
-              <a:solidFill>
-                <a:schemeClr val="bg1">
-                  <a:lumMod val="75000"/>
-                </a:schemeClr>
-              </a:solidFill>
-            </a:endParaRPr>
-          </a:p>
-        </p:txBody>
-      </p:sp>
-      <p:sp>
-        <p:nvSpPr>
-          <p:cNvPr id="2" name="Slide Number Placeholder 1">
-            <a:extLst>
-              <a:ext uri="{FF2B5EF4-FFF2-40B4-BE49-F238E27FC236}">
-                <a16:creationId xmlns:a16="http://schemas.microsoft.com/office/drawing/2014/main" id="{20023DCC-0A33-6888-F9D2-759E98294138}"/>
-              </a:ext>
-            </a:extLst>
-          </p:cNvPr>
-          <p:cNvSpPr>
-            <a:spLocks noGrp="1"/>
-          </p:cNvSpPr>
-          <p:nvPr>
-            <p:ph type="sldNum" sz="quarter" idx="12"/>
-          </p:nvPr>
-        </p:nvSpPr>
-        <p:spPr/>
-        <p:txBody>
-          <a:bodyPr/>
-          <a:lstStyle/>
-          <a:p>
-            <a:fld id="{FEE63D0E-FFEF-43D1-BE35-64C33AF422FD}" type="slidenum">
-              <a:rPr lang="de-DE" smtClean="0"/>
-              <a:t>27</a:t>
-            </a:fld>
-            <a:endParaRPr lang="de-DE"/>
-          </a:p>
-        </p:txBody>
-      </p:sp>
-    </p:spTree>
-    <p:extLst>
-      <p:ext uri="{BB962C8B-B14F-4D97-AF65-F5344CB8AC3E}">
-        <p14:creationId xmlns:p14="http://schemas.microsoft.com/office/powerpoint/2010/main" val="1731321607"/>
-      </p:ext>
-    </p:extLst>
-  </p:cSld>
-  <p:clrMapOvr>
-    <a:masterClrMapping/>
-  </p:clrMapOvr>
-</p:sld>
-</file>
-
-<file path=ppt/slides/slide28.xml><?xml version="1.0" encoding="utf-8"?>
-<p:sld xmlns:a="http://schemas.openxmlformats.org/drawingml/2006/main" xmlns:r="http://schemas.openxmlformats.org/officeDocument/2006/relationships" xmlns:p="http://schemas.openxmlformats.org/presentationml/2006/main" show="0">
-  <p:cSld>
-    <p:spTree>
-      <p:nvGrpSpPr>
-        <p:cNvPr id="1" name="">
-          <a:extLst>
-            <a:ext uri="{FF2B5EF4-FFF2-40B4-BE49-F238E27FC236}">
-              <a16:creationId xmlns:a16="http://schemas.microsoft.com/office/drawing/2014/main" id="{E474F7B3-7E84-BDB7-EE3A-B17750D621F4}"/>
-            </a:ext>
-          </a:extLst>
-        </p:cNvPr>
-        <p:cNvGrpSpPr/>
-        <p:nvPr/>
-      </p:nvGrpSpPr>
-      <p:grpSpPr>
-        <a:xfrm>
-          <a:off x="0" y="0"/>
-          <a:ext cx="0" cy="0"/>
-          <a:chOff x="0" y="0"/>
-          <a:chExt cx="0" cy="0"/>
-        </a:xfrm>
-      </p:grpSpPr>
-      <p:sp>
-        <p:nvSpPr>
-          <p:cNvPr id="3" name="Title 2">
-            <a:extLst>
-              <a:ext uri="{FF2B5EF4-FFF2-40B4-BE49-F238E27FC236}">
-                <a16:creationId xmlns:a16="http://schemas.microsoft.com/office/drawing/2014/main" id="{92CE0A70-2ABA-2EA3-66C5-4004AAA22941}"/>
-              </a:ext>
-            </a:extLst>
-          </p:cNvPr>
-          <p:cNvSpPr>
-            <a:spLocks noGrp="1"/>
-          </p:cNvSpPr>
-          <p:nvPr>
-            <p:ph type="title"/>
-          </p:nvPr>
-        </p:nvSpPr>
-        <p:spPr/>
-        <p:txBody>
-          <a:bodyPr/>
-          <a:lstStyle/>
-          <a:p>
-            <a:r>
-              <a:rPr lang="en-US" dirty="0"/>
-              <a:t>Neural Network</a:t>
-            </a:r>
-            <a:endParaRPr lang="en-GB" dirty="0"/>
-          </a:p>
-        </p:txBody>
-      </p:sp>
-      <p:sp>
-        <p:nvSpPr>
-          <p:cNvPr id="2" name="Slide Number Placeholder 1">
-            <a:extLst>
-              <a:ext uri="{FF2B5EF4-FFF2-40B4-BE49-F238E27FC236}">
-                <a16:creationId xmlns:a16="http://schemas.microsoft.com/office/drawing/2014/main" id="{F09B9EAB-729B-286E-841D-270974CDD1FC}"/>
-              </a:ext>
-            </a:extLst>
-          </p:cNvPr>
-          <p:cNvSpPr>
-            <a:spLocks noGrp="1"/>
-          </p:cNvSpPr>
-          <p:nvPr>
-            <p:ph type="sldNum" sz="quarter" idx="12"/>
-          </p:nvPr>
-        </p:nvSpPr>
-        <p:spPr/>
-        <p:txBody>
-          <a:bodyPr/>
-          <a:lstStyle/>
-          <a:p>
-            <a:fld id="{FEE63D0E-FFEF-43D1-BE35-64C33AF422FD}" type="slidenum">
-              <a:rPr lang="de-DE" smtClean="0"/>
-              <a:t>28</a:t>
-            </a:fld>
-            <a:endParaRPr lang="de-DE"/>
-          </a:p>
-        </p:txBody>
-      </p:sp>
-      <p:sp>
-        <p:nvSpPr>
-          <p:cNvPr id="25" name="TextBox 24">
-            <a:extLst>
-              <a:ext uri="{FF2B5EF4-FFF2-40B4-BE49-F238E27FC236}">
-                <a16:creationId xmlns:a16="http://schemas.microsoft.com/office/drawing/2014/main" id="{2695C1F2-6B30-2F7A-2778-93CE3CD56B4A}"/>
-              </a:ext>
-            </a:extLst>
-          </p:cNvPr>
-          <p:cNvSpPr txBox="1"/>
-          <p:nvPr/>
-        </p:nvSpPr>
-        <p:spPr>
-          <a:xfrm>
-            <a:off x="10152105" y="4233003"/>
-            <a:ext cx="1439730" cy="369332"/>
-          </a:xfrm>
-          <a:prstGeom prst="rect">
-            <a:avLst/>
-          </a:prstGeom>
-          <a:noFill/>
-        </p:spPr>
-        <p:txBody>
-          <a:bodyPr wrap="square" rtlCol="0">
-            <a:spAutoFit/>
-          </a:bodyPr>
-          <a:lstStyle/>
-          <a:p>
-            <a:pPr algn="ctr"/>
-            <a:r>
-              <a:rPr lang="en-GB" dirty="0"/>
-              <a:t>0.18081</a:t>
-            </a:r>
-            <a:endParaRPr lang="en-GB" b="1" dirty="0"/>
-          </a:p>
-        </p:txBody>
-      </p:sp>
-      <p:pic>
-        <p:nvPicPr>
-          <p:cNvPr id="2050" name="Picture 2">
-            <a:extLst>
-              <a:ext uri="{FF2B5EF4-FFF2-40B4-BE49-F238E27FC236}">
-                <a16:creationId xmlns:a16="http://schemas.microsoft.com/office/drawing/2014/main" id="{EA847370-ACF1-23B8-CEEC-E23AFA3FB148}"/>
-              </a:ext>
-            </a:extLst>
-          </p:cNvPr>
-          <p:cNvPicPr>
-            <a:picLocks noChangeAspect="1" noChangeArrowheads="1"/>
-          </p:cNvPicPr>
-          <p:nvPr/>
-        </p:nvPicPr>
-        <p:blipFill>
-          <a:blip r:embed="rId3">
-            <a:extLst>
-              <a:ext uri="{28A0092B-C50C-407E-A947-70E740481C1C}">
-                <a14:useLocalDpi xmlns:a14="http://schemas.microsoft.com/office/drawing/2010/main" val="0"/>
-              </a:ext>
-            </a:extLst>
-          </a:blip>
-          <a:srcRect/>
-          <a:stretch>
-            <a:fillRect/>
-          </a:stretch>
-        </p:blipFill>
-        <p:spPr bwMode="auto">
-          <a:xfrm>
-            <a:off x="10362024" y="3839965"/>
-            <a:ext cx="1019892" cy="395607"/>
-          </a:xfrm>
-          <a:prstGeom prst="rect">
-            <a:avLst/>
-          </a:prstGeom>
-          <a:noFill/>
-          <a:extLst>
-            <a:ext uri="{909E8E84-426E-40DD-AFC4-6F175D3DCCD1}">
-              <a14:hiddenFill xmlns:a14="http://schemas.microsoft.com/office/drawing/2010/main">
-                <a:solidFill>
-                  <a:srgbClr val="FFFFFF"/>
-                </a:solidFill>
-              </a14:hiddenFill>
-            </a:ext>
-          </a:extLst>
-        </p:spPr>
-      </p:pic>
-      <p:grpSp>
-        <p:nvGrpSpPr>
-          <p:cNvPr id="34" name="Group 33">
-            <a:extLst>
-              <a:ext uri="{FF2B5EF4-FFF2-40B4-BE49-F238E27FC236}">
-                <a16:creationId xmlns:a16="http://schemas.microsoft.com/office/drawing/2014/main" id="{2CA44A45-087A-C3C2-2F29-FDA950B19C98}"/>
-              </a:ext>
-            </a:extLst>
-          </p:cNvPr>
-          <p:cNvGrpSpPr/>
-          <p:nvPr/>
-        </p:nvGrpSpPr>
-        <p:grpSpPr>
-          <a:xfrm>
-            <a:off x="3071962" y="1900172"/>
-            <a:ext cx="6694805" cy="3425895"/>
-            <a:chOff x="2058288" y="1690688"/>
-            <a:chExt cx="6694805" cy="3425895"/>
-          </a:xfrm>
-        </p:grpSpPr>
-        <p:sp>
-          <p:nvSpPr>
-            <p:cNvPr id="12" name="TextBox 11">
-              <a:extLst>
-                <a:ext uri="{FF2B5EF4-FFF2-40B4-BE49-F238E27FC236}">
-                  <a16:creationId xmlns:a16="http://schemas.microsoft.com/office/drawing/2014/main" id="{833F92DB-B4B3-6464-9CD4-B65592C22CEA}"/>
-                </a:ext>
-              </a:extLst>
-            </p:cNvPr>
-            <p:cNvSpPr txBox="1"/>
-            <p:nvPr/>
-          </p:nvSpPr>
-          <p:spPr>
-            <a:xfrm>
-              <a:off x="2058288" y="4680283"/>
-              <a:ext cx="1507958" cy="369332"/>
-            </a:xfrm>
-            <a:prstGeom prst="rect">
-              <a:avLst/>
-            </a:prstGeom>
-            <a:noFill/>
-          </p:spPr>
-          <p:txBody>
-            <a:bodyPr wrap="square" rtlCol="0">
-              <a:spAutoFit/>
-            </a:bodyPr>
-            <a:lstStyle/>
-            <a:p>
-              <a:r>
-                <a:rPr lang="en-GB" b="1" dirty="0"/>
-                <a:t>Input Layer</a:t>
-              </a:r>
-              <a:endParaRPr lang="en-GB" dirty="0"/>
-            </a:p>
-          </p:txBody>
-        </p:sp>
-        <p:sp>
-          <p:nvSpPr>
-            <p:cNvPr id="13" name="TextBox 12">
-              <a:extLst>
-                <a:ext uri="{FF2B5EF4-FFF2-40B4-BE49-F238E27FC236}">
-                  <a16:creationId xmlns:a16="http://schemas.microsoft.com/office/drawing/2014/main" id="{80913096-728C-D0D0-6365-4D06BEE23123}"/>
-                </a:ext>
-              </a:extLst>
-            </p:cNvPr>
-            <p:cNvSpPr txBox="1"/>
-            <p:nvPr/>
-          </p:nvSpPr>
-          <p:spPr>
-            <a:xfrm>
-              <a:off x="4448910" y="4734732"/>
-              <a:ext cx="1905001" cy="369332"/>
-            </a:xfrm>
-            <a:prstGeom prst="rect">
-              <a:avLst/>
-            </a:prstGeom>
-            <a:noFill/>
-          </p:spPr>
-          <p:txBody>
-            <a:bodyPr wrap="square" rtlCol="0">
-              <a:spAutoFit/>
-            </a:bodyPr>
-            <a:lstStyle/>
-            <a:p>
-              <a:r>
-                <a:rPr lang="en-GB" b="1" dirty="0"/>
-                <a:t>Hidden Layers</a:t>
-              </a:r>
-              <a:endParaRPr lang="en-GB" dirty="0"/>
-            </a:p>
-          </p:txBody>
-        </p:sp>
-        <p:sp>
-          <p:nvSpPr>
-            <p:cNvPr id="14" name="TextBox 13">
-              <a:extLst>
-                <a:ext uri="{FF2B5EF4-FFF2-40B4-BE49-F238E27FC236}">
-                  <a16:creationId xmlns:a16="http://schemas.microsoft.com/office/drawing/2014/main" id="{85088378-9253-79E8-0EE5-53520AD1447D}"/>
-                </a:ext>
-              </a:extLst>
-            </p:cNvPr>
-            <p:cNvSpPr txBox="1"/>
-            <p:nvPr/>
-          </p:nvSpPr>
-          <p:spPr>
-            <a:xfrm>
-              <a:off x="6931654" y="4747251"/>
-              <a:ext cx="1821439" cy="369332"/>
-            </a:xfrm>
-            <a:prstGeom prst="rect">
-              <a:avLst/>
-            </a:prstGeom>
-            <a:noFill/>
-          </p:spPr>
-          <p:txBody>
-            <a:bodyPr wrap="square" rtlCol="0">
-              <a:spAutoFit/>
-            </a:bodyPr>
-            <a:lstStyle/>
-            <a:p>
-              <a:r>
-                <a:rPr lang="en-GB" b="1" dirty="0"/>
-                <a:t>Output Layer</a:t>
-              </a:r>
-              <a:endParaRPr lang="en-GB" dirty="0"/>
-            </a:p>
-          </p:txBody>
-        </p:sp>
-        <p:sp>
-          <p:nvSpPr>
-            <p:cNvPr id="18" name="Rectangle 17">
-              <a:extLst>
-                <a:ext uri="{FF2B5EF4-FFF2-40B4-BE49-F238E27FC236}">
-                  <a16:creationId xmlns:a16="http://schemas.microsoft.com/office/drawing/2014/main" id="{BBDEA889-EEB6-9B48-CC68-CDB7B6A3F6EB}"/>
-                </a:ext>
-              </a:extLst>
-            </p:cNvPr>
-            <p:cNvSpPr/>
-            <p:nvPr/>
-          </p:nvSpPr>
-          <p:spPr>
-            <a:xfrm>
-              <a:off x="7291135" y="2177716"/>
-              <a:ext cx="1050757" cy="2502568"/>
-            </a:xfrm>
-            <a:prstGeom prst="rect">
-              <a:avLst/>
-            </a:prstGeom>
-            <a:noFill/>
-            <a:ln>
-              <a:noFill/>
-            </a:ln>
-          </p:spPr>
-          <p:style>
-            <a:lnRef idx="0">
-              <a:scrgbClr r="0" g="0" b="0"/>
-            </a:lnRef>
-            <a:fillRef idx="0">
-              <a:scrgbClr r="0" g="0" b="0"/>
-            </a:fillRef>
-            <a:effectRef idx="0">
-              <a:scrgbClr r="0" g="0" b="0"/>
-            </a:effectRef>
-            <a:fontRef idx="minor">
-              <a:schemeClr val="lt1"/>
-            </a:fontRef>
-          </p:style>
-          <p:txBody>
-            <a:bodyPr rtlCol="0" anchor="ctr"/>
-            <a:lstStyle/>
-            <a:p>
-              <a:pPr algn="ctr"/>
-              <a:endParaRPr lang="en-GB"/>
-            </a:p>
-          </p:txBody>
-        </p:sp>
-        <p:grpSp>
-          <p:nvGrpSpPr>
-            <p:cNvPr id="30" name="Group 29">
-              <a:extLst>
-                <a:ext uri="{FF2B5EF4-FFF2-40B4-BE49-F238E27FC236}">
-                  <a16:creationId xmlns:a16="http://schemas.microsoft.com/office/drawing/2014/main" id="{5923FBCA-5D58-5EF5-9D30-BCE8F455DF56}"/>
-                </a:ext>
-              </a:extLst>
-            </p:cNvPr>
-            <p:cNvGrpSpPr/>
-            <p:nvPr/>
-          </p:nvGrpSpPr>
-          <p:grpSpPr>
-            <a:xfrm>
-              <a:off x="2379133" y="2305550"/>
-              <a:ext cx="866273" cy="1648872"/>
-              <a:chOff x="1766256" y="2357642"/>
-              <a:chExt cx="866273" cy="1648872"/>
-            </a:xfrm>
-          </p:grpSpPr>
-          <p:sp>
-            <p:nvSpPr>
-              <p:cNvPr id="5" name="Rectangle 4">
-                <a:extLst>
-                  <a:ext uri="{FF2B5EF4-FFF2-40B4-BE49-F238E27FC236}">
-                    <a16:creationId xmlns:a16="http://schemas.microsoft.com/office/drawing/2014/main" id="{D3061EA9-C787-4181-650A-EEFD172A41E1}"/>
-                  </a:ext>
-                </a:extLst>
-              </p:cNvPr>
-              <p:cNvSpPr/>
-              <p:nvPr/>
-            </p:nvSpPr>
-            <p:spPr>
-              <a:xfrm>
-                <a:off x="1766256" y="2851483"/>
-                <a:ext cx="866273" cy="1155031"/>
-              </a:xfrm>
-              <a:prstGeom prst="rect">
-                <a:avLst/>
-              </a:prstGeom>
-              <a:effectLst>
-                <a:outerShdw blurRad="63500" sx="102000" sy="102000" algn="ctr" rotWithShape="0">
-                  <a:prstClr val="black">
-                    <a:alpha val="40000"/>
-                  </a:prstClr>
-                </a:outerShdw>
-              </a:effectLst>
-            </p:spPr>
-            <p:style>
-              <a:lnRef idx="2">
-                <a:schemeClr val="accent1">
-                  <a:shade val="15000"/>
-                </a:schemeClr>
-              </a:lnRef>
-              <a:fillRef idx="1">
-                <a:schemeClr val="accent1"/>
-              </a:fillRef>
-              <a:effectRef idx="0">
-                <a:schemeClr val="accent1"/>
-              </a:effectRef>
-              <a:fontRef idx="minor">
-                <a:schemeClr val="lt1"/>
-              </a:fontRef>
-            </p:style>
-            <p:txBody>
-              <a:bodyPr rtlCol="0" anchor="ctr"/>
-              <a:lstStyle/>
-              <a:p>
-                <a:pPr algn="ctr"/>
-                <a:endParaRPr lang="en-GB" dirty="0"/>
-              </a:p>
-            </p:txBody>
-          </p:sp>
-          <p:sp>
-            <p:nvSpPr>
-              <p:cNvPr id="20" name="TextBox 19">
-                <a:extLst>
-                  <a:ext uri="{FF2B5EF4-FFF2-40B4-BE49-F238E27FC236}">
-                    <a16:creationId xmlns:a16="http://schemas.microsoft.com/office/drawing/2014/main" id="{A3E7341E-6507-1310-04A4-F3A16DA1B026}"/>
-                  </a:ext>
-                </a:extLst>
-              </p:cNvPr>
-              <p:cNvSpPr txBox="1"/>
-              <p:nvPr/>
-            </p:nvSpPr>
-            <p:spPr>
-              <a:xfrm>
-                <a:off x="1980817" y="2357642"/>
-                <a:ext cx="437147" cy="369332"/>
-              </a:xfrm>
-              <a:prstGeom prst="rect">
-                <a:avLst/>
-              </a:prstGeom>
-              <a:noFill/>
-            </p:spPr>
-            <p:txBody>
-              <a:bodyPr wrap="square" rtlCol="0">
-                <a:spAutoFit/>
-              </a:bodyPr>
-              <a:lstStyle/>
-              <a:p>
-                <a:pPr algn="ctr"/>
-                <a:r>
-                  <a:rPr lang="en-US" dirty="0"/>
-                  <a:t>1</a:t>
-                </a:r>
-                <a:endParaRPr lang="en-GB" dirty="0"/>
-              </a:p>
-            </p:txBody>
-          </p:sp>
-        </p:grpSp>
-        <p:grpSp>
-          <p:nvGrpSpPr>
-            <p:cNvPr id="26" name="Group 25">
-              <a:extLst>
-                <a:ext uri="{FF2B5EF4-FFF2-40B4-BE49-F238E27FC236}">
-                  <a16:creationId xmlns:a16="http://schemas.microsoft.com/office/drawing/2014/main" id="{097B4C84-D3AF-6BD7-C794-550C32EFB3E6}"/>
-                </a:ext>
-              </a:extLst>
-            </p:cNvPr>
-            <p:cNvGrpSpPr/>
-            <p:nvPr/>
-          </p:nvGrpSpPr>
-          <p:grpSpPr>
-            <a:xfrm>
-              <a:off x="3376863" y="1690688"/>
-              <a:ext cx="1050758" cy="2989596"/>
-              <a:chOff x="3376863" y="1690688"/>
-              <a:chExt cx="1050758" cy="2989596"/>
-            </a:xfrm>
-          </p:grpSpPr>
-          <p:sp>
-            <p:nvSpPr>
-              <p:cNvPr id="6" name="Rectangle 5">
-                <a:extLst>
-                  <a:ext uri="{FF2B5EF4-FFF2-40B4-BE49-F238E27FC236}">
-                    <a16:creationId xmlns:a16="http://schemas.microsoft.com/office/drawing/2014/main" id="{420C766B-C4A1-6C16-BB67-22B0344A12E6}"/>
-                  </a:ext>
-                </a:extLst>
-              </p:cNvPr>
-              <p:cNvSpPr/>
-              <p:nvPr/>
-            </p:nvSpPr>
-            <p:spPr>
-              <a:xfrm>
-                <a:off x="3376864" y="2177715"/>
-                <a:ext cx="1050757" cy="2502568"/>
-              </a:xfrm>
-              <a:prstGeom prst="rect">
-                <a:avLst/>
-              </a:prstGeom>
-              <a:effectLst>
-                <a:outerShdw blurRad="63500" sx="102000" sy="102000" algn="ctr" rotWithShape="0">
-                  <a:prstClr val="black">
-                    <a:alpha val="40000"/>
-                  </a:prstClr>
-                </a:outerShdw>
-              </a:effectLst>
-            </p:spPr>
-            <p:style>
-              <a:lnRef idx="2">
-                <a:schemeClr val="accent1">
-                  <a:shade val="15000"/>
-                </a:schemeClr>
-              </a:lnRef>
-              <a:fillRef idx="1">
-                <a:schemeClr val="accent1"/>
-              </a:fillRef>
-              <a:effectRef idx="0">
-                <a:schemeClr val="accent1"/>
-              </a:effectRef>
-              <a:fontRef idx="minor">
-                <a:schemeClr val="lt1"/>
-              </a:fontRef>
-            </p:style>
-            <p:txBody>
-              <a:bodyPr rtlCol="0" anchor="ctr"/>
-              <a:lstStyle/>
-              <a:p>
-                <a:pPr algn="ctr"/>
-                <a:endParaRPr lang="en-GB" dirty="0"/>
-              </a:p>
-            </p:txBody>
-          </p:sp>
-          <p:sp>
-            <p:nvSpPr>
-              <p:cNvPr id="16" name="Rectangle 15">
-                <a:extLst>
-                  <a:ext uri="{FF2B5EF4-FFF2-40B4-BE49-F238E27FC236}">
-                    <a16:creationId xmlns:a16="http://schemas.microsoft.com/office/drawing/2014/main" id="{0FAC438F-1331-50AE-818F-FD64636F5AE7}"/>
-                  </a:ext>
-                </a:extLst>
-              </p:cNvPr>
-              <p:cNvSpPr/>
-              <p:nvPr/>
-            </p:nvSpPr>
-            <p:spPr>
-              <a:xfrm>
-                <a:off x="3376863" y="2177716"/>
-                <a:ext cx="1050757" cy="2502568"/>
-              </a:xfrm>
-              <a:prstGeom prst="rect">
-                <a:avLst/>
-              </a:prstGeom>
-              <a:noFill/>
-              <a:ln>
-                <a:noFill/>
-              </a:ln>
-            </p:spPr>
-            <p:style>
-              <a:lnRef idx="0">
-                <a:scrgbClr r="0" g="0" b="0"/>
-              </a:lnRef>
-              <a:fillRef idx="0">
-                <a:scrgbClr r="0" g="0" b="0"/>
-              </a:fillRef>
-              <a:effectRef idx="0">
-                <a:scrgbClr r="0" g="0" b="0"/>
-              </a:effectRef>
-              <a:fontRef idx="minor">
-                <a:schemeClr val="lt1"/>
-              </a:fontRef>
-            </p:style>
-            <p:txBody>
-              <a:bodyPr rtlCol="0" anchor="ctr"/>
-              <a:lstStyle/>
-              <a:p>
-                <a:pPr algn="ctr"/>
-                <a:endParaRPr lang="en-GB"/>
-              </a:p>
-            </p:txBody>
-          </p:sp>
-          <p:sp>
-            <p:nvSpPr>
-              <p:cNvPr id="21" name="TextBox 20">
-                <a:extLst>
-                  <a:ext uri="{FF2B5EF4-FFF2-40B4-BE49-F238E27FC236}">
-                    <a16:creationId xmlns:a16="http://schemas.microsoft.com/office/drawing/2014/main" id="{2C212044-FC3C-455B-A6AD-B48C1BEE026F}"/>
-                  </a:ext>
-                </a:extLst>
-              </p:cNvPr>
-              <p:cNvSpPr txBox="1"/>
-              <p:nvPr/>
-            </p:nvSpPr>
-            <p:spPr>
-              <a:xfrm>
-                <a:off x="3603531" y="1690688"/>
-                <a:ext cx="564948" cy="369332"/>
-              </a:xfrm>
-              <a:prstGeom prst="rect">
-                <a:avLst/>
-              </a:prstGeom>
-              <a:noFill/>
-            </p:spPr>
-            <p:txBody>
-              <a:bodyPr wrap="square" rtlCol="0">
-                <a:spAutoFit/>
-              </a:bodyPr>
-              <a:lstStyle/>
-              <a:p>
-                <a:pPr algn="ctr"/>
-                <a:r>
-                  <a:rPr lang="en-US" dirty="0"/>
-                  <a:t>128</a:t>
-                </a:r>
-                <a:endParaRPr lang="en-GB" dirty="0"/>
-              </a:p>
-            </p:txBody>
-          </p:sp>
-        </p:grpSp>
-        <p:grpSp>
-          <p:nvGrpSpPr>
-            <p:cNvPr id="27" name="Group 26">
-              <a:extLst>
-                <a:ext uri="{FF2B5EF4-FFF2-40B4-BE49-F238E27FC236}">
-                  <a16:creationId xmlns:a16="http://schemas.microsoft.com/office/drawing/2014/main" id="{3681D48A-3D3F-4F47-D619-545381DC7DAB}"/>
-                </a:ext>
-              </a:extLst>
-            </p:cNvPr>
-            <p:cNvGrpSpPr/>
-            <p:nvPr/>
-          </p:nvGrpSpPr>
-          <p:grpSpPr>
-            <a:xfrm>
-              <a:off x="4608096" y="1705855"/>
-              <a:ext cx="1050758" cy="2988893"/>
-              <a:chOff x="5333999" y="1691391"/>
-              <a:chExt cx="1050758" cy="2988893"/>
-            </a:xfrm>
-          </p:grpSpPr>
-          <p:sp>
-            <p:nvSpPr>
-              <p:cNvPr id="8" name="Rectangle 7">
-                <a:extLst>
-                  <a:ext uri="{FF2B5EF4-FFF2-40B4-BE49-F238E27FC236}">
-                    <a16:creationId xmlns:a16="http://schemas.microsoft.com/office/drawing/2014/main" id="{ABF72721-3F6C-8728-1351-3E4093F51F5B}"/>
-                  </a:ext>
-                </a:extLst>
-              </p:cNvPr>
-              <p:cNvSpPr/>
-              <p:nvPr/>
-            </p:nvSpPr>
-            <p:spPr>
-              <a:xfrm>
-                <a:off x="5334000" y="2177715"/>
-                <a:ext cx="1050757" cy="2502568"/>
-              </a:xfrm>
-              <a:prstGeom prst="rect">
-                <a:avLst/>
-              </a:prstGeom>
-              <a:effectLst>
-                <a:outerShdw blurRad="63500" sx="102000" sy="102000" algn="ctr" rotWithShape="0">
-                  <a:prstClr val="black">
-                    <a:alpha val="40000"/>
-                  </a:prstClr>
-                </a:outerShdw>
-              </a:effectLst>
-            </p:spPr>
-            <p:style>
-              <a:lnRef idx="2">
-                <a:schemeClr val="accent1">
-                  <a:shade val="15000"/>
-                </a:schemeClr>
-              </a:lnRef>
-              <a:fillRef idx="1">
-                <a:schemeClr val="accent1"/>
-              </a:fillRef>
-              <a:effectRef idx="0">
-                <a:schemeClr val="accent1"/>
-              </a:effectRef>
-              <a:fontRef idx="minor">
-                <a:schemeClr val="lt1"/>
-              </a:fontRef>
-            </p:style>
-            <p:txBody>
-              <a:bodyPr rtlCol="0" anchor="ctr"/>
-              <a:lstStyle/>
-              <a:p>
-                <a:pPr algn="ctr"/>
-                <a:endParaRPr lang="en-GB"/>
-              </a:p>
-            </p:txBody>
-          </p:sp>
-          <p:sp>
-            <p:nvSpPr>
-              <p:cNvPr id="17" name="Rectangle 16">
-                <a:extLst>
-                  <a:ext uri="{FF2B5EF4-FFF2-40B4-BE49-F238E27FC236}">
-                    <a16:creationId xmlns:a16="http://schemas.microsoft.com/office/drawing/2014/main" id="{BDBCB588-1A2E-013A-BC93-AB356B50A8A1}"/>
-                  </a:ext>
-                </a:extLst>
-              </p:cNvPr>
-              <p:cNvSpPr/>
-              <p:nvPr/>
-            </p:nvSpPr>
-            <p:spPr>
-              <a:xfrm>
-                <a:off x="5333999" y="2177716"/>
-                <a:ext cx="1050757" cy="2502568"/>
-              </a:xfrm>
-              <a:prstGeom prst="rect">
-                <a:avLst/>
-              </a:prstGeom>
-              <a:noFill/>
-              <a:ln>
-                <a:noFill/>
-              </a:ln>
-            </p:spPr>
-            <p:style>
-              <a:lnRef idx="0">
-                <a:scrgbClr r="0" g="0" b="0"/>
-              </a:lnRef>
-              <a:fillRef idx="0">
-                <a:scrgbClr r="0" g="0" b="0"/>
-              </a:fillRef>
-              <a:effectRef idx="0">
-                <a:scrgbClr r="0" g="0" b="0"/>
-              </a:effectRef>
-              <a:fontRef idx="minor">
-                <a:schemeClr val="lt1"/>
-              </a:fontRef>
-            </p:style>
-            <p:txBody>
-              <a:bodyPr rtlCol="0" anchor="ctr"/>
-              <a:lstStyle/>
-              <a:p>
-                <a:pPr algn="ctr"/>
-                <a:endParaRPr lang="en-GB"/>
-              </a:p>
-            </p:txBody>
-          </p:sp>
-          <p:sp>
-            <p:nvSpPr>
-              <p:cNvPr id="22" name="TextBox 21">
-                <a:extLst>
-                  <a:ext uri="{FF2B5EF4-FFF2-40B4-BE49-F238E27FC236}">
-                    <a16:creationId xmlns:a16="http://schemas.microsoft.com/office/drawing/2014/main" id="{1FE1A0C7-456B-847A-CC98-BE791AB5FBDA}"/>
-                  </a:ext>
-                </a:extLst>
-              </p:cNvPr>
-              <p:cNvSpPr txBox="1"/>
-              <p:nvPr/>
-            </p:nvSpPr>
-            <p:spPr>
-              <a:xfrm>
-                <a:off x="5572688" y="1691391"/>
-                <a:ext cx="437147" cy="369332"/>
-              </a:xfrm>
-              <a:prstGeom prst="rect">
-                <a:avLst/>
-              </a:prstGeom>
-              <a:noFill/>
-            </p:spPr>
-            <p:txBody>
-              <a:bodyPr wrap="square" rtlCol="0">
-                <a:spAutoFit/>
-              </a:bodyPr>
-              <a:lstStyle/>
-              <a:p>
-                <a:pPr algn="ctr"/>
-                <a:r>
-                  <a:rPr lang="en-US" dirty="0"/>
-                  <a:t>64</a:t>
-                </a:r>
-                <a:endParaRPr lang="en-GB" dirty="0"/>
-              </a:p>
-            </p:txBody>
-          </p:sp>
-        </p:grpSp>
-        <p:grpSp>
-          <p:nvGrpSpPr>
-            <p:cNvPr id="28" name="Group 27">
-              <a:extLst>
-                <a:ext uri="{FF2B5EF4-FFF2-40B4-BE49-F238E27FC236}">
-                  <a16:creationId xmlns:a16="http://schemas.microsoft.com/office/drawing/2014/main" id="{963C09D6-7B79-2EDC-894C-0DD68A67B8DC}"/>
-                </a:ext>
-              </a:extLst>
-            </p:cNvPr>
-            <p:cNvGrpSpPr/>
-            <p:nvPr/>
-          </p:nvGrpSpPr>
-          <p:grpSpPr>
-            <a:xfrm>
-              <a:off x="5880897" y="1690688"/>
-              <a:ext cx="1050757" cy="2989595"/>
-              <a:chOff x="7291136" y="1690688"/>
-              <a:chExt cx="1050757" cy="2989595"/>
-            </a:xfrm>
-          </p:grpSpPr>
-          <p:sp>
-            <p:nvSpPr>
-              <p:cNvPr id="9" name="Rectangle 8">
-                <a:extLst>
-                  <a:ext uri="{FF2B5EF4-FFF2-40B4-BE49-F238E27FC236}">
-                    <a16:creationId xmlns:a16="http://schemas.microsoft.com/office/drawing/2014/main" id="{ADB25965-5B7A-D31B-B068-CFD89BD770D2}"/>
-                  </a:ext>
-                </a:extLst>
-              </p:cNvPr>
-              <p:cNvSpPr/>
-              <p:nvPr/>
-            </p:nvSpPr>
-            <p:spPr>
-              <a:xfrm>
-                <a:off x="7291136" y="2177715"/>
-                <a:ext cx="1050757" cy="2502568"/>
-              </a:xfrm>
-              <a:prstGeom prst="rect">
-                <a:avLst/>
-              </a:prstGeom>
-              <a:effectLst>
-                <a:outerShdw blurRad="63500" sx="102000" sy="102000" algn="ctr" rotWithShape="0">
-                  <a:prstClr val="black">
-                    <a:alpha val="40000"/>
-                  </a:prstClr>
-                </a:outerShdw>
-              </a:effectLst>
-            </p:spPr>
-            <p:style>
-              <a:lnRef idx="2">
-                <a:schemeClr val="accent1">
-                  <a:shade val="15000"/>
-                </a:schemeClr>
-              </a:lnRef>
-              <a:fillRef idx="1">
-                <a:schemeClr val="accent1"/>
-              </a:fillRef>
-              <a:effectRef idx="0">
-                <a:schemeClr val="accent1"/>
-              </a:effectRef>
-              <a:fontRef idx="minor">
-                <a:schemeClr val="lt1"/>
-              </a:fontRef>
-            </p:style>
-            <p:txBody>
-              <a:bodyPr rtlCol="0" anchor="ctr"/>
-              <a:lstStyle/>
-              <a:p>
-                <a:pPr algn="ctr"/>
-                <a:endParaRPr lang="en-GB" dirty="0"/>
-              </a:p>
-            </p:txBody>
-          </p:sp>
-          <p:sp>
-            <p:nvSpPr>
-              <p:cNvPr id="23" name="TextBox 22">
-                <a:extLst>
-                  <a:ext uri="{FF2B5EF4-FFF2-40B4-BE49-F238E27FC236}">
-                    <a16:creationId xmlns:a16="http://schemas.microsoft.com/office/drawing/2014/main" id="{F41B708B-3EB1-84B3-CCA7-DF33128B16C0}"/>
-                  </a:ext>
-                </a:extLst>
-              </p:cNvPr>
-              <p:cNvSpPr txBox="1"/>
-              <p:nvPr/>
-            </p:nvSpPr>
-            <p:spPr>
-              <a:xfrm>
-                <a:off x="7634041" y="1690688"/>
-                <a:ext cx="437147" cy="369332"/>
-              </a:xfrm>
-              <a:prstGeom prst="rect">
-                <a:avLst/>
-              </a:prstGeom>
-              <a:noFill/>
-            </p:spPr>
-            <p:txBody>
-              <a:bodyPr wrap="square" rtlCol="0">
-                <a:spAutoFit/>
-              </a:bodyPr>
-              <a:lstStyle/>
-              <a:p>
-                <a:pPr algn="ctr"/>
-                <a:r>
-                  <a:rPr lang="en-US" dirty="0"/>
-                  <a:t>32</a:t>
-                </a:r>
-                <a:endParaRPr lang="en-GB" dirty="0"/>
-              </a:p>
-            </p:txBody>
-          </p:sp>
-        </p:grpSp>
-        <p:grpSp>
-          <p:nvGrpSpPr>
-            <p:cNvPr id="31" name="Group 30">
-              <a:extLst>
-                <a:ext uri="{FF2B5EF4-FFF2-40B4-BE49-F238E27FC236}">
-                  <a16:creationId xmlns:a16="http://schemas.microsoft.com/office/drawing/2014/main" id="{FF35CA1E-719D-2CF3-9AA9-FC73377CE196}"/>
-                </a:ext>
-              </a:extLst>
-            </p:cNvPr>
-            <p:cNvGrpSpPr/>
-            <p:nvPr/>
-          </p:nvGrpSpPr>
-          <p:grpSpPr>
-            <a:xfrm>
-              <a:off x="7059637" y="2374647"/>
-              <a:ext cx="866273" cy="1648872"/>
-              <a:chOff x="1372715" y="2357642"/>
-              <a:chExt cx="866273" cy="1648872"/>
-            </a:xfrm>
-          </p:grpSpPr>
-          <p:sp>
-            <p:nvSpPr>
-              <p:cNvPr id="32" name="Rectangle 31">
-                <a:extLst>
-                  <a:ext uri="{FF2B5EF4-FFF2-40B4-BE49-F238E27FC236}">
-                    <a16:creationId xmlns:a16="http://schemas.microsoft.com/office/drawing/2014/main" id="{1637D48E-57A3-4816-C433-3DA9E257891A}"/>
-                  </a:ext>
-                </a:extLst>
-              </p:cNvPr>
-              <p:cNvSpPr/>
-              <p:nvPr/>
-            </p:nvSpPr>
-            <p:spPr>
-              <a:xfrm>
-                <a:off x="1372715" y="2851483"/>
-                <a:ext cx="866273" cy="1155031"/>
-              </a:xfrm>
-              <a:prstGeom prst="rect">
-                <a:avLst/>
-              </a:prstGeom>
-              <a:effectLst>
-                <a:outerShdw blurRad="63500" sx="102000" sy="102000" algn="ctr" rotWithShape="0">
-                  <a:prstClr val="black">
-                    <a:alpha val="40000"/>
-                  </a:prstClr>
-                </a:outerShdw>
-              </a:effectLst>
-            </p:spPr>
-            <p:style>
-              <a:lnRef idx="2">
-                <a:schemeClr val="accent1">
-                  <a:shade val="15000"/>
-                </a:schemeClr>
-              </a:lnRef>
-              <a:fillRef idx="1">
-                <a:schemeClr val="accent1"/>
-              </a:fillRef>
-              <a:effectRef idx="0">
-                <a:schemeClr val="accent1"/>
-              </a:effectRef>
-              <a:fontRef idx="minor">
-                <a:schemeClr val="lt1"/>
-              </a:fontRef>
-            </p:style>
-            <p:txBody>
-              <a:bodyPr rtlCol="0" anchor="ctr"/>
-              <a:lstStyle/>
-              <a:p>
-                <a:pPr algn="ctr"/>
-                <a:endParaRPr lang="en-GB" dirty="0"/>
-              </a:p>
-            </p:txBody>
-          </p:sp>
-          <p:sp>
-            <p:nvSpPr>
-              <p:cNvPr id="33" name="TextBox 32">
-                <a:extLst>
-                  <a:ext uri="{FF2B5EF4-FFF2-40B4-BE49-F238E27FC236}">
-                    <a16:creationId xmlns:a16="http://schemas.microsoft.com/office/drawing/2014/main" id="{88ED33CF-85BC-3F7B-B58E-D90BFC0FAF8D}"/>
-                  </a:ext>
-                </a:extLst>
-              </p:cNvPr>
-              <p:cNvSpPr txBox="1"/>
-              <p:nvPr/>
-            </p:nvSpPr>
-            <p:spPr>
-              <a:xfrm>
-                <a:off x="1587276" y="2357642"/>
-                <a:ext cx="437147" cy="369332"/>
-              </a:xfrm>
-              <a:prstGeom prst="rect">
-                <a:avLst/>
-              </a:prstGeom>
-              <a:noFill/>
-            </p:spPr>
-            <p:txBody>
-              <a:bodyPr wrap="square" rtlCol="0">
-                <a:spAutoFit/>
-              </a:bodyPr>
-              <a:lstStyle/>
-              <a:p>
-                <a:pPr algn="ctr"/>
-                <a:r>
-                  <a:rPr lang="en-US" dirty="0"/>
-                  <a:t>1</a:t>
-                </a:r>
-                <a:endParaRPr lang="en-GB" dirty="0"/>
-              </a:p>
-            </p:txBody>
-          </p:sp>
-        </p:grpSp>
-      </p:grpSp>
-      <p:sp>
-        <p:nvSpPr>
-          <p:cNvPr id="35" name="Rectangle 34">
-            <a:extLst>
-              <a:ext uri="{FF2B5EF4-FFF2-40B4-BE49-F238E27FC236}">
-                <a16:creationId xmlns:a16="http://schemas.microsoft.com/office/drawing/2014/main" id="{15ADB37F-5D05-936D-6838-6E0BFBDA6C26}"/>
-              </a:ext>
-            </a:extLst>
-          </p:cNvPr>
-          <p:cNvSpPr/>
-          <p:nvPr/>
-        </p:nvSpPr>
-        <p:spPr>
-          <a:xfrm>
-            <a:off x="196375" y="2953463"/>
-            <a:ext cx="2060293" cy="1792313"/>
-          </a:xfrm>
-          <a:prstGeom prst="rect">
-            <a:avLst/>
-          </a:prstGeom>
-          <a:noFill/>
-          <a:ln>
-            <a:noFill/>
-          </a:ln>
-        </p:spPr>
-        <p:style>
-          <a:lnRef idx="0">
-            <a:scrgbClr r="0" g="0" b="0"/>
-          </a:lnRef>
-          <a:fillRef idx="0">
-            <a:scrgbClr r="0" g="0" b="0"/>
-          </a:fillRef>
-          <a:effectRef idx="0">
-            <a:scrgbClr r="0" g="0" b="0"/>
-          </a:effectRef>
-          <a:fontRef idx="minor">
-            <a:schemeClr val="dk1"/>
-          </a:fontRef>
-        </p:style>
-        <p:txBody>
-          <a:bodyPr rtlCol="0" anchor="ctr"/>
-          <a:lstStyle/>
-          <a:p>
-            <a:pPr algn="ctr">
-              <a:lnSpc>
-                <a:spcPct val="150000"/>
-              </a:lnSpc>
-            </a:pPr>
-            <a:r>
-              <a:rPr lang="en-GB" dirty="0"/>
-              <a:t>Temperature</a:t>
-            </a:r>
-          </a:p>
-          <a:p>
-            <a:pPr algn="ctr">
-              <a:lnSpc>
-                <a:spcPct val="150000"/>
-              </a:lnSpc>
-            </a:pPr>
-            <a:r>
-              <a:rPr lang="en-GB" dirty="0"/>
-              <a:t>School Holidays</a:t>
-            </a:r>
-          </a:p>
-          <a:p>
-            <a:pPr algn="ctr">
-              <a:lnSpc>
-                <a:spcPct val="150000"/>
-              </a:lnSpc>
-            </a:pPr>
-            <a:r>
-              <a:rPr lang="en-GB" dirty="0"/>
-              <a:t>Weekday</a:t>
-            </a:r>
-          </a:p>
-          <a:p>
-            <a:pPr algn="ctr">
-              <a:lnSpc>
-                <a:spcPct val="150000"/>
-              </a:lnSpc>
-              <a:buNone/>
-            </a:pPr>
-            <a:r>
-              <a:rPr lang="en-GB" dirty="0"/>
-              <a:t>Days till NYE</a:t>
-            </a:r>
-          </a:p>
-        </p:txBody>
-      </p:sp>
-      <p:sp>
-        <p:nvSpPr>
-          <p:cNvPr id="37" name="TextBox 36">
-            <a:extLst>
-              <a:ext uri="{FF2B5EF4-FFF2-40B4-BE49-F238E27FC236}">
-                <a16:creationId xmlns:a16="http://schemas.microsoft.com/office/drawing/2014/main" id="{956498C1-B726-968C-45CE-1C366351198D}"/>
-              </a:ext>
-            </a:extLst>
-          </p:cNvPr>
-          <p:cNvSpPr txBox="1"/>
-          <p:nvPr/>
-        </p:nvSpPr>
-        <p:spPr>
-          <a:xfrm>
-            <a:off x="196374" y="2515034"/>
-            <a:ext cx="2060293" cy="369332"/>
-          </a:xfrm>
-          <a:prstGeom prst="rect">
-            <a:avLst/>
-          </a:prstGeom>
-          <a:noFill/>
-        </p:spPr>
-        <p:txBody>
-          <a:bodyPr wrap="square">
-            <a:spAutoFit/>
-          </a:bodyPr>
-          <a:lstStyle/>
-          <a:p>
-            <a:pPr algn="ctr"/>
-            <a:r>
-              <a:rPr lang="en-US" b="1" dirty="0"/>
-              <a:t>Features</a:t>
-            </a:r>
-            <a:r>
-              <a:rPr lang="en-GB" b="1" dirty="0"/>
-              <a:t>:</a:t>
-            </a:r>
-          </a:p>
-        </p:txBody>
-      </p:sp>
-      <p:cxnSp>
-        <p:nvCxnSpPr>
-          <p:cNvPr id="39" name="Straight Arrow Connector 38">
-            <a:extLst>
-              <a:ext uri="{FF2B5EF4-FFF2-40B4-BE49-F238E27FC236}">
-                <a16:creationId xmlns:a16="http://schemas.microsoft.com/office/drawing/2014/main" id="{3C525AE7-D423-56C9-0A92-A5FFF3B48F4F}"/>
-              </a:ext>
-            </a:extLst>
-          </p:cNvPr>
-          <p:cNvCxnSpPr>
-            <a:cxnSpLocks/>
-          </p:cNvCxnSpPr>
-          <p:nvPr/>
-        </p:nvCxnSpPr>
-        <p:spPr>
-          <a:xfrm>
-            <a:off x="2453833" y="3507912"/>
-            <a:ext cx="382601" cy="0"/>
-          </a:xfrm>
-          <a:prstGeom prst="straightConnector1">
-            <a:avLst/>
-          </a:prstGeom>
-          <a:ln>
-            <a:tailEnd type="triangle"/>
-          </a:ln>
-        </p:spPr>
-        <p:style>
-          <a:lnRef idx="2">
-            <a:schemeClr val="accent1"/>
-          </a:lnRef>
-          <a:fillRef idx="0">
-            <a:schemeClr val="accent1"/>
-          </a:fillRef>
-          <a:effectRef idx="1">
-            <a:schemeClr val="accent1"/>
-          </a:effectRef>
-          <a:fontRef idx="minor">
-            <a:schemeClr val="tx1"/>
-          </a:fontRef>
-        </p:style>
-      </p:cxnSp>
-      <p:sp>
-        <p:nvSpPr>
-          <p:cNvPr id="41" name="Rectangle 40">
-            <a:extLst>
-              <a:ext uri="{FF2B5EF4-FFF2-40B4-BE49-F238E27FC236}">
-                <a16:creationId xmlns:a16="http://schemas.microsoft.com/office/drawing/2014/main" id="{9E116F47-98E5-2396-BCC3-0246C5EEB45D}"/>
-              </a:ext>
-            </a:extLst>
-          </p:cNvPr>
-          <p:cNvSpPr/>
-          <p:nvPr/>
-        </p:nvSpPr>
-        <p:spPr>
-          <a:xfrm>
-            <a:off x="9551941" y="2047652"/>
-            <a:ext cx="2640059" cy="1792313"/>
-          </a:xfrm>
-          <a:prstGeom prst="rect">
-            <a:avLst/>
-          </a:prstGeom>
-          <a:noFill/>
-          <a:ln>
-            <a:noFill/>
-          </a:ln>
-        </p:spPr>
-        <p:style>
-          <a:lnRef idx="0">
-            <a:scrgbClr r="0" g="0" b="0"/>
-          </a:lnRef>
-          <a:fillRef idx="0">
-            <a:scrgbClr r="0" g="0" b="0"/>
-          </a:fillRef>
-          <a:effectRef idx="0">
-            <a:scrgbClr r="0" g="0" b="0"/>
-          </a:effectRef>
-          <a:fontRef idx="minor">
-            <a:schemeClr val="dk1"/>
-          </a:fontRef>
-        </p:style>
-        <p:txBody>
-          <a:bodyPr rtlCol="0" anchor="ctr"/>
-          <a:lstStyle/>
-          <a:p>
-            <a:pPr algn="ctr">
-              <a:lnSpc>
-                <a:spcPct val="150000"/>
-              </a:lnSpc>
-            </a:pPr>
-            <a:r>
-              <a:rPr lang="en-GB" b="1" dirty="0"/>
-              <a:t>MAPE</a:t>
-            </a:r>
-          </a:p>
-          <a:p>
-            <a:pPr>
-              <a:lnSpc>
-                <a:spcPct val="150000"/>
-              </a:lnSpc>
-            </a:pPr>
-            <a:r>
-              <a:rPr lang="en-GB" dirty="0"/>
-              <a:t>Validation Data :</a:t>
-            </a:r>
-          </a:p>
-          <a:p>
-            <a:pPr>
-              <a:lnSpc>
-                <a:spcPct val="150000"/>
-              </a:lnSpc>
-            </a:pPr>
-            <a:r>
-              <a:rPr lang="en-GB" dirty="0"/>
-              <a:t>Train + Validation Data :</a:t>
-            </a:r>
-          </a:p>
-        </p:txBody>
-      </p:sp>
-      <p:sp>
-        <p:nvSpPr>
-          <p:cNvPr id="4" name="TextBox 3">
-            <a:extLst>
-              <a:ext uri="{FF2B5EF4-FFF2-40B4-BE49-F238E27FC236}">
-                <a16:creationId xmlns:a16="http://schemas.microsoft.com/office/drawing/2014/main" id="{AECE0876-EABA-CF74-7594-600CE0B3BF86}"/>
-              </a:ext>
-            </a:extLst>
-          </p:cNvPr>
-          <p:cNvSpPr txBox="1"/>
-          <p:nvPr/>
-        </p:nvSpPr>
-        <p:spPr>
-          <a:xfrm>
-            <a:off x="3778474" y="6538912"/>
-            <a:ext cx="4635051" cy="276999"/>
-          </a:xfrm>
-          <a:prstGeom prst="rect">
-            <a:avLst/>
-          </a:prstGeom>
-          <a:noFill/>
-        </p:spPr>
-        <p:txBody>
-          <a:bodyPr wrap="none" rtlCol="0">
-            <a:spAutoFit/>
-          </a:bodyPr>
-          <a:lstStyle/>
-          <a:p>
-            <a:r>
-              <a:rPr lang="en-GB" sz="1200" dirty="0">
-                <a:solidFill>
-                  <a:schemeClr val="bg1">
-                    <a:lumMod val="75000"/>
-                  </a:schemeClr>
-                </a:solidFill>
-              </a:rPr>
-              <a:t>Dataset Characteristics </a:t>
-            </a:r>
-            <a:r>
-              <a:rPr lang="en-GB" sz="1200" dirty="0">
-                <a:solidFill>
-                  <a:schemeClr val="bg1">
-                    <a:lumMod val="75000"/>
-                  </a:schemeClr>
-                </a:solidFill>
-                <a:latin typeface="Calibri" panose="020F0502020204030204" pitchFamily="34" charset="0"/>
-                <a:ea typeface="Calibri" panose="020F0502020204030204" pitchFamily="34" charset="0"/>
-                <a:cs typeface="Calibri" panose="020F0502020204030204" pitchFamily="34" charset="0"/>
-              </a:rPr>
-              <a:t>– Baseline Model – </a:t>
-            </a:r>
-            <a:r>
-              <a:rPr lang="en-GB" sz="1200" b="1" dirty="0">
-                <a:latin typeface="Calibri" panose="020F0502020204030204" pitchFamily="34" charset="0"/>
-                <a:ea typeface="Calibri" panose="020F0502020204030204" pitchFamily="34" charset="0"/>
-                <a:cs typeface="Calibri" panose="020F0502020204030204" pitchFamily="34" charset="0"/>
-              </a:rPr>
-              <a:t>Neural Net </a:t>
-            </a:r>
-            <a:r>
-              <a:rPr lang="en-GB" sz="1200" dirty="0">
-                <a:solidFill>
-                  <a:schemeClr val="bg1">
-                    <a:lumMod val="75000"/>
-                  </a:schemeClr>
-                </a:solidFill>
-                <a:latin typeface="Calibri" panose="020F0502020204030204" pitchFamily="34" charset="0"/>
-                <a:ea typeface="Calibri" panose="020F0502020204030204" pitchFamily="34" charset="0"/>
-                <a:cs typeface="Calibri" panose="020F0502020204030204" pitchFamily="34" charset="0"/>
-              </a:rPr>
-              <a:t>– Challenges </a:t>
-            </a:r>
-            <a:endParaRPr lang="de-DE" sz="1200" dirty="0">
-              <a:solidFill>
-                <a:schemeClr val="bg1">
-                  <a:lumMod val="75000"/>
-                </a:schemeClr>
-              </a:solidFill>
-            </a:endParaRPr>
-          </a:p>
-        </p:txBody>
-      </p:sp>
-    </p:spTree>
-    <p:extLst>
-      <p:ext uri="{BB962C8B-B14F-4D97-AF65-F5344CB8AC3E}">
-        <p14:creationId xmlns:p14="http://schemas.microsoft.com/office/powerpoint/2010/main" val="4272230859"/>
-      </p:ext>
-    </p:extLst>
-  </p:cSld>
-  <p:clrMapOvr>
-    <a:masterClrMapping/>
-  </p:clrMapOvr>
-</p:sld>
-</file>
-
-<file path=ppt/slides/slide29.xml><?xml version="1.0" encoding="utf-8"?>
-<p:sld xmlns:a="http://schemas.openxmlformats.org/drawingml/2006/main" xmlns:r="http://schemas.openxmlformats.org/officeDocument/2006/relationships" xmlns:p="http://schemas.openxmlformats.org/presentationml/2006/main" show="0">
-  <p:cSld>
-    <p:spTree>
-      <p:nvGrpSpPr>
-        <p:cNvPr id="1" name=""/>
-        <p:cNvGrpSpPr/>
-        <p:nvPr/>
-      </p:nvGrpSpPr>
-      <p:grpSpPr>
-        <a:xfrm>
-          <a:off x="0" y="0"/>
-          <a:ext cx="0" cy="0"/>
-          <a:chOff x="0" y="0"/>
-          <a:chExt cx="0" cy="0"/>
-        </a:xfrm>
-      </p:grpSpPr>
-      <p:sp>
-        <p:nvSpPr>
-          <p:cNvPr id="2" name="Title 1">
-            <a:extLst>
-              <a:ext uri="{FF2B5EF4-FFF2-40B4-BE49-F238E27FC236}">
-                <a16:creationId xmlns:a16="http://schemas.microsoft.com/office/drawing/2014/main" id="{C538011C-A36C-7314-9F77-69BA64CC4D77}"/>
-              </a:ext>
-            </a:extLst>
-          </p:cNvPr>
-          <p:cNvSpPr>
-            <a:spLocks noGrp="1"/>
-          </p:cNvSpPr>
-          <p:nvPr>
-            <p:ph type="title"/>
-          </p:nvPr>
-        </p:nvSpPr>
-        <p:spPr/>
-        <p:txBody>
-          <a:bodyPr/>
-          <a:lstStyle/>
-          <a:p>
-            <a:endParaRPr lang="en-GB"/>
-          </a:p>
-        </p:txBody>
-      </p:sp>
-      <p:sp>
-        <p:nvSpPr>
-          <p:cNvPr id="3" name="Slide Number Placeholder 2">
-            <a:extLst>
-              <a:ext uri="{FF2B5EF4-FFF2-40B4-BE49-F238E27FC236}">
-                <a16:creationId xmlns:a16="http://schemas.microsoft.com/office/drawing/2014/main" id="{1FC8B083-DB47-93CD-5BB2-80D02FF34162}"/>
-              </a:ext>
-            </a:extLst>
-          </p:cNvPr>
-          <p:cNvSpPr>
-            <a:spLocks noGrp="1"/>
-          </p:cNvSpPr>
-          <p:nvPr>
-            <p:ph type="sldNum" sz="quarter" idx="12"/>
-          </p:nvPr>
-        </p:nvSpPr>
-        <p:spPr/>
-        <p:txBody>
-          <a:bodyPr/>
-          <a:lstStyle/>
-          <a:p>
-            <a:fld id="{FEE63D0E-FFEF-43D1-BE35-64C33AF422FD}" type="slidenum">
-              <a:rPr lang="de-DE" smtClean="0"/>
-              <a:t>29</a:t>
-            </a:fld>
-            <a:endParaRPr lang="de-DE"/>
-          </a:p>
-        </p:txBody>
-      </p:sp>
-      <p:pic>
-        <p:nvPicPr>
-          <p:cNvPr id="5" name="Picture 4" descr="A screenshot of a computer&#10;&#10;AI-generated content may be incorrect.">
-            <a:extLst>
-              <a:ext uri="{FF2B5EF4-FFF2-40B4-BE49-F238E27FC236}">
-                <a16:creationId xmlns:a16="http://schemas.microsoft.com/office/drawing/2014/main" id="{8F96D49E-1D91-057D-C5E7-873A38F9CD0B}"/>
-              </a:ext>
-            </a:extLst>
-          </p:cNvPr>
-          <p:cNvPicPr>
-            <a:picLocks noChangeAspect="1"/>
-          </p:cNvPicPr>
-          <p:nvPr/>
-        </p:nvPicPr>
-        <p:blipFill>
-          <a:blip r:embed="rId2">
-            <a:extLst>
-              <a:ext uri="{28A0092B-C50C-407E-A947-70E740481C1C}">
-                <a14:useLocalDpi xmlns:a14="http://schemas.microsoft.com/office/drawing/2010/main" val="0"/>
-              </a:ext>
-            </a:extLst>
-          </a:blip>
-          <a:srcRect l="2967" t="8222" r="4424" b="8765"/>
-          <a:stretch>
-            <a:fillRect/>
-          </a:stretch>
-        </p:blipFill>
-        <p:spPr>
-          <a:xfrm>
-            <a:off x="2222862" y="2163172"/>
-            <a:ext cx="7746275" cy="3905795"/>
-          </a:xfrm>
-          <a:prstGeom prst="rect">
-            <a:avLst/>
-          </a:prstGeom>
-        </p:spPr>
-      </p:pic>
-    </p:spTree>
-    <p:extLst>
-      <p:ext uri="{BB962C8B-B14F-4D97-AF65-F5344CB8AC3E}">
-        <p14:creationId xmlns:p14="http://schemas.microsoft.com/office/powerpoint/2010/main" val="3472974658"/>
       </p:ext>
     </p:extLst>
   </p:cSld>
